--- a/media/figstudio/fig03_roadmap/fig03_research_roadmap_editable.pptx
+++ b/media/figstudio/fig03_roadmap/fig03_research_roadmap_editable.pptx
@@ -502,7 +502,7 @@
           <a:lstStyle/>
           <a:p>
             <a:r>
-              <a:t>图 3 本文的研究路线（super_teaser S5 F01 → super_img2ppt 重建；两处连线按论文修正）</a:t>
+              <a:t>图 3 本文的研究路线（super_teaser 第二轮 F03，两级配色 → super_img2ppt 重建；两处连线按论文修正）</a:t>
             </a:r>
           </a:p>
         </p:txBody>
@@ -3524,20 +3524,20 @@
         </p:nvSpPr>
         <p:spPr>
           <a:xfrm>
-            <a:off x="214312" y="309562"/>
-            <a:ext cx="2468562" cy="1928812"/>
+            <a:off x="214312" y="301624"/>
+            <a:ext cx="2492374" cy="1944687"/>
           </a:xfrm>
           <a:prstGeom prst="roundRect">
             <a:avLst>
-              <a:gd name="adj" fmla="val 5761"/>
+              <a:gd name="adj" fmla="val 5714"/>
             </a:avLst>
           </a:prstGeom>
           <a:solidFill>
-            <a:srgbClr val="F3F5F6"/>
+            <a:srgbClr val="FFFFFF"/>
           </a:solidFill>
           <a:ln w="19843">
             <a:solidFill>
-              <a:srgbClr val="C9CFD4"/>
+              <a:srgbClr val="4A5158"/>
             </a:solidFill>
           </a:ln>
           <a:effectLst/>
@@ -3572,8 +3572,8 @@
         </p:nvSpPr>
         <p:spPr>
           <a:xfrm>
-            <a:off x="317499" y="380999"/>
-            <a:ext cx="2262187" cy="349249"/>
+            <a:off x="309562" y="412749"/>
+            <a:ext cx="2301874" cy="349249"/>
           </a:xfrm>
           <a:prstGeom prst="rect">
             <a:avLst/>
@@ -3599,7 +3599,7 @@
               </a:spcAft>
               <a:defRPr sz="1749" b="1" i="0" lang="zh-CN" dirty="0">
                 <a:solidFill>
-                  <a:srgbClr val="2B2F33"/>
+                  <a:srgbClr val="1F2326"/>
                 </a:solidFill>
                 <a:latin typeface="Noto Sans CJK SC"/>
                 <a:ea typeface="Noto Sans CJK SC"/>
@@ -3609,7 +3609,7 @@
             <a:r>
               <a:rPr sz="1749" b="1" i="0" lang="zh-CN" dirty="0">
                 <a:solidFill>
-                  <a:srgbClr val="2B2F33"/>
+                  <a:srgbClr val="1F2326"/>
                 </a:solidFill>
                 <a:latin typeface="Noto Sans CJK SC"/>
                 <a:ea typeface="Noto Sans CJK SC"/>
@@ -3629,7 +3629,7 @@
         <p:spPr>
           <a:xfrm>
             <a:off x="341312" y="769937"/>
-            <a:ext cx="2238374" cy="404812"/>
+            <a:ext cx="2246312" cy="404812"/>
           </a:xfrm>
           <a:prstGeom prst="roundRect">
             <a:avLst>
@@ -3639,9 +3639,9 @@
           <a:solidFill>
             <a:srgbClr val="FFFFFF"/>
           </a:solidFill>
-          <a:ln w="15874">
+          <a:ln w="11906">
             <a:solidFill>
-              <a:srgbClr val="B5BDC4"/>
+              <a:srgbClr val="C9CFD4"/>
             </a:solidFill>
           </a:ln>
           <a:effectLst/>
@@ -3677,7 +3677,7 @@
         <p:spPr>
           <a:xfrm>
             <a:off x="388937" y="793749"/>
-            <a:ext cx="2143124" cy="357187"/>
+            <a:ext cx="2151062" cy="357187"/>
           </a:xfrm>
           <a:prstGeom prst="rect">
             <a:avLst/>
@@ -3693,7 +3693,7 @@
           <a:p>
             <a:pPr algn="ctr" fontAlgn="base">
               <a:lnSpc>
-                <a:spcPts val="1953"/>
+                <a:spcPts val="2093"/>
               </a:lnSpc>
               <a:spcBef>
                 <a:spcPts val="0"/>
@@ -3701,9 +3701,9 @@
               <a:spcAft>
                 <a:spcPts val="0"/>
               </a:spcAft>
-              <a:defRPr sz="1335" b="1" i="0" lang="zh-CN" dirty="0">
-                <a:solidFill>
-                  <a:srgbClr val="2B2F33"/>
+              <a:defRPr sz="1437" b="0" i="0" lang="zh-CN" dirty="0">
+                <a:solidFill>
+                  <a:srgbClr val="3A4046"/>
                 </a:solidFill>
                 <a:latin typeface="DejaVu Sans"/>
                 <a:ea typeface="DejaVu Sans"/>
@@ -3711,9 +3711,9 @@
               </a:defRPr>
             </a:pPr>
             <a:r>
-              <a:rPr sz="1335" b="1" i="0" lang="zh-CN" dirty="0">
-                <a:solidFill>
-                  <a:srgbClr val="2B2F33"/>
+              <a:rPr sz="1437" b="0" i="0" lang="zh-CN" dirty="0">
+                <a:solidFill>
+                  <a:srgbClr val="3A4046"/>
                 </a:solidFill>
                 <a:latin typeface="DejaVu Sans"/>
                 <a:ea typeface="DejaVu Sans"/>
@@ -3722,9 +3722,9 @@
               <a:t>Ba–Y–Si–O </a:t>
             </a:r>
             <a:r>
-              <a:rPr sz="1335" b="1" i="0" lang="zh-CN" dirty="0">
-                <a:solidFill>
-                  <a:srgbClr val="2B2F33"/>
+              <a:rPr sz="1437" b="0" i="0" lang="zh-CN" dirty="0">
+                <a:solidFill>
+                  <a:srgbClr val="3A4046"/>
                 </a:solidFill>
                 <a:latin typeface="Noto Sans CJK SC"/>
                 <a:ea typeface="Noto Sans CJK SC"/>
@@ -3744,7 +3744,7 @@
         <p:spPr>
           <a:xfrm>
             <a:off x="341312" y="1238249"/>
-            <a:ext cx="2238374" cy="404812"/>
+            <a:ext cx="2246312" cy="404812"/>
           </a:xfrm>
           <a:prstGeom prst="roundRect">
             <a:avLst>
@@ -3754,9 +3754,9 @@
           <a:solidFill>
             <a:srgbClr val="FFFFFF"/>
           </a:solidFill>
-          <a:ln w="15874">
+          <a:ln w="11906">
             <a:solidFill>
-              <a:srgbClr val="B5BDC4"/>
+              <a:srgbClr val="C9CFD4"/>
             </a:solidFill>
           </a:ln>
           <a:effectLst/>
@@ -3791,8 +3791,8 @@
         </p:nvSpPr>
         <p:spPr>
           <a:xfrm>
-            <a:off x="388937" y="1262062"/>
-            <a:ext cx="2143124" cy="357187"/>
+            <a:off x="388937" y="1254124"/>
+            <a:ext cx="2151062" cy="357187"/>
           </a:xfrm>
           <a:prstGeom prst="rect">
             <a:avLst/>
@@ -3808,7 +3808,7 @@
           <a:p>
             <a:pPr algn="ctr" fontAlgn="base">
               <a:lnSpc>
-                <a:spcPts val="1953"/>
+                <a:spcPts val="2093"/>
               </a:lnSpc>
               <a:spcBef>
                 <a:spcPts val="0"/>
@@ -3816,9 +3816,9 @@
               <a:spcAft>
                 <a:spcPts val="0"/>
               </a:spcAft>
-              <a:defRPr sz="1335" b="1" i="0" lang="zh-CN" dirty="0">
-                <a:solidFill>
-                  <a:srgbClr val="2B2F33"/>
+              <a:defRPr sz="1437" b="0" i="0" lang="zh-CN" dirty="0">
+                <a:solidFill>
+                  <a:srgbClr val="3A4046"/>
                 </a:solidFill>
                 <a:latin typeface="DejaVu Sans"/>
                 <a:ea typeface="DejaVu Sans"/>
@@ -3826,9 +3826,9 @@
               </a:defRPr>
             </a:pPr>
             <a:r>
-              <a:rPr sz="1335" b="1" i="0" lang="zh-CN" dirty="0">
-                <a:solidFill>
-                  <a:srgbClr val="2B2F33"/>
+              <a:rPr sz="1437" b="0" i="0" lang="zh-CN" dirty="0">
+                <a:solidFill>
+                  <a:srgbClr val="3A4046"/>
                 </a:solidFill>
                 <a:latin typeface="DejaVu Sans"/>
                 <a:ea typeface="DejaVu Sans"/>
@@ -3837,9 +3837,9 @@
               <a:t>Ba–Zn–Si–O </a:t>
             </a:r>
             <a:r>
-              <a:rPr sz="1335" b="1" i="0" lang="zh-CN" dirty="0">
-                <a:solidFill>
-                  <a:srgbClr val="2B2F33"/>
+              <a:rPr sz="1437" b="0" i="0" lang="zh-CN" dirty="0">
+                <a:solidFill>
+                  <a:srgbClr val="3A4046"/>
                 </a:solidFill>
                 <a:latin typeface="Noto Sans CJK SC"/>
                 <a:ea typeface="Noto Sans CJK SC"/>
@@ -3858,8 +3858,8 @@
         </p:nvSpPr>
         <p:spPr>
           <a:xfrm>
-            <a:off x="341312" y="1706562"/>
-            <a:ext cx="2238374" cy="404812"/>
+            <a:off x="341312" y="1698624"/>
+            <a:ext cx="2246312" cy="404812"/>
           </a:xfrm>
           <a:prstGeom prst="roundRect">
             <a:avLst>
@@ -3869,9 +3869,9 @@
           <a:solidFill>
             <a:srgbClr val="FFFFFF"/>
           </a:solidFill>
-          <a:ln w="15874">
+          <a:ln w="11906">
             <a:solidFill>
-              <a:srgbClr val="B5BDC4"/>
+              <a:srgbClr val="C9CFD4"/>
             </a:solidFill>
           </a:ln>
           <a:effectLst/>
@@ -3906,8 +3906,8 @@
         </p:nvSpPr>
         <p:spPr>
           <a:xfrm>
-            <a:off x="388937" y="1730374"/>
-            <a:ext cx="2143124" cy="357187"/>
+            <a:off x="388937" y="1722437"/>
+            <a:ext cx="2151062" cy="357187"/>
           </a:xfrm>
           <a:prstGeom prst="rect">
             <a:avLst/>
@@ -3923,7 +3923,7 @@
           <a:p>
             <a:pPr algn="ctr" fontAlgn="base">
               <a:lnSpc>
-                <a:spcPts val="1953"/>
+                <a:spcPts val="2093"/>
               </a:lnSpc>
               <a:spcBef>
                 <a:spcPts val="0"/>
@@ -3931,9 +3931,9 @@
               <a:spcAft>
                 <a:spcPts val="0"/>
               </a:spcAft>
-              <a:defRPr sz="1335" b="1" i="0" lang="zh-CN" dirty="0">
-                <a:solidFill>
-                  <a:srgbClr val="2B2F33"/>
+              <a:defRPr sz="1437" b="0" i="0" lang="zh-CN" dirty="0">
+                <a:solidFill>
+                  <a:srgbClr val="3A4046"/>
                 </a:solidFill>
                 <a:latin typeface="DejaVu Sans"/>
                 <a:ea typeface="DejaVu Sans"/>
@@ -3941,9 +3941,9 @@
               </a:defRPr>
             </a:pPr>
             <a:r>
-              <a:rPr sz="1335" b="1" i="0" lang="zh-CN" dirty="0">
-                <a:solidFill>
-                  <a:srgbClr val="2B2F33"/>
+              <a:rPr sz="1437" b="0" i="0" lang="zh-CN" dirty="0">
+                <a:solidFill>
+                  <a:srgbClr val="3A4046"/>
                 </a:solidFill>
                 <a:latin typeface="DejaVu Sans"/>
                 <a:ea typeface="DejaVu Sans"/>
@@ -3952,9 +3952,9 @@
               <a:t>Y–Si–O </a:t>
             </a:r>
             <a:r>
-              <a:rPr sz="1335" b="1" i="0" lang="zh-CN" dirty="0">
-                <a:solidFill>
-                  <a:srgbClr val="2B2F33"/>
+              <a:rPr sz="1437" b="0" i="0" lang="zh-CN" dirty="0">
+                <a:solidFill>
+                  <a:srgbClr val="3A4046"/>
                 </a:solidFill>
                 <a:latin typeface="Noto Sans CJK SC"/>
                 <a:ea typeface="Noto Sans CJK SC"/>
@@ -3973,8 +3973,8 @@
         </p:nvSpPr>
         <p:spPr>
           <a:xfrm>
-            <a:off x="1381125" y="2254250"/>
-            <a:ext cx="127000" cy="381000"/>
+            <a:off x="1381125" y="2262187"/>
+            <a:ext cx="127000" cy="357187"/>
           </a:xfrm>
           <a:custGeom>
             <a:avLst/>
@@ -3983,24 +3983,24 @@
             <a:cxnLst/>
             <a:rect l="l" t="t" r="r" b="b"/>
             <a:pathLst>
-              <a:path w="16000" h="48000">
+              <a:path w="16000" h="45000">
                 <a:moveTo>
                   <a:pt x="10500" y="0"/>
                 </a:moveTo>
                 <a:lnTo>
-                  <a:pt x="10500" y="30000"/>
+                  <a:pt x="10500" y="27000"/>
                 </a:lnTo>
                 <a:lnTo>
-                  <a:pt x="16000" y="30000"/>
+                  <a:pt x="16000" y="27000"/>
                 </a:lnTo>
                 <a:lnTo>
-                  <a:pt x="8000" y="48000"/>
+                  <a:pt x="8000" y="45000"/>
                 </a:lnTo>
                 <a:lnTo>
-                  <a:pt x="0" y="30000"/>
+                  <a:pt x="0" y="27000"/>
                 </a:lnTo>
                 <a:lnTo>
-                  <a:pt x="5500" y="30000"/>
+                  <a:pt x="5500" y="27000"/>
                 </a:lnTo>
                 <a:lnTo>
                   <a:pt x="5500" y="0"/>
@@ -4047,20 +4047,20 @@
         </p:nvSpPr>
         <p:spPr>
           <a:xfrm>
-            <a:off x="238124" y="2666999"/>
-            <a:ext cx="2444749" cy="1936749"/>
+            <a:off x="222249" y="2635249"/>
+            <a:ext cx="2476499" cy="1984374"/>
           </a:xfrm>
           <a:prstGeom prst="roundRect">
             <a:avLst>
-              <a:gd name="adj" fmla="val 5737"/>
+              <a:gd name="adj" fmla="val 5600"/>
             </a:avLst>
           </a:prstGeom>
           <a:solidFill>
-            <a:srgbClr val="FBF3E3"/>
+            <a:srgbClr val="FFFFFF"/>
           </a:solidFill>
           <a:ln w="19843">
             <a:solidFill>
-              <a:srgbClr val="B8862B"/>
+              <a:srgbClr val="4A5158"/>
             </a:solidFill>
           </a:ln>
           <a:effectLst/>
@@ -4095,8 +4095,8 @@
         </p:nvSpPr>
         <p:spPr>
           <a:xfrm>
-            <a:off x="341312" y="2738437"/>
-            <a:ext cx="2238374" cy="349249"/>
+            <a:off x="317499" y="2746374"/>
+            <a:ext cx="2285999" cy="349249"/>
           </a:xfrm>
           <a:prstGeom prst="rect">
             <a:avLst/>
@@ -4122,7 +4122,7 @@
               </a:spcAft>
               <a:defRPr sz="1749" b="1" i="0" lang="zh-CN" dirty="0">
                 <a:solidFill>
-                  <a:srgbClr val="7A5A1C"/>
+                  <a:srgbClr val="1F2326"/>
                 </a:solidFill>
                 <a:latin typeface="Noto Sans CJK SC"/>
                 <a:ea typeface="Noto Sans CJK SC"/>
@@ -4132,7 +4132,7 @@
             <a:r>
               <a:rPr sz="1749" b="1" i="0" lang="zh-CN" dirty="0">
                 <a:solidFill>
-                  <a:srgbClr val="7A5A1C"/>
+                  <a:srgbClr val="1F2326"/>
                 </a:solidFill>
                 <a:latin typeface="Noto Sans CJK SC"/>
                 <a:ea typeface="Noto Sans CJK SC"/>
@@ -4151,20 +4151,20 @@
         </p:nvSpPr>
         <p:spPr>
           <a:xfrm>
-            <a:off x="357187" y="3135312"/>
-            <a:ext cx="2206624" cy="412749"/>
+            <a:off x="349249" y="3127374"/>
+            <a:ext cx="2222499" cy="404812"/>
           </a:xfrm>
           <a:prstGeom prst="roundRect">
             <a:avLst>
-              <a:gd name="adj" fmla="val 15384"/>
+              <a:gd name="adj" fmla="val 15686"/>
             </a:avLst>
           </a:prstGeom>
           <a:solidFill>
             <a:srgbClr val="FFFFFF"/>
           </a:solidFill>
-          <a:ln w="15874">
+          <a:ln w="11906">
             <a:solidFill>
-              <a:srgbClr val="B5BDC4"/>
+              <a:srgbClr val="C9CFD4"/>
             </a:solidFill>
           </a:ln>
           <a:effectLst/>
@@ -4199,8 +4199,8 @@
         </p:nvSpPr>
         <p:spPr>
           <a:xfrm>
-            <a:off x="404812" y="3159124"/>
-            <a:ext cx="2111374" cy="365124"/>
+            <a:off x="396874" y="3151187"/>
+            <a:ext cx="2127249" cy="357187"/>
           </a:xfrm>
           <a:prstGeom prst="rect">
             <a:avLst/>
@@ -4216,7 +4216,7 @@
           <a:p>
             <a:pPr algn="ctr" fontAlgn="base">
               <a:lnSpc>
-                <a:spcPts val="1953"/>
+                <a:spcPts val="2093"/>
               </a:lnSpc>
               <a:spcBef>
                 <a:spcPts val="0"/>
@@ -4224,9 +4224,9 @@
               <a:spcAft>
                 <a:spcPts val="0"/>
               </a:spcAft>
-              <a:defRPr sz="1335" b="1" i="0" lang="zh-CN" dirty="0">
-                <a:solidFill>
-                  <a:srgbClr val="2B2F33"/>
+              <a:defRPr sz="1437" b="0" i="0" lang="zh-CN" dirty="0">
+                <a:solidFill>
+                  <a:srgbClr val="3A4046"/>
                 </a:solidFill>
                 <a:latin typeface="Noto Sans CJK SC"/>
                 <a:ea typeface="Noto Sans CJK SC"/>
@@ -4234,9 +4234,9 @@
               </a:defRPr>
             </a:pPr>
             <a:r>
-              <a:rPr sz="1335" b="1" i="0" lang="zh-CN" dirty="0">
-                <a:solidFill>
-                  <a:srgbClr val="2B2F33"/>
+              <a:rPr sz="1437" b="0" i="0" lang="zh-CN" dirty="0">
+                <a:solidFill>
+                  <a:srgbClr val="3A4046"/>
                 </a:solidFill>
                 <a:latin typeface="Noto Sans CJK SC"/>
                 <a:ea typeface="Noto Sans CJK SC"/>
@@ -4255,20 +4255,20 @@
         </p:nvSpPr>
         <p:spPr>
           <a:xfrm>
-            <a:off x="357187" y="3603624"/>
-            <a:ext cx="2206624" cy="412749"/>
+            <a:off x="349249" y="3595687"/>
+            <a:ext cx="2222499" cy="404812"/>
           </a:xfrm>
           <a:prstGeom prst="roundRect">
             <a:avLst>
-              <a:gd name="adj" fmla="val 15384"/>
+              <a:gd name="adj" fmla="val 15686"/>
             </a:avLst>
           </a:prstGeom>
           <a:solidFill>
             <a:srgbClr val="FFFFFF"/>
           </a:solidFill>
-          <a:ln w="15874">
+          <a:ln w="11906">
             <a:solidFill>
-              <a:srgbClr val="B5BDC4"/>
+              <a:srgbClr val="C9CFD4"/>
             </a:solidFill>
           </a:ln>
           <a:effectLst/>
@@ -4303,8 +4303,8 @@
         </p:nvSpPr>
         <p:spPr>
           <a:xfrm>
-            <a:off x="404812" y="3619499"/>
-            <a:ext cx="2111374" cy="365124"/>
+            <a:off x="396874" y="3619499"/>
+            <a:ext cx="2127249" cy="357187"/>
           </a:xfrm>
           <a:prstGeom prst="rect">
             <a:avLst/>
@@ -4320,7 +4320,7 @@
           <a:p>
             <a:pPr algn="ctr" fontAlgn="base">
               <a:lnSpc>
-                <a:spcPts val="1953"/>
+                <a:spcPts val="2093"/>
               </a:lnSpc>
               <a:spcBef>
                 <a:spcPts val="0"/>
@@ -4328,9 +4328,9 @@
               <a:spcAft>
                 <a:spcPts val="0"/>
               </a:spcAft>
-              <a:defRPr sz="1335" b="1" i="0" lang="zh-CN" dirty="0">
-                <a:solidFill>
-                  <a:srgbClr val="2B2F33"/>
+              <a:defRPr sz="1437" b="0" i="0" lang="zh-CN" dirty="0">
+                <a:solidFill>
+                  <a:srgbClr val="3A4046"/>
                 </a:solidFill>
                 <a:latin typeface="DejaVu Sans"/>
                 <a:ea typeface="DejaVu Sans"/>
@@ -4338,9 +4338,9 @@
               </a:defRPr>
             </a:pPr>
             <a:r>
-              <a:rPr sz="1335" b="1" i="0" lang="zh-CN" dirty="0">
-                <a:solidFill>
-                  <a:srgbClr val="2B2F33"/>
+              <a:rPr sz="1437" b="0" i="0" lang="zh-CN" dirty="0">
+                <a:solidFill>
+                  <a:srgbClr val="3A4046"/>
                 </a:solidFill>
                 <a:latin typeface="DejaVu Sans"/>
                 <a:ea typeface="DejaVu Sans"/>
@@ -4349,9 +4349,9 @@
               <a:t>Zn–Y–</a:t>
             </a:r>
             <a:r>
-              <a:rPr sz="1335" b="1" i="0" lang="zh-CN" dirty="0">
-                <a:solidFill>
-                  <a:srgbClr val="2B2F33"/>
+              <a:rPr sz="1437" b="0" i="0" lang="zh-CN" dirty="0">
+                <a:solidFill>
+                  <a:srgbClr val="3A4046"/>
                 </a:solidFill>
                 <a:latin typeface="Noto Sans CJK SC"/>
                 <a:ea typeface="Noto Sans CJK SC"/>
@@ -4370,20 +4370,20 @@
         </p:nvSpPr>
         <p:spPr>
           <a:xfrm>
-            <a:off x="357187" y="4063999"/>
-            <a:ext cx="2206624" cy="412749"/>
+            <a:off x="349249" y="4063999"/>
+            <a:ext cx="2222499" cy="404812"/>
           </a:xfrm>
           <a:prstGeom prst="roundRect">
             <a:avLst>
-              <a:gd name="adj" fmla="val 15384"/>
+              <a:gd name="adj" fmla="val 15686"/>
             </a:avLst>
           </a:prstGeom>
           <a:solidFill>
             <a:srgbClr val="FFFFFF"/>
           </a:solidFill>
-          <a:ln w="15874">
+          <a:ln w="11906">
             <a:solidFill>
-              <a:srgbClr val="B5BDC4"/>
+              <a:srgbClr val="C9CFD4"/>
             </a:solidFill>
           </a:ln>
           <a:effectLst/>
@@ -4418,8 +4418,8 @@
         </p:nvSpPr>
         <p:spPr>
           <a:xfrm>
-            <a:off x="404812" y="4087812"/>
-            <a:ext cx="2111374" cy="365124"/>
+            <a:off x="396874" y="4087812"/>
+            <a:ext cx="2127249" cy="357187"/>
           </a:xfrm>
           <a:prstGeom prst="rect">
             <a:avLst/>
@@ -4435,7 +4435,7 @@
           <a:p>
             <a:pPr algn="ctr" fontAlgn="base">
               <a:lnSpc>
-                <a:spcPts val="1953"/>
+                <a:spcPts val="2093"/>
               </a:lnSpc>
               <a:spcBef>
                 <a:spcPts val="0"/>
@@ -4443,9 +4443,9 @@
               <a:spcAft>
                 <a:spcPts val="0"/>
               </a:spcAft>
-              <a:defRPr sz="1335" b="1" i="0" lang="zh-CN" dirty="0">
-                <a:solidFill>
-                  <a:srgbClr val="2B2F33"/>
+              <a:defRPr sz="1437" b="0" i="0" lang="zh-CN" dirty="0">
+                <a:solidFill>
+                  <a:srgbClr val="3A4046"/>
                 </a:solidFill>
                 <a:latin typeface="Noto Sans CJK SC"/>
                 <a:ea typeface="Noto Sans CJK SC"/>
@@ -4453,9 +4453,9 @@
               </a:defRPr>
             </a:pPr>
             <a:r>
-              <a:rPr sz="1335" b="1" i="0" lang="zh-CN" dirty="0">
-                <a:solidFill>
-                  <a:srgbClr val="2B2F33"/>
+              <a:rPr sz="1437" b="0" i="0" lang="zh-CN" dirty="0">
+                <a:solidFill>
+                  <a:srgbClr val="3A4046"/>
                 </a:solidFill>
                 <a:latin typeface="Noto Sans CJK SC"/>
                 <a:ea typeface="Noto Sans CJK SC"/>
@@ -4474,8 +4474,8 @@
         </p:nvSpPr>
         <p:spPr>
           <a:xfrm>
-            <a:off x="1381125" y="4619625"/>
-            <a:ext cx="127000" cy="388937"/>
+            <a:off x="1381125" y="4635500"/>
+            <a:ext cx="127000" cy="333375"/>
           </a:xfrm>
           <a:custGeom>
             <a:avLst/>
@@ -4484,24 +4484,24 @@
             <a:cxnLst/>
             <a:rect l="l" t="t" r="r" b="b"/>
             <a:pathLst>
-              <a:path w="16000" h="49000">
+              <a:path w="16000" h="42000">
                 <a:moveTo>
                   <a:pt x="10500" y="0"/>
                 </a:moveTo>
                 <a:lnTo>
-                  <a:pt x="10500" y="31000"/>
+                  <a:pt x="10500" y="24000"/>
                 </a:lnTo>
                 <a:lnTo>
-                  <a:pt x="16000" y="31000"/>
+                  <a:pt x="16000" y="24000"/>
                 </a:lnTo>
                 <a:lnTo>
-                  <a:pt x="8000" y="49000"/>
+                  <a:pt x="8000" y="42000"/>
                 </a:lnTo>
                 <a:lnTo>
-                  <a:pt x="0" y="31000"/>
+                  <a:pt x="0" y="24000"/>
                 </a:lnTo>
                 <a:lnTo>
-                  <a:pt x="5500" y="31000"/>
+                  <a:pt x="5500" y="24000"/>
                 </a:lnTo>
                 <a:lnTo>
                   <a:pt x="5500" y="0"/>
@@ -4548,20 +4548,20 @@
         </p:nvSpPr>
         <p:spPr>
           <a:xfrm>
-            <a:off x="246062" y="5040312"/>
-            <a:ext cx="2420937" cy="2039937"/>
+            <a:off x="230187" y="4984749"/>
+            <a:ext cx="2468562" cy="2095499"/>
           </a:xfrm>
           <a:prstGeom prst="roundRect">
             <a:avLst>
-              <a:gd name="adj" fmla="val 5447"/>
+              <a:gd name="adj" fmla="val 5303"/>
             </a:avLst>
           </a:prstGeom>
           <a:solidFill>
-            <a:srgbClr val="F3F5F6"/>
+            <a:srgbClr val="FFFFFF"/>
           </a:solidFill>
           <a:ln w="19843">
             <a:solidFill>
-              <a:srgbClr val="C9CFD4"/>
+              <a:srgbClr val="4A5158"/>
             </a:solidFill>
           </a:ln>
           <a:effectLst/>
@@ -4596,7 +4596,7 @@
         </p:nvSpPr>
         <p:spPr>
           <a:xfrm>
-            <a:off x="317499" y="5127624"/>
+            <a:off x="325437" y="5095874"/>
             <a:ext cx="2278062" cy="349249"/>
           </a:xfrm>
           <a:prstGeom prst="rect">
@@ -4623,7 +4623,7 @@
               </a:spcAft>
               <a:defRPr sz="1749" b="1" i="0" lang="zh-CN" dirty="0">
                 <a:solidFill>
-                  <a:srgbClr val="2B2F33"/>
+                  <a:srgbClr val="1F2326"/>
                 </a:solidFill>
                 <a:latin typeface="Noto Sans CJK SC"/>
                 <a:ea typeface="Noto Sans CJK SC"/>
@@ -4633,7 +4633,7 @@
             <a:r>
               <a:rPr sz="1749" b="1" i="0" lang="zh-CN" dirty="0">
                 <a:solidFill>
-                  <a:srgbClr val="2B2F33"/>
+                  <a:srgbClr val="1F2326"/>
                 </a:solidFill>
                 <a:latin typeface="Noto Sans CJK SC"/>
                 <a:ea typeface="Noto Sans CJK SC"/>
@@ -4652,112 +4652,8 @@
         </p:nvSpPr>
         <p:spPr>
           <a:xfrm>
-            <a:off x="357187" y="5540374"/>
-            <a:ext cx="2206624" cy="412749"/>
-          </a:xfrm>
-          <a:prstGeom prst="roundRect">
-            <a:avLst>
-              <a:gd name="adj" fmla="val 15384"/>
-            </a:avLst>
-          </a:prstGeom>
-          <a:solidFill>
-            <a:srgbClr val="FFFFFF"/>
-          </a:solidFill>
-          <a:ln w="15874">
-            <a:solidFill>
-              <a:srgbClr val="B5BDC4"/>
-            </a:solidFill>
-          </a:ln>
-          <a:effectLst/>
-        </p:spPr>
-        <p:style>
-          <a:lnRef idx="1">
-            <a:schemeClr val="accent1"/>
-          </a:lnRef>
-          <a:fillRef idx="3">
-            <a:schemeClr val="accent1"/>
-          </a:fillRef>
-          <a:effectRef idx="0">
-            <a:schemeClr val="accent1"/>
-          </a:effectRef>
-          <a:fontRef idx="minor">
-            <a:schemeClr val="lt1"/>
-          </a:fontRef>
-        </p:style>
-        <p:txBody>
-          <a:bodyPr rtlCol="0" anchor="ctr"/>
-          <a:lstStyle/>
-          <a:p>
-            <a:pPr algn="ctr"/>
-          </a:p>
-        </p:txBody>
-      </p:sp>
-      <p:sp>
-        <p:nvSpPr>
-          <p:cNvPr id="23" name="c3_k0_t" descr="Editable text; source id c3_k0_t"/>
-          <p:cNvSpPr txBox="1"/>
-          <p:nvPr/>
-        </p:nvSpPr>
-        <p:spPr>
-          <a:xfrm>
-            <a:off x="404812" y="5564187"/>
-            <a:ext cx="2111374" cy="365124"/>
-          </a:xfrm>
-          <a:prstGeom prst="rect">
-            <a:avLst/>
-          </a:prstGeom>
-          <a:noFill/>
-          <a:effectLst/>
-        </p:spPr>
-        <p:txBody>
-          <a:bodyPr wrap="none" anchor="ctr" tIns="0" rIns="0" bIns="0" lIns="0" anchorCtr="0" vertOverflow="overflow">
-            <a:noAutofit/>
-          </a:bodyPr>
-          <a:lstStyle/>
-          <a:p>
-            <a:pPr algn="ctr" fontAlgn="base">
-              <a:lnSpc>
-                <a:spcPts val="1578"/>
-              </a:lnSpc>
-              <a:spcBef>
-                <a:spcPts val="0"/>
-              </a:spcBef>
-              <a:spcAft>
-                <a:spcPts val="0"/>
-              </a:spcAft>
-              <a:defRPr sz="1335" b="1" i="0" lang="zh-CN" dirty="0">
-                <a:solidFill>
-                  <a:srgbClr val="2B2F33"/>
-                </a:solidFill>
-                <a:latin typeface="DejaVu Sans"/>
-                <a:ea typeface="DejaVu Sans"/>
-                <a:cs typeface="DejaVu Sans"/>
-              </a:defRPr>
-            </a:pPr>
-            <a:r>
-              <a:rPr sz="1335" b="1" i="0" lang="zh-CN" dirty="0">
-                <a:solidFill>
-                  <a:srgbClr val="2B2F33"/>
-                </a:solidFill>
-                <a:latin typeface="DejaVu Sans"/>
-                <a:ea typeface="DejaVu Sans"/>
-                <a:cs typeface="DejaVu Sans"/>
-              </a:rPr>
-              <a:t>BaCO3 + Y2O3 + SiO2</a:t>
-            </a:r>
-          </a:p>
-        </p:txBody>
-      </p:sp>
-      <p:sp>
-        <p:nvSpPr>
-          <p:cNvPr id="24" name="c3_k1" descr="Editable shape; source id c3_k1"/>
-          <p:cNvSpPr/>
-          <p:nvPr/>
-        </p:nvSpPr>
-        <p:spPr>
-          <a:xfrm>
-            <a:off x="357187" y="6008687"/>
-            <a:ext cx="2206624" cy="420687"/>
+            <a:off x="357187" y="5516562"/>
+            <a:ext cx="2214562" cy="420687"/>
           </a:xfrm>
           <a:prstGeom prst="roundRect">
             <a:avLst>
@@ -4767,9 +4663,9 @@
           <a:solidFill>
             <a:srgbClr val="FFFFFF"/>
           </a:solidFill>
-          <a:ln w="15874">
+          <a:ln w="11906">
             <a:solidFill>
-              <a:srgbClr val="B5BDC4"/>
+              <a:srgbClr val="C9CFD4"/>
             </a:solidFill>
           </a:ln>
           <a:effectLst/>
@@ -4798,14 +4694,14 @@
       </p:sp>
       <p:sp>
         <p:nvSpPr>
-          <p:cNvPr id="25" name="c3_k1_t" descr="Editable text; source id c3_k1_t"/>
+          <p:cNvPr id="23" name="c3_k0_t" descr="Editable text; source id c3_k0_t"/>
           <p:cNvSpPr txBox="1"/>
           <p:nvPr/>
         </p:nvSpPr>
         <p:spPr>
           <a:xfrm>
-            <a:off x="404812" y="6032499"/>
-            <a:ext cx="2111374" cy="373062"/>
+            <a:off x="404812" y="5540374"/>
+            <a:ext cx="2119312" cy="373062"/>
           </a:xfrm>
           <a:prstGeom prst="rect">
             <a:avLst/>
@@ -4821,7 +4717,7 @@
           <a:p>
             <a:pPr algn="ctr" fontAlgn="base">
               <a:lnSpc>
-                <a:spcPts val="1578"/>
+                <a:spcPts val="1687"/>
               </a:lnSpc>
               <a:spcBef>
                 <a:spcPts val="0"/>
@@ -4829,9 +4725,9 @@
               <a:spcAft>
                 <a:spcPts val="0"/>
               </a:spcAft>
-              <a:defRPr sz="1335" b="1" i="0" lang="zh-CN" dirty="0">
-                <a:solidFill>
-                  <a:srgbClr val="2B2F33"/>
+              <a:defRPr sz="1437" b="0" i="0" lang="zh-CN" dirty="0">
+                <a:solidFill>
+                  <a:srgbClr val="3A4046"/>
                 </a:solidFill>
                 <a:latin typeface="DejaVu Sans"/>
                 <a:ea typeface="DejaVu Sans"/>
@@ -4839,29 +4735,29 @@
               </a:defRPr>
             </a:pPr>
             <a:r>
-              <a:rPr sz="1335" b="1" i="0" lang="zh-CN" dirty="0">
-                <a:solidFill>
-                  <a:srgbClr val="2B2F33"/>
+              <a:rPr sz="1437" b="0" i="0" lang="zh-CN" dirty="0">
+                <a:solidFill>
+                  <a:srgbClr val="3A4046"/>
                 </a:solidFill>
                 <a:latin typeface="DejaVu Sans"/>
                 <a:ea typeface="DejaVu Sans"/>
                 <a:cs typeface="DejaVu Sans"/>
               </a:rPr>
-              <a:t>ZnO / MgO / Co3O4</a:t>
-            </a:r>
-          </a:p>
-        </p:txBody>
-      </p:sp>
-      <p:sp>
-        <p:nvSpPr>
-          <p:cNvPr id="26" name="c3_tag" descr="Editable shape; source id c3_tag"/>
+              <a:t>BaCO3 + Y2O3 + SiO2</a:t>
+            </a:r>
+          </a:p>
+        </p:txBody>
+      </p:sp>
+      <p:sp>
+        <p:nvSpPr>
+          <p:cNvPr id="24" name="c3_k1" descr="Editable shape; source id c3_k1"/>
           <p:cNvSpPr/>
           <p:nvPr/>
         </p:nvSpPr>
         <p:spPr>
           <a:xfrm>
-            <a:off x="357187" y="6524624"/>
-            <a:ext cx="2206624" cy="420687"/>
+            <a:off x="357187" y="6000749"/>
+            <a:ext cx="2214562" cy="420687"/>
           </a:xfrm>
           <a:prstGeom prst="roundRect">
             <a:avLst>
@@ -4869,11 +4765,11 @@
             </a:avLst>
           </a:prstGeom>
           <a:solidFill>
-            <a:srgbClr val="F6E7C6"/>
+            <a:srgbClr val="FFFFFF"/>
           </a:solidFill>
-          <a:ln w="15874">
+          <a:ln w="11906">
             <a:solidFill>
-              <a:srgbClr val="B8862B"/>
+              <a:srgbClr val="C9CFD4"/>
             </a:solidFill>
           </a:ln>
           <a:effectLst/>
@@ -4902,14 +4798,14 @@
       </p:sp>
       <p:sp>
         <p:nvSpPr>
-          <p:cNvPr id="27" name="c3_tag_t" descr="Editable text; source id c3_tag_t"/>
+          <p:cNvPr id="25" name="c3_k1_t" descr="Editable text; source id c3_k1_t"/>
           <p:cNvSpPr txBox="1"/>
           <p:nvPr/>
         </p:nvSpPr>
         <p:spPr>
           <a:xfrm>
-            <a:off x="404812" y="6548437"/>
-            <a:ext cx="2111374" cy="373062"/>
+            <a:off x="404812" y="6024562"/>
+            <a:ext cx="2119312" cy="373062"/>
           </a:xfrm>
           <a:prstGeom prst="rect">
             <a:avLst/>
@@ -4925,7 +4821,7 @@
           <a:p>
             <a:pPr algn="ctr" fontAlgn="base">
               <a:lnSpc>
-                <a:spcPts val="1953"/>
+                <a:spcPts val="1687"/>
               </a:lnSpc>
               <a:spcBef>
                 <a:spcPts val="0"/>
@@ -4933,9 +4829,113 @@
               <a:spcAft>
                 <a:spcPts val="0"/>
               </a:spcAft>
-              <a:defRPr sz="1335" b="1" i="0" lang="zh-CN" dirty="0">
-                <a:solidFill>
-                  <a:srgbClr val="7A5A1C"/>
+              <a:defRPr sz="1437" b="0" i="0" lang="zh-CN" dirty="0">
+                <a:solidFill>
+                  <a:srgbClr val="3A4046"/>
+                </a:solidFill>
+                <a:latin typeface="DejaVu Sans"/>
+                <a:ea typeface="DejaVu Sans"/>
+                <a:cs typeface="DejaVu Sans"/>
+              </a:defRPr>
+            </a:pPr>
+            <a:r>
+              <a:rPr sz="1437" b="0" i="0" lang="zh-CN" dirty="0">
+                <a:solidFill>
+                  <a:srgbClr val="3A4046"/>
+                </a:solidFill>
+                <a:latin typeface="DejaVu Sans"/>
+                <a:ea typeface="DejaVu Sans"/>
+                <a:cs typeface="DejaVu Sans"/>
+              </a:rPr>
+              <a:t>ZnO / MgO / Co3O4</a:t>
+            </a:r>
+          </a:p>
+        </p:txBody>
+      </p:sp>
+      <p:sp>
+        <p:nvSpPr>
+          <p:cNvPr id="26" name="c3_tag" descr="Editable shape; source id c3_tag"/>
+          <p:cNvSpPr/>
+          <p:nvPr/>
+        </p:nvSpPr>
+        <p:spPr>
+          <a:xfrm>
+            <a:off x="357187" y="6500812"/>
+            <a:ext cx="2214562" cy="428624"/>
+          </a:xfrm>
+          <a:prstGeom prst="roundRect">
+            <a:avLst>
+              <a:gd name="adj" fmla="val 14814"/>
+            </a:avLst>
+          </a:prstGeom>
+          <a:solidFill>
+            <a:srgbClr val="F3F5F6"/>
+          </a:solidFill>
+          <a:ln w="11906">
+            <a:solidFill>
+              <a:srgbClr val="C9CFD4"/>
+            </a:solidFill>
+          </a:ln>
+          <a:effectLst/>
+        </p:spPr>
+        <p:style>
+          <a:lnRef idx="1">
+            <a:schemeClr val="accent1"/>
+          </a:lnRef>
+          <a:fillRef idx="3">
+            <a:schemeClr val="accent1"/>
+          </a:fillRef>
+          <a:effectRef idx="0">
+            <a:schemeClr val="accent1"/>
+          </a:effectRef>
+          <a:fontRef idx="minor">
+            <a:schemeClr val="lt1"/>
+          </a:fontRef>
+        </p:style>
+        <p:txBody>
+          <a:bodyPr rtlCol="0" anchor="ctr"/>
+          <a:lstStyle/>
+          <a:p>
+            <a:pPr algn="ctr"/>
+          </a:p>
+        </p:txBody>
+      </p:sp>
+      <p:sp>
+        <p:nvSpPr>
+          <p:cNvPr id="27" name="c3_tag_t" descr="Editable text; source id c3_tag_t"/>
+          <p:cNvSpPr txBox="1"/>
+          <p:nvPr/>
+        </p:nvSpPr>
+        <p:spPr>
+          <a:xfrm>
+            <a:off x="404812" y="6524624"/>
+            <a:ext cx="2119312" cy="380999"/>
+          </a:xfrm>
+          <a:prstGeom prst="rect">
+            <a:avLst/>
+          </a:prstGeom>
+          <a:noFill/>
+          <a:effectLst/>
+        </p:spPr>
+        <p:txBody>
+          <a:bodyPr wrap="none" anchor="ctr" tIns="0" rIns="0" bIns="0" lIns="0" anchorCtr="0" vertOverflow="overflow">
+            <a:noAutofit/>
+          </a:bodyPr>
+          <a:lstStyle/>
+          <a:p>
+            <a:pPr algn="ctr" fontAlgn="base">
+              <a:lnSpc>
+                <a:spcPts val="2093"/>
+              </a:lnSpc>
+              <a:spcBef>
+                <a:spcPts val="0"/>
+              </a:spcBef>
+              <a:spcAft>
+                <a:spcPts val="0"/>
+              </a:spcAft>
+              <a:defRPr sz="1437" b="0" i="0" lang="zh-CN" dirty="0">
+                <a:solidFill>
+                  <a:srgbClr val="5A6470"/>
                 </a:solidFill>
                 <a:latin typeface="Noto Sans CJK SC"/>
                 <a:ea typeface="Noto Sans CJK SC"/>
@@ -4943,9 +4943,9 @@
               </a:defRPr>
             </a:pPr>
             <a:r>
-              <a:rPr sz="1335" b="1" i="0" lang="zh-CN" dirty="0">
-                <a:solidFill>
-                  <a:srgbClr val="7A5A1C"/>
+              <a:rPr sz="1437" b="0" i="0" lang="zh-CN" dirty="0">
+                <a:solidFill>
+                  <a:srgbClr val="5A6470"/>
                 </a:solidFill>
                 <a:latin typeface="Noto Sans CJK SC"/>
                 <a:ea typeface="Noto Sans CJK SC"/>
@@ -4954,9 +4954,9 @@
               <a:t>模型排序</a:t>
             </a:r>
             <a:r>
-              <a:rPr sz="1335" b="1" i="0" lang="zh-CN" dirty="0">
-                <a:solidFill>
-                  <a:srgbClr val="7A5A1C"/>
+              <a:rPr sz="1437" b="0" i="0" lang="zh-CN" dirty="0">
+                <a:solidFill>
+                  <a:srgbClr val="5A6470"/>
                 </a:solidFill>
                 <a:latin typeface="DejaVu Sans"/>
                 <a:ea typeface="DejaVu Sans"/>
@@ -4965,9 +4965,9 @@
               <a:t> ≠ </a:t>
             </a:r>
             <a:r>
-              <a:rPr sz="1335" b="1" i="0" lang="zh-CN" dirty="0">
-                <a:solidFill>
-                  <a:srgbClr val="7A5A1C"/>
+              <a:rPr sz="1437" b="0" i="0" lang="zh-CN" dirty="0">
+                <a:solidFill>
+                  <a:srgbClr val="5A6470"/>
                 </a:solidFill>
                 <a:latin typeface="Noto Sans CJK SC"/>
                 <a:ea typeface="Noto Sans CJK SC"/>
@@ -4986,8 +4986,8 @@
         </p:nvCxnSpPr>
         <p:spPr>
           <a:xfrm>
-            <a:off x="2682874" y="6056312"/>
-            <a:ext cx="492125" cy="0"/>
+            <a:off x="2714624" y="6032499"/>
+            <a:ext cx="460375" cy="0"/>
           </a:xfrm>
           <a:prstGeom prst="line">
             <a:avLst/>
@@ -5022,8 +5022,8 @@
         </p:nvCxnSpPr>
         <p:spPr>
           <a:xfrm>
-            <a:off x="3174999" y="3643312"/>
-            <a:ext cx="0" cy="2413000"/>
+            <a:off x="3174999" y="3579812"/>
+            <a:ext cx="0" cy="2452687"/>
           </a:xfrm>
           <a:prstGeom prst="line">
             <a:avLst/>
@@ -5058,8 +5058,8 @@
         </p:nvSpPr>
         <p:spPr>
           <a:xfrm>
-            <a:off x="3175000" y="3579812"/>
-            <a:ext cx="428625" cy="127000"/>
+            <a:off x="3175000" y="3516312"/>
+            <a:ext cx="388937" cy="127000"/>
           </a:xfrm>
           <a:custGeom>
             <a:avLst/>
@@ -5068,24 +5068,24 @@
             <a:cxnLst/>
             <a:rect l="l" t="t" r="r" b="b"/>
             <a:pathLst>
-              <a:path w="54000" h="16000">
+              <a:path w="49000" h="16000">
                 <a:moveTo>
                   <a:pt x="0" y="5500"/>
                 </a:moveTo>
                 <a:lnTo>
-                  <a:pt x="36000" y="5500"/>
+                  <a:pt x="31000" y="5500"/>
                 </a:lnTo>
                 <a:lnTo>
-                  <a:pt x="36000" y="0"/>
+                  <a:pt x="31000" y="0"/>
                 </a:lnTo>
                 <a:lnTo>
-                  <a:pt x="54000" y="8000"/>
+                  <a:pt x="49000" y="8000"/>
                 </a:lnTo>
                 <a:lnTo>
-                  <a:pt x="36000" y="16000"/>
+                  <a:pt x="31000" y="16000"/>
                 </a:lnTo>
                 <a:lnTo>
-                  <a:pt x="36000" y="10500"/>
+                  <a:pt x="31000" y="10500"/>
                 </a:lnTo>
                 <a:lnTo>
                   <a:pt x="0" y="10500"/>
@@ -5132,8 +5132,8 @@
         </p:nvSpPr>
         <p:spPr>
           <a:xfrm>
-            <a:off x="3175000" y="5540375"/>
-            <a:ext cx="428625" cy="127000"/>
+            <a:off x="3175000" y="5516562"/>
+            <a:ext cx="381000" cy="127000"/>
           </a:xfrm>
           <a:custGeom>
             <a:avLst/>
@@ -5142,24 +5142,24 @@
             <a:cxnLst/>
             <a:rect l="l" t="t" r="r" b="b"/>
             <a:pathLst>
-              <a:path w="54000" h="16000">
+              <a:path w="48000" h="16000">
                 <a:moveTo>
                   <a:pt x="0" y="5500"/>
                 </a:moveTo>
                 <a:lnTo>
-                  <a:pt x="36000" y="5500"/>
+                  <a:pt x="30000" y="5500"/>
                 </a:lnTo>
                 <a:lnTo>
-                  <a:pt x="36000" y="0"/>
+                  <a:pt x="30000" y="0"/>
                 </a:lnTo>
                 <a:lnTo>
-                  <a:pt x="54000" y="8000"/>
+                  <a:pt x="48000" y="8000"/>
                 </a:lnTo>
                 <a:lnTo>
-                  <a:pt x="36000" y="16000"/>
+                  <a:pt x="30000" y="16000"/>
                 </a:lnTo>
                 <a:lnTo>
-                  <a:pt x="36000" y="10500"/>
+                  <a:pt x="30000" y="10500"/>
                 </a:lnTo>
                 <a:lnTo>
                   <a:pt x="0" y="10500"/>
@@ -5206,20 +5206,20 @@
         </p:nvSpPr>
         <p:spPr>
           <a:xfrm>
-            <a:off x="3619499" y="3127374"/>
-            <a:ext cx="6000749" cy="1031874"/>
+            <a:off x="3579812" y="3000374"/>
+            <a:ext cx="6016624" cy="1166812"/>
           </a:xfrm>
           <a:prstGeom prst="roundRect">
             <a:avLst>
-              <a:gd name="adj" fmla="val 10769"/>
+              <a:gd name="adj" fmla="val 9523"/>
             </a:avLst>
           </a:prstGeom>
           <a:solidFill>
-            <a:srgbClr val="E4F0F1"/>
+            <a:srgbClr val="FFFFFF"/>
           </a:solidFill>
           <a:ln w="19843">
             <a:solidFill>
-              <a:srgbClr val="1F6F78"/>
+              <a:srgbClr val="4A5158"/>
             </a:solidFill>
           </a:ln>
           <a:effectLst/>
@@ -5254,8 +5254,8 @@
         </p:nvSpPr>
         <p:spPr>
           <a:xfrm>
-            <a:off x="3778249" y="3174999"/>
-            <a:ext cx="2381249" cy="349249"/>
+            <a:off x="3738562" y="3063874"/>
+            <a:ext cx="2539999" cy="349249"/>
           </a:xfrm>
           <a:prstGeom prst="rect">
             <a:avLst/>
@@ -5281,7 +5281,7 @@
               </a:spcAft>
               <a:defRPr sz="1749" b="1" i="0" lang="zh-CN" dirty="0">
                 <a:solidFill>
-                  <a:srgbClr val="155459"/>
+                  <a:srgbClr val="1F2326"/>
                 </a:solidFill>
                 <a:latin typeface="Noto Sans CJK SC"/>
                 <a:ea typeface="Noto Sans CJK SC"/>
@@ -5291,7 +5291,7 @@
             <a:r>
               <a:rPr sz="1749" b="1" i="0" lang="zh-CN" dirty="0">
                 <a:solidFill>
-                  <a:srgbClr val="155459"/>
+                  <a:srgbClr val="1F2326"/>
                 </a:solidFill>
                 <a:latin typeface="Noto Sans CJK SC"/>
                 <a:ea typeface="Noto Sans CJK SC"/>
@@ -5310,20 +5310,20 @@
         </p:nvSpPr>
         <p:spPr>
           <a:xfrm>
-            <a:off x="3770312" y="3563937"/>
-            <a:ext cx="1182687" cy="468312"/>
+            <a:off x="3746499" y="3508374"/>
+            <a:ext cx="1198562" cy="484187"/>
           </a:xfrm>
           <a:prstGeom prst="roundRect">
             <a:avLst>
-              <a:gd name="adj" fmla="val 13559"/>
+              <a:gd name="adj" fmla="val 13114"/>
             </a:avLst>
           </a:prstGeom>
           <a:solidFill>
             <a:srgbClr val="FFFFFF"/>
           </a:solidFill>
-          <a:ln w="15874">
+          <a:ln w="11906">
             <a:solidFill>
-              <a:srgbClr val="9AA5AD"/>
+              <a:srgbClr val="C9CFD4"/>
             </a:solidFill>
           </a:ln>
           <a:effectLst/>
@@ -5358,8 +5358,8 @@
         </p:nvSpPr>
         <p:spPr>
           <a:xfrm>
-            <a:off x="3817937" y="3587749"/>
-            <a:ext cx="1087437" cy="420687"/>
+            <a:off x="3794124" y="3532187"/>
+            <a:ext cx="1103312" cy="436562"/>
           </a:xfrm>
           <a:prstGeom prst="rect">
             <a:avLst/>
@@ -5375,7 +5375,7 @@
           <a:p>
             <a:pPr algn="ctr" fontAlgn="base">
               <a:lnSpc>
-                <a:spcPts val="2093"/>
+                <a:spcPts val="2015"/>
               </a:lnSpc>
               <a:spcBef>
                 <a:spcPts val="0"/>
@@ -5383,9 +5383,9 @@
               <a:spcAft>
                 <a:spcPts val="0"/>
               </a:spcAft>
-              <a:defRPr sz="1437" b="1" i="0" lang="zh-CN" dirty="0">
-                <a:solidFill>
-                  <a:srgbClr val="2B2F33"/>
+              <a:defRPr sz="1374" b="0" i="0" lang="zh-CN" dirty="0">
+                <a:solidFill>
+                  <a:srgbClr val="3A4046"/>
                 </a:solidFill>
                 <a:latin typeface="Noto Sans CJK SC"/>
                 <a:ea typeface="Noto Sans CJK SC"/>
@@ -5393,9 +5393,9 @@
               </a:defRPr>
             </a:pPr>
             <a:r>
-              <a:rPr sz="1437" b="1" i="0" lang="zh-CN" dirty="0">
-                <a:solidFill>
-                  <a:srgbClr val="2B2F33"/>
+              <a:rPr sz="1374" b="0" i="0" lang="zh-CN" dirty="0">
+                <a:solidFill>
+                  <a:srgbClr val="3A4046"/>
                 </a:solidFill>
                 <a:latin typeface="Noto Sans CJK SC"/>
                 <a:ea typeface="Noto Sans CJK SC"/>
@@ -5414,8 +5414,8 @@
         </p:nvSpPr>
         <p:spPr>
           <a:xfrm>
-            <a:off x="4976812" y="3750469"/>
-            <a:ext cx="174625" cy="87312"/>
+            <a:off x="4968875" y="3702844"/>
+            <a:ext cx="230187" cy="87312"/>
           </a:xfrm>
           <a:custGeom>
             <a:avLst/>
@@ -5424,24 +5424,24 @@
             <a:cxnLst/>
             <a:rect l="l" t="t" r="r" b="b"/>
             <a:pathLst>
-              <a:path w="22000" h="11000">
+              <a:path w="29000" h="11000">
                 <a:moveTo>
                   <a:pt x="0" y="3500"/>
                 </a:moveTo>
                 <a:lnTo>
-                  <a:pt x="10000" y="3500"/>
+                  <a:pt x="17000" y="3500"/>
                 </a:lnTo>
                 <a:lnTo>
-                  <a:pt x="10000" y="0"/>
+                  <a:pt x="17000" y="0"/>
                 </a:lnTo>
                 <a:lnTo>
-                  <a:pt x="22000" y="5500"/>
+                  <a:pt x="29000" y="5500"/>
                 </a:lnTo>
                 <a:lnTo>
-                  <a:pt x="10000" y="11000"/>
+                  <a:pt x="17000" y="11000"/>
                 </a:lnTo>
                 <a:lnTo>
-                  <a:pt x="10000" y="7500"/>
+                  <a:pt x="17000" y="7500"/>
                 </a:lnTo>
                 <a:lnTo>
                   <a:pt x="0" y="7500"/>
@@ -5488,20 +5488,20 @@
         </p:nvSpPr>
         <p:spPr>
           <a:xfrm>
-            <a:off x="5175249" y="3563937"/>
-            <a:ext cx="1015999" cy="468312"/>
+            <a:off x="5222874" y="3508374"/>
+            <a:ext cx="984249" cy="484187"/>
           </a:xfrm>
           <a:prstGeom prst="roundRect">
             <a:avLst>
-              <a:gd name="adj" fmla="val 13559"/>
+              <a:gd name="adj" fmla="val 13114"/>
             </a:avLst>
           </a:prstGeom>
           <a:solidFill>
             <a:srgbClr val="FFFFFF"/>
           </a:solidFill>
-          <a:ln w="15874">
+          <a:ln w="11906">
             <a:solidFill>
-              <a:srgbClr val="9AA5AD"/>
+              <a:srgbClr val="C9CFD4"/>
             </a:solidFill>
           </a:ln>
           <a:effectLst/>
@@ -5536,8 +5536,8 @@
         </p:nvSpPr>
         <p:spPr>
           <a:xfrm>
-            <a:off x="5222874" y="3587749"/>
-            <a:ext cx="920749" cy="420687"/>
+            <a:off x="5270499" y="3532187"/>
+            <a:ext cx="888999" cy="436562"/>
           </a:xfrm>
           <a:prstGeom prst="rect">
             <a:avLst/>
@@ -5553,7 +5553,7 @@
           <a:p>
             <a:pPr algn="ctr" fontAlgn="base">
               <a:lnSpc>
-                <a:spcPts val="2093"/>
+                <a:spcPts val="2015"/>
               </a:lnSpc>
               <a:spcBef>
                 <a:spcPts val="0"/>
@@ -5561,9 +5561,9 @@
               <a:spcAft>
                 <a:spcPts val="0"/>
               </a:spcAft>
-              <a:defRPr sz="1437" b="1" i="0" lang="zh-CN" dirty="0">
-                <a:solidFill>
-                  <a:srgbClr val="2B2F33"/>
+              <a:defRPr sz="1374" b="0" i="0" lang="zh-CN" dirty="0">
+                <a:solidFill>
+                  <a:srgbClr val="3A4046"/>
                 </a:solidFill>
                 <a:latin typeface="Noto Sans CJK SC"/>
                 <a:ea typeface="Noto Sans CJK SC"/>
@@ -5571,9 +5571,9 @@
               </a:defRPr>
             </a:pPr>
             <a:r>
-              <a:rPr sz="1437" b="1" i="0" lang="zh-CN" dirty="0">
-                <a:solidFill>
-                  <a:srgbClr val="2B2F33"/>
+              <a:rPr sz="1374" b="0" i="0" lang="zh-CN" dirty="0">
+                <a:solidFill>
+                  <a:srgbClr val="3A4046"/>
                 </a:solidFill>
                 <a:latin typeface="Noto Sans CJK SC"/>
                 <a:ea typeface="Noto Sans CJK SC"/>
@@ -5592,8 +5592,8 @@
         </p:nvSpPr>
         <p:spPr>
           <a:xfrm>
-            <a:off x="6215062" y="3750469"/>
-            <a:ext cx="269875" cy="87312"/>
+            <a:off x="6230937" y="3702844"/>
+            <a:ext cx="230187" cy="87312"/>
           </a:xfrm>
           <a:custGeom>
             <a:avLst/>
@@ -5602,24 +5602,24 @@
             <a:cxnLst/>
             <a:rect l="l" t="t" r="r" b="b"/>
             <a:pathLst>
-              <a:path w="34000" h="11000">
+              <a:path w="29000" h="11000">
                 <a:moveTo>
                   <a:pt x="0" y="3500"/>
                 </a:moveTo>
                 <a:lnTo>
-                  <a:pt x="22000" y="3500"/>
+                  <a:pt x="17000" y="3500"/>
                 </a:lnTo>
                 <a:lnTo>
-                  <a:pt x="22000" y="0"/>
+                  <a:pt x="17000" y="0"/>
                 </a:lnTo>
                 <a:lnTo>
-                  <a:pt x="34000" y="5500"/>
+                  <a:pt x="29000" y="5500"/>
                 </a:lnTo>
                 <a:lnTo>
-                  <a:pt x="22000" y="11000"/>
+                  <a:pt x="17000" y="11000"/>
                 </a:lnTo>
                 <a:lnTo>
-                  <a:pt x="22000" y="7500"/>
+                  <a:pt x="17000" y="7500"/>
                 </a:lnTo>
                 <a:lnTo>
                   <a:pt x="0" y="7500"/>
@@ -5666,20 +5666,20 @@
         </p:nvSpPr>
         <p:spPr>
           <a:xfrm>
-            <a:off x="6508749" y="3563937"/>
-            <a:ext cx="952499" cy="468312"/>
+            <a:off x="6484937" y="3508374"/>
+            <a:ext cx="976312" cy="484187"/>
           </a:xfrm>
           <a:prstGeom prst="roundRect">
             <a:avLst>
-              <a:gd name="adj" fmla="val 13559"/>
+              <a:gd name="adj" fmla="val 13114"/>
             </a:avLst>
           </a:prstGeom>
           <a:solidFill>
             <a:srgbClr val="FFFFFF"/>
           </a:solidFill>
-          <a:ln w="15874">
+          <a:ln w="11906">
             <a:solidFill>
-              <a:srgbClr val="9AA5AD"/>
+              <a:srgbClr val="C9CFD4"/>
             </a:solidFill>
           </a:ln>
           <a:effectLst/>
@@ -5714,8 +5714,8 @@
         </p:nvSpPr>
         <p:spPr>
           <a:xfrm>
-            <a:off x="6556374" y="3587749"/>
-            <a:ext cx="857249" cy="420687"/>
+            <a:off x="6532562" y="3532187"/>
+            <a:ext cx="881062" cy="436562"/>
           </a:xfrm>
           <a:prstGeom prst="rect">
             <a:avLst/>
@@ -5731,7 +5731,7 @@
           <a:p>
             <a:pPr algn="ctr" fontAlgn="base">
               <a:lnSpc>
-                <a:spcPts val="2093"/>
+                <a:spcPts val="2015"/>
               </a:lnSpc>
               <a:spcBef>
                 <a:spcPts val="0"/>
@@ -5739,9 +5739,9 @@
               <a:spcAft>
                 <a:spcPts val="0"/>
               </a:spcAft>
-              <a:defRPr sz="1437" b="1" i="0" lang="zh-CN" dirty="0">
-                <a:solidFill>
-                  <a:srgbClr val="2B2F33"/>
+              <a:defRPr sz="1374" b="0" i="0" lang="zh-CN" dirty="0">
+                <a:solidFill>
+                  <a:srgbClr val="3A4046"/>
                 </a:solidFill>
                 <a:latin typeface="Noto Sans CJK SC"/>
                 <a:ea typeface="Noto Sans CJK SC"/>
@@ -5749,9 +5749,9 @@
               </a:defRPr>
             </a:pPr>
             <a:r>
-              <a:rPr sz="1437" b="1" i="0" lang="zh-CN" dirty="0">
-                <a:solidFill>
-                  <a:srgbClr val="2B2F33"/>
+              <a:rPr sz="1374" b="0" i="0" lang="zh-CN" dirty="0">
+                <a:solidFill>
+                  <a:srgbClr val="3A4046"/>
                 </a:solidFill>
                 <a:latin typeface="Noto Sans CJK SC"/>
                 <a:ea typeface="Noto Sans CJK SC"/>
@@ -5770,7 +5770,7 @@
         </p:nvSpPr>
         <p:spPr>
           <a:xfrm>
-            <a:off x="7485062" y="3750469"/>
+            <a:off x="7485062" y="3702844"/>
             <a:ext cx="222250" cy="87312"/>
           </a:xfrm>
           <a:custGeom>
@@ -5844,20 +5844,20 @@
         </p:nvSpPr>
         <p:spPr>
           <a:xfrm>
-            <a:off x="7731124" y="3563937"/>
-            <a:ext cx="1762124" cy="468312"/>
+            <a:off x="7731124" y="3508374"/>
+            <a:ext cx="1706562" cy="484187"/>
           </a:xfrm>
           <a:prstGeom prst="roundRect">
             <a:avLst>
-              <a:gd name="adj" fmla="val 13559"/>
+              <a:gd name="adj" fmla="val 13114"/>
             </a:avLst>
           </a:prstGeom>
           <a:solidFill>
             <a:srgbClr val="FFFFFF"/>
           </a:solidFill>
-          <a:ln w="15874">
+          <a:ln w="11906">
             <a:solidFill>
-              <a:srgbClr val="9AA5AD"/>
+              <a:srgbClr val="C9CFD4"/>
             </a:solidFill>
           </a:ln>
           <a:effectLst/>
@@ -5892,8 +5892,8 @@
         </p:nvSpPr>
         <p:spPr>
           <a:xfrm>
-            <a:off x="7778749" y="3587749"/>
-            <a:ext cx="1666874" cy="420687"/>
+            <a:off x="7778749" y="3532187"/>
+            <a:ext cx="1611312" cy="436562"/>
           </a:xfrm>
           <a:prstGeom prst="rect">
             <a:avLst/>
@@ -5909,7 +5909,7 @@
           <a:p>
             <a:pPr algn="ctr" fontAlgn="base">
               <a:lnSpc>
-                <a:spcPts val="2093"/>
+                <a:spcPts val="2015"/>
               </a:lnSpc>
               <a:spcBef>
                 <a:spcPts val="0"/>
@@ -5917,9 +5917,9 @@
               <a:spcAft>
                 <a:spcPts val="0"/>
               </a:spcAft>
-              <a:defRPr sz="1437" b="1" i="0" lang="zh-CN" dirty="0">
-                <a:solidFill>
-                  <a:srgbClr val="2B2F33"/>
+              <a:defRPr sz="1374" b="0" i="0" lang="zh-CN" dirty="0">
+                <a:solidFill>
+                  <a:srgbClr val="3A4046"/>
                 </a:solidFill>
                 <a:latin typeface="Noto Sans CJK SC"/>
                 <a:ea typeface="Noto Sans CJK SC"/>
@@ -5927,9 +5927,9 @@
               </a:defRPr>
             </a:pPr>
             <a:r>
-              <a:rPr sz="1437" b="1" i="0" lang="zh-CN" dirty="0">
-                <a:solidFill>
-                  <a:srgbClr val="2B2F33"/>
+              <a:rPr sz="1374" b="0" i="0" lang="zh-CN" dirty="0">
+                <a:solidFill>
+                  <a:srgbClr val="3A4046"/>
                 </a:solidFill>
                 <a:latin typeface="Noto Sans CJK SC"/>
                 <a:ea typeface="Noto Sans CJK SC"/>
@@ -5948,20 +5948,20 @@
         </p:nvSpPr>
         <p:spPr>
           <a:xfrm>
-            <a:off x="3619499" y="5079999"/>
-            <a:ext cx="6000749" cy="1047749"/>
+            <a:off x="3571874" y="5016499"/>
+            <a:ext cx="6024562" cy="1127124"/>
           </a:xfrm>
           <a:prstGeom prst="roundRect">
             <a:avLst>
-              <a:gd name="adj" fmla="val 10606"/>
+              <a:gd name="adj" fmla="val 9859"/>
             </a:avLst>
           </a:prstGeom>
           <a:solidFill>
-            <a:srgbClr val="E4F0F1"/>
+            <a:srgbClr val="FFFFFF"/>
           </a:solidFill>
           <a:ln w="19843">
             <a:solidFill>
-              <a:srgbClr val="1F6F78"/>
+              <a:srgbClr val="4A5158"/>
             </a:solidFill>
           </a:ln>
           <a:effectLst/>
@@ -5996,8 +5996,8 @@
         </p:nvSpPr>
         <p:spPr>
           <a:xfrm>
-            <a:off x="3778249" y="5127624"/>
-            <a:ext cx="2381249" cy="349249"/>
+            <a:off x="3730624" y="5079999"/>
+            <a:ext cx="2539999" cy="349249"/>
           </a:xfrm>
           <a:prstGeom prst="rect">
             <a:avLst/>
@@ -6023,7 +6023,7 @@
               </a:spcAft>
               <a:defRPr sz="1749" b="1" i="0" lang="zh-CN" dirty="0">
                 <a:solidFill>
-                  <a:srgbClr val="155459"/>
+                  <a:srgbClr val="1F2326"/>
                 </a:solidFill>
                 <a:latin typeface="Noto Sans CJK SC"/>
                 <a:ea typeface="Noto Sans CJK SC"/>
@@ -6033,7 +6033,7 @@
             <a:r>
               <a:rPr sz="1749" b="1" i="0" lang="zh-CN" dirty="0">
                 <a:solidFill>
-                  <a:srgbClr val="155459"/>
+                  <a:srgbClr val="1F2326"/>
                 </a:solidFill>
                 <a:latin typeface="Noto Sans CJK SC"/>
                 <a:ea typeface="Noto Sans CJK SC"/>
@@ -6052,20 +6052,20 @@
         </p:nvSpPr>
         <p:spPr>
           <a:xfrm>
-            <a:off x="3770312" y="5524499"/>
-            <a:ext cx="960437" cy="468312"/>
+            <a:off x="3746499" y="5516562"/>
+            <a:ext cx="1000124" cy="484187"/>
           </a:xfrm>
           <a:prstGeom prst="roundRect">
             <a:avLst>
-              <a:gd name="adj" fmla="val 13559"/>
+              <a:gd name="adj" fmla="val 13114"/>
             </a:avLst>
           </a:prstGeom>
           <a:solidFill>
             <a:srgbClr val="FFFFFF"/>
           </a:solidFill>
-          <a:ln w="15874">
+          <a:ln w="11906">
             <a:solidFill>
-              <a:srgbClr val="9AA5AD"/>
+              <a:srgbClr val="C9CFD4"/>
             </a:solidFill>
           </a:ln>
           <a:effectLst/>
@@ -6100,8 +6100,8 @@
         </p:nvSpPr>
         <p:spPr>
           <a:xfrm>
-            <a:off x="3817937" y="5548312"/>
-            <a:ext cx="865187" cy="420687"/>
+            <a:off x="3794124" y="5540374"/>
+            <a:ext cx="904874" cy="436562"/>
           </a:xfrm>
           <a:prstGeom prst="rect">
             <a:avLst/>
@@ -6117,7 +6117,7 @@
           <a:p>
             <a:pPr algn="ctr" fontAlgn="base">
               <a:lnSpc>
-                <a:spcPts val="2093"/>
+                <a:spcPts val="2015"/>
               </a:lnSpc>
               <a:spcBef>
                 <a:spcPts val="0"/>
@@ -6125,9 +6125,9 @@
               <a:spcAft>
                 <a:spcPts val="0"/>
               </a:spcAft>
-              <a:defRPr sz="1437" b="1" i="0" lang="zh-CN" dirty="0">
-                <a:solidFill>
-                  <a:srgbClr val="2B2F33"/>
+              <a:defRPr sz="1374" b="0" i="0" lang="zh-CN" dirty="0">
+                <a:solidFill>
+                  <a:srgbClr val="3A4046"/>
                 </a:solidFill>
                 <a:latin typeface="Noto Sans CJK SC"/>
                 <a:ea typeface="Noto Sans CJK SC"/>
@@ -6135,9 +6135,9 @@
               </a:defRPr>
             </a:pPr>
             <a:r>
-              <a:rPr sz="1437" b="1" i="0" lang="zh-CN" dirty="0">
-                <a:solidFill>
-                  <a:srgbClr val="2B2F33"/>
+              <a:rPr sz="1374" b="0" i="0" lang="zh-CN" dirty="0">
+                <a:solidFill>
+                  <a:srgbClr val="3A4046"/>
                 </a:solidFill>
                 <a:latin typeface="Noto Sans CJK SC"/>
                 <a:ea typeface="Noto Sans CJK SC"/>
@@ -6156,7 +6156,7 @@
         </p:nvSpPr>
         <p:spPr>
           <a:xfrm>
-            <a:off x="4754562" y="5711031"/>
+            <a:off x="4770437" y="5711031"/>
             <a:ext cx="222250" cy="87312"/>
           </a:xfrm>
           <a:custGeom>
@@ -6230,20 +6230,20 @@
         </p:nvSpPr>
         <p:spPr>
           <a:xfrm>
-            <a:off x="5000624" y="5524499"/>
-            <a:ext cx="1000124" cy="468312"/>
+            <a:off x="5016499" y="5516562"/>
+            <a:ext cx="960437" cy="484187"/>
           </a:xfrm>
           <a:prstGeom prst="roundRect">
             <a:avLst>
-              <a:gd name="adj" fmla="val 13559"/>
+              <a:gd name="adj" fmla="val 13114"/>
             </a:avLst>
           </a:prstGeom>
           <a:solidFill>
             <a:srgbClr val="FFFFFF"/>
           </a:solidFill>
-          <a:ln w="15874">
+          <a:ln w="11906">
             <a:solidFill>
-              <a:srgbClr val="9AA5AD"/>
+              <a:srgbClr val="C9CFD4"/>
             </a:solidFill>
           </a:ln>
           <a:effectLst/>
@@ -6278,8 +6278,8 @@
         </p:nvSpPr>
         <p:spPr>
           <a:xfrm>
-            <a:off x="5048249" y="5548312"/>
-            <a:ext cx="904874" cy="420687"/>
+            <a:off x="5064124" y="5540374"/>
+            <a:ext cx="865187" cy="436562"/>
           </a:xfrm>
           <a:prstGeom prst="rect">
             <a:avLst/>
@@ -6295,7 +6295,7 @@
           <a:p>
             <a:pPr algn="ctr" fontAlgn="base">
               <a:lnSpc>
-                <a:spcPts val="2093"/>
+                <a:spcPts val="2015"/>
               </a:lnSpc>
               <a:spcBef>
                 <a:spcPts val="0"/>
@@ -6303,9 +6303,9 @@
               <a:spcAft>
                 <a:spcPts val="0"/>
               </a:spcAft>
-              <a:defRPr sz="1437" b="1" i="0" lang="zh-CN" dirty="0">
-                <a:solidFill>
-                  <a:srgbClr val="2B2F33"/>
+              <a:defRPr sz="1374" b="0" i="0" lang="zh-CN" dirty="0">
+                <a:solidFill>
+                  <a:srgbClr val="3A4046"/>
                 </a:solidFill>
                 <a:latin typeface="Noto Sans CJK SC"/>
                 <a:ea typeface="Noto Sans CJK SC"/>
@@ -6313,9 +6313,9 @@
               </a:defRPr>
             </a:pPr>
             <a:r>
-              <a:rPr sz="1437" b="1" i="0" lang="zh-CN" dirty="0">
-                <a:solidFill>
-                  <a:srgbClr val="2B2F33"/>
+              <a:rPr sz="1374" b="0" i="0" lang="zh-CN" dirty="0">
+                <a:solidFill>
+                  <a:srgbClr val="3A4046"/>
                 </a:solidFill>
                 <a:latin typeface="Noto Sans CJK SC"/>
                 <a:ea typeface="Noto Sans CJK SC"/>
@@ -6334,185 +6334,7 @@
         </p:nvSpPr>
         <p:spPr>
           <a:xfrm>
-            <a:off x="6024562" y="5711031"/>
-            <a:ext cx="174625" cy="87312"/>
-          </a:xfrm>
-          <a:custGeom>
-            <a:avLst/>
-            <a:gdLst/>
-            <a:ahLst/>
-            <a:cxnLst/>
-            <a:rect l="l" t="t" r="r" b="b"/>
-            <a:pathLst>
-              <a:path w="22000" h="11000">
-                <a:moveTo>
-                  <a:pt x="0" y="3500"/>
-                </a:moveTo>
-                <a:lnTo>
-                  <a:pt x="10000" y="3500"/>
-                </a:lnTo>
-                <a:lnTo>
-                  <a:pt x="10000" y="0"/>
-                </a:lnTo>
-                <a:lnTo>
-                  <a:pt x="22000" y="5500"/>
-                </a:lnTo>
-                <a:lnTo>
-                  <a:pt x="10000" y="11000"/>
-                </a:lnTo>
-                <a:lnTo>
-                  <a:pt x="10000" y="7500"/>
-                </a:lnTo>
-                <a:lnTo>
-                  <a:pt x="0" y="7500"/>
-                </a:lnTo>
-                <a:close/>
-              </a:path>
-            </a:pathLst>
-          </a:custGeom>
-          <a:solidFill>
-            <a:srgbClr val="1F6F78"/>
-          </a:solidFill>
-          <a:ln>
-            <a:noFill/>
-          </a:ln>
-          <a:effectLst/>
-        </p:spPr>
-        <p:style>
-          <a:lnRef idx="1">
-            <a:schemeClr val="accent1"/>
-          </a:lnRef>
-          <a:fillRef idx="3">
-            <a:schemeClr val="accent1"/>
-          </a:fillRef>
-          <a:effectRef idx="0">
-            <a:schemeClr val="accent1"/>
-          </a:effectRef>
-          <a:fontRef idx="minor">
-            <a:schemeClr val="lt1"/>
-          </a:fontRef>
-        </p:style>
-        <p:txBody>
-          <a:bodyPr rtlCol="0" anchor="ctr"/>
-          <a:lstStyle/>
-          <a:p>
-            <a:pPr algn="ctr"/>
-          </a:p>
-        </p:txBody>
-      </p:sp>
-      <p:sp>
-        <p:nvSpPr>
-          <p:cNvPr id="53" name="l2_k2" descr="Editable shape; source id l2_k2"/>
-          <p:cNvSpPr/>
-          <p:nvPr/>
-        </p:nvSpPr>
-        <p:spPr>
-          <a:xfrm>
-            <a:off x="6222999" y="5524499"/>
-            <a:ext cx="968374" cy="468312"/>
-          </a:xfrm>
-          <a:prstGeom prst="roundRect">
-            <a:avLst>
-              <a:gd name="adj" fmla="val 13559"/>
-            </a:avLst>
-          </a:prstGeom>
-          <a:solidFill>
-            <a:srgbClr val="FFFFFF"/>
-          </a:solidFill>
-          <a:ln w="15874">
-            <a:solidFill>
-              <a:srgbClr val="9AA5AD"/>
-            </a:solidFill>
-          </a:ln>
-          <a:effectLst/>
-        </p:spPr>
-        <p:style>
-          <a:lnRef idx="1">
-            <a:schemeClr val="accent1"/>
-          </a:lnRef>
-          <a:fillRef idx="3">
-            <a:schemeClr val="accent1"/>
-          </a:fillRef>
-          <a:effectRef idx="0">
-            <a:schemeClr val="accent1"/>
-          </a:effectRef>
-          <a:fontRef idx="minor">
-            <a:schemeClr val="lt1"/>
-          </a:fontRef>
-        </p:style>
-        <p:txBody>
-          <a:bodyPr rtlCol="0" anchor="ctr"/>
-          <a:lstStyle/>
-          <a:p>
-            <a:pPr algn="ctr"/>
-          </a:p>
-        </p:txBody>
-      </p:sp>
-      <p:sp>
-        <p:nvSpPr>
-          <p:cNvPr id="54" name="l2_k2_t" descr="Editable text; source id l2_k2_t"/>
-          <p:cNvSpPr txBox="1"/>
-          <p:nvPr/>
-        </p:nvSpPr>
-        <p:spPr>
-          <a:xfrm>
-            <a:off x="6270624" y="5548312"/>
-            <a:ext cx="873124" cy="420687"/>
-          </a:xfrm>
-          <a:prstGeom prst="rect">
-            <a:avLst/>
-          </a:prstGeom>
-          <a:noFill/>
-          <a:effectLst/>
-        </p:spPr>
-        <p:txBody>
-          <a:bodyPr wrap="none" anchor="ctr" tIns="0" rIns="0" bIns="0" lIns="0" anchorCtr="0" vertOverflow="overflow">
-            <a:noAutofit/>
-          </a:bodyPr>
-          <a:lstStyle/>
-          <a:p>
-            <a:pPr algn="ctr" fontAlgn="base">
-              <a:lnSpc>
-                <a:spcPts val="2093"/>
-              </a:lnSpc>
-              <a:spcBef>
-                <a:spcPts val="0"/>
-              </a:spcBef>
-              <a:spcAft>
-                <a:spcPts val="0"/>
-              </a:spcAft>
-              <a:defRPr sz="1437" b="1" i="0" lang="zh-CN" dirty="0">
-                <a:solidFill>
-                  <a:srgbClr val="2B2F33"/>
-                </a:solidFill>
-                <a:latin typeface="Noto Sans CJK SC"/>
-                <a:ea typeface="Noto Sans CJK SC"/>
-                <a:cs typeface="Noto Sans CJK SC"/>
-              </a:defRPr>
-            </a:pPr>
-            <a:r>
-              <a:rPr sz="1437" b="1" i="0" lang="zh-CN" dirty="0">
-                <a:solidFill>
-                  <a:srgbClr val="2B2F33"/>
-                </a:solidFill>
-                <a:latin typeface="Noto Sans CJK SC"/>
-                <a:ea typeface="Noto Sans CJK SC"/>
-                <a:cs typeface="Noto Sans CJK SC"/>
-              </a:rPr>
-              <a:t>慢冷</a:t>
-            </a:r>
-          </a:p>
-        </p:txBody>
-      </p:sp>
-      <p:sp>
-        <p:nvSpPr>
-          <p:cNvPr id="55" name="l2_a2" descr="Editable line; source id l2_a2"/>
-          <p:cNvSpPr/>
-          <p:nvPr/>
-        </p:nvSpPr>
-        <p:spPr>
-          <a:xfrm>
-            <a:off x="7215187" y="5711031"/>
+            <a:off x="6000750" y="5711031"/>
             <a:ext cx="222250" cy="87312"/>
           </a:xfrm>
           <a:custGeom>
@@ -6580,26 +6402,26 @@
       </p:sp>
       <p:sp>
         <p:nvSpPr>
-          <p:cNvPr id="56" name="l2_k3" descr="Editable shape; source id l2_k3"/>
+          <p:cNvPr id="53" name="l2_k2" descr="Editable shape; source id l2_k2"/>
           <p:cNvSpPr/>
           <p:nvPr/>
         </p:nvSpPr>
         <p:spPr>
           <a:xfrm>
-            <a:off x="7461249" y="5524499"/>
-            <a:ext cx="2031999" cy="468312"/>
+            <a:off x="6246812" y="5516562"/>
+            <a:ext cx="936624" cy="484187"/>
           </a:xfrm>
           <a:prstGeom prst="roundRect">
             <a:avLst>
-              <a:gd name="adj" fmla="val 13559"/>
+              <a:gd name="adj" fmla="val 13114"/>
             </a:avLst>
           </a:prstGeom>
           <a:solidFill>
             <a:srgbClr val="FFFFFF"/>
           </a:solidFill>
-          <a:ln w="15874">
+          <a:ln w="11906">
             <a:solidFill>
-              <a:srgbClr val="9AA5AD"/>
+              <a:srgbClr val="C9CFD4"/>
             </a:solidFill>
           </a:ln>
           <a:effectLst/>
@@ -6628,14 +6450,14 @@
       </p:sp>
       <p:sp>
         <p:nvSpPr>
-          <p:cNvPr id="57" name="l2_k3_t" descr="Editable text; source id l2_k3_t"/>
+          <p:cNvPr id="54" name="l2_k2_t" descr="Editable text; source id l2_k2_t"/>
           <p:cNvSpPr txBox="1"/>
           <p:nvPr/>
         </p:nvSpPr>
         <p:spPr>
           <a:xfrm>
-            <a:off x="7508874" y="5548312"/>
-            <a:ext cx="1936749" cy="420687"/>
+            <a:off x="6294437" y="5540374"/>
+            <a:ext cx="841374" cy="436562"/>
           </a:xfrm>
           <a:prstGeom prst="rect">
             <a:avLst/>
@@ -6651,7 +6473,7 @@
           <a:p>
             <a:pPr algn="ctr" fontAlgn="base">
               <a:lnSpc>
-                <a:spcPts val="2093"/>
+                <a:spcPts val="2015"/>
               </a:lnSpc>
               <a:spcBef>
                 <a:spcPts val="0"/>
@@ -6659,9 +6481,9 @@
               <a:spcAft>
                 <a:spcPts val="0"/>
               </a:spcAft>
-              <a:defRPr sz="1437" b="1" i="0" lang="zh-CN" dirty="0">
-                <a:solidFill>
-                  <a:srgbClr val="2B2F33"/>
+              <a:defRPr sz="1374" b="0" i="0" lang="zh-CN" dirty="0">
+                <a:solidFill>
+                  <a:srgbClr val="3A4046"/>
                 </a:solidFill>
                 <a:latin typeface="Noto Sans CJK SC"/>
                 <a:ea typeface="Noto Sans CJK SC"/>
@@ -6669,9 +6491,187 @@
               </a:defRPr>
             </a:pPr>
             <a:r>
-              <a:rPr sz="1437" b="1" i="0" lang="zh-CN" dirty="0">
-                <a:solidFill>
-                  <a:srgbClr val="2B2F33"/>
+              <a:rPr sz="1374" b="0" i="0" lang="zh-CN" dirty="0">
+                <a:solidFill>
+                  <a:srgbClr val="3A4046"/>
+                </a:solidFill>
+                <a:latin typeface="Noto Sans CJK SC"/>
+                <a:ea typeface="Noto Sans CJK SC"/>
+                <a:cs typeface="Noto Sans CJK SC"/>
+              </a:rPr>
+              <a:t>慢冷</a:t>
+            </a:r>
+          </a:p>
+        </p:txBody>
+      </p:sp>
+      <p:sp>
+        <p:nvSpPr>
+          <p:cNvPr id="55" name="l2_a2" descr="Editable line; source id l2_a2"/>
+          <p:cNvSpPr/>
+          <p:nvPr/>
+        </p:nvSpPr>
+        <p:spPr>
+          <a:xfrm>
+            <a:off x="7207250" y="5711031"/>
+            <a:ext cx="238125" cy="87312"/>
+          </a:xfrm>
+          <a:custGeom>
+            <a:avLst/>
+            <a:gdLst/>
+            <a:ahLst/>
+            <a:cxnLst/>
+            <a:rect l="l" t="t" r="r" b="b"/>
+            <a:pathLst>
+              <a:path w="30000" h="11000">
+                <a:moveTo>
+                  <a:pt x="0" y="3500"/>
+                </a:moveTo>
+                <a:lnTo>
+                  <a:pt x="18000" y="3500"/>
+                </a:lnTo>
+                <a:lnTo>
+                  <a:pt x="18000" y="0"/>
+                </a:lnTo>
+                <a:lnTo>
+                  <a:pt x="30000" y="5500"/>
+                </a:lnTo>
+                <a:lnTo>
+                  <a:pt x="18000" y="11000"/>
+                </a:lnTo>
+                <a:lnTo>
+                  <a:pt x="18000" y="7500"/>
+                </a:lnTo>
+                <a:lnTo>
+                  <a:pt x="0" y="7500"/>
+                </a:lnTo>
+                <a:close/>
+              </a:path>
+            </a:pathLst>
+          </a:custGeom>
+          <a:solidFill>
+            <a:srgbClr val="1F6F78"/>
+          </a:solidFill>
+          <a:ln>
+            <a:noFill/>
+          </a:ln>
+          <a:effectLst/>
+        </p:spPr>
+        <p:style>
+          <a:lnRef idx="1">
+            <a:schemeClr val="accent1"/>
+          </a:lnRef>
+          <a:fillRef idx="3">
+            <a:schemeClr val="accent1"/>
+          </a:fillRef>
+          <a:effectRef idx="0">
+            <a:schemeClr val="accent1"/>
+          </a:effectRef>
+          <a:fontRef idx="minor">
+            <a:schemeClr val="lt1"/>
+          </a:fontRef>
+        </p:style>
+        <p:txBody>
+          <a:bodyPr rtlCol="0" anchor="ctr"/>
+          <a:lstStyle/>
+          <a:p>
+            <a:pPr algn="ctr"/>
+          </a:p>
+        </p:txBody>
+      </p:sp>
+      <p:sp>
+        <p:nvSpPr>
+          <p:cNvPr id="56" name="l2_k3" descr="Editable shape; source id l2_k3"/>
+          <p:cNvSpPr/>
+          <p:nvPr/>
+        </p:nvSpPr>
+        <p:spPr>
+          <a:xfrm>
+            <a:off x="7469187" y="5516562"/>
+            <a:ext cx="1992312" cy="484187"/>
+          </a:xfrm>
+          <a:prstGeom prst="roundRect">
+            <a:avLst>
+              <a:gd name="adj" fmla="val 13114"/>
+            </a:avLst>
+          </a:prstGeom>
+          <a:solidFill>
+            <a:srgbClr val="FFFFFF"/>
+          </a:solidFill>
+          <a:ln w="11906">
+            <a:solidFill>
+              <a:srgbClr val="C9CFD4"/>
+            </a:solidFill>
+          </a:ln>
+          <a:effectLst/>
+        </p:spPr>
+        <p:style>
+          <a:lnRef idx="1">
+            <a:schemeClr val="accent1"/>
+          </a:lnRef>
+          <a:fillRef idx="3">
+            <a:schemeClr val="accent1"/>
+          </a:fillRef>
+          <a:effectRef idx="0">
+            <a:schemeClr val="accent1"/>
+          </a:effectRef>
+          <a:fontRef idx="minor">
+            <a:schemeClr val="lt1"/>
+          </a:fontRef>
+        </p:style>
+        <p:txBody>
+          <a:bodyPr rtlCol="0" anchor="ctr"/>
+          <a:lstStyle/>
+          <a:p>
+            <a:pPr algn="ctr"/>
+          </a:p>
+        </p:txBody>
+      </p:sp>
+      <p:sp>
+        <p:nvSpPr>
+          <p:cNvPr id="57" name="l2_k3_t" descr="Editable text; source id l2_k3_t"/>
+          <p:cNvSpPr txBox="1"/>
+          <p:nvPr/>
+        </p:nvSpPr>
+        <p:spPr>
+          <a:xfrm>
+            <a:off x="7516812" y="5540374"/>
+            <a:ext cx="1897062" cy="436562"/>
+          </a:xfrm>
+          <a:prstGeom prst="rect">
+            <a:avLst/>
+          </a:prstGeom>
+          <a:noFill/>
+          <a:effectLst/>
+        </p:spPr>
+        <p:txBody>
+          <a:bodyPr wrap="none" anchor="ctr" tIns="0" rIns="0" bIns="0" lIns="0" anchorCtr="0" vertOverflow="overflow">
+            <a:noAutofit/>
+          </a:bodyPr>
+          <a:lstStyle/>
+          <a:p>
+            <a:pPr algn="ctr" fontAlgn="base">
+              <a:lnSpc>
+                <a:spcPts val="2015"/>
+              </a:lnSpc>
+              <a:spcBef>
+                <a:spcPts val="0"/>
+              </a:spcBef>
+              <a:spcAft>
+                <a:spcPts val="0"/>
+              </a:spcAft>
+              <a:defRPr sz="1374" b="0" i="0" lang="zh-CN" dirty="0">
+                <a:solidFill>
+                  <a:srgbClr val="3A4046"/>
+                </a:solidFill>
+                <a:latin typeface="Noto Sans CJK SC"/>
+                <a:ea typeface="Noto Sans CJK SC"/>
+                <a:cs typeface="Noto Sans CJK SC"/>
+              </a:defRPr>
+            </a:pPr>
+            <a:r>
+              <a:rPr sz="1374" b="0" i="0" lang="zh-CN" dirty="0">
+                <a:solidFill>
+                  <a:srgbClr val="3A4046"/>
                 </a:solidFill>
                 <a:latin typeface="Noto Sans CJK SC"/>
                 <a:ea typeface="Noto Sans CJK SC"/>
@@ -6690,8 +6690,8 @@
         </p:nvCxnSpPr>
         <p:spPr>
           <a:xfrm>
-            <a:off x="9636124" y="3643312"/>
-            <a:ext cx="206375" cy="0"/>
+            <a:off x="9612312" y="3579812"/>
+            <a:ext cx="198437" cy="0"/>
           </a:xfrm>
           <a:prstGeom prst="line">
             <a:avLst/>
@@ -6726,8 +6726,8 @@
         </p:nvCxnSpPr>
         <p:spPr>
           <a:xfrm>
-            <a:off x="9636124" y="5603874"/>
-            <a:ext cx="206375" cy="0"/>
+            <a:off x="9612312" y="5580062"/>
+            <a:ext cx="198437" cy="0"/>
           </a:xfrm>
           <a:prstGeom prst="line">
             <a:avLst/>
@@ -6762,8 +6762,8 @@
         </p:nvCxnSpPr>
         <p:spPr>
           <a:xfrm>
-            <a:off x="9842499" y="3643312"/>
-            <a:ext cx="0" cy="1960562"/>
+            <a:off x="9810749" y="3579812"/>
+            <a:ext cx="0" cy="2000250"/>
           </a:xfrm>
           <a:prstGeom prst="line">
             <a:avLst/>
@@ -6798,7 +6798,7 @@
         </p:nvSpPr>
         <p:spPr>
           <a:xfrm>
-            <a:off x="9842500" y="4302125"/>
+            <a:off x="9810750" y="4516437"/>
             <a:ext cx="198437" cy="127000"/>
           </a:xfrm>
           <a:custGeom>
@@ -6872,20 +6872,20 @@
         </p:nvSpPr>
         <p:spPr>
           <a:xfrm>
-            <a:off x="10056812" y="2920999"/>
-            <a:ext cx="1897062" cy="2897187"/>
+            <a:off x="10025062" y="2865437"/>
+            <a:ext cx="1944687" cy="2936874"/>
           </a:xfrm>
           <a:prstGeom prst="roundRect">
             <a:avLst>
-              <a:gd name="adj" fmla="val 5857"/>
+              <a:gd name="adj" fmla="val 5714"/>
             </a:avLst>
           </a:prstGeom>
           <a:solidFill>
-            <a:srgbClr val="F3F5F6"/>
+            <a:srgbClr val="FFFFFF"/>
           </a:solidFill>
           <a:ln w="19843">
             <a:solidFill>
-              <a:srgbClr val="C9CFD4"/>
+              <a:srgbClr val="4A5158"/>
             </a:solidFill>
           </a:ln>
           <a:effectLst/>
@@ -6920,8 +6920,8 @@
         </p:nvSpPr>
         <p:spPr>
           <a:xfrm>
-            <a:off x="10159999" y="3016249"/>
-            <a:ext cx="1690687" cy="349249"/>
+            <a:off x="10120312" y="2976562"/>
+            <a:ext cx="1754187" cy="349249"/>
           </a:xfrm>
           <a:prstGeom prst="rect">
             <a:avLst/>
@@ -6947,7 +6947,7 @@
               </a:spcAft>
               <a:defRPr sz="1749" b="1" i="0" lang="zh-CN" dirty="0">
                 <a:solidFill>
-                  <a:srgbClr val="2B2F33"/>
+                  <a:srgbClr val="1F2326"/>
                 </a:solidFill>
                 <a:latin typeface="Noto Sans CJK SC"/>
                 <a:ea typeface="Noto Sans CJK SC"/>
@@ -6957,7 +6957,7 @@
             <a:r>
               <a:rPr sz="1749" b="1" i="0" lang="zh-CN" dirty="0">
                 <a:solidFill>
-                  <a:srgbClr val="2B2F33"/>
+                  <a:srgbClr val="1F2326"/>
                 </a:solidFill>
                 <a:latin typeface="Noto Sans CJK SC"/>
                 <a:ea typeface="Noto Sans CJK SC"/>
@@ -6976,8 +6976,8 @@
         </p:nvSpPr>
         <p:spPr>
           <a:xfrm>
-            <a:off x="10183812" y="3500437"/>
-            <a:ext cx="1690687" cy="476249"/>
+            <a:off x="10152062" y="3444874"/>
+            <a:ext cx="1698624" cy="476249"/>
           </a:xfrm>
           <a:prstGeom prst="roundRect">
             <a:avLst>
@@ -6987,9 +6987,9 @@
           <a:solidFill>
             <a:srgbClr val="FFFFFF"/>
           </a:solidFill>
-          <a:ln w="15874">
+          <a:ln w="11906">
             <a:solidFill>
-              <a:srgbClr val="B5BDC4"/>
+              <a:srgbClr val="C9CFD4"/>
             </a:solidFill>
           </a:ln>
           <a:effectLst/>
@@ -7024,8 +7024,8 @@
         </p:nvSpPr>
         <p:spPr>
           <a:xfrm>
-            <a:off x="10231437" y="3524249"/>
-            <a:ext cx="1595437" cy="428624"/>
+            <a:off x="10199687" y="3468687"/>
+            <a:ext cx="1603374" cy="428624"/>
           </a:xfrm>
           <a:prstGeom prst="rect">
             <a:avLst/>
@@ -7041,7 +7041,7 @@
           <a:p>
             <a:pPr algn="ctr" fontAlgn="base">
               <a:lnSpc>
-                <a:spcPts val="1578"/>
+                <a:spcPts val="1687"/>
               </a:lnSpc>
               <a:spcBef>
                 <a:spcPts val="0"/>
@@ -7049,9 +7049,9 @@
               <a:spcAft>
                 <a:spcPts val="0"/>
               </a:spcAft>
-              <a:defRPr sz="1335" b="1" i="0" lang="zh-CN" dirty="0">
-                <a:solidFill>
-                  <a:srgbClr val="2B2F33"/>
+              <a:defRPr sz="1437" b="0" i="0" lang="zh-CN" dirty="0">
+                <a:solidFill>
+                  <a:srgbClr val="3A4046"/>
                 </a:solidFill>
                 <a:latin typeface="DejaVu Sans"/>
                 <a:ea typeface="DejaVu Sans"/>
@@ -7059,9 +7059,9 @@
               </a:defRPr>
             </a:pPr>
             <a:r>
-              <a:rPr sz="1335" b="1" i="0" lang="zh-CN" dirty="0">
-                <a:solidFill>
-                  <a:srgbClr val="2B2F33"/>
+              <a:rPr sz="1437" b="0" i="0" lang="zh-CN" dirty="0">
+                <a:solidFill>
+                  <a:srgbClr val="3A4046"/>
                 </a:solidFill>
                 <a:latin typeface="DejaVu Sans"/>
                 <a:ea typeface="DejaVu Sans"/>
@@ -7080,8 +7080,8 @@
         </p:nvSpPr>
         <p:spPr>
           <a:xfrm>
-            <a:off x="10183812" y="4071937"/>
-            <a:ext cx="1690687" cy="476249"/>
+            <a:off x="10152062" y="4016374"/>
+            <a:ext cx="1698624" cy="476249"/>
           </a:xfrm>
           <a:prstGeom prst="roundRect">
             <a:avLst>
@@ -7091,9 +7091,9 @@
           <a:solidFill>
             <a:srgbClr val="FFFFFF"/>
           </a:solidFill>
-          <a:ln w="15874">
+          <a:ln w="11906">
             <a:solidFill>
-              <a:srgbClr val="B5BDC4"/>
+              <a:srgbClr val="C9CFD4"/>
             </a:solidFill>
           </a:ln>
           <a:effectLst/>
@@ -7128,8 +7128,8 @@
         </p:nvSpPr>
         <p:spPr>
           <a:xfrm>
-            <a:off x="10231437" y="4095749"/>
-            <a:ext cx="1595437" cy="428624"/>
+            <a:off x="10199687" y="4032249"/>
+            <a:ext cx="1603374" cy="428624"/>
           </a:xfrm>
           <a:prstGeom prst="rect">
             <a:avLst/>
@@ -7145,7 +7145,7 @@
           <a:p>
             <a:pPr algn="ctr" fontAlgn="base">
               <a:lnSpc>
-                <a:spcPts val="1578"/>
+                <a:spcPts val="1687"/>
               </a:lnSpc>
               <a:spcBef>
                 <a:spcPts val="0"/>
@@ -7153,9 +7153,9 @@
               <a:spcAft>
                 <a:spcPts val="0"/>
               </a:spcAft>
-              <a:defRPr sz="1335" b="1" i="0" lang="zh-CN" dirty="0">
-                <a:solidFill>
-                  <a:srgbClr val="2B2F33"/>
+              <a:defRPr sz="1437" b="0" i="0" lang="zh-CN" dirty="0">
+                <a:solidFill>
+                  <a:srgbClr val="3A4046"/>
                 </a:solidFill>
                 <a:latin typeface="DejaVu Sans"/>
                 <a:ea typeface="DejaVu Sans"/>
@@ -7163,9 +7163,9 @@
               </a:defRPr>
             </a:pPr>
             <a:r>
-              <a:rPr sz="1335" b="1" i="0" lang="zh-CN" dirty="0">
-                <a:solidFill>
-                  <a:srgbClr val="2B2F33"/>
+              <a:rPr sz="1437" b="0" i="0" lang="zh-CN" dirty="0">
+                <a:solidFill>
+                  <a:srgbClr val="3A4046"/>
                 </a:solidFill>
                 <a:latin typeface="DejaVu Sans"/>
                 <a:ea typeface="DejaVu Sans"/>
@@ -7184,8 +7184,8 @@
         </p:nvSpPr>
         <p:spPr>
           <a:xfrm>
-            <a:off x="10183812" y="4643437"/>
-            <a:ext cx="1690687" cy="476249"/>
+            <a:off x="10152062" y="4579937"/>
+            <a:ext cx="1698624" cy="476249"/>
           </a:xfrm>
           <a:prstGeom prst="roundRect">
             <a:avLst>
@@ -7195,9 +7195,9 @@
           <a:solidFill>
             <a:srgbClr val="FFFFFF"/>
           </a:solidFill>
-          <a:ln w="15874">
+          <a:ln w="11906">
             <a:solidFill>
-              <a:srgbClr val="B5BDC4"/>
+              <a:srgbClr val="C9CFD4"/>
             </a:solidFill>
           </a:ln>
           <a:effectLst/>
@@ -7232,8 +7232,8 @@
         </p:nvSpPr>
         <p:spPr>
           <a:xfrm>
-            <a:off x="10231437" y="4667249"/>
-            <a:ext cx="1595437" cy="428624"/>
+            <a:off x="10199687" y="4603749"/>
+            <a:ext cx="1603374" cy="428624"/>
           </a:xfrm>
           <a:prstGeom prst="rect">
             <a:avLst/>
@@ -7249,7 +7249,7 @@
           <a:p>
             <a:pPr algn="ctr" fontAlgn="base">
               <a:lnSpc>
-                <a:spcPts val="1578"/>
+                <a:spcPts val="1687"/>
               </a:lnSpc>
               <a:spcBef>
                 <a:spcPts val="0"/>
@@ -7257,9 +7257,9 @@
               <a:spcAft>
                 <a:spcPts val="0"/>
               </a:spcAft>
-              <a:defRPr sz="1335" b="1" i="0" lang="zh-CN" dirty="0">
-                <a:solidFill>
-                  <a:srgbClr val="2B2F33"/>
+              <a:defRPr sz="1437" b="0" i="0" lang="zh-CN" dirty="0">
+                <a:solidFill>
+                  <a:srgbClr val="3A4046"/>
                 </a:solidFill>
                 <a:latin typeface="DejaVu Sans"/>
                 <a:ea typeface="DejaVu Sans"/>
@@ -7267,9 +7267,9 @@
               </a:defRPr>
             </a:pPr>
             <a:r>
-              <a:rPr sz="1335" b="1" i="0" lang="zh-CN" dirty="0">
-                <a:solidFill>
-                  <a:srgbClr val="2B2F33"/>
+              <a:rPr sz="1437" b="0" i="0" lang="zh-CN" dirty="0">
+                <a:solidFill>
+                  <a:srgbClr val="3A4046"/>
                 </a:solidFill>
                 <a:latin typeface="DejaVu Sans"/>
                 <a:ea typeface="DejaVu Sans"/>
@@ -7288,8 +7288,8 @@
         </p:nvSpPr>
         <p:spPr>
           <a:xfrm>
-            <a:off x="10183812" y="5214937"/>
-            <a:ext cx="1690687" cy="476249"/>
+            <a:off x="10152062" y="5143499"/>
+            <a:ext cx="1698624" cy="476249"/>
           </a:xfrm>
           <a:prstGeom prst="roundRect">
             <a:avLst>
@@ -7299,9 +7299,9 @@
           <a:solidFill>
             <a:srgbClr val="FFFFFF"/>
           </a:solidFill>
-          <a:ln w="15874">
+          <a:ln w="11906">
             <a:solidFill>
-              <a:srgbClr val="B5BDC4"/>
+              <a:srgbClr val="C9CFD4"/>
             </a:solidFill>
           </a:ln>
           <a:effectLst/>
@@ -7336,8 +7336,8 @@
         </p:nvSpPr>
         <p:spPr>
           <a:xfrm>
-            <a:off x="10231437" y="5238749"/>
-            <a:ext cx="1595437" cy="428624"/>
+            <a:off x="10199687" y="5175249"/>
+            <a:ext cx="1603374" cy="428624"/>
           </a:xfrm>
           <a:prstGeom prst="rect">
             <a:avLst/>
@@ -7353,7 +7353,7 @@
           <a:p>
             <a:pPr algn="ctr" fontAlgn="base">
               <a:lnSpc>
-                <a:spcPts val="1953"/>
+                <a:spcPts val="2093"/>
               </a:lnSpc>
               <a:spcBef>
                 <a:spcPts val="0"/>
@@ -7361,9 +7361,9 @@
               <a:spcAft>
                 <a:spcPts val="0"/>
               </a:spcAft>
-              <a:defRPr sz="1335" b="1" i="0" lang="zh-CN" dirty="0">
-                <a:solidFill>
-                  <a:srgbClr val="2B2F33"/>
+              <a:defRPr sz="1437" b="0" i="0" lang="zh-CN" dirty="0">
+                <a:solidFill>
+                  <a:srgbClr val="3A4046"/>
                 </a:solidFill>
                 <a:latin typeface="Noto Sans CJK SC"/>
                 <a:ea typeface="Noto Sans CJK SC"/>
@@ -7371,9 +7371,9 @@
               </a:defRPr>
             </a:pPr>
             <a:r>
-              <a:rPr sz="1335" b="1" i="0" lang="zh-CN" dirty="0">
-                <a:solidFill>
-                  <a:srgbClr val="2B2F33"/>
+              <a:rPr sz="1437" b="0" i="0" lang="zh-CN" dirty="0">
+                <a:solidFill>
+                  <a:srgbClr val="3A4046"/>
                 </a:solidFill>
                 <a:latin typeface="Noto Sans CJK SC"/>
                 <a:ea typeface="Noto Sans CJK SC"/>
@@ -7392,8 +7392,8 @@
         </p:nvCxnSpPr>
         <p:spPr>
           <a:xfrm>
-            <a:off x="11001374" y="5834062"/>
-            <a:ext cx="0" cy="1785937"/>
+            <a:off x="11001374" y="5818187"/>
+            <a:ext cx="0" cy="1801812"/>
           </a:xfrm>
           <a:prstGeom prst="line">
             <a:avLst/>
@@ -7653,7 +7653,7 @@
         <p:spPr>
           <a:xfrm>
             <a:off x="111124" y="3627437"/>
-            <a:ext cx="111125" cy="0"/>
+            <a:ext cx="95250" cy="0"/>
           </a:xfrm>
           <a:prstGeom prst="line">
             <a:avLst/>
@@ -7692,8 +7692,8 @@
         </p:nvSpPr>
         <p:spPr>
           <a:xfrm>
-            <a:off x="2952749" y="2293937"/>
-            <a:ext cx="2651124" cy="396874"/>
+            <a:off x="2952749" y="2230437"/>
+            <a:ext cx="2746374" cy="396874"/>
           </a:xfrm>
           <a:prstGeom prst="roundRect">
             <a:avLst>
@@ -7701,7 +7701,7 @@
             </a:avLst>
           </a:prstGeom>
           <a:solidFill>
-            <a:srgbClr val="FBF3E3"/>
+            <a:srgbClr val="FFFFFF"/>
           </a:solidFill>
           <a:ln w="19843">
             <a:solidFill>
@@ -7740,8 +7740,8 @@
         </p:nvSpPr>
         <p:spPr>
           <a:xfrm>
-            <a:off x="3032124" y="2333624"/>
-            <a:ext cx="2492374" cy="317499"/>
+            <a:off x="3032124" y="2270124"/>
+            <a:ext cx="2587624" cy="317499"/>
           </a:xfrm>
           <a:prstGeom prst="rect">
             <a:avLst/>
@@ -7807,8 +7807,8 @@
         </p:nvCxnSpPr>
         <p:spPr>
           <a:xfrm flipH="1">
-            <a:off x="2873374" y="2698749"/>
-            <a:ext cx="190500" cy="55563"/>
+            <a:off x="2873374" y="2635249"/>
+            <a:ext cx="190500" cy="63500"/>
           </a:xfrm>
           <a:prstGeom prst="line">
             <a:avLst/>
@@ -7843,7 +7843,7 @@
         </p:nvSpPr>
         <p:spPr>
           <a:xfrm>
-            <a:off x="2746374" y="2730499"/>
+            <a:off x="2746374" y="2682874"/>
             <a:ext cx="95249" cy="95249"/>
           </a:xfrm>
           <a:prstGeom prst="ellipse">
@@ -7887,8 +7887,8 @@
         </p:nvSpPr>
         <p:spPr>
           <a:xfrm>
-            <a:off x="5167312" y="4349749"/>
-            <a:ext cx="2524124" cy="412749"/>
+            <a:off x="5072062" y="4381499"/>
+            <a:ext cx="2659062" cy="412749"/>
           </a:xfrm>
           <a:prstGeom prst="roundRect">
             <a:avLst>
@@ -7896,7 +7896,7 @@
             </a:avLst>
           </a:prstGeom>
           <a:solidFill>
-            <a:srgbClr val="FBF3E3"/>
+            <a:srgbClr val="FFFFFF"/>
           </a:solidFill>
           <a:ln w="19843">
             <a:solidFill>
@@ -7935,8 +7935,8 @@
         </p:nvSpPr>
         <p:spPr>
           <a:xfrm>
-            <a:off x="5246687" y="4389437"/>
-            <a:ext cx="2365374" cy="333374"/>
+            <a:off x="5151437" y="4421187"/>
+            <a:ext cx="2500312" cy="333374"/>
           </a:xfrm>
           <a:prstGeom prst="rect">
             <a:avLst/>
@@ -7991,8 +7991,8 @@
         </p:nvCxnSpPr>
         <p:spPr>
           <a:xfrm flipV="1">
-            <a:off x="6429374" y="4286249"/>
-            <a:ext cx="0" cy="47625"/>
+            <a:off x="6397624" y="4278312"/>
+            <a:ext cx="0" cy="87312"/>
           </a:xfrm>
           <a:prstGeom prst="line">
             <a:avLst/>
@@ -8027,7 +8027,7 @@
         </p:nvSpPr>
         <p:spPr>
           <a:xfrm>
-            <a:off x="6381749" y="4175124"/>
+            <a:off x="6349999" y="4175124"/>
             <a:ext cx="95249" cy="95249"/>
           </a:xfrm>
           <a:prstGeom prst="ellipse">
@@ -8071,8 +8071,8 @@
         </p:nvCxnSpPr>
         <p:spPr>
           <a:xfrm>
-            <a:off x="6429374" y="4778374"/>
-            <a:ext cx="0" cy="95250"/>
+            <a:off x="6397624" y="4810124"/>
+            <a:ext cx="0" cy="79375"/>
           </a:xfrm>
           <a:prstGeom prst="line">
             <a:avLst/>
@@ -8107,7 +8107,7 @@
         </p:nvSpPr>
         <p:spPr>
           <a:xfrm>
-            <a:off x="6381749" y="4937124"/>
+            <a:off x="6349999" y="4905374"/>
             <a:ext cx="95249" cy="95249"/>
           </a:xfrm>
           <a:prstGeom prst="ellipse">
@@ -8151,8 +8151,8 @@
         </p:nvSpPr>
         <p:spPr>
           <a:xfrm>
-            <a:off x="10056812" y="1698624"/>
-            <a:ext cx="1944687" cy="793749"/>
+            <a:off x="9969499" y="1563687"/>
+            <a:ext cx="2047874" cy="793749"/>
           </a:xfrm>
           <a:prstGeom prst="roundRect">
             <a:avLst>
@@ -8160,7 +8160,7 @@
             </a:avLst>
           </a:prstGeom>
           <a:solidFill>
-            <a:srgbClr val="FBF3E3"/>
+            <a:srgbClr val="FFFFFF"/>
           </a:solidFill>
           <a:ln w="19843">
             <a:solidFill>
@@ -8199,8 +8199,8 @@
         </p:nvSpPr>
         <p:spPr>
           <a:xfrm>
-            <a:off x="10136187" y="1738312"/>
-            <a:ext cx="1785937" cy="714374"/>
+            <a:off x="10048874" y="1603374"/>
+            <a:ext cx="1889124" cy="714374"/>
           </a:xfrm>
           <a:prstGeom prst="rect">
             <a:avLst/>
@@ -8287,8 +8287,8 @@
         </p:nvCxnSpPr>
         <p:spPr>
           <a:xfrm>
-            <a:off x="11112499" y="2508249"/>
-            <a:ext cx="246063" cy="277813"/>
+            <a:off x="10993437" y="2373312"/>
+            <a:ext cx="230187" cy="365125"/>
           </a:xfrm>
           <a:prstGeom prst="line">
             <a:avLst/>
@@ -8323,7 +8323,7 @@
         </p:nvSpPr>
         <p:spPr>
           <a:xfrm>
-            <a:off x="11382374" y="2809874"/>
+            <a:off x="11223624" y="2754312"/>
             <a:ext cx="95249" cy="95249"/>
           </a:xfrm>
           <a:prstGeom prst="ellipse">

--- a/media/figstudio/fig03_roadmap/fig03_research_roadmap_editable.pptx
+++ b/media/figstudio/fig03_roadmap/fig03_research_roadmap_editable.pptx
@@ -3535,9 +3535,9 @@
           <a:solidFill>
             <a:srgbClr val="FFFFFF"/>
           </a:solidFill>
-          <a:ln w="19843">
+          <a:ln w="23812">
             <a:solidFill>
-              <a:srgbClr val="4A5158"/>
+              <a:srgbClr val="3B4952"/>
             </a:solidFill>
           </a:ln>
           <a:effectLst/>
@@ -3599,7 +3599,7 @@
               </a:spcAft>
               <a:defRPr sz="1749" b="1" i="0" lang="zh-CN" dirty="0">
                 <a:solidFill>
-                  <a:srgbClr val="1F2326"/>
+                  <a:srgbClr val="19232C"/>
                 </a:solidFill>
                 <a:latin typeface="Noto Sans CJK SC"/>
                 <a:ea typeface="Noto Sans CJK SC"/>
@@ -3609,7 +3609,7 @@
             <a:r>
               <a:rPr sz="1749" b="1" i="0" lang="zh-CN" dirty="0">
                 <a:solidFill>
-                  <a:srgbClr val="1F2326"/>
+                  <a:srgbClr val="19232C"/>
                 </a:solidFill>
                 <a:latin typeface="Noto Sans CJK SC"/>
                 <a:ea typeface="Noto Sans CJK SC"/>
@@ -3641,7 +3641,7 @@
           </a:solidFill>
           <a:ln w="11906">
             <a:solidFill>
-              <a:srgbClr val="C9CFD4"/>
+              <a:srgbClr val="C6CCD1"/>
             </a:solidFill>
           </a:ln>
           <a:effectLst/>
@@ -3703,7 +3703,7 @@
               </a:spcAft>
               <a:defRPr sz="1437" b="0" i="0" lang="zh-CN" dirty="0">
                 <a:solidFill>
-                  <a:srgbClr val="3A4046"/>
+                  <a:srgbClr val="2F3840"/>
                 </a:solidFill>
                 <a:latin typeface="DejaVu Sans"/>
                 <a:ea typeface="DejaVu Sans"/>
@@ -3713,7 +3713,7 @@
             <a:r>
               <a:rPr sz="1437" b="0" i="0" lang="zh-CN" dirty="0">
                 <a:solidFill>
-                  <a:srgbClr val="3A4046"/>
+                  <a:srgbClr val="2F3840"/>
                 </a:solidFill>
                 <a:latin typeface="DejaVu Sans"/>
                 <a:ea typeface="DejaVu Sans"/>
@@ -3724,7 +3724,7 @@
             <a:r>
               <a:rPr sz="1437" b="0" i="0" lang="zh-CN" dirty="0">
                 <a:solidFill>
-                  <a:srgbClr val="3A4046"/>
+                  <a:srgbClr val="2F3840"/>
                 </a:solidFill>
                 <a:latin typeface="Noto Sans CJK SC"/>
                 <a:ea typeface="Noto Sans CJK SC"/>
@@ -3756,7 +3756,7 @@
           </a:solidFill>
           <a:ln w="11906">
             <a:solidFill>
-              <a:srgbClr val="C9CFD4"/>
+              <a:srgbClr val="C6CCD1"/>
             </a:solidFill>
           </a:ln>
           <a:effectLst/>
@@ -3818,7 +3818,7 @@
               </a:spcAft>
               <a:defRPr sz="1437" b="0" i="0" lang="zh-CN" dirty="0">
                 <a:solidFill>
-                  <a:srgbClr val="3A4046"/>
+                  <a:srgbClr val="2F3840"/>
                 </a:solidFill>
                 <a:latin typeface="DejaVu Sans"/>
                 <a:ea typeface="DejaVu Sans"/>
@@ -3828,7 +3828,7 @@
             <a:r>
               <a:rPr sz="1437" b="0" i="0" lang="zh-CN" dirty="0">
                 <a:solidFill>
-                  <a:srgbClr val="3A4046"/>
+                  <a:srgbClr val="2F3840"/>
                 </a:solidFill>
                 <a:latin typeface="DejaVu Sans"/>
                 <a:ea typeface="DejaVu Sans"/>
@@ -3839,7 +3839,7 @@
             <a:r>
               <a:rPr sz="1437" b="0" i="0" lang="zh-CN" dirty="0">
                 <a:solidFill>
-                  <a:srgbClr val="3A4046"/>
+                  <a:srgbClr val="2F3840"/>
                 </a:solidFill>
                 <a:latin typeface="Noto Sans CJK SC"/>
                 <a:ea typeface="Noto Sans CJK SC"/>
@@ -3871,7 +3871,7 @@
           </a:solidFill>
           <a:ln w="11906">
             <a:solidFill>
-              <a:srgbClr val="C9CFD4"/>
+              <a:srgbClr val="C6CCD1"/>
             </a:solidFill>
           </a:ln>
           <a:effectLst/>
@@ -3933,7 +3933,7 @@
               </a:spcAft>
               <a:defRPr sz="1437" b="0" i="0" lang="zh-CN" dirty="0">
                 <a:solidFill>
-                  <a:srgbClr val="3A4046"/>
+                  <a:srgbClr val="2F3840"/>
                 </a:solidFill>
                 <a:latin typeface="DejaVu Sans"/>
                 <a:ea typeface="DejaVu Sans"/>
@@ -3943,7 +3943,7 @@
             <a:r>
               <a:rPr sz="1437" b="0" i="0" lang="zh-CN" dirty="0">
                 <a:solidFill>
-                  <a:srgbClr val="3A4046"/>
+                  <a:srgbClr val="2F3840"/>
                 </a:solidFill>
                 <a:latin typeface="DejaVu Sans"/>
                 <a:ea typeface="DejaVu Sans"/>
@@ -3954,7 +3954,7 @@
             <a:r>
               <a:rPr sz="1437" b="0" i="0" lang="zh-CN" dirty="0">
                 <a:solidFill>
-                  <a:srgbClr val="3A4046"/>
+                  <a:srgbClr val="2F3840"/>
                 </a:solidFill>
                 <a:latin typeface="Noto Sans CJK SC"/>
                 <a:ea typeface="Noto Sans CJK SC"/>
@@ -4010,7 +4010,7 @@
             </a:pathLst>
           </a:custGeom>
           <a:solidFill>
-            <a:srgbClr val="1F6F78"/>
+            <a:srgbClr val="087887"/>
           </a:solidFill>
           <a:ln>
             <a:noFill/>
@@ -4058,9 +4058,9 @@
           <a:solidFill>
             <a:srgbClr val="FFFFFF"/>
           </a:solidFill>
-          <a:ln w="19843">
+          <a:ln w="23812">
             <a:solidFill>
-              <a:srgbClr val="4A5158"/>
+              <a:srgbClr val="3B4952"/>
             </a:solidFill>
           </a:ln>
           <a:effectLst/>
@@ -4122,7 +4122,7 @@
               </a:spcAft>
               <a:defRPr sz="1749" b="1" i="0" lang="zh-CN" dirty="0">
                 <a:solidFill>
-                  <a:srgbClr val="1F2326"/>
+                  <a:srgbClr val="19232C"/>
                 </a:solidFill>
                 <a:latin typeface="Noto Sans CJK SC"/>
                 <a:ea typeface="Noto Sans CJK SC"/>
@@ -4132,7 +4132,7 @@
             <a:r>
               <a:rPr sz="1749" b="1" i="0" lang="zh-CN" dirty="0">
                 <a:solidFill>
-                  <a:srgbClr val="1F2326"/>
+                  <a:srgbClr val="19232C"/>
                 </a:solidFill>
                 <a:latin typeface="Noto Sans CJK SC"/>
                 <a:ea typeface="Noto Sans CJK SC"/>
@@ -4164,7 +4164,7 @@
           </a:solidFill>
           <a:ln w="11906">
             <a:solidFill>
-              <a:srgbClr val="C9CFD4"/>
+              <a:srgbClr val="C6CCD1"/>
             </a:solidFill>
           </a:ln>
           <a:effectLst/>
@@ -4226,7 +4226,7 @@
               </a:spcAft>
               <a:defRPr sz="1437" b="0" i="0" lang="zh-CN" dirty="0">
                 <a:solidFill>
-                  <a:srgbClr val="3A4046"/>
+                  <a:srgbClr val="2F3840"/>
                 </a:solidFill>
                 <a:latin typeface="Noto Sans CJK SC"/>
                 <a:ea typeface="Noto Sans CJK SC"/>
@@ -4236,7 +4236,7 @@
             <a:r>
               <a:rPr sz="1437" b="0" i="0" lang="zh-CN" dirty="0">
                 <a:solidFill>
-                  <a:srgbClr val="3A4046"/>
+                  <a:srgbClr val="2F3840"/>
                 </a:solidFill>
                 <a:latin typeface="Noto Sans CJK SC"/>
                 <a:ea typeface="Noto Sans CJK SC"/>
@@ -4268,7 +4268,7 @@
           </a:solidFill>
           <a:ln w="11906">
             <a:solidFill>
-              <a:srgbClr val="C9CFD4"/>
+              <a:srgbClr val="C6CCD1"/>
             </a:solidFill>
           </a:ln>
           <a:effectLst/>
@@ -4330,7 +4330,7 @@
               </a:spcAft>
               <a:defRPr sz="1437" b="0" i="0" lang="zh-CN" dirty="0">
                 <a:solidFill>
-                  <a:srgbClr val="3A4046"/>
+                  <a:srgbClr val="2F3840"/>
                 </a:solidFill>
                 <a:latin typeface="DejaVu Sans"/>
                 <a:ea typeface="DejaVu Sans"/>
@@ -4340,7 +4340,7 @@
             <a:r>
               <a:rPr sz="1437" b="0" i="0" lang="zh-CN" dirty="0">
                 <a:solidFill>
-                  <a:srgbClr val="3A4046"/>
+                  <a:srgbClr val="2F3840"/>
                 </a:solidFill>
                 <a:latin typeface="DejaVu Sans"/>
                 <a:ea typeface="DejaVu Sans"/>
@@ -4351,7 +4351,7 @@
             <a:r>
               <a:rPr sz="1437" b="0" i="0" lang="zh-CN" dirty="0">
                 <a:solidFill>
-                  <a:srgbClr val="3A4046"/>
+                  <a:srgbClr val="2F3840"/>
                 </a:solidFill>
                 <a:latin typeface="Noto Sans CJK SC"/>
                 <a:ea typeface="Noto Sans CJK SC"/>
@@ -4383,7 +4383,7 @@
           </a:solidFill>
           <a:ln w="11906">
             <a:solidFill>
-              <a:srgbClr val="C9CFD4"/>
+              <a:srgbClr val="C6CCD1"/>
             </a:solidFill>
           </a:ln>
           <a:effectLst/>
@@ -4445,7 +4445,7 @@
               </a:spcAft>
               <a:defRPr sz="1437" b="0" i="0" lang="zh-CN" dirty="0">
                 <a:solidFill>
-                  <a:srgbClr val="3A4046"/>
+                  <a:srgbClr val="2F3840"/>
                 </a:solidFill>
                 <a:latin typeface="Noto Sans CJK SC"/>
                 <a:ea typeface="Noto Sans CJK SC"/>
@@ -4455,7 +4455,7 @@
             <a:r>
               <a:rPr sz="1437" b="0" i="0" lang="zh-CN" dirty="0">
                 <a:solidFill>
-                  <a:srgbClr val="3A4046"/>
+                  <a:srgbClr val="2F3840"/>
                 </a:solidFill>
                 <a:latin typeface="Noto Sans CJK SC"/>
                 <a:ea typeface="Noto Sans CJK SC"/>
@@ -4511,7 +4511,7 @@
             </a:pathLst>
           </a:custGeom>
           <a:solidFill>
-            <a:srgbClr val="1F6F78"/>
+            <a:srgbClr val="087887"/>
           </a:solidFill>
           <a:ln>
             <a:noFill/>
@@ -4559,9 +4559,9 @@
           <a:solidFill>
             <a:srgbClr val="FFFFFF"/>
           </a:solidFill>
-          <a:ln w="19843">
+          <a:ln w="23812">
             <a:solidFill>
-              <a:srgbClr val="4A5158"/>
+              <a:srgbClr val="3B4952"/>
             </a:solidFill>
           </a:ln>
           <a:effectLst/>
@@ -4623,7 +4623,7 @@
               </a:spcAft>
               <a:defRPr sz="1749" b="1" i="0" lang="zh-CN" dirty="0">
                 <a:solidFill>
-                  <a:srgbClr val="1F2326"/>
+                  <a:srgbClr val="19232C"/>
                 </a:solidFill>
                 <a:latin typeface="Noto Sans CJK SC"/>
                 <a:ea typeface="Noto Sans CJK SC"/>
@@ -4633,7 +4633,7 @@
             <a:r>
               <a:rPr sz="1749" b="1" i="0" lang="zh-CN" dirty="0">
                 <a:solidFill>
-                  <a:srgbClr val="1F2326"/>
+                  <a:srgbClr val="19232C"/>
                 </a:solidFill>
                 <a:latin typeface="Noto Sans CJK SC"/>
                 <a:ea typeface="Noto Sans CJK SC"/>
@@ -4665,7 +4665,7 @@
           </a:solidFill>
           <a:ln w="11906">
             <a:solidFill>
-              <a:srgbClr val="C9CFD4"/>
+              <a:srgbClr val="C6CCD1"/>
             </a:solidFill>
           </a:ln>
           <a:effectLst/>
@@ -4727,7 +4727,7 @@
               </a:spcAft>
               <a:defRPr sz="1437" b="0" i="0" lang="zh-CN" dirty="0">
                 <a:solidFill>
-                  <a:srgbClr val="3A4046"/>
+                  <a:srgbClr val="2F3840"/>
                 </a:solidFill>
                 <a:latin typeface="DejaVu Sans"/>
                 <a:ea typeface="DejaVu Sans"/>
@@ -4737,7 +4737,7 @@
             <a:r>
               <a:rPr sz="1437" b="0" i="0" lang="zh-CN" dirty="0">
                 <a:solidFill>
-                  <a:srgbClr val="3A4046"/>
+                  <a:srgbClr val="2F3840"/>
                 </a:solidFill>
                 <a:latin typeface="DejaVu Sans"/>
                 <a:ea typeface="DejaVu Sans"/>
@@ -4769,7 +4769,7 @@
           </a:solidFill>
           <a:ln w="11906">
             <a:solidFill>
-              <a:srgbClr val="C9CFD4"/>
+              <a:srgbClr val="C6CCD1"/>
             </a:solidFill>
           </a:ln>
           <a:effectLst/>
@@ -4831,7 +4831,7 @@
               </a:spcAft>
               <a:defRPr sz="1437" b="0" i="0" lang="zh-CN" dirty="0">
                 <a:solidFill>
-                  <a:srgbClr val="3A4046"/>
+                  <a:srgbClr val="2F3840"/>
                 </a:solidFill>
                 <a:latin typeface="DejaVu Sans"/>
                 <a:ea typeface="DejaVu Sans"/>
@@ -4841,7 +4841,7 @@
             <a:r>
               <a:rPr sz="1437" b="0" i="0" lang="zh-CN" dirty="0">
                 <a:solidFill>
-                  <a:srgbClr val="3A4046"/>
+                  <a:srgbClr val="2F3840"/>
                 </a:solidFill>
                 <a:latin typeface="DejaVu Sans"/>
                 <a:ea typeface="DejaVu Sans"/>
@@ -4873,7 +4873,7 @@
           </a:solidFill>
           <a:ln w="11906">
             <a:solidFill>
-              <a:srgbClr val="C9CFD4"/>
+              <a:srgbClr val="C6CCD1"/>
             </a:solidFill>
           </a:ln>
           <a:effectLst/>
@@ -4994,7 +4994,7 @@
           </a:prstGeom>
           <a:ln w="39687">
             <a:solidFill>
-              <a:srgbClr val="1F6F78"/>
+              <a:srgbClr val="087887"/>
             </a:solidFill>
           </a:ln>
           <a:effectLst/>
@@ -5030,7 +5030,7 @@
           </a:prstGeom>
           <a:ln w="39687">
             <a:solidFill>
-              <a:srgbClr val="1F6F78"/>
+              <a:srgbClr val="087887"/>
             </a:solidFill>
           </a:ln>
           <a:effectLst/>
@@ -5095,7 +5095,7 @@
             </a:pathLst>
           </a:custGeom>
           <a:solidFill>
-            <a:srgbClr val="1F6F78"/>
+            <a:srgbClr val="087887"/>
           </a:solidFill>
           <a:ln>
             <a:noFill/>
@@ -5169,7 +5169,7 @@
             </a:pathLst>
           </a:custGeom>
           <a:solidFill>
-            <a:srgbClr val="1F6F78"/>
+            <a:srgbClr val="087887"/>
           </a:solidFill>
           <a:ln>
             <a:noFill/>
@@ -5217,9 +5217,9 @@
           <a:solidFill>
             <a:srgbClr val="FFFFFF"/>
           </a:solidFill>
-          <a:ln w="19843">
+          <a:ln w="23812">
             <a:solidFill>
-              <a:srgbClr val="4A5158"/>
+              <a:srgbClr val="3B4952"/>
             </a:solidFill>
           </a:ln>
           <a:effectLst/>
@@ -5281,7 +5281,7 @@
               </a:spcAft>
               <a:defRPr sz="1749" b="1" i="0" lang="zh-CN" dirty="0">
                 <a:solidFill>
-                  <a:srgbClr val="1F2326"/>
+                  <a:srgbClr val="19232C"/>
                 </a:solidFill>
                 <a:latin typeface="Noto Sans CJK SC"/>
                 <a:ea typeface="Noto Sans CJK SC"/>
@@ -5291,7 +5291,7 @@
             <a:r>
               <a:rPr sz="1749" b="1" i="0" lang="zh-CN" dirty="0">
                 <a:solidFill>
-                  <a:srgbClr val="1F2326"/>
+                  <a:srgbClr val="19232C"/>
                 </a:solidFill>
                 <a:latin typeface="Noto Sans CJK SC"/>
                 <a:ea typeface="Noto Sans CJK SC"/>
@@ -5323,7 +5323,7 @@
           </a:solidFill>
           <a:ln w="11906">
             <a:solidFill>
-              <a:srgbClr val="C9CFD4"/>
+              <a:srgbClr val="C6CCD1"/>
             </a:solidFill>
           </a:ln>
           <a:effectLst/>
@@ -5385,7 +5385,7 @@
               </a:spcAft>
               <a:defRPr sz="1374" b="0" i="0" lang="zh-CN" dirty="0">
                 <a:solidFill>
-                  <a:srgbClr val="3A4046"/>
+                  <a:srgbClr val="2F3840"/>
                 </a:solidFill>
                 <a:latin typeface="Noto Sans CJK SC"/>
                 <a:ea typeface="Noto Sans CJK SC"/>
@@ -5395,7 +5395,7 @@
             <a:r>
               <a:rPr sz="1374" b="0" i="0" lang="zh-CN" dirty="0">
                 <a:solidFill>
-                  <a:srgbClr val="3A4046"/>
+                  <a:srgbClr val="2F3840"/>
                 </a:solidFill>
                 <a:latin typeface="Noto Sans CJK SC"/>
                 <a:ea typeface="Noto Sans CJK SC"/>
@@ -5451,7 +5451,7 @@
             </a:pathLst>
           </a:custGeom>
           <a:solidFill>
-            <a:srgbClr val="1F6F78"/>
+            <a:srgbClr val="087887"/>
           </a:solidFill>
           <a:ln>
             <a:noFill/>
@@ -5501,7 +5501,7 @@
           </a:solidFill>
           <a:ln w="11906">
             <a:solidFill>
-              <a:srgbClr val="C9CFD4"/>
+              <a:srgbClr val="C6CCD1"/>
             </a:solidFill>
           </a:ln>
           <a:effectLst/>
@@ -5563,7 +5563,7 @@
               </a:spcAft>
               <a:defRPr sz="1374" b="0" i="0" lang="zh-CN" dirty="0">
                 <a:solidFill>
-                  <a:srgbClr val="3A4046"/>
+                  <a:srgbClr val="2F3840"/>
                 </a:solidFill>
                 <a:latin typeface="Noto Sans CJK SC"/>
                 <a:ea typeface="Noto Sans CJK SC"/>
@@ -5573,7 +5573,7 @@
             <a:r>
               <a:rPr sz="1374" b="0" i="0" lang="zh-CN" dirty="0">
                 <a:solidFill>
-                  <a:srgbClr val="3A4046"/>
+                  <a:srgbClr val="2F3840"/>
                 </a:solidFill>
                 <a:latin typeface="Noto Sans CJK SC"/>
                 <a:ea typeface="Noto Sans CJK SC"/>
@@ -5629,7 +5629,7 @@
             </a:pathLst>
           </a:custGeom>
           <a:solidFill>
-            <a:srgbClr val="1F6F78"/>
+            <a:srgbClr val="087887"/>
           </a:solidFill>
           <a:ln>
             <a:noFill/>
@@ -5679,7 +5679,7 @@
           </a:solidFill>
           <a:ln w="11906">
             <a:solidFill>
-              <a:srgbClr val="C9CFD4"/>
+              <a:srgbClr val="C6CCD1"/>
             </a:solidFill>
           </a:ln>
           <a:effectLst/>
@@ -5741,7 +5741,7 @@
               </a:spcAft>
               <a:defRPr sz="1374" b="0" i="0" lang="zh-CN" dirty="0">
                 <a:solidFill>
-                  <a:srgbClr val="3A4046"/>
+                  <a:srgbClr val="2F3840"/>
                 </a:solidFill>
                 <a:latin typeface="Noto Sans CJK SC"/>
                 <a:ea typeface="Noto Sans CJK SC"/>
@@ -5751,7 +5751,7 @@
             <a:r>
               <a:rPr sz="1374" b="0" i="0" lang="zh-CN" dirty="0">
                 <a:solidFill>
-                  <a:srgbClr val="3A4046"/>
+                  <a:srgbClr val="2F3840"/>
                 </a:solidFill>
                 <a:latin typeface="Noto Sans CJK SC"/>
                 <a:ea typeface="Noto Sans CJK SC"/>
@@ -5807,7 +5807,7 @@
             </a:pathLst>
           </a:custGeom>
           <a:solidFill>
-            <a:srgbClr val="1F6F78"/>
+            <a:srgbClr val="087887"/>
           </a:solidFill>
           <a:ln>
             <a:noFill/>
@@ -5857,7 +5857,7 @@
           </a:solidFill>
           <a:ln w="11906">
             <a:solidFill>
-              <a:srgbClr val="C9CFD4"/>
+              <a:srgbClr val="C6CCD1"/>
             </a:solidFill>
           </a:ln>
           <a:effectLst/>
@@ -5919,7 +5919,7 @@
               </a:spcAft>
               <a:defRPr sz="1374" b="0" i="0" lang="zh-CN" dirty="0">
                 <a:solidFill>
-                  <a:srgbClr val="3A4046"/>
+                  <a:srgbClr val="2F3840"/>
                 </a:solidFill>
                 <a:latin typeface="Noto Sans CJK SC"/>
                 <a:ea typeface="Noto Sans CJK SC"/>
@@ -5929,7 +5929,7 @@
             <a:r>
               <a:rPr sz="1374" b="0" i="0" lang="zh-CN" dirty="0">
                 <a:solidFill>
-                  <a:srgbClr val="3A4046"/>
+                  <a:srgbClr val="2F3840"/>
                 </a:solidFill>
                 <a:latin typeface="Noto Sans CJK SC"/>
                 <a:ea typeface="Noto Sans CJK SC"/>
@@ -5959,9 +5959,9 @@
           <a:solidFill>
             <a:srgbClr val="FFFFFF"/>
           </a:solidFill>
-          <a:ln w="19843">
+          <a:ln w="23812">
             <a:solidFill>
-              <a:srgbClr val="4A5158"/>
+              <a:srgbClr val="3B4952"/>
             </a:solidFill>
           </a:ln>
           <a:effectLst/>
@@ -6023,7 +6023,7 @@
               </a:spcAft>
               <a:defRPr sz="1749" b="1" i="0" lang="zh-CN" dirty="0">
                 <a:solidFill>
-                  <a:srgbClr val="1F2326"/>
+                  <a:srgbClr val="19232C"/>
                 </a:solidFill>
                 <a:latin typeface="Noto Sans CJK SC"/>
                 <a:ea typeface="Noto Sans CJK SC"/>
@@ -6033,7 +6033,7 @@
             <a:r>
               <a:rPr sz="1749" b="1" i="0" lang="zh-CN" dirty="0">
                 <a:solidFill>
-                  <a:srgbClr val="1F2326"/>
+                  <a:srgbClr val="19232C"/>
                 </a:solidFill>
                 <a:latin typeface="Noto Sans CJK SC"/>
                 <a:ea typeface="Noto Sans CJK SC"/>
@@ -6065,7 +6065,7 @@
           </a:solidFill>
           <a:ln w="11906">
             <a:solidFill>
-              <a:srgbClr val="C9CFD4"/>
+              <a:srgbClr val="C6CCD1"/>
             </a:solidFill>
           </a:ln>
           <a:effectLst/>
@@ -6127,7 +6127,7 @@
               </a:spcAft>
               <a:defRPr sz="1374" b="0" i="0" lang="zh-CN" dirty="0">
                 <a:solidFill>
-                  <a:srgbClr val="3A4046"/>
+                  <a:srgbClr val="2F3840"/>
                 </a:solidFill>
                 <a:latin typeface="Noto Sans CJK SC"/>
                 <a:ea typeface="Noto Sans CJK SC"/>
@@ -6137,7 +6137,7 @@
             <a:r>
               <a:rPr sz="1374" b="0" i="0" lang="zh-CN" dirty="0">
                 <a:solidFill>
-                  <a:srgbClr val="3A4046"/>
+                  <a:srgbClr val="2F3840"/>
                 </a:solidFill>
                 <a:latin typeface="Noto Sans CJK SC"/>
                 <a:ea typeface="Noto Sans CJK SC"/>
@@ -6193,7 +6193,7 @@
             </a:pathLst>
           </a:custGeom>
           <a:solidFill>
-            <a:srgbClr val="1F6F78"/>
+            <a:srgbClr val="087887"/>
           </a:solidFill>
           <a:ln>
             <a:noFill/>
@@ -6243,7 +6243,7 @@
           </a:solidFill>
           <a:ln w="11906">
             <a:solidFill>
-              <a:srgbClr val="C9CFD4"/>
+              <a:srgbClr val="C6CCD1"/>
             </a:solidFill>
           </a:ln>
           <a:effectLst/>
@@ -6305,7 +6305,7 @@
               </a:spcAft>
               <a:defRPr sz="1374" b="0" i="0" lang="zh-CN" dirty="0">
                 <a:solidFill>
-                  <a:srgbClr val="3A4046"/>
+                  <a:srgbClr val="2F3840"/>
                 </a:solidFill>
                 <a:latin typeface="Noto Sans CJK SC"/>
                 <a:ea typeface="Noto Sans CJK SC"/>
@@ -6315,7 +6315,7 @@
             <a:r>
               <a:rPr sz="1374" b="0" i="0" lang="zh-CN" dirty="0">
                 <a:solidFill>
-                  <a:srgbClr val="3A4046"/>
+                  <a:srgbClr val="2F3840"/>
                 </a:solidFill>
                 <a:latin typeface="Noto Sans CJK SC"/>
                 <a:ea typeface="Noto Sans CJK SC"/>
@@ -6371,7 +6371,7 @@
             </a:pathLst>
           </a:custGeom>
           <a:solidFill>
-            <a:srgbClr val="1F6F78"/>
+            <a:srgbClr val="087887"/>
           </a:solidFill>
           <a:ln>
             <a:noFill/>
@@ -6421,7 +6421,7 @@
           </a:solidFill>
           <a:ln w="11906">
             <a:solidFill>
-              <a:srgbClr val="C9CFD4"/>
+              <a:srgbClr val="C6CCD1"/>
             </a:solidFill>
           </a:ln>
           <a:effectLst/>
@@ -6483,7 +6483,7 @@
               </a:spcAft>
               <a:defRPr sz="1374" b="0" i="0" lang="zh-CN" dirty="0">
                 <a:solidFill>
-                  <a:srgbClr val="3A4046"/>
+                  <a:srgbClr val="2F3840"/>
                 </a:solidFill>
                 <a:latin typeface="Noto Sans CJK SC"/>
                 <a:ea typeface="Noto Sans CJK SC"/>
@@ -6493,7 +6493,7 @@
             <a:r>
               <a:rPr sz="1374" b="0" i="0" lang="zh-CN" dirty="0">
                 <a:solidFill>
-                  <a:srgbClr val="3A4046"/>
+                  <a:srgbClr val="2F3840"/>
                 </a:solidFill>
                 <a:latin typeface="Noto Sans CJK SC"/>
                 <a:ea typeface="Noto Sans CJK SC"/>
@@ -6549,7 +6549,7 @@
             </a:pathLst>
           </a:custGeom>
           <a:solidFill>
-            <a:srgbClr val="1F6F78"/>
+            <a:srgbClr val="087887"/>
           </a:solidFill>
           <a:ln>
             <a:noFill/>
@@ -6599,7 +6599,7 @@
           </a:solidFill>
           <a:ln w="11906">
             <a:solidFill>
-              <a:srgbClr val="C9CFD4"/>
+              <a:srgbClr val="C6CCD1"/>
             </a:solidFill>
           </a:ln>
           <a:effectLst/>
@@ -6661,7 +6661,7 @@
               </a:spcAft>
               <a:defRPr sz="1374" b="0" i="0" lang="zh-CN" dirty="0">
                 <a:solidFill>
-                  <a:srgbClr val="3A4046"/>
+                  <a:srgbClr val="2F3840"/>
                 </a:solidFill>
                 <a:latin typeface="Noto Sans CJK SC"/>
                 <a:ea typeface="Noto Sans CJK SC"/>
@@ -6671,7 +6671,7 @@
             <a:r>
               <a:rPr sz="1374" b="0" i="0" lang="zh-CN" dirty="0">
                 <a:solidFill>
-                  <a:srgbClr val="3A4046"/>
+                  <a:srgbClr val="2F3840"/>
                 </a:solidFill>
                 <a:latin typeface="Noto Sans CJK SC"/>
                 <a:ea typeface="Noto Sans CJK SC"/>
@@ -6698,7 +6698,7 @@
           </a:prstGeom>
           <a:ln w="39687">
             <a:solidFill>
-              <a:srgbClr val="1F6F78"/>
+              <a:srgbClr val="087887"/>
             </a:solidFill>
           </a:ln>
           <a:effectLst/>
@@ -6734,7 +6734,7 @@
           </a:prstGeom>
           <a:ln w="39687">
             <a:solidFill>
-              <a:srgbClr val="1F6F78"/>
+              <a:srgbClr val="087887"/>
             </a:solidFill>
           </a:ln>
           <a:effectLst/>
@@ -6770,7 +6770,7 @@
           </a:prstGeom>
           <a:ln w="39687">
             <a:solidFill>
-              <a:srgbClr val="1F6F78"/>
+              <a:srgbClr val="087887"/>
             </a:solidFill>
           </a:ln>
           <a:effectLst/>
@@ -6835,7 +6835,7 @@
             </a:pathLst>
           </a:custGeom>
           <a:solidFill>
-            <a:srgbClr val="1F6F78"/>
+            <a:srgbClr val="087887"/>
           </a:solidFill>
           <a:ln>
             <a:noFill/>
@@ -6883,9 +6883,9 @@
           <a:solidFill>
             <a:srgbClr val="FFFFFF"/>
           </a:solidFill>
-          <a:ln w="19843">
+          <a:ln w="23812">
             <a:solidFill>
-              <a:srgbClr val="4A5158"/>
+              <a:srgbClr val="3B4952"/>
             </a:solidFill>
           </a:ln>
           <a:effectLst/>
@@ -6947,7 +6947,7 @@
               </a:spcAft>
               <a:defRPr sz="1749" b="1" i="0" lang="zh-CN" dirty="0">
                 <a:solidFill>
-                  <a:srgbClr val="1F2326"/>
+                  <a:srgbClr val="19232C"/>
                 </a:solidFill>
                 <a:latin typeface="Noto Sans CJK SC"/>
                 <a:ea typeface="Noto Sans CJK SC"/>
@@ -6957,7 +6957,7 @@
             <a:r>
               <a:rPr sz="1749" b="1" i="0" lang="zh-CN" dirty="0">
                 <a:solidFill>
-                  <a:srgbClr val="1F2326"/>
+                  <a:srgbClr val="19232C"/>
                 </a:solidFill>
                 <a:latin typeface="Noto Sans CJK SC"/>
                 <a:ea typeface="Noto Sans CJK SC"/>
@@ -6989,7 +6989,7 @@
           </a:solidFill>
           <a:ln w="11906">
             <a:solidFill>
-              <a:srgbClr val="C9CFD4"/>
+              <a:srgbClr val="C6CCD1"/>
             </a:solidFill>
           </a:ln>
           <a:effectLst/>
@@ -7051,7 +7051,7 @@
               </a:spcAft>
               <a:defRPr sz="1437" b="0" i="0" lang="zh-CN" dirty="0">
                 <a:solidFill>
-                  <a:srgbClr val="3A4046"/>
+                  <a:srgbClr val="2F3840"/>
                 </a:solidFill>
                 <a:latin typeface="DejaVu Sans"/>
                 <a:ea typeface="DejaVu Sans"/>
@@ -7061,7 +7061,7 @@
             <a:r>
               <a:rPr sz="1437" b="0" i="0" lang="zh-CN" dirty="0">
                 <a:solidFill>
-                  <a:srgbClr val="3A4046"/>
+                  <a:srgbClr val="2F3840"/>
                 </a:solidFill>
                 <a:latin typeface="DejaVu Sans"/>
                 <a:ea typeface="DejaVu Sans"/>
@@ -7093,7 +7093,7 @@
           </a:solidFill>
           <a:ln w="11906">
             <a:solidFill>
-              <a:srgbClr val="C9CFD4"/>
+              <a:srgbClr val="C6CCD1"/>
             </a:solidFill>
           </a:ln>
           <a:effectLst/>
@@ -7155,7 +7155,7 @@
               </a:spcAft>
               <a:defRPr sz="1437" b="0" i="0" lang="zh-CN" dirty="0">
                 <a:solidFill>
-                  <a:srgbClr val="3A4046"/>
+                  <a:srgbClr val="2F3840"/>
                 </a:solidFill>
                 <a:latin typeface="DejaVu Sans"/>
                 <a:ea typeface="DejaVu Sans"/>
@@ -7165,7 +7165,7 @@
             <a:r>
               <a:rPr sz="1437" b="0" i="0" lang="zh-CN" dirty="0">
                 <a:solidFill>
-                  <a:srgbClr val="3A4046"/>
+                  <a:srgbClr val="2F3840"/>
                 </a:solidFill>
                 <a:latin typeface="DejaVu Sans"/>
                 <a:ea typeface="DejaVu Sans"/>
@@ -7197,7 +7197,7 @@
           </a:solidFill>
           <a:ln w="11906">
             <a:solidFill>
-              <a:srgbClr val="C9CFD4"/>
+              <a:srgbClr val="C6CCD1"/>
             </a:solidFill>
           </a:ln>
           <a:effectLst/>
@@ -7259,7 +7259,7 @@
               </a:spcAft>
               <a:defRPr sz="1437" b="0" i="0" lang="zh-CN" dirty="0">
                 <a:solidFill>
-                  <a:srgbClr val="3A4046"/>
+                  <a:srgbClr val="2F3840"/>
                 </a:solidFill>
                 <a:latin typeface="DejaVu Sans"/>
                 <a:ea typeface="DejaVu Sans"/>
@@ -7269,7 +7269,7 @@
             <a:r>
               <a:rPr sz="1437" b="0" i="0" lang="zh-CN" dirty="0">
                 <a:solidFill>
-                  <a:srgbClr val="3A4046"/>
+                  <a:srgbClr val="2F3840"/>
                 </a:solidFill>
                 <a:latin typeface="DejaVu Sans"/>
                 <a:ea typeface="DejaVu Sans"/>
@@ -7301,7 +7301,7 @@
           </a:solidFill>
           <a:ln w="11906">
             <a:solidFill>
-              <a:srgbClr val="C9CFD4"/>
+              <a:srgbClr val="C6CCD1"/>
             </a:solidFill>
           </a:ln>
           <a:effectLst/>
@@ -7363,7 +7363,7 @@
               </a:spcAft>
               <a:defRPr sz="1437" b="0" i="0" lang="zh-CN" dirty="0">
                 <a:solidFill>
-                  <a:srgbClr val="3A4046"/>
+                  <a:srgbClr val="2F3840"/>
                 </a:solidFill>
                 <a:latin typeface="Noto Sans CJK SC"/>
                 <a:ea typeface="Noto Sans CJK SC"/>
@@ -7373,7 +7373,7 @@
             <a:r>
               <a:rPr sz="1437" b="0" i="0" lang="zh-CN" dirty="0">
                 <a:solidFill>
-                  <a:srgbClr val="3A4046"/>
+                  <a:srgbClr val="2F3840"/>
                 </a:solidFill>
                 <a:latin typeface="Noto Sans CJK SC"/>
                 <a:ea typeface="Noto Sans CJK SC"/>
@@ -7400,7 +7400,7 @@
           </a:prstGeom>
           <a:ln w="31749">
             <a:solidFill>
-              <a:srgbClr val="1F6F78"/>
+              <a:srgbClr val="087887"/>
             </a:solidFill>
             <a:custDash>
               <a:ds d="400000" sp="250000"/>
@@ -7439,7 +7439,7 @@
           </a:prstGeom>
           <a:ln w="31749">
             <a:solidFill>
-              <a:srgbClr val="1F6F78"/>
+              <a:srgbClr val="087887"/>
             </a:solidFill>
             <a:custDash>
               <a:ds d="400000" sp="250000"/>
@@ -7483,7 +7483,7 @@
           </a:solidFill>
           <a:ln w="15874">
             <a:solidFill>
-              <a:srgbClr val="1F6F78"/>
+              <a:srgbClr val="087887"/>
             </a:solidFill>
           </a:ln>
           <a:effectLst/>
@@ -7545,7 +7545,7 @@
               </a:spcAft>
               <a:defRPr sz="1374" b="1" i="0" lang="zh-CN" dirty="0">
                 <a:solidFill>
-                  <a:srgbClr val="1F6F78"/>
+                  <a:srgbClr val="087887"/>
                 </a:solidFill>
                 <a:latin typeface="Noto Sans CJK SC"/>
                 <a:ea typeface="Noto Sans CJK SC"/>
@@ -7555,7 +7555,7 @@
             <a:r>
               <a:rPr sz="1374" b="1" i="0" lang="zh-CN" dirty="0">
                 <a:solidFill>
-                  <a:srgbClr val="1F6F78"/>
+                  <a:srgbClr val="087887"/>
                 </a:solidFill>
                 <a:latin typeface="Noto Sans CJK SC"/>
                 <a:ea typeface="Noto Sans CJK SC"/>
@@ -7582,7 +7582,7 @@
           </a:prstGeom>
           <a:ln w="31749">
             <a:solidFill>
-              <a:srgbClr val="1F6F78"/>
+              <a:srgbClr val="087887"/>
             </a:solidFill>
             <a:custDash>
               <a:ds d="400000" sp="250000"/>
@@ -7621,7 +7621,7 @@
           </a:prstGeom>
           <a:ln w="31749">
             <a:solidFill>
-              <a:srgbClr val="1F6F78"/>
+              <a:srgbClr val="087887"/>
             </a:solidFill>
             <a:custDash>
               <a:ds d="400000" sp="250000"/>
@@ -7660,7 +7660,7 @@
           </a:prstGeom>
           <a:ln w="31749">
             <a:solidFill>
-              <a:srgbClr val="1F6F78"/>
+              <a:srgbClr val="087887"/>
             </a:solidFill>
             <a:custDash>
               <a:ds d="400000" sp="250000"/>
@@ -7705,7 +7705,7 @@
           </a:solidFill>
           <a:ln w="19843">
             <a:solidFill>
-              <a:srgbClr val="B8862B"/>
+              <a:srgbClr val="AE7213"/>
             </a:solidFill>
           </a:ln>
           <a:effectLst/>
@@ -7767,7 +7767,7 @@
               </a:spcAft>
               <a:defRPr sz="1374" b="1" i="0" lang="zh-CN" dirty="0">
                 <a:solidFill>
-                  <a:srgbClr val="7A5A1C"/>
+                  <a:srgbClr val="8A5A0E"/>
                 </a:solidFill>
                 <a:latin typeface="DejaVu Sans"/>
                 <a:ea typeface="DejaVu Sans"/>
@@ -7777,7 +7777,7 @@
             <a:r>
               <a:rPr sz="1374" b="1" i="0" lang="zh-CN" dirty="0">
                 <a:solidFill>
-                  <a:srgbClr val="7A5A1C"/>
+                  <a:srgbClr val="8A5A0E"/>
                 </a:solidFill>
                 <a:latin typeface="DejaVu Sans"/>
                 <a:ea typeface="DejaVu Sans"/>
@@ -7788,7 +7788,7 @@
             <a:r>
               <a:rPr sz="1374" b="1" i="0" lang="zh-CN" dirty="0">
                 <a:solidFill>
-                  <a:srgbClr val="7A5A1C"/>
+                  <a:srgbClr val="8A5A0E"/>
                 </a:solidFill>
                 <a:latin typeface="Noto Sans CJK SC"/>
                 <a:ea typeface="Noto Sans CJK SC"/>
@@ -7815,7 +7815,7 @@
           </a:prstGeom>
           <a:ln w="19843">
             <a:solidFill>
-              <a:srgbClr val="B8862B"/>
+              <a:srgbClr val="AE7213"/>
             </a:solidFill>
           </a:ln>
           <a:effectLst/>
@@ -7850,7 +7850,7 @@
             <a:avLst/>
           </a:prstGeom>
           <a:solidFill>
-            <a:srgbClr val="B8862B"/>
+            <a:srgbClr val="AE7213"/>
           </a:solidFill>
           <a:ln>
             <a:noFill/>
@@ -7900,7 +7900,7 @@
           </a:solidFill>
           <a:ln w="19843">
             <a:solidFill>
-              <a:srgbClr val="B8862B"/>
+              <a:srgbClr val="AE7213"/>
             </a:solidFill>
           </a:ln>
           <a:effectLst/>
@@ -7962,7 +7962,7 @@
               </a:spcAft>
               <a:defRPr sz="1374" b="1" i="0" lang="zh-CN" dirty="0">
                 <a:solidFill>
-                  <a:srgbClr val="7A5A1C"/>
+                  <a:srgbClr val="8A5A0E"/>
                 </a:solidFill>
                 <a:latin typeface="Noto Sans CJK SC"/>
                 <a:ea typeface="Noto Sans CJK SC"/>
@@ -7972,7 +7972,7 @@
             <a:r>
               <a:rPr sz="1374" b="1" i="0" lang="zh-CN" dirty="0">
                 <a:solidFill>
-                  <a:srgbClr val="7A5A1C"/>
+                  <a:srgbClr val="8A5A0E"/>
                 </a:solidFill>
                 <a:latin typeface="Noto Sans CJK SC"/>
                 <a:ea typeface="Noto Sans CJK SC"/>
@@ -7999,7 +7999,7 @@
           </a:prstGeom>
           <a:ln w="19843">
             <a:solidFill>
-              <a:srgbClr val="B8862B"/>
+              <a:srgbClr val="AE7213"/>
             </a:solidFill>
           </a:ln>
           <a:effectLst/>
@@ -8034,7 +8034,7 @@
             <a:avLst/>
           </a:prstGeom>
           <a:solidFill>
-            <a:srgbClr val="B8862B"/>
+            <a:srgbClr val="AE7213"/>
           </a:solidFill>
           <a:ln>
             <a:noFill/>
@@ -8079,7 +8079,7 @@
           </a:prstGeom>
           <a:ln w="19843">
             <a:solidFill>
-              <a:srgbClr val="B8862B"/>
+              <a:srgbClr val="AE7213"/>
             </a:solidFill>
           </a:ln>
           <a:effectLst/>
@@ -8114,7 +8114,7 @@
             <a:avLst/>
           </a:prstGeom>
           <a:solidFill>
-            <a:srgbClr val="B8862B"/>
+            <a:srgbClr val="AE7213"/>
           </a:solidFill>
           <a:ln>
             <a:noFill/>
@@ -8164,7 +8164,7 @@
           </a:solidFill>
           <a:ln w="19843">
             <a:solidFill>
-              <a:srgbClr val="B8862B"/>
+              <a:srgbClr val="AE7213"/>
             </a:solidFill>
           </a:ln>
           <a:effectLst/>
@@ -8226,7 +8226,7 @@
               </a:spcAft>
               <a:defRPr sz="1374" b="1" i="0" lang="zh-CN" dirty="0">
                 <a:solidFill>
-                  <a:srgbClr val="7A5A1C"/>
+                  <a:srgbClr val="8A5A0E"/>
                 </a:solidFill>
                 <a:latin typeface="Noto Sans CJK SC"/>
                 <a:ea typeface="Noto Sans CJK SC"/>
@@ -8236,7 +8236,7 @@
             <a:r>
               <a:rPr sz="1374" b="1" i="0" lang="zh-CN" dirty="0">
                 <a:solidFill>
-                  <a:srgbClr val="7A5A1C"/>
+                  <a:srgbClr val="8A5A0E"/>
                 </a:solidFill>
                 <a:latin typeface="Noto Sans CJK SC"/>
                 <a:ea typeface="Noto Sans CJK SC"/>
@@ -8258,7 +8258,7 @@
               </a:spcAft>
               <a:defRPr sz="1374" b="1" i="0" lang="zh-CN" dirty="0">
                 <a:solidFill>
-                  <a:srgbClr val="7A5A1C"/>
+                  <a:srgbClr val="8A5A0E"/>
                 </a:solidFill>
                 <a:latin typeface="Noto Sans CJK SC"/>
                 <a:ea typeface="Noto Sans CJK SC"/>
@@ -8268,7 +8268,7 @@
             <a:r>
               <a:rPr sz="1374" b="1" i="0" lang="zh-CN" dirty="0">
                 <a:solidFill>
-                  <a:srgbClr val="7A5A1C"/>
+                  <a:srgbClr val="8A5A0E"/>
                 </a:solidFill>
                 <a:latin typeface="Noto Sans CJK SC"/>
                 <a:ea typeface="Noto Sans CJK SC"/>
@@ -8295,7 +8295,7 @@
           </a:prstGeom>
           <a:ln w="19843">
             <a:solidFill>
-              <a:srgbClr val="B8862B"/>
+              <a:srgbClr val="AE7213"/>
             </a:solidFill>
           </a:ln>
           <a:effectLst/>
@@ -8330,7 +8330,7 @@
             <a:avLst/>
           </a:prstGeom>
           <a:solidFill>
-            <a:srgbClr val="B8862B"/>
+            <a:srgbClr val="AE7213"/>
           </a:solidFill>
           <a:ln>
             <a:noFill/>

--- a/media/figstudio/fig03_roadmap/fig03_research_roadmap_editable.pptx
+++ b/media/figstudio/fig03_roadmap/fig03_research_roadmap_editable.pptx
@@ -3533,7 +3533,7 @@
             </a:avLst>
           </a:prstGeom>
           <a:solidFill>
-            <a:srgbClr val="FFFFFF"/>
+            <a:srgbClr val="F2F5F7"/>
           </a:solidFill>
           <a:ln w="23812">
             <a:solidFill>
@@ -3641,7 +3641,7 @@
           </a:solidFill>
           <a:ln w="11906">
             <a:solidFill>
-              <a:srgbClr val="C6CCD1"/>
+              <a:srgbClr val="B5BDC4"/>
             </a:solidFill>
           </a:ln>
           <a:effectLst/>
@@ -3756,7 +3756,7 @@
           </a:solidFill>
           <a:ln w="11906">
             <a:solidFill>
-              <a:srgbClr val="C6CCD1"/>
+              <a:srgbClr val="B5BDC4"/>
             </a:solidFill>
           </a:ln>
           <a:effectLst/>
@@ -3871,7 +3871,7 @@
           </a:solidFill>
           <a:ln w="11906">
             <a:solidFill>
-              <a:srgbClr val="C6CCD1"/>
+              <a:srgbClr val="B5BDC4"/>
             </a:solidFill>
           </a:ln>
           <a:effectLst/>
@@ -4010,7 +4010,7 @@
             </a:pathLst>
           </a:custGeom>
           <a:solidFill>
-            <a:srgbClr val="087887"/>
+            <a:srgbClr val="0F7A88"/>
           </a:solidFill>
           <a:ln>
             <a:noFill/>
@@ -4056,11 +4056,11 @@
             </a:avLst>
           </a:prstGeom>
           <a:solidFill>
-            <a:srgbClr val="FFFFFF"/>
+            <a:srgbClr val="FBF1DC"/>
           </a:solidFill>
           <a:ln w="23812">
             <a:solidFill>
-              <a:srgbClr val="3B4952"/>
+              <a:srgbClr val="B4741A"/>
             </a:solidFill>
           </a:ln>
           <a:effectLst/>
@@ -4122,7 +4122,7 @@
               </a:spcAft>
               <a:defRPr sz="1749" b="1" i="0" lang="zh-CN" dirty="0">
                 <a:solidFill>
-                  <a:srgbClr val="19232C"/>
+                  <a:srgbClr val="6B4A0F"/>
                 </a:solidFill>
                 <a:latin typeface="Noto Sans CJK SC"/>
                 <a:ea typeface="Noto Sans CJK SC"/>
@@ -4132,7 +4132,7 @@
             <a:r>
               <a:rPr sz="1749" b="1" i="0" lang="zh-CN" dirty="0">
                 <a:solidFill>
-                  <a:srgbClr val="19232C"/>
+                  <a:srgbClr val="6B4A0F"/>
                 </a:solidFill>
                 <a:latin typeface="Noto Sans CJK SC"/>
                 <a:ea typeface="Noto Sans CJK SC"/>
@@ -4164,7 +4164,7 @@
           </a:solidFill>
           <a:ln w="11906">
             <a:solidFill>
-              <a:srgbClr val="C6CCD1"/>
+              <a:srgbClr val="B5BDC4"/>
             </a:solidFill>
           </a:ln>
           <a:effectLst/>
@@ -4268,7 +4268,7 @@
           </a:solidFill>
           <a:ln w="11906">
             <a:solidFill>
-              <a:srgbClr val="C6CCD1"/>
+              <a:srgbClr val="B5BDC4"/>
             </a:solidFill>
           </a:ln>
           <a:effectLst/>
@@ -4383,7 +4383,7 @@
           </a:solidFill>
           <a:ln w="11906">
             <a:solidFill>
-              <a:srgbClr val="C6CCD1"/>
+              <a:srgbClr val="B5BDC4"/>
             </a:solidFill>
           </a:ln>
           <a:effectLst/>
@@ -4511,7 +4511,7 @@
             </a:pathLst>
           </a:custGeom>
           <a:solidFill>
-            <a:srgbClr val="087887"/>
+            <a:srgbClr val="0F7A88"/>
           </a:solidFill>
           <a:ln>
             <a:noFill/>
@@ -4557,7 +4557,7 @@
             </a:avLst>
           </a:prstGeom>
           <a:solidFill>
-            <a:srgbClr val="FFFFFF"/>
+            <a:srgbClr val="F2F5F7"/>
           </a:solidFill>
           <a:ln w="23812">
             <a:solidFill>
@@ -4665,7 +4665,7 @@
           </a:solidFill>
           <a:ln w="11906">
             <a:solidFill>
-              <a:srgbClr val="C6CCD1"/>
+              <a:srgbClr val="B5BDC4"/>
             </a:solidFill>
           </a:ln>
           <a:effectLst/>
@@ -4769,7 +4769,7 @@
           </a:solidFill>
           <a:ln w="11906">
             <a:solidFill>
-              <a:srgbClr val="C6CCD1"/>
+              <a:srgbClr val="B5BDC4"/>
             </a:solidFill>
           </a:ln>
           <a:effectLst/>
@@ -4869,11 +4869,11 @@
             </a:avLst>
           </a:prstGeom>
           <a:solidFill>
-            <a:srgbClr val="F3F5F6"/>
+            <a:srgbClr val="F6E7C6"/>
           </a:solidFill>
           <a:ln w="11906">
             <a:solidFill>
-              <a:srgbClr val="C6CCD1"/>
+              <a:srgbClr val="B4741A"/>
             </a:solidFill>
           </a:ln>
           <a:effectLst/>
@@ -4935,7 +4935,7 @@
               </a:spcAft>
               <a:defRPr sz="1437" b="0" i="0" lang="zh-CN" dirty="0">
                 <a:solidFill>
-                  <a:srgbClr val="5A6470"/>
+                  <a:srgbClr val="8A5A0E"/>
                 </a:solidFill>
                 <a:latin typeface="Noto Sans CJK SC"/>
                 <a:ea typeface="Noto Sans CJK SC"/>
@@ -4945,7 +4945,7 @@
             <a:r>
               <a:rPr sz="1437" b="0" i="0" lang="zh-CN" dirty="0">
                 <a:solidFill>
-                  <a:srgbClr val="5A6470"/>
+                  <a:srgbClr val="8A5A0E"/>
                 </a:solidFill>
                 <a:latin typeface="Noto Sans CJK SC"/>
                 <a:ea typeface="Noto Sans CJK SC"/>
@@ -4956,7 +4956,7 @@
             <a:r>
               <a:rPr sz="1437" b="0" i="0" lang="zh-CN" dirty="0">
                 <a:solidFill>
-                  <a:srgbClr val="5A6470"/>
+                  <a:srgbClr val="8A5A0E"/>
                 </a:solidFill>
                 <a:latin typeface="DejaVu Sans"/>
                 <a:ea typeface="DejaVu Sans"/>
@@ -4967,7 +4967,7 @@
             <a:r>
               <a:rPr sz="1437" b="0" i="0" lang="zh-CN" dirty="0">
                 <a:solidFill>
-                  <a:srgbClr val="5A6470"/>
+                  <a:srgbClr val="8A5A0E"/>
                 </a:solidFill>
                 <a:latin typeface="Noto Sans CJK SC"/>
                 <a:ea typeface="Noto Sans CJK SC"/>
@@ -4994,7 +4994,7 @@
           </a:prstGeom>
           <a:ln w="39687">
             <a:solidFill>
-              <a:srgbClr val="087887"/>
+              <a:srgbClr val="0F7A88"/>
             </a:solidFill>
           </a:ln>
           <a:effectLst/>
@@ -5030,7 +5030,7 @@
           </a:prstGeom>
           <a:ln w="39687">
             <a:solidFill>
-              <a:srgbClr val="087887"/>
+              <a:srgbClr val="0F7A88"/>
             </a:solidFill>
           </a:ln>
           <a:effectLst/>
@@ -5095,7 +5095,7 @@
             </a:pathLst>
           </a:custGeom>
           <a:solidFill>
-            <a:srgbClr val="087887"/>
+            <a:srgbClr val="0F7A88"/>
           </a:solidFill>
           <a:ln>
             <a:noFill/>
@@ -5169,7 +5169,7 @@
             </a:pathLst>
           </a:custGeom>
           <a:solidFill>
-            <a:srgbClr val="087887"/>
+            <a:srgbClr val="0F7A88"/>
           </a:solidFill>
           <a:ln>
             <a:noFill/>
@@ -5215,11 +5215,11 @@
             </a:avLst>
           </a:prstGeom>
           <a:solidFill>
-            <a:srgbClr val="FFFFFF"/>
+            <a:srgbClr val="E1EFF1"/>
           </a:solidFill>
           <a:ln w="23812">
             <a:solidFill>
-              <a:srgbClr val="3B4952"/>
+              <a:srgbClr val="1F6F78"/>
             </a:solidFill>
           </a:ln>
           <a:effectLst/>
@@ -5281,7 +5281,7 @@
               </a:spcAft>
               <a:defRPr sz="1749" b="1" i="0" lang="zh-CN" dirty="0">
                 <a:solidFill>
-                  <a:srgbClr val="19232C"/>
+                  <a:srgbClr val="145159"/>
                 </a:solidFill>
                 <a:latin typeface="Noto Sans CJK SC"/>
                 <a:ea typeface="Noto Sans CJK SC"/>
@@ -5291,7 +5291,7 @@
             <a:r>
               <a:rPr sz="1749" b="1" i="0" lang="zh-CN" dirty="0">
                 <a:solidFill>
-                  <a:srgbClr val="19232C"/>
+                  <a:srgbClr val="145159"/>
                 </a:solidFill>
                 <a:latin typeface="Noto Sans CJK SC"/>
                 <a:ea typeface="Noto Sans CJK SC"/>
@@ -5323,7 +5323,7 @@
           </a:solidFill>
           <a:ln w="11906">
             <a:solidFill>
-              <a:srgbClr val="C6CCD1"/>
+              <a:srgbClr val="B5BDC4"/>
             </a:solidFill>
           </a:ln>
           <a:effectLst/>
@@ -5451,7 +5451,7 @@
             </a:pathLst>
           </a:custGeom>
           <a:solidFill>
-            <a:srgbClr val="087887"/>
+            <a:srgbClr val="0F7A88"/>
           </a:solidFill>
           <a:ln>
             <a:noFill/>
@@ -5501,7 +5501,7 @@
           </a:solidFill>
           <a:ln w="11906">
             <a:solidFill>
-              <a:srgbClr val="C6CCD1"/>
+              <a:srgbClr val="B5BDC4"/>
             </a:solidFill>
           </a:ln>
           <a:effectLst/>
@@ -5629,7 +5629,7 @@
             </a:pathLst>
           </a:custGeom>
           <a:solidFill>
-            <a:srgbClr val="087887"/>
+            <a:srgbClr val="0F7A88"/>
           </a:solidFill>
           <a:ln>
             <a:noFill/>
@@ -5679,7 +5679,7 @@
           </a:solidFill>
           <a:ln w="11906">
             <a:solidFill>
-              <a:srgbClr val="C6CCD1"/>
+              <a:srgbClr val="B5BDC4"/>
             </a:solidFill>
           </a:ln>
           <a:effectLst/>
@@ -5807,7 +5807,7 @@
             </a:pathLst>
           </a:custGeom>
           <a:solidFill>
-            <a:srgbClr val="087887"/>
+            <a:srgbClr val="0F7A88"/>
           </a:solidFill>
           <a:ln>
             <a:noFill/>
@@ -5857,7 +5857,7 @@
           </a:solidFill>
           <a:ln w="11906">
             <a:solidFill>
-              <a:srgbClr val="C6CCD1"/>
+              <a:srgbClr val="B5BDC4"/>
             </a:solidFill>
           </a:ln>
           <a:effectLst/>
@@ -5957,11 +5957,11 @@
             </a:avLst>
           </a:prstGeom>
           <a:solidFill>
-            <a:srgbClr val="FFFFFF"/>
+            <a:srgbClr val="E1EFF1"/>
           </a:solidFill>
           <a:ln w="23812">
             <a:solidFill>
-              <a:srgbClr val="3B4952"/>
+              <a:srgbClr val="1F6F78"/>
             </a:solidFill>
           </a:ln>
           <a:effectLst/>
@@ -6023,7 +6023,7 @@
               </a:spcAft>
               <a:defRPr sz="1749" b="1" i="0" lang="zh-CN" dirty="0">
                 <a:solidFill>
-                  <a:srgbClr val="19232C"/>
+                  <a:srgbClr val="145159"/>
                 </a:solidFill>
                 <a:latin typeface="Noto Sans CJK SC"/>
                 <a:ea typeface="Noto Sans CJK SC"/>
@@ -6033,7 +6033,7 @@
             <a:r>
               <a:rPr sz="1749" b="1" i="0" lang="zh-CN" dirty="0">
                 <a:solidFill>
-                  <a:srgbClr val="19232C"/>
+                  <a:srgbClr val="145159"/>
                 </a:solidFill>
                 <a:latin typeface="Noto Sans CJK SC"/>
                 <a:ea typeface="Noto Sans CJK SC"/>
@@ -6065,7 +6065,7 @@
           </a:solidFill>
           <a:ln w="11906">
             <a:solidFill>
-              <a:srgbClr val="C6CCD1"/>
+              <a:srgbClr val="B5BDC4"/>
             </a:solidFill>
           </a:ln>
           <a:effectLst/>
@@ -6193,7 +6193,7 @@
             </a:pathLst>
           </a:custGeom>
           <a:solidFill>
-            <a:srgbClr val="087887"/>
+            <a:srgbClr val="0F7A88"/>
           </a:solidFill>
           <a:ln>
             <a:noFill/>
@@ -6243,7 +6243,7 @@
           </a:solidFill>
           <a:ln w="11906">
             <a:solidFill>
-              <a:srgbClr val="C6CCD1"/>
+              <a:srgbClr val="B5BDC4"/>
             </a:solidFill>
           </a:ln>
           <a:effectLst/>
@@ -6371,7 +6371,7 @@
             </a:pathLst>
           </a:custGeom>
           <a:solidFill>
-            <a:srgbClr val="087887"/>
+            <a:srgbClr val="0F7A88"/>
           </a:solidFill>
           <a:ln>
             <a:noFill/>
@@ -6421,7 +6421,7 @@
           </a:solidFill>
           <a:ln w="11906">
             <a:solidFill>
-              <a:srgbClr val="C6CCD1"/>
+              <a:srgbClr val="B5BDC4"/>
             </a:solidFill>
           </a:ln>
           <a:effectLst/>
@@ -6549,7 +6549,7 @@
             </a:pathLst>
           </a:custGeom>
           <a:solidFill>
-            <a:srgbClr val="087887"/>
+            <a:srgbClr val="0F7A88"/>
           </a:solidFill>
           <a:ln>
             <a:noFill/>
@@ -6599,7 +6599,7 @@
           </a:solidFill>
           <a:ln w="11906">
             <a:solidFill>
-              <a:srgbClr val="C6CCD1"/>
+              <a:srgbClr val="B5BDC4"/>
             </a:solidFill>
           </a:ln>
           <a:effectLst/>
@@ -6698,7 +6698,7 @@
           </a:prstGeom>
           <a:ln w="39687">
             <a:solidFill>
-              <a:srgbClr val="087887"/>
+              <a:srgbClr val="0F7A88"/>
             </a:solidFill>
           </a:ln>
           <a:effectLst/>
@@ -6734,7 +6734,7 @@
           </a:prstGeom>
           <a:ln w="39687">
             <a:solidFill>
-              <a:srgbClr val="087887"/>
+              <a:srgbClr val="0F7A88"/>
             </a:solidFill>
           </a:ln>
           <a:effectLst/>
@@ -6770,7 +6770,7 @@
           </a:prstGeom>
           <a:ln w="39687">
             <a:solidFill>
-              <a:srgbClr val="087887"/>
+              <a:srgbClr val="0F7A88"/>
             </a:solidFill>
           </a:ln>
           <a:effectLst/>
@@ -6835,7 +6835,7 @@
             </a:pathLst>
           </a:custGeom>
           <a:solidFill>
-            <a:srgbClr val="087887"/>
+            <a:srgbClr val="0F7A88"/>
           </a:solidFill>
           <a:ln>
             <a:noFill/>
@@ -6881,7 +6881,7 @@
             </a:avLst>
           </a:prstGeom>
           <a:solidFill>
-            <a:srgbClr val="FFFFFF"/>
+            <a:srgbClr val="F2F5F7"/>
           </a:solidFill>
           <a:ln w="23812">
             <a:solidFill>
@@ -6989,7 +6989,7 @@
           </a:solidFill>
           <a:ln w="11906">
             <a:solidFill>
-              <a:srgbClr val="C6CCD1"/>
+              <a:srgbClr val="B5BDC4"/>
             </a:solidFill>
           </a:ln>
           <a:effectLst/>
@@ -7093,7 +7093,7 @@
           </a:solidFill>
           <a:ln w="11906">
             <a:solidFill>
-              <a:srgbClr val="C6CCD1"/>
+              <a:srgbClr val="B5BDC4"/>
             </a:solidFill>
           </a:ln>
           <a:effectLst/>
@@ -7197,7 +7197,7 @@
           </a:solidFill>
           <a:ln w="11906">
             <a:solidFill>
-              <a:srgbClr val="C6CCD1"/>
+              <a:srgbClr val="B5BDC4"/>
             </a:solidFill>
           </a:ln>
           <a:effectLst/>
@@ -7301,7 +7301,7 @@
           </a:solidFill>
           <a:ln w="11906">
             <a:solidFill>
-              <a:srgbClr val="C6CCD1"/>
+              <a:srgbClr val="B5BDC4"/>
             </a:solidFill>
           </a:ln>
           <a:effectLst/>
@@ -7400,7 +7400,7 @@
           </a:prstGeom>
           <a:ln w="31749">
             <a:solidFill>
-              <a:srgbClr val="087887"/>
+              <a:srgbClr val="0F7A88"/>
             </a:solidFill>
             <a:custDash>
               <a:ds d="400000" sp="250000"/>
@@ -7439,7 +7439,7 @@
           </a:prstGeom>
           <a:ln w="31749">
             <a:solidFill>
-              <a:srgbClr val="087887"/>
+              <a:srgbClr val="0F7A88"/>
             </a:solidFill>
             <a:custDash>
               <a:ds d="400000" sp="250000"/>
@@ -7479,11 +7479,11 @@
             </a:avLst>
           </a:prstGeom>
           <a:solidFill>
-            <a:srgbClr val="FFFFFF"/>
+            <a:srgbClr val="E1EFF1"/>
           </a:solidFill>
-          <a:ln w="15874">
+          <a:ln w="19843">
             <a:solidFill>
-              <a:srgbClr val="087887"/>
+              <a:srgbClr val="0F7A88"/>
             </a:solidFill>
           </a:ln>
           <a:effectLst/>
@@ -7545,7 +7545,7 @@
               </a:spcAft>
               <a:defRPr sz="1374" b="1" i="0" lang="zh-CN" dirty="0">
                 <a:solidFill>
-                  <a:srgbClr val="087887"/>
+                  <a:srgbClr val="0F7A88"/>
                 </a:solidFill>
                 <a:latin typeface="Noto Sans CJK SC"/>
                 <a:ea typeface="Noto Sans CJK SC"/>
@@ -7555,7 +7555,7 @@
             <a:r>
               <a:rPr sz="1374" b="1" i="0" lang="zh-CN" dirty="0">
                 <a:solidFill>
-                  <a:srgbClr val="087887"/>
+                  <a:srgbClr val="0F7A88"/>
                 </a:solidFill>
                 <a:latin typeface="Noto Sans CJK SC"/>
                 <a:ea typeface="Noto Sans CJK SC"/>
@@ -7582,7 +7582,7 @@
           </a:prstGeom>
           <a:ln w="31749">
             <a:solidFill>
-              <a:srgbClr val="087887"/>
+              <a:srgbClr val="0F7A88"/>
             </a:solidFill>
             <a:custDash>
               <a:ds d="400000" sp="250000"/>
@@ -7621,7 +7621,7 @@
           </a:prstGeom>
           <a:ln w="31749">
             <a:solidFill>
-              <a:srgbClr val="087887"/>
+              <a:srgbClr val="0F7A88"/>
             </a:solidFill>
             <a:custDash>
               <a:ds d="400000" sp="250000"/>
@@ -7660,7 +7660,7 @@
           </a:prstGeom>
           <a:ln w="31749">
             <a:solidFill>
-              <a:srgbClr val="087887"/>
+              <a:srgbClr val="0F7A88"/>
             </a:solidFill>
             <a:custDash>
               <a:ds d="400000" sp="250000"/>
@@ -7701,11 +7701,11 @@
             </a:avLst>
           </a:prstGeom>
           <a:solidFill>
-            <a:srgbClr val="FFFFFF"/>
+            <a:srgbClr val="FFF7E6"/>
           </a:solidFill>
           <a:ln w="19843">
             <a:solidFill>
-              <a:srgbClr val="AE7213"/>
+              <a:srgbClr val="B4741A"/>
             </a:solidFill>
           </a:ln>
           <a:effectLst/>
@@ -7815,7 +7815,7 @@
           </a:prstGeom>
           <a:ln w="19843">
             <a:solidFill>
-              <a:srgbClr val="AE7213"/>
+              <a:srgbClr val="B4741A"/>
             </a:solidFill>
           </a:ln>
           <a:effectLst/>
@@ -7850,7 +7850,7 @@
             <a:avLst/>
           </a:prstGeom>
           <a:solidFill>
-            <a:srgbClr val="AE7213"/>
+            <a:srgbClr val="B4741A"/>
           </a:solidFill>
           <a:ln>
             <a:noFill/>
@@ -7896,11 +7896,11 @@
             </a:avLst>
           </a:prstGeom>
           <a:solidFill>
-            <a:srgbClr val="FFFFFF"/>
+            <a:srgbClr val="FFF7E6"/>
           </a:solidFill>
           <a:ln w="19843">
             <a:solidFill>
-              <a:srgbClr val="AE7213"/>
+              <a:srgbClr val="B4741A"/>
             </a:solidFill>
           </a:ln>
           <a:effectLst/>
@@ -7999,7 +7999,7 @@
           </a:prstGeom>
           <a:ln w="19843">
             <a:solidFill>
-              <a:srgbClr val="AE7213"/>
+              <a:srgbClr val="B4741A"/>
             </a:solidFill>
           </a:ln>
           <a:effectLst/>
@@ -8034,7 +8034,7 @@
             <a:avLst/>
           </a:prstGeom>
           <a:solidFill>
-            <a:srgbClr val="AE7213"/>
+            <a:srgbClr val="B4741A"/>
           </a:solidFill>
           <a:ln>
             <a:noFill/>
@@ -8079,7 +8079,7 @@
           </a:prstGeom>
           <a:ln w="19843">
             <a:solidFill>
-              <a:srgbClr val="AE7213"/>
+              <a:srgbClr val="B4741A"/>
             </a:solidFill>
           </a:ln>
           <a:effectLst/>
@@ -8114,7 +8114,7 @@
             <a:avLst/>
           </a:prstGeom>
           <a:solidFill>
-            <a:srgbClr val="AE7213"/>
+            <a:srgbClr val="B4741A"/>
           </a:solidFill>
           <a:ln>
             <a:noFill/>
@@ -8160,11 +8160,11 @@
             </a:avLst>
           </a:prstGeom>
           <a:solidFill>
-            <a:srgbClr val="FFFFFF"/>
+            <a:srgbClr val="FFF7E6"/>
           </a:solidFill>
           <a:ln w="19843">
             <a:solidFill>
-              <a:srgbClr val="AE7213"/>
+              <a:srgbClr val="B4741A"/>
             </a:solidFill>
           </a:ln>
           <a:effectLst/>
@@ -8295,7 +8295,7 @@
           </a:prstGeom>
           <a:ln w="19843">
             <a:solidFill>
-              <a:srgbClr val="AE7213"/>
+              <a:srgbClr val="B4741A"/>
             </a:solidFill>
           </a:ln>
           <a:effectLst/>
@@ -8330,7 +8330,7 @@
             <a:avLst/>
           </a:prstGeom>
           <a:solidFill>
-            <a:srgbClr val="AE7213"/>
+            <a:srgbClr val="B4741A"/>
           </a:solidFill>
           <a:ln>
             <a:noFill/>

--- a/media/figstudio/fig03_roadmap/fig03_research_roadmap_editable.pptx
+++ b/media/figstudio/fig03_roadmap/fig03_research_roadmap_editable.pptx
@@ -7,7 +7,7 @@
   <p:sldIdLst>
     <p:sldId id="256" r:id="rId7"/>
   </p:sldIdLst>
-  <p:sldSz cx="12191999" cy="8127999" type="screen4x3"/>
+  <p:sldSz cx="12191999" cy="5224233" type="screen4x3"/>
   <p:notesSz cx="6858000" cy="9144000"/>
   <p:defaultTextStyle>
     <a:defPPr>
@@ -502,7 +502,7 @@
           <a:lstStyle/>
           <a:p>
             <a:r>
-              <a:t>图 3 本文的研究路线（super_teaser 第二轮 F03，两级配色 → super_img2ppt 重建；两处连线按论文修正）</a:t>
+              <a:t>图 3 本文的研究路线（super_teaser 第三轮 R02 → super_img2ppt 重建；分叉只由前驱体驱动、反馈回结构假设）</a:t>
             </a:r>
           </a:p>
         </p:txBody>
@@ -3518,26 +3518,26 @@
       <p:grpSpPr/>
       <p:sp>
         <p:nvSpPr>
-          <p:cNvPr id="2" name="c1" descr="Editable shape; source id c1"/>
+          <p:cNvPr id="2" name="zL" descr="Editable shape; source id zL"/>
           <p:cNvSpPr/>
           <p:nvPr/>
         </p:nvSpPr>
         <p:spPr>
           <a:xfrm>
-            <a:off x="214312" y="301624"/>
-            <a:ext cx="2492374" cy="1944687"/>
+            <a:off x="171807" y="190897"/>
+            <a:ext cx="5936918" cy="3289803"/>
           </a:xfrm>
           <a:prstGeom prst="roundRect">
             <a:avLst>
-              <a:gd name="adj" fmla="val 5714"/>
+              <a:gd name="adj" fmla="val 3094"/>
             </a:avLst>
           </a:prstGeom>
           <a:solidFill>
-            <a:srgbClr val="F2F5F7"/>
+            <a:srgbClr val="EEF2F7"/>
           </a:solidFill>
-          <a:ln w="23812">
+          <a:ln w="9544">
             <a:solidFill>
-              <a:srgbClr val="3B4952"/>
+              <a:srgbClr val="5B7592"/>
             </a:solidFill>
           </a:ln>
           <a:effectLst/>
@@ -3566,14 +3566,14 @@
       </p:sp>
       <p:sp>
         <p:nvSpPr>
-          <p:cNvPr id="3" name="c1_t" descr="Editable text; source id c1_t"/>
+          <p:cNvPr id="3" name="zL_l" descr="Editable text; source id zL_l"/>
           <p:cNvSpPr txBox="1"/>
           <p:nvPr/>
         </p:nvSpPr>
         <p:spPr>
           <a:xfrm>
-            <a:off x="309562" y="412749"/>
-            <a:ext cx="2301874" cy="349249"/>
+            <a:off x="286346" y="267256"/>
+            <a:ext cx="636325" cy="209987"/>
           </a:xfrm>
           <a:prstGeom prst="rect">
             <a:avLst/>
@@ -3587,9 +3587,9 @@
           </a:bodyPr>
           <a:lstStyle/>
           <a:p>
-            <a:pPr algn="ctr" fontAlgn="base">
+            <a:pPr algn="l" fontAlgn="base">
               <a:lnSpc>
-                <a:spcPts val="2546"/>
+                <a:spcPts val="1615"/>
               </a:lnSpc>
               <a:spcBef>
                 <a:spcPts val="0"/>
@@ -3597,9 +3597,9 @@
               <a:spcAft>
                 <a:spcPts val="0"/>
               </a:spcAft>
-              <a:defRPr sz="1749" b="1" i="0" lang="zh-CN" dirty="0">
-                <a:solidFill>
-                  <a:srgbClr val="19232C"/>
+              <a:defRPr sz="1102" b="1" i="0" lang="zh-CN" dirty="0">
+                <a:solidFill>
+                  <a:srgbClr val="2B3E57"/>
                 </a:solidFill>
                 <a:latin typeface="Noto Sans CJK SC"/>
                 <a:ea typeface="Noto Sans CJK SC"/>
@@ -3607,41 +3607,41 @@
               </a:defRPr>
             </a:pPr>
             <a:r>
-              <a:rPr sz="1749" b="1" i="0" lang="zh-CN" dirty="0">
-                <a:solidFill>
-                  <a:srgbClr val="19232C"/>
+              <a:rPr sz="1102" b="1" i="0" lang="zh-CN" dirty="0">
+                <a:solidFill>
+                  <a:srgbClr val="2B3E57"/>
                 </a:solidFill>
                 <a:latin typeface="Noto Sans CJK SC"/>
                 <a:ea typeface="Noto Sans CJK SC"/>
                 <a:cs typeface="Noto Sans CJK SC"/>
               </a:rPr>
-              <a:t>文献依据</a:t>
-            </a:r>
-          </a:p>
-        </p:txBody>
-      </p:sp>
-      <p:sp>
-        <p:nvSpPr>
-          <p:cNvPr id="4" name="c1_k0" descr="Editable shape; source id c1_k0"/>
+              <a:t>文献证据</a:t>
+            </a:r>
+          </a:p>
+        </p:txBody>
+      </p:sp>
+      <p:sp>
+        <p:nvSpPr>
+          <p:cNvPr id="4" name="zE" descr="Editable shape; source id zE"/>
           <p:cNvSpPr/>
           <p:nvPr/>
         </p:nvSpPr>
         <p:spPr>
           <a:xfrm>
-            <a:off x="341312" y="769937"/>
-            <a:ext cx="2246312" cy="404812"/>
+            <a:off x="6356893" y="184534"/>
+            <a:ext cx="2793469" cy="3296166"/>
           </a:xfrm>
           <a:prstGeom prst="roundRect">
             <a:avLst>
-              <a:gd name="adj" fmla="val 15686"/>
+              <a:gd name="adj" fmla="val 3644"/>
             </a:avLst>
           </a:prstGeom>
           <a:solidFill>
-            <a:srgbClr val="FFFFFF"/>
+            <a:srgbClr val="E6F2F3"/>
           </a:solidFill>
-          <a:ln w="11906">
+          <a:ln w="9544">
             <a:solidFill>
-              <a:srgbClr val="B5BDC4"/>
+              <a:srgbClr val="1F7F8C"/>
             </a:solidFill>
           </a:ln>
           <a:effectLst/>
@@ -3670,14 +3670,14 @@
       </p:sp>
       <p:sp>
         <p:nvSpPr>
-          <p:cNvPr id="5" name="c1_k0_t" descr="Editable text; source id c1_k0_t"/>
+          <p:cNvPr id="5" name="zE_l" descr="Editable text; source id zE_l"/>
           <p:cNvSpPr txBox="1"/>
           <p:nvPr/>
         </p:nvSpPr>
         <p:spPr>
           <a:xfrm>
-            <a:off x="388937" y="793749"/>
-            <a:ext cx="2151062" cy="357187"/>
+            <a:off x="6471431" y="260893"/>
+            <a:ext cx="636325" cy="209987"/>
           </a:xfrm>
           <a:prstGeom prst="rect">
             <a:avLst/>
@@ -3691,9 +3691,9 @@
           </a:bodyPr>
           <a:lstStyle/>
           <a:p>
-            <a:pPr algn="ctr" fontAlgn="base">
+            <a:pPr algn="l" fontAlgn="base">
               <a:lnSpc>
-                <a:spcPts val="2093"/>
+                <a:spcPts val="1615"/>
               </a:lnSpc>
               <a:spcBef>
                 <a:spcPts val="0"/>
@@ -3701,62 +3701,51 @@
               <a:spcAft>
                 <a:spcPts val="0"/>
               </a:spcAft>
-              <a:defRPr sz="1437" b="0" i="0" lang="zh-CN" dirty="0">
-                <a:solidFill>
-                  <a:srgbClr val="2F3840"/>
-                </a:solidFill>
-                <a:latin typeface="DejaVu Sans"/>
-                <a:ea typeface="DejaVu Sans"/>
-                <a:cs typeface="DejaVu Sans"/>
+              <a:defRPr sz="1102" b="1" i="0" lang="zh-CN" dirty="0">
+                <a:solidFill>
+                  <a:srgbClr val="0F4F58"/>
+                </a:solidFill>
+                <a:latin typeface="Noto Sans CJK SC"/>
+                <a:ea typeface="Noto Sans CJK SC"/>
+                <a:cs typeface="Noto Sans CJK SC"/>
               </a:defRPr>
             </a:pPr>
             <a:r>
-              <a:rPr sz="1437" b="0" i="0" lang="zh-CN" dirty="0">
-                <a:solidFill>
-                  <a:srgbClr val="2F3840"/>
-                </a:solidFill>
-                <a:latin typeface="DejaVu Sans"/>
-                <a:ea typeface="DejaVu Sans"/>
-                <a:cs typeface="DejaVu Sans"/>
-              </a:rPr>
-              <a:t>Ba–Y–Si–O </a:t>
-            </a:r>
-            <a:r>
-              <a:rPr sz="1437" b="0" i="0" lang="zh-CN" dirty="0">
-                <a:solidFill>
-                  <a:srgbClr val="2F3840"/>
+              <a:rPr sz="1102" b="1" i="0" lang="zh-CN" dirty="0">
+                <a:solidFill>
+                  <a:srgbClr val="0F4F58"/>
                 </a:solidFill>
                 <a:latin typeface="Noto Sans CJK SC"/>
                 <a:ea typeface="Noto Sans CJK SC"/>
                 <a:cs typeface="Noto Sans CJK SC"/>
               </a:rPr>
-              <a:t>谱系</a:t>
-            </a:r>
-          </a:p>
-        </p:txBody>
-      </p:sp>
-      <p:sp>
-        <p:nvSpPr>
-          <p:cNvPr id="6" name="c1_k1" descr="Editable shape; source id c1_k1"/>
+              <a:t>实验方法</a:t>
+            </a:r>
+          </a:p>
+        </p:txBody>
+      </p:sp>
+      <p:sp>
+        <p:nvSpPr>
+          <p:cNvPr id="6" name="zR" descr="Editable shape; source id zR"/>
           <p:cNvSpPr/>
           <p:nvPr/>
         </p:nvSpPr>
         <p:spPr>
           <a:xfrm>
-            <a:off x="341312" y="1238249"/>
-            <a:ext cx="2246312" cy="404812"/>
+            <a:off x="9398530" y="190897"/>
+            <a:ext cx="2621661" cy="3289803"/>
           </a:xfrm>
           <a:prstGeom prst="roundRect">
             <a:avLst>
-              <a:gd name="adj" fmla="val 15686"/>
+              <a:gd name="adj" fmla="val 3883"/>
             </a:avLst>
           </a:prstGeom>
           <a:solidFill>
-            <a:srgbClr val="FFFFFF"/>
+            <a:srgbClr val="EEF2F7"/>
           </a:solidFill>
-          <a:ln w="11906">
+          <a:ln w="9544">
             <a:solidFill>
-              <a:srgbClr val="B5BDC4"/>
+              <a:srgbClr val="5B7592"/>
             </a:solidFill>
           </a:ln>
           <a:effectLst/>
@@ -3785,14 +3774,14 @@
       </p:sp>
       <p:sp>
         <p:nvSpPr>
-          <p:cNvPr id="7" name="c1_k1_t" descr="Editable text; source id c1_k1_t"/>
+          <p:cNvPr id="7" name="zR_l" descr="Editable text; source id zR_l"/>
           <p:cNvSpPr txBox="1"/>
           <p:nvPr/>
         </p:nvSpPr>
         <p:spPr>
           <a:xfrm>
-            <a:off x="388937" y="1254124"/>
-            <a:ext cx="2151062" cy="357187"/>
+            <a:off x="9513068" y="267256"/>
+            <a:ext cx="636325" cy="209987"/>
           </a:xfrm>
           <a:prstGeom prst="rect">
             <a:avLst/>
@@ -3806,9 +3795,9 @@
           </a:bodyPr>
           <a:lstStyle/>
           <a:p>
-            <a:pPr algn="ctr" fontAlgn="base">
+            <a:pPr algn="l" fontAlgn="base">
               <a:lnSpc>
-                <a:spcPts val="2093"/>
+                <a:spcPts val="1615"/>
               </a:lnSpc>
               <a:spcBef>
                 <a:spcPts val="0"/>
@@ -3816,62 +3805,51 @@
               <a:spcAft>
                 <a:spcPts val="0"/>
               </a:spcAft>
-              <a:defRPr sz="1437" b="0" i="0" lang="zh-CN" dirty="0">
-                <a:solidFill>
-                  <a:srgbClr val="2F3840"/>
-                </a:solidFill>
-                <a:latin typeface="DejaVu Sans"/>
-                <a:ea typeface="DejaVu Sans"/>
-                <a:cs typeface="DejaVu Sans"/>
+              <a:defRPr sz="1102" b="1" i="0" lang="zh-CN" dirty="0">
+                <a:solidFill>
+                  <a:srgbClr val="2B3E57"/>
+                </a:solidFill>
+                <a:latin typeface="Noto Sans CJK SC"/>
+                <a:ea typeface="Noto Sans CJK SC"/>
+                <a:cs typeface="Noto Sans CJK SC"/>
               </a:defRPr>
             </a:pPr>
             <a:r>
-              <a:rPr sz="1437" b="0" i="0" lang="zh-CN" dirty="0">
-                <a:solidFill>
-                  <a:srgbClr val="2F3840"/>
-                </a:solidFill>
-                <a:latin typeface="DejaVu Sans"/>
-                <a:ea typeface="DejaVu Sans"/>
-                <a:cs typeface="DejaVu Sans"/>
-              </a:rPr>
-              <a:t>Ba–Zn–Si–O </a:t>
-            </a:r>
-            <a:r>
-              <a:rPr sz="1437" b="0" i="0" lang="zh-CN" dirty="0">
-                <a:solidFill>
-                  <a:srgbClr val="2F3840"/>
+              <a:rPr sz="1102" b="1" i="0" lang="zh-CN" dirty="0">
+                <a:solidFill>
+                  <a:srgbClr val="2B3E57"/>
                 </a:solidFill>
                 <a:latin typeface="Noto Sans CJK SC"/>
                 <a:ea typeface="Noto Sans CJK SC"/>
                 <a:cs typeface="Noto Sans CJK SC"/>
               </a:rPr>
-              <a:t>结构近邻</a:t>
-            </a:r>
-          </a:p>
-        </p:txBody>
-      </p:sp>
-      <p:sp>
-        <p:nvSpPr>
-          <p:cNvPr id="8" name="c1_k2" descr="Editable shape; source id c1_k2"/>
+              <a:t>结果反馈</a:t>
+            </a:r>
+          </a:p>
+        </p:txBody>
+      </p:sp>
+      <p:sp>
+        <p:nvSpPr>
+          <p:cNvPr id="8" name="zQ" descr="Editable shape; source id zQ"/>
           <p:cNvSpPr/>
           <p:nvPr/>
         </p:nvSpPr>
         <p:spPr>
           <a:xfrm>
-            <a:off x="341312" y="1698624"/>
-            <a:ext cx="2246312" cy="404812"/>
+            <a:off x="184534" y="3913402"/>
+            <a:ext cx="11822930" cy="1145386"/>
           </a:xfrm>
           <a:prstGeom prst="roundRect">
             <a:avLst>
-              <a:gd name="adj" fmla="val 15686"/>
+              <a:gd name="adj" fmla="val 8888"/>
             </a:avLst>
           </a:prstGeom>
           <a:solidFill>
-            <a:srgbClr val="FFFFFF"/>
+            <a:srgbClr val="FFF6E3"/>
           </a:solidFill>
-          <a:ln w="11906">
+          <a:ln w="9544">
             <a:solidFill>
-              <a:srgbClr val="B5BDC4"/>
+              <a:srgbClr val="C48A24"/>
             </a:solidFill>
           </a:ln>
           <a:effectLst/>
@@ -3900,14 +3878,14 @@
       </p:sp>
       <p:sp>
         <p:nvSpPr>
-          <p:cNvPr id="9" name="c1_k2_t" descr="Editable text; source id c1_k2_t"/>
+          <p:cNvPr id="9" name="zQ_l" descr="Editable text; source id zQ_l"/>
           <p:cNvSpPr txBox="1"/>
           <p:nvPr/>
         </p:nvSpPr>
         <p:spPr>
           <a:xfrm>
-            <a:off x="388937" y="1722437"/>
-            <a:ext cx="2151062" cy="357187"/>
+            <a:off x="299073" y="3989761"/>
+            <a:ext cx="636325" cy="209987"/>
           </a:xfrm>
           <a:prstGeom prst="rect">
             <a:avLst/>
@@ -3921,9 +3899,9 @@
           </a:bodyPr>
           <a:lstStyle/>
           <a:p>
-            <a:pPr algn="ctr" fontAlgn="base">
+            <a:pPr algn="l" fontAlgn="base">
               <a:lnSpc>
-                <a:spcPts val="2093"/>
+                <a:spcPts val="1615"/>
               </a:lnSpc>
               <a:spcBef>
                 <a:spcPts val="0"/>
@@ -3931,86 +3909,95 @@
               <a:spcAft>
                 <a:spcPts val="0"/>
               </a:spcAft>
-              <a:defRPr sz="1437" b="0" i="0" lang="zh-CN" dirty="0">
-                <a:solidFill>
-                  <a:srgbClr val="2F3840"/>
-                </a:solidFill>
-                <a:latin typeface="DejaVu Sans"/>
-                <a:ea typeface="DejaVu Sans"/>
-                <a:cs typeface="DejaVu Sans"/>
+              <a:defRPr sz="1102" b="1" i="0" lang="zh-CN" dirty="0">
+                <a:solidFill>
+                  <a:srgbClr val="7A5410"/>
+                </a:solidFill>
+                <a:latin typeface="Noto Sans CJK SC"/>
+                <a:ea typeface="Noto Sans CJK SC"/>
+                <a:cs typeface="Noto Sans CJK SC"/>
               </a:defRPr>
             </a:pPr>
             <a:r>
-              <a:rPr sz="1437" b="0" i="0" lang="zh-CN" dirty="0">
-                <a:solidFill>
-                  <a:srgbClr val="2F3840"/>
-                </a:solidFill>
-                <a:latin typeface="DejaVu Sans"/>
-                <a:ea typeface="DejaVu Sans"/>
-                <a:cs typeface="DejaVu Sans"/>
-              </a:rPr>
-              <a:t>Y–Si–O </a:t>
-            </a:r>
-            <a:r>
-              <a:rPr sz="1437" b="0" i="0" lang="zh-CN" dirty="0">
-                <a:solidFill>
-                  <a:srgbClr val="2F3840"/>
+              <a:rPr sz="1102" b="1" i="0" lang="zh-CN" dirty="0">
+                <a:solidFill>
+                  <a:srgbClr val="7A5410"/>
                 </a:solidFill>
                 <a:latin typeface="Noto Sans CJK SC"/>
                 <a:ea typeface="Noto Sans CJK SC"/>
                 <a:cs typeface="Noto Sans CJK SC"/>
               </a:rPr>
-              <a:t>工艺参照</a:t>
-            </a:r>
-          </a:p>
-        </p:txBody>
-      </p:sp>
-      <p:sp>
-        <p:nvSpPr>
-          <p:cNvPr id="10" name="c1_c2" descr="Editable line; source id c1_c2"/>
+              <a:t>判断提醒</a:t>
+            </a:r>
+          </a:p>
+        </p:txBody>
+      </p:sp>
+      <p:sp>
+        <p:nvSpPr>
+          <p:cNvPr id="10" name="c1" descr="Editable shape; source id c1"/>
           <p:cNvSpPr/>
           <p:nvPr/>
         </p:nvSpPr>
         <p:spPr>
           <a:xfrm>
-            <a:off x="1381125" y="2262187"/>
-            <a:ext cx="127000" cy="357187"/>
-          </a:xfrm>
-          <a:custGeom>
-            <a:avLst/>
-            <a:gdLst/>
-            <a:ahLst/>
-            <a:cxnLst/>
-            <a:rect l="l" t="t" r="r" b="b"/>
-            <a:pathLst>
-              <a:path w="16000" h="45000">
-                <a:moveTo>
-                  <a:pt x="10500" y="0"/>
-                </a:moveTo>
-                <a:lnTo>
-                  <a:pt x="10500" y="27000"/>
-                </a:lnTo>
-                <a:lnTo>
-                  <a:pt x="16000" y="27000"/>
-                </a:lnTo>
-                <a:lnTo>
-                  <a:pt x="8000" y="45000"/>
-                </a:lnTo>
-                <a:lnTo>
-                  <a:pt x="0" y="27000"/>
-                </a:lnTo>
-                <a:lnTo>
-                  <a:pt x="5500" y="27000"/>
-                </a:lnTo>
-                <a:lnTo>
-                  <a:pt x="5500" y="0"/>
-                </a:lnTo>
-                <a:close/>
-              </a:path>
-            </a:pathLst>
-          </a:custGeom>
+            <a:off x="324526" y="833586"/>
+            <a:ext cx="1718079" cy="2036242"/>
+          </a:xfrm>
+          <a:prstGeom prst="roundRect">
+            <a:avLst>
+              <a:gd name="adj" fmla="val 3703"/>
+            </a:avLst>
+          </a:prstGeom>
           <a:solidFill>
-            <a:srgbClr val="0F7A88"/>
+            <a:srgbClr val="FFFFFF"/>
+          </a:solidFill>
+          <a:ln w="9544">
+            <a:solidFill>
+              <a:srgbClr val="5B7592"/>
+            </a:solidFill>
+          </a:ln>
+          <a:effectLst/>
+        </p:spPr>
+        <p:style>
+          <a:lnRef idx="1">
+            <a:schemeClr val="accent1"/>
+          </a:lnRef>
+          <a:fillRef idx="3">
+            <a:schemeClr val="accent1"/>
+          </a:fillRef>
+          <a:effectRef idx="0">
+            <a:schemeClr val="accent1"/>
+          </a:effectRef>
+          <a:fontRef idx="minor">
+            <a:schemeClr val="lt1"/>
+          </a:fontRef>
+        </p:style>
+        <p:txBody>
+          <a:bodyPr rtlCol="0" anchor="ctr"/>
+          <a:lstStyle/>
+          <a:p>
+            <a:pPr algn="ctr"/>
+          </a:p>
+        </p:txBody>
+      </p:sp>
+      <p:sp>
+        <p:nvSpPr>
+          <p:cNvPr id="11" name="c1_s" descr="Editable shape; source id c1_s"/>
+          <p:cNvSpPr/>
+          <p:nvPr/>
+        </p:nvSpPr>
+        <p:spPr>
+          <a:xfrm>
+            <a:off x="324526" y="833586"/>
+            <a:ext cx="1718079" cy="50906"/>
+          </a:xfrm>
+          <a:prstGeom prst="roundRect">
+            <a:avLst>
+              <a:gd name="adj" fmla="val 50000"/>
+            </a:avLst>
+          </a:prstGeom>
+          <a:solidFill>
+            <a:srgbClr val="5B7592"/>
           </a:solidFill>
           <a:ln>
             <a:noFill/>
@@ -4039,64 +4026,41 @@
           </a:p>
         </p:txBody>
       </p:sp>
-      <p:sp>
-        <p:nvSpPr>
-          <p:cNvPr id="11" name="c2" descr="Editable shape; source id c2"/>
-          <p:cNvSpPr/>
+      <p:pic>
+        <p:nvPicPr>
+          <p:cNvPr id="12" name="c1_i" descr="exact crop of the generated raster (line motif)"/>
+          <p:cNvPicPr>
+            <a:picLocks noChangeAspect="1"/>
+          </p:cNvPicPr>
           <p:nvPr/>
-        </p:nvSpPr>
-        <p:spPr>
-          <a:xfrm>
-            <a:off x="222249" y="2635249"/>
-            <a:ext cx="2476499" cy="1984374"/>
-          </a:xfrm>
-          <a:prstGeom prst="roundRect">
-            <a:avLst>
-              <a:gd name="adj" fmla="val 5600"/>
-            </a:avLst>
-          </a:prstGeom>
-          <a:solidFill>
-            <a:srgbClr val="FBF1DC"/>
-          </a:solidFill>
-          <a:ln w="23812">
-            <a:solidFill>
-              <a:srgbClr val="B4741A"/>
-            </a:solidFill>
-          </a:ln>
+        </p:nvPicPr>
+        <p:blipFill>
+          <a:blip r:embed="rId2"/>
+          <a:stretch>
+            <a:fillRect/>
+          </a:stretch>
+        </p:blipFill>
+        <p:spPr>
+          <a:xfrm>
+            <a:off x="459669" y="967215"/>
+            <a:ext cx="213320" cy="279983"/>
+          </a:xfrm>
+          <a:prstGeom prst="rect">
+            <a:avLst/>
+          </a:prstGeom>
           <a:effectLst/>
         </p:spPr>
-        <p:style>
-          <a:lnRef idx="1">
-            <a:schemeClr val="accent1"/>
-          </a:lnRef>
-          <a:fillRef idx="3">
-            <a:schemeClr val="accent1"/>
-          </a:fillRef>
-          <a:effectRef idx="0">
-            <a:schemeClr val="accent1"/>
-          </a:effectRef>
-          <a:fontRef idx="minor">
-            <a:schemeClr val="lt1"/>
-          </a:fontRef>
-        </p:style>
-        <p:txBody>
-          <a:bodyPr rtlCol="0" anchor="ctr"/>
-          <a:lstStyle/>
-          <a:p>
-            <a:pPr algn="ctr"/>
-          </a:p>
-        </p:txBody>
-      </p:sp>
-      <p:sp>
-        <p:nvSpPr>
-          <p:cNvPr id="12" name="c2_t" descr="Editable text; source id c2_t"/>
+      </p:pic>
+      <p:sp>
+        <p:nvSpPr>
+          <p:cNvPr id="13" name="c1_t" descr="Editable text; source id c1_t"/>
           <p:cNvSpPr txBox="1"/>
           <p:nvPr/>
         </p:nvSpPr>
         <p:spPr>
           <a:xfrm>
-            <a:off x="317499" y="2746374"/>
-            <a:ext cx="2285999" cy="349249"/>
+            <a:off x="782680" y="986304"/>
+            <a:ext cx="1158112" cy="248167"/>
           </a:xfrm>
           <a:prstGeom prst="rect">
             <a:avLst/>
@@ -4110,9 +4074,9 @@
           </a:bodyPr>
           <a:lstStyle/>
           <a:p>
-            <a:pPr algn="ctr" fontAlgn="base">
+            <a:pPr algn="l" fontAlgn="base">
               <a:lnSpc>
-                <a:spcPts val="2546"/>
+                <a:spcPts val="1728"/>
               </a:lnSpc>
               <a:spcBef>
                 <a:spcPts val="0"/>
@@ -4120,9 +4084,9 @@
               <a:spcAft>
                 <a:spcPts val="0"/>
               </a:spcAft>
-              <a:defRPr sz="1749" b="1" i="0" lang="zh-CN" dirty="0">
-                <a:solidFill>
-                  <a:srgbClr val="6B4A0F"/>
+              <a:defRPr sz="1187" b="1" i="0" lang="zh-CN" dirty="0">
+                <a:solidFill>
+                  <a:srgbClr val="2B3E57"/>
                 </a:solidFill>
                 <a:latin typeface="Noto Sans CJK SC"/>
                 <a:ea typeface="Noto Sans CJK SC"/>
@@ -4130,77 +4094,29 @@
               </a:defRPr>
             </a:pPr>
             <a:r>
-              <a:rPr sz="1749" b="1" i="0" lang="zh-CN" dirty="0">
-                <a:solidFill>
-                  <a:srgbClr val="6B4A0F"/>
+              <a:rPr sz="1187" b="1" i="0" lang="zh-CN" dirty="0">
+                <a:solidFill>
+                  <a:srgbClr val="2B3E57"/>
                 </a:solidFill>
                 <a:latin typeface="Noto Sans CJK SC"/>
                 <a:ea typeface="Noto Sans CJK SC"/>
                 <a:cs typeface="Noto Sans CJK SC"/>
               </a:rPr>
-              <a:t>结构假设</a:t>
-            </a:r>
-          </a:p>
-        </p:txBody>
-      </p:sp>
-      <p:sp>
-        <p:nvSpPr>
-          <p:cNvPr id="13" name="c2_k0" descr="Editable shape; source id c2_k0"/>
-          <p:cNvSpPr/>
-          <p:nvPr/>
-        </p:nvSpPr>
-        <p:spPr>
-          <a:xfrm>
-            <a:off x="349249" y="3127374"/>
-            <a:ext cx="2222499" cy="404812"/>
-          </a:xfrm>
-          <a:prstGeom prst="roundRect">
-            <a:avLst>
-              <a:gd name="adj" fmla="val 15686"/>
-            </a:avLst>
-          </a:prstGeom>
-          <a:solidFill>
-            <a:srgbClr val="FFFFFF"/>
-          </a:solidFill>
-          <a:ln w="11906">
-            <a:solidFill>
-              <a:srgbClr val="B5BDC4"/>
-            </a:solidFill>
-          </a:ln>
-          <a:effectLst/>
-        </p:spPr>
-        <p:style>
-          <a:lnRef idx="1">
-            <a:schemeClr val="accent1"/>
-          </a:lnRef>
-          <a:fillRef idx="3">
-            <a:schemeClr val="accent1"/>
-          </a:fillRef>
-          <a:effectRef idx="0">
-            <a:schemeClr val="accent1"/>
-          </a:effectRef>
-          <a:fontRef idx="minor">
-            <a:schemeClr val="lt1"/>
-          </a:fontRef>
-        </p:style>
-        <p:txBody>
-          <a:bodyPr rtlCol="0" anchor="ctr"/>
-          <a:lstStyle/>
-          <a:p>
-            <a:pPr algn="ctr"/>
-          </a:p>
-        </p:txBody>
-      </p:sp>
-      <p:sp>
-        <p:nvSpPr>
-          <p:cNvPr id="14" name="c2_k0_t" descr="Editable text; source id c2_k0_t"/>
+              <a:t>文献依据</a:t>
+            </a:r>
+          </a:p>
+        </p:txBody>
+      </p:sp>
+      <p:sp>
+        <p:nvSpPr>
+          <p:cNvPr id="14" name="c1_k0" descr="Editable text; source id c1_k0"/>
           <p:cNvSpPr txBox="1"/>
           <p:nvPr/>
         </p:nvSpPr>
         <p:spPr>
           <a:xfrm>
-            <a:off x="396874" y="3151187"/>
-            <a:ext cx="2127249" cy="357187"/>
+            <a:off x="426338" y="1285377"/>
+            <a:ext cx="1514455" cy="197260"/>
           </a:xfrm>
           <a:prstGeom prst="rect">
             <a:avLst/>
@@ -4214,9 +4130,9 @@
           </a:bodyPr>
           <a:lstStyle/>
           <a:p>
-            <a:pPr algn="ctr" fontAlgn="base">
+            <a:pPr algn="l" fontAlgn="base">
               <a:lnSpc>
-                <a:spcPts val="2093"/>
+                <a:spcPts val="1465"/>
               </a:lnSpc>
               <a:spcBef>
                 <a:spcPts val="0"/>
@@ -4224,87 +4140,86 @@
               <a:spcAft>
                 <a:spcPts val="0"/>
               </a:spcAft>
-              <a:defRPr sz="1437" b="0" i="0" lang="zh-CN" dirty="0">
-                <a:solidFill>
-                  <a:srgbClr val="2F3840"/>
-                </a:solidFill>
-                <a:latin typeface="Noto Sans CJK SC"/>
-                <a:ea typeface="Noto Sans CJK SC"/>
-                <a:cs typeface="Noto Sans CJK SC"/>
+              <a:defRPr sz="1002" b="0" i="0" lang="zh-CN" dirty="0">
+                <a:solidFill>
+                  <a:srgbClr val="3F4854"/>
+                </a:solidFill>
+                <a:latin typeface="DejaVu Sans"/>
+                <a:ea typeface="DejaVu Sans"/>
+                <a:cs typeface="DejaVu Sans"/>
               </a:defRPr>
             </a:pPr>
             <a:r>
-              <a:rPr sz="1437" b="0" i="0" lang="zh-CN" dirty="0">
-                <a:solidFill>
-                  <a:srgbClr val="2F3840"/>
+              <a:rPr sz="1002" b="0" i="0" lang="zh-CN" dirty="0">
+                <a:solidFill>
+                  <a:srgbClr val="3F4854"/>
+                </a:solidFill>
+                <a:latin typeface="DejaVu Sans"/>
+                <a:ea typeface="DejaVu Sans"/>
+                <a:cs typeface="DejaVu Sans"/>
+              </a:rPr>
+              <a:t>Ba–Y–Si–O </a:t>
+            </a:r>
+            <a:r>
+              <a:rPr sz="1002" b="0" i="0" lang="zh-CN" dirty="0">
+                <a:solidFill>
+                  <a:srgbClr val="3F4854"/>
                 </a:solidFill>
                 <a:latin typeface="Noto Sans CJK SC"/>
                 <a:ea typeface="Noto Sans CJK SC"/>
                 <a:cs typeface="Noto Sans CJK SC"/>
               </a:rPr>
-              <a:t>局部组成网格</a:t>
-            </a:r>
-          </a:p>
-        </p:txBody>
-      </p:sp>
-      <p:sp>
-        <p:nvSpPr>
-          <p:cNvPr id="15" name="c2_k1" descr="Editable shape; source id c2_k1"/>
-          <p:cNvSpPr/>
+              <a:t>谱系</a:t>
+            </a:r>
+          </a:p>
+        </p:txBody>
+      </p:sp>
+      <p:cxnSp>
+        <p:nvCxnSpPr>
+          <p:cNvPr id="15" name="c1_r1" descr="Editable line; source id c1_r1"/>
+          <p:cNvCxnSpPr/>
           <p:nvPr/>
-        </p:nvSpPr>
-        <p:spPr>
-          <a:xfrm>
-            <a:off x="349249" y="3595687"/>
-            <a:ext cx="2222499" cy="404812"/>
-          </a:xfrm>
-          <a:prstGeom prst="roundRect">
-            <a:avLst>
-              <a:gd name="adj" fmla="val 15686"/>
-            </a:avLst>
-          </a:prstGeom>
-          <a:solidFill>
-            <a:srgbClr val="FFFFFF"/>
-          </a:solidFill>
-          <a:ln w="11906">
+        </p:nvCxnSpPr>
+        <p:spPr>
+          <a:xfrm>
+            <a:off x="426338" y="1558997"/>
+            <a:ext cx="1514455" cy="0"/>
+          </a:xfrm>
+          <a:prstGeom prst="line">
+            <a:avLst/>
+          </a:prstGeom>
+          <a:ln w="6363">
             <a:solidFill>
-              <a:srgbClr val="B5BDC4"/>
+              <a:srgbClr val="DCE2E8"/>
             </a:solidFill>
           </a:ln>
           <a:effectLst/>
         </p:spPr>
         <p:style>
-          <a:lnRef idx="1">
+          <a:lnRef idx="2">
             <a:schemeClr val="accent1"/>
           </a:lnRef>
-          <a:fillRef idx="3">
+          <a:fillRef idx="0">
             <a:schemeClr val="accent1"/>
           </a:fillRef>
           <a:effectRef idx="0">
             <a:schemeClr val="accent1"/>
           </a:effectRef>
           <a:fontRef idx="minor">
-            <a:schemeClr val="lt1"/>
+            <a:schemeClr val="tx1"/>
           </a:fontRef>
         </p:style>
-        <p:txBody>
-          <a:bodyPr rtlCol="0" anchor="ctr"/>
-          <a:lstStyle/>
-          <a:p>
-            <a:pPr algn="ctr"/>
-          </a:p>
-        </p:txBody>
-      </p:sp>
-      <p:sp>
-        <p:nvSpPr>
-          <p:cNvPr id="16" name="c2_k1_t" descr="Editable text; source id c2_k1_t"/>
+      </p:cxnSp>
+      <p:sp>
+        <p:nvSpPr>
+          <p:cNvPr id="16" name="c1_k1" descr="Editable text; source id c1_k1"/>
           <p:cNvSpPr txBox="1"/>
           <p:nvPr/>
         </p:nvSpPr>
         <p:spPr>
           <a:xfrm>
-            <a:off x="396874" y="3619499"/>
-            <a:ext cx="2127249" cy="357187"/>
+            <a:off x="426338" y="1584450"/>
+            <a:ext cx="1514455" cy="197260"/>
           </a:xfrm>
           <a:prstGeom prst="rect">
             <a:avLst/>
@@ -4318,9 +4233,9 @@
           </a:bodyPr>
           <a:lstStyle/>
           <a:p>
-            <a:pPr algn="ctr" fontAlgn="base">
+            <a:pPr algn="l" fontAlgn="base">
               <a:lnSpc>
-                <a:spcPts val="2093"/>
+                <a:spcPts val="1465"/>
               </a:lnSpc>
               <a:spcBef>
                 <a:spcPts val="0"/>
@@ -4328,9 +4243,9 @@
               <a:spcAft>
                 <a:spcPts val="0"/>
               </a:spcAft>
-              <a:defRPr sz="1437" b="0" i="0" lang="zh-CN" dirty="0">
-                <a:solidFill>
-                  <a:srgbClr val="2F3840"/>
+              <a:defRPr sz="1002" b="0" i="0" lang="zh-CN" dirty="0">
+                <a:solidFill>
+                  <a:srgbClr val="3F4854"/>
                 </a:solidFill>
                 <a:latin typeface="DejaVu Sans"/>
                 <a:ea typeface="DejaVu Sans"/>
@@ -4338,88 +4253,76 @@
               </a:defRPr>
             </a:pPr>
             <a:r>
-              <a:rPr sz="1437" b="0" i="0" lang="zh-CN" dirty="0">
-                <a:solidFill>
-                  <a:srgbClr val="2F3840"/>
+              <a:rPr sz="1002" b="0" i="0" lang="zh-CN" dirty="0">
+                <a:solidFill>
+                  <a:srgbClr val="3F4854"/>
                 </a:solidFill>
                 <a:latin typeface="DejaVu Sans"/>
                 <a:ea typeface="DejaVu Sans"/>
                 <a:cs typeface="DejaVu Sans"/>
               </a:rPr>
-              <a:t>Zn–Y–</a:t>
-            </a:r>
-            <a:r>
-              <a:rPr sz="1437" b="0" i="0" lang="zh-CN" dirty="0">
-                <a:solidFill>
-                  <a:srgbClr val="2F3840"/>
+              <a:t>Ba–Zn–Si–O </a:t>
+            </a:r>
+            <a:r>
+              <a:rPr sz="1002" b="0" i="0" lang="zh-CN" dirty="0">
+                <a:solidFill>
+                  <a:srgbClr val="3F4854"/>
                 </a:solidFill>
                 <a:latin typeface="Noto Sans CJK SC"/>
                 <a:ea typeface="Noto Sans CJK SC"/>
                 <a:cs typeface="Noto Sans CJK SC"/>
               </a:rPr>
-              <a:t>氧计量耦合</a:t>
-            </a:r>
-          </a:p>
-        </p:txBody>
-      </p:sp>
-      <p:sp>
-        <p:nvSpPr>
-          <p:cNvPr id="17" name="c2_k2" descr="Editable shape; source id c2_k2"/>
-          <p:cNvSpPr/>
+              <a:t>结构近邻</a:t>
+            </a:r>
+          </a:p>
+        </p:txBody>
+      </p:sp>
+      <p:cxnSp>
+        <p:nvCxnSpPr>
+          <p:cNvPr id="17" name="c1_r2" descr="Editable line; source id c1_r2"/>
+          <p:cNvCxnSpPr/>
           <p:nvPr/>
-        </p:nvSpPr>
-        <p:spPr>
-          <a:xfrm>
-            <a:off x="349249" y="4063999"/>
-            <a:ext cx="2222499" cy="404812"/>
-          </a:xfrm>
-          <a:prstGeom prst="roundRect">
-            <a:avLst>
-              <a:gd name="adj" fmla="val 15686"/>
-            </a:avLst>
-          </a:prstGeom>
-          <a:solidFill>
-            <a:srgbClr val="FFFFFF"/>
-          </a:solidFill>
-          <a:ln w="11906">
+        </p:nvCxnSpPr>
+        <p:spPr>
+          <a:xfrm>
+            <a:off x="426338" y="1858070"/>
+            <a:ext cx="1514455" cy="0"/>
+          </a:xfrm>
+          <a:prstGeom prst="line">
+            <a:avLst/>
+          </a:prstGeom>
+          <a:ln w="6363">
             <a:solidFill>
-              <a:srgbClr val="B5BDC4"/>
+              <a:srgbClr val="DCE2E8"/>
             </a:solidFill>
           </a:ln>
           <a:effectLst/>
         </p:spPr>
         <p:style>
-          <a:lnRef idx="1">
+          <a:lnRef idx="2">
             <a:schemeClr val="accent1"/>
           </a:lnRef>
-          <a:fillRef idx="3">
+          <a:fillRef idx="0">
             <a:schemeClr val="accent1"/>
           </a:fillRef>
           <a:effectRef idx="0">
             <a:schemeClr val="accent1"/>
           </a:effectRef>
           <a:fontRef idx="minor">
-            <a:schemeClr val="lt1"/>
+            <a:schemeClr val="tx1"/>
           </a:fontRef>
         </p:style>
-        <p:txBody>
-          <a:bodyPr rtlCol="0" anchor="ctr"/>
-          <a:lstStyle/>
-          <a:p>
-            <a:pPr algn="ctr"/>
-          </a:p>
-        </p:txBody>
-      </p:sp>
-      <p:sp>
-        <p:nvSpPr>
-          <p:cNvPr id="18" name="c2_k2_t" descr="Editable text; source id c2_k2_t"/>
+      </p:cxnSp>
+      <p:sp>
+        <p:nvSpPr>
+          <p:cNvPr id="18" name="c1_k2" descr="Editable text; source id c1_k2"/>
           <p:cNvSpPr txBox="1"/>
           <p:nvPr/>
         </p:nvSpPr>
         <p:spPr>
           <a:xfrm>
-            <a:off x="396874" y="4087812"/>
-            <a:ext cx="2127249" cy="357187"/>
+            <a:off x="426338" y="1883523"/>
+            <a:ext cx="1514455" cy="197260"/>
           </a:xfrm>
           <a:prstGeom prst="rect">
             <a:avLst/>
@@ -4433,9 +4336,9 @@
           </a:bodyPr>
           <a:lstStyle/>
           <a:p>
-            <a:pPr algn="ctr" fontAlgn="base">
+            <a:pPr algn="l" fontAlgn="base">
               <a:lnSpc>
-                <a:spcPts val="2093"/>
+                <a:spcPts val="1465"/>
               </a:lnSpc>
               <a:spcBef>
                 <a:spcPts val="0"/>
@@ -4443,75 +4346,106 @@
               <a:spcAft>
                 <a:spcPts val="0"/>
               </a:spcAft>
-              <a:defRPr sz="1437" b="0" i="0" lang="zh-CN" dirty="0">
-                <a:solidFill>
-                  <a:srgbClr val="2F3840"/>
-                </a:solidFill>
-                <a:latin typeface="Noto Sans CJK SC"/>
-                <a:ea typeface="Noto Sans CJK SC"/>
-                <a:cs typeface="Noto Sans CJK SC"/>
+              <a:defRPr sz="1002" b="0" i="0" lang="zh-CN" dirty="0">
+                <a:solidFill>
+                  <a:srgbClr val="3F4854"/>
+                </a:solidFill>
+                <a:latin typeface="DejaVu Sans"/>
+                <a:ea typeface="DejaVu Sans"/>
+                <a:cs typeface="DejaVu Sans"/>
               </a:defRPr>
             </a:pPr>
             <a:r>
-              <a:rPr sz="1437" b="0" i="0" lang="zh-CN" dirty="0">
-                <a:solidFill>
-                  <a:srgbClr val="2F3840"/>
+              <a:rPr sz="1002" b="0" i="0" lang="zh-CN" dirty="0">
+                <a:solidFill>
+                  <a:srgbClr val="3F4854"/>
+                </a:solidFill>
+                <a:latin typeface="DejaVu Sans"/>
+                <a:ea typeface="DejaVu Sans"/>
+                <a:cs typeface="DejaVu Sans"/>
+              </a:rPr>
+              <a:t>Y–Si–O </a:t>
+            </a:r>
+            <a:r>
+              <a:rPr sz="1002" b="0" i="0" lang="zh-CN" dirty="0">
+                <a:solidFill>
+                  <a:srgbClr val="3F4854"/>
                 </a:solidFill>
                 <a:latin typeface="Noto Sans CJK SC"/>
                 <a:ea typeface="Noto Sans CJK SC"/>
                 <a:cs typeface="Noto Sans CJK SC"/>
               </a:rPr>
-              <a:t>竞争相与玻璃区</a:t>
-            </a:r>
-          </a:p>
-        </p:txBody>
-      </p:sp>
-      <p:sp>
-        <p:nvSpPr>
-          <p:cNvPr id="19" name="c2_c3" descr="Editable line; source id c2_c3"/>
+              <a:t>工艺参照</a:t>
+            </a:r>
+          </a:p>
+        </p:txBody>
+      </p:sp>
+      <p:sp>
+        <p:nvSpPr>
+          <p:cNvPr id="19" name="c2" descr="Editable shape; source id c2"/>
           <p:cNvSpPr/>
           <p:nvPr/>
         </p:nvSpPr>
         <p:spPr>
           <a:xfrm>
-            <a:off x="1381125" y="4635500"/>
-            <a:ext cx="127000" cy="333375"/>
-          </a:xfrm>
-          <a:custGeom>
-            <a:avLst/>
-            <a:gdLst/>
-            <a:ahLst/>
-            <a:cxnLst/>
-            <a:rect l="l" t="t" r="r" b="b"/>
-            <a:pathLst>
-              <a:path w="16000" h="42000">
-                <a:moveTo>
-                  <a:pt x="10500" y="0"/>
-                </a:moveTo>
-                <a:lnTo>
-                  <a:pt x="10500" y="24000"/>
-                </a:lnTo>
-                <a:lnTo>
-                  <a:pt x="16000" y="24000"/>
-                </a:lnTo>
-                <a:lnTo>
-                  <a:pt x="8000" y="42000"/>
-                </a:lnTo>
-                <a:lnTo>
-                  <a:pt x="0" y="24000"/>
-                </a:lnTo>
-                <a:lnTo>
-                  <a:pt x="5500" y="24000"/>
-                </a:lnTo>
-                <a:lnTo>
-                  <a:pt x="5500" y="0"/>
-                </a:lnTo>
-                <a:close/>
-              </a:path>
-            </a:pathLst>
-          </a:custGeom>
+            <a:off x="2246229" y="833586"/>
+            <a:ext cx="1768985" cy="2036242"/>
+          </a:xfrm>
+          <a:prstGeom prst="roundRect">
+            <a:avLst>
+              <a:gd name="adj" fmla="val 3597"/>
+            </a:avLst>
+          </a:prstGeom>
           <a:solidFill>
-            <a:srgbClr val="0F7A88"/>
+            <a:srgbClr val="FFFFFF"/>
+          </a:solidFill>
+          <a:ln w="9544">
+            <a:solidFill>
+              <a:srgbClr val="5B7592"/>
+            </a:solidFill>
+          </a:ln>
+          <a:effectLst/>
+        </p:spPr>
+        <p:style>
+          <a:lnRef idx="1">
+            <a:schemeClr val="accent1"/>
+          </a:lnRef>
+          <a:fillRef idx="3">
+            <a:schemeClr val="accent1"/>
+          </a:fillRef>
+          <a:effectRef idx="0">
+            <a:schemeClr val="accent1"/>
+          </a:effectRef>
+          <a:fontRef idx="minor">
+            <a:schemeClr val="lt1"/>
+          </a:fontRef>
+        </p:style>
+        <p:txBody>
+          <a:bodyPr rtlCol="0" anchor="ctr"/>
+          <a:lstStyle/>
+          <a:p>
+            <a:pPr algn="ctr"/>
+          </a:p>
+        </p:txBody>
+      </p:sp>
+      <p:sp>
+        <p:nvSpPr>
+          <p:cNvPr id="20" name="c2_s" descr="Editable shape; source id c2_s"/>
+          <p:cNvSpPr/>
+          <p:nvPr/>
+        </p:nvSpPr>
+        <p:spPr>
+          <a:xfrm>
+            <a:off x="2246229" y="833586"/>
+            <a:ext cx="1768985" cy="50906"/>
+          </a:xfrm>
+          <a:prstGeom prst="roundRect">
+            <a:avLst>
+              <a:gd name="adj" fmla="val 50000"/>
+            </a:avLst>
+          </a:prstGeom>
+          <a:solidFill>
+            <a:srgbClr val="5B7592"/>
           </a:solidFill>
           <a:ln>
             <a:noFill/>
@@ -4540,64 +4474,41 @@
           </a:p>
         </p:txBody>
       </p:sp>
-      <p:sp>
-        <p:nvSpPr>
-          <p:cNvPr id="20" name="c3" descr="Editable shape; source id c3"/>
-          <p:cNvSpPr/>
+      <p:pic>
+        <p:nvPicPr>
+          <p:cNvPr id="21" name="c2_i" descr="exact crop of the generated raster (line motif)"/>
+          <p:cNvPicPr>
+            <a:picLocks noChangeAspect="1"/>
+          </p:cNvPicPr>
           <p:nvPr/>
-        </p:nvSpPr>
-        <p:spPr>
-          <a:xfrm>
-            <a:off x="230187" y="4984749"/>
-            <a:ext cx="2468562" cy="2095499"/>
-          </a:xfrm>
-          <a:prstGeom prst="roundRect">
-            <a:avLst>
-              <a:gd name="adj" fmla="val 5303"/>
-            </a:avLst>
-          </a:prstGeom>
-          <a:solidFill>
-            <a:srgbClr val="F2F5F7"/>
-          </a:solidFill>
-          <a:ln w="23812">
-            <a:solidFill>
-              <a:srgbClr val="3B4952"/>
-            </a:solidFill>
-          </a:ln>
+        </p:nvPicPr>
+        <p:blipFill>
+          <a:blip r:embed="rId3"/>
+          <a:stretch>
+            <a:fillRect/>
+          </a:stretch>
+        </p:blipFill>
+        <p:spPr>
+          <a:xfrm>
+            <a:off x="2381373" y="967215"/>
+            <a:ext cx="213320" cy="279983"/>
+          </a:xfrm>
+          <a:prstGeom prst="rect">
+            <a:avLst/>
+          </a:prstGeom>
           <a:effectLst/>
         </p:spPr>
-        <p:style>
-          <a:lnRef idx="1">
-            <a:schemeClr val="accent1"/>
-          </a:lnRef>
-          <a:fillRef idx="3">
-            <a:schemeClr val="accent1"/>
-          </a:fillRef>
-          <a:effectRef idx="0">
-            <a:schemeClr val="accent1"/>
-          </a:effectRef>
-          <a:fontRef idx="minor">
-            <a:schemeClr val="lt1"/>
-          </a:fontRef>
-        </p:style>
-        <p:txBody>
-          <a:bodyPr rtlCol="0" anchor="ctr"/>
-          <a:lstStyle/>
-          <a:p>
-            <a:pPr algn="ctr"/>
-          </a:p>
-        </p:txBody>
-      </p:sp>
-      <p:sp>
-        <p:nvSpPr>
-          <p:cNvPr id="21" name="c3_t" descr="Editable text; source id c3_t"/>
+      </p:pic>
+      <p:sp>
+        <p:nvSpPr>
+          <p:cNvPr id="22" name="c2_t" descr="Editable text; source id c2_t"/>
           <p:cNvSpPr txBox="1"/>
           <p:nvPr/>
         </p:nvSpPr>
         <p:spPr>
           <a:xfrm>
-            <a:off x="325437" y="5095874"/>
-            <a:ext cx="2278062" cy="349249"/>
+            <a:off x="2704384" y="986304"/>
+            <a:ext cx="1209018" cy="248167"/>
           </a:xfrm>
           <a:prstGeom prst="rect">
             <a:avLst/>
@@ -4611,9 +4522,9 @@
           </a:bodyPr>
           <a:lstStyle/>
           <a:p>
-            <a:pPr algn="ctr" fontAlgn="base">
+            <a:pPr algn="l" fontAlgn="base">
               <a:lnSpc>
-                <a:spcPts val="2546"/>
+                <a:spcPts val="1728"/>
               </a:lnSpc>
               <a:spcBef>
                 <a:spcPts val="0"/>
@@ -4621,9 +4532,9 @@
               <a:spcAft>
                 <a:spcPts val="0"/>
               </a:spcAft>
-              <a:defRPr sz="1749" b="1" i="0" lang="zh-CN" dirty="0">
-                <a:solidFill>
-                  <a:srgbClr val="19232C"/>
+              <a:defRPr sz="1187" b="1" i="0" lang="zh-CN" dirty="0">
+                <a:solidFill>
+                  <a:srgbClr val="2B3E57"/>
                 </a:solidFill>
                 <a:latin typeface="Noto Sans CJK SC"/>
                 <a:ea typeface="Noto Sans CJK SC"/>
@@ -4631,77 +4542,29 @@
               </a:defRPr>
             </a:pPr>
             <a:r>
-              <a:rPr sz="1749" b="1" i="0" lang="zh-CN" dirty="0">
-                <a:solidFill>
-                  <a:srgbClr val="19232C"/>
+              <a:rPr sz="1187" b="1" i="0" lang="zh-CN" dirty="0">
+                <a:solidFill>
+                  <a:srgbClr val="2B3E57"/>
                 </a:solidFill>
                 <a:latin typeface="Noto Sans CJK SC"/>
                 <a:ea typeface="Noto Sans CJK SC"/>
                 <a:cs typeface="Noto Sans CJK SC"/>
               </a:rPr>
-              <a:t>模型筛选的前驱体</a:t>
-            </a:r>
-          </a:p>
-        </p:txBody>
-      </p:sp>
-      <p:sp>
-        <p:nvSpPr>
-          <p:cNvPr id="22" name="c3_k0" descr="Editable shape; source id c3_k0"/>
-          <p:cNvSpPr/>
-          <p:nvPr/>
-        </p:nvSpPr>
-        <p:spPr>
-          <a:xfrm>
-            <a:off x="357187" y="5516562"/>
-            <a:ext cx="2214562" cy="420687"/>
-          </a:xfrm>
-          <a:prstGeom prst="roundRect">
-            <a:avLst>
-              <a:gd name="adj" fmla="val 15094"/>
-            </a:avLst>
-          </a:prstGeom>
-          <a:solidFill>
-            <a:srgbClr val="FFFFFF"/>
-          </a:solidFill>
-          <a:ln w="11906">
-            <a:solidFill>
-              <a:srgbClr val="B5BDC4"/>
-            </a:solidFill>
-          </a:ln>
-          <a:effectLst/>
-        </p:spPr>
-        <p:style>
-          <a:lnRef idx="1">
-            <a:schemeClr val="accent1"/>
-          </a:lnRef>
-          <a:fillRef idx="3">
-            <a:schemeClr val="accent1"/>
-          </a:fillRef>
-          <a:effectRef idx="0">
-            <a:schemeClr val="accent1"/>
-          </a:effectRef>
-          <a:fontRef idx="minor">
-            <a:schemeClr val="lt1"/>
-          </a:fontRef>
-        </p:style>
-        <p:txBody>
-          <a:bodyPr rtlCol="0" anchor="ctr"/>
-          <a:lstStyle/>
-          <a:p>
-            <a:pPr algn="ctr"/>
-          </a:p>
-        </p:txBody>
-      </p:sp>
-      <p:sp>
-        <p:nvSpPr>
-          <p:cNvPr id="23" name="c3_k0_t" descr="Editable text; source id c3_k0_t"/>
+              <a:t>结构假设</a:t>
+            </a:r>
+          </a:p>
+        </p:txBody>
+      </p:sp>
+      <p:sp>
+        <p:nvSpPr>
+          <p:cNvPr id="23" name="c2_k0" descr="Editable text; source id c2_k0"/>
           <p:cNvSpPr txBox="1"/>
           <p:nvPr/>
         </p:nvSpPr>
         <p:spPr>
           <a:xfrm>
-            <a:off x="404812" y="5540374"/>
-            <a:ext cx="2119312" cy="373062"/>
+            <a:off x="2348041" y="1285377"/>
+            <a:ext cx="1565361" cy="197260"/>
           </a:xfrm>
           <a:prstGeom prst="rect">
             <a:avLst/>
@@ -4715,9 +4578,9 @@
           </a:bodyPr>
           <a:lstStyle/>
           <a:p>
-            <a:pPr algn="ctr" fontAlgn="base">
+            <a:pPr algn="l" fontAlgn="base">
               <a:lnSpc>
-                <a:spcPts val="1687"/>
+                <a:spcPts val="1465"/>
               </a:lnSpc>
               <a:spcBef>
                 <a:spcPts val="0"/>
@@ -4725,87 +4588,75 @@
               <a:spcAft>
                 <a:spcPts val="0"/>
               </a:spcAft>
-              <a:defRPr sz="1437" b="0" i="0" lang="zh-CN" dirty="0">
-                <a:solidFill>
-                  <a:srgbClr val="2F3840"/>
-                </a:solidFill>
-                <a:latin typeface="DejaVu Sans"/>
-                <a:ea typeface="DejaVu Sans"/>
-                <a:cs typeface="DejaVu Sans"/>
+              <a:defRPr sz="1002" b="0" i="0" lang="zh-CN" dirty="0">
+                <a:solidFill>
+                  <a:srgbClr val="3F4854"/>
+                </a:solidFill>
+                <a:latin typeface="Noto Sans CJK SC"/>
+                <a:ea typeface="Noto Sans CJK SC"/>
+                <a:cs typeface="Noto Sans CJK SC"/>
               </a:defRPr>
             </a:pPr>
             <a:r>
-              <a:rPr sz="1437" b="0" i="0" lang="zh-CN" dirty="0">
-                <a:solidFill>
-                  <a:srgbClr val="2F3840"/>
-                </a:solidFill>
-                <a:latin typeface="DejaVu Sans"/>
-                <a:ea typeface="DejaVu Sans"/>
-                <a:cs typeface="DejaVu Sans"/>
+              <a:rPr sz="1002" b="0" i="0" lang="zh-CN" dirty="0">
+                <a:solidFill>
+                  <a:srgbClr val="3F4854"/>
+                </a:solidFill>
+                <a:latin typeface="Noto Sans CJK SC"/>
+                <a:ea typeface="Noto Sans CJK SC"/>
+                <a:cs typeface="Noto Sans CJK SC"/>
               </a:rPr>
-              <a:t>BaCO3 + Y2O3 + SiO2</a:t>
-            </a:r>
-          </a:p>
-        </p:txBody>
-      </p:sp>
-      <p:sp>
-        <p:nvSpPr>
-          <p:cNvPr id="24" name="c3_k1" descr="Editable shape; source id c3_k1"/>
-          <p:cNvSpPr/>
+              <a:t>局部组成网格</a:t>
+            </a:r>
+          </a:p>
+        </p:txBody>
+      </p:sp>
+      <p:cxnSp>
+        <p:nvCxnSpPr>
+          <p:cNvPr id="24" name="c2_r1" descr="Editable line; source id c2_r1"/>
+          <p:cNvCxnSpPr/>
           <p:nvPr/>
-        </p:nvSpPr>
-        <p:spPr>
-          <a:xfrm>
-            <a:off x="357187" y="6000749"/>
-            <a:ext cx="2214562" cy="420687"/>
-          </a:xfrm>
-          <a:prstGeom prst="roundRect">
-            <a:avLst>
-              <a:gd name="adj" fmla="val 15094"/>
-            </a:avLst>
-          </a:prstGeom>
-          <a:solidFill>
-            <a:srgbClr val="FFFFFF"/>
-          </a:solidFill>
-          <a:ln w="11906">
+        </p:nvCxnSpPr>
+        <p:spPr>
+          <a:xfrm>
+            <a:off x="2348041" y="1558997"/>
+            <a:ext cx="1565361" cy="0"/>
+          </a:xfrm>
+          <a:prstGeom prst="line">
+            <a:avLst/>
+          </a:prstGeom>
+          <a:ln w="6363">
             <a:solidFill>
-              <a:srgbClr val="B5BDC4"/>
+              <a:srgbClr val="DCE2E8"/>
             </a:solidFill>
           </a:ln>
           <a:effectLst/>
         </p:spPr>
         <p:style>
-          <a:lnRef idx="1">
+          <a:lnRef idx="2">
             <a:schemeClr val="accent1"/>
           </a:lnRef>
-          <a:fillRef idx="3">
+          <a:fillRef idx="0">
             <a:schemeClr val="accent1"/>
           </a:fillRef>
           <a:effectRef idx="0">
             <a:schemeClr val="accent1"/>
           </a:effectRef>
           <a:fontRef idx="minor">
-            <a:schemeClr val="lt1"/>
+            <a:schemeClr val="tx1"/>
           </a:fontRef>
         </p:style>
-        <p:txBody>
-          <a:bodyPr rtlCol="0" anchor="ctr"/>
-          <a:lstStyle/>
-          <a:p>
-            <a:pPr algn="ctr"/>
-          </a:p>
-        </p:txBody>
-      </p:sp>
-      <p:sp>
-        <p:nvSpPr>
-          <p:cNvPr id="25" name="c3_k1_t" descr="Editable text; source id c3_k1_t"/>
+      </p:cxnSp>
+      <p:sp>
+        <p:nvSpPr>
+          <p:cNvPr id="25" name="c2_k1" descr="Editable text; source id c2_k1"/>
           <p:cNvSpPr txBox="1"/>
           <p:nvPr/>
         </p:nvSpPr>
         <p:spPr>
           <a:xfrm>
-            <a:off x="404812" y="6024562"/>
-            <a:ext cx="2119312" cy="373062"/>
+            <a:off x="2348041" y="1584450"/>
+            <a:ext cx="1565361" cy="197260"/>
           </a:xfrm>
           <a:prstGeom prst="rect">
             <a:avLst/>
@@ -4819,9 +4670,9 @@
           </a:bodyPr>
           <a:lstStyle/>
           <a:p>
-            <a:pPr algn="ctr" fontAlgn="base">
+            <a:pPr algn="l" fontAlgn="base">
               <a:lnSpc>
-                <a:spcPts val="1687"/>
+                <a:spcPts val="1465"/>
               </a:lnSpc>
               <a:spcBef>
                 <a:spcPts val="0"/>
@@ -4829,9 +4680,9 @@
               <a:spcAft>
                 <a:spcPts val="0"/>
               </a:spcAft>
-              <a:defRPr sz="1437" b="0" i="0" lang="zh-CN" dirty="0">
-                <a:solidFill>
-                  <a:srgbClr val="2F3840"/>
+              <a:defRPr sz="1002" b="0" i="0" lang="zh-CN" dirty="0">
+                <a:solidFill>
+                  <a:srgbClr val="3F4854"/>
                 </a:solidFill>
                 <a:latin typeface="DejaVu Sans"/>
                 <a:ea typeface="DejaVu Sans"/>
@@ -4839,77 +4690,76 @@
               </a:defRPr>
             </a:pPr>
             <a:r>
-              <a:rPr sz="1437" b="0" i="0" lang="zh-CN" dirty="0">
-                <a:solidFill>
-                  <a:srgbClr val="2F3840"/>
+              <a:rPr sz="1002" b="0" i="0" lang="zh-CN" dirty="0">
+                <a:solidFill>
+                  <a:srgbClr val="3F4854"/>
                 </a:solidFill>
                 <a:latin typeface="DejaVu Sans"/>
                 <a:ea typeface="DejaVu Sans"/>
                 <a:cs typeface="DejaVu Sans"/>
               </a:rPr>
-              <a:t>ZnO / MgO / Co3O4</a:t>
-            </a:r>
-          </a:p>
-        </p:txBody>
-      </p:sp>
-      <p:sp>
-        <p:nvSpPr>
-          <p:cNvPr id="26" name="c3_tag" descr="Editable shape; source id c3_tag"/>
-          <p:cNvSpPr/>
+              <a:t>Zn–Y–</a:t>
+            </a:r>
+            <a:r>
+              <a:rPr sz="1002" b="0" i="0" lang="zh-CN" dirty="0">
+                <a:solidFill>
+                  <a:srgbClr val="3F4854"/>
+                </a:solidFill>
+                <a:latin typeface="Noto Sans CJK SC"/>
+                <a:ea typeface="Noto Sans CJK SC"/>
+                <a:cs typeface="Noto Sans CJK SC"/>
+              </a:rPr>
+              <a:t>氧计量耦合</a:t>
+            </a:r>
+          </a:p>
+        </p:txBody>
+      </p:sp>
+      <p:cxnSp>
+        <p:nvCxnSpPr>
+          <p:cNvPr id="26" name="c2_r2" descr="Editable line; source id c2_r2"/>
+          <p:cNvCxnSpPr/>
           <p:nvPr/>
-        </p:nvSpPr>
-        <p:spPr>
-          <a:xfrm>
-            <a:off x="357187" y="6500812"/>
-            <a:ext cx="2214562" cy="428624"/>
-          </a:xfrm>
-          <a:prstGeom prst="roundRect">
-            <a:avLst>
-              <a:gd name="adj" fmla="val 14814"/>
-            </a:avLst>
-          </a:prstGeom>
-          <a:solidFill>
-            <a:srgbClr val="F6E7C6"/>
-          </a:solidFill>
-          <a:ln w="11906">
+        </p:nvCxnSpPr>
+        <p:spPr>
+          <a:xfrm>
+            <a:off x="2348041" y="1858070"/>
+            <a:ext cx="1565361" cy="0"/>
+          </a:xfrm>
+          <a:prstGeom prst="line">
+            <a:avLst/>
+          </a:prstGeom>
+          <a:ln w="6363">
             <a:solidFill>
-              <a:srgbClr val="B4741A"/>
+              <a:srgbClr val="DCE2E8"/>
             </a:solidFill>
           </a:ln>
           <a:effectLst/>
         </p:spPr>
         <p:style>
-          <a:lnRef idx="1">
+          <a:lnRef idx="2">
             <a:schemeClr val="accent1"/>
           </a:lnRef>
-          <a:fillRef idx="3">
+          <a:fillRef idx="0">
             <a:schemeClr val="accent1"/>
           </a:fillRef>
           <a:effectRef idx="0">
             <a:schemeClr val="accent1"/>
           </a:effectRef>
           <a:fontRef idx="minor">
-            <a:schemeClr val="lt1"/>
+            <a:schemeClr val="tx1"/>
           </a:fontRef>
         </p:style>
-        <p:txBody>
-          <a:bodyPr rtlCol="0" anchor="ctr"/>
-          <a:lstStyle/>
-          <a:p>
-            <a:pPr algn="ctr"/>
-          </a:p>
-        </p:txBody>
-      </p:sp>
-      <p:sp>
-        <p:nvSpPr>
-          <p:cNvPr id="27" name="c3_tag_t" descr="Editable text; source id c3_tag_t"/>
+      </p:cxnSp>
+      <p:sp>
+        <p:nvSpPr>
+          <p:cNvPr id="27" name="c2_k2" descr="Editable text; source id c2_k2"/>
           <p:cNvSpPr txBox="1"/>
           <p:nvPr/>
         </p:nvSpPr>
         <p:spPr>
           <a:xfrm>
-            <a:off x="404812" y="6524624"/>
-            <a:ext cx="2119312" cy="380999"/>
+            <a:off x="2348041" y="1883523"/>
+            <a:ext cx="1565361" cy="197260"/>
           </a:xfrm>
           <a:prstGeom prst="rect">
             <a:avLst/>
@@ -4923,9 +4773,9 @@
           </a:bodyPr>
           <a:lstStyle/>
           <a:p>
-            <a:pPr algn="ctr" fontAlgn="base">
+            <a:pPr algn="l" fontAlgn="base">
               <a:lnSpc>
-                <a:spcPts val="2093"/>
+                <a:spcPts val="1465"/>
               </a:lnSpc>
               <a:spcBef>
                 <a:spcPts val="0"/>
@@ -4933,9 +4783,9 @@
               <a:spcAft>
                 <a:spcPts val="0"/>
               </a:spcAft>
-              <a:defRPr sz="1437" b="0" i="0" lang="zh-CN" dirty="0">
-                <a:solidFill>
-                  <a:srgbClr val="8A5A0E"/>
+              <a:defRPr sz="1002" b="0" i="0" lang="zh-CN" dirty="0">
+                <a:solidFill>
+                  <a:srgbClr val="3F4854"/>
                 </a:solidFill>
                 <a:latin typeface="Noto Sans CJK SC"/>
                 <a:ea typeface="Noto Sans CJK SC"/>
@@ -4943,159 +4793,85 @@
               </a:defRPr>
             </a:pPr>
             <a:r>
-              <a:rPr sz="1437" b="0" i="0" lang="zh-CN" dirty="0">
-                <a:solidFill>
-                  <a:srgbClr val="8A5A0E"/>
+              <a:rPr sz="1002" b="0" i="0" lang="zh-CN" dirty="0">
+                <a:solidFill>
+                  <a:srgbClr val="3F4854"/>
                 </a:solidFill>
                 <a:latin typeface="Noto Sans CJK SC"/>
                 <a:ea typeface="Noto Sans CJK SC"/>
                 <a:cs typeface="Noto Sans CJK SC"/>
               </a:rPr>
-              <a:t>模型排序</a:t>
-            </a:r>
-            <a:r>
-              <a:rPr sz="1437" b="0" i="0" lang="zh-CN" dirty="0">
-                <a:solidFill>
-                  <a:srgbClr val="8A5A0E"/>
-                </a:solidFill>
-                <a:latin typeface="DejaVu Sans"/>
-                <a:ea typeface="DejaVu Sans"/>
-                <a:cs typeface="DejaVu Sans"/>
-              </a:rPr>
-              <a:t> ≠ </a:t>
-            </a:r>
-            <a:r>
-              <a:rPr sz="1437" b="0" i="0" lang="zh-CN" dirty="0">
-                <a:solidFill>
-                  <a:srgbClr val="8A5A0E"/>
-                </a:solidFill>
-                <a:latin typeface="Noto Sans CJK SC"/>
-                <a:ea typeface="Noto Sans CJK SC"/>
-                <a:cs typeface="Noto Sans CJK SC"/>
-              </a:rPr>
-              <a:t>验证</a:t>
-            </a:r>
-          </a:p>
-        </p:txBody>
-      </p:sp>
-      <p:cxnSp>
-        <p:nvCxnSpPr>
-          <p:cNvPr id="28" name="fk_stub" descr="Editable line; source id fk_stub"/>
-          <p:cNvCxnSpPr/>
+              <a:t>竞争相与玻璃区</a:t>
+            </a:r>
+          </a:p>
+        </p:txBody>
+      </p:sp>
+      <p:sp>
+        <p:nvSpPr>
+          <p:cNvPr id="28" name="c3" descr="Editable shape; source id c3"/>
+          <p:cNvSpPr/>
           <p:nvPr/>
-        </p:nvCxnSpPr>
-        <p:spPr>
-          <a:xfrm>
-            <a:off x="2714624" y="6032499"/>
-            <a:ext cx="460375" cy="0"/>
-          </a:xfrm>
-          <a:prstGeom prst="line">
-            <a:avLst/>
-          </a:prstGeom>
-          <a:ln w="39687">
+        </p:nvSpPr>
+        <p:spPr>
+          <a:xfrm>
+            <a:off x="4180659" y="833586"/>
+            <a:ext cx="1768985" cy="2036242"/>
+          </a:xfrm>
+          <a:prstGeom prst="roundRect">
+            <a:avLst>
+              <a:gd name="adj" fmla="val 3597"/>
+            </a:avLst>
+          </a:prstGeom>
+          <a:solidFill>
+            <a:srgbClr val="FFFFFF"/>
+          </a:solidFill>
+          <a:ln w="9544">
             <a:solidFill>
-              <a:srgbClr val="0F7A88"/>
+              <a:srgbClr val="5B7592"/>
             </a:solidFill>
           </a:ln>
           <a:effectLst/>
         </p:spPr>
         <p:style>
-          <a:lnRef idx="2">
+          <a:lnRef idx="1">
             <a:schemeClr val="accent1"/>
           </a:lnRef>
-          <a:fillRef idx="0">
+          <a:fillRef idx="3">
             <a:schemeClr val="accent1"/>
           </a:fillRef>
           <a:effectRef idx="0">
             <a:schemeClr val="accent1"/>
           </a:effectRef>
           <a:fontRef idx="minor">
-            <a:schemeClr val="tx1"/>
+            <a:schemeClr val="lt1"/>
           </a:fontRef>
         </p:style>
-      </p:cxnSp>
-      <p:cxnSp>
-        <p:nvCxnSpPr>
-          <p:cNvPr id="29" name="fk_v" descr="Editable line; source id fk_v"/>
-          <p:cNvCxnSpPr/>
-          <p:nvPr/>
-        </p:nvCxnSpPr>
-        <p:spPr>
-          <a:xfrm>
-            <a:off x="3174999" y="3579812"/>
-            <a:ext cx="0" cy="2452687"/>
-          </a:xfrm>
-          <a:prstGeom prst="line">
-            <a:avLst/>
-          </a:prstGeom>
-          <a:ln w="39687">
-            <a:solidFill>
-              <a:srgbClr val="0F7A88"/>
-            </a:solidFill>
-          </a:ln>
-          <a:effectLst/>
-        </p:spPr>
-        <p:style>
-          <a:lnRef idx="2">
-            <a:schemeClr val="accent1"/>
-          </a:lnRef>
-          <a:fillRef idx="0">
-            <a:schemeClr val="accent1"/>
-          </a:fillRef>
-          <a:effectRef idx="0">
-            <a:schemeClr val="accent1"/>
-          </a:effectRef>
-          <a:fontRef idx="minor">
-            <a:schemeClr val="tx1"/>
-          </a:fontRef>
-        </p:style>
-      </p:cxnSp>
-      <p:sp>
-        <p:nvSpPr>
-          <p:cNvPr id="30" name="fk_a" descr="Editable line; source id fk_a"/>
+        <p:txBody>
+          <a:bodyPr rtlCol="0" anchor="ctr"/>
+          <a:lstStyle/>
+          <a:p>
+            <a:pPr algn="ctr"/>
+          </a:p>
+        </p:txBody>
+      </p:sp>
+      <p:sp>
+        <p:nvSpPr>
+          <p:cNvPr id="29" name="c3_s" descr="Editable shape; source id c3_s"/>
           <p:cNvSpPr/>
           <p:nvPr/>
         </p:nvSpPr>
         <p:spPr>
           <a:xfrm>
-            <a:off x="3175000" y="3516312"/>
-            <a:ext cx="388937" cy="127000"/>
-          </a:xfrm>
-          <a:custGeom>
-            <a:avLst/>
-            <a:gdLst/>
-            <a:ahLst/>
-            <a:cxnLst/>
-            <a:rect l="l" t="t" r="r" b="b"/>
-            <a:pathLst>
-              <a:path w="49000" h="16000">
-                <a:moveTo>
-                  <a:pt x="0" y="5500"/>
-                </a:moveTo>
-                <a:lnTo>
-                  <a:pt x="31000" y="5500"/>
-                </a:lnTo>
-                <a:lnTo>
-                  <a:pt x="31000" y="0"/>
-                </a:lnTo>
-                <a:lnTo>
-                  <a:pt x="49000" y="8000"/>
-                </a:lnTo>
-                <a:lnTo>
-                  <a:pt x="31000" y="16000"/>
-                </a:lnTo>
-                <a:lnTo>
-                  <a:pt x="31000" y="10500"/>
-                </a:lnTo>
-                <a:lnTo>
-                  <a:pt x="0" y="10500"/>
-                </a:lnTo>
-                <a:close/>
-              </a:path>
-            </a:pathLst>
-          </a:custGeom>
+            <a:off x="4180659" y="833586"/>
+            <a:ext cx="1768985" cy="50906"/>
+          </a:xfrm>
+          <a:prstGeom prst="roundRect">
+            <a:avLst>
+              <a:gd name="adj" fmla="val 50000"/>
+            </a:avLst>
+          </a:prstGeom>
           <a:solidFill>
-            <a:srgbClr val="0F7A88"/>
+            <a:srgbClr val="5B7592"/>
           </a:solidFill>
           <a:ln>
             <a:noFill/>
@@ -5124,138 +4900,41 @@
           </a:p>
         </p:txBody>
       </p:sp>
-      <p:sp>
-        <p:nvSpPr>
-          <p:cNvPr id="31" name="fk_b" descr="Editable line; source id fk_b"/>
-          <p:cNvSpPr/>
+      <p:pic>
+        <p:nvPicPr>
+          <p:cNvPr id="30" name="c3_i" descr="exact crop of the generated raster (line motif)"/>
+          <p:cNvPicPr>
+            <a:picLocks noChangeAspect="1"/>
+          </p:cNvPicPr>
           <p:nvPr/>
-        </p:nvSpPr>
-        <p:spPr>
-          <a:xfrm>
-            <a:off x="3175000" y="5516562"/>
-            <a:ext cx="381000" cy="127000"/>
-          </a:xfrm>
-          <a:custGeom>
+        </p:nvPicPr>
+        <p:blipFill>
+          <a:blip r:embed="rId4"/>
+          <a:stretch>
+            <a:fillRect/>
+          </a:stretch>
+        </p:blipFill>
+        <p:spPr>
+          <a:xfrm>
+            <a:off x="4315803" y="967215"/>
+            <a:ext cx="213320" cy="279983"/>
+          </a:xfrm>
+          <a:prstGeom prst="rect">
             <a:avLst/>
-            <a:gdLst/>
-            <a:ahLst/>
-            <a:cxnLst/>
-            <a:rect l="l" t="t" r="r" b="b"/>
-            <a:pathLst>
-              <a:path w="48000" h="16000">
-                <a:moveTo>
-                  <a:pt x="0" y="5500"/>
-                </a:moveTo>
-                <a:lnTo>
-                  <a:pt x="30000" y="5500"/>
-                </a:lnTo>
-                <a:lnTo>
-                  <a:pt x="30000" y="0"/>
-                </a:lnTo>
-                <a:lnTo>
-                  <a:pt x="48000" y="8000"/>
-                </a:lnTo>
-                <a:lnTo>
-                  <a:pt x="30000" y="16000"/>
-                </a:lnTo>
-                <a:lnTo>
-                  <a:pt x="30000" y="10500"/>
-                </a:lnTo>
-                <a:lnTo>
-                  <a:pt x="0" y="10500"/>
-                </a:lnTo>
-                <a:close/>
-              </a:path>
-            </a:pathLst>
-          </a:custGeom>
-          <a:solidFill>
-            <a:srgbClr val="0F7A88"/>
-          </a:solidFill>
-          <a:ln>
-            <a:noFill/>
-          </a:ln>
+          </a:prstGeom>
           <a:effectLst/>
         </p:spPr>
-        <p:style>
-          <a:lnRef idx="1">
-            <a:schemeClr val="accent1"/>
-          </a:lnRef>
-          <a:fillRef idx="3">
-            <a:schemeClr val="accent1"/>
-          </a:fillRef>
-          <a:effectRef idx="0">
-            <a:schemeClr val="accent1"/>
-          </a:effectRef>
-          <a:fontRef idx="minor">
-            <a:schemeClr val="lt1"/>
-          </a:fontRef>
-        </p:style>
-        <p:txBody>
-          <a:bodyPr rtlCol="0" anchor="ctr"/>
-          <a:lstStyle/>
-          <a:p>
-            <a:pPr algn="ctr"/>
-          </a:p>
-        </p:txBody>
-      </p:sp>
-      <p:sp>
-        <p:nvSpPr>
-          <p:cNvPr id="32" name="l1" descr="Editable shape; source id l1"/>
-          <p:cNvSpPr/>
-          <p:nvPr/>
-        </p:nvSpPr>
-        <p:spPr>
-          <a:xfrm>
-            <a:off x="3579812" y="3000374"/>
-            <a:ext cx="6016624" cy="1166812"/>
-          </a:xfrm>
-          <a:prstGeom prst="roundRect">
-            <a:avLst>
-              <a:gd name="adj" fmla="val 9523"/>
-            </a:avLst>
-          </a:prstGeom>
-          <a:solidFill>
-            <a:srgbClr val="E1EFF1"/>
-          </a:solidFill>
-          <a:ln w="23812">
-            <a:solidFill>
-              <a:srgbClr val="1F6F78"/>
-            </a:solidFill>
-          </a:ln>
-          <a:effectLst/>
-        </p:spPr>
-        <p:style>
-          <a:lnRef idx="1">
-            <a:schemeClr val="accent1"/>
-          </a:lnRef>
-          <a:fillRef idx="3">
-            <a:schemeClr val="accent1"/>
-          </a:fillRef>
-          <a:effectRef idx="0">
-            <a:schemeClr val="accent1"/>
-          </a:effectRef>
-          <a:fontRef idx="minor">
-            <a:schemeClr val="lt1"/>
-          </a:fontRef>
-        </p:style>
-        <p:txBody>
-          <a:bodyPr rtlCol="0" anchor="ctr"/>
-          <a:lstStyle/>
-          <a:p>
-            <a:pPr algn="ctr"/>
-          </a:p>
-        </p:txBody>
-      </p:sp>
-      <p:sp>
-        <p:nvSpPr>
-          <p:cNvPr id="33" name="l1_t" descr="Editable text; source id l1_t"/>
+      </p:pic>
+      <p:sp>
+        <p:nvSpPr>
+          <p:cNvPr id="31" name="c3_t" descr="Editable text; source id c3_t"/>
           <p:cNvSpPr txBox="1"/>
           <p:nvPr/>
         </p:nvSpPr>
         <p:spPr>
           <a:xfrm>
-            <a:off x="3738562" y="3063874"/>
-            <a:ext cx="2539999" cy="349249"/>
+            <a:off x="4638814" y="986304"/>
+            <a:ext cx="1209018" cy="248167"/>
           </a:xfrm>
           <a:prstGeom prst="rect">
             <a:avLst/>
@@ -5271,7 +4950,7 @@
           <a:p>
             <a:pPr algn="l" fontAlgn="base">
               <a:lnSpc>
-                <a:spcPts val="2546"/>
+                <a:spcPts val="1728"/>
               </a:lnSpc>
               <a:spcBef>
                 <a:spcPts val="0"/>
@@ -5279,9 +4958,9 @@
               <a:spcAft>
                 <a:spcPts val="0"/>
               </a:spcAft>
-              <a:defRPr sz="1749" b="1" i="0" lang="zh-CN" dirty="0">
-                <a:solidFill>
-                  <a:srgbClr val="145159"/>
+              <a:defRPr sz="1187" b="1" i="0" lang="zh-CN" dirty="0">
+                <a:solidFill>
+                  <a:srgbClr val="2B3E57"/>
                 </a:solidFill>
                 <a:latin typeface="Noto Sans CJK SC"/>
                 <a:ea typeface="Noto Sans CJK SC"/>
@@ -5289,77 +4968,29 @@
               </a:defRPr>
             </a:pPr>
             <a:r>
-              <a:rPr sz="1749" b="1" i="0" lang="zh-CN" dirty="0">
-                <a:solidFill>
-                  <a:srgbClr val="145159"/>
+              <a:rPr sz="1187" b="1" i="0" lang="zh-CN" dirty="0">
+                <a:solidFill>
+                  <a:srgbClr val="2B3E57"/>
                 </a:solidFill>
                 <a:latin typeface="Noto Sans CJK SC"/>
                 <a:ea typeface="Noto Sans CJK SC"/>
                 <a:cs typeface="Noto Sans CJK SC"/>
               </a:rPr>
-              <a:t>固相成相</a:t>
-            </a:r>
-          </a:p>
-        </p:txBody>
-      </p:sp>
-      <p:sp>
-        <p:nvSpPr>
-          <p:cNvPr id="34" name="l1_k0" descr="Editable shape; source id l1_k0"/>
-          <p:cNvSpPr/>
-          <p:nvPr/>
-        </p:nvSpPr>
-        <p:spPr>
-          <a:xfrm>
-            <a:off x="3746499" y="3508374"/>
-            <a:ext cx="1198562" cy="484187"/>
-          </a:xfrm>
-          <a:prstGeom prst="roundRect">
-            <a:avLst>
-              <a:gd name="adj" fmla="val 13114"/>
-            </a:avLst>
-          </a:prstGeom>
-          <a:solidFill>
-            <a:srgbClr val="FFFFFF"/>
-          </a:solidFill>
-          <a:ln w="11906">
-            <a:solidFill>
-              <a:srgbClr val="B5BDC4"/>
-            </a:solidFill>
-          </a:ln>
-          <a:effectLst/>
-        </p:spPr>
-        <p:style>
-          <a:lnRef idx="1">
-            <a:schemeClr val="accent1"/>
-          </a:lnRef>
-          <a:fillRef idx="3">
-            <a:schemeClr val="accent1"/>
-          </a:fillRef>
-          <a:effectRef idx="0">
-            <a:schemeClr val="accent1"/>
-          </a:effectRef>
-          <a:fontRef idx="minor">
-            <a:schemeClr val="lt1"/>
-          </a:fontRef>
-        </p:style>
-        <p:txBody>
-          <a:bodyPr rtlCol="0" anchor="ctr"/>
-          <a:lstStyle/>
-          <a:p>
-            <a:pPr algn="ctr"/>
-          </a:p>
-        </p:txBody>
-      </p:sp>
-      <p:sp>
-        <p:nvSpPr>
-          <p:cNvPr id="35" name="l1_k0_t" descr="Editable text; source id l1_k0_t"/>
+              <a:t>模型筛选的前驱体</a:t>
+            </a:r>
+          </a:p>
+        </p:txBody>
+      </p:sp>
+      <p:sp>
+        <p:nvSpPr>
+          <p:cNvPr id="32" name="c3_k0" descr="Editable text; source id c3_k0"/>
           <p:cNvSpPr txBox="1"/>
           <p:nvPr/>
         </p:nvSpPr>
         <p:spPr>
           <a:xfrm>
-            <a:off x="3794124" y="3532187"/>
-            <a:ext cx="1103312" cy="436562"/>
+            <a:off x="4282471" y="1285377"/>
+            <a:ext cx="1565361" cy="197260"/>
           </a:xfrm>
           <a:prstGeom prst="rect">
             <a:avLst/>
@@ -5373,9 +5004,9 @@
           </a:bodyPr>
           <a:lstStyle/>
           <a:p>
-            <a:pPr algn="ctr" fontAlgn="base">
+            <a:pPr algn="l" fontAlgn="base">
               <a:lnSpc>
-                <a:spcPts val="2015"/>
+                <a:spcPts val="1177"/>
               </a:lnSpc>
               <a:spcBef>
                 <a:spcPts val="0"/>
@@ -5383,161 +5014,75 @@
               <a:spcAft>
                 <a:spcPts val="0"/>
               </a:spcAft>
-              <a:defRPr sz="1374" b="0" i="0" lang="zh-CN" dirty="0">
-                <a:solidFill>
-                  <a:srgbClr val="2F3840"/>
-                </a:solidFill>
-                <a:latin typeface="Noto Sans CJK SC"/>
-                <a:ea typeface="Noto Sans CJK SC"/>
-                <a:cs typeface="Noto Sans CJK SC"/>
+              <a:defRPr sz="1002" b="0" i="0" lang="zh-CN" dirty="0">
+                <a:solidFill>
+                  <a:srgbClr val="3F4854"/>
+                </a:solidFill>
+                <a:latin typeface="DejaVu Sans"/>
+                <a:ea typeface="DejaVu Sans"/>
+                <a:cs typeface="DejaVu Sans"/>
               </a:defRPr>
             </a:pPr>
             <a:r>
-              <a:rPr sz="1374" b="0" i="0" lang="zh-CN" dirty="0">
-                <a:solidFill>
-                  <a:srgbClr val="2F3840"/>
-                </a:solidFill>
-                <a:latin typeface="Noto Sans CJK SC"/>
-                <a:ea typeface="Noto Sans CJK SC"/>
-                <a:cs typeface="Noto Sans CJK SC"/>
+              <a:rPr sz="1002" b="0" i="0" lang="zh-CN" dirty="0">
+                <a:solidFill>
+                  <a:srgbClr val="3F4854"/>
+                </a:solidFill>
+                <a:latin typeface="DejaVu Sans"/>
+                <a:ea typeface="DejaVu Sans"/>
+                <a:cs typeface="DejaVu Sans"/>
               </a:rPr>
-              <a:t>分段煅烧</a:t>
-            </a:r>
-          </a:p>
-        </p:txBody>
-      </p:sp>
-      <p:sp>
-        <p:nvSpPr>
-          <p:cNvPr id="36" name="l1_a0" descr="Editable line; source id l1_a0"/>
-          <p:cNvSpPr/>
+              <a:t>BaCO3 + Y2O3 + SiO2</a:t>
+            </a:r>
+          </a:p>
+        </p:txBody>
+      </p:sp>
+      <p:cxnSp>
+        <p:nvCxnSpPr>
+          <p:cNvPr id="33" name="c3_r1" descr="Editable line; source id c3_r1"/>
+          <p:cNvCxnSpPr/>
           <p:nvPr/>
-        </p:nvSpPr>
-        <p:spPr>
-          <a:xfrm>
-            <a:off x="4968875" y="3702844"/>
-            <a:ext cx="230187" cy="87312"/>
-          </a:xfrm>
-          <a:custGeom>
+        </p:nvCxnSpPr>
+        <p:spPr>
+          <a:xfrm>
+            <a:off x="4282471" y="1558997"/>
+            <a:ext cx="1565361" cy="0"/>
+          </a:xfrm>
+          <a:prstGeom prst="line">
             <a:avLst/>
-            <a:gdLst/>
-            <a:ahLst/>
-            <a:cxnLst/>
-            <a:rect l="l" t="t" r="r" b="b"/>
-            <a:pathLst>
-              <a:path w="29000" h="11000">
-                <a:moveTo>
-                  <a:pt x="0" y="3500"/>
-                </a:moveTo>
-                <a:lnTo>
-                  <a:pt x="17000" y="3500"/>
-                </a:lnTo>
-                <a:lnTo>
-                  <a:pt x="17000" y="0"/>
-                </a:lnTo>
-                <a:lnTo>
-                  <a:pt x="29000" y="5500"/>
-                </a:lnTo>
-                <a:lnTo>
-                  <a:pt x="17000" y="11000"/>
-                </a:lnTo>
-                <a:lnTo>
-                  <a:pt x="17000" y="7500"/>
-                </a:lnTo>
-                <a:lnTo>
-                  <a:pt x="0" y="7500"/>
-                </a:lnTo>
-                <a:close/>
-              </a:path>
-            </a:pathLst>
-          </a:custGeom>
-          <a:solidFill>
-            <a:srgbClr val="0F7A88"/>
-          </a:solidFill>
-          <a:ln>
-            <a:noFill/>
-          </a:ln>
-          <a:effectLst/>
-        </p:spPr>
-        <p:style>
-          <a:lnRef idx="1">
-            <a:schemeClr val="accent1"/>
-          </a:lnRef>
-          <a:fillRef idx="3">
-            <a:schemeClr val="accent1"/>
-          </a:fillRef>
-          <a:effectRef idx="0">
-            <a:schemeClr val="accent1"/>
-          </a:effectRef>
-          <a:fontRef idx="minor">
-            <a:schemeClr val="lt1"/>
-          </a:fontRef>
-        </p:style>
-        <p:txBody>
-          <a:bodyPr rtlCol="0" anchor="ctr"/>
-          <a:lstStyle/>
-          <a:p>
-            <a:pPr algn="ctr"/>
-          </a:p>
-        </p:txBody>
-      </p:sp>
-      <p:sp>
-        <p:nvSpPr>
-          <p:cNvPr id="37" name="l1_k1" descr="Editable shape; source id l1_k1"/>
-          <p:cNvSpPr/>
-          <p:nvPr/>
-        </p:nvSpPr>
-        <p:spPr>
-          <a:xfrm>
-            <a:off x="5222874" y="3508374"/>
-            <a:ext cx="984249" cy="484187"/>
-          </a:xfrm>
-          <a:prstGeom prst="roundRect">
-            <a:avLst>
-              <a:gd name="adj" fmla="val 13114"/>
-            </a:avLst>
-          </a:prstGeom>
-          <a:solidFill>
-            <a:srgbClr val="FFFFFF"/>
-          </a:solidFill>
-          <a:ln w="11906">
+          </a:prstGeom>
+          <a:ln w="6363">
             <a:solidFill>
-              <a:srgbClr val="B5BDC4"/>
+              <a:srgbClr val="DCE2E8"/>
             </a:solidFill>
           </a:ln>
           <a:effectLst/>
         </p:spPr>
         <p:style>
-          <a:lnRef idx="1">
+          <a:lnRef idx="2">
             <a:schemeClr val="accent1"/>
           </a:lnRef>
-          <a:fillRef idx="3">
+          <a:fillRef idx="0">
             <a:schemeClr val="accent1"/>
           </a:fillRef>
           <a:effectRef idx="0">
             <a:schemeClr val="accent1"/>
           </a:effectRef>
           <a:fontRef idx="minor">
-            <a:schemeClr val="lt1"/>
+            <a:schemeClr val="tx1"/>
           </a:fontRef>
         </p:style>
-        <p:txBody>
-          <a:bodyPr rtlCol="0" anchor="ctr"/>
-          <a:lstStyle/>
-          <a:p>
-            <a:pPr algn="ctr"/>
-          </a:p>
-        </p:txBody>
-      </p:sp>
-      <p:sp>
-        <p:nvSpPr>
-          <p:cNvPr id="38" name="l1_k1_t" descr="Editable text; source id l1_k1_t"/>
+      </p:cxnSp>
+      <p:sp>
+        <p:nvSpPr>
+          <p:cNvPr id="34" name="c3_k1" descr="Editable text; source id c3_k1"/>
           <p:cNvSpPr txBox="1"/>
           <p:nvPr/>
         </p:nvSpPr>
         <p:spPr>
           <a:xfrm>
-            <a:off x="5270499" y="3532187"/>
-            <a:ext cx="888999" cy="436562"/>
+            <a:off x="4282471" y="1584450"/>
+            <a:ext cx="1565361" cy="197260"/>
           </a:xfrm>
           <a:prstGeom prst="rect">
             <a:avLst/>
@@ -5551,9 +5096,9 @@
           </a:bodyPr>
           <a:lstStyle/>
           <a:p>
-            <a:pPr algn="ctr" fontAlgn="base">
+            <a:pPr algn="l" fontAlgn="base">
               <a:lnSpc>
-                <a:spcPts val="2015"/>
+                <a:spcPts val="1177"/>
               </a:lnSpc>
               <a:spcBef>
                 <a:spcPts val="0"/>
@@ -5561,78 +5106,52 @@
               <a:spcAft>
                 <a:spcPts val="0"/>
               </a:spcAft>
-              <a:defRPr sz="1374" b="0" i="0" lang="zh-CN" dirty="0">
-                <a:solidFill>
-                  <a:srgbClr val="2F3840"/>
-                </a:solidFill>
-                <a:latin typeface="Noto Sans CJK SC"/>
-                <a:ea typeface="Noto Sans CJK SC"/>
-                <a:cs typeface="Noto Sans CJK SC"/>
+              <a:defRPr sz="1002" b="0" i="0" lang="zh-CN" dirty="0">
+                <a:solidFill>
+                  <a:srgbClr val="3F4854"/>
+                </a:solidFill>
+                <a:latin typeface="DejaVu Sans"/>
+                <a:ea typeface="DejaVu Sans"/>
+                <a:cs typeface="DejaVu Sans"/>
               </a:defRPr>
             </a:pPr>
             <a:r>
-              <a:rPr sz="1374" b="0" i="0" lang="zh-CN" dirty="0">
-                <a:solidFill>
-                  <a:srgbClr val="2F3840"/>
-                </a:solidFill>
-                <a:latin typeface="Noto Sans CJK SC"/>
-                <a:ea typeface="Noto Sans CJK SC"/>
-                <a:cs typeface="Noto Sans CJK SC"/>
+              <a:rPr sz="1002" b="0" i="0" lang="zh-CN" dirty="0">
+                <a:solidFill>
+                  <a:srgbClr val="3F4854"/>
+                </a:solidFill>
+                <a:latin typeface="DejaVu Sans"/>
+                <a:ea typeface="DejaVu Sans"/>
+                <a:cs typeface="DejaVu Sans"/>
               </a:rPr>
-              <a:t>复磨</a:t>
-            </a:r>
-          </a:p>
-        </p:txBody>
-      </p:sp>
-      <p:sp>
-        <p:nvSpPr>
-          <p:cNvPr id="39" name="l1_a1" descr="Editable line; source id l1_a1"/>
+              <a:t>ZnO / MgO / Co3O4</a:t>
+            </a:r>
+          </a:p>
+        </p:txBody>
+      </p:sp>
+      <p:sp>
+        <p:nvSpPr>
+          <p:cNvPr id="35" name="c3_tg" descr="Editable shape; source id c3_tg"/>
           <p:cNvSpPr/>
           <p:nvPr/>
         </p:nvSpPr>
         <p:spPr>
           <a:xfrm>
-            <a:off x="6230937" y="3702844"/>
-            <a:ext cx="230187" cy="87312"/>
-          </a:xfrm>
-          <a:custGeom>
-            <a:avLst/>
-            <a:gdLst/>
-            <a:ahLst/>
-            <a:cxnLst/>
-            <a:rect l="l" t="t" r="r" b="b"/>
-            <a:pathLst>
-              <a:path w="29000" h="11000">
-                <a:moveTo>
-                  <a:pt x="0" y="3500"/>
-                </a:moveTo>
-                <a:lnTo>
-                  <a:pt x="17000" y="3500"/>
-                </a:lnTo>
-                <a:lnTo>
-                  <a:pt x="17000" y="0"/>
-                </a:lnTo>
-                <a:lnTo>
-                  <a:pt x="29000" y="5500"/>
-                </a:lnTo>
-                <a:lnTo>
-                  <a:pt x="17000" y="11000"/>
-                </a:lnTo>
-                <a:lnTo>
-                  <a:pt x="17000" y="7500"/>
-                </a:lnTo>
-                <a:lnTo>
-                  <a:pt x="0" y="7500"/>
-                </a:lnTo>
-                <a:close/>
-              </a:path>
-            </a:pathLst>
-          </a:custGeom>
+            <a:off x="4759715" y="2526212"/>
+            <a:ext cx="1088116" cy="267256"/>
+          </a:xfrm>
+          <a:prstGeom prst="roundRect">
+            <a:avLst>
+              <a:gd name="adj" fmla="val 50000"/>
+            </a:avLst>
+          </a:prstGeom>
           <a:solidFill>
-            <a:srgbClr val="0F7A88"/>
+            <a:srgbClr val="FFF6E3"/>
           </a:solidFill>
-          <a:ln>
-            <a:noFill/>
+          <a:ln w="9544">
+            <a:solidFill>
+              <a:srgbClr val="C48A24"/>
+            </a:solidFill>
           </a:ln>
           <a:effectLst/>
         </p:spPr>
@@ -5660,62 +5179,14 @@
       </p:sp>
       <p:sp>
         <p:nvSpPr>
-          <p:cNvPr id="40" name="l1_k2" descr="Editable shape; source id l1_k2"/>
-          <p:cNvSpPr/>
-          <p:nvPr/>
-        </p:nvSpPr>
-        <p:spPr>
-          <a:xfrm>
-            <a:off x="6484937" y="3508374"/>
-            <a:ext cx="976312" cy="484187"/>
-          </a:xfrm>
-          <a:prstGeom prst="roundRect">
-            <a:avLst>
-              <a:gd name="adj" fmla="val 13114"/>
-            </a:avLst>
-          </a:prstGeom>
-          <a:solidFill>
-            <a:srgbClr val="FFFFFF"/>
-          </a:solidFill>
-          <a:ln w="11906">
-            <a:solidFill>
-              <a:srgbClr val="B5BDC4"/>
-            </a:solidFill>
-          </a:ln>
-          <a:effectLst/>
-        </p:spPr>
-        <p:style>
-          <a:lnRef idx="1">
-            <a:schemeClr val="accent1"/>
-          </a:lnRef>
-          <a:fillRef idx="3">
-            <a:schemeClr val="accent1"/>
-          </a:fillRef>
-          <a:effectRef idx="0">
-            <a:schemeClr val="accent1"/>
-          </a:effectRef>
-          <a:fontRef idx="minor">
-            <a:schemeClr val="lt1"/>
-          </a:fontRef>
-        </p:style>
-        <p:txBody>
-          <a:bodyPr rtlCol="0" anchor="ctr"/>
-          <a:lstStyle/>
-          <a:p>
-            <a:pPr algn="ctr"/>
-          </a:p>
-        </p:txBody>
-      </p:sp>
-      <p:sp>
-        <p:nvSpPr>
-          <p:cNvPr id="41" name="l1_k2_t" descr="Editable text; source id l1_k2_t"/>
+          <p:cNvPr id="36" name="c3_tgt" descr="Editable text; source id c3_tgt"/>
           <p:cNvSpPr txBox="1"/>
           <p:nvPr/>
         </p:nvSpPr>
         <p:spPr>
           <a:xfrm>
-            <a:off x="6532562" y="3532187"/>
-            <a:ext cx="881062" cy="436562"/>
+            <a:off x="4810622" y="2551665"/>
+            <a:ext cx="986304" cy="216350"/>
           </a:xfrm>
           <a:prstGeom prst="rect">
             <a:avLst/>
@@ -5731,7 +5202,7 @@
           <a:p>
             <a:pPr algn="ctr" fontAlgn="base">
               <a:lnSpc>
-                <a:spcPts val="2015"/>
+                <a:spcPts val="1390"/>
               </a:lnSpc>
               <a:spcBef>
                 <a:spcPts val="0"/>
@@ -5739,9 +5210,9 @@
               <a:spcAft>
                 <a:spcPts val="0"/>
               </a:spcAft>
-              <a:defRPr sz="1374" b="0" i="0" lang="zh-CN" dirty="0">
-                <a:solidFill>
-                  <a:srgbClr val="2F3840"/>
+              <a:defRPr sz="951" b="1" i="0" lang="zh-CN" dirty="0">
+                <a:solidFill>
+                  <a:srgbClr val="7A5410"/>
                 </a:solidFill>
                 <a:latin typeface="Noto Sans CJK SC"/>
                 <a:ea typeface="Noto Sans CJK SC"/>
@@ -5749,65 +5220,107 @@
               </a:defRPr>
             </a:pPr>
             <a:r>
-              <a:rPr sz="1374" b="0" i="0" lang="zh-CN" dirty="0">
-                <a:solidFill>
-                  <a:srgbClr val="2F3840"/>
+              <a:rPr sz="951" b="1" i="0" lang="zh-CN" dirty="0">
+                <a:solidFill>
+                  <a:srgbClr val="7A5410"/>
                 </a:solidFill>
                 <a:latin typeface="Noto Sans CJK SC"/>
                 <a:ea typeface="Noto Sans CJK SC"/>
                 <a:cs typeface="Noto Sans CJK SC"/>
               </a:rPr>
-              <a:t>退火</a:t>
-            </a:r>
-          </a:p>
-        </p:txBody>
-      </p:sp>
-      <p:sp>
-        <p:nvSpPr>
-          <p:cNvPr id="42" name="l1_a2" descr="Editable line; source id l1_a2"/>
+              <a:t>模型排序</a:t>
+            </a:r>
+            <a:r>
+              <a:rPr sz="951" b="1" i="0" lang="zh-CN" dirty="0">
+                <a:solidFill>
+                  <a:srgbClr val="7A5410"/>
+                </a:solidFill>
+                <a:latin typeface="DejaVu Sans"/>
+                <a:ea typeface="DejaVu Sans"/>
+                <a:cs typeface="DejaVu Sans"/>
+              </a:rPr>
+              <a:t> ≠ </a:t>
+            </a:r>
+            <a:r>
+              <a:rPr sz="951" b="1" i="0" lang="zh-CN" dirty="0">
+                <a:solidFill>
+                  <a:srgbClr val="7A5410"/>
+                </a:solidFill>
+                <a:latin typeface="Noto Sans CJK SC"/>
+                <a:ea typeface="Noto Sans CJK SC"/>
+                <a:cs typeface="Noto Sans CJK SC"/>
+              </a:rPr>
+              <a:t>验证</a:t>
+            </a:r>
+          </a:p>
+        </p:txBody>
+      </p:sp>
+      <p:sp>
+        <p:nvSpPr>
+          <p:cNvPr id="37" name="l1" descr="Editable shape; source id l1"/>
           <p:cNvSpPr/>
           <p:nvPr/>
         </p:nvSpPr>
         <p:spPr>
           <a:xfrm>
-            <a:off x="7485062" y="3702844"/>
-            <a:ext cx="222250" cy="87312"/>
-          </a:xfrm>
-          <a:custGeom>
-            <a:avLst/>
-            <a:gdLst/>
-            <a:ahLst/>
-            <a:cxnLst/>
-            <a:rect l="l" t="t" r="r" b="b"/>
-            <a:pathLst>
-              <a:path w="28000" h="11000">
-                <a:moveTo>
-                  <a:pt x="0" y="3500"/>
-                </a:moveTo>
-                <a:lnTo>
-                  <a:pt x="16000" y="3500"/>
-                </a:lnTo>
-                <a:lnTo>
-                  <a:pt x="16000" y="0"/>
-                </a:lnTo>
-                <a:lnTo>
-                  <a:pt x="28000" y="5500"/>
-                </a:lnTo>
-                <a:lnTo>
-                  <a:pt x="16000" y="11000"/>
-                </a:lnTo>
-                <a:lnTo>
-                  <a:pt x="16000" y="7500"/>
-                </a:lnTo>
-                <a:lnTo>
-                  <a:pt x="0" y="7500"/>
-                </a:lnTo>
-                <a:close/>
-              </a:path>
-            </a:pathLst>
-          </a:custGeom>
+            <a:off x="6605060" y="668141"/>
+            <a:ext cx="2335315" cy="1240835"/>
+          </a:xfrm>
+          <a:prstGeom prst="roundRect">
+            <a:avLst>
+              <a:gd name="adj" fmla="val 5128"/>
+            </a:avLst>
+          </a:prstGeom>
           <a:solidFill>
-            <a:srgbClr val="0F7A88"/>
+            <a:srgbClr val="FFFFFF"/>
+          </a:solidFill>
+          <a:ln w="9544">
+            <a:solidFill>
+              <a:srgbClr val="1F7F8C"/>
+            </a:solidFill>
+          </a:ln>
+          <a:effectLst/>
+        </p:spPr>
+        <p:style>
+          <a:lnRef idx="1">
+            <a:schemeClr val="accent1"/>
+          </a:lnRef>
+          <a:fillRef idx="3">
+            <a:schemeClr val="accent1"/>
+          </a:fillRef>
+          <a:effectRef idx="0">
+            <a:schemeClr val="accent1"/>
+          </a:effectRef>
+          <a:fontRef idx="minor">
+            <a:schemeClr val="lt1"/>
+          </a:fontRef>
+        </p:style>
+        <p:txBody>
+          <a:bodyPr rtlCol="0" anchor="ctr"/>
+          <a:lstStyle/>
+          <a:p>
+            <a:pPr algn="ctr"/>
+          </a:p>
+        </p:txBody>
+      </p:sp>
+      <p:sp>
+        <p:nvSpPr>
+          <p:cNvPr id="38" name="l1_s" descr="Editable shape; source id l1_s"/>
+          <p:cNvSpPr/>
+          <p:nvPr/>
+        </p:nvSpPr>
+        <p:spPr>
+          <a:xfrm>
+            <a:off x="6605060" y="668141"/>
+            <a:ext cx="2335315" cy="50906"/>
+          </a:xfrm>
+          <a:prstGeom prst="roundRect">
+            <a:avLst>
+              <a:gd name="adj" fmla="val 50000"/>
+            </a:avLst>
+          </a:prstGeom>
+          <a:solidFill>
+            <a:srgbClr val="1F7F8C"/>
           </a:solidFill>
           <a:ln>
             <a:noFill/>
@@ -5836,64 +5349,41 @@
           </a:p>
         </p:txBody>
       </p:sp>
-      <p:sp>
-        <p:nvSpPr>
-          <p:cNvPr id="43" name="l1_k3" descr="Editable shape; source id l1_k3"/>
-          <p:cNvSpPr/>
+      <p:pic>
+        <p:nvPicPr>
+          <p:cNvPr id="39" name="l1_i" descr="exact crop of the generated raster (line motif)"/>
+          <p:cNvPicPr>
+            <a:picLocks noChangeAspect="1"/>
+          </p:cNvPicPr>
           <p:nvPr/>
-        </p:nvSpPr>
-        <p:spPr>
-          <a:xfrm>
-            <a:off x="7731124" y="3508374"/>
-            <a:ext cx="1706562" cy="484187"/>
-          </a:xfrm>
-          <a:prstGeom prst="roundRect">
-            <a:avLst>
-              <a:gd name="adj" fmla="val 13114"/>
-            </a:avLst>
-          </a:prstGeom>
-          <a:solidFill>
-            <a:srgbClr val="FFFFFF"/>
-          </a:solidFill>
-          <a:ln w="11906">
-            <a:solidFill>
-              <a:srgbClr val="B5BDC4"/>
-            </a:solidFill>
-          </a:ln>
+        </p:nvPicPr>
+        <p:blipFill>
+          <a:blip r:embed="rId5"/>
+          <a:stretch>
+            <a:fillRect/>
+          </a:stretch>
+        </p:blipFill>
+        <p:spPr>
+          <a:xfrm>
+            <a:off x="6706872" y="843131"/>
+            <a:ext cx="279983" cy="197260"/>
+          </a:xfrm>
+          <a:prstGeom prst="rect">
+            <a:avLst/>
+          </a:prstGeom>
           <a:effectLst/>
         </p:spPr>
-        <p:style>
-          <a:lnRef idx="1">
-            <a:schemeClr val="accent1"/>
-          </a:lnRef>
-          <a:fillRef idx="3">
-            <a:schemeClr val="accent1"/>
-          </a:fillRef>
-          <a:effectRef idx="0">
-            <a:schemeClr val="accent1"/>
-          </a:effectRef>
-          <a:fontRef idx="minor">
-            <a:schemeClr val="lt1"/>
-          </a:fontRef>
-        </p:style>
-        <p:txBody>
-          <a:bodyPr rtlCol="0" anchor="ctr"/>
-          <a:lstStyle/>
-          <a:p>
-            <a:pPr algn="ctr"/>
-          </a:p>
-        </p:txBody>
-      </p:sp>
-      <p:sp>
-        <p:nvSpPr>
-          <p:cNvPr id="44" name="l1_k3_t" descr="Editable text; source id l1_k3_t"/>
+      </p:pic>
+      <p:sp>
+        <p:nvSpPr>
+          <p:cNvPr id="40" name="l1_t" descr="Editable text; source id l1_t"/>
           <p:cNvSpPr txBox="1"/>
           <p:nvPr/>
         </p:nvSpPr>
         <p:spPr>
           <a:xfrm>
-            <a:off x="7778749" y="3532187"/>
-            <a:ext cx="1611312" cy="436562"/>
+            <a:off x="7063214" y="820860"/>
+            <a:ext cx="1775348" cy="248167"/>
           </a:xfrm>
           <a:prstGeom prst="rect">
             <a:avLst/>
@@ -5907,9 +5397,9 @@
           </a:bodyPr>
           <a:lstStyle/>
           <a:p>
-            <a:pPr algn="ctr" fontAlgn="base">
+            <a:pPr algn="l" fontAlgn="base">
               <a:lnSpc>
-                <a:spcPts val="2015"/>
+                <a:spcPts val="1728"/>
               </a:lnSpc>
               <a:spcBef>
                 <a:spcPts val="0"/>
@@ -5917,9 +5407,9 @@
               <a:spcAft>
                 <a:spcPts val="0"/>
               </a:spcAft>
-              <a:defRPr sz="1374" b="0" i="0" lang="zh-CN" dirty="0">
-                <a:solidFill>
-                  <a:srgbClr val="2F3840"/>
+              <a:defRPr sz="1187" b="1" i="0" lang="zh-CN" dirty="0">
+                <a:solidFill>
+                  <a:srgbClr val="0F4F58"/>
                 </a:solidFill>
                 <a:latin typeface="Noto Sans CJK SC"/>
                 <a:ea typeface="Noto Sans CJK SC"/>
@@ -5927,77 +5417,29 @@
               </a:defRPr>
             </a:pPr>
             <a:r>
-              <a:rPr sz="1374" b="0" i="0" lang="zh-CN" dirty="0">
-                <a:solidFill>
-                  <a:srgbClr val="2F3840"/>
+              <a:rPr sz="1187" b="1" i="0" lang="zh-CN" dirty="0">
+                <a:solidFill>
+                  <a:srgbClr val="0F4F58"/>
                 </a:solidFill>
                 <a:latin typeface="Noto Sans CJK SC"/>
                 <a:ea typeface="Noto Sans CJK SC"/>
                 <a:cs typeface="Noto Sans CJK SC"/>
               </a:rPr>
-              <a:t>批量相区与相纯度</a:t>
-            </a:r>
-          </a:p>
-        </p:txBody>
-      </p:sp>
-      <p:sp>
-        <p:nvSpPr>
-          <p:cNvPr id="45" name="l2" descr="Editable shape; source id l2"/>
-          <p:cNvSpPr/>
-          <p:nvPr/>
-        </p:nvSpPr>
-        <p:spPr>
-          <a:xfrm>
-            <a:off x="3571874" y="5016499"/>
-            <a:ext cx="6024562" cy="1127124"/>
-          </a:xfrm>
-          <a:prstGeom prst="roundRect">
-            <a:avLst>
-              <a:gd name="adj" fmla="val 9859"/>
-            </a:avLst>
-          </a:prstGeom>
-          <a:solidFill>
-            <a:srgbClr val="E1EFF1"/>
-          </a:solidFill>
-          <a:ln w="23812">
-            <a:solidFill>
-              <a:srgbClr val="1F6F78"/>
-            </a:solidFill>
-          </a:ln>
-          <a:effectLst/>
-        </p:spPr>
-        <p:style>
-          <a:lnRef idx="1">
-            <a:schemeClr val="accent1"/>
-          </a:lnRef>
-          <a:fillRef idx="3">
-            <a:schemeClr val="accent1"/>
-          </a:fillRef>
-          <a:effectRef idx="0">
-            <a:schemeClr val="accent1"/>
-          </a:effectRef>
-          <a:fontRef idx="minor">
-            <a:schemeClr val="lt1"/>
-          </a:fontRef>
-        </p:style>
-        <p:txBody>
-          <a:bodyPr rtlCol="0" anchor="ctr"/>
-          <a:lstStyle/>
-          <a:p>
-            <a:pPr algn="ctr"/>
-          </a:p>
-        </p:txBody>
-      </p:sp>
-      <p:sp>
-        <p:nvSpPr>
-          <p:cNvPr id="46" name="l2_t" descr="Editable text; source id l2_t"/>
+              <a:t>固相成相</a:t>
+            </a:r>
+          </a:p>
+        </p:txBody>
+      </p:sp>
+      <p:sp>
+        <p:nvSpPr>
+          <p:cNvPr id="41" name="l1_k0" descr="Editable text; source id l1_k0"/>
           <p:cNvSpPr txBox="1"/>
           <p:nvPr/>
         </p:nvSpPr>
         <p:spPr>
           <a:xfrm>
-            <a:off x="3730624" y="5079999"/>
-            <a:ext cx="2539999" cy="349249"/>
+            <a:off x="6706872" y="1119933"/>
+            <a:ext cx="2131690" cy="197260"/>
           </a:xfrm>
           <a:prstGeom prst="rect">
             <a:avLst/>
@@ -6013,7 +5455,7 @@
           <a:p>
             <a:pPr algn="l" fontAlgn="base">
               <a:lnSpc>
-                <a:spcPts val="2546"/>
+                <a:spcPts val="1465"/>
               </a:lnSpc>
               <a:spcBef>
                 <a:spcPts val="0"/>
@@ -6021,9 +5463,9 @@
               <a:spcAft>
                 <a:spcPts val="0"/>
               </a:spcAft>
-              <a:defRPr sz="1749" b="1" i="0" lang="zh-CN" dirty="0">
-                <a:solidFill>
-                  <a:srgbClr val="145159"/>
+              <a:defRPr sz="1002" b="0" i="0" lang="zh-CN" dirty="0">
+                <a:solidFill>
+                  <a:srgbClr val="3F4854"/>
                 </a:solidFill>
                 <a:latin typeface="Noto Sans CJK SC"/>
                 <a:ea typeface="Noto Sans CJK SC"/>
@@ -6031,77 +5473,109 @@
               </a:defRPr>
             </a:pPr>
             <a:r>
-              <a:rPr sz="1749" b="1" i="0" lang="zh-CN" dirty="0">
-                <a:solidFill>
-                  <a:srgbClr val="145159"/>
+              <a:rPr sz="1002" b="0" i="0" lang="zh-CN" dirty="0">
+                <a:solidFill>
+                  <a:srgbClr val="3F4854"/>
                 </a:solidFill>
                 <a:latin typeface="Noto Sans CJK SC"/>
                 <a:ea typeface="Noto Sans CJK SC"/>
                 <a:cs typeface="Noto Sans CJK SC"/>
               </a:rPr>
-              <a:t>高温溶液长晶</a:t>
-            </a:r>
-          </a:p>
-        </p:txBody>
-      </p:sp>
-      <p:sp>
-        <p:nvSpPr>
-          <p:cNvPr id="47" name="l2_k0" descr="Editable shape; source id l2_k0"/>
-          <p:cNvSpPr/>
+              <a:t>分段煅烧</a:t>
+            </a:r>
+            <a:r>
+              <a:rPr sz="1002" b="0" i="0" lang="zh-CN" dirty="0">
+                <a:solidFill>
+                  <a:srgbClr val="3F4854"/>
+                </a:solidFill>
+                <a:latin typeface="DejaVu Sans"/>
+                <a:ea typeface="DejaVu Sans"/>
+                <a:cs typeface="DejaVu Sans"/>
+              </a:rPr>
+              <a:t> → </a:t>
+            </a:r>
+            <a:r>
+              <a:rPr sz="1002" b="0" i="0" lang="zh-CN" dirty="0">
+                <a:solidFill>
+                  <a:srgbClr val="3F4854"/>
+                </a:solidFill>
+                <a:latin typeface="Noto Sans CJK SC"/>
+                <a:ea typeface="Noto Sans CJK SC"/>
+                <a:cs typeface="Noto Sans CJK SC"/>
+              </a:rPr>
+              <a:t>复磨</a:t>
+            </a:r>
+            <a:r>
+              <a:rPr sz="1002" b="0" i="0" lang="zh-CN" dirty="0">
+                <a:solidFill>
+                  <a:srgbClr val="3F4854"/>
+                </a:solidFill>
+                <a:latin typeface="DejaVu Sans"/>
+                <a:ea typeface="DejaVu Sans"/>
+                <a:cs typeface="DejaVu Sans"/>
+              </a:rPr>
+              <a:t> → </a:t>
+            </a:r>
+            <a:r>
+              <a:rPr sz="1002" b="0" i="0" lang="zh-CN" dirty="0">
+                <a:solidFill>
+                  <a:srgbClr val="3F4854"/>
+                </a:solidFill>
+                <a:latin typeface="Noto Sans CJK SC"/>
+                <a:ea typeface="Noto Sans CJK SC"/>
+                <a:cs typeface="Noto Sans CJK SC"/>
+              </a:rPr>
+              <a:t>退火</a:t>
+            </a:r>
+          </a:p>
+        </p:txBody>
+      </p:sp>
+      <p:cxnSp>
+        <p:nvCxnSpPr>
+          <p:cNvPr id="42" name="l1_r1" descr="Editable line; source id l1_r1"/>
+          <p:cNvCxnSpPr/>
           <p:nvPr/>
-        </p:nvSpPr>
-        <p:spPr>
-          <a:xfrm>
-            <a:off x="3746499" y="5516562"/>
-            <a:ext cx="1000124" cy="484187"/>
-          </a:xfrm>
-          <a:prstGeom prst="roundRect">
-            <a:avLst>
-              <a:gd name="adj" fmla="val 13114"/>
-            </a:avLst>
-          </a:prstGeom>
-          <a:solidFill>
-            <a:srgbClr val="FFFFFF"/>
-          </a:solidFill>
-          <a:ln w="11906">
+        </p:nvCxnSpPr>
+        <p:spPr>
+          <a:xfrm>
+            <a:off x="6706872" y="1380826"/>
+            <a:ext cx="2131691" cy="0"/>
+          </a:xfrm>
+          <a:prstGeom prst="line">
+            <a:avLst/>
+          </a:prstGeom>
+          <a:ln w="6363">
             <a:solidFill>
-              <a:srgbClr val="B5BDC4"/>
+              <a:srgbClr val="DCE2E8"/>
             </a:solidFill>
           </a:ln>
           <a:effectLst/>
         </p:spPr>
         <p:style>
-          <a:lnRef idx="1">
+          <a:lnRef idx="2">
             <a:schemeClr val="accent1"/>
           </a:lnRef>
-          <a:fillRef idx="3">
+          <a:fillRef idx="0">
             <a:schemeClr val="accent1"/>
           </a:fillRef>
           <a:effectRef idx="0">
             <a:schemeClr val="accent1"/>
           </a:effectRef>
           <a:fontRef idx="minor">
-            <a:schemeClr val="lt1"/>
+            <a:schemeClr val="tx1"/>
           </a:fontRef>
         </p:style>
-        <p:txBody>
-          <a:bodyPr rtlCol="0" anchor="ctr"/>
-          <a:lstStyle/>
-          <a:p>
-            <a:pPr algn="ctr"/>
-          </a:p>
-        </p:txBody>
-      </p:sp>
-      <p:sp>
-        <p:nvSpPr>
-          <p:cNvPr id="48" name="l2_k0_t" descr="Editable text; source id l2_k0_t"/>
+      </p:cxnSp>
+      <p:sp>
+        <p:nvSpPr>
+          <p:cNvPr id="43" name="l1_k1" descr="Editable text; source id l1_k1"/>
           <p:cNvSpPr txBox="1"/>
           <p:nvPr/>
         </p:nvSpPr>
         <p:spPr>
           <a:xfrm>
-            <a:off x="3794124" y="5540374"/>
-            <a:ext cx="904874" cy="436562"/>
+            <a:off x="6706872" y="1406279"/>
+            <a:ext cx="2131690" cy="197260"/>
           </a:xfrm>
           <a:prstGeom prst="rect">
             <a:avLst/>
@@ -6115,9 +5589,9 @@
           </a:bodyPr>
           <a:lstStyle/>
           <a:p>
-            <a:pPr algn="ctr" fontAlgn="base">
+            <a:pPr algn="l" fontAlgn="base">
               <a:lnSpc>
-                <a:spcPts val="2015"/>
+                <a:spcPts val="1465"/>
               </a:lnSpc>
               <a:spcBef>
                 <a:spcPts val="0"/>
@@ -6125,9 +5599,9 @@
               <a:spcAft>
                 <a:spcPts val="0"/>
               </a:spcAft>
-              <a:defRPr sz="1374" b="0" i="0" lang="zh-CN" dirty="0">
-                <a:solidFill>
-                  <a:srgbClr val="2F3840"/>
+              <a:defRPr sz="1002" b="0" i="0" lang="zh-CN" dirty="0">
+                <a:solidFill>
+                  <a:srgbClr val="3F4854"/>
                 </a:solidFill>
                 <a:latin typeface="Noto Sans CJK SC"/>
                 <a:ea typeface="Noto Sans CJK SC"/>
@@ -6135,65 +5609,85 @@
               </a:defRPr>
             </a:pPr>
             <a:r>
-              <a:rPr sz="1374" b="0" i="0" lang="zh-CN" dirty="0">
-                <a:solidFill>
-                  <a:srgbClr val="2F3840"/>
+              <a:rPr sz="1002" b="0" i="0" lang="zh-CN" dirty="0">
+                <a:solidFill>
+                  <a:srgbClr val="3F4854"/>
                 </a:solidFill>
                 <a:latin typeface="Noto Sans CJK SC"/>
                 <a:ea typeface="Noto Sans CJK SC"/>
                 <a:cs typeface="Noto Sans CJK SC"/>
               </a:rPr>
-              <a:t>助熔</a:t>
-            </a:r>
-          </a:p>
-        </p:txBody>
-      </p:sp>
-      <p:sp>
-        <p:nvSpPr>
-          <p:cNvPr id="49" name="l2_a0" descr="Editable line; source id l2_a0"/>
+              <a:t>批量相区与相纯度</a:t>
+            </a:r>
+          </a:p>
+        </p:txBody>
+      </p:sp>
+      <p:sp>
+        <p:nvSpPr>
+          <p:cNvPr id="44" name="l2" descr="Editable shape; source id l2"/>
           <p:cNvSpPr/>
           <p:nvPr/>
         </p:nvSpPr>
         <p:spPr>
           <a:xfrm>
-            <a:off x="4770437" y="5711031"/>
-            <a:ext cx="222250" cy="87312"/>
-          </a:xfrm>
-          <a:custGeom>
-            <a:avLst/>
-            <a:gdLst/>
-            <a:ahLst/>
-            <a:cxnLst/>
-            <a:rect l="l" t="t" r="r" b="b"/>
-            <a:pathLst>
-              <a:path w="28000" h="11000">
-                <a:moveTo>
-                  <a:pt x="0" y="3500"/>
-                </a:moveTo>
-                <a:lnTo>
-                  <a:pt x="16000" y="3500"/>
-                </a:lnTo>
-                <a:lnTo>
-                  <a:pt x="16000" y="0"/>
-                </a:lnTo>
-                <a:lnTo>
-                  <a:pt x="28000" y="5500"/>
-                </a:lnTo>
-                <a:lnTo>
-                  <a:pt x="16000" y="11000"/>
-                </a:lnTo>
-                <a:lnTo>
-                  <a:pt x="16000" y="7500"/>
-                </a:lnTo>
-                <a:lnTo>
-                  <a:pt x="0" y="7500"/>
-                </a:lnTo>
-                <a:close/>
-              </a:path>
-            </a:pathLst>
-          </a:custGeom>
+            <a:off x="6605060" y="2017152"/>
+            <a:ext cx="2335315" cy="1349010"/>
+          </a:xfrm>
+          <a:prstGeom prst="roundRect">
+            <a:avLst>
+              <a:gd name="adj" fmla="val 4716"/>
+            </a:avLst>
+          </a:prstGeom>
           <a:solidFill>
-            <a:srgbClr val="0F7A88"/>
+            <a:srgbClr val="FFFFFF"/>
+          </a:solidFill>
+          <a:ln w="9544">
+            <a:solidFill>
+              <a:srgbClr val="1F7F8C"/>
+            </a:solidFill>
+          </a:ln>
+          <a:effectLst/>
+        </p:spPr>
+        <p:style>
+          <a:lnRef idx="1">
+            <a:schemeClr val="accent1"/>
+          </a:lnRef>
+          <a:fillRef idx="3">
+            <a:schemeClr val="accent1"/>
+          </a:fillRef>
+          <a:effectRef idx="0">
+            <a:schemeClr val="accent1"/>
+          </a:effectRef>
+          <a:fontRef idx="minor">
+            <a:schemeClr val="lt1"/>
+          </a:fontRef>
+        </p:style>
+        <p:txBody>
+          <a:bodyPr rtlCol="0" anchor="ctr"/>
+          <a:lstStyle/>
+          <a:p>
+            <a:pPr algn="ctr"/>
+          </a:p>
+        </p:txBody>
+      </p:sp>
+      <p:sp>
+        <p:nvSpPr>
+          <p:cNvPr id="45" name="l2_s" descr="Editable shape; source id l2_s"/>
+          <p:cNvSpPr/>
+          <p:nvPr/>
+        </p:nvSpPr>
+        <p:spPr>
+          <a:xfrm>
+            <a:off x="6605060" y="2017152"/>
+            <a:ext cx="2335315" cy="50906"/>
+          </a:xfrm>
+          <a:prstGeom prst="roundRect">
+            <a:avLst>
+              <a:gd name="adj" fmla="val 50000"/>
+            </a:avLst>
+          </a:prstGeom>
+          <a:solidFill>
+            <a:srgbClr val="1F7F8C"/>
           </a:solidFill>
           <a:ln>
             <a:noFill/>
@@ -6222,64 +5716,41 @@
           </a:p>
         </p:txBody>
       </p:sp>
-      <p:sp>
-        <p:nvSpPr>
-          <p:cNvPr id="50" name="l2_k1" descr="Editable shape; source id l2_k1"/>
-          <p:cNvSpPr/>
+      <p:pic>
+        <p:nvPicPr>
+          <p:cNvPr id="46" name="l2_i" descr="exact crop of the generated raster (line motif)"/>
+          <p:cNvPicPr>
+            <a:picLocks noChangeAspect="1"/>
+          </p:cNvPicPr>
           <p:nvPr/>
-        </p:nvSpPr>
-        <p:spPr>
-          <a:xfrm>
-            <a:off x="5016499" y="5516562"/>
-            <a:ext cx="960437" cy="484187"/>
-          </a:xfrm>
-          <a:prstGeom prst="roundRect">
-            <a:avLst>
-              <a:gd name="adj" fmla="val 13114"/>
-            </a:avLst>
-          </a:prstGeom>
-          <a:solidFill>
-            <a:srgbClr val="FFFFFF"/>
-          </a:solidFill>
-          <a:ln w="11906">
-            <a:solidFill>
-              <a:srgbClr val="B5BDC4"/>
-            </a:solidFill>
-          </a:ln>
+        </p:nvPicPr>
+        <p:blipFill>
+          <a:blip r:embed="rId6"/>
+          <a:stretch>
+            <a:fillRect/>
+          </a:stretch>
+        </p:blipFill>
+        <p:spPr>
+          <a:xfrm>
+            <a:off x="6723150" y="2150780"/>
+            <a:ext cx="247427" cy="279983"/>
+          </a:xfrm>
+          <a:prstGeom prst="rect">
+            <a:avLst/>
+          </a:prstGeom>
           <a:effectLst/>
         </p:spPr>
-        <p:style>
-          <a:lnRef idx="1">
-            <a:schemeClr val="accent1"/>
-          </a:lnRef>
-          <a:fillRef idx="3">
-            <a:schemeClr val="accent1"/>
-          </a:fillRef>
-          <a:effectRef idx="0">
-            <a:schemeClr val="accent1"/>
-          </a:effectRef>
-          <a:fontRef idx="minor">
-            <a:schemeClr val="lt1"/>
-          </a:fontRef>
-        </p:style>
-        <p:txBody>
-          <a:bodyPr rtlCol="0" anchor="ctr"/>
-          <a:lstStyle/>
-          <a:p>
-            <a:pPr algn="ctr"/>
-          </a:p>
-        </p:txBody>
-      </p:sp>
-      <p:sp>
-        <p:nvSpPr>
-          <p:cNvPr id="51" name="l2_k1_t" descr="Editable text; source id l2_k1_t"/>
+      </p:pic>
+      <p:sp>
+        <p:nvSpPr>
+          <p:cNvPr id="47" name="l2_t" descr="Editable text; source id l2_t"/>
           <p:cNvSpPr txBox="1"/>
           <p:nvPr/>
         </p:nvSpPr>
         <p:spPr>
           <a:xfrm>
-            <a:off x="5064124" y="5540374"/>
-            <a:ext cx="865187" cy="436562"/>
+            <a:off x="7063214" y="2169870"/>
+            <a:ext cx="1775348" cy="248167"/>
           </a:xfrm>
           <a:prstGeom prst="rect">
             <a:avLst/>
@@ -6293,9 +5764,9 @@
           </a:bodyPr>
           <a:lstStyle/>
           <a:p>
-            <a:pPr algn="ctr" fontAlgn="base">
+            <a:pPr algn="l" fontAlgn="base">
               <a:lnSpc>
-                <a:spcPts val="2015"/>
+                <a:spcPts val="1728"/>
               </a:lnSpc>
               <a:spcBef>
                 <a:spcPts val="0"/>
@@ -6303,9 +5774,9 @@
               <a:spcAft>
                 <a:spcPts val="0"/>
               </a:spcAft>
-              <a:defRPr sz="1374" b="0" i="0" lang="zh-CN" dirty="0">
-                <a:solidFill>
-                  <a:srgbClr val="2F3840"/>
+              <a:defRPr sz="1187" b="1" i="0" lang="zh-CN" dirty="0">
+                <a:solidFill>
+                  <a:srgbClr val="0F4F58"/>
                 </a:solidFill>
                 <a:latin typeface="Noto Sans CJK SC"/>
                 <a:ea typeface="Noto Sans CJK SC"/>
@@ -6313,151 +5784,29 @@
               </a:defRPr>
             </a:pPr>
             <a:r>
-              <a:rPr sz="1374" b="0" i="0" lang="zh-CN" dirty="0">
-                <a:solidFill>
-                  <a:srgbClr val="2F3840"/>
+              <a:rPr sz="1187" b="1" i="0" lang="zh-CN" dirty="0">
+                <a:solidFill>
+                  <a:srgbClr val="0F4F58"/>
                 </a:solidFill>
                 <a:latin typeface="Noto Sans CJK SC"/>
                 <a:ea typeface="Noto Sans CJK SC"/>
                 <a:cs typeface="Noto Sans CJK SC"/>
               </a:rPr>
-              <a:t>保温</a:t>
-            </a:r>
-          </a:p>
-        </p:txBody>
-      </p:sp>
-      <p:sp>
-        <p:nvSpPr>
-          <p:cNvPr id="52" name="l2_a1" descr="Editable line; source id l2_a1"/>
-          <p:cNvSpPr/>
-          <p:nvPr/>
-        </p:nvSpPr>
-        <p:spPr>
-          <a:xfrm>
-            <a:off x="6000750" y="5711031"/>
-            <a:ext cx="222250" cy="87312"/>
-          </a:xfrm>
-          <a:custGeom>
-            <a:avLst/>
-            <a:gdLst/>
-            <a:ahLst/>
-            <a:cxnLst/>
-            <a:rect l="l" t="t" r="r" b="b"/>
-            <a:pathLst>
-              <a:path w="28000" h="11000">
-                <a:moveTo>
-                  <a:pt x="0" y="3500"/>
-                </a:moveTo>
-                <a:lnTo>
-                  <a:pt x="16000" y="3500"/>
-                </a:lnTo>
-                <a:lnTo>
-                  <a:pt x="16000" y="0"/>
-                </a:lnTo>
-                <a:lnTo>
-                  <a:pt x="28000" y="5500"/>
-                </a:lnTo>
-                <a:lnTo>
-                  <a:pt x="16000" y="11000"/>
-                </a:lnTo>
-                <a:lnTo>
-                  <a:pt x="16000" y="7500"/>
-                </a:lnTo>
-                <a:lnTo>
-                  <a:pt x="0" y="7500"/>
-                </a:lnTo>
-                <a:close/>
-              </a:path>
-            </a:pathLst>
-          </a:custGeom>
-          <a:solidFill>
-            <a:srgbClr val="0F7A88"/>
-          </a:solidFill>
-          <a:ln>
-            <a:noFill/>
-          </a:ln>
-          <a:effectLst/>
-        </p:spPr>
-        <p:style>
-          <a:lnRef idx="1">
-            <a:schemeClr val="accent1"/>
-          </a:lnRef>
-          <a:fillRef idx="3">
-            <a:schemeClr val="accent1"/>
-          </a:fillRef>
-          <a:effectRef idx="0">
-            <a:schemeClr val="accent1"/>
-          </a:effectRef>
-          <a:fontRef idx="minor">
-            <a:schemeClr val="lt1"/>
-          </a:fontRef>
-        </p:style>
-        <p:txBody>
-          <a:bodyPr rtlCol="0" anchor="ctr"/>
-          <a:lstStyle/>
-          <a:p>
-            <a:pPr algn="ctr"/>
-          </a:p>
-        </p:txBody>
-      </p:sp>
-      <p:sp>
-        <p:nvSpPr>
-          <p:cNvPr id="53" name="l2_k2" descr="Editable shape; source id l2_k2"/>
-          <p:cNvSpPr/>
-          <p:nvPr/>
-        </p:nvSpPr>
-        <p:spPr>
-          <a:xfrm>
-            <a:off x="6246812" y="5516562"/>
-            <a:ext cx="936624" cy="484187"/>
-          </a:xfrm>
-          <a:prstGeom prst="roundRect">
-            <a:avLst>
-              <a:gd name="adj" fmla="val 13114"/>
-            </a:avLst>
-          </a:prstGeom>
-          <a:solidFill>
-            <a:srgbClr val="FFFFFF"/>
-          </a:solidFill>
-          <a:ln w="11906">
-            <a:solidFill>
-              <a:srgbClr val="B5BDC4"/>
-            </a:solidFill>
-          </a:ln>
-          <a:effectLst/>
-        </p:spPr>
-        <p:style>
-          <a:lnRef idx="1">
-            <a:schemeClr val="accent1"/>
-          </a:lnRef>
-          <a:fillRef idx="3">
-            <a:schemeClr val="accent1"/>
-          </a:fillRef>
-          <a:effectRef idx="0">
-            <a:schemeClr val="accent1"/>
-          </a:effectRef>
-          <a:fontRef idx="minor">
-            <a:schemeClr val="lt1"/>
-          </a:fontRef>
-        </p:style>
-        <p:txBody>
-          <a:bodyPr rtlCol="0" anchor="ctr"/>
-          <a:lstStyle/>
-          <a:p>
-            <a:pPr algn="ctr"/>
-          </a:p>
-        </p:txBody>
-      </p:sp>
-      <p:sp>
-        <p:nvSpPr>
-          <p:cNvPr id="54" name="l2_k2_t" descr="Editable text; source id l2_k2_t"/>
+              <a:t>高温溶液长晶</a:t>
+            </a:r>
+          </a:p>
+        </p:txBody>
+      </p:sp>
+      <p:sp>
+        <p:nvSpPr>
+          <p:cNvPr id="48" name="l2_k0" descr="Editable text; source id l2_k0"/>
           <p:cNvSpPr txBox="1"/>
           <p:nvPr/>
         </p:nvSpPr>
         <p:spPr>
           <a:xfrm>
-            <a:off x="6294437" y="5540374"/>
-            <a:ext cx="841374" cy="436562"/>
+            <a:off x="6706872" y="2468943"/>
+            <a:ext cx="2131690" cy="197260"/>
           </a:xfrm>
           <a:prstGeom prst="rect">
             <a:avLst/>
@@ -6471,9 +5820,9 @@
           </a:bodyPr>
           <a:lstStyle/>
           <a:p>
-            <a:pPr algn="ctr" fontAlgn="base">
+            <a:pPr algn="l" fontAlgn="base">
               <a:lnSpc>
-                <a:spcPts val="2015"/>
+                <a:spcPts val="1465"/>
               </a:lnSpc>
               <a:spcBef>
                 <a:spcPts val="0"/>
@@ -6481,9 +5830,9 @@
               <a:spcAft>
                 <a:spcPts val="0"/>
               </a:spcAft>
-              <a:defRPr sz="1374" b="0" i="0" lang="zh-CN" dirty="0">
-                <a:solidFill>
-                  <a:srgbClr val="2F3840"/>
+              <a:defRPr sz="1002" b="0" i="0" lang="zh-CN" dirty="0">
+                <a:solidFill>
+                  <a:srgbClr val="3F4854"/>
                 </a:solidFill>
                 <a:latin typeface="Noto Sans CJK SC"/>
                 <a:ea typeface="Noto Sans CJK SC"/>
@@ -6491,9 +5840,53 @@
               </a:defRPr>
             </a:pPr>
             <a:r>
-              <a:rPr sz="1374" b="0" i="0" lang="zh-CN" dirty="0">
-                <a:solidFill>
-                  <a:srgbClr val="2F3840"/>
+              <a:rPr sz="1002" b="0" i="0" lang="zh-CN" dirty="0">
+                <a:solidFill>
+                  <a:srgbClr val="3F4854"/>
+                </a:solidFill>
+                <a:latin typeface="Noto Sans CJK SC"/>
+                <a:ea typeface="Noto Sans CJK SC"/>
+                <a:cs typeface="Noto Sans CJK SC"/>
+              </a:rPr>
+              <a:t>助熔</a:t>
+            </a:r>
+            <a:r>
+              <a:rPr sz="1002" b="0" i="0" lang="zh-CN" dirty="0">
+                <a:solidFill>
+                  <a:srgbClr val="3F4854"/>
+                </a:solidFill>
+                <a:latin typeface="DejaVu Sans"/>
+                <a:ea typeface="DejaVu Sans"/>
+                <a:cs typeface="DejaVu Sans"/>
+              </a:rPr>
+              <a:t> → </a:t>
+            </a:r>
+            <a:r>
+              <a:rPr sz="1002" b="0" i="0" lang="zh-CN" dirty="0">
+                <a:solidFill>
+                  <a:srgbClr val="3F4854"/>
+                </a:solidFill>
+                <a:latin typeface="Noto Sans CJK SC"/>
+                <a:ea typeface="Noto Sans CJK SC"/>
+                <a:cs typeface="Noto Sans CJK SC"/>
+              </a:rPr>
+              <a:t>保温</a:t>
+            </a:r>
+            <a:r>
+              <a:rPr sz="1002" b="0" i="0" lang="zh-CN" dirty="0">
+                <a:solidFill>
+                  <a:srgbClr val="3F4854"/>
+                </a:solidFill>
+                <a:latin typeface="DejaVu Sans"/>
+                <a:ea typeface="DejaVu Sans"/>
+                <a:cs typeface="DejaVu Sans"/>
+              </a:rPr>
+              <a:t> → </a:t>
+            </a:r>
+            <a:r>
+              <a:rPr sz="1002" b="0" i="0" lang="zh-CN" dirty="0">
+                <a:solidFill>
+                  <a:srgbClr val="3F4854"/>
                 </a:solidFill>
                 <a:latin typeface="Noto Sans CJK SC"/>
                 <a:ea typeface="Noto Sans CJK SC"/>
@@ -6504,16 +5897,938 @@
           </a:p>
         </p:txBody>
       </p:sp>
-      <p:sp>
-        <p:nvSpPr>
-          <p:cNvPr id="55" name="l2_a2" descr="Editable line; source id l2_a2"/>
+      <p:cxnSp>
+        <p:nvCxnSpPr>
+          <p:cNvPr id="49" name="l2_r1" descr="Editable line; source id l2_r1"/>
+          <p:cNvCxnSpPr/>
+          <p:nvPr/>
+        </p:nvCxnSpPr>
+        <p:spPr>
+          <a:xfrm>
+            <a:off x="6706872" y="2729837"/>
+            <a:ext cx="2131691" cy="0"/>
+          </a:xfrm>
+          <a:prstGeom prst="line">
+            <a:avLst/>
+          </a:prstGeom>
+          <a:ln w="6363">
+            <a:solidFill>
+              <a:srgbClr val="DCE2E8"/>
+            </a:solidFill>
+          </a:ln>
+          <a:effectLst/>
+        </p:spPr>
+        <p:style>
+          <a:lnRef idx="2">
+            <a:schemeClr val="accent1"/>
+          </a:lnRef>
+          <a:fillRef idx="0">
+            <a:schemeClr val="accent1"/>
+          </a:fillRef>
+          <a:effectRef idx="0">
+            <a:schemeClr val="accent1"/>
+          </a:effectRef>
+          <a:fontRef idx="minor">
+            <a:schemeClr val="tx1"/>
+          </a:fontRef>
+        </p:style>
+      </p:cxnSp>
+      <p:sp>
+        <p:nvSpPr>
+          <p:cNvPr id="50" name="l2_k1" descr="Editable text; source id l2_k1"/>
+          <p:cNvSpPr txBox="1"/>
+          <p:nvPr/>
+        </p:nvSpPr>
+        <p:spPr>
+          <a:xfrm>
+            <a:off x="6706872" y="2755290"/>
+            <a:ext cx="2131690" cy="197260"/>
+          </a:xfrm>
+          <a:prstGeom prst="rect">
+            <a:avLst/>
+          </a:prstGeom>
+          <a:noFill/>
+          <a:effectLst/>
+        </p:spPr>
+        <p:txBody>
+          <a:bodyPr wrap="none" anchor="ctr" tIns="0" rIns="0" bIns="0" lIns="0" anchorCtr="0" vertOverflow="overflow">
+            <a:noAutofit/>
+          </a:bodyPr>
+          <a:lstStyle/>
+          <a:p>
+            <a:pPr algn="l" fontAlgn="base">
+              <a:lnSpc>
+                <a:spcPts val="1465"/>
+              </a:lnSpc>
+              <a:spcBef>
+                <a:spcPts val="0"/>
+              </a:spcBef>
+              <a:spcAft>
+                <a:spcPts val="0"/>
+              </a:spcAft>
+              <a:defRPr sz="1002" b="0" i="0" lang="zh-CN" dirty="0">
+                <a:solidFill>
+                  <a:srgbClr val="3F4854"/>
+                </a:solidFill>
+                <a:latin typeface="Noto Sans CJK SC"/>
+                <a:ea typeface="Noto Sans CJK SC"/>
+                <a:cs typeface="Noto Sans CJK SC"/>
+              </a:defRPr>
+            </a:pPr>
+            <a:r>
+              <a:rPr sz="1002" b="0" i="0" lang="zh-CN" dirty="0">
+                <a:solidFill>
+                  <a:srgbClr val="3F4854"/>
+                </a:solidFill>
+                <a:latin typeface="Noto Sans CJK SC"/>
+                <a:ea typeface="Noto Sans CJK SC"/>
+                <a:cs typeface="Noto Sans CJK SC"/>
+              </a:rPr>
+              <a:t>单晶结构与液相选择性</a:t>
+            </a:r>
+          </a:p>
+        </p:txBody>
+      </p:sp>
+      <p:sp>
+        <p:nvSpPr>
+          <p:cNvPr id="51" name="c5" descr="Editable shape; source id c5"/>
           <p:cNvSpPr/>
           <p:nvPr/>
         </p:nvSpPr>
         <p:spPr>
           <a:xfrm>
-            <a:off x="7207250" y="5711031"/>
-            <a:ext cx="238125" cy="87312"/>
+            <a:off x="9602154" y="827223"/>
+            <a:ext cx="2258956" cy="2335315"/>
+          </a:xfrm>
+          <a:prstGeom prst="roundRect">
+            <a:avLst>
+              <a:gd name="adj" fmla="val 2816"/>
+            </a:avLst>
+          </a:prstGeom>
+          <a:solidFill>
+            <a:srgbClr val="FFFFFF"/>
+          </a:solidFill>
+          <a:ln w="9544">
+            <a:solidFill>
+              <a:srgbClr val="5B7592"/>
+            </a:solidFill>
+          </a:ln>
+          <a:effectLst/>
+        </p:spPr>
+        <p:style>
+          <a:lnRef idx="1">
+            <a:schemeClr val="accent1"/>
+          </a:lnRef>
+          <a:fillRef idx="3">
+            <a:schemeClr val="accent1"/>
+          </a:fillRef>
+          <a:effectRef idx="0">
+            <a:schemeClr val="accent1"/>
+          </a:effectRef>
+          <a:fontRef idx="minor">
+            <a:schemeClr val="lt1"/>
+          </a:fontRef>
+        </p:style>
+        <p:txBody>
+          <a:bodyPr rtlCol="0" anchor="ctr"/>
+          <a:lstStyle/>
+          <a:p>
+            <a:pPr algn="ctr"/>
+          </a:p>
+        </p:txBody>
+      </p:sp>
+      <p:sp>
+        <p:nvSpPr>
+          <p:cNvPr id="52" name="c5_s" descr="Editable shape; source id c5_s"/>
+          <p:cNvSpPr/>
+          <p:nvPr/>
+        </p:nvSpPr>
+        <p:spPr>
+          <a:xfrm>
+            <a:off x="9602154" y="827223"/>
+            <a:ext cx="2258956" cy="50906"/>
+          </a:xfrm>
+          <a:prstGeom prst="roundRect">
+            <a:avLst>
+              <a:gd name="adj" fmla="val 50000"/>
+            </a:avLst>
+          </a:prstGeom>
+          <a:solidFill>
+            <a:srgbClr val="5B7592"/>
+          </a:solidFill>
+          <a:ln>
+            <a:noFill/>
+          </a:ln>
+          <a:effectLst/>
+        </p:spPr>
+        <p:style>
+          <a:lnRef idx="1">
+            <a:schemeClr val="accent1"/>
+          </a:lnRef>
+          <a:fillRef idx="3">
+            <a:schemeClr val="accent1"/>
+          </a:fillRef>
+          <a:effectRef idx="0">
+            <a:schemeClr val="accent1"/>
+          </a:effectRef>
+          <a:fontRef idx="minor">
+            <a:schemeClr val="lt1"/>
+          </a:fontRef>
+        </p:style>
+        <p:txBody>
+          <a:bodyPr rtlCol="0" anchor="ctr"/>
+          <a:lstStyle/>
+          <a:p>
+            <a:pPr algn="ctr"/>
+          </a:p>
+        </p:txBody>
+      </p:sp>
+      <p:pic>
+        <p:nvPicPr>
+          <p:cNvPr id="53" name="c5_i" descr="exact crop of the generated raster (line motif)"/>
+          <p:cNvPicPr>
+            <a:picLocks noChangeAspect="1"/>
+          </p:cNvPicPr>
+          <p:nvPr/>
+        </p:nvPicPr>
+        <p:blipFill>
+          <a:blip r:embed="rId7"/>
+          <a:stretch>
+            <a:fillRect/>
+          </a:stretch>
+        </p:blipFill>
+        <p:spPr>
+          <a:xfrm>
+            <a:off x="9703966" y="1004546"/>
+            <a:ext cx="279983" cy="205321"/>
+          </a:xfrm>
+          <a:prstGeom prst="rect">
+            <a:avLst/>
+          </a:prstGeom>
+          <a:effectLst/>
+        </p:spPr>
+      </p:pic>
+      <p:sp>
+        <p:nvSpPr>
+          <p:cNvPr id="54" name="c5_t" descr="Editable text; source id c5_t"/>
+          <p:cNvSpPr txBox="1"/>
+          <p:nvPr/>
+        </p:nvSpPr>
+        <p:spPr>
+          <a:xfrm>
+            <a:off x="10060308" y="979941"/>
+            <a:ext cx="1698989" cy="248167"/>
+          </a:xfrm>
+          <a:prstGeom prst="rect">
+            <a:avLst/>
+          </a:prstGeom>
+          <a:noFill/>
+          <a:effectLst/>
+        </p:spPr>
+        <p:txBody>
+          <a:bodyPr wrap="none" anchor="ctr" tIns="0" rIns="0" bIns="0" lIns="0" anchorCtr="0" vertOverflow="overflow">
+            <a:noAutofit/>
+          </a:bodyPr>
+          <a:lstStyle/>
+          <a:p>
+            <a:pPr algn="l" fontAlgn="base">
+              <a:lnSpc>
+                <a:spcPts val="1728"/>
+              </a:lnSpc>
+              <a:spcBef>
+                <a:spcPts val="0"/>
+              </a:spcBef>
+              <a:spcAft>
+                <a:spcPts val="0"/>
+              </a:spcAft>
+              <a:defRPr sz="1187" b="1" i="0" lang="zh-CN" dirty="0">
+                <a:solidFill>
+                  <a:srgbClr val="2B3E57"/>
+                </a:solidFill>
+                <a:latin typeface="Noto Sans CJK SC"/>
+                <a:ea typeface="Noto Sans CJK SC"/>
+                <a:cs typeface="Noto Sans CJK SC"/>
+              </a:defRPr>
+            </a:pPr>
+            <a:r>
+              <a:rPr sz="1187" b="1" i="0" lang="zh-CN" dirty="0">
+                <a:solidFill>
+                  <a:srgbClr val="2B3E57"/>
+                </a:solidFill>
+                <a:latin typeface="Noto Sans CJK SC"/>
+                <a:ea typeface="Noto Sans CJK SC"/>
+                <a:cs typeface="Noto Sans CJK SC"/>
+              </a:rPr>
+              <a:t>结果反馈</a:t>
+            </a:r>
+          </a:p>
+        </p:txBody>
+      </p:sp>
+      <p:sp>
+        <p:nvSpPr>
+          <p:cNvPr id="55" name="c5_k0" descr="Editable text; source id c5_k0"/>
+          <p:cNvSpPr txBox="1"/>
+          <p:nvPr/>
+        </p:nvSpPr>
+        <p:spPr>
+          <a:xfrm>
+            <a:off x="9703966" y="1279014"/>
+            <a:ext cx="2055331" cy="197260"/>
+          </a:xfrm>
+          <a:prstGeom prst="rect">
+            <a:avLst/>
+          </a:prstGeom>
+          <a:noFill/>
+          <a:effectLst/>
+        </p:spPr>
+        <p:txBody>
+          <a:bodyPr wrap="none" anchor="ctr" tIns="0" rIns="0" bIns="0" lIns="0" anchorCtr="0" vertOverflow="overflow">
+            <a:noAutofit/>
+          </a:bodyPr>
+          <a:lstStyle/>
+          <a:p>
+            <a:pPr algn="l" fontAlgn="base">
+              <a:lnSpc>
+                <a:spcPts val="1177"/>
+              </a:lnSpc>
+              <a:spcBef>
+                <a:spcPts val="0"/>
+              </a:spcBef>
+              <a:spcAft>
+                <a:spcPts val="0"/>
+              </a:spcAft>
+              <a:defRPr sz="1002" b="0" i="0" lang="zh-CN" dirty="0">
+                <a:solidFill>
+                  <a:srgbClr val="3F4854"/>
+                </a:solidFill>
+                <a:latin typeface="DejaVu Sans"/>
+                <a:ea typeface="DejaVu Sans"/>
+                <a:cs typeface="DejaVu Sans"/>
+              </a:defRPr>
+            </a:pPr>
+            <a:r>
+              <a:rPr sz="1002" b="0" i="0" lang="zh-CN" dirty="0">
+                <a:solidFill>
+                  <a:srgbClr val="3F4854"/>
+                </a:solidFill>
+                <a:latin typeface="DejaVu Sans"/>
+                <a:ea typeface="DejaVu Sans"/>
+                <a:cs typeface="DejaVu Sans"/>
+              </a:rPr>
+              <a:t>PXRD / Rietveld</a:t>
+            </a:r>
+          </a:p>
+        </p:txBody>
+      </p:sp>
+      <p:cxnSp>
+        <p:nvCxnSpPr>
+          <p:cNvPr id="56" name="c5_r1" descr="Editable line; source id c5_r1"/>
+          <p:cNvCxnSpPr/>
+          <p:nvPr/>
+        </p:nvCxnSpPr>
+        <p:spPr>
+          <a:xfrm>
+            <a:off x="9703966" y="1578087"/>
+            <a:ext cx="2055332" cy="0"/>
+          </a:xfrm>
+          <a:prstGeom prst="line">
+            <a:avLst/>
+          </a:prstGeom>
+          <a:ln w="6363">
+            <a:solidFill>
+              <a:srgbClr val="DCE2E8"/>
+            </a:solidFill>
+          </a:ln>
+          <a:effectLst/>
+        </p:spPr>
+        <p:style>
+          <a:lnRef idx="2">
+            <a:schemeClr val="accent1"/>
+          </a:lnRef>
+          <a:fillRef idx="0">
+            <a:schemeClr val="accent1"/>
+          </a:fillRef>
+          <a:effectRef idx="0">
+            <a:schemeClr val="accent1"/>
+          </a:effectRef>
+          <a:fontRef idx="minor">
+            <a:schemeClr val="tx1"/>
+          </a:fontRef>
+        </p:style>
+      </p:cxnSp>
+      <p:sp>
+        <p:nvSpPr>
+          <p:cNvPr id="57" name="c5_k1" descr="Editable text; source id c5_k1"/>
+          <p:cNvSpPr txBox="1"/>
+          <p:nvPr/>
+        </p:nvSpPr>
+        <p:spPr>
+          <a:xfrm>
+            <a:off x="9703966" y="1603540"/>
+            <a:ext cx="2055331" cy="197260"/>
+          </a:xfrm>
+          <a:prstGeom prst="rect">
+            <a:avLst/>
+          </a:prstGeom>
+          <a:noFill/>
+          <a:effectLst/>
+        </p:spPr>
+        <p:txBody>
+          <a:bodyPr wrap="none" anchor="ctr" tIns="0" rIns="0" bIns="0" lIns="0" anchorCtr="0" vertOverflow="overflow">
+            <a:noAutofit/>
+          </a:bodyPr>
+          <a:lstStyle/>
+          <a:p>
+            <a:pPr algn="l" fontAlgn="base">
+              <a:lnSpc>
+                <a:spcPts val="1177"/>
+              </a:lnSpc>
+              <a:spcBef>
+                <a:spcPts val="0"/>
+              </a:spcBef>
+              <a:spcAft>
+                <a:spcPts val="0"/>
+              </a:spcAft>
+              <a:defRPr sz="1002" b="0" i="0" lang="zh-CN" dirty="0">
+                <a:solidFill>
+                  <a:srgbClr val="3F4854"/>
+                </a:solidFill>
+                <a:latin typeface="DejaVu Sans"/>
+                <a:ea typeface="DejaVu Sans"/>
+                <a:cs typeface="DejaVu Sans"/>
+              </a:defRPr>
+            </a:pPr>
+            <a:r>
+              <a:rPr sz="1002" b="0" i="0" lang="zh-CN" dirty="0">
+                <a:solidFill>
+                  <a:srgbClr val="3F4854"/>
+                </a:solidFill>
+                <a:latin typeface="DejaVu Sans"/>
+                <a:ea typeface="DejaVu Sans"/>
+                <a:cs typeface="DejaVu Sans"/>
+              </a:rPr>
+              <a:t>SCXRD</a:t>
+            </a:r>
+          </a:p>
+        </p:txBody>
+      </p:sp>
+      <p:cxnSp>
+        <p:nvCxnSpPr>
+          <p:cNvPr id="58" name="c5_r2" descr="Editable line; source id c5_r2"/>
+          <p:cNvCxnSpPr/>
+          <p:nvPr/>
+        </p:nvCxnSpPr>
+        <p:spPr>
+          <a:xfrm>
+            <a:off x="9703966" y="1902613"/>
+            <a:ext cx="2055332" cy="0"/>
+          </a:xfrm>
+          <a:prstGeom prst="line">
+            <a:avLst/>
+          </a:prstGeom>
+          <a:ln w="6363">
+            <a:solidFill>
+              <a:srgbClr val="DCE2E8"/>
+            </a:solidFill>
+          </a:ln>
+          <a:effectLst/>
+        </p:spPr>
+        <p:style>
+          <a:lnRef idx="2">
+            <a:schemeClr val="accent1"/>
+          </a:lnRef>
+          <a:fillRef idx="0">
+            <a:schemeClr val="accent1"/>
+          </a:fillRef>
+          <a:effectRef idx="0">
+            <a:schemeClr val="accent1"/>
+          </a:effectRef>
+          <a:fontRef idx="minor">
+            <a:schemeClr val="tx1"/>
+          </a:fontRef>
+        </p:style>
+      </p:cxnSp>
+      <p:sp>
+        <p:nvSpPr>
+          <p:cNvPr id="59" name="c5_k2" descr="Editable text; source id c5_k2"/>
+          <p:cNvSpPr txBox="1"/>
+          <p:nvPr/>
+        </p:nvSpPr>
+        <p:spPr>
+          <a:xfrm>
+            <a:off x="9703966" y="1928066"/>
+            <a:ext cx="2055331" cy="197260"/>
+          </a:xfrm>
+          <a:prstGeom prst="rect">
+            <a:avLst/>
+          </a:prstGeom>
+          <a:noFill/>
+          <a:effectLst/>
+        </p:spPr>
+        <p:txBody>
+          <a:bodyPr wrap="none" anchor="ctr" tIns="0" rIns="0" bIns="0" lIns="0" anchorCtr="0" vertOverflow="overflow">
+            <a:noAutofit/>
+          </a:bodyPr>
+          <a:lstStyle/>
+          <a:p>
+            <a:pPr algn="l" fontAlgn="base">
+              <a:lnSpc>
+                <a:spcPts val="1177"/>
+              </a:lnSpc>
+              <a:spcBef>
+                <a:spcPts val="0"/>
+              </a:spcBef>
+              <a:spcAft>
+                <a:spcPts val="0"/>
+              </a:spcAft>
+              <a:defRPr sz="1002" b="0" i="0" lang="zh-CN" dirty="0">
+                <a:solidFill>
+                  <a:srgbClr val="3F4854"/>
+                </a:solidFill>
+                <a:latin typeface="DejaVu Sans"/>
+                <a:ea typeface="DejaVu Sans"/>
+                <a:cs typeface="DejaVu Sans"/>
+              </a:defRPr>
+            </a:pPr>
+            <a:r>
+              <a:rPr sz="1002" b="0" i="0" lang="zh-CN" dirty="0">
+                <a:solidFill>
+                  <a:srgbClr val="3F4854"/>
+                </a:solidFill>
+                <a:latin typeface="DejaVu Sans"/>
+                <a:ea typeface="DejaVu Sans"/>
+                <a:cs typeface="DejaVu Sans"/>
+              </a:rPr>
+              <a:t>EDS / EPMA / ICP</a:t>
+            </a:r>
+          </a:p>
+        </p:txBody>
+      </p:sp>
+      <p:cxnSp>
+        <p:nvCxnSpPr>
+          <p:cNvPr id="60" name="c5_r3" descr="Editable line; source id c5_r3"/>
+          <p:cNvCxnSpPr/>
+          <p:nvPr/>
+        </p:nvCxnSpPr>
+        <p:spPr>
+          <a:xfrm>
+            <a:off x="9703966" y="2227139"/>
+            <a:ext cx="2055332" cy="0"/>
+          </a:xfrm>
+          <a:prstGeom prst="line">
+            <a:avLst/>
+          </a:prstGeom>
+          <a:ln w="6363">
+            <a:solidFill>
+              <a:srgbClr val="DCE2E8"/>
+            </a:solidFill>
+          </a:ln>
+          <a:effectLst/>
+        </p:spPr>
+        <p:style>
+          <a:lnRef idx="2">
+            <a:schemeClr val="accent1"/>
+          </a:lnRef>
+          <a:fillRef idx="0">
+            <a:schemeClr val="accent1"/>
+          </a:fillRef>
+          <a:effectRef idx="0">
+            <a:schemeClr val="accent1"/>
+          </a:effectRef>
+          <a:fontRef idx="minor">
+            <a:schemeClr val="tx1"/>
+          </a:fontRef>
+        </p:style>
+      </p:cxnSp>
+      <p:sp>
+        <p:nvSpPr>
+          <p:cNvPr id="61" name="c5_k3" descr="Editable text; source id c5_k3"/>
+          <p:cNvSpPr txBox="1"/>
+          <p:nvPr/>
+        </p:nvSpPr>
+        <p:spPr>
+          <a:xfrm>
+            <a:off x="9703966" y="2252592"/>
+            <a:ext cx="2055331" cy="197260"/>
+          </a:xfrm>
+          <a:prstGeom prst="rect">
+            <a:avLst/>
+          </a:prstGeom>
+          <a:noFill/>
+          <a:effectLst/>
+        </p:spPr>
+        <p:txBody>
+          <a:bodyPr wrap="none" anchor="ctr" tIns="0" rIns="0" bIns="0" lIns="0" anchorCtr="0" vertOverflow="overflow">
+            <a:noAutofit/>
+          </a:bodyPr>
+          <a:lstStyle/>
+          <a:p>
+            <a:pPr algn="l" fontAlgn="base">
+              <a:lnSpc>
+                <a:spcPts val="1465"/>
+              </a:lnSpc>
+              <a:spcBef>
+                <a:spcPts val="0"/>
+              </a:spcBef>
+              <a:spcAft>
+                <a:spcPts val="0"/>
+              </a:spcAft>
+              <a:defRPr sz="1002" b="0" i="0" lang="zh-CN" dirty="0">
+                <a:solidFill>
+                  <a:srgbClr val="3F4854"/>
+                </a:solidFill>
+                <a:latin typeface="Noto Sans CJK SC"/>
+                <a:ea typeface="Noto Sans CJK SC"/>
+                <a:cs typeface="Noto Sans CJK SC"/>
+              </a:defRPr>
+            </a:pPr>
+            <a:r>
+              <a:rPr sz="1002" b="0" i="0" lang="zh-CN" dirty="0">
+                <a:solidFill>
+                  <a:srgbClr val="3F4854"/>
+                </a:solidFill>
+                <a:latin typeface="Noto Sans CJK SC"/>
+                <a:ea typeface="Noto Sans CJK SC"/>
+                <a:cs typeface="Noto Sans CJK SC"/>
+              </a:rPr>
+              <a:t>高温相与冷却产物</a:t>
+            </a:r>
+          </a:p>
+        </p:txBody>
+      </p:sp>
+      <p:sp>
+        <p:nvSpPr>
+          <p:cNvPr id="62" name="q1" descr="Editable shape; source id q1"/>
+          <p:cNvSpPr/>
+          <p:nvPr/>
+        </p:nvSpPr>
+        <p:spPr>
+          <a:xfrm>
+            <a:off x="668141" y="4276108"/>
+            <a:ext cx="3429795" cy="610872"/>
+          </a:xfrm>
+          <a:prstGeom prst="roundRect">
+            <a:avLst>
+              <a:gd name="adj" fmla="val 10416"/>
+            </a:avLst>
+          </a:prstGeom>
+          <a:solidFill>
+            <a:srgbClr val="FFFFFF"/>
+          </a:solidFill>
+          <a:ln w="9544">
+            <a:solidFill>
+              <a:srgbClr val="C48A24"/>
+            </a:solidFill>
+          </a:ln>
+          <a:effectLst/>
+        </p:spPr>
+        <p:style>
+          <a:lnRef idx="1">
+            <a:schemeClr val="accent1"/>
+          </a:lnRef>
+          <a:fillRef idx="3">
+            <a:schemeClr val="accent1"/>
+          </a:fillRef>
+          <a:effectRef idx="0">
+            <a:schemeClr val="accent1"/>
+          </a:effectRef>
+          <a:fontRef idx="minor">
+            <a:schemeClr val="lt1"/>
+          </a:fontRef>
+        </p:style>
+        <p:txBody>
+          <a:bodyPr rtlCol="0" anchor="ctr"/>
+          <a:lstStyle/>
+          <a:p>
+            <a:pPr algn="ctr"/>
+          </a:p>
+        </p:txBody>
+      </p:sp>
+      <p:sp>
+        <p:nvSpPr>
+          <p:cNvPr id="63" name="q1_t" descr="Editable text; source id q1_t"/>
+          <p:cNvSpPr txBox="1"/>
+          <p:nvPr/>
+        </p:nvSpPr>
+        <p:spPr>
+          <a:xfrm>
+            <a:off x="820860" y="4428826"/>
+            <a:ext cx="3124359" cy="229077"/>
+          </a:xfrm>
+          <a:prstGeom prst="rect">
+            <a:avLst/>
+          </a:prstGeom>
+          <a:noFill/>
+          <a:effectLst/>
+        </p:spPr>
+        <p:txBody>
+          <a:bodyPr wrap="none" anchor="ctr" tIns="0" rIns="0" bIns="0" lIns="0" anchorCtr="0" vertOverflow="overflow">
+            <a:noAutofit/>
+          </a:bodyPr>
+          <a:lstStyle/>
+          <a:p>
+            <a:pPr algn="ctr" fontAlgn="base">
+              <a:lnSpc>
+                <a:spcPts val="1603"/>
+              </a:lnSpc>
+              <a:spcBef>
+                <a:spcPts val="0"/>
+              </a:spcBef>
+              <a:spcAft>
+                <a:spcPts val="0"/>
+              </a:spcAft>
+              <a:defRPr sz="1095" b="1" i="0" lang="zh-CN" dirty="0">
+                <a:solidFill>
+                  <a:srgbClr val="7A5410"/>
+                </a:solidFill>
+                <a:latin typeface="DejaVu Sans"/>
+                <a:ea typeface="DejaVu Sans"/>
+                <a:cs typeface="DejaVu Sans"/>
+              </a:defRPr>
+            </a:pPr>
+            <a:r>
+              <a:rPr sz="1095" b="1" i="0" lang="zh-CN" dirty="0">
+                <a:solidFill>
+                  <a:srgbClr val="7A5410"/>
+                </a:solidFill>
+                <a:latin typeface="DejaVu Sans"/>
+                <a:ea typeface="DejaVu Sans"/>
+                <a:cs typeface="DejaVu Sans"/>
+              </a:rPr>
+              <a:t>Zn </a:t>
+            </a:r>
+            <a:r>
+              <a:rPr sz="1095" b="1" i="0" lang="zh-CN" dirty="0">
+                <a:solidFill>
+                  <a:srgbClr val="7A5410"/>
+                </a:solidFill>
+                <a:latin typeface="Noto Sans CJK SC"/>
+                <a:ea typeface="Noto Sans CJK SC"/>
+                <a:cs typeface="Noto Sans CJK SC"/>
+              </a:rPr>
+              <a:t>是否进入并与氧计量耦合？</a:t>
+            </a:r>
+          </a:p>
+        </p:txBody>
+      </p:sp>
+      <p:sp>
+        <p:nvSpPr>
+          <p:cNvPr id="64" name="q2" descr="Editable shape; source id q2"/>
+          <p:cNvSpPr/>
+          <p:nvPr/>
+        </p:nvSpPr>
+        <p:spPr>
+          <a:xfrm>
+            <a:off x="4473369" y="4276108"/>
+            <a:ext cx="3429795" cy="610872"/>
+          </a:xfrm>
+          <a:prstGeom prst="roundRect">
+            <a:avLst>
+              <a:gd name="adj" fmla="val 10416"/>
+            </a:avLst>
+          </a:prstGeom>
+          <a:solidFill>
+            <a:srgbClr val="FFFFFF"/>
+          </a:solidFill>
+          <a:ln w="9544">
+            <a:solidFill>
+              <a:srgbClr val="C48A24"/>
+            </a:solidFill>
+          </a:ln>
+          <a:effectLst/>
+        </p:spPr>
+        <p:style>
+          <a:lnRef idx="1">
+            <a:schemeClr val="accent1"/>
+          </a:lnRef>
+          <a:fillRef idx="3">
+            <a:schemeClr val="accent1"/>
+          </a:fillRef>
+          <a:effectRef idx="0">
+            <a:schemeClr val="accent1"/>
+          </a:effectRef>
+          <a:fontRef idx="minor">
+            <a:schemeClr val="lt1"/>
+          </a:fontRef>
+        </p:style>
+        <p:txBody>
+          <a:bodyPr rtlCol="0" anchor="ctr"/>
+          <a:lstStyle/>
+          <a:p>
+            <a:pPr algn="ctr"/>
+          </a:p>
+        </p:txBody>
+      </p:sp>
+      <p:sp>
+        <p:nvSpPr>
+          <p:cNvPr id="65" name="q2_t" descr="Editable text; source id q2_t"/>
+          <p:cNvSpPr txBox="1"/>
+          <p:nvPr/>
+        </p:nvSpPr>
+        <p:spPr>
+          <a:xfrm>
+            <a:off x="4626087" y="4428826"/>
+            <a:ext cx="3124359" cy="229077"/>
+          </a:xfrm>
+          <a:prstGeom prst="rect">
+            <a:avLst/>
+          </a:prstGeom>
+          <a:noFill/>
+          <a:effectLst/>
+        </p:spPr>
+        <p:txBody>
+          <a:bodyPr wrap="none" anchor="ctr" tIns="0" rIns="0" bIns="0" lIns="0" anchorCtr="0" vertOverflow="overflow">
+            <a:noAutofit/>
+          </a:bodyPr>
+          <a:lstStyle/>
+          <a:p>
+            <a:pPr algn="ctr" fontAlgn="base">
+              <a:lnSpc>
+                <a:spcPts val="1603"/>
+              </a:lnSpc>
+              <a:spcBef>
+                <a:spcPts val="0"/>
+              </a:spcBef>
+              <a:spcAft>
+                <a:spcPts val="0"/>
+              </a:spcAft>
+              <a:defRPr sz="1095" b="1" i="0" lang="zh-CN" dirty="0">
+                <a:solidFill>
+                  <a:srgbClr val="7A5410"/>
+                </a:solidFill>
+                <a:latin typeface="Noto Sans CJK SC"/>
+                <a:ea typeface="Noto Sans CJK SC"/>
+                <a:cs typeface="Noto Sans CJK SC"/>
+              </a:defRPr>
+            </a:pPr>
+            <a:r>
+              <a:rPr sz="1095" b="1" i="0" lang="zh-CN" dirty="0">
+                <a:solidFill>
+                  <a:srgbClr val="7A5410"/>
+                </a:solidFill>
+                <a:latin typeface="Noto Sans CJK SC"/>
+                <a:ea typeface="Noto Sans CJK SC"/>
+                <a:cs typeface="Noto Sans CJK SC"/>
+              </a:rPr>
+              <a:t>稳定相区还是液相选择性？</a:t>
+            </a:r>
+          </a:p>
+        </p:txBody>
+      </p:sp>
+      <p:sp>
+        <p:nvSpPr>
+          <p:cNvPr id="66" name="q3" descr="Editable shape; source id q3"/>
+          <p:cNvSpPr/>
+          <p:nvPr/>
+        </p:nvSpPr>
+        <p:spPr>
+          <a:xfrm>
+            <a:off x="8221327" y="4276108"/>
+            <a:ext cx="3537970" cy="610872"/>
+          </a:xfrm>
+          <a:prstGeom prst="roundRect">
+            <a:avLst>
+              <a:gd name="adj" fmla="val 10416"/>
+            </a:avLst>
+          </a:prstGeom>
+          <a:solidFill>
+            <a:srgbClr val="FFFFFF"/>
+          </a:solidFill>
+          <a:ln w="9544">
+            <a:solidFill>
+              <a:srgbClr val="C48A24"/>
+            </a:solidFill>
+          </a:ln>
+          <a:effectLst/>
+        </p:spPr>
+        <p:style>
+          <a:lnRef idx="1">
+            <a:schemeClr val="accent1"/>
+          </a:lnRef>
+          <a:fillRef idx="3">
+            <a:schemeClr val="accent1"/>
+          </a:fillRef>
+          <a:effectRef idx="0">
+            <a:schemeClr val="accent1"/>
+          </a:effectRef>
+          <a:fontRef idx="minor">
+            <a:schemeClr val="lt1"/>
+          </a:fontRef>
+        </p:style>
+        <p:txBody>
+          <a:bodyPr rtlCol="0" anchor="ctr"/>
+          <a:lstStyle/>
+          <a:p>
+            <a:pPr algn="ctr"/>
+          </a:p>
+        </p:txBody>
+      </p:sp>
+      <p:sp>
+        <p:nvSpPr>
+          <p:cNvPr id="67" name="q3_t" descr="Editable text; source id q3_t"/>
+          <p:cNvSpPr txBox="1"/>
+          <p:nvPr/>
+        </p:nvSpPr>
+        <p:spPr>
+          <a:xfrm>
+            <a:off x="8374045" y="4428826"/>
+            <a:ext cx="3232534" cy="229077"/>
+          </a:xfrm>
+          <a:prstGeom prst="rect">
+            <a:avLst/>
+          </a:prstGeom>
+          <a:noFill/>
+          <a:effectLst/>
+        </p:spPr>
+        <p:txBody>
+          <a:bodyPr wrap="none" anchor="ctr" tIns="0" rIns="0" bIns="0" lIns="0" anchorCtr="0" vertOverflow="overflow">
+            <a:noAutofit/>
+          </a:bodyPr>
+          <a:lstStyle/>
+          <a:p>
+            <a:pPr algn="ctr" fontAlgn="base">
+              <a:lnSpc>
+                <a:spcPts val="1603"/>
+              </a:lnSpc>
+              <a:spcBef>
+                <a:spcPts val="0"/>
+              </a:spcBef>
+              <a:spcAft>
+                <a:spcPts val="0"/>
+              </a:spcAft>
+              <a:defRPr sz="1095" b="1" i="0" lang="zh-CN" dirty="0">
+                <a:solidFill>
+                  <a:srgbClr val="7A5410"/>
+                </a:solidFill>
+                <a:latin typeface="Noto Sans CJK SC"/>
+                <a:ea typeface="Noto Sans CJK SC"/>
+                <a:cs typeface="Noto Sans CJK SC"/>
+              </a:defRPr>
+            </a:pPr>
+            <a:r>
+              <a:rPr sz="1095" b="1" i="0" lang="zh-CN" dirty="0">
+                <a:solidFill>
+                  <a:srgbClr val="7A5410"/>
+                </a:solidFill>
+                <a:latin typeface="Noto Sans CJK SC"/>
+                <a:ea typeface="Noto Sans CJK SC"/>
+                <a:cs typeface="Noto Sans CJK SC"/>
+              </a:rPr>
+              <a:t>实际组成与结构信号如何对应？</a:t>
+            </a:r>
+          </a:p>
+        </p:txBody>
+      </p:sp>
+      <p:sp>
+        <p:nvSpPr>
+          <p:cNvPr id="68" name="e1_0" descr="Editable line; source id e1_0"/>
+          <p:cNvSpPr/>
+          <p:nvPr/>
+        </p:nvSpPr>
+        <p:spPr>
+          <a:xfrm>
+            <a:off x="2042605" y="1816710"/>
+            <a:ext cx="190898" cy="69996"/>
           </a:xfrm>
           <a:custGeom>
             <a:avLst/>
@@ -6524,32 +6839,32 @@
             <a:pathLst>
               <a:path w="30000" h="11000">
                 <a:moveTo>
-                  <a:pt x="0" y="3500"/>
+                  <a:pt x="0" y="4500"/>
                 </a:moveTo>
                 <a:lnTo>
-                  <a:pt x="18000" y="3500"/>
+                  <a:pt x="17000" y="4500"/>
                 </a:lnTo>
                 <a:lnTo>
-                  <a:pt x="18000" y="0"/>
+                  <a:pt x="17000" y="0"/>
                 </a:lnTo>
                 <a:lnTo>
                   <a:pt x="30000" y="5500"/>
                 </a:lnTo>
                 <a:lnTo>
-                  <a:pt x="18000" y="11000"/>
+                  <a:pt x="17000" y="11000"/>
                 </a:lnTo>
                 <a:lnTo>
-                  <a:pt x="18000" y="7500"/>
+                  <a:pt x="17000" y="6500"/>
                 </a:lnTo>
                 <a:lnTo>
-                  <a:pt x="0" y="7500"/>
+                  <a:pt x="0" y="6500"/>
                 </a:lnTo>
                 <a:close/>
               </a:path>
             </a:pathLst>
           </a:custGeom>
           <a:solidFill>
-            <a:srgbClr val="0F7A88"/>
+            <a:srgbClr val="4B5563"/>
           </a:solidFill>
           <a:ln>
             <a:noFill/>
@@ -6580,27 +6895,53 @@
       </p:sp>
       <p:sp>
         <p:nvSpPr>
-          <p:cNvPr id="56" name="l2_k3" descr="Editable shape; source id l2_k3"/>
+          <p:cNvPr id="69" name="e2_0" descr="Editable line; source id e2_0"/>
           <p:cNvSpPr/>
           <p:nvPr/>
         </p:nvSpPr>
         <p:spPr>
           <a:xfrm>
-            <a:off x="7469187" y="5516562"/>
-            <a:ext cx="1992312" cy="484187"/>
-          </a:xfrm>
-          <a:prstGeom prst="roundRect">
-            <a:avLst>
-              <a:gd name="adj" fmla="val 13114"/>
-            </a:avLst>
-          </a:prstGeom>
+            <a:off x="4015215" y="1816710"/>
+            <a:ext cx="152718" cy="69996"/>
+          </a:xfrm>
+          <a:custGeom>
+            <a:avLst/>
+            <a:gdLst/>
+            <a:ahLst/>
+            <a:cxnLst/>
+            <a:rect l="l" t="t" r="r" b="b"/>
+            <a:pathLst>
+              <a:path w="24000" h="11000">
+                <a:moveTo>
+                  <a:pt x="0" y="4500"/>
+                </a:moveTo>
+                <a:lnTo>
+                  <a:pt x="11000" y="4500"/>
+                </a:lnTo>
+                <a:lnTo>
+                  <a:pt x="11000" y="0"/>
+                </a:lnTo>
+                <a:lnTo>
+                  <a:pt x="24000" y="5500"/>
+                </a:lnTo>
+                <a:lnTo>
+                  <a:pt x="11000" y="11000"/>
+                </a:lnTo>
+                <a:lnTo>
+                  <a:pt x="11000" y="6500"/>
+                </a:lnTo>
+                <a:lnTo>
+                  <a:pt x="0" y="6500"/>
+                </a:lnTo>
+                <a:close/>
+              </a:path>
+            </a:pathLst>
+          </a:custGeom>
           <a:solidFill>
-            <a:srgbClr val="FFFFFF"/>
+            <a:srgbClr val="4B5563"/>
           </a:solidFill>
-          <a:ln w="11906">
-            <a:solidFill>
-              <a:srgbClr val="B5BDC4"/>
-            </a:solidFill>
+          <a:ln>
+            <a:noFill/>
           </a:ln>
           <a:effectLst/>
         </p:spPr>
@@ -6626,79 +6967,23 @@
           </a:p>
         </p:txBody>
       </p:sp>
-      <p:sp>
-        <p:nvSpPr>
-          <p:cNvPr id="57" name="l2_k3_t" descr="Editable text; source id l2_k3_t"/>
-          <p:cNvSpPr txBox="1"/>
-          <p:nvPr/>
-        </p:nvSpPr>
-        <p:spPr>
-          <a:xfrm>
-            <a:off x="7516812" y="5540374"/>
-            <a:ext cx="1897062" cy="436562"/>
-          </a:xfrm>
-          <a:prstGeom prst="rect">
-            <a:avLst/>
-          </a:prstGeom>
-          <a:noFill/>
-          <a:effectLst/>
-        </p:spPr>
-        <p:txBody>
-          <a:bodyPr wrap="none" anchor="ctr" tIns="0" rIns="0" bIns="0" lIns="0" anchorCtr="0" vertOverflow="overflow">
-            <a:noAutofit/>
-          </a:bodyPr>
-          <a:lstStyle/>
-          <a:p>
-            <a:pPr algn="ctr" fontAlgn="base">
-              <a:lnSpc>
-                <a:spcPts val="2015"/>
-              </a:lnSpc>
-              <a:spcBef>
-                <a:spcPts val="0"/>
-              </a:spcBef>
-              <a:spcAft>
-                <a:spcPts val="0"/>
-              </a:spcAft>
-              <a:defRPr sz="1374" b="0" i="0" lang="zh-CN" dirty="0">
-                <a:solidFill>
-                  <a:srgbClr val="2F3840"/>
-                </a:solidFill>
-                <a:latin typeface="Noto Sans CJK SC"/>
-                <a:ea typeface="Noto Sans CJK SC"/>
-                <a:cs typeface="Noto Sans CJK SC"/>
-              </a:defRPr>
-            </a:pPr>
-            <a:r>
-              <a:rPr sz="1374" b="0" i="0" lang="zh-CN" dirty="0">
-                <a:solidFill>
-                  <a:srgbClr val="2F3840"/>
-                </a:solidFill>
-                <a:latin typeface="Noto Sans CJK SC"/>
-                <a:ea typeface="Noto Sans CJK SC"/>
-                <a:cs typeface="Noto Sans CJK SC"/>
-              </a:rPr>
-              <a:t>单晶结构与液相选择性</a:t>
-            </a:r>
-          </a:p>
-        </p:txBody>
-      </p:sp>
       <p:cxnSp>
         <p:nvCxnSpPr>
-          <p:cNvPr id="58" name="mg_a" descr="Editable line; source id mg_a"/>
+          <p:cNvPr id="70" name="fk0_0" descr="Editable line; source id fk0_0"/>
           <p:cNvCxnSpPr/>
           <p:nvPr/>
         </p:nvCxnSpPr>
         <p:spPr>
           <a:xfrm>
-            <a:off x="9612312" y="3579812"/>
-            <a:ext cx="198437" cy="0"/>
+            <a:off x="5949644" y="1851707"/>
+            <a:ext cx="318163" cy="0"/>
           </a:xfrm>
           <a:prstGeom prst="line">
             <a:avLst/>
           </a:prstGeom>
-          <a:ln w="39687">
+          <a:ln w="12726">
             <a:solidFill>
-              <a:srgbClr val="0F7A88"/>
+              <a:srgbClr val="4B5563"/>
             </a:solidFill>
           </a:ln>
           <a:effectLst/>
@@ -6720,21 +7005,205 @@
       </p:cxnSp>
       <p:cxnSp>
         <p:nvCxnSpPr>
-          <p:cNvPr id="59" name="mg_b" descr="Editable line; source id mg_b"/>
+          <p:cNvPr id="71" name="fkv_0" descr="Editable line; source id fkv_0"/>
           <p:cNvCxnSpPr/>
           <p:nvPr/>
         </p:nvCxnSpPr>
         <p:spPr>
           <a:xfrm>
-            <a:off x="9612312" y="5580062"/>
-            <a:ext cx="198437" cy="0"/>
+            <a:off x="6267807" y="1285377"/>
+            <a:ext cx="0" cy="1406280"/>
           </a:xfrm>
           <a:prstGeom prst="line">
             <a:avLst/>
           </a:prstGeom>
-          <a:ln w="39687">
+          <a:ln w="12726">
             <a:solidFill>
-              <a:srgbClr val="0F7A88"/>
+              <a:srgbClr val="4B5563"/>
+            </a:solidFill>
+          </a:ln>
+          <a:effectLst/>
+        </p:spPr>
+        <p:style>
+          <a:lnRef idx="2">
+            <a:schemeClr val="accent1"/>
+          </a:lnRef>
+          <a:fillRef idx="0">
+            <a:schemeClr val="accent1"/>
+          </a:fillRef>
+          <a:effectRef idx="0">
+            <a:schemeClr val="accent1"/>
+          </a:effectRef>
+          <a:fontRef idx="minor">
+            <a:schemeClr val="tx1"/>
+          </a:fontRef>
+        </p:style>
+      </p:cxnSp>
+      <p:sp>
+        <p:nvSpPr>
+          <p:cNvPr id="72" name="fk1_0" descr="Editable line; source id fk1_0"/>
+          <p:cNvSpPr/>
+          <p:nvPr/>
+        </p:nvSpPr>
+        <p:spPr>
+          <a:xfrm>
+            <a:off x="6267808" y="1250380"/>
+            <a:ext cx="324526" cy="69996"/>
+          </a:xfrm>
+          <a:custGeom>
+            <a:avLst/>
+            <a:gdLst/>
+            <a:ahLst/>
+            <a:cxnLst/>
+            <a:rect l="l" t="t" r="r" b="b"/>
+            <a:pathLst>
+              <a:path w="51000" h="11000">
+                <a:moveTo>
+                  <a:pt x="0" y="4500"/>
+                </a:moveTo>
+                <a:lnTo>
+                  <a:pt x="38000" y="4500"/>
+                </a:lnTo>
+                <a:lnTo>
+                  <a:pt x="38000" y="0"/>
+                </a:lnTo>
+                <a:lnTo>
+                  <a:pt x="51000" y="5500"/>
+                </a:lnTo>
+                <a:lnTo>
+                  <a:pt x="38000" y="11000"/>
+                </a:lnTo>
+                <a:lnTo>
+                  <a:pt x="38000" y="6500"/>
+                </a:lnTo>
+                <a:lnTo>
+                  <a:pt x="0" y="6500"/>
+                </a:lnTo>
+                <a:close/>
+              </a:path>
+            </a:pathLst>
+          </a:custGeom>
+          <a:solidFill>
+            <a:srgbClr val="4B5563"/>
+          </a:solidFill>
+          <a:ln>
+            <a:noFill/>
+          </a:ln>
+          <a:effectLst/>
+        </p:spPr>
+        <p:style>
+          <a:lnRef idx="1">
+            <a:schemeClr val="accent1"/>
+          </a:lnRef>
+          <a:fillRef idx="3">
+            <a:schemeClr val="accent1"/>
+          </a:fillRef>
+          <a:effectRef idx="0">
+            <a:schemeClr val="accent1"/>
+          </a:effectRef>
+          <a:fontRef idx="minor">
+            <a:schemeClr val="lt1"/>
+          </a:fontRef>
+        </p:style>
+        <p:txBody>
+          <a:bodyPr rtlCol="0" anchor="ctr"/>
+          <a:lstStyle/>
+          <a:p>
+            <a:pPr algn="ctr"/>
+          </a:p>
+        </p:txBody>
+      </p:sp>
+      <p:sp>
+        <p:nvSpPr>
+          <p:cNvPr id="73" name="fk2_0" descr="Editable line; source id fk2_0"/>
+          <p:cNvSpPr/>
+          <p:nvPr/>
+        </p:nvSpPr>
+        <p:spPr>
+          <a:xfrm>
+            <a:off x="6267808" y="2656660"/>
+            <a:ext cx="324526" cy="69996"/>
+          </a:xfrm>
+          <a:custGeom>
+            <a:avLst/>
+            <a:gdLst/>
+            <a:ahLst/>
+            <a:cxnLst/>
+            <a:rect l="l" t="t" r="r" b="b"/>
+            <a:pathLst>
+              <a:path w="51000" h="11000">
+                <a:moveTo>
+                  <a:pt x="0" y="4500"/>
+                </a:moveTo>
+                <a:lnTo>
+                  <a:pt x="38000" y="4500"/>
+                </a:lnTo>
+                <a:lnTo>
+                  <a:pt x="38000" y="0"/>
+                </a:lnTo>
+                <a:lnTo>
+                  <a:pt x="51000" y="5500"/>
+                </a:lnTo>
+                <a:lnTo>
+                  <a:pt x="38000" y="11000"/>
+                </a:lnTo>
+                <a:lnTo>
+                  <a:pt x="38000" y="6500"/>
+                </a:lnTo>
+                <a:lnTo>
+                  <a:pt x="0" y="6500"/>
+                </a:lnTo>
+                <a:close/>
+              </a:path>
+            </a:pathLst>
+          </a:custGeom>
+          <a:solidFill>
+            <a:srgbClr val="4B5563"/>
+          </a:solidFill>
+          <a:ln>
+            <a:noFill/>
+          </a:ln>
+          <a:effectLst/>
+        </p:spPr>
+        <p:style>
+          <a:lnRef idx="1">
+            <a:schemeClr val="accent1"/>
+          </a:lnRef>
+          <a:fillRef idx="3">
+            <a:schemeClr val="accent1"/>
+          </a:fillRef>
+          <a:effectRef idx="0">
+            <a:schemeClr val="accent1"/>
+          </a:effectRef>
+          <a:fontRef idx="minor">
+            <a:schemeClr val="lt1"/>
+          </a:fontRef>
+        </p:style>
+        <p:txBody>
+          <a:bodyPr rtlCol="0" anchor="ctr"/>
+          <a:lstStyle/>
+          <a:p>
+            <a:pPr algn="ctr"/>
+          </a:p>
+        </p:txBody>
+      </p:sp>
+      <p:cxnSp>
+        <p:nvCxnSpPr>
+          <p:cNvPr id="74" name="mg1_0" descr="Editable line; source id mg1_0"/>
+          <p:cNvCxnSpPr/>
+          <p:nvPr/>
+        </p:nvCxnSpPr>
+        <p:spPr>
+          <a:xfrm>
+            <a:off x="8940375" y="1285377"/>
+            <a:ext cx="318163" cy="0"/>
+          </a:xfrm>
+          <a:prstGeom prst="line">
+            <a:avLst/>
+          </a:prstGeom>
+          <a:ln w="12726">
+            <a:solidFill>
+              <a:srgbClr val="4B5563"/>
             </a:solidFill>
           </a:ln>
           <a:effectLst/>
@@ -6756,655 +7225,22 @@
       </p:cxnSp>
       <p:cxnSp>
         <p:nvCxnSpPr>
-          <p:cNvPr id="60" name="mg_v" descr="Editable line; source id mg_v"/>
+          <p:cNvPr id="75" name="mg2_0" descr="Editable line; source id mg2_0"/>
           <p:cNvCxnSpPr/>
           <p:nvPr/>
         </p:nvCxnSpPr>
         <p:spPr>
           <a:xfrm>
-            <a:off x="9810749" y="3579812"/>
-            <a:ext cx="0" cy="2000250"/>
+            <a:off x="8940375" y="2691657"/>
+            <a:ext cx="318163" cy="0"/>
           </a:xfrm>
           <a:prstGeom prst="line">
             <a:avLst/>
           </a:prstGeom>
-          <a:ln w="39687">
+          <a:ln w="12726">
             <a:solidFill>
-              <a:srgbClr val="0F7A88"/>
+              <a:srgbClr val="4B5563"/>
             </a:solidFill>
-          </a:ln>
-          <a:effectLst/>
-        </p:spPr>
-        <p:style>
-          <a:lnRef idx="2">
-            <a:schemeClr val="accent1"/>
-          </a:lnRef>
-          <a:fillRef idx="0">
-            <a:schemeClr val="accent1"/>
-          </a:fillRef>
-          <a:effectRef idx="0">
-            <a:schemeClr val="accent1"/>
-          </a:effectRef>
-          <a:fontRef idx="minor">
-            <a:schemeClr val="tx1"/>
-          </a:fontRef>
-        </p:style>
-      </p:cxnSp>
-      <p:sp>
-        <p:nvSpPr>
-          <p:cNvPr id="61" name="mg_out" descr="Editable line; source id mg_out"/>
-          <p:cNvSpPr/>
-          <p:nvPr/>
-        </p:nvSpPr>
-        <p:spPr>
-          <a:xfrm>
-            <a:off x="9810750" y="4516437"/>
-            <a:ext cx="198437" cy="127000"/>
-          </a:xfrm>
-          <a:custGeom>
-            <a:avLst/>
-            <a:gdLst/>
-            <a:ahLst/>
-            <a:cxnLst/>
-            <a:rect l="l" t="t" r="r" b="b"/>
-            <a:pathLst>
-              <a:path w="25000" h="16000">
-                <a:moveTo>
-                  <a:pt x="0" y="5500"/>
-                </a:moveTo>
-                <a:lnTo>
-                  <a:pt x="9000" y="5500"/>
-                </a:lnTo>
-                <a:lnTo>
-                  <a:pt x="9000" y="0"/>
-                </a:lnTo>
-                <a:lnTo>
-                  <a:pt x="25000" y="8000"/>
-                </a:lnTo>
-                <a:lnTo>
-                  <a:pt x="9000" y="16000"/>
-                </a:lnTo>
-                <a:lnTo>
-                  <a:pt x="9000" y="10500"/>
-                </a:lnTo>
-                <a:lnTo>
-                  <a:pt x="0" y="10500"/>
-                </a:lnTo>
-                <a:close/>
-              </a:path>
-            </a:pathLst>
-          </a:custGeom>
-          <a:solidFill>
-            <a:srgbClr val="0F7A88"/>
-          </a:solidFill>
-          <a:ln>
-            <a:noFill/>
-          </a:ln>
-          <a:effectLst/>
-        </p:spPr>
-        <p:style>
-          <a:lnRef idx="1">
-            <a:schemeClr val="accent1"/>
-          </a:lnRef>
-          <a:fillRef idx="3">
-            <a:schemeClr val="accent1"/>
-          </a:fillRef>
-          <a:effectRef idx="0">
-            <a:schemeClr val="accent1"/>
-          </a:effectRef>
-          <a:fontRef idx="minor">
-            <a:schemeClr val="lt1"/>
-          </a:fontRef>
-        </p:style>
-        <p:txBody>
-          <a:bodyPr rtlCol="0" anchor="ctr"/>
-          <a:lstStyle/>
-          <a:p>
-            <a:pPr algn="ctr"/>
-          </a:p>
-        </p:txBody>
-      </p:sp>
-      <p:sp>
-        <p:nvSpPr>
-          <p:cNvPr id="62" name="c5" descr="Editable shape; source id c5"/>
-          <p:cNvSpPr/>
-          <p:nvPr/>
-        </p:nvSpPr>
-        <p:spPr>
-          <a:xfrm>
-            <a:off x="10025062" y="2865437"/>
-            <a:ext cx="1944687" cy="2936874"/>
-          </a:xfrm>
-          <a:prstGeom prst="roundRect">
-            <a:avLst>
-              <a:gd name="adj" fmla="val 5714"/>
-            </a:avLst>
-          </a:prstGeom>
-          <a:solidFill>
-            <a:srgbClr val="F2F5F7"/>
-          </a:solidFill>
-          <a:ln w="23812">
-            <a:solidFill>
-              <a:srgbClr val="3B4952"/>
-            </a:solidFill>
-          </a:ln>
-          <a:effectLst/>
-        </p:spPr>
-        <p:style>
-          <a:lnRef idx="1">
-            <a:schemeClr val="accent1"/>
-          </a:lnRef>
-          <a:fillRef idx="3">
-            <a:schemeClr val="accent1"/>
-          </a:fillRef>
-          <a:effectRef idx="0">
-            <a:schemeClr val="accent1"/>
-          </a:effectRef>
-          <a:fontRef idx="minor">
-            <a:schemeClr val="lt1"/>
-          </a:fontRef>
-        </p:style>
-        <p:txBody>
-          <a:bodyPr rtlCol="0" anchor="ctr"/>
-          <a:lstStyle/>
-          <a:p>
-            <a:pPr algn="ctr"/>
-          </a:p>
-        </p:txBody>
-      </p:sp>
-      <p:sp>
-        <p:nvSpPr>
-          <p:cNvPr id="63" name="c5_t" descr="Editable text; source id c5_t"/>
-          <p:cNvSpPr txBox="1"/>
-          <p:nvPr/>
-        </p:nvSpPr>
-        <p:spPr>
-          <a:xfrm>
-            <a:off x="10120312" y="2976562"/>
-            <a:ext cx="1754187" cy="349249"/>
-          </a:xfrm>
-          <a:prstGeom prst="rect">
-            <a:avLst/>
-          </a:prstGeom>
-          <a:noFill/>
-          <a:effectLst/>
-        </p:spPr>
-        <p:txBody>
-          <a:bodyPr wrap="none" anchor="ctr" tIns="0" rIns="0" bIns="0" lIns="0" anchorCtr="0" vertOverflow="overflow">
-            <a:noAutofit/>
-          </a:bodyPr>
-          <a:lstStyle/>
-          <a:p>
-            <a:pPr algn="ctr" fontAlgn="base">
-              <a:lnSpc>
-                <a:spcPts val="2546"/>
-              </a:lnSpc>
-              <a:spcBef>
-                <a:spcPts val="0"/>
-              </a:spcBef>
-              <a:spcAft>
-                <a:spcPts val="0"/>
-              </a:spcAft>
-              <a:defRPr sz="1749" b="1" i="0" lang="zh-CN" dirty="0">
-                <a:solidFill>
-                  <a:srgbClr val="19232C"/>
-                </a:solidFill>
-                <a:latin typeface="Noto Sans CJK SC"/>
-                <a:ea typeface="Noto Sans CJK SC"/>
-                <a:cs typeface="Noto Sans CJK SC"/>
-              </a:defRPr>
-            </a:pPr>
-            <a:r>
-              <a:rPr sz="1749" b="1" i="0" lang="zh-CN" dirty="0">
-                <a:solidFill>
-                  <a:srgbClr val="19232C"/>
-                </a:solidFill>
-                <a:latin typeface="Noto Sans CJK SC"/>
-                <a:ea typeface="Noto Sans CJK SC"/>
-                <a:cs typeface="Noto Sans CJK SC"/>
-              </a:rPr>
-              <a:t>结果反馈</a:t>
-            </a:r>
-          </a:p>
-        </p:txBody>
-      </p:sp>
-      <p:sp>
-        <p:nvSpPr>
-          <p:cNvPr id="64" name="c5_k0" descr="Editable shape; source id c5_k0"/>
-          <p:cNvSpPr/>
-          <p:nvPr/>
-        </p:nvSpPr>
-        <p:spPr>
-          <a:xfrm>
-            <a:off x="10152062" y="3444874"/>
-            <a:ext cx="1698624" cy="476249"/>
-          </a:xfrm>
-          <a:prstGeom prst="roundRect">
-            <a:avLst>
-              <a:gd name="adj" fmla="val 13333"/>
-            </a:avLst>
-          </a:prstGeom>
-          <a:solidFill>
-            <a:srgbClr val="FFFFFF"/>
-          </a:solidFill>
-          <a:ln w="11906">
-            <a:solidFill>
-              <a:srgbClr val="B5BDC4"/>
-            </a:solidFill>
-          </a:ln>
-          <a:effectLst/>
-        </p:spPr>
-        <p:style>
-          <a:lnRef idx="1">
-            <a:schemeClr val="accent1"/>
-          </a:lnRef>
-          <a:fillRef idx="3">
-            <a:schemeClr val="accent1"/>
-          </a:fillRef>
-          <a:effectRef idx="0">
-            <a:schemeClr val="accent1"/>
-          </a:effectRef>
-          <a:fontRef idx="minor">
-            <a:schemeClr val="lt1"/>
-          </a:fontRef>
-        </p:style>
-        <p:txBody>
-          <a:bodyPr rtlCol="0" anchor="ctr"/>
-          <a:lstStyle/>
-          <a:p>
-            <a:pPr algn="ctr"/>
-          </a:p>
-        </p:txBody>
-      </p:sp>
-      <p:sp>
-        <p:nvSpPr>
-          <p:cNvPr id="65" name="c5_k0_t" descr="Editable text; source id c5_k0_t"/>
-          <p:cNvSpPr txBox="1"/>
-          <p:nvPr/>
-        </p:nvSpPr>
-        <p:spPr>
-          <a:xfrm>
-            <a:off x="10199687" y="3468687"/>
-            <a:ext cx="1603374" cy="428624"/>
-          </a:xfrm>
-          <a:prstGeom prst="rect">
-            <a:avLst/>
-          </a:prstGeom>
-          <a:noFill/>
-          <a:effectLst/>
-        </p:spPr>
-        <p:txBody>
-          <a:bodyPr wrap="none" anchor="ctr" tIns="0" rIns="0" bIns="0" lIns="0" anchorCtr="0" vertOverflow="overflow">
-            <a:noAutofit/>
-          </a:bodyPr>
-          <a:lstStyle/>
-          <a:p>
-            <a:pPr algn="ctr" fontAlgn="base">
-              <a:lnSpc>
-                <a:spcPts val="1687"/>
-              </a:lnSpc>
-              <a:spcBef>
-                <a:spcPts val="0"/>
-              </a:spcBef>
-              <a:spcAft>
-                <a:spcPts val="0"/>
-              </a:spcAft>
-              <a:defRPr sz="1437" b="0" i="0" lang="zh-CN" dirty="0">
-                <a:solidFill>
-                  <a:srgbClr val="2F3840"/>
-                </a:solidFill>
-                <a:latin typeface="DejaVu Sans"/>
-                <a:ea typeface="DejaVu Sans"/>
-                <a:cs typeface="DejaVu Sans"/>
-              </a:defRPr>
-            </a:pPr>
-            <a:r>
-              <a:rPr sz="1437" b="0" i="0" lang="zh-CN" dirty="0">
-                <a:solidFill>
-                  <a:srgbClr val="2F3840"/>
-                </a:solidFill>
-                <a:latin typeface="DejaVu Sans"/>
-                <a:ea typeface="DejaVu Sans"/>
-                <a:cs typeface="DejaVu Sans"/>
-              </a:rPr>
-              <a:t>PXRD / Rietveld</a:t>
-            </a:r>
-          </a:p>
-        </p:txBody>
-      </p:sp>
-      <p:sp>
-        <p:nvSpPr>
-          <p:cNvPr id="66" name="c5_k1" descr="Editable shape; source id c5_k1"/>
-          <p:cNvSpPr/>
-          <p:nvPr/>
-        </p:nvSpPr>
-        <p:spPr>
-          <a:xfrm>
-            <a:off x="10152062" y="4016374"/>
-            <a:ext cx="1698624" cy="476249"/>
-          </a:xfrm>
-          <a:prstGeom prst="roundRect">
-            <a:avLst>
-              <a:gd name="adj" fmla="val 13333"/>
-            </a:avLst>
-          </a:prstGeom>
-          <a:solidFill>
-            <a:srgbClr val="FFFFFF"/>
-          </a:solidFill>
-          <a:ln w="11906">
-            <a:solidFill>
-              <a:srgbClr val="B5BDC4"/>
-            </a:solidFill>
-          </a:ln>
-          <a:effectLst/>
-        </p:spPr>
-        <p:style>
-          <a:lnRef idx="1">
-            <a:schemeClr val="accent1"/>
-          </a:lnRef>
-          <a:fillRef idx="3">
-            <a:schemeClr val="accent1"/>
-          </a:fillRef>
-          <a:effectRef idx="0">
-            <a:schemeClr val="accent1"/>
-          </a:effectRef>
-          <a:fontRef idx="minor">
-            <a:schemeClr val="lt1"/>
-          </a:fontRef>
-        </p:style>
-        <p:txBody>
-          <a:bodyPr rtlCol="0" anchor="ctr"/>
-          <a:lstStyle/>
-          <a:p>
-            <a:pPr algn="ctr"/>
-          </a:p>
-        </p:txBody>
-      </p:sp>
-      <p:sp>
-        <p:nvSpPr>
-          <p:cNvPr id="67" name="c5_k1_t" descr="Editable text; source id c5_k1_t"/>
-          <p:cNvSpPr txBox="1"/>
-          <p:nvPr/>
-        </p:nvSpPr>
-        <p:spPr>
-          <a:xfrm>
-            <a:off x="10199687" y="4032249"/>
-            <a:ext cx="1603374" cy="428624"/>
-          </a:xfrm>
-          <a:prstGeom prst="rect">
-            <a:avLst/>
-          </a:prstGeom>
-          <a:noFill/>
-          <a:effectLst/>
-        </p:spPr>
-        <p:txBody>
-          <a:bodyPr wrap="none" anchor="ctr" tIns="0" rIns="0" bIns="0" lIns="0" anchorCtr="0" vertOverflow="overflow">
-            <a:noAutofit/>
-          </a:bodyPr>
-          <a:lstStyle/>
-          <a:p>
-            <a:pPr algn="ctr" fontAlgn="base">
-              <a:lnSpc>
-                <a:spcPts val="1687"/>
-              </a:lnSpc>
-              <a:spcBef>
-                <a:spcPts val="0"/>
-              </a:spcBef>
-              <a:spcAft>
-                <a:spcPts val="0"/>
-              </a:spcAft>
-              <a:defRPr sz="1437" b="0" i="0" lang="zh-CN" dirty="0">
-                <a:solidFill>
-                  <a:srgbClr val="2F3840"/>
-                </a:solidFill>
-                <a:latin typeface="DejaVu Sans"/>
-                <a:ea typeface="DejaVu Sans"/>
-                <a:cs typeface="DejaVu Sans"/>
-              </a:defRPr>
-            </a:pPr>
-            <a:r>
-              <a:rPr sz="1437" b="0" i="0" lang="zh-CN" dirty="0">
-                <a:solidFill>
-                  <a:srgbClr val="2F3840"/>
-                </a:solidFill>
-                <a:latin typeface="DejaVu Sans"/>
-                <a:ea typeface="DejaVu Sans"/>
-                <a:cs typeface="DejaVu Sans"/>
-              </a:rPr>
-              <a:t>SCXRD</a:t>
-            </a:r>
-          </a:p>
-        </p:txBody>
-      </p:sp>
-      <p:sp>
-        <p:nvSpPr>
-          <p:cNvPr id="68" name="c5_k2" descr="Editable shape; source id c5_k2"/>
-          <p:cNvSpPr/>
-          <p:nvPr/>
-        </p:nvSpPr>
-        <p:spPr>
-          <a:xfrm>
-            <a:off x="10152062" y="4579937"/>
-            <a:ext cx="1698624" cy="476249"/>
-          </a:xfrm>
-          <a:prstGeom prst="roundRect">
-            <a:avLst>
-              <a:gd name="adj" fmla="val 13333"/>
-            </a:avLst>
-          </a:prstGeom>
-          <a:solidFill>
-            <a:srgbClr val="FFFFFF"/>
-          </a:solidFill>
-          <a:ln w="11906">
-            <a:solidFill>
-              <a:srgbClr val="B5BDC4"/>
-            </a:solidFill>
-          </a:ln>
-          <a:effectLst/>
-        </p:spPr>
-        <p:style>
-          <a:lnRef idx="1">
-            <a:schemeClr val="accent1"/>
-          </a:lnRef>
-          <a:fillRef idx="3">
-            <a:schemeClr val="accent1"/>
-          </a:fillRef>
-          <a:effectRef idx="0">
-            <a:schemeClr val="accent1"/>
-          </a:effectRef>
-          <a:fontRef idx="minor">
-            <a:schemeClr val="lt1"/>
-          </a:fontRef>
-        </p:style>
-        <p:txBody>
-          <a:bodyPr rtlCol="0" anchor="ctr"/>
-          <a:lstStyle/>
-          <a:p>
-            <a:pPr algn="ctr"/>
-          </a:p>
-        </p:txBody>
-      </p:sp>
-      <p:sp>
-        <p:nvSpPr>
-          <p:cNvPr id="69" name="c5_k2_t" descr="Editable text; source id c5_k2_t"/>
-          <p:cNvSpPr txBox="1"/>
-          <p:nvPr/>
-        </p:nvSpPr>
-        <p:spPr>
-          <a:xfrm>
-            <a:off x="10199687" y="4603749"/>
-            <a:ext cx="1603374" cy="428624"/>
-          </a:xfrm>
-          <a:prstGeom prst="rect">
-            <a:avLst/>
-          </a:prstGeom>
-          <a:noFill/>
-          <a:effectLst/>
-        </p:spPr>
-        <p:txBody>
-          <a:bodyPr wrap="none" anchor="ctr" tIns="0" rIns="0" bIns="0" lIns="0" anchorCtr="0" vertOverflow="overflow">
-            <a:noAutofit/>
-          </a:bodyPr>
-          <a:lstStyle/>
-          <a:p>
-            <a:pPr algn="ctr" fontAlgn="base">
-              <a:lnSpc>
-                <a:spcPts val="1687"/>
-              </a:lnSpc>
-              <a:spcBef>
-                <a:spcPts val="0"/>
-              </a:spcBef>
-              <a:spcAft>
-                <a:spcPts val="0"/>
-              </a:spcAft>
-              <a:defRPr sz="1437" b="0" i="0" lang="zh-CN" dirty="0">
-                <a:solidFill>
-                  <a:srgbClr val="2F3840"/>
-                </a:solidFill>
-                <a:latin typeface="DejaVu Sans"/>
-                <a:ea typeface="DejaVu Sans"/>
-                <a:cs typeface="DejaVu Sans"/>
-              </a:defRPr>
-            </a:pPr>
-            <a:r>
-              <a:rPr sz="1437" b="0" i="0" lang="zh-CN" dirty="0">
-                <a:solidFill>
-                  <a:srgbClr val="2F3840"/>
-                </a:solidFill>
-                <a:latin typeface="DejaVu Sans"/>
-                <a:ea typeface="DejaVu Sans"/>
-                <a:cs typeface="DejaVu Sans"/>
-              </a:rPr>
-              <a:t>EDS / EPMA / ICP</a:t>
-            </a:r>
-          </a:p>
-        </p:txBody>
-      </p:sp>
-      <p:sp>
-        <p:nvSpPr>
-          <p:cNvPr id="70" name="c5_k3" descr="Editable shape; source id c5_k3"/>
-          <p:cNvSpPr/>
-          <p:nvPr/>
-        </p:nvSpPr>
-        <p:spPr>
-          <a:xfrm>
-            <a:off x="10152062" y="5143499"/>
-            <a:ext cx="1698624" cy="476249"/>
-          </a:xfrm>
-          <a:prstGeom prst="roundRect">
-            <a:avLst>
-              <a:gd name="adj" fmla="val 13333"/>
-            </a:avLst>
-          </a:prstGeom>
-          <a:solidFill>
-            <a:srgbClr val="FFFFFF"/>
-          </a:solidFill>
-          <a:ln w="11906">
-            <a:solidFill>
-              <a:srgbClr val="B5BDC4"/>
-            </a:solidFill>
-          </a:ln>
-          <a:effectLst/>
-        </p:spPr>
-        <p:style>
-          <a:lnRef idx="1">
-            <a:schemeClr val="accent1"/>
-          </a:lnRef>
-          <a:fillRef idx="3">
-            <a:schemeClr val="accent1"/>
-          </a:fillRef>
-          <a:effectRef idx="0">
-            <a:schemeClr val="accent1"/>
-          </a:effectRef>
-          <a:fontRef idx="minor">
-            <a:schemeClr val="lt1"/>
-          </a:fontRef>
-        </p:style>
-        <p:txBody>
-          <a:bodyPr rtlCol="0" anchor="ctr"/>
-          <a:lstStyle/>
-          <a:p>
-            <a:pPr algn="ctr"/>
-          </a:p>
-        </p:txBody>
-      </p:sp>
-      <p:sp>
-        <p:nvSpPr>
-          <p:cNvPr id="71" name="c5_k3_t" descr="Editable text; source id c5_k3_t"/>
-          <p:cNvSpPr txBox="1"/>
-          <p:nvPr/>
-        </p:nvSpPr>
-        <p:spPr>
-          <a:xfrm>
-            <a:off x="10199687" y="5175249"/>
-            <a:ext cx="1603374" cy="428624"/>
-          </a:xfrm>
-          <a:prstGeom prst="rect">
-            <a:avLst/>
-          </a:prstGeom>
-          <a:noFill/>
-          <a:effectLst/>
-        </p:spPr>
-        <p:txBody>
-          <a:bodyPr wrap="none" anchor="ctr" tIns="0" rIns="0" bIns="0" lIns="0" anchorCtr="0" vertOverflow="overflow">
-            <a:noAutofit/>
-          </a:bodyPr>
-          <a:lstStyle/>
-          <a:p>
-            <a:pPr algn="ctr" fontAlgn="base">
-              <a:lnSpc>
-                <a:spcPts val="2093"/>
-              </a:lnSpc>
-              <a:spcBef>
-                <a:spcPts val="0"/>
-              </a:spcBef>
-              <a:spcAft>
-                <a:spcPts val="0"/>
-              </a:spcAft>
-              <a:defRPr sz="1437" b="0" i="0" lang="zh-CN" dirty="0">
-                <a:solidFill>
-                  <a:srgbClr val="2F3840"/>
-                </a:solidFill>
-                <a:latin typeface="Noto Sans CJK SC"/>
-                <a:ea typeface="Noto Sans CJK SC"/>
-                <a:cs typeface="Noto Sans CJK SC"/>
-              </a:defRPr>
-            </a:pPr>
-            <a:r>
-              <a:rPr sz="1437" b="0" i="0" lang="zh-CN" dirty="0">
-                <a:solidFill>
-                  <a:srgbClr val="2F3840"/>
-                </a:solidFill>
-                <a:latin typeface="Noto Sans CJK SC"/>
-                <a:ea typeface="Noto Sans CJK SC"/>
-                <a:cs typeface="Noto Sans CJK SC"/>
-              </a:rPr>
-              <a:t>高温相与冷却产物</a:t>
-            </a:r>
-          </a:p>
-        </p:txBody>
-      </p:sp>
-      <p:cxnSp>
-        <p:nvCxnSpPr>
-          <p:cNvPr id="72" name="fb1" descr="Editable line; source id fb1"/>
-          <p:cNvCxnSpPr/>
-          <p:nvPr/>
-        </p:nvCxnSpPr>
-        <p:spPr>
-          <a:xfrm>
-            <a:off x="11001374" y="5818187"/>
-            <a:ext cx="0" cy="1801812"/>
-          </a:xfrm>
-          <a:prstGeom prst="line">
-            <a:avLst/>
-          </a:prstGeom>
-          <a:ln w="31749">
-            <a:solidFill>
-              <a:srgbClr val="0F7A88"/>
-            </a:solidFill>
-            <a:custDash>
-              <a:ds d="400000" sp="250000"/>
-            </a:custDash>
           </a:ln>
           <a:effectLst/>
         </p:spPr>
@@ -7425,25 +7261,22 @@
       </p:cxnSp>
       <p:cxnSp>
         <p:nvCxnSpPr>
-          <p:cNvPr id="73" name="fb2" descr="Editable line; source id fb2"/>
+          <p:cNvPr id="76" name="mgv_0" descr="Editable line; source id mgv_0"/>
           <p:cNvCxnSpPr/>
           <p:nvPr/>
         </p:nvCxnSpPr>
         <p:spPr>
-          <a:xfrm flipH="1">
-            <a:off x="6349999" y="7619999"/>
-            <a:ext cx="4651375" cy="0"/>
+          <a:xfrm>
+            <a:off x="9258538" y="1285377"/>
+            <a:ext cx="0" cy="1406280"/>
           </a:xfrm>
           <a:prstGeom prst="line">
             <a:avLst/>
           </a:prstGeom>
-          <a:ln w="31749">
+          <a:ln w="12726">
             <a:solidFill>
-              <a:srgbClr val="0F7A88"/>
+              <a:srgbClr val="4B5563"/>
             </a:solidFill>
-            <a:custDash>
-              <a:ds d="400000" sp="250000"/>
-            </a:custDash>
           </a:ln>
           <a:effectLst/>
         </p:spPr>
@@ -7464,27 +7297,53 @@
       </p:cxnSp>
       <p:sp>
         <p:nvSpPr>
-          <p:cNvPr id="74" name="fb_p" descr="Editable shape; source id fb_p"/>
+          <p:cNvPr id="77" name="mg3_0" descr="Editable line; source id mg3_0"/>
           <p:cNvSpPr/>
           <p:nvPr/>
         </p:nvSpPr>
         <p:spPr>
           <a:xfrm>
-            <a:off x="4937124" y="7429499"/>
-            <a:ext cx="1396999" cy="380999"/>
-          </a:xfrm>
-          <a:prstGeom prst="roundRect">
-            <a:avLst>
-              <a:gd name="adj" fmla="val 50000"/>
-            </a:avLst>
-          </a:prstGeom>
+            <a:off x="9258538" y="1956701"/>
+            <a:ext cx="330889" cy="69996"/>
+          </a:xfrm>
+          <a:custGeom>
+            <a:avLst/>
+            <a:gdLst/>
+            <a:ahLst/>
+            <a:cxnLst/>
+            <a:rect l="l" t="t" r="r" b="b"/>
+            <a:pathLst>
+              <a:path w="52000" h="11000">
+                <a:moveTo>
+                  <a:pt x="0" y="4500"/>
+                </a:moveTo>
+                <a:lnTo>
+                  <a:pt x="39000" y="4500"/>
+                </a:lnTo>
+                <a:lnTo>
+                  <a:pt x="39000" y="0"/>
+                </a:lnTo>
+                <a:lnTo>
+                  <a:pt x="52000" y="5500"/>
+                </a:lnTo>
+                <a:lnTo>
+                  <a:pt x="39000" y="11000"/>
+                </a:lnTo>
+                <a:lnTo>
+                  <a:pt x="39000" y="6500"/>
+                </a:lnTo>
+                <a:lnTo>
+                  <a:pt x="0" y="6500"/>
+                </a:lnTo>
+                <a:close/>
+              </a:path>
+            </a:pathLst>
+          </a:custGeom>
           <a:solidFill>
-            <a:srgbClr val="E1EFF1"/>
+            <a:srgbClr val="4B5563"/>
           </a:solidFill>
-          <a:ln w="19843">
-            <a:solidFill>
-              <a:srgbClr val="0F7A88"/>
-            </a:solidFill>
+          <a:ln>
+            <a:noFill/>
           </a:ln>
           <a:effectLst/>
         </p:spPr>
@@ -7512,14 +7371,62 @@
       </p:sp>
       <p:sp>
         <p:nvSpPr>
-          <p:cNvPr id="75" name="fb_pt" descr="Editable text; source id fb_pt"/>
+          <p:cNvPr id="78" name="fb_p" descr="Editable shape; source id fb_p"/>
+          <p:cNvSpPr/>
+          <p:nvPr/>
+        </p:nvSpPr>
+        <p:spPr>
+          <a:xfrm>
+            <a:off x="5968734" y="3582513"/>
+            <a:ext cx="1145386" cy="279983"/>
+          </a:xfrm>
+          <a:prstGeom prst="roundRect">
+            <a:avLst>
+              <a:gd name="adj" fmla="val 50000"/>
+            </a:avLst>
+          </a:prstGeom>
+          <a:solidFill>
+            <a:srgbClr val="FFFFFF"/>
+          </a:solidFill>
+          <a:ln w="7635">
+            <a:solidFill>
+              <a:srgbClr val="C6CCD1"/>
+            </a:solidFill>
+          </a:ln>
+          <a:effectLst/>
+        </p:spPr>
+        <p:style>
+          <a:lnRef idx="1">
+            <a:schemeClr val="accent1"/>
+          </a:lnRef>
+          <a:fillRef idx="3">
+            <a:schemeClr val="accent1"/>
+          </a:fillRef>
+          <a:effectRef idx="0">
+            <a:schemeClr val="accent1"/>
+          </a:effectRef>
+          <a:fontRef idx="minor">
+            <a:schemeClr val="lt1"/>
+          </a:fontRef>
+        </p:style>
+        <p:txBody>
+          <a:bodyPr rtlCol="0" anchor="ctr"/>
+          <a:lstStyle/>
+          <a:p>
+            <a:pPr algn="ctr"/>
+          </a:p>
+        </p:txBody>
+      </p:sp>
+      <p:sp>
+        <p:nvSpPr>
+          <p:cNvPr id="79" name="fb_p_t" descr="Editable text; source id fb_p_t"/>
           <p:cNvSpPr txBox="1"/>
           <p:nvPr/>
         </p:nvSpPr>
         <p:spPr>
           <a:xfrm>
-            <a:off x="5000624" y="7461249"/>
-            <a:ext cx="1269999" cy="317499"/>
+            <a:off x="6045093" y="3614329"/>
+            <a:ext cx="992668" cy="216350"/>
           </a:xfrm>
           <a:prstGeom prst="rect">
             <a:avLst/>
@@ -7535,7 +7442,7 @@
           <a:p>
             <a:pPr algn="ctr" fontAlgn="base">
               <a:lnSpc>
-                <a:spcPts val="2015"/>
+                <a:spcPts val="1465"/>
               </a:lnSpc>
               <a:spcBef>
                 <a:spcPts val="0"/>
@@ -7543,9 +7450,9 @@
               <a:spcAft>
                 <a:spcPts val="0"/>
               </a:spcAft>
-              <a:defRPr sz="1374" b="1" i="0" lang="zh-CN" dirty="0">
-                <a:solidFill>
-                  <a:srgbClr val="0F7A88"/>
+              <a:defRPr sz="1002" b="0" i="0" lang="zh-CN" dirty="0">
+                <a:solidFill>
+                  <a:srgbClr val="3F4854"/>
                 </a:solidFill>
                 <a:latin typeface="Noto Sans CJK SC"/>
                 <a:ea typeface="Noto Sans CJK SC"/>
@@ -7553,9 +7460,9 @@
               </a:defRPr>
             </a:pPr>
             <a:r>
-              <a:rPr sz="1374" b="1" i="0" lang="zh-CN" dirty="0">
-                <a:solidFill>
-                  <a:srgbClr val="0F7A88"/>
+              <a:rPr sz="1002" b="0" i="0" lang="zh-CN" dirty="0">
+                <a:solidFill>
+                  <a:srgbClr val="3F4854"/>
                 </a:solidFill>
                 <a:latin typeface="Noto Sans CJK SC"/>
                 <a:ea typeface="Noto Sans CJK SC"/>
@@ -7568,24 +7475,24 @@
       </p:sp>
       <p:cxnSp>
         <p:nvCxnSpPr>
-          <p:cNvPr id="76" name="fb3" descr="Editable line; source id fb3"/>
+          <p:cNvPr id="80" name="fb_0" descr="Editable line; source id fb_0"/>
           <p:cNvCxnSpPr/>
           <p:nvPr/>
         </p:nvCxnSpPr>
         <p:spPr>
-          <a:xfrm flipH="1">
-            <a:off x="111124" y="7619999"/>
-            <a:ext cx="4810125" cy="0"/>
+          <a:xfrm>
+            <a:off x="10728450" y="3162538"/>
+            <a:ext cx="0" cy="559967"/>
           </a:xfrm>
           <a:prstGeom prst="line">
             <a:avLst/>
           </a:prstGeom>
-          <a:ln w="31749">
+          <a:ln w="12726">
             <a:solidFill>
-              <a:srgbClr val="0F7A88"/>
+              <a:srgbClr val="4B5563"/>
             </a:solidFill>
             <a:custDash>
-              <a:ds d="400000" sp="250000"/>
+              <a:ds d="600000" sp="400000"/>
             </a:custDash>
           </a:ln>
           <a:effectLst/>
@@ -7607,24 +7514,24 @@
       </p:cxnSp>
       <p:cxnSp>
         <p:nvCxnSpPr>
-          <p:cNvPr id="77" name="fb4" descr="Editable line; source id fb4"/>
+          <p:cNvPr id="81" name="fb_1" descr="Editable line; source id fb_1"/>
           <p:cNvCxnSpPr/>
           <p:nvPr/>
         </p:nvCxnSpPr>
         <p:spPr>
-          <a:xfrm flipV="1">
-            <a:off x="111124" y="3627437"/>
-            <a:ext cx="0" cy="3992562"/>
+          <a:xfrm flipH="1">
+            <a:off x="3130722" y="3722505"/>
+            <a:ext cx="2812559" cy="0"/>
           </a:xfrm>
           <a:prstGeom prst="line">
             <a:avLst/>
           </a:prstGeom>
-          <a:ln w="31749">
+          <a:ln w="12726">
             <a:solidFill>
-              <a:srgbClr val="0F7A88"/>
+              <a:srgbClr val="4B5563"/>
             </a:solidFill>
             <a:custDash>
-              <a:ds d="400000" sp="250000"/>
+              <a:ds d="600000" sp="400000"/>
             </a:custDash>
           </a:ln>
           <a:effectLst/>
@@ -7646,26 +7553,25 @@
       </p:cxnSp>
       <p:cxnSp>
         <p:nvCxnSpPr>
-          <p:cNvPr id="78" name="fb5" descr="Editable line; source id fb5"/>
+          <p:cNvPr id="82" name="fb_2" descr="Editable line; source id fb_2"/>
           <p:cNvCxnSpPr/>
           <p:nvPr/>
         </p:nvCxnSpPr>
         <p:spPr>
-          <a:xfrm>
-            <a:off x="111124" y="3627437"/>
-            <a:ext cx="95250" cy="0"/>
+          <a:xfrm flipH="1">
+            <a:off x="7139573" y="3722505"/>
+            <a:ext cx="3588877" cy="0"/>
           </a:xfrm>
           <a:prstGeom prst="line">
             <a:avLst/>
           </a:prstGeom>
-          <a:ln w="31749">
+          <a:ln w="12726">
             <a:solidFill>
-              <a:srgbClr val="0F7A88"/>
+              <a:srgbClr val="4B5563"/>
             </a:solidFill>
             <a:custDash>
-              <a:ds d="400000" sp="250000"/>
+              <a:ds d="600000" sp="400000"/>
             </a:custDash>
-            <a:tailEnd type="triangle"/>
           </a:ln>
           <a:effectLst/>
         </p:spPr>
@@ -7684,139 +7590,28 @@
           </a:fontRef>
         </p:style>
       </p:cxnSp>
-      <p:sp>
-        <p:nvSpPr>
-          <p:cNvPr id="79" name="q1" descr="Editable shape; source id q1"/>
-          <p:cNvSpPr/>
-          <p:nvPr/>
-        </p:nvSpPr>
-        <p:spPr>
-          <a:xfrm>
-            <a:off x="2952749" y="2230437"/>
-            <a:ext cx="2746374" cy="396874"/>
-          </a:xfrm>
-          <a:prstGeom prst="roundRect">
-            <a:avLst>
-              <a:gd name="adj" fmla="val 20000"/>
-            </a:avLst>
-          </a:prstGeom>
-          <a:solidFill>
-            <a:srgbClr val="FFF7E6"/>
-          </a:solidFill>
-          <a:ln w="19843">
-            <a:solidFill>
-              <a:srgbClr val="B4741A"/>
-            </a:solidFill>
-          </a:ln>
-          <a:effectLst/>
-        </p:spPr>
-        <p:style>
-          <a:lnRef idx="1">
-            <a:schemeClr val="accent1"/>
-          </a:lnRef>
-          <a:fillRef idx="3">
-            <a:schemeClr val="accent1"/>
-          </a:fillRef>
-          <a:effectRef idx="0">
-            <a:schemeClr val="accent1"/>
-          </a:effectRef>
-          <a:fontRef idx="minor">
-            <a:schemeClr val="lt1"/>
-          </a:fontRef>
-        </p:style>
-        <p:txBody>
-          <a:bodyPr rtlCol="0" anchor="ctr"/>
-          <a:lstStyle/>
-          <a:p>
-            <a:pPr algn="ctr"/>
-          </a:p>
-        </p:txBody>
-      </p:sp>
-      <p:sp>
-        <p:nvSpPr>
-          <p:cNvPr id="80" name="q1_t" descr="Editable text; source id q1_t"/>
-          <p:cNvSpPr txBox="1"/>
-          <p:nvPr/>
-        </p:nvSpPr>
-        <p:spPr>
-          <a:xfrm>
-            <a:off x="3032124" y="2270124"/>
-            <a:ext cx="2587624" cy="317499"/>
-          </a:xfrm>
-          <a:prstGeom prst="rect">
-            <a:avLst/>
-          </a:prstGeom>
-          <a:noFill/>
-          <a:effectLst/>
-        </p:spPr>
-        <p:txBody>
-          <a:bodyPr wrap="none" anchor="ctr" tIns="0" rIns="0" bIns="0" lIns="0" anchorCtr="0" vertOverflow="overflow">
-            <a:noAutofit/>
-          </a:bodyPr>
-          <a:lstStyle/>
-          <a:p>
-            <a:pPr algn="ctr" fontAlgn="base">
-              <a:lnSpc>
-                <a:spcPts val="2015"/>
-              </a:lnSpc>
-              <a:spcBef>
-                <a:spcPts val="0"/>
-              </a:spcBef>
-              <a:spcAft>
-                <a:spcPts val="0"/>
-              </a:spcAft>
-              <a:defRPr sz="1374" b="1" i="0" lang="zh-CN" dirty="0">
-                <a:solidFill>
-                  <a:srgbClr val="8A5A0E"/>
-                </a:solidFill>
-                <a:latin typeface="DejaVu Sans"/>
-                <a:ea typeface="DejaVu Sans"/>
-                <a:cs typeface="DejaVu Sans"/>
-              </a:defRPr>
-            </a:pPr>
-            <a:r>
-              <a:rPr sz="1374" b="1" i="0" lang="zh-CN" dirty="0">
-                <a:solidFill>
-                  <a:srgbClr val="8A5A0E"/>
-                </a:solidFill>
-                <a:latin typeface="DejaVu Sans"/>
-                <a:ea typeface="DejaVu Sans"/>
-                <a:cs typeface="DejaVu Sans"/>
-              </a:rPr>
-              <a:t>Zn </a:t>
-            </a:r>
-            <a:r>
-              <a:rPr sz="1374" b="1" i="0" lang="zh-CN" dirty="0">
-                <a:solidFill>
-                  <a:srgbClr val="8A5A0E"/>
-                </a:solidFill>
-                <a:latin typeface="Noto Sans CJK SC"/>
-                <a:ea typeface="Noto Sans CJK SC"/>
-                <a:cs typeface="Noto Sans CJK SC"/>
-              </a:rPr>
-              <a:t>是否进入并与氧计量耦合？</a:t>
-            </a:r>
-          </a:p>
-        </p:txBody>
-      </p:sp>
       <p:cxnSp>
         <p:nvCxnSpPr>
-          <p:cNvPr id="81" name="q1_l" descr="Editable line; source id q1_l"/>
+          <p:cNvPr id="83" name="fb_3" descr="Editable line; source id fb_3"/>
           <p:cNvCxnSpPr/>
           <p:nvPr/>
         </p:nvCxnSpPr>
         <p:spPr>
-          <a:xfrm flipH="1">
-            <a:off x="2873374" y="2635249"/>
-            <a:ext cx="190500" cy="63500"/>
+          <a:xfrm flipV="1">
+            <a:off x="3130722" y="2882555"/>
+            <a:ext cx="0" cy="839950"/>
           </a:xfrm>
           <a:prstGeom prst="line">
             <a:avLst/>
           </a:prstGeom>
-          <a:ln w="19843">
+          <a:ln w="12726">
             <a:solidFill>
-              <a:srgbClr val="B4741A"/>
+              <a:srgbClr val="4B5563"/>
             </a:solidFill>
+            <a:custDash>
+              <a:ds d="600000" sp="400000"/>
+            </a:custDash>
+            <a:tailEnd type="triangle"/>
           </a:ln>
           <a:effectLst/>
         </p:spPr>
@@ -7835,530 +7630,6 @@
           </a:fontRef>
         </p:style>
       </p:cxnSp>
-      <p:sp>
-        <p:nvSpPr>
-          <p:cNvPr id="82" name="q1_d" descr="Editable shape; source id q1_d"/>
-          <p:cNvSpPr/>
-          <p:nvPr/>
-        </p:nvSpPr>
-        <p:spPr>
-          <a:xfrm>
-            <a:off x="2746374" y="2682874"/>
-            <a:ext cx="95249" cy="95249"/>
-          </a:xfrm>
-          <a:prstGeom prst="ellipse">
-            <a:avLst/>
-          </a:prstGeom>
-          <a:solidFill>
-            <a:srgbClr val="B4741A"/>
-          </a:solidFill>
-          <a:ln>
-            <a:noFill/>
-          </a:ln>
-          <a:effectLst/>
-        </p:spPr>
-        <p:style>
-          <a:lnRef idx="1">
-            <a:schemeClr val="accent1"/>
-          </a:lnRef>
-          <a:fillRef idx="3">
-            <a:schemeClr val="accent1"/>
-          </a:fillRef>
-          <a:effectRef idx="0">
-            <a:schemeClr val="accent1"/>
-          </a:effectRef>
-          <a:fontRef idx="minor">
-            <a:schemeClr val="lt1"/>
-          </a:fontRef>
-        </p:style>
-        <p:txBody>
-          <a:bodyPr rtlCol="0" anchor="ctr"/>
-          <a:lstStyle/>
-          <a:p>
-            <a:pPr algn="ctr"/>
-          </a:p>
-        </p:txBody>
-      </p:sp>
-      <p:sp>
-        <p:nvSpPr>
-          <p:cNvPr id="83" name="q2" descr="Editable shape; source id q2"/>
-          <p:cNvSpPr/>
-          <p:nvPr/>
-        </p:nvSpPr>
-        <p:spPr>
-          <a:xfrm>
-            <a:off x="5072062" y="4381499"/>
-            <a:ext cx="2659062" cy="412749"/>
-          </a:xfrm>
-          <a:prstGeom prst="roundRect">
-            <a:avLst>
-              <a:gd name="adj" fmla="val 19230"/>
-            </a:avLst>
-          </a:prstGeom>
-          <a:solidFill>
-            <a:srgbClr val="FFF7E6"/>
-          </a:solidFill>
-          <a:ln w="19843">
-            <a:solidFill>
-              <a:srgbClr val="B4741A"/>
-            </a:solidFill>
-          </a:ln>
-          <a:effectLst/>
-        </p:spPr>
-        <p:style>
-          <a:lnRef idx="1">
-            <a:schemeClr val="accent1"/>
-          </a:lnRef>
-          <a:fillRef idx="3">
-            <a:schemeClr val="accent1"/>
-          </a:fillRef>
-          <a:effectRef idx="0">
-            <a:schemeClr val="accent1"/>
-          </a:effectRef>
-          <a:fontRef idx="minor">
-            <a:schemeClr val="lt1"/>
-          </a:fontRef>
-        </p:style>
-        <p:txBody>
-          <a:bodyPr rtlCol="0" anchor="ctr"/>
-          <a:lstStyle/>
-          <a:p>
-            <a:pPr algn="ctr"/>
-          </a:p>
-        </p:txBody>
-      </p:sp>
-      <p:sp>
-        <p:nvSpPr>
-          <p:cNvPr id="84" name="q2_t" descr="Editable text; source id q2_t"/>
-          <p:cNvSpPr txBox="1"/>
-          <p:nvPr/>
-        </p:nvSpPr>
-        <p:spPr>
-          <a:xfrm>
-            <a:off x="5151437" y="4421187"/>
-            <a:ext cx="2500312" cy="333374"/>
-          </a:xfrm>
-          <a:prstGeom prst="rect">
-            <a:avLst/>
-          </a:prstGeom>
-          <a:noFill/>
-          <a:effectLst/>
-        </p:spPr>
-        <p:txBody>
-          <a:bodyPr wrap="none" anchor="ctr" tIns="0" rIns="0" bIns="0" lIns="0" anchorCtr="0" vertOverflow="overflow">
-            <a:noAutofit/>
-          </a:bodyPr>
-          <a:lstStyle/>
-          <a:p>
-            <a:pPr algn="ctr" fontAlgn="base">
-              <a:lnSpc>
-                <a:spcPts val="2015"/>
-              </a:lnSpc>
-              <a:spcBef>
-                <a:spcPts val="0"/>
-              </a:spcBef>
-              <a:spcAft>
-                <a:spcPts val="0"/>
-              </a:spcAft>
-              <a:defRPr sz="1374" b="1" i="0" lang="zh-CN" dirty="0">
-                <a:solidFill>
-                  <a:srgbClr val="8A5A0E"/>
-                </a:solidFill>
-                <a:latin typeface="Noto Sans CJK SC"/>
-                <a:ea typeface="Noto Sans CJK SC"/>
-                <a:cs typeface="Noto Sans CJK SC"/>
-              </a:defRPr>
-            </a:pPr>
-            <a:r>
-              <a:rPr sz="1374" b="1" i="0" lang="zh-CN" dirty="0">
-                <a:solidFill>
-                  <a:srgbClr val="8A5A0E"/>
-                </a:solidFill>
-                <a:latin typeface="Noto Sans CJK SC"/>
-                <a:ea typeface="Noto Sans CJK SC"/>
-                <a:cs typeface="Noto Sans CJK SC"/>
-              </a:rPr>
-              <a:t>稳定相区还是液相选择性？</a:t>
-            </a:r>
-          </a:p>
-        </p:txBody>
-      </p:sp>
-      <p:cxnSp>
-        <p:nvCxnSpPr>
-          <p:cNvPr id="85" name="q2_l" descr="Editable line; source id q2_l"/>
-          <p:cNvCxnSpPr/>
-          <p:nvPr/>
-        </p:nvCxnSpPr>
-        <p:spPr>
-          <a:xfrm flipV="1">
-            <a:off x="6397624" y="4278312"/>
-            <a:ext cx="0" cy="87312"/>
-          </a:xfrm>
-          <a:prstGeom prst="line">
-            <a:avLst/>
-          </a:prstGeom>
-          <a:ln w="19843">
-            <a:solidFill>
-              <a:srgbClr val="B4741A"/>
-            </a:solidFill>
-          </a:ln>
-          <a:effectLst/>
-        </p:spPr>
-        <p:style>
-          <a:lnRef idx="2">
-            <a:schemeClr val="accent1"/>
-          </a:lnRef>
-          <a:fillRef idx="0">
-            <a:schemeClr val="accent1"/>
-          </a:fillRef>
-          <a:effectRef idx="0">
-            <a:schemeClr val="accent1"/>
-          </a:effectRef>
-          <a:fontRef idx="minor">
-            <a:schemeClr val="tx1"/>
-          </a:fontRef>
-        </p:style>
-      </p:cxnSp>
-      <p:sp>
-        <p:nvSpPr>
-          <p:cNvPr id="86" name="q2_d" descr="Editable shape; source id q2_d"/>
-          <p:cNvSpPr/>
-          <p:nvPr/>
-        </p:nvSpPr>
-        <p:spPr>
-          <a:xfrm>
-            <a:off x="6349999" y="4175124"/>
-            <a:ext cx="95249" cy="95249"/>
-          </a:xfrm>
-          <a:prstGeom prst="ellipse">
-            <a:avLst/>
-          </a:prstGeom>
-          <a:solidFill>
-            <a:srgbClr val="B4741A"/>
-          </a:solidFill>
-          <a:ln>
-            <a:noFill/>
-          </a:ln>
-          <a:effectLst/>
-        </p:spPr>
-        <p:style>
-          <a:lnRef idx="1">
-            <a:schemeClr val="accent1"/>
-          </a:lnRef>
-          <a:fillRef idx="3">
-            <a:schemeClr val="accent1"/>
-          </a:fillRef>
-          <a:effectRef idx="0">
-            <a:schemeClr val="accent1"/>
-          </a:effectRef>
-          <a:fontRef idx="minor">
-            <a:schemeClr val="lt1"/>
-          </a:fontRef>
-        </p:style>
-        <p:txBody>
-          <a:bodyPr rtlCol="0" anchor="ctr"/>
-          <a:lstStyle/>
-          <a:p>
-            <a:pPr algn="ctr"/>
-          </a:p>
-        </p:txBody>
-      </p:sp>
-      <p:cxnSp>
-        <p:nvCxnSpPr>
-          <p:cNvPr id="87" name="q2_l2" descr="Editable line; source id q2_l2"/>
-          <p:cNvCxnSpPr/>
-          <p:nvPr/>
-        </p:nvCxnSpPr>
-        <p:spPr>
-          <a:xfrm>
-            <a:off x="6397624" y="4810124"/>
-            <a:ext cx="0" cy="79375"/>
-          </a:xfrm>
-          <a:prstGeom prst="line">
-            <a:avLst/>
-          </a:prstGeom>
-          <a:ln w="19843">
-            <a:solidFill>
-              <a:srgbClr val="B4741A"/>
-            </a:solidFill>
-          </a:ln>
-          <a:effectLst/>
-        </p:spPr>
-        <p:style>
-          <a:lnRef idx="2">
-            <a:schemeClr val="accent1"/>
-          </a:lnRef>
-          <a:fillRef idx="0">
-            <a:schemeClr val="accent1"/>
-          </a:fillRef>
-          <a:effectRef idx="0">
-            <a:schemeClr val="accent1"/>
-          </a:effectRef>
-          <a:fontRef idx="minor">
-            <a:schemeClr val="tx1"/>
-          </a:fontRef>
-        </p:style>
-      </p:cxnSp>
-      <p:sp>
-        <p:nvSpPr>
-          <p:cNvPr id="88" name="q2_d2" descr="Editable shape; source id q2_d2"/>
-          <p:cNvSpPr/>
-          <p:nvPr/>
-        </p:nvSpPr>
-        <p:spPr>
-          <a:xfrm>
-            <a:off x="6349999" y="4905374"/>
-            <a:ext cx="95249" cy="95249"/>
-          </a:xfrm>
-          <a:prstGeom prst="ellipse">
-            <a:avLst/>
-          </a:prstGeom>
-          <a:solidFill>
-            <a:srgbClr val="B4741A"/>
-          </a:solidFill>
-          <a:ln>
-            <a:noFill/>
-          </a:ln>
-          <a:effectLst/>
-        </p:spPr>
-        <p:style>
-          <a:lnRef idx="1">
-            <a:schemeClr val="accent1"/>
-          </a:lnRef>
-          <a:fillRef idx="3">
-            <a:schemeClr val="accent1"/>
-          </a:fillRef>
-          <a:effectRef idx="0">
-            <a:schemeClr val="accent1"/>
-          </a:effectRef>
-          <a:fontRef idx="minor">
-            <a:schemeClr val="lt1"/>
-          </a:fontRef>
-        </p:style>
-        <p:txBody>
-          <a:bodyPr rtlCol="0" anchor="ctr"/>
-          <a:lstStyle/>
-          <a:p>
-            <a:pPr algn="ctr"/>
-          </a:p>
-        </p:txBody>
-      </p:sp>
-      <p:sp>
-        <p:nvSpPr>
-          <p:cNvPr id="89" name="q3" descr="Editable shape; source id q3"/>
-          <p:cNvSpPr/>
-          <p:nvPr/>
-        </p:nvSpPr>
-        <p:spPr>
-          <a:xfrm>
-            <a:off x="9969499" y="1563687"/>
-            <a:ext cx="2047874" cy="793749"/>
-          </a:xfrm>
-          <a:prstGeom prst="roundRect">
-            <a:avLst>
-              <a:gd name="adj" fmla="val 10000"/>
-            </a:avLst>
-          </a:prstGeom>
-          <a:solidFill>
-            <a:srgbClr val="FFF7E6"/>
-          </a:solidFill>
-          <a:ln w="19843">
-            <a:solidFill>
-              <a:srgbClr val="B4741A"/>
-            </a:solidFill>
-          </a:ln>
-          <a:effectLst/>
-        </p:spPr>
-        <p:style>
-          <a:lnRef idx="1">
-            <a:schemeClr val="accent1"/>
-          </a:lnRef>
-          <a:fillRef idx="3">
-            <a:schemeClr val="accent1"/>
-          </a:fillRef>
-          <a:effectRef idx="0">
-            <a:schemeClr val="accent1"/>
-          </a:effectRef>
-          <a:fontRef idx="minor">
-            <a:schemeClr val="lt1"/>
-          </a:fontRef>
-        </p:style>
-        <p:txBody>
-          <a:bodyPr rtlCol="0" anchor="ctr"/>
-          <a:lstStyle/>
-          <a:p>
-            <a:pPr algn="ctr"/>
-          </a:p>
-        </p:txBody>
-      </p:sp>
-      <p:sp>
-        <p:nvSpPr>
-          <p:cNvPr id="90" name="q3_t" descr="Editable text; source id q3_t"/>
-          <p:cNvSpPr txBox="1"/>
-          <p:nvPr/>
-        </p:nvSpPr>
-        <p:spPr>
-          <a:xfrm>
-            <a:off x="10048874" y="1603374"/>
-            <a:ext cx="1889124" cy="714374"/>
-          </a:xfrm>
-          <a:prstGeom prst="rect">
-            <a:avLst/>
-          </a:prstGeom>
-          <a:noFill/>
-          <a:effectLst/>
-        </p:spPr>
-        <p:txBody>
-          <a:bodyPr wrap="none" anchor="ctr" tIns="0" rIns="0" bIns="0" lIns="0" anchorCtr="0" vertOverflow="overflow">
-            <a:noAutofit/>
-          </a:bodyPr>
-          <a:lstStyle/>
-          <a:p>
-            <a:pPr algn="ctr" fontAlgn="base">
-              <a:lnSpc>
-                <a:spcPts val="2062"/>
-              </a:lnSpc>
-              <a:spcBef>
-                <a:spcPts val="0"/>
-              </a:spcBef>
-              <a:spcAft>
-                <a:spcPts val="0"/>
-              </a:spcAft>
-              <a:defRPr sz="1374" b="1" i="0" lang="zh-CN" dirty="0">
-                <a:solidFill>
-                  <a:srgbClr val="8A5A0E"/>
-                </a:solidFill>
-                <a:latin typeface="Noto Sans CJK SC"/>
-                <a:ea typeface="Noto Sans CJK SC"/>
-                <a:cs typeface="Noto Sans CJK SC"/>
-              </a:defRPr>
-            </a:pPr>
-            <a:r>
-              <a:rPr sz="1374" b="1" i="0" lang="zh-CN" dirty="0">
-                <a:solidFill>
-                  <a:srgbClr val="8A5A0E"/>
-                </a:solidFill>
-                <a:latin typeface="Noto Sans CJK SC"/>
-                <a:ea typeface="Noto Sans CJK SC"/>
-                <a:cs typeface="Noto Sans CJK SC"/>
-              </a:rPr>
-              <a:t>实际组成与结构信号</a:t>
-            </a:r>
-          </a:p>
-          <a:p>
-            <a:pPr algn="ctr" fontAlgn="base">
-              <a:lnSpc>
-                <a:spcPts val="2062"/>
-              </a:lnSpc>
-              <a:spcBef>
-                <a:spcPts val="0"/>
-              </a:spcBef>
-              <a:spcAft>
-                <a:spcPts val="0"/>
-              </a:spcAft>
-              <a:defRPr sz="1374" b="1" i="0" lang="zh-CN" dirty="0">
-                <a:solidFill>
-                  <a:srgbClr val="8A5A0E"/>
-                </a:solidFill>
-                <a:latin typeface="Noto Sans CJK SC"/>
-                <a:ea typeface="Noto Sans CJK SC"/>
-                <a:cs typeface="Noto Sans CJK SC"/>
-              </a:defRPr>
-            </a:pPr>
-            <a:r>
-              <a:rPr sz="1374" b="1" i="0" lang="zh-CN" dirty="0">
-                <a:solidFill>
-                  <a:srgbClr val="8A5A0E"/>
-                </a:solidFill>
-                <a:latin typeface="Noto Sans CJK SC"/>
-                <a:ea typeface="Noto Sans CJK SC"/>
-                <a:cs typeface="Noto Sans CJK SC"/>
-              </a:rPr>
-              <a:t>如何对应？</a:t>
-            </a:r>
-          </a:p>
-        </p:txBody>
-      </p:sp>
-      <p:cxnSp>
-        <p:nvCxnSpPr>
-          <p:cNvPr id="91" name="q3_l" descr="Editable line; source id q3_l"/>
-          <p:cNvCxnSpPr/>
-          <p:nvPr/>
-        </p:nvCxnSpPr>
-        <p:spPr>
-          <a:xfrm>
-            <a:off x="10993437" y="2373312"/>
-            <a:ext cx="230187" cy="365125"/>
-          </a:xfrm>
-          <a:prstGeom prst="line">
-            <a:avLst/>
-          </a:prstGeom>
-          <a:ln w="19843">
-            <a:solidFill>
-              <a:srgbClr val="B4741A"/>
-            </a:solidFill>
-          </a:ln>
-          <a:effectLst/>
-        </p:spPr>
-        <p:style>
-          <a:lnRef idx="2">
-            <a:schemeClr val="accent1"/>
-          </a:lnRef>
-          <a:fillRef idx="0">
-            <a:schemeClr val="accent1"/>
-          </a:fillRef>
-          <a:effectRef idx="0">
-            <a:schemeClr val="accent1"/>
-          </a:effectRef>
-          <a:fontRef idx="minor">
-            <a:schemeClr val="tx1"/>
-          </a:fontRef>
-        </p:style>
-      </p:cxnSp>
-      <p:sp>
-        <p:nvSpPr>
-          <p:cNvPr id="92" name="q3_d" descr="Editable shape; source id q3_d"/>
-          <p:cNvSpPr/>
-          <p:nvPr/>
-        </p:nvSpPr>
-        <p:spPr>
-          <a:xfrm>
-            <a:off x="11223624" y="2754312"/>
-            <a:ext cx="95249" cy="95249"/>
-          </a:xfrm>
-          <a:prstGeom prst="ellipse">
-            <a:avLst/>
-          </a:prstGeom>
-          <a:solidFill>
-            <a:srgbClr val="B4741A"/>
-          </a:solidFill>
-          <a:ln>
-            <a:noFill/>
-          </a:ln>
-          <a:effectLst/>
-        </p:spPr>
-        <p:style>
-          <a:lnRef idx="1">
-            <a:schemeClr val="accent1"/>
-          </a:lnRef>
-          <a:fillRef idx="3">
-            <a:schemeClr val="accent1"/>
-          </a:fillRef>
-          <a:effectRef idx="0">
-            <a:schemeClr val="accent1"/>
-          </a:effectRef>
-          <a:fontRef idx="minor">
-            <a:schemeClr val="lt1"/>
-          </a:fontRef>
-        </p:style>
-        <p:txBody>
-          <a:bodyPr rtlCol="0" anchor="ctr"/>
-          <a:lstStyle/>
-          <a:p>
-            <a:pPr algn="ctr"/>
-          </a:p>
-        </p:txBody>
-      </p:sp>
     </p:spTree>
   </p:cSld>
   <p:clrMapOvr>

--- a/media/figstudio/fig03_roadmap/fig03_research_roadmap_editable.pptx
+++ b/media/figstudio/fig03_roadmap/fig03_research_roadmap_editable.pptx
@@ -7,7 +7,7 @@
   <p:sldIdLst>
     <p:sldId id="256" r:id="rId7"/>
   </p:sldIdLst>
-  <p:sldSz cx="12191999" cy="5224233" type="screen4x3"/>
+  <p:sldSz cx="12191999" cy="8127999" type="screen4x3"/>
   <p:notesSz cx="6858000" cy="9144000"/>
   <p:defaultTextStyle>
     <a:defPPr>
@@ -502,7 +502,7 @@
           <a:lstStyle/>
           <a:p>
             <a:r>
-              <a:t>图 3 本文的研究路线（super_teaser 第三轮 R02 → super_img2ppt 重建；分叉只由前驱体驱动、反馈回结构假设）</a:t>
+              <a:t>图 3 本文的研究路线（super_teaser 第四轮 R05 → super_img2ppt 重建；分叉只由前驱体驱动、反馈回结构假设）</a:t>
             </a:r>
           </a:p>
         </p:txBody>
@@ -3524,18 +3524,18 @@
         </p:nvSpPr>
         <p:spPr>
           <a:xfrm>
-            <a:off x="171807" y="190897"/>
-            <a:ext cx="5936918" cy="3289803"/>
+            <a:off x="285749" y="476249"/>
+            <a:ext cx="6588124" cy="3492499"/>
           </a:xfrm>
           <a:prstGeom prst="roundRect">
             <a:avLst>
-              <a:gd name="adj" fmla="val 3094"/>
+              <a:gd name="adj" fmla="val 3181"/>
             </a:avLst>
           </a:prstGeom>
           <a:solidFill>
             <a:srgbClr val="EEF2F7"/>
           </a:solidFill>
-          <a:ln w="9544">
+          <a:ln w="9524">
             <a:solidFill>
               <a:srgbClr val="5B7592"/>
             </a:solidFill>
@@ -3572,8 +3572,8 @@
         </p:nvSpPr>
         <p:spPr>
           <a:xfrm>
-            <a:off x="286346" y="267256"/>
-            <a:ext cx="636325" cy="209987"/>
+            <a:off x="428624" y="555624"/>
+            <a:ext cx="904874" cy="293687"/>
           </a:xfrm>
           <a:prstGeom prst="rect">
             <a:avLst/>
@@ -3589,7 +3589,7 @@
           <a:p>
             <a:pPr algn="l" fontAlgn="base">
               <a:lnSpc>
-                <a:spcPts val="1615"/>
+                <a:spcPts val="1921"/>
               </a:lnSpc>
               <a:spcBef>
                 <a:spcPts val="0"/>
@@ -3597,7 +3597,7 @@
               <a:spcAft>
                 <a:spcPts val="0"/>
               </a:spcAft>
-              <a:defRPr sz="1102" b="1" i="0" lang="zh-CN" dirty="0">
+              <a:defRPr sz="1312" b="1" i="0" lang="zh-CN" dirty="0">
                 <a:solidFill>
                   <a:srgbClr val="2B3E57"/>
                 </a:solidFill>
@@ -3607,7 +3607,7 @@
               </a:defRPr>
             </a:pPr>
             <a:r>
-              <a:rPr sz="1102" b="1" i="0" lang="zh-CN" dirty="0">
+              <a:rPr sz="1312" b="1" i="0" lang="zh-CN" dirty="0">
                 <a:solidFill>
                   <a:srgbClr val="2B3E57"/>
                 </a:solidFill>
@@ -3628,18 +3628,18 @@
         </p:nvSpPr>
         <p:spPr>
           <a:xfrm>
-            <a:off x="6356893" y="184534"/>
-            <a:ext cx="2793469" cy="3296166"/>
+            <a:off x="7064374" y="476249"/>
+            <a:ext cx="2778124" cy="3492499"/>
           </a:xfrm>
           <a:prstGeom prst="roundRect">
             <a:avLst>
-              <a:gd name="adj" fmla="val 3644"/>
+              <a:gd name="adj" fmla="val 4000"/>
             </a:avLst>
           </a:prstGeom>
           <a:solidFill>
             <a:srgbClr val="E6F2F3"/>
           </a:solidFill>
-          <a:ln w="9544">
+          <a:ln w="9524">
             <a:solidFill>
               <a:srgbClr val="1F7F8C"/>
             </a:solidFill>
@@ -3676,8 +3676,8 @@
         </p:nvSpPr>
         <p:spPr>
           <a:xfrm>
-            <a:off x="6471431" y="260893"/>
-            <a:ext cx="636325" cy="209987"/>
+            <a:off x="7207249" y="555624"/>
+            <a:ext cx="904874" cy="293687"/>
           </a:xfrm>
           <a:prstGeom prst="rect">
             <a:avLst/>
@@ -3693,7 +3693,7 @@
           <a:p>
             <a:pPr algn="l" fontAlgn="base">
               <a:lnSpc>
-                <a:spcPts val="1615"/>
+                <a:spcPts val="1921"/>
               </a:lnSpc>
               <a:spcBef>
                 <a:spcPts val="0"/>
@@ -3701,7 +3701,7 @@
               <a:spcAft>
                 <a:spcPts val="0"/>
               </a:spcAft>
-              <a:defRPr sz="1102" b="1" i="0" lang="zh-CN" dirty="0">
+              <a:defRPr sz="1312" b="1" i="0" lang="zh-CN" dirty="0">
                 <a:solidFill>
                   <a:srgbClr val="0F4F58"/>
                 </a:solidFill>
@@ -3711,7 +3711,7 @@
               </a:defRPr>
             </a:pPr>
             <a:r>
-              <a:rPr sz="1102" b="1" i="0" lang="zh-CN" dirty="0">
+              <a:rPr sz="1312" b="1" i="0" lang="zh-CN" dirty="0">
                 <a:solidFill>
                   <a:srgbClr val="0F4F58"/>
                 </a:solidFill>
@@ -3732,18 +3732,18 @@
         </p:nvSpPr>
         <p:spPr>
           <a:xfrm>
-            <a:off x="9398530" y="190897"/>
-            <a:ext cx="2621661" cy="3289803"/>
+            <a:off x="10032999" y="476249"/>
+            <a:ext cx="1952624" cy="3492499"/>
           </a:xfrm>
           <a:prstGeom prst="roundRect">
             <a:avLst>
-              <a:gd name="adj" fmla="val 3883"/>
+              <a:gd name="adj" fmla="val 5691"/>
             </a:avLst>
           </a:prstGeom>
           <a:solidFill>
             <a:srgbClr val="EEF2F7"/>
           </a:solidFill>
-          <a:ln w="9544">
+          <a:ln w="9524">
             <a:solidFill>
               <a:srgbClr val="5B7592"/>
             </a:solidFill>
@@ -3780,8 +3780,8 @@
         </p:nvSpPr>
         <p:spPr>
           <a:xfrm>
-            <a:off x="9513068" y="267256"/>
-            <a:ext cx="636325" cy="209987"/>
+            <a:off x="10175874" y="555624"/>
+            <a:ext cx="904874" cy="293687"/>
           </a:xfrm>
           <a:prstGeom prst="rect">
             <a:avLst/>
@@ -3797,7 +3797,7 @@
           <a:p>
             <a:pPr algn="l" fontAlgn="base">
               <a:lnSpc>
-                <a:spcPts val="1615"/>
+                <a:spcPts val="1921"/>
               </a:lnSpc>
               <a:spcBef>
                 <a:spcPts val="0"/>
@@ -3805,7 +3805,7 @@
               <a:spcAft>
                 <a:spcPts val="0"/>
               </a:spcAft>
-              <a:defRPr sz="1102" b="1" i="0" lang="zh-CN" dirty="0">
+              <a:defRPr sz="1312" b="1" i="0" lang="zh-CN" dirty="0">
                 <a:solidFill>
                   <a:srgbClr val="2B3E57"/>
                 </a:solidFill>
@@ -3815,7 +3815,7 @@
               </a:defRPr>
             </a:pPr>
             <a:r>
-              <a:rPr sz="1102" b="1" i="0" lang="zh-CN" dirty="0">
+              <a:rPr sz="1312" b="1" i="0" lang="zh-CN" dirty="0">
                 <a:solidFill>
                   <a:srgbClr val="2B3E57"/>
                 </a:solidFill>
@@ -3836,18 +3836,18 @@
         </p:nvSpPr>
         <p:spPr>
           <a:xfrm>
-            <a:off x="184534" y="3913402"/>
-            <a:ext cx="11822930" cy="1145386"/>
+            <a:off x="206374" y="4762499"/>
+            <a:ext cx="11779249" cy="1587499"/>
           </a:xfrm>
           <a:prstGeom prst="roundRect">
             <a:avLst>
-              <a:gd name="adj" fmla="val 8888"/>
+              <a:gd name="adj" fmla="val 7000"/>
             </a:avLst>
           </a:prstGeom>
           <a:solidFill>
             <a:srgbClr val="FFF6E3"/>
           </a:solidFill>
-          <a:ln w="9544">
+          <a:ln w="9524">
             <a:solidFill>
               <a:srgbClr val="C48A24"/>
             </a:solidFill>
@@ -3884,8 +3884,8 @@
         </p:nvSpPr>
         <p:spPr>
           <a:xfrm>
-            <a:off x="299073" y="3989761"/>
-            <a:ext cx="636325" cy="209987"/>
+            <a:off x="349249" y="4841874"/>
+            <a:ext cx="904874" cy="293687"/>
           </a:xfrm>
           <a:prstGeom prst="rect">
             <a:avLst/>
@@ -3901,7 +3901,7 @@
           <a:p>
             <a:pPr algn="l" fontAlgn="base">
               <a:lnSpc>
-                <a:spcPts val="1615"/>
+                <a:spcPts val="1921"/>
               </a:lnSpc>
               <a:spcBef>
                 <a:spcPts val="0"/>
@@ -3909,7 +3909,7 @@
               <a:spcAft>
                 <a:spcPts val="0"/>
               </a:spcAft>
-              <a:defRPr sz="1102" b="1" i="0" lang="zh-CN" dirty="0">
+              <a:defRPr sz="1312" b="1" i="0" lang="zh-CN" dirty="0">
                 <a:solidFill>
                   <a:srgbClr val="7A5410"/>
                 </a:solidFill>
@@ -3919,7 +3919,7 @@
               </a:defRPr>
             </a:pPr>
             <a:r>
-              <a:rPr sz="1102" b="1" i="0" lang="zh-CN" dirty="0">
+              <a:rPr sz="1312" b="1" i="0" lang="zh-CN" dirty="0">
                 <a:solidFill>
                   <a:srgbClr val="7A5410"/>
                 </a:solidFill>
@@ -3934,26 +3934,26 @@
       </p:sp>
       <p:sp>
         <p:nvSpPr>
-          <p:cNvPr id="10" name="c1" descr="Editable shape; source id c1"/>
+          <p:cNvPr id="10" name="cav" descr="Editable shape; source id cav"/>
           <p:cNvSpPr/>
           <p:nvPr/>
         </p:nvSpPr>
         <p:spPr>
           <a:xfrm>
-            <a:off x="324526" y="833586"/>
-            <a:ext cx="1718079" cy="2036242"/>
+            <a:off x="4929187" y="539749"/>
+            <a:ext cx="1254124" cy="293687"/>
           </a:xfrm>
           <a:prstGeom prst="roundRect">
             <a:avLst>
-              <a:gd name="adj" fmla="val 3703"/>
+              <a:gd name="adj" fmla="val 50000"/>
             </a:avLst>
           </a:prstGeom>
           <a:solidFill>
-            <a:srgbClr val="FFFFFF"/>
+            <a:srgbClr val="FFF6E3"/>
           </a:solidFill>
-          <a:ln w="9544">
+          <a:ln w="8731">
             <a:solidFill>
-              <a:srgbClr val="5B7592"/>
+              <a:srgbClr val="C48A24"/>
             </a:solidFill>
           </a:ln>
           <a:effectLst/>
@@ -3982,85 +3982,14 @@
       </p:sp>
       <p:sp>
         <p:nvSpPr>
-          <p:cNvPr id="11" name="c1_s" descr="Editable shape; source id c1_s"/>
-          <p:cNvSpPr/>
-          <p:nvPr/>
-        </p:nvSpPr>
-        <p:spPr>
-          <a:xfrm>
-            <a:off x="324526" y="833586"/>
-            <a:ext cx="1718079" cy="50906"/>
-          </a:xfrm>
-          <a:prstGeom prst="roundRect">
-            <a:avLst>
-              <a:gd name="adj" fmla="val 50000"/>
-            </a:avLst>
-          </a:prstGeom>
-          <a:solidFill>
-            <a:srgbClr val="5B7592"/>
-          </a:solidFill>
-          <a:ln>
-            <a:noFill/>
-          </a:ln>
-          <a:effectLst/>
-        </p:spPr>
-        <p:style>
-          <a:lnRef idx="1">
-            <a:schemeClr val="accent1"/>
-          </a:lnRef>
-          <a:fillRef idx="3">
-            <a:schemeClr val="accent1"/>
-          </a:fillRef>
-          <a:effectRef idx="0">
-            <a:schemeClr val="accent1"/>
-          </a:effectRef>
-          <a:fontRef idx="minor">
-            <a:schemeClr val="lt1"/>
-          </a:fontRef>
-        </p:style>
-        <p:txBody>
-          <a:bodyPr rtlCol="0" anchor="ctr"/>
-          <a:lstStyle/>
-          <a:p>
-            <a:pPr algn="ctr"/>
-          </a:p>
-        </p:txBody>
-      </p:sp>
-      <p:pic>
-        <p:nvPicPr>
-          <p:cNvPr id="12" name="c1_i" descr="exact crop of the generated raster (line motif)"/>
-          <p:cNvPicPr>
-            <a:picLocks noChangeAspect="1"/>
-          </p:cNvPicPr>
-          <p:nvPr/>
-        </p:nvPicPr>
-        <p:blipFill>
-          <a:blip r:embed="rId2"/>
-          <a:stretch>
-            <a:fillRect/>
-          </a:stretch>
-        </p:blipFill>
-        <p:spPr>
-          <a:xfrm>
-            <a:off x="459669" y="967215"/>
-            <a:ext cx="213320" cy="279983"/>
-          </a:xfrm>
-          <a:prstGeom prst="rect">
-            <a:avLst/>
-          </a:prstGeom>
-          <a:effectLst/>
-        </p:spPr>
-      </p:pic>
-      <p:sp>
-        <p:nvSpPr>
-          <p:cNvPr id="13" name="c1_t" descr="Editable text; source id c1_t"/>
+          <p:cNvPr id="11" name="cav_t" descr="Editable text; source id cav_t"/>
           <p:cNvSpPr txBox="1"/>
           <p:nvPr/>
         </p:nvSpPr>
         <p:spPr>
           <a:xfrm>
-            <a:off x="782680" y="986304"/>
-            <a:ext cx="1158112" cy="248167"/>
+            <a:off x="5008562" y="571499"/>
+            <a:ext cx="1095374" cy="230187"/>
           </a:xfrm>
           <a:prstGeom prst="rect">
             <a:avLst/>
@@ -4074,9 +4003,9 @@
           </a:bodyPr>
           <a:lstStyle/>
           <a:p>
-            <a:pPr algn="l" fontAlgn="base">
+            <a:pPr algn="ctr" fontAlgn="base">
               <a:lnSpc>
-                <a:spcPts val="1728"/>
+                <a:spcPts val="1546"/>
               </a:lnSpc>
               <a:spcBef>
                 <a:spcPts val="0"/>
@@ -4084,7 +4013,419 @@
               <a:spcAft>
                 <a:spcPts val="0"/>
               </a:spcAft>
-              <a:defRPr sz="1187" b="1" i="0" lang="zh-CN" dirty="0">
+              <a:defRPr sz="1062" b="0" i="0" lang="zh-CN" dirty="0">
+                <a:solidFill>
+                  <a:srgbClr val="7A5410"/>
+                </a:solidFill>
+                <a:latin typeface="Noto Sans CJK SC"/>
+                <a:ea typeface="Noto Sans CJK SC"/>
+                <a:cs typeface="Noto Sans CJK SC"/>
+              </a:defRPr>
+            </a:pPr>
+            <a:r>
+              <a:rPr sz="1062" b="0" i="0" lang="zh-CN" dirty="0">
+                <a:solidFill>
+                  <a:srgbClr val="7A5410"/>
+                </a:solidFill>
+                <a:latin typeface="Noto Sans CJK SC"/>
+                <a:ea typeface="Noto Sans CJK SC"/>
+                <a:cs typeface="Noto Sans CJK SC"/>
+              </a:rPr>
+              <a:t>模型排序</a:t>
+            </a:r>
+            <a:r>
+              <a:rPr sz="1062" b="0" i="0" lang="zh-CN" dirty="0">
+                <a:solidFill>
+                  <a:srgbClr val="7A5410"/>
+                </a:solidFill>
+                <a:latin typeface="DejaVu Sans"/>
+                <a:ea typeface="DejaVu Sans"/>
+                <a:cs typeface="DejaVu Sans"/>
+              </a:rPr>
+              <a:t> ≠ </a:t>
+            </a:r>
+            <a:r>
+              <a:rPr sz="1062" b="0" i="0" lang="zh-CN" dirty="0">
+                <a:solidFill>
+                  <a:srgbClr val="7A5410"/>
+                </a:solidFill>
+                <a:latin typeface="Noto Sans CJK SC"/>
+                <a:ea typeface="Noto Sans CJK SC"/>
+                <a:cs typeface="Noto Sans CJK SC"/>
+              </a:rPr>
+              <a:t>验证</a:t>
+            </a:r>
+          </a:p>
+        </p:txBody>
+      </p:sp>
+      <p:sp>
+        <p:nvSpPr>
+          <p:cNvPr id="12" name="c1" descr="Editable shape; source id c1"/>
+          <p:cNvSpPr/>
+          <p:nvPr/>
+        </p:nvSpPr>
+        <p:spPr>
+          <a:xfrm>
+            <a:off x="412749" y="888999"/>
+            <a:ext cx="1920874" cy="2936874"/>
+          </a:xfrm>
+          <a:prstGeom prst="roundRect">
+            <a:avLst>
+              <a:gd name="adj" fmla="val 3719"/>
+            </a:avLst>
+          </a:prstGeom>
+          <a:solidFill>
+            <a:srgbClr val="FFFFFF"/>
+          </a:solidFill>
+          <a:ln w="11112">
+            <a:solidFill>
+              <a:srgbClr val="5B7592"/>
+            </a:solidFill>
+          </a:ln>
+          <a:effectLst/>
+        </p:spPr>
+        <p:style>
+          <a:lnRef idx="1">
+            <a:schemeClr val="accent1"/>
+          </a:lnRef>
+          <a:fillRef idx="3">
+            <a:schemeClr val="accent1"/>
+          </a:fillRef>
+          <a:effectRef idx="0">
+            <a:schemeClr val="accent1"/>
+          </a:effectRef>
+          <a:fontRef idx="minor">
+            <a:schemeClr val="lt1"/>
+          </a:fontRef>
+        </p:style>
+        <p:txBody>
+          <a:bodyPr rtlCol="0" anchor="ctr"/>
+          <a:lstStyle/>
+          <a:p>
+            <a:pPr algn="ctr"/>
+          </a:p>
+        </p:txBody>
+      </p:sp>
+      <p:sp>
+        <p:nvSpPr>
+          <p:cNvPr id="13" name="c1_a" descr="Editable shape; source id c1_a"/>
+          <p:cNvSpPr/>
+          <p:nvPr/>
+        </p:nvSpPr>
+        <p:spPr>
+          <a:xfrm>
+            <a:off x="412749" y="888999"/>
+            <a:ext cx="1920874" cy="47624"/>
+          </a:xfrm>
+          <a:prstGeom prst="roundRect">
+            <a:avLst>
+              <a:gd name="adj" fmla="val 50000"/>
+            </a:avLst>
+          </a:prstGeom>
+          <a:solidFill>
+            <a:srgbClr val="5B7592"/>
+          </a:solidFill>
+          <a:ln>
+            <a:noFill/>
+          </a:ln>
+          <a:effectLst/>
+        </p:spPr>
+        <p:style>
+          <a:lnRef idx="1">
+            <a:schemeClr val="accent1"/>
+          </a:lnRef>
+          <a:fillRef idx="3">
+            <a:schemeClr val="accent1"/>
+          </a:fillRef>
+          <a:effectRef idx="0">
+            <a:schemeClr val="accent1"/>
+          </a:effectRef>
+          <a:fontRef idx="minor">
+            <a:schemeClr val="lt1"/>
+          </a:fontRef>
+        </p:style>
+        <p:txBody>
+          <a:bodyPr rtlCol="0" anchor="ctr"/>
+          <a:lstStyle/>
+          <a:p>
+            <a:pPr algn="ctr"/>
+          </a:p>
+        </p:txBody>
+      </p:sp>
+      <p:sp>
+        <p:nvSpPr>
+          <p:cNvPr id="14" name="c1_g_s2" descr="Editable shape; source id c1_g_s2"/>
+          <p:cNvSpPr/>
+          <p:nvPr/>
+        </p:nvSpPr>
+        <p:spPr>
+          <a:xfrm>
+            <a:off x="1325562" y="1150937"/>
+            <a:ext cx="150812" cy="230187"/>
+          </a:xfrm>
+          <a:prstGeom prst="rect">
+            <a:avLst/>
+          </a:prstGeom>
+          <a:noFill/>
+          <a:ln w="7937">
+            <a:solidFill>
+              <a:srgbClr val="1F2937"/>
+            </a:solidFill>
+          </a:ln>
+          <a:effectLst/>
+        </p:spPr>
+        <p:style>
+          <a:lnRef idx="1">
+            <a:schemeClr val="accent1"/>
+          </a:lnRef>
+          <a:fillRef idx="3">
+            <a:schemeClr val="accent1"/>
+          </a:fillRef>
+          <a:effectRef idx="0">
+            <a:schemeClr val="accent1"/>
+          </a:effectRef>
+          <a:fontRef idx="minor">
+            <a:schemeClr val="lt1"/>
+          </a:fontRef>
+        </p:style>
+        <p:txBody>
+          <a:bodyPr rtlCol="0" anchor="ctr"/>
+          <a:lstStyle/>
+          <a:p>
+            <a:pPr algn="ctr"/>
+          </a:p>
+        </p:txBody>
+      </p:sp>
+      <p:sp>
+        <p:nvSpPr>
+          <p:cNvPr id="15" name="c1_g_s1" descr="Editable shape; source id c1_g_s1"/>
+          <p:cNvSpPr/>
+          <p:nvPr/>
+        </p:nvSpPr>
+        <p:spPr>
+          <a:xfrm>
+            <a:off x="1301749" y="1119187"/>
+            <a:ext cx="150812" cy="230187"/>
+          </a:xfrm>
+          <a:prstGeom prst="rect">
+            <a:avLst/>
+          </a:prstGeom>
+          <a:noFill/>
+          <a:ln w="7937">
+            <a:solidFill>
+              <a:srgbClr val="1F2937"/>
+            </a:solidFill>
+          </a:ln>
+          <a:effectLst/>
+        </p:spPr>
+        <p:style>
+          <a:lnRef idx="1">
+            <a:schemeClr val="accent1"/>
+          </a:lnRef>
+          <a:fillRef idx="3">
+            <a:schemeClr val="accent1"/>
+          </a:fillRef>
+          <a:effectRef idx="0">
+            <a:schemeClr val="accent1"/>
+          </a:effectRef>
+          <a:fontRef idx="minor">
+            <a:schemeClr val="lt1"/>
+          </a:fontRef>
+        </p:style>
+        <p:txBody>
+          <a:bodyPr rtlCol="0" anchor="ctr"/>
+          <a:lstStyle/>
+          <a:p>
+            <a:pPr algn="ctr"/>
+          </a:p>
+        </p:txBody>
+      </p:sp>
+      <p:sp>
+        <p:nvSpPr>
+          <p:cNvPr id="16" name="c1_g_s0" descr="Editable shape; source id c1_g_s0"/>
+          <p:cNvSpPr/>
+          <p:nvPr/>
+        </p:nvSpPr>
+        <p:spPr>
+          <a:xfrm>
+            <a:off x="1269999" y="1095374"/>
+            <a:ext cx="150812" cy="230187"/>
+          </a:xfrm>
+          <a:prstGeom prst="rect">
+            <a:avLst/>
+          </a:prstGeom>
+          <a:noFill/>
+          <a:ln w="7937">
+            <a:solidFill>
+              <a:srgbClr val="1F2937"/>
+            </a:solidFill>
+          </a:ln>
+          <a:effectLst/>
+        </p:spPr>
+        <p:style>
+          <a:lnRef idx="1">
+            <a:schemeClr val="accent1"/>
+          </a:lnRef>
+          <a:fillRef idx="3">
+            <a:schemeClr val="accent1"/>
+          </a:fillRef>
+          <a:effectRef idx="0">
+            <a:schemeClr val="accent1"/>
+          </a:effectRef>
+          <a:fontRef idx="minor">
+            <a:schemeClr val="lt1"/>
+          </a:fontRef>
+        </p:style>
+        <p:txBody>
+          <a:bodyPr rtlCol="0" anchor="ctr"/>
+          <a:lstStyle/>
+          <a:p>
+            <a:pPr algn="ctr"/>
+          </a:p>
+        </p:txBody>
+      </p:sp>
+      <p:cxnSp>
+        <p:nvCxnSpPr>
+          <p:cNvPr id="17" name="c1_g_l1" descr="Editable line; source id c1_g_l1"/>
+          <p:cNvCxnSpPr/>
+          <p:nvPr/>
+        </p:nvCxnSpPr>
+        <p:spPr>
+          <a:xfrm>
+            <a:off x="1309687" y="1174749"/>
+            <a:ext cx="103187" cy="0"/>
+          </a:xfrm>
+          <a:prstGeom prst="line">
+            <a:avLst/>
+          </a:prstGeom>
+          <a:ln w="7937">
+            <a:solidFill>
+              <a:srgbClr val="1F2937"/>
+            </a:solidFill>
+          </a:ln>
+          <a:effectLst/>
+        </p:spPr>
+        <p:style>
+          <a:lnRef idx="2">
+            <a:schemeClr val="accent1"/>
+          </a:lnRef>
+          <a:fillRef idx="0">
+            <a:schemeClr val="accent1"/>
+          </a:fillRef>
+          <a:effectRef idx="0">
+            <a:schemeClr val="accent1"/>
+          </a:effectRef>
+          <a:fontRef idx="minor">
+            <a:schemeClr val="tx1"/>
+          </a:fontRef>
+        </p:style>
+      </p:cxnSp>
+      <p:cxnSp>
+        <p:nvCxnSpPr>
+          <p:cNvPr id="18" name="c1_g_l2" descr="Editable line; source id c1_g_l2"/>
+          <p:cNvCxnSpPr/>
+          <p:nvPr/>
+        </p:nvCxnSpPr>
+        <p:spPr>
+          <a:xfrm>
+            <a:off x="1309687" y="1222374"/>
+            <a:ext cx="103187" cy="0"/>
+          </a:xfrm>
+          <a:prstGeom prst="line">
+            <a:avLst/>
+          </a:prstGeom>
+          <a:ln w="7937">
+            <a:solidFill>
+              <a:srgbClr val="1F2937"/>
+            </a:solidFill>
+          </a:ln>
+          <a:effectLst/>
+        </p:spPr>
+        <p:style>
+          <a:lnRef idx="2">
+            <a:schemeClr val="accent1"/>
+          </a:lnRef>
+          <a:fillRef idx="0">
+            <a:schemeClr val="accent1"/>
+          </a:fillRef>
+          <a:effectRef idx="0">
+            <a:schemeClr val="accent1"/>
+          </a:effectRef>
+          <a:fontRef idx="minor">
+            <a:schemeClr val="tx1"/>
+          </a:fontRef>
+        </p:style>
+      </p:cxnSp>
+      <p:cxnSp>
+        <p:nvCxnSpPr>
+          <p:cNvPr id="19" name="c1_g_l3" descr="Editable line; source id c1_g_l3"/>
+          <p:cNvCxnSpPr/>
+          <p:nvPr/>
+        </p:nvCxnSpPr>
+        <p:spPr>
+          <a:xfrm>
+            <a:off x="1309687" y="1262062"/>
+            <a:ext cx="71437" cy="0"/>
+          </a:xfrm>
+          <a:prstGeom prst="line">
+            <a:avLst/>
+          </a:prstGeom>
+          <a:ln w="7937">
+            <a:solidFill>
+              <a:srgbClr val="1F2937"/>
+            </a:solidFill>
+          </a:ln>
+          <a:effectLst/>
+        </p:spPr>
+        <p:style>
+          <a:lnRef idx="2">
+            <a:schemeClr val="accent1"/>
+          </a:lnRef>
+          <a:fillRef idx="0">
+            <a:schemeClr val="accent1"/>
+          </a:fillRef>
+          <a:effectRef idx="0">
+            <a:schemeClr val="accent1"/>
+          </a:effectRef>
+          <a:fontRef idx="minor">
+            <a:schemeClr val="tx1"/>
+          </a:fontRef>
+        </p:style>
+      </p:cxnSp>
+      <p:sp>
+        <p:nvSpPr>
+          <p:cNvPr id="20" name="c1_t" descr="Editable text; source id c1_t"/>
+          <p:cNvSpPr txBox="1"/>
+          <p:nvPr/>
+        </p:nvSpPr>
+        <p:spPr>
+          <a:xfrm>
+            <a:off x="539749" y="1444624"/>
+            <a:ext cx="1666874" cy="261937"/>
+          </a:xfrm>
+          <a:prstGeom prst="rect">
+            <a:avLst/>
+          </a:prstGeom>
+          <a:noFill/>
+          <a:effectLst/>
+        </p:spPr>
+        <p:txBody>
+          <a:bodyPr wrap="none" anchor="ctr" tIns="0" rIns="0" bIns="0" lIns="0" anchorCtr="0" vertOverflow="overflow">
+            <a:noAutofit/>
+          </a:bodyPr>
+          <a:lstStyle/>
+          <a:p>
+            <a:pPr algn="ctr" fontAlgn="base">
+              <a:lnSpc>
+                <a:spcPts val="1999"/>
+              </a:lnSpc>
+              <a:spcBef>
+                <a:spcPts val="0"/>
+              </a:spcBef>
+              <a:spcAft>
+                <a:spcPts val="0"/>
+              </a:spcAft>
+              <a:defRPr sz="1366" b="1" i="0" lang="zh-CN" dirty="0">
                 <a:solidFill>
                   <a:srgbClr val="2B3E57"/>
                 </a:solidFill>
@@ -4094,7 +4435,7 @@
               </a:defRPr>
             </a:pPr>
             <a:r>
-              <a:rPr sz="1187" b="1" i="0" lang="zh-CN" dirty="0">
+              <a:rPr sz="1366" b="1" i="0" lang="zh-CN" dirty="0">
                 <a:solidFill>
                   <a:srgbClr val="2B3E57"/>
                 </a:solidFill>
@@ -4109,14 +4450,62 @@
       </p:sp>
       <p:sp>
         <p:nvSpPr>
-          <p:cNvPr id="14" name="c1_k0" descr="Editable text; source id c1_k0"/>
+          <p:cNvPr id="21" name="c1k_t0" descr="Editable shape; source id c1k_t0"/>
+          <p:cNvSpPr/>
+          <p:nvPr/>
+        </p:nvSpPr>
+        <p:spPr>
+          <a:xfrm>
+            <a:off x="539749" y="1785937"/>
+            <a:ext cx="1666874" cy="571499"/>
+          </a:xfrm>
+          <a:prstGeom prst="roundRect">
+            <a:avLst>
+              <a:gd name="adj" fmla="val 8333"/>
+            </a:avLst>
+          </a:prstGeom>
+          <a:solidFill>
+            <a:srgbClr val="F7F9FB"/>
+          </a:solidFill>
+          <a:ln w="9524">
+            <a:solidFill>
+              <a:srgbClr val="CBD3DA"/>
+            </a:solidFill>
+          </a:ln>
+          <a:effectLst/>
+        </p:spPr>
+        <p:style>
+          <a:lnRef idx="1">
+            <a:schemeClr val="accent1"/>
+          </a:lnRef>
+          <a:fillRef idx="3">
+            <a:schemeClr val="accent1"/>
+          </a:fillRef>
+          <a:effectRef idx="0">
+            <a:schemeClr val="accent1"/>
+          </a:effectRef>
+          <a:fontRef idx="minor">
+            <a:schemeClr val="lt1"/>
+          </a:fontRef>
+        </p:style>
+        <p:txBody>
+          <a:bodyPr rtlCol="0" anchor="ctr"/>
+          <a:lstStyle/>
+          <a:p>
+            <a:pPr algn="ctr"/>
+          </a:p>
+        </p:txBody>
+      </p:sp>
+      <p:sp>
+        <p:nvSpPr>
+          <p:cNvPr id="22" name="c1k_t0_t" descr="Editable text; source id c1k_t0_t"/>
           <p:cNvSpPr txBox="1"/>
           <p:nvPr/>
         </p:nvSpPr>
         <p:spPr>
           <a:xfrm>
-            <a:off x="426338" y="1285377"/>
-            <a:ext cx="1514455" cy="197260"/>
+            <a:off x="595312" y="1817687"/>
+            <a:ext cx="1555749" cy="507999"/>
           </a:xfrm>
           <a:prstGeom prst="rect">
             <a:avLst/>
@@ -4130,9 +4519,9 @@
           </a:bodyPr>
           <a:lstStyle/>
           <a:p>
-            <a:pPr algn="l" fontAlgn="base">
+            <a:pPr algn="ctr" fontAlgn="base">
               <a:lnSpc>
-                <a:spcPts val="1465"/>
+                <a:spcPts val="1562"/>
               </a:lnSpc>
               <a:spcBef>
                 <a:spcPts val="0"/>
@@ -4140,7 +4529,7 @@
               <a:spcAft>
                 <a:spcPts val="0"/>
               </a:spcAft>
-              <a:defRPr sz="1002" b="0" i="0" lang="zh-CN" dirty="0">
+              <a:defRPr sz="1074" b="0" i="0" lang="zh-CN" dirty="0">
                 <a:solidFill>
                   <a:srgbClr val="3F4854"/>
                 </a:solidFill>
@@ -4150,7 +4539,7 @@
               </a:defRPr>
             </a:pPr>
             <a:r>
-              <a:rPr sz="1002" b="0" i="0" lang="zh-CN" dirty="0">
+              <a:rPr sz="1074" b="0" i="0" lang="zh-CN" dirty="0">
                 <a:solidFill>
                   <a:srgbClr val="3F4854"/>
                 </a:solidFill>
@@ -4161,7 +4550,7 @@
               <a:t>Ba–Y–Si–O </a:t>
             </a:r>
             <a:r>
-              <a:rPr sz="1002" b="0" i="0" lang="zh-CN" dirty="0">
+              <a:rPr sz="1074" b="0" i="0" lang="zh-CN" dirty="0">
                 <a:solidFill>
                   <a:srgbClr val="3F4854"/>
                 </a:solidFill>
@@ -4174,52 +4563,64 @@
           </a:p>
         </p:txBody>
       </p:sp>
-      <p:cxnSp>
-        <p:nvCxnSpPr>
-          <p:cNvPr id="15" name="c1_r1" descr="Editable line; source id c1_r1"/>
-          <p:cNvCxnSpPr/>
-          <p:nvPr/>
-        </p:nvCxnSpPr>
-        <p:spPr>
-          <a:xfrm>
-            <a:off x="426338" y="1558997"/>
-            <a:ext cx="1514455" cy="0"/>
-          </a:xfrm>
-          <a:prstGeom prst="line">
-            <a:avLst/>
-          </a:prstGeom>
-          <a:ln w="6363">
+      <p:sp>
+        <p:nvSpPr>
+          <p:cNvPr id="23" name="c1k_t1" descr="Editable shape; source id c1k_t1"/>
+          <p:cNvSpPr/>
+          <p:nvPr/>
+        </p:nvSpPr>
+        <p:spPr>
+          <a:xfrm>
+            <a:off x="539749" y="2452687"/>
+            <a:ext cx="1666874" cy="571499"/>
+          </a:xfrm>
+          <a:prstGeom prst="roundRect">
+            <a:avLst>
+              <a:gd name="adj" fmla="val 8333"/>
+            </a:avLst>
+          </a:prstGeom>
+          <a:solidFill>
+            <a:srgbClr val="F7F9FB"/>
+          </a:solidFill>
+          <a:ln w="9524">
             <a:solidFill>
-              <a:srgbClr val="DCE2E8"/>
+              <a:srgbClr val="CBD3DA"/>
             </a:solidFill>
           </a:ln>
           <a:effectLst/>
         </p:spPr>
         <p:style>
-          <a:lnRef idx="2">
+          <a:lnRef idx="1">
             <a:schemeClr val="accent1"/>
           </a:lnRef>
-          <a:fillRef idx="0">
+          <a:fillRef idx="3">
             <a:schemeClr val="accent1"/>
           </a:fillRef>
           <a:effectRef idx="0">
             <a:schemeClr val="accent1"/>
           </a:effectRef>
           <a:fontRef idx="minor">
-            <a:schemeClr val="tx1"/>
+            <a:schemeClr val="lt1"/>
           </a:fontRef>
         </p:style>
-      </p:cxnSp>
-      <p:sp>
-        <p:nvSpPr>
-          <p:cNvPr id="16" name="c1_k1" descr="Editable text; source id c1_k1"/>
+        <p:txBody>
+          <a:bodyPr rtlCol="0" anchor="ctr"/>
+          <a:lstStyle/>
+          <a:p>
+            <a:pPr algn="ctr"/>
+          </a:p>
+        </p:txBody>
+      </p:sp>
+      <p:sp>
+        <p:nvSpPr>
+          <p:cNvPr id="24" name="c1k_t1_t" descr="Editable text; source id c1k_t1_t"/>
           <p:cNvSpPr txBox="1"/>
           <p:nvPr/>
         </p:nvSpPr>
         <p:spPr>
           <a:xfrm>
-            <a:off x="426338" y="1584450"/>
-            <a:ext cx="1514455" cy="197260"/>
+            <a:off x="595312" y="2484437"/>
+            <a:ext cx="1555749" cy="507999"/>
           </a:xfrm>
           <a:prstGeom prst="rect">
             <a:avLst/>
@@ -4233,9 +4634,9 @@
           </a:bodyPr>
           <a:lstStyle/>
           <a:p>
-            <a:pPr algn="l" fontAlgn="base">
+            <a:pPr algn="ctr" fontAlgn="base">
               <a:lnSpc>
-                <a:spcPts val="1465"/>
+                <a:spcPts val="1562"/>
               </a:lnSpc>
               <a:spcBef>
                 <a:spcPts val="0"/>
@@ -4243,7 +4644,7 @@
               <a:spcAft>
                 <a:spcPts val="0"/>
               </a:spcAft>
-              <a:defRPr sz="1002" b="0" i="0" lang="zh-CN" dirty="0">
+              <a:defRPr sz="1074" b="0" i="0" lang="zh-CN" dirty="0">
                 <a:solidFill>
                   <a:srgbClr val="3F4854"/>
                 </a:solidFill>
@@ -4253,7 +4654,7 @@
               </a:defRPr>
             </a:pPr>
             <a:r>
-              <a:rPr sz="1002" b="0" i="0" lang="zh-CN" dirty="0">
+              <a:rPr sz="1074" b="0" i="0" lang="zh-CN" dirty="0">
                 <a:solidFill>
                   <a:srgbClr val="3F4854"/>
                 </a:solidFill>
@@ -4264,7 +4665,7 @@
               <a:t>Ba–Zn–Si–O </a:t>
             </a:r>
             <a:r>
-              <a:rPr sz="1002" b="0" i="0" lang="zh-CN" dirty="0">
+              <a:rPr sz="1074" b="0" i="0" lang="zh-CN" dirty="0">
                 <a:solidFill>
                   <a:srgbClr val="3F4854"/>
                 </a:solidFill>
@@ -4277,52 +4678,64 @@
           </a:p>
         </p:txBody>
       </p:sp>
-      <p:cxnSp>
-        <p:nvCxnSpPr>
-          <p:cNvPr id="17" name="c1_r2" descr="Editable line; source id c1_r2"/>
-          <p:cNvCxnSpPr/>
-          <p:nvPr/>
-        </p:nvCxnSpPr>
-        <p:spPr>
-          <a:xfrm>
-            <a:off x="426338" y="1858070"/>
-            <a:ext cx="1514455" cy="0"/>
-          </a:xfrm>
-          <a:prstGeom prst="line">
-            <a:avLst/>
-          </a:prstGeom>
-          <a:ln w="6363">
+      <p:sp>
+        <p:nvSpPr>
+          <p:cNvPr id="25" name="c1k_t2" descr="Editable shape; source id c1k_t2"/>
+          <p:cNvSpPr/>
+          <p:nvPr/>
+        </p:nvSpPr>
+        <p:spPr>
+          <a:xfrm>
+            <a:off x="539749" y="3127374"/>
+            <a:ext cx="1666874" cy="571499"/>
+          </a:xfrm>
+          <a:prstGeom prst="roundRect">
+            <a:avLst>
+              <a:gd name="adj" fmla="val 8333"/>
+            </a:avLst>
+          </a:prstGeom>
+          <a:solidFill>
+            <a:srgbClr val="F7F9FB"/>
+          </a:solidFill>
+          <a:ln w="9524">
             <a:solidFill>
-              <a:srgbClr val="DCE2E8"/>
+              <a:srgbClr val="CBD3DA"/>
             </a:solidFill>
           </a:ln>
           <a:effectLst/>
         </p:spPr>
         <p:style>
-          <a:lnRef idx="2">
+          <a:lnRef idx="1">
             <a:schemeClr val="accent1"/>
           </a:lnRef>
-          <a:fillRef idx="0">
+          <a:fillRef idx="3">
             <a:schemeClr val="accent1"/>
           </a:fillRef>
           <a:effectRef idx="0">
             <a:schemeClr val="accent1"/>
           </a:effectRef>
           <a:fontRef idx="minor">
-            <a:schemeClr val="tx1"/>
+            <a:schemeClr val="lt1"/>
           </a:fontRef>
         </p:style>
-      </p:cxnSp>
-      <p:sp>
-        <p:nvSpPr>
-          <p:cNvPr id="18" name="c1_k2" descr="Editable text; source id c1_k2"/>
+        <p:txBody>
+          <a:bodyPr rtlCol="0" anchor="ctr"/>
+          <a:lstStyle/>
+          <a:p>
+            <a:pPr algn="ctr"/>
+          </a:p>
+        </p:txBody>
+      </p:sp>
+      <p:sp>
+        <p:nvSpPr>
+          <p:cNvPr id="26" name="c1k_t2_t" descr="Editable text; source id c1k_t2_t"/>
           <p:cNvSpPr txBox="1"/>
           <p:nvPr/>
         </p:nvSpPr>
         <p:spPr>
           <a:xfrm>
-            <a:off x="426338" y="1883523"/>
-            <a:ext cx="1514455" cy="197260"/>
+            <a:off x="595312" y="3159124"/>
+            <a:ext cx="1555749" cy="507999"/>
           </a:xfrm>
           <a:prstGeom prst="rect">
             <a:avLst/>
@@ -4336,9 +4749,9 @@
           </a:bodyPr>
           <a:lstStyle/>
           <a:p>
-            <a:pPr algn="l" fontAlgn="base">
+            <a:pPr algn="ctr" fontAlgn="base">
               <a:lnSpc>
-                <a:spcPts val="1465"/>
+                <a:spcPts val="1562"/>
               </a:lnSpc>
               <a:spcBef>
                 <a:spcPts val="0"/>
@@ -4346,7 +4759,7 @@
               <a:spcAft>
                 <a:spcPts val="0"/>
               </a:spcAft>
-              <a:defRPr sz="1002" b="0" i="0" lang="zh-CN" dirty="0">
+              <a:defRPr sz="1074" b="0" i="0" lang="zh-CN" dirty="0">
                 <a:solidFill>
                   <a:srgbClr val="3F4854"/>
                 </a:solidFill>
@@ -4356,7 +4769,7 @@
               </a:defRPr>
             </a:pPr>
             <a:r>
-              <a:rPr sz="1002" b="0" i="0" lang="zh-CN" dirty="0">
+              <a:rPr sz="1074" b="0" i="0" lang="zh-CN" dirty="0">
                 <a:solidFill>
                   <a:srgbClr val="3F4854"/>
                 </a:solidFill>
@@ -4367,7 +4780,7 @@
               <a:t>Y–Si–O </a:t>
             </a:r>
             <a:r>
-              <a:rPr sz="1002" b="0" i="0" lang="zh-CN" dirty="0">
+              <a:rPr sz="1074" b="0" i="0" lang="zh-CN" dirty="0">
                 <a:solidFill>
                   <a:srgbClr val="3F4854"/>
                 </a:solidFill>
@@ -4382,24 +4795,24 @@
       </p:sp>
       <p:sp>
         <p:nvSpPr>
-          <p:cNvPr id="19" name="c2" descr="Editable shape; source id c2"/>
+          <p:cNvPr id="27" name="c2" descr="Editable shape; source id c2"/>
           <p:cNvSpPr/>
           <p:nvPr/>
         </p:nvSpPr>
         <p:spPr>
           <a:xfrm>
-            <a:off x="2246229" y="833586"/>
-            <a:ext cx="1768985" cy="2036242"/>
+            <a:off x="2619374" y="888999"/>
+            <a:ext cx="1920874" cy="2936874"/>
           </a:xfrm>
           <a:prstGeom prst="roundRect">
             <a:avLst>
-              <a:gd name="adj" fmla="val 3597"/>
+              <a:gd name="adj" fmla="val 3719"/>
             </a:avLst>
           </a:prstGeom>
           <a:solidFill>
             <a:srgbClr val="FFFFFF"/>
           </a:solidFill>
-          <a:ln w="9544">
+          <a:ln w="11112">
             <a:solidFill>
               <a:srgbClr val="5B7592"/>
             </a:solidFill>
@@ -4430,14 +4843,14 @@
       </p:sp>
       <p:sp>
         <p:nvSpPr>
-          <p:cNvPr id="20" name="c2_s" descr="Editable shape; source id c2_s"/>
+          <p:cNvPr id="28" name="c2_a" descr="Editable shape; source id c2_a"/>
           <p:cNvSpPr/>
           <p:nvPr/>
         </p:nvSpPr>
         <p:spPr>
           <a:xfrm>
-            <a:off x="2246229" y="833586"/>
-            <a:ext cx="1768985" cy="50906"/>
+            <a:off x="2619374" y="888999"/>
+            <a:ext cx="1920874" cy="47624"/>
           </a:xfrm>
           <a:prstGeom prst="roundRect">
             <a:avLst>
@@ -4474,41 +4887,628 @@
           </a:p>
         </p:txBody>
       </p:sp>
-      <p:pic>
-        <p:nvPicPr>
-          <p:cNvPr id="21" name="c2_i" descr="exact crop of the generated raster (line motif)"/>
-          <p:cNvPicPr>
-            <a:picLocks noChangeAspect="1"/>
-          </p:cNvPicPr>
-          <p:nvPr/>
-        </p:nvPicPr>
-        <p:blipFill>
-          <a:blip r:embed="rId3"/>
-          <a:stretch>
-            <a:fillRect/>
-          </a:stretch>
-        </p:blipFill>
-        <p:spPr>
-          <a:xfrm>
-            <a:off x="2381373" y="967215"/>
-            <a:ext cx="213320" cy="279983"/>
-          </a:xfrm>
-          <a:prstGeom prst="rect">
-            <a:avLst/>
-          </a:prstGeom>
-          <a:effectLst/>
-        </p:spPr>
-      </p:pic>
-      <p:sp>
-        <p:nvSpPr>
-          <p:cNvPr id="22" name="c2_t" descr="Editable text; source id c2_t"/>
+      <p:cxnSp>
+        <p:nvCxnSpPr>
+          <p:cNvPr id="29" name="c2_g_h0" descr="Editable line; source id c2_g_h0"/>
+          <p:cNvCxnSpPr/>
+          <p:nvPr/>
+        </p:nvCxnSpPr>
+        <p:spPr>
+          <a:xfrm>
+            <a:off x="3476624" y="1103312"/>
+            <a:ext cx="206375" cy="0"/>
+          </a:xfrm>
+          <a:prstGeom prst="line">
+            <a:avLst/>
+          </a:prstGeom>
+          <a:ln w="7937">
+            <a:solidFill>
+              <a:srgbClr val="1F2937"/>
+            </a:solidFill>
+          </a:ln>
+          <a:effectLst/>
+        </p:spPr>
+        <p:style>
+          <a:lnRef idx="2">
+            <a:schemeClr val="accent1"/>
+          </a:lnRef>
+          <a:fillRef idx="0">
+            <a:schemeClr val="accent1"/>
+          </a:fillRef>
+          <a:effectRef idx="0">
+            <a:schemeClr val="accent1"/>
+          </a:effectRef>
+          <a:fontRef idx="minor">
+            <a:schemeClr val="tx1"/>
+          </a:fontRef>
+        </p:style>
+      </p:cxnSp>
+      <p:cxnSp>
+        <p:nvCxnSpPr>
+          <p:cNvPr id="30" name="c2_g_v0" descr="Editable line; source id c2_g_v0"/>
+          <p:cNvCxnSpPr/>
+          <p:nvPr/>
+        </p:nvCxnSpPr>
+        <p:spPr>
+          <a:xfrm>
+            <a:off x="3476624" y="1103312"/>
+            <a:ext cx="0" cy="206375"/>
+          </a:xfrm>
+          <a:prstGeom prst="line">
+            <a:avLst/>
+          </a:prstGeom>
+          <a:ln w="7937">
+            <a:solidFill>
+              <a:srgbClr val="1F2937"/>
+            </a:solidFill>
+          </a:ln>
+          <a:effectLst/>
+        </p:spPr>
+        <p:style>
+          <a:lnRef idx="2">
+            <a:schemeClr val="accent1"/>
+          </a:lnRef>
+          <a:fillRef idx="0">
+            <a:schemeClr val="accent1"/>
+          </a:fillRef>
+          <a:effectRef idx="0">
+            <a:schemeClr val="accent1"/>
+          </a:effectRef>
+          <a:fontRef idx="minor">
+            <a:schemeClr val="tx1"/>
+          </a:fontRef>
+        </p:style>
+      </p:cxnSp>
+      <p:cxnSp>
+        <p:nvCxnSpPr>
+          <p:cNvPr id="31" name="c2_g_h1" descr="Editable line; source id c2_g_h1"/>
+          <p:cNvCxnSpPr/>
+          <p:nvPr/>
+        </p:nvCxnSpPr>
+        <p:spPr>
+          <a:xfrm>
+            <a:off x="3476624" y="1206499"/>
+            <a:ext cx="206375" cy="0"/>
+          </a:xfrm>
+          <a:prstGeom prst="line">
+            <a:avLst/>
+          </a:prstGeom>
+          <a:ln w="7937">
+            <a:solidFill>
+              <a:srgbClr val="1F2937"/>
+            </a:solidFill>
+          </a:ln>
+          <a:effectLst/>
+        </p:spPr>
+        <p:style>
+          <a:lnRef idx="2">
+            <a:schemeClr val="accent1"/>
+          </a:lnRef>
+          <a:fillRef idx="0">
+            <a:schemeClr val="accent1"/>
+          </a:fillRef>
+          <a:effectRef idx="0">
+            <a:schemeClr val="accent1"/>
+          </a:effectRef>
+          <a:fontRef idx="minor">
+            <a:schemeClr val="tx1"/>
+          </a:fontRef>
+        </p:style>
+      </p:cxnSp>
+      <p:cxnSp>
+        <p:nvCxnSpPr>
+          <p:cNvPr id="32" name="c2_g_v1" descr="Editable line; source id c2_g_v1"/>
+          <p:cNvCxnSpPr/>
+          <p:nvPr/>
+        </p:nvCxnSpPr>
+        <p:spPr>
+          <a:xfrm>
+            <a:off x="3579812" y="1103312"/>
+            <a:ext cx="0" cy="206375"/>
+          </a:xfrm>
+          <a:prstGeom prst="line">
+            <a:avLst/>
+          </a:prstGeom>
+          <a:ln w="7937">
+            <a:solidFill>
+              <a:srgbClr val="1F2937"/>
+            </a:solidFill>
+          </a:ln>
+          <a:effectLst/>
+        </p:spPr>
+        <p:style>
+          <a:lnRef idx="2">
+            <a:schemeClr val="accent1"/>
+          </a:lnRef>
+          <a:fillRef idx="0">
+            <a:schemeClr val="accent1"/>
+          </a:fillRef>
+          <a:effectRef idx="0">
+            <a:schemeClr val="accent1"/>
+          </a:effectRef>
+          <a:fontRef idx="minor">
+            <a:schemeClr val="tx1"/>
+          </a:fontRef>
+        </p:style>
+      </p:cxnSp>
+      <p:cxnSp>
+        <p:nvCxnSpPr>
+          <p:cNvPr id="33" name="c2_g_h2" descr="Editable line; source id c2_g_h2"/>
+          <p:cNvCxnSpPr/>
+          <p:nvPr/>
+        </p:nvCxnSpPr>
+        <p:spPr>
+          <a:xfrm>
+            <a:off x="3476624" y="1309687"/>
+            <a:ext cx="206375" cy="0"/>
+          </a:xfrm>
+          <a:prstGeom prst="line">
+            <a:avLst/>
+          </a:prstGeom>
+          <a:ln w="7937">
+            <a:solidFill>
+              <a:srgbClr val="1F2937"/>
+            </a:solidFill>
+          </a:ln>
+          <a:effectLst/>
+        </p:spPr>
+        <p:style>
+          <a:lnRef idx="2">
+            <a:schemeClr val="accent1"/>
+          </a:lnRef>
+          <a:fillRef idx="0">
+            <a:schemeClr val="accent1"/>
+          </a:fillRef>
+          <a:effectRef idx="0">
+            <a:schemeClr val="accent1"/>
+          </a:effectRef>
+          <a:fontRef idx="minor">
+            <a:schemeClr val="tx1"/>
+          </a:fontRef>
+        </p:style>
+      </p:cxnSp>
+      <p:cxnSp>
+        <p:nvCxnSpPr>
+          <p:cNvPr id="34" name="c2_g_v2" descr="Editable line; source id c2_g_v2"/>
+          <p:cNvCxnSpPr/>
+          <p:nvPr/>
+        </p:nvCxnSpPr>
+        <p:spPr>
+          <a:xfrm>
+            <a:off x="3682999" y="1103312"/>
+            <a:ext cx="0" cy="206375"/>
+          </a:xfrm>
+          <a:prstGeom prst="line">
+            <a:avLst/>
+          </a:prstGeom>
+          <a:ln w="7937">
+            <a:solidFill>
+              <a:srgbClr val="1F2937"/>
+            </a:solidFill>
+          </a:ln>
+          <a:effectLst/>
+        </p:spPr>
+        <p:style>
+          <a:lnRef idx="2">
+            <a:schemeClr val="accent1"/>
+          </a:lnRef>
+          <a:fillRef idx="0">
+            <a:schemeClr val="accent1"/>
+          </a:fillRef>
+          <a:effectRef idx="0">
+            <a:schemeClr val="accent1"/>
+          </a:effectRef>
+          <a:fontRef idx="minor">
+            <a:schemeClr val="tx1"/>
+          </a:fontRef>
+        </p:style>
+      </p:cxnSp>
+      <p:sp>
+        <p:nvSpPr>
+          <p:cNvPr id="35" name="c2_g_d00" descr="Editable shape; source id c2_g_d00"/>
+          <p:cNvSpPr/>
+          <p:nvPr/>
+        </p:nvSpPr>
+        <p:spPr>
+          <a:xfrm>
+            <a:off x="3452812" y="1079499"/>
+            <a:ext cx="47624" cy="47624"/>
+          </a:xfrm>
+          <a:prstGeom prst="ellipse">
+            <a:avLst/>
+          </a:prstGeom>
+          <a:solidFill>
+            <a:srgbClr val="FFFFFF"/>
+          </a:solidFill>
+          <a:ln>
+            <a:noFill/>
+          </a:ln>
+          <a:effectLst/>
+        </p:spPr>
+        <p:style>
+          <a:lnRef idx="1">
+            <a:schemeClr val="accent1"/>
+          </a:lnRef>
+          <a:fillRef idx="3">
+            <a:schemeClr val="accent1"/>
+          </a:fillRef>
+          <a:effectRef idx="0">
+            <a:schemeClr val="accent1"/>
+          </a:effectRef>
+          <a:fontRef idx="minor">
+            <a:schemeClr val="lt1"/>
+          </a:fontRef>
+        </p:style>
+        <p:txBody>
+          <a:bodyPr rtlCol="0" anchor="ctr"/>
+          <a:lstStyle/>
+          <a:p>
+            <a:pPr algn="ctr"/>
+          </a:p>
+        </p:txBody>
+      </p:sp>
+      <p:sp>
+        <p:nvSpPr>
+          <p:cNvPr id="36" name="c2_g_d01" descr="Editable shape; source id c2_g_d01"/>
+          <p:cNvSpPr/>
+          <p:nvPr/>
+        </p:nvSpPr>
+        <p:spPr>
+          <a:xfrm>
+            <a:off x="3452812" y="1182687"/>
+            <a:ext cx="47624" cy="47624"/>
+          </a:xfrm>
+          <a:prstGeom prst="ellipse">
+            <a:avLst/>
+          </a:prstGeom>
+          <a:solidFill>
+            <a:srgbClr val="FFFFFF"/>
+          </a:solidFill>
+          <a:ln>
+            <a:noFill/>
+          </a:ln>
+          <a:effectLst/>
+        </p:spPr>
+        <p:style>
+          <a:lnRef idx="1">
+            <a:schemeClr val="accent1"/>
+          </a:lnRef>
+          <a:fillRef idx="3">
+            <a:schemeClr val="accent1"/>
+          </a:fillRef>
+          <a:effectRef idx="0">
+            <a:schemeClr val="accent1"/>
+          </a:effectRef>
+          <a:fontRef idx="minor">
+            <a:schemeClr val="lt1"/>
+          </a:fontRef>
+        </p:style>
+        <p:txBody>
+          <a:bodyPr rtlCol="0" anchor="ctr"/>
+          <a:lstStyle/>
+          <a:p>
+            <a:pPr algn="ctr"/>
+          </a:p>
+        </p:txBody>
+      </p:sp>
+      <p:sp>
+        <p:nvSpPr>
+          <p:cNvPr id="37" name="c2_g_d02" descr="Editable shape; source id c2_g_d02"/>
+          <p:cNvSpPr/>
+          <p:nvPr/>
+        </p:nvSpPr>
+        <p:spPr>
+          <a:xfrm>
+            <a:off x="3452812" y="1285874"/>
+            <a:ext cx="47624" cy="47624"/>
+          </a:xfrm>
+          <a:prstGeom prst="ellipse">
+            <a:avLst/>
+          </a:prstGeom>
+          <a:solidFill>
+            <a:srgbClr val="FFFFFF"/>
+          </a:solidFill>
+          <a:ln>
+            <a:noFill/>
+          </a:ln>
+          <a:effectLst/>
+        </p:spPr>
+        <p:style>
+          <a:lnRef idx="1">
+            <a:schemeClr val="accent1"/>
+          </a:lnRef>
+          <a:fillRef idx="3">
+            <a:schemeClr val="accent1"/>
+          </a:fillRef>
+          <a:effectRef idx="0">
+            <a:schemeClr val="accent1"/>
+          </a:effectRef>
+          <a:fontRef idx="minor">
+            <a:schemeClr val="lt1"/>
+          </a:fontRef>
+        </p:style>
+        <p:txBody>
+          <a:bodyPr rtlCol="0" anchor="ctr"/>
+          <a:lstStyle/>
+          <a:p>
+            <a:pPr algn="ctr"/>
+          </a:p>
+        </p:txBody>
+      </p:sp>
+      <p:sp>
+        <p:nvSpPr>
+          <p:cNvPr id="38" name="c2_g_d10" descr="Editable shape; source id c2_g_d10"/>
+          <p:cNvSpPr/>
+          <p:nvPr/>
+        </p:nvSpPr>
+        <p:spPr>
+          <a:xfrm>
+            <a:off x="3555999" y="1079499"/>
+            <a:ext cx="47624" cy="47624"/>
+          </a:xfrm>
+          <a:prstGeom prst="ellipse">
+            <a:avLst/>
+          </a:prstGeom>
+          <a:solidFill>
+            <a:srgbClr val="FFFFFF"/>
+          </a:solidFill>
+          <a:ln>
+            <a:noFill/>
+          </a:ln>
+          <a:effectLst/>
+        </p:spPr>
+        <p:style>
+          <a:lnRef idx="1">
+            <a:schemeClr val="accent1"/>
+          </a:lnRef>
+          <a:fillRef idx="3">
+            <a:schemeClr val="accent1"/>
+          </a:fillRef>
+          <a:effectRef idx="0">
+            <a:schemeClr val="accent1"/>
+          </a:effectRef>
+          <a:fontRef idx="minor">
+            <a:schemeClr val="lt1"/>
+          </a:fontRef>
+        </p:style>
+        <p:txBody>
+          <a:bodyPr rtlCol="0" anchor="ctr"/>
+          <a:lstStyle/>
+          <a:p>
+            <a:pPr algn="ctr"/>
+          </a:p>
+        </p:txBody>
+      </p:sp>
+      <p:sp>
+        <p:nvSpPr>
+          <p:cNvPr id="39" name="c2_g_d11" descr="Editable shape; source id c2_g_d11"/>
+          <p:cNvSpPr/>
+          <p:nvPr/>
+        </p:nvSpPr>
+        <p:spPr>
+          <a:xfrm>
+            <a:off x="3555999" y="1182687"/>
+            <a:ext cx="47624" cy="47624"/>
+          </a:xfrm>
+          <a:prstGeom prst="ellipse">
+            <a:avLst/>
+          </a:prstGeom>
+          <a:solidFill>
+            <a:srgbClr val="1F2937"/>
+          </a:solidFill>
+          <a:ln>
+            <a:noFill/>
+          </a:ln>
+          <a:effectLst/>
+        </p:spPr>
+        <p:style>
+          <a:lnRef idx="1">
+            <a:schemeClr val="accent1"/>
+          </a:lnRef>
+          <a:fillRef idx="3">
+            <a:schemeClr val="accent1"/>
+          </a:fillRef>
+          <a:effectRef idx="0">
+            <a:schemeClr val="accent1"/>
+          </a:effectRef>
+          <a:fontRef idx="minor">
+            <a:schemeClr val="lt1"/>
+          </a:fontRef>
+        </p:style>
+        <p:txBody>
+          <a:bodyPr rtlCol="0" anchor="ctr"/>
+          <a:lstStyle/>
+          <a:p>
+            <a:pPr algn="ctr"/>
+          </a:p>
+        </p:txBody>
+      </p:sp>
+      <p:sp>
+        <p:nvSpPr>
+          <p:cNvPr id="40" name="c2_g_d12" descr="Editable shape; source id c2_g_d12"/>
+          <p:cNvSpPr/>
+          <p:nvPr/>
+        </p:nvSpPr>
+        <p:spPr>
+          <a:xfrm>
+            <a:off x="3555999" y="1285874"/>
+            <a:ext cx="47624" cy="47624"/>
+          </a:xfrm>
+          <a:prstGeom prst="ellipse">
+            <a:avLst/>
+          </a:prstGeom>
+          <a:solidFill>
+            <a:srgbClr val="FFFFFF"/>
+          </a:solidFill>
+          <a:ln>
+            <a:noFill/>
+          </a:ln>
+          <a:effectLst/>
+        </p:spPr>
+        <p:style>
+          <a:lnRef idx="1">
+            <a:schemeClr val="accent1"/>
+          </a:lnRef>
+          <a:fillRef idx="3">
+            <a:schemeClr val="accent1"/>
+          </a:fillRef>
+          <a:effectRef idx="0">
+            <a:schemeClr val="accent1"/>
+          </a:effectRef>
+          <a:fontRef idx="minor">
+            <a:schemeClr val="lt1"/>
+          </a:fontRef>
+        </p:style>
+        <p:txBody>
+          <a:bodyPr rtlCol="0" anchor="ctr"/>
+          <a:lstStyle/>
+          <a:p>
+            <a:pPr algn="ctr"/>
+          </a:p>
+        </p:txBody>
+      </p:sp>
+      <p:sp>
+        <p:nvSpPr>
+          <p:cNvPr id="41" name="c2_g_d20" descr="Editable shape; source id c2_g_d20"/>
+          <p:cNvSpPr/>
+          <p:nvPr/>
+        </p:nvSpPr>
+        <p:spPr>
+          <a:xfrm>
+            <a:off x="3659187" y="1079499"/>
+            <a:ext cx="47624" cy="47624"/>
+          </a:xfrm>
+          <a:prstGeom prst="ellipse">
+            <a:avLst/>
+          </a:prstGeom>
+          <a:solidFill>
+            <a:srgbClr val="FFFFFF"/>
+          </a:solidFill>
+          <a:ln>
+            <a:noFill/>
+          </a:ln>
+          <a:effectLst/>
+        </p:spPr>
+        <p:style>
+          <a:lnRef idx="1">
+            <a:schemeClr val="accent1"/>
+          </a:lnRef>
+          <a:fillRef idx="3">
+            <a:schemeClr val="accent1"/>
+          </a:fillRef>
+          <a:effectRef idx="0">
+            <a:schemeClr val="accent1"/>
+          </a:effectRef>
+          <a:fontRef idx="minor">
+            <a:schemeClr val="lt1"/>
+          </a:fontRef>
+        </p:style>
+        <p:txBody>
+          <a:bodyPr rtlCol="0" anchor="ctr"/>
+          <a:lstStyle/>
+          <a:p>
+            <a:pPr algn="ctr"/>
+          </a:p>
+        </p:txBody>
+      </p:sp>
+      <p:sp>
+        <p:nvSpPr>
+          <p:cNvPr id="42" name="c2_g_d21" descr="Editable shape; source id c2_g_d21"/>
+          <p:cNvSpPr/>
+          <p:nvPr/>
+        </p:nvSpPr>
+        <p:spPr>
+          <a:xfrm>
+            <a:off x="3659187" y="1182687"/>
+            <a:ext cx="47624" cy="47624"/>
+          </a:xfrm>
+          <a:prstGeom prst="ellipse">
+            <a:avLst/>
+          </a:prstGeom>
+          <a:solidFill>
+            <a:srgbClr val="FFFFFF"/>
+          </a:solidFill>
+          <a:ln>
+            <a:noFill/>
+          </a:ln>
+          <a:effectLst/>
+        </p:spPr>
+        <p:style>
+          <a:lnRef idx="1">
+            <a:schemeClr val="accent1"/>
+          </a:lnRef>
+          <a:fillRef idx="3">
+            <a:schemeClr val="accent1"/>
+          </a:fillRef>
+          <a:effectRef idx="0">
+            <a:schemeClr val="accent1"/>
+          </a:effectRef>
+          <a:fontRef idx="minor">
+            <a:schemeClr val="lt1"/>
+          </a:fontRef>
+        </p:style>
+        <p:txBody>
+          <a:bodyPr rtlCol="0" anchor="ctr"/>
+          <a:lstStyle/>
+          <a:p>
+            <a:pPr algn="ctr"/>
+          </a:p>
+        </p:txBody>
+      </p:sp>
+      <p:sp>
+        <p:nvSpPr>
+          <p:cNvPr id="43" name="c2_g_d22" descr="Editable shape; source id c2_g_d22"/>
+          <p:cNvSpPr/>
+          <p:nvPr/>
+        </p:nvSpPr>
+        <p:spPr>
+          <a:xfrm>
+            <a:off x="3659187" y="1285874"/>
+            <a:ext cx="47624" cy="47624"/>
+          </a:xfrm>
+          <a:prstGeom prst="ellipse">
+            <a:avLst/>
+          </a:prstGeom>
+          <a:solidFill>
+            <a:srgbClr val="FFFFFF"/>
+          </a:solidFill>
+          <a:ln>
+            <a:noFill/>
+          </a:ln>
+          <a:effectLst/>
+        </p:spPr>
+        <p:style>
+          <a:lnRef idx="1">
+            <a:schemeClr val="accent1"/>
+          </a:lnRef>
+          <a:fillRef idx="3">
+            <a:schemeClr val="accent1"/>
+          </a:fillRef>
+          <a:effectRef idx="0">
+            <a:schemeClr val="accent1"/>
+          </a:effectRef>
+          <a:fontRef idx="minor">
+            <a:schemeClr val="lt1"/>
+          </a:fontRef>
+        </p:style>
+        <p:txBody>
+          <a:bodyPr rtlCol="0" anchor="ctr"/>
+          <a:lstStyle/>
+          <a:p>
+            <a:pPr algn="ctr"/>
+          </a:p>
+        </p:txBody>
+      </p:sp>
+      <p:sp>
+        <p:nvSpPr>
+          <p:cNvPr id="44" name="c2_t" descr="Editable text; source id c2_t"/>
           <p:cNvSpPr txBox="1"/>
           <p:nvPr/>
         </p:nvSpPr>
         <p:spPr>
           <a:xfrm>
-            <a:off x="2704384" y="986304"/>
-            <a:ext cx="1209018" cy="248167"/>
+            <a:off x="2746374" y="1444624"/>
+            <a:ext cx="1666874" cy="261937"/>
           </a:xfrm>
           <a:prstGeom prst="rect">
             <a:avLst/>
@@ -4522,9 +5522,9 @@
           </a:bodyPr>
           <a:lstStyle/>
           <a:p>
-            <a:pPr algn="l" fontAlgn="base">
+            <a:pPr algn="ctr" fontAlgn="base">
               <a:lnSpc>
-                <a:spcPts val="1728"/>
+                <a:spcPts val="1999"/>
               </a:lnSpc>
               <a:spcBef>
                 <a:spcPts val="0"/>
@@ -4532,7 +5532,7 @@
               <a:spcAft>
                 <a:spcPts val="0"/>
               </a:spcAft>
-              <a:defRPr sz="1187" b="1" i="0" lang="zh-CN" dirty="0">
+              <a:defRPr sz="1366" b="1" i="0" lang="zh-CN" dirty="0">
                 <a:solidFill>
                   <a:srgbClr val="2B3E57"/>
                 </a:solidFill>
@@ -4542,7 +5542,7 @@
               </a:defRPr>
             </a:pPr>
             <a:r>
-              <a:rPr sz="1187" b="1" i="0" lang="zh-CN" dirty="0">
+              <a:rPr sz="1366" b="1" i="0" lang="zh-CN" dirty="0">
                 <a:solidFill>
                   <a:srgbClr val="2B3E57"/>
                 </a:solidFill>
@@ -4557,14 +5557,62 @@
       </p:sp>
       <p:sp>
         <p:nvSpPr>
-          <p:cNvPr id="23" name="c2_k0" descr="Editable text; source id c2_k0"/>
+          <p:cNvPr id="45" name="c2k_t0" descr="Editable shape; source id c2k_t0"/>
+          <p:cNvSpPr/>
+          <p:nvPr/>
+        </p:nvSpPr>
+        <p:spPr>
+          <a:xfrm>
+            <a:off x="2746374" y="1785937"/>
+            <a:ext cx="1666874" cy="571499"/>
+          </a:xfrm>
+          <a:prstGeom prst="roundRect">
+            <a:avLst>
+              <a:gd name="adj" fmla="val 8333"/>
+            </a:avLst>
+          </a:prstGeom>
+          <a:solidFill>
+            <a:srgbClr val="F7F9FB"/>
+          </a:solidFill>
+          <a:ln w="9524">
+            <a:solidFill>
+              <a:srgbClr val="CBD3DA"/>
+            </a:solidFill>
+          </a:ln>
+          <a:effectLst/>
+        </p:spPr>
+        <p:style>
+          <a:lnRef idx="1">
+            <a:schemeClr val="accent1"/>
+          </a:lnRef>
+          <a:fillRef idx="3">
+            <a:schemeClr val="accent1"/>
+          </a:fillRef>
+          <a:effectRef idx="0">
+            <a:schemeClr val="accent1"/>
+          </a:effectRef>
+          <a:fontRef idx="minor">
+            <a:schemeClr val="lt1"/>
+          </a:fontRef>
+        </p:style>
+        <p:txBody>
+          <a:bodyPr rtlCol="0" anchor="ctr"/>
+          <a:lstStyle/>
+          <a:p>
+            <a:pPr algn="ctr"/>
+          </a:p>
+        </p:txBody>
+      </p:sp>
+      <p:sp>
+        <p:nvSpPr>
+          <p:cNvPr id="46" name="c2k_t0_t" descr="Editable text; source id c2k_t0_t"/>
           <p:cNvSpPr txBox="1"/>
           <p:nvPr/>
         </p:nvSpPr>
         <p:spPr>
           <a:xfrm>
-            <a:off x="2348041" y="1285377"/>
-            <a:ext cx="1565361" cy="197260"/>
+            <a:off x="2801937" y="1817687"/>
+            <a:ext cx="1555749" cy="507999"/>
           </a:xfrm>
           <a:prstGeom prst="rect">
             <a:avLst/>
@@ -4578,9 +5626,9 @@
           </a:bodyPr>
           <a:lstStyle/>
           <a:p>
-            <a:pPr algn="l" fontAlgn="base">
+            <a:pPr algn="ctr" fontAlgn="base">
               <a:lnSpc>
-                <a:spcPts val="1465"/>
+                <a:spcPts val="1562"/>
               </a:lnSpc>
               <a:spcBef>
                 <a:spcPts val="0"/>
@@ -4588,7 +5636,7 @@
               <a:spcAft>
                 <a:spcPts val="0"/>
               </a:spcAft>
-              <a:defRPr sz="1002" b="0" i="0" lang="zh-CN" dirty="0">
+              <a:defRPr sz="1074" b="0" i="0" lang="zh-CN" dirty="0">
                 <a:solidFill>
                   <a:srgbClr val="3F4854"/>
                 </a:solidFill>
@@ -4598,7 +5646,7 @@
               </a:defRPr>
             </a:pPr>
             <a:r>
-              <a:rPr sz="1002" b="0" i="0" lang="zh-CN" dirty="0">
+              <a:rPr sz="1074" b="0" i="0" lang="zh-CN" dirty="0">
                 <a:solidFill>
                   <a:srgbClr val="3F4854"/>
                 </a:solidFill>
@@ -4611,52 +5659,64 @@
           </a:p>
         </p:txBody>
       </p:sp>
-      <p:cxnSp>
-        <p:nvCxnSpPr>
-          <p:cNvPr id="24" name="c2_r1" descr="Editable line; source id c2_r1"/>
-          <p:cNvCxnSpPr/>
-          <p:nvPr/>
-        </p:nvCxnSpPr>
-        <p:spPr>
-          <a:xfrm>
-            <a:off x="2348041" y="1558997"/>
-            <a:ext cx="1565361" cy="0"/>
-          </a:xfrm>
-          <a:prstGeom prst="line">
-            <a:avLst/>
-          </a:prstGeom>
-          <a:ln w="6363">
+      <p:sp>
+        <p:nvSpPr>
+          <p:cNvPr id="47" name="c2k_t1" descr="Editable shape; source id c2k_t1"/>
+          <p:cNvSpPr/>
+          <p:nvPr/>
+        </p:nvSpPr>
+        <p:spPr>
+          <a:xfrm>
+            <a:off x="2746374" y="2452687"/>
+            <a:ext cx="1666874" cy="571499"/>
+          </a:xfrm>
+          <a:prstGeom prst="roundRect">
+            <a:avLst>
+              <a:gd name="adj" fmla="val 8333"/>
+            </a:avLst>
+          </a:prstGeom>
+          <a:solidFill>
+            <a:srgbClr val="F7F9FB"/>
+          </a:solidFill>
+          <a:ln w="9524">
             <a:solidFill>
-              <a:srgbClr val="DCE2E8"/>
+              <a:srgbClr val="CBD3DA"/>
             </a:solidFill>
           </a:ln>
           <a:effectLst/>
         </p:spPr>
         <p:style>
-          <a:lnRef idx="2">
+          <a:lnRef idx="1">
             <a:schemeClr val="accent1"/>
           </a:lnRef>
-          <a:fillRef idx="0">
+          <a:fillRef idx="3">
             <a:schemeClr val="accent1"/>
           </a:fillRef>
           <a:effectRef idx="0">
             <a:schemeClr val="accent1"/>
           </a:effectRef>
           <a:fontRef idx="minor">
-            <a:schemeClr val="tx1"/>
+            <a:schemeClr val="lt1"/>
           </a:fontRef>
         </p:style>
-      </p:cxnSp>
-      <p:sp>
-        <p:nvSpPr>
-          <p:cNvPr id="25" name="c2_k1" descr="Editable text; source id c2_k1"/>
+        <p:txBody>
+          <a:bodyPr rtlCol="0" anchor="ctr"/>
+          <a:lstStyle/>
+          <a:p>
+            <a:pPr algn="ctr"/>
+          </a:p>
+        </p:txBody>
+      </p:sp>
+      <p:sp>
+        <p:nvSpPr>
+          <p:cNvPr id="48" name="c2k_t1_t" descr="Editable text; source id c2k_t1_t"/>
           <p:cNvSpPr txBox="1"/>
           <p:nvPr/>
         </p:nvSpPr>
         <p:spPr>
           <a:xfrm>
-            <a:off x="2348041" y="1584450"/>
-            <a:ext cx="1565361" cy="197260"/>
+            <a:off x="2801937" y="2484437"/>
+            <a:ext cx="1555749" cy="507999"/>
           </a:xfrm>
           <a:prstGeom prst="rect">
             <a:avLst/>
@@ -4670,9 +5730,9 @@
           </a:bodyPr>
           <a:lstStyle/>
           <a:p>
-            <a:pPr algn="l" fontAlgn="base">
+            <a:pPr algn="ctr" fontAlgn="base">
               <a:lnSpc>
-                <a:spcPts val="1465"/>
+                <a:spcPts val="1562"/>
               </a:lnSpc>
               <a:spcBef>
                 <a:spcPts val="0"/>
@@ -4680,7 +5740,7 @@
               <a:spcAft>
                 <a:spcPts val="0"/>
               </a:spcAft>
-              <a:defRPr sz="1002" b="0" i="0" lang="zh-CN" dirty="0">
+              <a:defRPr sz="1074" b="0" i="0" lang="zh-CN" dirty="0">
                 <a:solidFill>
                   <a:srgbClr val="3F4854"/>
                 </a:solidFill>
@@ -4690,7 +5750,7 @@
               </a:defRPr>
             </a:pPr>
             <a:r>
-              <a:rPr sz="1002" b="0" i="0" lang="zh-CN" dirty="0">
+              <a:rPr sz="1074" b="0" i="0" lang="zh-CN" dirty="0">
                 <a:solidFill>
                   <a:srgbClr val="3F4854"/>
                 </a:solidFill>
@@ -4701,7 +5761,7 @@
               <a:t>Zn–Y–</a:t>
             </a:r>
             <a:r>
-              <a:rPr sz="1002" b="0" i="0" lang="zh-CN" dirty="0">
+              <a:rPr sz="1074" b="0" i="0" lang="zh-CN" dirty="0">
                 <a:solidFill>
                   <a:srgbClr val="3F4854"/>
                 </a:solidFill>
@@ -4714,52 +5774,64 @@
           </a:p>
         </p:txBody>
       </p:sp>
-      <p:cxnSp>
-        <p:nvCxnSpPr>
-          <p:cNvPr id="26" name="c2_r2" descr="Editable line; source id c2_r2"/>
-          <p:cNvCxnSpPr/>
-          <p:nvPr/>
-        </p:nvCxnSpPr>
-        <p:spPr>
-          <a:xfrm>
-            <a:off x="2348041" y="1858070"/>
-            <a:ext cx="1565361" cy="0"/>
-          </a:xfrm>
-          <a:prstGeom prst="line">
-            <a:avLst/>
-          </a:prstGeom>
-          <a:ln w="6363">
+      <p:sp>
+        <p:nvSpPr>
+          <p:cNvPr id="49" name="c2k_t2" descr="Editable shape; source id c2k_t2"/>
+          <p:cNvSpPr/>
+          <p:nvPr/>
+        </p:nvSpPr>
+        <p:spPr>
+          <a:xfrm>
+            <a:off x="2746374" y="3127374"/>
+            <a:ext cx="1666874" cy="571499"/>
+          </a:xfrm>
+          <a:prstGeom prst="roundRect">
+            <a:avLst>
+              <a:gd name="adj" fmla="val 8333"/>
+            </a:avLst>
+          </a:prstGeom>
+          <a:solidFill>
+            <a:srgbClr val="F7F9FB"/>
+          </a:solidFill>
+          <a:ln w="9524">
             <a:solidFill>
-              <a:srgbClr val="DCE2E8"/>
+              <a:srgbClr val="CBD3DA"/>
             </a:solidFill>
           </a:ln>
           <a:effectLst/>
         </p:spPr>
         <p:style>
-          <a:lnRef idx="2">
+          <a:lnRef idx="1">
             <a:schemeClr val="accent1"/>
           </a:lnRef>
-          <a:fillRef idx="0">
+          <a:fillRef idx="3">
             <a:schemeClr val="accent1"/>
           </a:fillRef>
           <a:effectRef idx="0">
             <a:schemeClr val="accent1"/>
           </a:effectRef>
           <a:fontRef idx="minor">
-            <a:schemeClr val="tx1"/>
+            <a:schemeClr val="lt1"/>
           </a:fontRef>
         </p:style>
-      </p:cxnSp>
-      <p:sp>
-        <p:nvSpPr>
-          <p:cNvPr id="27" name="c2_k2" descr="Editable text; source id c2_k2"/>
+        <p:txBody>
+          <a:bodyPr rtlCol="0" anchor="ctr"/>
+          <a:lstStyle/>
+          <a:p>
+            <a:pPr algn="ctr"/>
+          </a:p>
+        </p:txBody>
+      </p:sp>
+      <p:sp>
+        <p:nvSpPr>
+          <p:cNvPr id="50" name="c2k_t2_t" descr="Editable text; source id c2k_t2_t"/>
           <p:cNvSpPr txBox="1"/>
           <p:nvPr/>
         </p:nvSpPr>
         <p:spPr>
           <a:xfrm>
-            <a:off x="2348041" y="1883523"/>
-            <a:ext cx="1565361" cy="197260"/>
+            <a:off x="2801937" y="3159124"/>
+            <a:ext cx="1555749" cy="507999"/>
           </a:xfrm>
           <a:prstGeom prst="rect">
             <a:avLst/>
@@ -4773,9 +5845,9 @@
           </a:bodyPr>
           <a:lstStyle/>
           <a:p>
-            <a:pPr algn="l" fontAlgn="base">
+            <a:pPr algn="ctr" fontAlgn="base">
               <a:lnSpc>
-                <a:spcPts val="1465"/>
+                <a:spcPts val="1562"/>
               </a:lnSpc>
               <a:spcBef>
                 <a:spcPts val="0"/>
@@ -4783,7 +5855,7 @@
               <a:spcAft>
                 <a:spcPts val="0"/>
               </a:spcAft>
-              <a:defRPr sz="1002" b="0" i="0" lang="zh-CN" dirty="0">
+              <a:defRPr sz="1074" b="0" i="0" lang="zh-CN" dirty="0">
                 <a:solidFill>
                   <a:srgbClr val="3F4854"/>
                 </a:solidFill>
@@ -4793,7 +5865,7 @@
               </a:defRPr>
             </a:pPr>
             <a:r>
-              <a:rPr sz="1002" b="0" i="0" lang="zh-CN" dirty="0">
+              <a:rPr sz="1074" b="0" i="0" lang="zh-CN" dirty="0">
                 <a:solidFill>
                   <a:srgbClr val="3F4854"/>
                 </a:solidFill>
@@ -4808,24 +5880,24 @@
       </p:sp>
       <p:sp>
         <p:nvSpPr>
-          <p:cNvPr id="28" name="c3" descr="Editable shape; source id c3"/>
+          <p:cNvPr id="51" name="c3" descr="Editable shape; source id c3"/>
           <p:cNvSpPr/>
           <p:nvPr/>
         </p:nvSpPr>
         <p:spPr>
           <a:xfrm>
-            <a:off x="4180659" y="833586"/>
-            <a:ext cx="1768985" cy="2036242"/>
+            <a:off x="4825999" y="888999"/>
+            <a:ext cx="1920874" cy="2936874"/>
           </a:xfrm>
           <a:prstGeom prst="roundRect">
             <a:avLst>
-              <a:gd name="adj" fmla="val 3597"/>
+              <a:gd name="adj" fmla="val 3719"/>
             </a:avLst>
           </a:prstGeom>
           <a:solidFill>
             <a:srgbClr val="FFFFFF"/>
           </a:solidFill>
-          <a:ln w="9544">
+          <a:ln w="11112">
             <a:solidFill>
               <a:srgbClr val="5B7592"/>
             </a:solidFill>
@@ -4856,14 +5928,14 @@
       </p:sp>
       <p:sp>
         <p:nvSpPr>
-          <p:cNvPr id="29" name="c3_s" descr="Editable shape; source id c3_s"/>
+          <p:cNvPr id="52" name="c3_a" descr="Editable shape; source id c3_a"/>
           <p:cNvSpPr/>
           <p:nvPr/>
         </p:nvSpPr>
         <p:spPr>
           <a:xfrm>
-            <a:off x="4180659" y="833586"/>
-            <a:ext cx="1768985" cy="50906"/>
+            <a:off x="4825999" y="888999"/>
+            <a:ext cx="1920874" cy="47624"/>
           </a:xfrm>
           <a:prstGeom prst="roundRect">
             <a:avLst>
@@ -4900,41 +5972,232 @@
           </a:p>
         </p:txBody>
       </p:sp>
-      <p:pic>
-        <p:nvPicPr>
-          <p:cNvPr id="30" name="c3_i" descr="exact crop of the generated raster (line motif)"/>
-          <p:cNvPicPr>
-            <a:picLocks noChangeAspect="1"/>
-          </p:cNvPicPr>
-          <p:nvPr/>
-        </p:nvPicPr>
-        <p:blipFill>
-          <a:blip r:embed="rId4"/>
-          <a:stretch>
-            <a:fillRect/>
-          </a:stretch>
-        </p:blipFill>
-        <p:spPr>
-          <a:xfrm>
-            <a:off x="4315803" y="967215"/>
-            <a:ext cx="213320" cy="279983"/>
-          </a:xfrm>
-          <a:prstGeom prst="rect">
-            <a:avLst/>
-          </a:prstGeom>
-          <a:effectLst/>
-        </p:spPr>
-      </p:pic>
-      <p:sp>
-        <p:nvSpPr>
-          <p:cNvPr id="31" name="c3_t" descr="Editable text; source id c3_t"/>
+      <p:cxnSp>
+        <p:nvCxnSpPr>
+          <p:cNvPr id="53" name="c3_g_f_0" descr="Editable line; source id c3_g_f_0"/>
+          <p:cNvCxnSpPr/>
+          <p:nvPr/>
+        </p:nvCxnSpPr>
+        <p:spPr>
+          <a:xfrm>
+            <a:off x="5667374" y="1103312"/>
+            <a:ext cx="238125" cy="0"/>
+          </a:xfrm>
+          <a:prstGeom prst="line">
+            <a:avLst/>
+          </a:prstGeom>
+          <a:ln w="7937">
+            <a:solidFill>
+              <a:srgbClr val="1F2937"/>
+            </a:solidFill>
+          </a:ln>
+          <a:effectLst/>
+        </p:spPr>
+        <p:style>
+          <a:lnRef idx="2">
+            <a:schemeClr val="accent1"/>
+          </a:lnRef>
+          <a:fillRef idx="0">
+            <a:schemeClr val="accent1"/>
+          </a:fillRef>
+          <a:effectRef idx="0">
+            <a:schemeClr val="accent1"/>
+          </a:effectRef>
+          <a:fontRef idx="minor">
+            <a:schemeClr val="tx1"/>
+          </a:fontRef>
+        </p:style>
+      </p:cxnSp>
+      <p:cxnSp>
+        <p:nvCxnSpPr>
+          <p:cNvPr id="54" name="c3_g_f_1" descr="Editable line; source id c3_g_f_1"/>
+          <p:cNvCxnSpPr/>
+          <p:nvPr/>
+        </p:nvCxnSpPr>
+        <p:spPr>
+          <a:xfrm flipH="1">
+            <a:off x="5810249" y="1103312"/>
+            <a:ext cx="95250" cy="127000"/>
+          </a:xfrm>
+          <a:prstGeom prst="line">
+            <a:avLst/>
+          </a:prstGeom>
+          <a:ln w="7937">
+            <a:solidFill>
+              <a:srgbClr val="1F2937"/>
+            </a:solidFill>
+          </a:ln>
+          <a:effectLst/>
+        </p:spPr>
+        <p:style>
+          <a:lnRef idx="2">
+            <a:schemeClr val="accent1"/>
+          </a:lnRef>
+          <a:fillRef idx="0">
+            <a:schemeClr val="accent1"/>
+          </a:fillRef>
+          <a:effectRef idx="0">
+            <a:schemeClr val="accent1"/>
+          </a:effectRef>
+          <a:fontRef idx="minor">
+            <a:schemeClr val="tx1"/>
+          </a:fontRef>
+        </p:style>
+      </p:cxnSp>
+      <p:cxnSp>
+        <p:nvCxnSpPr>
+          <p:cNvPr id="55" name="c3_g_f_2" descr="Editable line; source id c3_g_f_2"/>
+          <p:cNvCxnSpPr/>
+          <p:nvPr/>
+        </p:nvCxnSpPr>
+        <p:spPr>
+          <a:xfrm>
+            <a:off x="5810249" y="1230312"/>
+            <a:ext cx="0" cy="95250"/>
+          </a:xfrm>
+          <a:prstGeom prst="line">
+            <a:avLst/>
+          </a:prstGeom>
+          <a:ln w="7937">
+            <a:solidFill>
+              <a:srgbClr val="1F2937"/>
+            </a:solidFill>
+          </a:ln>
+          <a:effectLst/>
+        </p:spPr>
+        <p:style>
+          <a:lnRef idx="2">
+            <a:schemeClr val="accent1"/>
+          </a:lnRef>
+          <a:fillRef idx="0">
+            <a:schemeClr val="accent1"/>
+          </a:fillRef>
+          <a:effectRef idx="0">
+            <a:schemeClr val="accent1"/>
+          </a:effectRef>
+          <a:fontRef idx="minor">
+            <a:schemeClr val="tx1"/>
+          </a:fontRef>
+        </p:style>
+      </p:cxnSp>
+      <p:cxnSp>
+        <p:nvCxnSpPr>
+          <p:cNvPr id="56" name="c3_g_f_3" descr="Editable line; source id c3_g_f_3"/>
+          <p:cNvCxnSpPr/>
+          <p:nvPr/>
+        </p:nvCxnSpPr>
+        <p:spPr>
+          <a:xfrm flipH="1">
+            <a:off x="5762624" y="1325562"/>
+            <a:ext cx="47625" cy="0"/>
+          </a:xfrm>
+          <a:prstGeom prst="line">
+            <a:avLst/>
+          </a:prstGeom>
+          <a:ln w="7937">
+            <a:solidFill>
+              <a:srgbClr val="1F2937"/>
+            </a:solidFill>
+          </a:ln>
+          <a:effectLst/>
+        </p:spPr>
+        <p:style>
+          <a:lnRef idx="2">
+            <a:schemeClr val="accent1"/>
+          </a:lnRef>
+          <a:fillRef idx="0">
+            <a:schemeClr val="accent1"/>
+          </a:fillRef>
+          <a:effectRef idx="0">
+            <a:schemeClr val="accent1"/>
+          </a:effectRef>
+          <a:fontRef idx="minor">
+            <a:schemeClr val="tx1"/>
+          </a:fontRef>
+        </p:style>
+      </p:cxnSp>
+      <p:cxnSp>
+        <p:nvCxnSpPr>
+          <p:cNvPr id="57" name="c3_g_f_4" descr="Editable line; source id c3_g_f_4"/>
+          <p:cNvCxnSpPr/>
+          <p:nvPr/>
+        </p:nvCxnSpPr>
+        <p:spPr>
+          <a:xfrm flipV="1">
+            <a:off x="5762624" y="1230312"/>
+            <a:ext cx="0" cy="95250"/>
+          </a:xfrm>
+          <a:prstGeom prst="line">
+            <a:avLst/>
+          </a:prstGeom>
+          <a:ln w="7937">
+            <a:solidFill>
+              <a:srgbClr val="1F2937"/>
+            </a:solidFill>
+          </a:ln>
+          <a:effectLst/>
+        </p:spPr>
+        <p:style>
+          <a:lnRef idx="2">
+            <a:schemeClr val="accent1"/>
+          </a:lnRef>
+          <a:fillRef idx="0">
+            <a:schemeClr val="accent1"/>
+          </a:fillRef>
+          <a:effectRef idx="0">
+            <a:schemeClr val="accent1"/>
+          </a:effectRef>
+          <a:fontRef idx="minor">
+            <a:schemeClr val="tx1"/>
+          </a:fontRef>
+        </p:style>
+      </p:cxnSp>
+      <p:cxnSp>
+        <p:nvCxnSpPr>
+          <p:cNvPr id="58" name="c3_g_f_5" descr="Editable line; source id c3_g_f_5"/>
+          <p:cNvCxnSpPr/>
+          <p:nvPr/>
+        </p:nvCxnSpPr>
+        <p:spPr>
+          <a:xfrm flipH="1" flipV="1">
+            <a:off x="5667374" y="1103312"/>
+            <a:ext cx="95250" cy="127000"/>
+          </a:xfrm>
+          <a:prstGeom prst="line">
+            <a:avLst/>
+          </a:prstGeom>
+          <a:ln w="7937">
+            <a:solidFill>
+              <a:srgbClr val="1F2937"/>
+            </a:solidFill>
+          </a:ln>
+          <a:effectLst/>
+        </p:spPr>
+        <p:style>
+          <a:lnRef idx="2">
+            <a:schemeClr val="accent1"/>
+          </a:lnRef>
+          <a:fillRef idx="0">
+            <a:schemeClr val="accent1"/>
+          </a:fillRef>
+          <a:effectRef idx="0">
+            <a:schemeClr val="accent1"/>
+          </a:effectRef>
+          <a:fontRef idx="minor">
+            <a:schemeClr val="tx1"/>
+          </a:fontRef>
+        </p:style>
+      </p:cxnSp>
+      <p:sp>
+        <p:nvSpPr>
+          <p:cNvPr id="59" name="c3_t" descr="Editable text; source id c3_t"/>
           <p:cNvSpPr txBox="1"/>
           <p:nvPr/>
         </p:nvSpPr>
         <p:spPr>
           <a:xfrm>
-            <a:off x="4638814" y="986304"/>
-            <a:ext cx="1209018" cy="248167"/>
+            <a:off x="4952999" y="1444624"/>
+            <a:ext cx="1666874" cy="261937"/>
           </a:xfrm>
           <a:prstGeom prst="rect">
             <a:avLst/>
@@ -4948,9 +6211,9 @@
           </a:bodyPr>
           <a:lstStyle/>
           <a:p>
-            <a:pPr algn="l" fontAlgn="base">
+            <a:pPr algn="ctr" fontAlgn="base">
               <a:lnSpc>
-                <a:spcPts val="1728"/>
+                <a:spcPts val="1999"/>
               </a:lnSpc>
               <a:spcBef>
                 <a:spcPts val="0"/>
@@ -4958,7 +6221,7 @@
               <a:spcAft>
                 <a:spcPts val="0"/>
               </a:spcAft>
-              <a:defRPr sz="1187" b="1" i="0" lang="zh-CN" dirty="0">
+              <a:defRPr sz="1366" b="1" i="0" lang="zh-CN" dirty="0">
                 <a:solidFill>
                   <a:srgbClr val="2B3E57"/>
                 </a:solidFill>
@@ -4968,7 +6231,7 @@
               </a:defRPr>
             </a:pPr>
             <a:r>
-              <a:rPr sz="1187" b="1" i="0" lang="zh-CN" dirty="0">
+              <a:rPr sz="1366" b="1" i="0" lang="zh-CN" dirty="0">
                 <a:solidFill>
                   <a:srgbClr val="2B3E57"/>
                 </a:solidFill>
@@ -4976,21 +6239,69 @@
                 <a:ea typeface="Noto Sans CJK SC"/>
                 <a:cs typeface="Noto Sans CJK SC"/>
               </a:rPr>
-              <a:t>模型筛选的前驱体</a:t>
+              <a:t>前驱体筛选</a:t>
             </a:r>
           </a:p>
         </p:txBody>
       </p:sp>
       <p:sp>
         <p:nvSpPr>
-          <p:cNvPr id="32" name="c3_k0" descr="Editable text; source id c3_k0"/>
+          <p:cNvPr id="60" name="c3k_t0" descr="Editable shape; source id c3k_t0"/>
+          <p:cNvSpPr/>
+          <p:nvPr/>
+        </p:nvSpPr>
+        <p:spPr>
+          <a:xfrm>
+            <a:off x="4952999" y="1785937"/>
+            <a:ext cx="1666874" cy="571499"/>
+          </a:xfrm>
+          <a:prstGeom prst="roundRect">
+            <a:avLst>
+              <a:gd name="adj" fmla="val 8333"/>
+            </a:avLst>
+          </a:prstGeom>
+          <a:solidFill>
+            <a:srgbClr val="F7F9FB"/>
+          </a:solidFill>
+          <a:ln w="9524">
+            <a:solidFill>
+              <a:srgbClr val="CBD3DA"/>
+            </a:solidFill>
+          </a:ln>
+          <a:effectLst/>
+        </p:spPr>
+        <p:style>
+          <a:lnRef idx="1">
+            <a:schemeClr val="accent1"/>
+          </a:lnRef>
+          <a:fillRef idx="3">
+            <a:schemeClr val="accent1"/>
+          </a:fillRef>
+          <a:effectRef idx="0">
+            <a:schemeClr val="accent1"/>
+          </a:effectRef>
+          <a:fontRef idx="minor">
+            <a:schemeClr val="lt1"/>
+          </a:fontRef>
+        </p:style>
+        <p:txBody>
+          <a:bodyPr rtlCol="0" anchor="ctr"/>
+          <a:lstStyle/>
+          <a:p>
+            <a:pPr algn="ctr"/>
+          </a:p>
+        </p:txBody>
+      </p:sp>
+      <p:sp>
+        <p:nvSpPr>
+          <p:cNvPr id="61" name="c3k_t0_t" descr="Editable text; source id c3k_t0_t"/>
           <p:cNvSpPr txBox="1"/>
           <p:nvPr/>
         </p:nvSpPr>
         <p:spPr>
           <a:xfrm>
-            <a:off x="4282471" y="1285377"/>
-            <a:ext cx="1565361" cy="197260"/>
+            <a:off x="5008562" y="1817687"/>
+            <a:ext cx="1555749" cy="507999"/>
           </a:xfrm>
           <a:prstGeom prst="rect">
             <a:avLst/>
@@ -5004,9 +6315,9 @@
           </a:bodyPr>
           <a:lstStyle/>
           <a:p>
-            <a:pPr algn="l" fontAlgn="base">
+            <a:pPr algn="ctr" fontAlgn="base">
               <a:lnSpc>
-                <a:spcPts val="1177"/>
+                <a:spcPts val="1265"/>
               </a:lnSpc>
               <a:spcBef>
                 <a:spcPts val="0"/>
@@ -5014,7 +6325,7 @@
               <a:spcAft>
                 <a:spcPts val="0"/>
               </a:spcAft>
-              <a:defRPr sz="1002" b="0" i="0" lang="zh-CN" dirty="0">
+              <a:defRPr sz="1074" b="0" i="0" lang="zh-CN" dirty="0">
                 <a:solidFill>
                   <a:srgbClr val="3F4854"/>
                 </a:solidFill>
@@ -5024,7 +6335,7 @@
               </a:defRPr>
             </a:pPr>
             <a:r>
-              <a:rPr sz="1002" b="0" i="0" lang="zh-CN" dirty="0">
+              <a:rPr sz="1074" b="0" i="0" lang="zh-CN" dirty="0">
                 <a:solidFill>
                   <a:srgbClr val="3F4854"/>
                 </a:solidFill>
@@ -5037,52 +6348,64 @@
           </a:p>
         </p:txBody>
       </p:sp>
-      <p:cxnSp>
-        <p:nvCxnSpPr>
-          <p:cNvPr id="33" name="c3_r1" descr="Editable line; source id c3_r1"/>
-          <p:cNvCxnSpPr/>
-          <p:nvPr/>
-        </p:nvCxnSpPr>
-        <p:spPr>
-          <a:xfrm>
-            <a:off x="4282471" y="1558997"/>
-            <a:ext cx="1565361" cy="0"/>
-          </a:xfrm>
-          <a:prstGeom prst="line">
-            <a:avLst/>
-          </a:prstGeom>
-          <a:ln w="6363">
+      <p:sp>
+        <p:nvSpPr>
+          <p:cNvPr id="62" name="c3k_t1" descr="Editable shape; source id c3k_t1"/>
+          <p:cNvSpPr/>
+          <p:nvPr/>
+        </p:nvSpPr>
+        <p:spPr>
+          <a:xfrm>
+            <a:off x="4952999" y="2452687"/>
+            <a:ext cx="1666874" cy="571499"/>
+          </a:xfrm>
+          <a:prstGeom prst="roundRect">
+            <a:avLst>
+              <a:gd name="adj" fmla="val 8333"/>
+            </a:avLst>
+          </a:prstGeom>
+          <a:solidFill>
+            <a:srgbClr val="F7F9FB"/>
+          </a:solidFill>
+          <a:ln w="9524">
             <a:solidFill>
-              <a:srgbClr val="DCE2E8"/>
+              <a:srgbClr val="CBD3DA"/>
             </a:solidFill>
           </a:ln>
           <a:effectLst/>
         </p:spPr>
         <p:style>
-          <a:lnRef idx="2">
+          <a:lnRef idx="1">
             <a:schemeClr val="accent1"/>
           </a:lnRef>
-          <a:fillRef idx="0">
+          <a:fillRef idx="3">
             <a:schemeClr val="accent1"/>
           </a:fillRef>
           <a:effectRef idx="0">
             <a:schemeClr val="accent1"/>
           </a:effectRef>
           <a:fontRef idx="minor">
-            <a:schemeClr val="tx1"/>
+            <a:schemeClr val="lt1"/>
           </a:fontRef>
         </p:style>
-      </p:cxnSp>
-      <p:sp>
-        <p:nvSpPr>
-          <p:cNvPr id="34" name="c3_k1" descr="Editable text; source id c3_k1"/>
+        <p:txBody>
+          <a:bodyPr rtlCol="0" anchor="ctr"/>
+          <a:lstStyle/>
+          <a:p>
+            <a:pPr algn="ctr"/>
+          </a:p>
+        </p:txBody>
+      </p:sp>
+      <p:sp>
+        <p:nvSpPr>
+          <p:cNvPr id="63" name="c3k_t1_t" descr="Editable text; source id c3k_t1_t"/>
           <p:cNvSpPr txBox="1"/>
           <p:nvPr/>
         </p:nvSpPr>
         <p:spPr>
           <a:xfrm>
-            <a:off x="4282471" y="1584450"/>
-            <a:ext cx="1565361" cy="197260"/>
+            <a:off x="5008562" y="2484437"/>
+            <a:ext cx="1555749" cy="507999"/>
           </a:xfrm>
           <a:prstGeom prst="rect">
             <a:avLst/>
@@ -5096,9 +6419,9 @@
           </a:bodyPr>
           <a:lstStyle/>
           <a:p>
-            <a:pPr algn="l" fontAlgn="base">
+            <a:pPr algn="ctr" fontAlgn="base">
               <a:lnSpc>
-                <a:spcPts val="1177"/>
+                <a:spcPts val="1265"/>
               </a:lnSpc>
               <a:spcBef>
                 <a:spcPts val="0"/>
@@ -5106,7 +6429,7 @@
               <a:spcAft>
                 <a:spcPts val="0"/>
               </a:spcAft>
-              <a:defRPr sz="1002" b="0" i="0" lang="zh-CN" dirty="0">
+              <a:defRPr sz="1074" b="0" i="0" lang="zh-CN" dirty="0">
                 <a:solidFill>
                   <a:srgbClr val="3F4854"/>
                 </a:solidFill>
@@ -5116,7 +6439,7 @@
               </a:defRPr>
             </a:pPr>
             <a:r>
-              <a:rPr sz="1002" b="0" i="0" lang="zh-CN" dirty="0">
+              <a:rPr sz="1074" b="0" i="0" lang="zh-CN" dirty="0">
                 <a:solidFill>
                   <a:srgbClr val="3F4854"/>
                 </a:solidFill>
@@ -5131,26 +6454,26 @@
       </p:sp>
       <p:sp>
         <p:nvSpPr>
-          <p:cNvPr id="35" name="c3_tg" descr="Editable shape; source id c3_tg"/>
+          <p:cNvPr id="64" name="c3k_t2" descr="Editable shape; source id c3k_t2"/>
           <p:cNvSpPr/>
           <p:nvPr/>
         </p:nvSpPr>
         <p:spPr>
           <a:xfrm>
-            <a:off x="4759715" y="2526212"/>
-            <a:ext cx="1088116" cy="267256"/>
+            <a:off x="4952999" y="3127374"/>
+            <a:ext cx="1666874" cy="571499"/>
           </a:xfrm>
           <a:prstGeom prst="roundRect">
             <a:avLst>
-              <a:gd name="adj" fmla="val 50000"/>
+              <a:gd name="adj" fmla="val 8333"/>
             </a:avLst>
           </a:prstGeom>
           <a:solidFill>
-            <a:srgbClr val="FFF6E3"/>
+            <a:srgbClr val="F7F9FB"/>
           </a:solidFill>
-          <a:ln w="9544">
+          <a:ln w="9524">
             <a:solidFill>
-              <a:srgbClr val="C48A24"/>
+              <a:srgbClr val="CBD3DA"/>
             </a:solidFill>
           </a:ln>
           <a:effectLst/>
@@ -5179,14 +6502,14 @@
       </p:sp>
       <p:sp>
         <p:nvSpPr>
-          <p:cNvPr id="36" name="c3_tgt" descr="Editable text; source id c3_tgt"/>
+          <p:cNvPr id="65" name="c3k_t2_t" descr="Editable text; source id c3k_t2_t"/>
           <p:cNvSpPr txBox="1"/>
           <p:nvPr/>
         </p:nvSpPr>
         <p:spPr>
           <a:xfrm>
-            <a:off x="4810622" y="2551665"/>
-            <a:ext cx="986304" cy="216350"/>
+            <a:off x="5008562" y="3159124"/>
+            <a:ext cx="1555749" cy="507999"/>
           </a:xfrm>
           <a:prstGeom prst="rect">
             <a:avLst/>
@@ -5202,7 +6525,7 @@
           <a:p>
             <a:pPr algn="ctr" fontAlgn="base">
               <a:lnSpc>
-                <a:spcPts val="1390"/>
+                <a:spcPts val="1562"/>
               </a:lnSpc>
               <a:spcBef>
                 <a:spcPts val="0"/>
@@ -5210,9 +6533,9 @@
               <a:spcAft>
                 <a:spcPts val="0"/>
               </a:spcAft>
-              <a:defRPr sz="951" b="1" i="0" lang="zh-CN" dirty="0">
+              <a:defRPr sz="1074" b="0" i="0" lang="zh-CN" dirty="0">
                 <a:solidFill>
-                  <a:srgbClr val="7A5410"/>
+                  <a:srgbClr val="3F4854"/>
                 </a:solidFill>
                 <a:latin typeface="Noto Sans CJK SC"/>
                 <a:ea typeface="Noto Sans CJK SC"/>
@@ -5220,61 +6543,39 @@
               </a:defRPr>
             </a:pPr>
             <a:r>
-              <a:rPr sz="951" b="1" i="0" lang="zh-CN" dirty="0">
+              <a:rPr sz="1074" b="0" i="0" lang="zh-CN" dirty="0">
                 <a:solidFill>
-                  <a:srgbClr val="7A5410"/>
+                  <a:srgbClr val="3F4854"/>
                 </a:solidFill>
                 <a:latin typeface="Noto Sans CJK SC"/>
                 <a:ea typeface="Noto Sans CJK SC"/>
                 <a:cs typeface="Noto Sans CJK SC"/>
               </a:rPr>
-              <a:t>模型排序</a:t>
+              <a:t>模型排序的候选</a:t>
             </a:r>
-            <a:r>
-              <a:rPr sz="951" b="1" i="0" lang="zh-CN" dirty="0">
-                <a:solidFill>
-                  <a:srgbClr val="7A5410"/>
-                </a:solidFill>
-                <a:latin typeface="DejaVu Sans"/>
-                <a:ea typeface="DejaVu Sans"/>
-                <a:cs typeface="DejaVu Sans"/>
-              </a:rPr>
-              <a:t> ≠ </a:t>
-            </a:r>
-            <a:r>
-              <a:rPr sz="951" b="1" i="0" lang="zh-CN" dirty="0">
-                <a:solidFill>
-                  <a:srgbClr val="7A5410"/>
-                </a:solidFill>
-                <a:latin typeface="Noto Sans CJK SC"/>
-                <a:ea typeface="Noto Sans CJK SC"/>
-                <a:cs typeface="Noto Sans CJK SC"/>
-              </a:rPr>
-              <a:t>验证</a:t>
-            </a:r>
-          </a:p>
-        </p:txBody>
-      </p:sp>
-      <p:sp>
-        <p:nvSpPr>
-          <p:cNvPr id="37" name="l1" descr="Editable shape; source id l1"/>
+          </a:p>
+        </p:txBody>
+      </p:sp>
+      <p:sp>
+        <p:nvSpPr>
+          <p:cNvPr id="66" name="l1" descr="Editable shape; source id l1"/>
           <p:cNvSpPr/>
           <p:nvPr/>
         </p:nvSpPr>
         <p:spPr>
           <a:xfrm>
-            <a:off x="6605060" y="668141"/>
-            <a:ext cx="2335315" cy="1240835"/>
+            <a:off x="7143749" y="888999"/>
+            <a:ext cx="2619374" cy="1396999"/>
           </a:xfrm>
           <a:prstGeom prst="roundRect">
             <a:avLst>
-              <a:gd name="adj" fmla="val 5128"/>
+              <a:gd name="adj" fmla="val 5113"/>
             </a:avLst>
           </a:prstGeom>
           <a:solidFill>
             <a:srgbClr val="FFFFFF"/>
           </a:solidFill>
-          <a:ln w="9544">
+          <a:ln w="11112">
             <a:solidFill>
               <a:srgbClr val="1F7F8C"/>
             </a:solidFill>
@@ -5305,14 +6606,14 @@
       </p:sp>
       <p:sp>
         <p:nvSpPr>
-          <p:cNvPr id="38" name="l1_s" descr="Editable shape; source id l1_s"/>
+          <p:cNvPr id="67" name="l1_a" descr="Editable shape; source id l1_a"/>
           <p:cNvSpPr/>
           <p:nvPr/>
         </p:nvSpPr>
         <p:spPr>
           <a:xfrm>
-            <a:off x="6605060" y="668141"/>
-            <a:ext cx="2335315" cy="50906"/>
+            <a:off x="7143749" y="888999"/>
+            <a:ext cx="2619374" cy="47624"/>
           </a:xfrm>
           <a:prstGeom prst="roundRect">
             <a:avLst>
@@ -5349,41 +6650,312 @@
           </a:p>
         </p:txBody>
       </p:sp>
-      <p:pic>
-        <p:nvPicPr>
-          <p:cNvPr id="39" name="l1_i" descr="exact crop of the generated raster (line motif)"/>
-          <p:cNvPicPr>
-            <a:picLocks noChangeAspect="1"/>
-          </p:cNvPicPr>
-          <p:nvPr/>
-        </p:nvPicPr>
-        <p:blipFill>
-          <a:blip r:embed="rId5"/>
-          <a:stretch>
-            <a:fillRect/>
-          </a:stretch>
-        </p:blipFill>
-        <p:spPr>
-          <a:xfrm>
-            <a:off x="6706872" y="843131"/>
-            <a:ext cx="279983" cy="197260"/>
+      <p:sp>
+        <p:nvSpPr>
+          <p:cNvPr id="68" name="l1_g_b" descr="Editable shape; source id l1_g_b"/>
+          <p:cNvSpPr/>
+          <p:nvPr/>
+        </p:nvSpPr>
+        <p:spPr>
+          <a:xfrm>
+            <a:off x="7286624" y="1111249"/>
+            <a:ext cx="206374" cy="158749"/>
           </a:xfrm>
           <a:prstGeom prst="rect">
             <a:avLst/>
           </a:prstGeom>
-          <a:effectLst/>
-        </p:spPr>
-      </p:pic>
-      <p:sp>
-        <p:nvSpPr>
-          <p:cNvPr id="40" name="l1_t" descr="Editable text; source id l1_t"/>
+          <a:noFill/>
+          <a:ln w="7937">
+            <a:solidFill>
+              <a:srgbClr val="1F2937"/>
+            </a:solidFill>
+          </a:ln>
+          <a:effectLst/>
+        </p:spPr>
+        <p:style>
+          <a:lnRef idx="1">
+            <a:schemeClr val="accent1"/>
+          </a:lnRef>
+          <a:fillRef idx="3">
+            <a:schemeClr val="accent1"/>
+          </a:fillRef>
+          <a:effectRef idx="0">
+            <a:schemeClr val="accent1"/>
+          </a:effectRef>
+          <a:fontRef idx="minor">
+            <a:schemeClr val="lt1"/>
+          </a:fontRef>
+        </p:style>
+        <p:txBody>
+          <a:bodyPr rtlCol="0" anchor="ctr"/>
+          <a:lstStyle/>
+          <a:p>
+            <a:pPr algn="ctr"/>
+          </a:p>
+        </p:txBody>
+      </p:sp>
+      <p:cxnSp>
+        <p:nvCxnSpPr>
+          <p:cNvPr id="69" name="l1_g_d" descr="Editable line; source id l1_g_d"/>
+          <p:cNvCxnSpPr/>
+          <p:nvPr/>
+        </p:nvCxnSpPr>
+        <p:spPr>
+          <a:xfrm>
+            <a:off x="7350124" y="1111249"/>
+            <a:ext cx="0" cy="166688"/>
+          </a:xfrm>
+          <a:prstGeom prst="line">
+            <a:avLst/>
+          </a:prstGeom>
+          <a:ln w="7937">
+            <a:solidFill>
+              <a:srgbClr val="1F2937"/>
+            </a:solidFill>
+          </a:ln>
+          <a:effectLst/>
+        </p:spPr>
+        <p:style>
+          <a:lnRef idx="2">
+            <a:schemeClr val="accent1"/>
+          </a:lnRef>
+          <a:fillRef idx="0">
+            <a:schemeClr val="accent1"/>
+          </a:fillRef>
+          <a:effectRef idx="0">
+            <a:schemeClr val="accent1"/>
+          </a:effectRef>
+          <a:fontRef idx="minor">
+            <a:schemeClr val="tx1"/>
+          </a:fontRef>
+        </p:style>
+      </p:cxnSp>
+      <p:cxnSp>
+        <p:nvCxnSpPr>
+          <p:cNvPr id="70" name="l1_g_h0_0" descr="Editable line; source id l1_g_h0_0"/>
+          <p:cNvCxnSpPr/>
+          <p:nvPr/>
+        </p:nvCxnSpPr>
+        <p:spPr>
+          <a:xfrm flipH="1">
+            <a:off x="7381874" y="1166812"/>
+            <a:ext cx="15875" cy="23812"/>
+          </a:xfrm>
+          <a:prstGeom prst="line">
+            <a:avLst/>
+          </a:prstGeom>
+          <a:ln w="7937">
+            <a:solidFill>
+              <a:srgbClr val="1F2937"/>
+            </a:solidFill>
+          </a:ln>
+          <a:effectLst/>
+        </p:spPr>
+        <p:style>
+          <a:lnRef idx="2">
+            <a:schemeClr val="accent1"/>
+          </a:lnRef>
+          <a:fillRef idx="0">
+            <a:schemeClr val="accent1"/>
+          </a:fillRef>
+          <a:effectRef idx="0">
+            <a:schemeClr val="accent1"/>
+          </a:effectRef>
+          <a:fontRef idx="minor">
+            <a:schemeClr val="tx1"/>
+          </a:fontRef>
+        </p:style>
+      </p:cxnSp>
+      <p:cxnSp>
+        <p:nvCxnSpPr>
+          <p:cNvPr id="71" name="l1_g_h0_1" descr="Editable line; source id l1_g_h0_1"/>
+          <p:cNvCxnSpPr/>
+          <p:nvPr/>
+        </p:nvCxnSpPr>
+        <p:spPr>
+          <a:xfrm>
+            <a:off x="7381874" y="1190624"/>
+            <a:ext cx="15875" cy="31750"/>
+          </a:xfrm>
+          <a:prstGeom prst="line">
+            <a:avLst/>
+          </a:prstGeom>
+          <a:ln w="7937">
+            <a:solidFill>
+              <a:srgbClr val="1F2937"/>
+            </a:solidFill>
+          </a:ln>
+          <a:effectLst/>
+        </p:spPr>
+        <p:style>
+          <a:lnRef idx="2">
+            <a:schemeClr val="accent1"/>
+          </a:lnRef>
+          <a:fillRef idx="0">
+            <a:schemeClr val="accent1"/>
+          </a:fillRef>
+          <a:effectRef idx="0">
+            <a:schemeClr val="accent1"/>
+          </a:effectRef>
+          <a:fontRef idx="minor">
+            <a:schemeClr val="tx1"/>
+          </a:fontRef>
+        </p:style>
+      </p:cxnSp>
+      <p:cxnSp>
+        <p:nvCxnSpPr>
+          <p:cNvPr id="72" name="l1_g_h1_0" descr="Editable line; source id l1_g_h1_0"/>
+          <p:cNvCxnSpPr/>
+          <p:nvPr/>
+        </p:nvCxnSpPr>
+        <p:spPr>
+          <a:xfrm flipH="1">
+            <a:off x="7413624" y="1166812"/>
+            <a:ext cx="15875" cy="23812"/>
+          </a:xfrm>
+          <a:prstGeom prst="line">
+            <a:avLst/>
+          </a:prstGeom>
+          <a:ln w="7937">
+            <a:solidFill>
+              <a:srgbClr val="1F2937"/>
+            </a:solidFill>
+          </a:ln>
+          <a:effectLst/>
+        </p:spPr>
+        <p:style>
+          <a:lnRef idx="2">
+            <a:schemeClr val="accent1"/>
+          </a:lnRef>
+          <a:fillRef idx="0">
+            <a:schemeClr val="accent1"/>
+          </a:fillRef>
+          <a:effectRef idx="0">
+            <a:schemeClr val="accent1"/>
+          </a:effectRef>
+          <a:fontRef idx="minor">
+            <a:schemeClr val="tx1"/>
+          </a:fontRef>
+        </p:style>
+      </p:cxnSp>
+      <p:cxnSp>
+        <p:nvCxnSpPr>
+          <p:cNvPr id="73" name="l1_g_h1_1" descr="Editable line; source id l1_g_h1_1"/>
+          <p:cNvCxnSpPr/>
+          <p:nvPr/>
+        </p:nvCxnSpPr>
+        <p:spPr>
+          <a:xfrm>
+            <a:off x="7413624" y="1190624"/>
+            <a:ext cx="15875" cy="31750"/>
+          </a:xfrm>
+          <a:prstGeom prst="line">
+            <a:avLst/>
+          </a:prstGeom>
+          <a:ln w="7937">
+            <a:solidFill>
+              <a:srgbClr val="1F2937"/>
+            </a:solidFill>
+          </a:ln>
+          <a:effectLst/>
+        </p:spPr>
+        <p:style>
+          <a:lnRef idx="2">
+            <a:schemeClr val="accent1"/>
+          </a:lnRef>
+          <a:fillRef idx="0">
+            <a:schemeClr val="accent1"/>
+          </a:fillRef>
+          <a:effectRef idx="0">
+            <a:schemeClr val="accent1"/>
+          </a:effectRef>
+          <a:fontRef idx="minor">
+            <a:schemeClr val="tx1"/>
+          </a:fontRef>
+        </p:style>
+      </p:cxnSp>
+      <p:cxnSp>
+        <p:nvCxnSpPr>
+          <p:cNvPr id="74" name="l1_g_h2_0" descr="Editable line; source id l1_g_h2_0"/>
+          <p:cNvCxnSpPr/>
+          <p:nvPr/>
+        </p:nvCxnSpPr>
+        <p:spPr>
+          <a:xfrm flipH="1">
+            <a:off x="7445374" y="1166812"/>
+            <a:ext cx="15875" cy="23812"/>
+          </a:xfrm>
+          <a:prstGeom prst="line">
+            <a:avLst/>
+          </a:prstGeom>
+          <a:ln w="7937">
+            <a:solidFill>
+              <a:srgbClr val="1F2937"/>
+            </a:solidFill>
+          </a:ln>
+          <a:effectLst/>
+        </p:spPr>
+        <p:style>
+          <a:lnRef idx="2">
+            <a:schemeClr val="accent1"/>
+          </a:lnRef>
+          <a:fillRef idx="0">
+            <a:schemeClr val="accent1"/>
+          </a:fillRef>
+          <a:effectRef idx="0">
+            <a:schemeClr val="accent1"/>
+          </a:effectRef>
+          <a:fontRef idx="minor">
+            <a:schemeClr val="tx1"/>
+          </a:fontRef>
+        </p:style>
+      </p:cxnSp>
+      <p:cxnSp>
+        <p:nvCxnSpPr>
+          <p:cNvPr id="75" name="l1_g_h2_1" descr="Editable line; source id l1_g_h2_1"/>
+          <p:cNvCxnSpPr/>
+          <p:nvPr/>
+        </p:nvCxnSpPr>
+        <p:spPr>
+          <a:xfrm>
+            <a:off x="7445374" y="1190624"/>
+            <a:ext cx="15875" cy="31750"/>
+          </a:xfrm>
+          <a:prstGeom prst="line">
+            <a:avLst/>
+          </a:prstGeom>
+          <a:ln w="7937">
+            <a:solidFill>
+              <a:srgbClr val="1F2937"/>
+            </a:solidFill>
+          </a:ln>
+          <a:effectLst/>
+        </p:spPr>
+        <p:style>
+          <a:lnRef idx="2">
+            <a:schemeClr val="accent1"/>
+          </a:lnRef>
+          <a:fillRef idx="0">
+            <a:schemeClr val="accent1"/>
+          </a:fillRef>
+          <a:effectRef idx="0">
+            <a:schemeClr val="accent1"/>
+          </a:effectRef>
+          <a:fontRef idx="minor">
+            <a:schemeClr val="tx1"/>
+          </a:fontRef>
+        </p:style>
+      </p:cxnSp>
+      <p:sp>
+        <p:nvSpPr>
+          <p:cNvPr id="76" name="l1_t" descr="Editable text; source id l1_t"/>
           <p:cNvSpPr txBox="1"/>
           <p:nvPr/>
         </p:nvSpPr>
         <p:spPr>
           <a:xfrm>
-            <a:off x="7063214" y="820860"/>
-            <a:ext cx="1775348" cy="248167"/>
+            <a:off x="7604124" y="1047749"/>
+            <a:ext cx="2047874" cy="269874"/>
           </a:xfrm>
           <a:prstGeom prst="rect">
             <a:avLst/>
@@ -5399,7 +6971,7 @@
           <a:p>
             <a:pPr algn="l" fontAlgn="base">
               <a:lnSpc>
-                <a:spcPts val="1728"/>
+                <a:spcPts val="2078"/>
               </a:lnSpc>
               <a:spcBef>
                 <a:spcPts val="0"/>
@@ -5407,7 +6979,7 @@
               <a:spcAft>
                 <a:spcPts val="0"/>
               </a:spcAft>
-              <a:defRPr sz="1187" b="1" i="0" lang="zh-CN" dirty="0">
+              <a:defRPr sz="1425" b="1" i="0" lang="zh-CN" dirty="0">
                 <a:solidFill>
                   <a:srgbClr val="0F4F58"/>
                 </a:solidFill>
@@ -5417,7 +6989,7 @@
               </a:defRPr>
             </a:pPr>
             <a:r>
-              <a:rPr sz="1187" b="1" i="0" lang="zh-CN" dirty="0">
+              <a:rPr sz="1425" b="1" i="0" lang="zh-CN" dirty="0">
                 <a:solidFill>
                   <a:srgbClr val="0F4F58"/>
                 </a:solidFill>
@@ -5432,14 +7004,62 @@
       </p:sp>
       <p:sp>
         <p:nvSpPr>
-          <p:cNvPr id="41" name="l1_k0" descr="Editable text; source id l1_k0"/>
+          <p:cNvPr id="77" name="l1c_t0" descr="Editable shape; source id l1c_t0"/>
+          <p:cNvSpPr/>
+          <p:nvPr/>
+        </p:nvSpPr>
+        <p:spPr>
+          <a:xfrm>
+            <a:off x="7238999" y="1460499"/>
+            <a:ext cx="722312" cy="365124"/>
+          </a:xfrm>
+          <a:prstGeom prst="roundRect">
+            <a:avLst>
+              <a:gd name="adj" fmla="val 13043"/>
+            </a:avLst>
+          </a:prstGeom>
+          <a:solidFill>
+            <a:srgbClr val="F7F9FB"/>
+          </a:solidFill>
+          <a:ln w="9524">
+            <a:solidFill>
+              <a:srgbClr val="CBD3DA"/>
+            </a:solidFill>
+          </a:ln>
+          <a:effectLst/>
+        </p:spPr>
+        <p:style>
+          <a:lnRef idx="1">
+            <a:schemeClr val="accent1"/>
+          </a:lnRef>
+          <a:fillRef idx="3">
+            <a:schemeClr val="accent1"/>
+          </a:fillRef>
+          <a:effectRef idx="0">
+            <a:schemeClr val="accent1"/>
+          </a:effectRef>
+          <a:fontRef idx="minor">
+            <a:schemeClr val="lt1"/>
+          </a:fontRef>
+        </p:style>
+        <p:txBody>
+          <a:bodyPr rtlCol="0" anchor="ctr"/>
+          <a:lstStyle/>
+          <a:p>
+            <a:pPr algn="ctr"/>
+          </a:p>
+        </p:txBody>
+      </p:sp>
+      <p:sp>
+        <p:nvSpPr>
+          <p:cNvPr id="78" name="l1c_t0_t" descr="Editable text; source id l1c_t0_t"/>
           <p:cNvSpPr txBox="1"/>
           <p:nvPr/>
         </p:nvSpPr>
         <p:spPr>
           <a:xfrm>
-            <a:off x="6706872" y="1119933"/>
-            <a:ext cx="2131690" cy="197260"/>
+            <a:off x="7294562" y="1492249"/>
+            <a:ext cx="611187" cy="301624"/>
           </a:xfrm>
           <a:prstGeom prst="rect">
             <a:avLst/>
@@ -5453,9 +7073,9 @@
           </a:bodyPr>
           <a:lstStyle/>
           <a:p>
-            <a:pPr algn="l" fontAlgn="base">
+            <a:pPr algn="ctr" fontAlgn="base">
               <a:lnSpc>
-                <a:spcPts val="1465"/>
+                <a:spcPts val="1562"/>
               </a:lnSpc>
               <a:spcBef>
                 <a:spcPts val="0"/>
@@ -5463,7 +7083,7 @@
               <a:spcAft>
                 <a:spcPts val="0"/>
               </a:spcAft>
-              <a:defRPr sz="1002" b="0" i="0" lang="zh-CN" dirty="0">
+              <a:defRPr sz="1074" b="0" i="0" lang="zh-CN" dirty="0">
                 <a:solidFill>
                   <a:srgbClr val="3F4854"/>
                 </a:solidFill>
@@ -5473,7 +7093,7 @@
               </a:defRPr>
             </a:pPr>
             <a:r>
-              <a:rPr sz="1002" b="0" i="0" lang="zh-CN" dirty="0">
+              <a:rPr sz="1074" b="0" i="0" lang="zh-CN" dirty="0">
                 <a:solidFill>
                   <a:srgbClr val="3F4854"/>
                 </a:solidFill>
@@ -5483,19 +7103,101 @@
               </a:rPr>
               <a:t>分段煅烧</a:t>
             </a:r>
-            <a:r>
-              <a:rPr sz="1002" b="0" i="0" lang="zh-CN" dirty="0">
+          </a:p>
+        </p:txBody>
+      </p:sp>
+      <p:sp>
+        <p:nvSpPr>
+          <p:cNvPr id="79" name="l1c_t1" descr="Editable shape; source id l1c_t1"/>
+          <p:cNvSpPr/>
+          <p:nvPr/>
+        </p:nvSpPr>
+        <p:spPr>
+          <a:xfrm>
+            <a:off x="8088312" y="1460499"/>
+            <a:ext cx="722312" cy="365124"/>
+          </a:xfrm>
+          <a:prstGeom prst="roundRect">
+            <a:avLst>
+              <a:gd name="adj" fmla="val 13043"/>
+            </a:avLst>
+          </a:prstGeom>
+          <a:solidFill>
+            <a:srgbClr val="F7F9FB"/>
+          </a:solidFill>
+          <a:ln w="9524">
+            <a:solidFill>
+              <a:srgbClr val="CBD3DA"/>
+            </a:solidFill>
+          </a:ln>
+          <a:effectLst/>
+        </p:spPr>
+        <p:style>
+          <a:lnRef idx="1">
+            <a:schemeClr val="accent1"/>
+          </a:lnRef>
+          <a:fillRef idx="3">
+            <a:schemeClr val="accent1"/>
+          </a:fillRef>
+          <a:effectRef idx="0">
+            <a:schemeClr val="accent1"/>
+          </a:effectRef>
+          <a:fontRef idx="minor">
+            <a:schemeClr val="lt1"/>
+          </a:fontRef>
+        </p:style>
+        <p:txBody>
+          <a:bodyPr rtlCol="0" anchor="ctr"/>
+          <a:lstStyle/>
+          <a:p>
+            <a:pPr algn="ctr"/>
+          </a:p>
+        </p:txBody>
+      </p:sp>
+      <p:sp>
+        <p:nvSpPr>
+          <p:cNvPr id="80" name="l1c_t1_t" descr="Editable text; source id l1c_t1_t"/>
+          <p:cNvSpPr txBox="1"/>
+          <p:nvPr/>
+        </p:nvSpPr>
+        <p:spPr>
+          <a:xfrm>
+            <a:off x="8143874" y="1492249"/>
+            <a:ext cx="611187" cy="301624"/>
+          </a:xfrm>
+          <a:prstGeom prst="rect">
+            <a:avLst/>
+          </a:prstGeom>
+          <a:noFill/>
+          <a:effectLst/>
+        </p:spPr>
+        <p:txBody>
+          <a:bodyPr wrap="none" anchor="ctr" tIns="0" rIns="0" bIns="0" lIns="0" anchorCtr="0" vertOverflow="overflow">
+            <a:noAutofit/>
+          </a:bodyPr>
+          <a:lstStyle/>
+          <a:p>
+            <a:pPr algn="ctr" fontAlgn="base">
+              <a:lnSpc>
+                <a:spcPts val="1562"/>
+              </a:lnSpc>
+              <a:spcBef>
+                <a:spcPts val="0"/>
+              </a:spcBef>
+              <a:spcAft>
+                <a:spcPts val="0"/>
+              </a:spcAft>
+              <a:defRPr sz="1074" b="0" i="0" lang="zh-CN" dirty="0">
                 <a:solidFill>
                   <a:srgbClr val="3F4854"/>
                 </a:solidFill>
-                <a:latin typeface="DejaVu Sans"/>
-                <a:ea typeface="DejaVu Sans"/>
-                <a:cs typeface="DejaVu Sans"/>
-              </a:rPr>
-              <a:t> → </a:t>
-            </a:r>
+                <a:latin typeface="Noto Sans CJK SC"/>
+                <a:ea typeface="Noto Sans CJK SC"/>
+                <a:cs typeface="Noto Sans CJK SC"/>
+              </a:defRPr>
+            </a:pPr>
             <a:r>
-              <a:rPr sz="1002" b="0" i="0" lang="zh-CN" dirty="0">
+              <a:rPr sz="1074" b="0" i="0" lang="zh-CN" dirty="0">
                 <a:solidFill>
                   <a:srgbClr val="3F4854"/>
                 </a:solidFill>
@@ -5505,19 +7207,175 @@
               </a:rPr>
               <a:t>复磨</a:t>
             </a:r>
-            <a:r>
-              <a:rPr sz="1002" b="0" i="0" lang="zh-CN" dirty="0">
+          </a:p>
+        </p:txBody>
+      </p:sp>
+      <p:sp>
+        <p:nvSpPr>
+          <p:cNvPr id="81" name="l1c_a1" descr="Editable line; source id l1c_a1"/>
+          <p:cNvSpPr/>
+          <p:nvPr/>
+        </p:nvSpPr>
+        <p:spPr>
+          <a:xfrm>
+            <a:off x="7985125" y="1623417"/>
+            <a:ext cx="79375" cy="39291"/>
+          </a:xfrm>
+          <a:custGeom>
+            <a:avLst/>
+            <a:gdLst/>
+            <a:ahLst/>
+            <a:cxnLst/>
+            <a:rect l="l" t="t" r="r" b="b"/>
+            <a:pathLst>
+              <a:path w="10000" h="4950">
+                <a:moveTo>
+                  <a:pt x="0" y="1675"/>
+                </a:moveTo>
+                <a:lnTo>
+                  <a:pt x="4500" y="1675"/>
+                </a:lnTo>
+                <a:lnTo>
+                  <a:pt x="4500" y="0"/>
+                </a:lnTo>
+                <a:lnTo>
+                  <a:pt x="10000" y="2475"/>
+                </a:lnTo>
+                <a:lnTo>
+                  <a:pt x="4500" y="4950"/>
+                </a:lnTo>
+                <a:lnTo>
+                  <a:pt x="4500" y="3275"/>
+                </a:lnTo>
+                <a:lnTo>
+                  <a:pt x="0" y="3275"/>
+                </a:lnTo>
+                <a:close/>
+              </a:path>
+            </a:pathLst>
+          </a:custGeom>
+          <a:solidFill>
+            <a:srgbClr val="4B5563"/>
+          </a:solidFill>
+          <a:ln>
+            <a:noFill/>
+          </a:ln>
+          <a:effectLst/>
+        </p:spPr>
+        <p:style>
+          <a:lnRef idx="1">
+            <a:schemeClr val="accent1"/>
+          </a:lnRef>
+          <a:fillRef idx="3">
+            <a:schemeClr val="accent1"/>
+          </a:fillRef>
+          <a:effectRef idx="0">
+            <a:schemeClr val="accent1"/>
+          </a:effectRef>
+          <a:fontRef idx="minor">
+            <a:schemeClr val="lt1"/>
+          </a:fontRef>
+        </p:style>
+        <p:txBody>
+          <a:bodyPr rtlCol="0" anchor="ctr"/>
+          <a:lstStyle/>
+          <a:p>
+            <a:pPr algn="ctr"/>
+          </a:p>
+        </p:txBody>
+      </p:sp>
+      <p:sp>
+        <p:nvSpPr>
+          <p:cNvPr id="82" name="l1c_t2" descr="Editable shape; source id l1c_t2"/>
+          <p:cNvSpPr/>
+          <p:nvPr/>
+        </p:nvSpPr>
+        <p:spPr>
+          <a:xfrm>
+            <a:off x="8945562" y="1460499"/>
+            <a:ext cx="722312" cy="365124"/>
+          </a:xfrm>
+          <a:prstGeom prst="roundRect">
+            <a:avLst>
+              <a:gd name="adj" fmla="val 13043"/>
+            </a:avLst>
+          </a:prstGeom>
+          <a:solidFill>
+            <a:srgbClr val="F7F9FB"/>
+          </a:solidFill>
+          <a:ln w="9524">
+            <a:solidFill>
+              <a:srgbClr val="CBD3DA"/>
+            </a:solidFill>
+          </a:ln>
+          <a:effectLst/>
+        </p:spPr>
+        <p:style>
+          <a:lnRef idx="1">
+            <a:schemeClr val="accent1"/>
+          </a:lnRef>
+          <a:fillRef idx="3">
+            <a:schemeClr val="accent1"/>
+          </a:fillRef>
+          <a:effectRef idx="0">
+            <a:schemeClr val="accent1"/>
+          </a:effectRef>
+          <a:fontRef idx="minor">
+            <a:schemeClr val="lt1"/>
+          </a:fontRef>
+        </p:style>
+        <p:txBody>
+          <a:bodyPr rtlCol="0" anchor="ctr"/>
+          <a:lstStyle/>
+          <a:p>
+            <a:pPr algn="ctr"/>
+          </a:p>
+        </p:txBody>
+      </p:sp>
+      <p:sp>
+        <p:nvSpPr>
+          <p:cNvPr id="83" name="l1c_t2_t" descr="Editable text; source id l1c_t2_t"/>
+          <p:cNvSpPr txBox="1"/>
+          <p:nvPr/>
+        </p:nvSpPr>
+        <p:spPr>
+          <a:xfrm>
+            <a:off x="9001124" y="1492249"/>
+            <a:ext cx="611187" cy="301624"/>
+          </a:xfrm>
+          <a:prstGeom prst="rect">
+            <a:avLst/>
+          </a:prstGeom>
+          <a:noFill/>
+          <a:effectLst/>
+        </p:spPr>
+        <p:txBody>
+          <a:bodyPr wrap="none" anchor="ctr" tIns="0" rIns="0" bIns="0" lIns="0" anchorCtr="0" vertOverflow="overflow">
+            <a:noAutofit/>
+          </a:bodyPr>
+          <a:lstStyle/>
+          <a:p>
+            <a:pPr algn="ctr" fontAlgn="base">
+              <a:lnSpc>
+                <a:spcPts val="1562"/>
+              </a:lnSpc>
+              <a:spcBef>
+                <a:spcPts val="0"/>
+              </a:spcBef>
+              <a:spcAft>
+                <a:spcPts val="0"/>
+              </a:spcAft>
+              <a:defRPr sz="1074" b="0" i="0" lang="zh-CN" dirty="0">
                 <a:solidFill>
                   <a:srgbClr val="3F4854"/>
                 </a:solidFill>
-                <a:latin typeface="DejaVu Sans"/>
-                <a:ea typeface="DejaVu Sans"/>
-                <a:cs typeface="DejaVu Sans"/>
-              </a:rPr>
-              <a:t> → </a:t>
-            </a:r>
+                <a:latin typeface="Noto Sans CJK SC"/>
+                <a:ea typeface="Noto Sans CJK SC"/>
+                <a:cs typeface="Noto Sans CJK SC"/>
+              </a:defRPr>
+            </a:pPr>
             <a:r>
-              <a:rPr sz="1002" b="0" i="0" lang="zh-CN" dirty="0">
+              <a:rPr sz="1074" b="0" i="0" lang="zh-CN" dirty="0">
                 <a:solidFill>
                   <a:srgbClr val="3F4854"/>
                 </a:solidFill>
@@ -5530,52 +7388,138 @@
           </a:p>
         </p:txBody>
       </p:sp>
-      <p:cxnSp>
-        <p:nvCxnSpPr>
-          <p:cNvPr id="42" name="l1_r1" descr="Editable line; source id l1_r1"/>
-          <p:cNvCxnSpPr/>
-          <p:nvPr/>
-        </p:nvCxnSpPr>
-        <p:spPr>
-          <a:xfrm>
-            <a:off x="6706872" y="1380826"/>
-            <a:ext cx="2131691" cy="0"/>
-          </a:xfrm>
-          <a:prstGeom prst="line">
-            <a:avLst/>
-          </a:prstGeom>
-          <a:ln w="6363">
-            <a:solidFill>
-              <a:srgbClr val="DCE2E8"/>
-            </a:solidFill>
+      <p:sp>
+        <p:nvSpPr>
+          <p:cNvPr id="84" name="l1c_a2" descr="Editable line; source id l1c_a2"/>
+          <p:cNvSpPr/>
+          <p:nvPr/>
+        </p:nvSpPr>
+        <p:spPr>
+          <a:xfrm>
+            <a:off x="8842375" y="1623417"/>
+            <a:ext cx="79375" cy="39291"/>
+          </a:xfrm>
+          <a:custGeom>
+            <a:avLst/>
+            <a:gdLst/>
+            <a:ahLst/>
+            <a:cxnLst/>
+            <a:rect l="l" t="t" r="r" b="b"/>
+            <a:pathLst>
+              <a:path w="10000" h="4950">
+                <a:moveTo>
+                  <a:pt x="0" y="1675"/>
+                </a:moveTo>
+                <a:lnTo>
+                  <a:pt x="4500" y="1675"/>
+                </a:lnTo>
+                <a:lnTo>
+                  <a:pt x="4500" y="0"/>
+                </a:lnTo>
+                <a:lnTo>
+                  <a:pt x="10000" y="2475"/>
+                </a:lnTo>
+                <a:lnTo>
+                  <a:pt x="4500" y="4950"/>
+                </a:lnTo>
+                <a:lnTo>
+                  <a:pt x="4500" y="3275"/>
+                </a:lnTo>
+                <a:lnTo>
+                  <a:pt x="0" y="3275"/>
+                </a:lnTo>
+                <a:close/>
+              </a:path>
+            </a:pathLst>
+          </a:custGeom>
+          <a:solidFill>
+            <a:srgbClr val="4B5563"/>
+          </a:solidFill>
+          <a:ln>
+            <a:noFill/>
           </a:ln>
           <a:effectLst/>
         </p:spPr>
         <p:style>
-          <a:lnRef idx="2">
+          <a:lnRef idx="1">
             <a:schemeClr val="accent1"/>
           </a:lnRef>
-          <a:fillRef idx="0">
+          <a:fillRef idx="3">
             <a:schemeClr val="accent1"/>
           </a:fillRef>
           <a:effectRef idx="0">
             <a:schemeClr val="accent1"/>
           </a:effectRef>
           <a:fontRef idx="minor">
-            <a:schemeClr val="tx1"/>
+            <a:schemeClr val="lt1"/>
           </a:fontRef>
         </p:style>
-      </p:cxnSp>
-      <p:sp>
-        <p:nvSpPr>
-          <p:cNvPr id="43" name="l1_k1" descr="Editable text; source id l1_k1"/>
+        <p:txBody>
+          <a:bodyPr rtlCol="0" anchor="ctr"/>
+          <a:lstStyle/>
+          <a:p>
+            <a:pPr algn="ctr"/>
+          </a:p>
+        </p:txBody>
+      </p:sp>
+      <p:sp>
+        <p:nvSpPr>
+          <p:cNvPr id="85" name="l1_o" descr="Editable shape; source id l1_o"/>
+          <p:cNvSpPr/>
+          <p:nvPr/>
+        </p:nvSpPr>
+        <p:spPr>
+          <a:xfrm>
+            <a:off x="7238999" y="1889124"/>
+            <a:ext cx="2428874" cy="333374"/>
+          </a:xfrm>
+          <a:prstGeom prst="roundRect">
+            <a:avLst>
+              <a:gd name="adj" fmla="val 14285"/>
+            </a:avLst>
+          </a:prstGeom>
+          <a:solidFill>
+            <a:srgbClr val="E6F2F3"/>
+          </a:solidFill>
+          <a:ln w="9524">
+            <a:solidFill>
+              <a:srgbClr val="1F7F8C"/>
+            </a:solidFill>
+          </a:ln>
+          <a:effectLst/>
+        </p:spPr>
+        <p:style>
+          <a:lnRef idx="1">
+            <a:schemeClr val="accent1"/>
+          </a:lnRef>
+          <a:fillRef idx="3">
+            <a:schemeClr val="accent1"/>
+          </a:fillRef>
+          <a:effectRef idx="0">
+            <a:schemeClr val="accent1"/>
+          </a:effectRef>
+          <a:fontRef idx="minor">
+            <a:schemeClr val="lt1"/>
+          </a:fontRef>
+        </p:style>
+        <p:txBody>
+          <a:bodyPr rtlCol="0" anchor="ctr"/>
+          <a:lstStyle/>
+          <a:p>
+            <a:pPr algn="ctr"/>
+          </a:p>
+        </p:txBody>
+      </p:sp>
+      <p:sp>
+        <p:nvSpPr>
+          <p:cNvPr id="86" name="l1_o_t" descr="Editable text; source id l1_o_t"/>
           <p:cNvSpPr txBox="1"/>
           <p:nvPr/>
         </p:nvSpPr>
         <p:spPr>
           <a:xfrm>
-            <a:off x="6706872" y="1406279"/>
-            <a:ext cx="2131690" cy="197260"/>
+            <a:off x="7294562" y="1920874"/>
+            <a:ext cx="2317749" cy="269874"/>
           </a:xfrm>
           <a:prstGeom prst="rect">
             <a:avLst/>
@@ -5589,9 +7533,9 @@
           </a:bodyPr>
           <a:lstStyle/>
           <a:p>
-            <a:pPr algn="l" fontAlgn="base">
+            <a:pPr algn="ctr" fontAlgn="base">
               <a:lnSpc>
-                <a:spcPts val="1465"/>
+                <a:spcPts val="1656"/>
               </a:lnSpc>
               <a:spcBef>
                 <a:spcPts val="0"/>
@@ -5599,7 +7543,549 @@
               <a:spcAft>
                 <a:spcPts val="0"/>
               </a:spcAft>
-              <a:defRPr sz="1002" b="0" i="0" lang="zh-CN" dirty="0">
+              <a:defRPr sz="1134" b="1" i="0" lang="zh-CN" dirty="0">
+                <a:solidFill>
+                  <a:srgbClr val="0F4F58"/>
+                </a:solidFill>
+                <a:latin typeface="Noto Sans CJK SC"/>
+                <a:ea typeface="Noto Sans CJK SC"/>
+                <a:cs typeface="Noto Sans CJK SC"/>
+              </a:defRPr>
+            </a:pPr>
+            <a:r>
+              <a:rPr sz="1134" b="1" i="0" lang="zh-CN" dirty="0">
+                <a:solidFill>
+                  <a:srgbClr val="0F4F58"/>
+                </a:solidFill>
+                <a:latin typeface="Noto Sans CJK SC"/>
+                <a:ea typeface="Noto Sans CJK SC"/>
+                <a:cs typeface="Noto Sans CJK SC"/>
+              </a:rPr>
+              <a:t>批量相区与相纯度</a:t>
+            </a:r>
+          </a:p>
+        </p:txBody>
+      </p:sp>
+      <p:sp>
+        <p:nvSpPr>
+          <p:cNvPr id="87" name="l2" descr="Editable shape; source id l2"/>
+          <p:cNvSpPr/>
+          <p:nvPr/>
+        </p:nvSpPr>
+        <p:spPr>
+          <a:xfrm>
+            <a:off x="7143749" y="2428874"/>
+            <a:ext cx="2619374" cy="1396999"/>
+          </a:xfrm>
+          <a:prstGeom prst="roundRect">
+            <a:avLst>
+              <a:gd name="adj" fmla="val 5113"/>
+            </a:avLst>
+          </a:prstGeom>
+          <a:solidFill>
+            <a:srgbClr val="FFFFFF"/>
+          </a:solidFill>
+          <a:ln w="11112">
+            <a:solidFill>
+              <a:srgbClr val="1F7F8C"/>
+            </a:solidFill>
+          </a:ln>
+          <a:effectLst/>
+        </p:spPr>
+        <p:style>
+          <a:lnRef idx="1">
+            <a:schemeClr val="accent1"/>
+          </a:lnRef>
+          <a:fillRef idx="3">
+            <a:schemeClr val="accent1"/>
+          </a:fillRef>
+          <a:effectRef idx="0">
+            <a:schemeClr val="accent1"/>
+          </a:effectRef>
+          <a:fontRef idx="minor">
+            <a:schemeClr val="lt1"/>
+          </a:fontRef>
+        </p:style>
+        <p:txBody>
+          <a:bodyPr rtlCol="0" anchor="ctr"/>
+          <a:lstStyle/>
+          <a:p>
+            <a:pPr algn="ctr"/>
+          </a:p>
+        </p:txBody>
+      </p:sp>
+      <p:sp>
+        <p:nvSpPr>
+          <p:cNvPr id="88" name="l2_a" descr="Editable shape; source id l2_a"/>
+          <p:cNvSpPr/>
+          <p:nvPr/>
+        </p:nvSpPr>
+        <p:spPr>
+          <a:xfrm>
+            <a:off x="7143749" y="2428874"/>
+            <a:ext cx="2619374" cy="47624"/>
+          </a:xfrm>
+          <a:prstGeom prst="roundRect">
+            <a:avLst>
+              <a:gd name="adj" fmla="val 50000"/>
+            </a:avLst>
+          </a:prstGeom>
+          <a:solidFill>
+            <a:srgbClr val="1F7F8C"/>
+          </a:solidFill>
+          <a:ln>
+            <a:noFill/>
+          </a:ln>
+          <a:effectLst/>
+        </p:spPr>
+        <p:style>
+          <a:lnRef idx="1">
+            <a:schemeClr val="accent1"/>
+          </a:lnRef>
+          <a:fillRef idx="3">
+            <a:schemeClr val="accent1"/>
+          </a:fillRef>
+          <a:effectRef idx="0">
+            <a:schemeClr val="accent1"/>
+          </a:effectRef>
+          <a:fontRef idx="minor">
+            <a:schemeClr val="lt1"/>
+          </a:fontRef>
+        </p:style>
+        <p:txBody>
+          <a:bodyPr rtlCol="0" anchor="ctr"/>
+          <a:lstStyle/>
+          <a:p>
+            <a:pPr algn="ctr"/>
+          </a:p>
+        </p:txBody>
+      </p:sp>
+      <p:cxnSp>
+        <p:nvCxnSpPr>
+          <p:cNvPr id="89" name="l2_g_b_0" descr="Editable line; source id l2_g_b_0"/>
+          <p:cNvCxnSpPr/>
+          <p:nvPr/>
+        </p:nvCxnSpPr>
+        <p:spPr>
+          <a:xfrm>
+            <a:off x="7310437" y="2666999"/>
+            <a:ext cx="31750" cy="150813"/>
+          </a:xfrm>
+          <a:prstGeom prst="line">
+            <a:avLst/>
+          </a:prstGeom>
+          <a:ln w="7937">
+            <a:solidFill>
+              <a:srgbClr val="1F2937"/>
+            </a:solidFill>
+          </a:ln>
+          <a:effectLst/>
+        </p:spPr>
+        <p:style>
+          <a:lnRef idx="2">
+            <a:schemeClr val="accent1"/>
+          </a:lnRef>
+          <a:fillRef idx="0">
+            <a:schemeClr val="accent1"/>
+          </a:fillRef>
+          <a:effectRef idx="0">
+            <a:schemeClr val="accent1"/>
+          </a:effectRef>
+          <a:fontRef idx="minor">
+            <a:schemeClr val="tx1"/>
+          </a:fontRef>
+        </p:style>
+      </p:cxnSp>
+      <p:cxnSp>
+        <p:nvCxnSpPr>
+          <p:cNvPr id="90" name="l2_g_b_1" descr="Editable line; source id l2_g_b_1"/>
+          <p:cNvCxnSpPr/>
+          <p:nvPr/>
+        </p:nvCxnSpPr>
+        <p:spPr>
+          <a:xfrm>
+            <a:off x="7342187" y="2817812"/>
+            <a:ext cx="95250" cy="0"/>
+          </a:xfrm>
+          <a:prstGeom prst="line">
+            <a:avLst/>
+          </a:prstGeom>
+          <a:ln w="7937">
+            <a:solidFill>
+              <a:srgbClr val="1F2937"/>
+            </a:solidFill>
+          </a:ln>
+          <a:effectLst/>
+        </p:spPr>
+        <p:style>
+          <a:lnRef idx="2">
+            <a:schemeClr val="accent1"/>
+          </a:lnRef>
+          <a:fillRef idx="0">
+            <a:schemeClr val="accent1"/>
+          </a:fillRef>
+          <a:effectRef idx="0">
+            <a:schemeClr val="accent1"/>
+          </a:effectRef>
+          <a:fontRef idx="minor">
+            <a:schemeClr val="tx1"/>
+          </a:fontRef>
+        </p:style>
+      </p:cxnSp>
+      <p:cxnSp>
+        <p:nvCxnSpPr>
+          <p:cNvPr id="91" name="l2_g_b_2" descr="Editable line; source id l2_g_b_2"/>
+          <p:cNvCxnSpPr/>
+          <p:nvPr/>
+        </p:nvCxnSpPr>
+        <p:spPr>
+          <a:xfrm flipV="1">
+            <a:off x="7437437" y="2666999"/>
+            <a:ext cx="31750" cy="150813"/>
+          </a:xfrm>
+          <a:prstGeom prst="line">
+            <a:avLst/>
+          </a:prstGeom>
+          <a:ln w="7937">
+            <a:solidFill>
+              <a:srgbClr val="1F2937"/>
+            </a:solidFill>
+          </a:ln>
+          <a:effectLst/>
+        </p:spPr>
+        <p:style>
+          <a:lnRef idx="2">
+            <a:schemeClr val="accent1"/>
+          </a:lnRef>
+          <a:fillRef idx="0">
+            <a:schemeClr val="accent1"/>
+          </a:fillRef>
+          <a:effectRef idx="0">
+            <a:schemeClr val="accent1"/>
+          </a:effectRef>
+          <a:fontRef idx="minor">
+            <a:schemeClr val="tx1"/>
+          </a:fontRef>
+        </p:style>
+      </p:cxnSp>
+      <p:cxnSp>
+        <p:nvCxnSpPr>
+          <p:cNvPr id="92" name="l2_g_r" descr="Editable line; source id l2_g_r"/>
+          <p:cNvCxnSpPr/>
+          <p:nvPr/>
+        </p:nvCxnSpPr>
+        <p:spPr>
+          <a:xfrm>
+            <a:off x="7294562" y="2666999"/>
+            <a:ext cx="190500" cy="0"/>
+          </a:xfrm>
+          <a:prstGeom prst="line">
+            <a:avLst/>
+          </a:prstGeom>
+          <a:ln w="7937">
+            <a:solidFill>
+              <a:srgbClr val="1F2937"/>
+            </a:solidFill>
+          </a:ln>
+          <a:effectLst/>
+        </p:spPr>
+        <p:style>
+          <a:lnRef idx="2">
+            <a:schemeClr val="accent1"/>
+          </a:lnRef>
+          <a:fillRef idx="0">
+            <a:schemeClr val="accent1"/>
+          </a:fillRef>
+          <a:effectRef idx="0">
+            <a:schemeClr val="accent1"/>
+          </a:effectRef>
+          <a:fontRef idx="minor">
+            <a:schemeClr val="tx1"/>
+          </a:fontRef>
+        </p:style>
+      </p:cxnSp>
+      <p:cxnSp>
+        <p:nvCxnSpPr>
+          <p:cNvPr id="93" name="l2_g_c_0" descr="Editable line; source id l2_g_c_0"/>
+          <p:cNvCxnSpPr/>
+          <p:nvPr/>
+        </p:nvCxnSpPr>
+        <p:spPr>
+          <a:xfrm>
+            <a:off x="7389812" y="2611437"/>
+            <a:ext cx="31750" cy="31750"/>
+          </a:xfrm>
+          <a:prstGeom prst="line">
+            <a:avLst/>
+          </a:prstGeom>
+          <a:ln w="7937">
+            <a:solidFill>
+              <a:srgbClr val="1F2937"/>
+            </a:solidFill>
+          </a:ln>
+          <a:effectLst/>
+        </p:spPr>
+        <p:style>
+          <a:lnRef idx="2">
+            <a:schemeClr val="accent1"/>
+          </a:lnRef>
+          <a:fillRef idx="0">
+            <a:schemeClr val="accent1"/>
+          </a:fillRef>
+          <a:effectRef idx="0">
+            <a:schemeClr val="accent1"/>
+          </a:effectRef>
+          <a:fontRef idx="minor">
+            <a:schemeClr val="tx1"/>
+          </a:fontRef>
+        </p:style>
+      </p:cxnSp>
+      <p:cxnSp>
+        <p:nvCxnSpPr>
+          <p:cNvPr id="94" name="l2_g_c_1" descr="Editable line; source id l2_g_c_1"/>
+          <p:cNvCxnSpPr/>
+          <p:nvPr/>
+        </p:nvCxnSpPr>
+        <p:spPr>
+          <a:xfrm flipH="1">
+            <a:off x="7389812" y="2643187"/>
+            <a:ext cx="31750" cy="23812"/>
+          </a:xfrm>
+          <a:prstGeom prst="line">
+            <a:avLst/>
+          </a:prstGeom>
+          <a:ln w="7937">
+            <a:solidFill>
+              <a:srgbClr val="1F2937"/>
+            </a:solidFill>
+          </a:ln>
+          <a:effectLst/>
+        </p:spPr>
+        <p:style>
+          <a:lnRef idx="2">
+            <a:schemeClr val="accent1"/>
+          </a:lnRef>
+          <a:fillRef idx="0">
+            <a:schemeClr val="accent1"/>
+          </a:fillRef>
+          <a:effectRef idx="0">
+            <a:schemeClr val="accent1"/>
+          </a:effectRef>
+          <a:fontRef idx="minor">
+            <a:schemeClr val="tx1"/>
+          </a:fontRef>
+        </p:style>
+      </p:cxnSp>
+      <p:cxnSp>
+        <p:nvCxnSpPr>
+          <p:cNvPr id="95" name="l2_g_c_2" descr="Editable line; source id l2_g_c_2"/>
+          <p:cNvCxnSpPr/>
+          <p:nvPr/>
+        </p:nvCxnSpPr>
+        <p:spPr>
+          <a:xfrm flipH="1" flipV="1">
+            <a:off x="7358062" y="2643187"/>
+            <a:ext cx="31750" cy="23812"/>
+          </a:xfrm>
+          <a:prstGeom prst="line">
+            <a:avLst/>
+          </a:prstGeom>
+          <a:ln w="7937">
+            <a:solidFill>
+              <a:srgbClr val="1F2937"/>
+            </a:solidFill>
+          </a:ln>
+          <a:effectLst/>
+        </p:spPr>
+        <p:style>
+          <a:lnRef idx="2">
+            <a:schemeClr val="accent1"/>
+          </a:lnRef>
+          <a:fillRef idx="0">
+            <a:schemeClr val="accent1"/>
+          </a:fillRef>
+          <a:effectRef idx="0">
+            <a:schemeClr val="accent1"/>
+          </a:effectRef>
+          <a:fontRef idx="minor">
+            <a:schemeClr val="tx1"/>
+          </a:fontRef>
+        </p:style>
+      </p:cxnSp>
+      <p:cxnSp>
+        <p:nvCxnSpPr>
+          <p:cNvPr id="96" name="l2_g_c_3" descr="Editable line; source id l2_g_c_3"/>
+          <p:cNvCxnSpPr/>
+          <p:nvPr/>
+        </p:nvCxnSpPr>
+        <p:spPr>
+          <a:xfrm flipV="1">
+            <a:off x="7358062" y="2611437"/>
+            <a:ext cx="31750" cy="31750"/>
+          </a:xfrm>
+          <a:prstGeom prst="line">
+            <a:avLst/>
+          </a:prstGeom>
+          <a:ln w="7937">
+            <a:solidFill>
+              <a:srgbClr val="1F2937"/>
+            </a:solidFill>
+          </a:ln>
+          <a:effectLst/>
+        </p:spPr>
+        <p:style>
+          <a:lnRef idx="2">
+            <a:schemeClr val="accent1"/>
+          </a:lnRef>
+          <a:fillRef idx="0">
+            <a:schemeClr val="accent1"/>
+          </a:fillRef>
+          <a:effectRef idx="0">
+            <a:schemeClr val="accent1"/>
+          </a:effectRef>
+          <a:fontRef idx="minor">
+            <a:schemeClr val="tx1"/>
+          </a:fontRef>
+        </p:style>
+      </p:cxnSp>
+      <p:sp>
+        <p:nvSpPr>
+          <p:cNvPr id="97" name="l2_t" descr="Editable text; source id l2_t"/>
+          <p:cNvSpPr txBox="1"/>
+          <p:nvPr/>
+        </p:nvSpPr>
+        <p:spPr>
+          <a:xfrm>
+            <a:off x="7604124" y="2587624"/>
+            <a:ext cx="2047874" cy="269874"/>
+          </a:xfrm>
+          <a:prstGeom prst="rect">
+            <a:avLst/>
+          </a:prstGeom>
+          <a:noFill/>
+          <a:effectLst/>
+        </p:spPr>
+        <p:txBody>
+          <a:bodyPr wrap="none" anchor="ctr" tIns="0" rIns="0" bIns="0" lIns="0" anchorCtr="0" vertOverflow="overflow">
+            <a:noAutofit/>
+          </a:bodyPr>
+          <a:lstStyle/>
+          <a:p>
+            <a:pPr algn="l" fontAlgn="base">
+              <a:lnSpc>
+                <a:spcPts val="2078"/>
+              </a:lnSpc>
+              <a:spcBef>
+                <a:spcPts val="0"/>
+              </a:spcBef>
+              <a:spcAft>
+                <a:spcPts val="0"/>
+              </a:spcAft>
+              <a:defRPr sz="1425" b="1" i="0" lang="zh-CN" dirty="0">
+                <a:solidFill>
+                  <a:srgbClr val="0F4F58"/>
+                </a:solidFill>
+                <a:latin typeface="Noto Sans CJK SC"/>
+                <a:ea typeface="Noto Sans CJK SC"/>
+                <a:cs typeface="Noto Sans CJK SC"/>
+              </a:defRPr>
+            </a:pPr>
+            <a:r>
+              <a:rPr sz="1425" b="1" i="0" lang="zh-CN" dirty="0">
+                <a:solidFill>
+                  <a:srgbClr val="0F4F58"/>
+                </a:solidFill>
+                <a:latin typeface="Noto Sans CJK SC"/>
+                <a:ea typeface="Noto Sans CJK SC"/>
+                <a:cs typeface="Noto Sans CJK SC"/>
+              </a:rPr>
+              <a:t>高温溶液长晶</a:t>
+            </a:r>
+          </a:p>
+        </p:txBody>
+      </p:sp>
+      <p:sp>
+        <p:nvSpPr>
+          <p:cNvPr id="98" name="l2c_t0" descr="Editable shape; source id l2c_t0"/>
+          <p:cNvSpPr/>
+          <p:nvPr/>
+        </p:nvSpPr>
+        <p:spPr>
+          <a:xfrm>
+            <a:off x="7238999" y="3000374"/>
+            <a:ext cx="722312" cy="365124"/>
+          </a:xfrm>
+          <a:prstGeom prst="roundRect">
+            <a:avLst>
+              <a:gd name="adj" fmla="val 13043"/>
+            </a:avLst>
+          </a:prstGeom>
+          <a:solidFill>
+            <a:srgbClr val="F7F9FB"/>
+          </a:solidFill>
+          <a:ln w="9524">
+            <a:solidFill>
+              <a:srgbClr val="CBD3DA"/>
+            </a:solidFill>
+          </a:ln>
+          <a:effectLst/>
+        </p:spPr>
+        <p:style>
+          <a:lnRef idx="1">
+            <a:schemeClr val="accent1"/>
+          </a:lnRef>
+          <a:fillRef idx="3">
+            <a:schemeClr val="accent1"/>
+          </a:fillRef>
+          <a:effectRef idx="0">
+            <a:schemeClr val="accent1"/>
+          </a:effectRef>
+          <a:fontRef idx="minor">
+            <a:schemeClr val="lt1"/>
+          </a:fontRef>
+        </p:style>
+        <p:txBody>
+          <a:bodyPr rtlCol="0" anchor="ctr"/>
+          <a:lstStyle/>
+          <a:p>
+            <a:pPr algn="ctr"/>
+          </a:p>
+        </p:txBody>
+      </p:sp>
+      <p:sp>
+        <p:nvSpPr>
+          <p:cNvPr id="99" name="l2c_t0_t" descr="Editable text; source id l2c_t0_t"/>
+          <p:cNvSpPr txBox="1"/>
+          <p:nvPr/>
+        </p:nvSpPr>
+        <p:spPr>
+          <a:xfrm>
+            <a:off x="7294562" y="3032124"/>
+            <a:ext cx="611187" cy="301624"/>
+          </a:xfrm>
+          <a:prstGeom prst="rect">
+            <a:avLst/>
+          </a:prstGeom>
+          <a:noFill/>
+          <a:effectLst/>
+        </p:spPr>
+        <p:txBody>
+          <a:bodyPr wrap="none" anchor="ctr" tIns="0" rIns="0" bIns="0" lIns="0" anchorCtr="0" vertOverflow="overflow">
+            <a:noAutofit/>
+          </a:bodyPr>
+          <a:lstStyle/>
+          <a:p>
+            <a:pPr algn="ctr" fontAlgn="base">
+              <a:lnSpc>
+                <a:spcPts val="1562"/>
+              </a:lnSpc>
+              <a:spcBef>
+                <a:spcPts val="0"/>
+              </a:spcBef>
+              <a:spcAft>
+                <a:spcPts val="0"/>
+              </a:spcAft>
+              <a:defRPr sz="1074" b="0" i="0" lang="zh-CN" dirty="0">
                 <a:solidFill>
                   <a:srgbClr val="3F4854"/>
                 </a:solidFill>
@@ -5609,7 +8095,7 @@
               </a:defRPr>
             </a:pPr>
             <a:r>
-              <a:rPr sz="1002" b="0" i="0" lang="zh-CN" dirty="0">
+              <a:rPr sz="1074" b="0" i="0" lang="zh-CN" dirty="0">
                 <a:solidFill>
                   <a:srgbClr val="3F4854"/>
                 </a:solidFill>
@@ -5617,33 +8103,33 @@
                 <a:ea typeface="Noto Sans CJK SC"/>
                 <a:cs typeface="Noto Sans CJK SC"/>
               </a:rPr>
-              <a:t>批量相区与相纯度</a:t>
+              <a:t>助熔</a:t>
             </a:r>
           </a:p>
         </p:txBody>
       </p:sp>
       <p:sp>
         <p:nvSpPr>
-          <p:cNvPr id="44" name="l2" descr="Editable shape; source id l2"/>
+          <p:cNvPr id="100" name="l2c_t1" descr="Editable shape; source id l2c_t1"/>
           <p:cNvSpPr/>
           <p:nvPr/>
         </p:nvSpPr>
         <p:spPr>
           <a:xfrm>
-            <a:off x="6605060" y="2017152"/>
-            <a:ext cx="2335315" cy="1349010"/>
+            <a:off x="8088312" y="3000374"/>
+            <a:ext cx="722312" cy="365124"/>
           </a:xfrm>
           <a:prstGeom prst="roundRect">
             <a:avLst>
-              <a:gd name="adj" fmla="val 4716"/>
+              <a:gd name="adj" fmla="val 13043"/>
             </a:avLst>
           </a:prstGeom>
           <a:solidFill>
-            <a:srgbClr val="FFFFFF"/>
+            <a:srgbClr val="F7F9FB"/>
           </a:solidFill>
-          <a:ln w="9544">
+          <a:ln w="9524">
             <a:solidFill>
-              <a:srgbClr val="1F7F8C"/>
+              <a:srgbClr val="CBD3DA"/>
             </a:solidFill>
           </a:ln>
           <a:effectLst/>
@@ -5672,85 +8158,14 @@
       </p:sp>
       <p:sp>
         <p:nvSpPr>
-          <p:cNvPr id="45" name="l2_s" descr="Editable shape; source id l2_s"/>
-          <p:cNvSpPr/>
-          <p:nvPr/>
-        </p:nvSpPr>
-        <p:spPr>
-          <a:xfrm>
-            <a:off x="6605060" y="2017152"/>
-            <a:ext cx="2335315" cy="50906"/>
-          </a:xfrm>
-          <a:prstGeom prst="roundRect">
-            <a:avLst>
-              <a:gd name="adj" fmla="val 50000"/>
-            </a:avLst>
-          </a:prstGeom>
-          <a:solidFill>
-            <a:srgbClr val="1F7F8C"/>
-          </a:solidFill>
-          <a:ln>
-            <a:noFill/>
-          </a:ln>
-          <a:effectLst/>
-        </p:spPr>
-        <p:style>
-          <a:lnRef idx="1">
-            <a:schemeClr val="accent1"/>
-          </a:lnRef>
-          <a:fillRef idx="3">
-            <a:schemeClr val="accent1"/>
-          </a:fillRef>
-          <a:effectRef idx="0">
-            <a:schemeClr val="accent1"/>
-          </a:effectRef>
-          <a:fontRef idx="minor">
-            <a:schemeClr val="lt1"/>
-          </a:fontRef>
-        </p:style>
-        <p:txBody>
-          <a:bodyPr rtlCol="0" anchor="ctr"/>
-          <a:lstStyle/>
-          <a:p>
-            <a:pPr algn="ctr"/>
-          </a:p>
-        </p:txBody>
-      </p:sp>
-      <p:pic>
-        <p:nvPicPr>
-          <p:cNvPr id="46" name="l2_i" descr="exact crop of the generated raster (line motif)"/>
-          <p:cNvPicPr>
-            <a:picLocks noChangeAspect="1"/>
-          </p:cNvPicPr>
-          <p:nvPr/>
-        </p:nvPicPr>
-        <p:blipFill>
-          <a:blip r:embed="rId6"/>
-          <a:stretch>
-            <a:fillRect/>
-          </a:stretch>
-        </p:blipFill>
-        <p:spPr>
-          <a:xfrm>
-            <a:off x="6723150" y="2150780"/>
-            <a:ext cx="247427" cy="279983"/>
-          </a:xfrm>
-          <a:prstGeom prst="rect">
-            <a:avLst/>
-          </a:prstGeom>
-          <a:effectLst/>
-        </p:spPr>
-      </p:pic>
-      <p:sp>
-        <p:nvSpPr>
-          <p:cNvPr id="47" name="l2_t" descr="Editable text; source id l2_t"/>
+          <p:cNvPr id="101" name="l2c_t1_t" descr="Editable text; source id l2c_t1_t"/>
           <p:cNvSpPr txBox="1"/>
           <p:nvPr/>
         </p:nvSpPr>
         <p:spPr>
           <a:xfrm>
-            <a:off x="7063214" y="2169870"/>
-            <a:ext cx="1775348" cy="248167"/>
+            <a:off x="8143874" y="3032124"/>
+            <a:ext cx="611187" cy="301624"/>
           </a:xfrm>
           <a:prstGeom prst="rect">
             <a:avLst/>
@@ -5764,9 +8179,9 @@
           </a:bodyPr>
           <a:lstStyle/>
           <a:p>
-            <a:pPr algn="l" fontAlgn="base">
+            <a:pPr algn="ctr" fontAlgn="base">
               <a:lnSpc>
-                <a:spcPts val="1728"/>
+                <a:spcPts val="1562"/>
               </a:lnSpc>
               <a:spcBef>
                 <a:spcPts val="0"/>
@@ -5774,7 +8189,363 @@
               <a:spcAft>
                 <a:spcPts val="0"/>
               </a:spcAft>
-              <a:defRPr sz="1187" b="1" i="0" lang="zh-CN" dirty="0">
+              <a:defRPr sz="1074" b="0" i="0" lang="zh-CN" dirty="0">
+                <a:solidFill>
+                  <a:srgbClr val="3F4854"/>
+                </a:solidFill>
+                <a:latin typeface="Noto Sans CJK SC"/>
+                <a:ea typeface="Noto Sans CJK SC"/>
+                <a:cs typeface="Noto Sans CJK SC"/>
+              </a:defRPr>
+            </a:pPr>
+            <a:r>
+              <a:rPr sz="1074" b="0" i="0" lang="zh-CN" dirty="0">
+                <a:solidFill>
+                  <a:srgbClr val="3F4854"/>
+                </a:solidFill>
+                <a:latin typeface="Noto Sans CJK SC"/>
+                <a:ea typeface="Noto Sans CJK SC"/>
+                <a:cs typeface="Noto Sans CJK SC"/>
+              </a:rPr>
+              <a:t>保温</a:t>
+            </a:r>
+          </a:p>
+        </p:txBody>
+      </p:sp>
+      <p:sp>
+        <p:nvSpPr>
+          <p:cNvPr id="102" name="l2c_a1" descr="Editable line; source id l2c_a1"/>
+          <p:cNvSpPr/>
+          <p:nvPr/>
+        </p:nvSpPr>
+        <p:spPr>
+          <a:xfrm>
+            <a:off x="7985125" y="3163292"/>
+            <a:ext cx="79375" cy="39291"/>
+          </a:xfrm>
+          <a:custGeom>
+            <a:avLst/>
+            <a:gdLst/>
+            <a:ahLst/>
+            <a:cxnLst/>
+            <a:rect l="l" t="t" r="r" b="b"/>
+            <a:pathLst>
+              <a:path w="10000" h="4950">
+                <a:moveTo>
+                  <a:pt x="0" y="1675"/>
+                </a:moveTo>
+                <a:lnTo>
+                  <a:pt x="4500" y="1675"/>
+                </a:lnTo>
+                <a:lnTo>
+                  <a:pt x="4500" y="0"/>
+                </a:lnTo>
+                <a:lnTo>
+                  <a:pt x="10000" y="2475"/>
+                </a:lnTo>
+                <a:lnTo>
+                  <a:pt x="4500" y="4950"/>
+                </a:lnTo>
+                <a:lnTo>
+                  <a:pt x="4500" y="3275"/>
+                </a:lnTo>
+                <a:lnTo>
+                  <a:pt x="0" y="3275"/>
+                </a:lnTo>
+                <a:close/>
+              </a:path>
+            </a:pathLst>
+          </a:custGeom>
+          <a:solidFill>
+            <a:srgbClr val="4B5563"/>
+          </a:solidFill>
+          <a:ln>
+            <a:noFill/>
+          </a:ln>
+          <a:effectLst/>
+        </p:spPr>
+        <p:style>
+          <a:lnRef idx="1">
+            <a:schemeClr val="accent1"/>
+          </a:lnRef>
+          <a:fillRef idx="3">
+            <a:schemeClr val="accent1"/>
+          </a:fillRef>
+          <a:effectRef idx="0">
+            <a:schemeClr val="accent1"/>
+          </a:effectRef>
+          <a:fontRef idx="minor">
+            <a:schemeClr val="lt1"/>
+          </a:fontRef>
+        </p:style>
+        <p:txBody>
+          <a:bodyPr rtlCol="0" anchor="ctr"/>
+          <a:lstStyle/>
+          <a:p>
+            <a:pPr algn="ctr"/>
+          </a:p>
+        </p:txBody>
+      </p:sp>
+      <p:sp>
+        <p:nvSpPr>
+          <p:cNvPr id="103" name="l2c_t2" descr="Editable shape; source id l2c_t2"/>
+          <p:cNvSpPr/>
+          <p:nvPr/>
+        </p:nvSpPr>
+        <p:spPr>
+          <a:xfrm>
+            <a:off x="8945562" y="3000374"/>
+            <a:ext cx="722312" cy="365124"/>
+          </a:xfrm>
+          <a:prstGeom prst="roundRect">
+            <a:avLst>
+              <a:gd name="adj" fmla="val 13043"/>
+            </a:avLst>
+          </a:prstGeom>
+          <a:solidFill>
+            <a:srgbClr val="F7F9FB"/>
+          </a:solidFill>
+          <a:ln w="9524">
+            <a:solidFill>
+              <a:srgbClr val="CBD3DA"/>
+            </a:solidFill>
+          </a:ln>
+          <a:effectLst/>
+        </p:spPr>
+        <p:style>
+          <a:lnRef idx="1">
+            <a:schemeClr val="accent1"/>
+          </a:lnRef>
+          <a:fillRef idx="3">
+            <a:schemeClr val="accent1"/>
+          </a:fillRef>
+          <a:effectRef idx="0">
+            <a:schemeClr val="accent1"/>
+          </a:effectRef>
+          <a:fontRef idx="minor">
+            <a:schemeClr val="lt1"/>
+          </a:fontRef>
+        </p:style>
+        <p:txBody>
+          <a:bodyPr rtlCol="0" anchor="ctr"/>
+          <a:lstStyle/>
+          <a:p>
+            <a:pPr algn="ctr"/>
+          </a:p>
+        </p:txBody>
+      </p:sp>
+      <p:sp>
+        <p:nvSpPr>
+          <p:cNvPr id="104" name="l2c_t2_t" descr="Editable text; source id l2c_t2_t"/>
+          <p:cNvSpPr txBox="1"/>
+          <p:nvPr/>
+        </p:nvSpPr>
+        <p:spPr>
+          <a:xfrm>
+            <a:off x="9001124" y="3032124"/>
+            <a:ext cx="611187" cy="301624"/>
+          </a:xfrm>
+          <a:prstGeom prst="rect">
+            <a:avLst/>
+          </a:prstGeom>
+          <a:noFill/>
+          <a:effectLst/>
+        </p:spPr>
+        <p:txBody>
+          <a:bodyPr wrap="none" anchor="ctr" tIns="0" rIns="0" bIns="0" lIns="0" anchorCtr="0" vertOverflow="overflow">
+            <a:noAutofit/>
+          </a:bodyPr>
+          <a:lstStyle/>
+          <a:p>
+            <a:pPr algn="ctr" fontAlgn="base">
+              <a:lnSpc>
+                <a:spcPts val="1562"/>
+              </a:lnSpc>
+              <a:spcBef>
+                <a:spcPts val="0"/>
+              </a:spcBef>
+              <a:spcAft>
+                <a:spcPts val="0"/>
+              </a:spcAft>
+              <a:defRPr sz="1074" b="0" i="0" lang="zh-CN" dirty="0">
+                <a:solidFill>
+                  <a:srgbClr val="3F4854"/>
+                </a:solidFill>
+                <a:latin typeface="Noto Sans CJK SC"/>
+                <a:ea typeface="Noto Sans CJK SC"/>
+                <a:cs typeface="Noto Sans CJK SC"/>
+              </a:defRPr>
+            </a:pPr>
+            <a:r>
+              <a:rPr sz="1074" b="0" i="0" lang="zh-CN" dirty="0">
+                <a:solidFill>
+                  <a:srgbClr val="3F4854"/>
+                </a:solidFill>
+                <a:latin typeface="Noto Sans CJK SC"/>
+                <a:ea typeface="Noto Sans CJK SC"/>
+                <a:cs typeface="Noto Sans CJK SC"/>
+              </a:rPr>
+              <a:t>慢冷</a:t>
+            </a:r>
+          </a:p>
+        </p:txBody>
+      </p:sp>
+      <p:sp>
+        <p:nvSpPr>
+          <p:cNvPr id="105" name="l2c_a2" descr="Editable line; source id l2c_a2"/>
+          <p:cNvSpPr/>
+          <p:nvPr/>
+        </p:nvSpPr>
+        <p:spPr>
+          <a:xfrm>
+            <a:off x="8842375" y="3163292"/>
+            <a:ext cx="79375" cy="39291"/>
+          </a:xfrm>
+          <a:custGeom>
+            <a:avLst/>
+            <a:gdLst/>
+            <a:ahLst/>
+            <a:cxnLst/>
+            <a:rect l="l" t="t" r="r" b="b"/>
+            <a:pathLst>
+              <a:path w="10000" h="4950">
+                <a:moveTo>
+                  <a:pt x="0" y="1675"/>
+                </a:moveTo>
+                <a:lnTo>
+                  <a:pt x="4500" y="1675"/>
+                </a:lnTo>
+                <a:lnTo>
+                  <a:pt x="4500" y="0"/>
+                </a:lnTo>
+                <a:lnTo>
+                  <a:pt x="10000" y="2475"/>
+                </a:lnTo>
+                <a:lnTo>
+                  <a:pt x="4500" y="4950"/>
+                </a:lnTo>
+                <a:lnTo>
+                  <a:pt x="4500" y="3275"/>
+                </a:lnTo>
+                <a:lnTo>
+                  <a:pt x="0" y="3275"/>
+                </a:lnTo>
+                <a:close/>
+              </a:path>
+            </a:pathLst>
+          </a:custGeom>
+          <a:solidFill>
+            <a:srgbClr val="4B5563"/>
+          </a:solidFill>
+          <a:ln>
+            <a:noFill/>
+          </a:ln>
+          <a:effectLst/>
+        </p:spPr>
+        <p:style>
+          <a:lnRef idx="1">
+            <a:schemeClr val="accent1"/>
+          </a:lnRef>
+          <a:fillRef idx="3">
+            <a:schemeClr val="accent1"/>
+          </a:fillRef>
+          <a:effectRef idx="0">
+            <a:schemeClr val="accent1"/>
+          </a:effectRef>
+          <a:fontRef idx="minor">
+            <a:schemeClr val="lt1"/>
+          </a:fontRef>
+        </p:style>
+        <p:txBody>
+          <a:bodyPr rtlCol="0" anchor="ctr"/>
+          <a:lstStyle/>
+          <a:p>
+            <a:pPr algn="ctr"/>
+          </a:p>
+        </p:txBody>
+      </p:sp>
+      <p:sp>
+        <p:nvSpPr>
+          <p:cNvPr id="106" name="l2_o" descr="Editable shape; source id l2_o"/>
+          <p:cNvSpPr/>
+          <p:nvPr/>
+        </p:nvSpPr>
+        <p:spPr>
+          <a:xfrm>
+            <a:off x="7238999" y="3428999"/>
+            <a:ext cx="2428874" cy="333374"/>
+          </a:xfrm>
+          <a:prstGeom prst="roundRect">
+            <a:avLst>
+              <a:gd name="adj" fmla="val 14285"/>
+            </a:avLst>
+          </a:prstGeom>
+          <a:solidFill>
+            <a:srgbClr val="E6F2F3"/>
+          </a:solidFill>
+          <a:ln w="9524">
+            <a:solidFill>
+              <a:srgbClr val="1F7F8C"/>
+            </a:solidFill>
+          </a:ln>
+          <a:effectLst/>
+        </p:spPr>
+        <p:style>
+          <a:lnRef idx="1">
+            <a:schemeClr val="accent1"/>
+          </a:lnRef>
+          <a:fillRef idx="3">
+            <a:schemeClr val="accent1"/>
+          </a:fillRef>
+          <a:effectRef idx="0">
+            <a:schemeClr val="accent1"/>
+          </a:effectRef>
+          <a:fontRef idx="minor">
+            <a:schemeClr val="lt1"/>
+          </a:fontRef>
+        </p:style>
+        <p:txBody>
+          <a:bodyPr rtlCol="0" anchor="ctr"/>
+          <a:lstStyle/>
+          <a:p>
+            <a:pPr algn="ctr"/>
+          </a:p>
+        </p:txBody>
+      </p:sp>
+      <p:sp>
+        <p:nvSpPr>
+          <p:cNvPr id="107" name="l2_o_t" descr="Editable text; source id l2_o_t"/>
+          <p:cNvSpPr txBox="1"/>
+          <p:nvPr/>
+        </p:nvSpPr>
+        <p:spPr>
+          <a:xfrm>
+            <a:off x="7294562" y="3460749"/>
+            <a:ext cx="2317749" cy="269874"/>
+          </a:xfrm>
+          <a:prstGeom prst="rect">
+            <a:avLst/>
+          </a:prstGeom>
+          <a:noFill/>
+          <a:effectLst/>
+        </p:spPr>
+        <p:txBody>
+          <a:bodyPr wrap="none" anchor="ctr" tIns="0" rIns="0" bIns="0" lIns="0" anchorCtr="0" vertOverflow="overflow">
+            <a:noAutofit/>
+          </a:bodyPr>
+          <a:lstStyle/>
+          <a:p>
+            <a:pPr algn="ctr" fontAlgn="base">
+              <a:lnSpc>
+                <a:spcPts val="1656"/>
+              </a:lnSpc>
+              <a:spcBef>
+                <a:spcPts val="0"/>
+              </a:spcBef>
+              <a:spcAft>
+                <a:spcPts val="0"/>
+              </a:spcAft>
+              <a:defRPr sz="1134" b="1" i="0" lang="zh-CN" dirty="0">
                 <a:solidFill>
                   <a:srgbClr val="0F4F58"/>
                 </a:solidFill>
@@ -5784,7 +8555,7 @@
               </a:defRPr>
             </a:pPr>
             <a:r>
-              <a:rPr sz="1187" b="1" i="0" lang="zh-CN" dirty="0">
+              <a:rPr sz="1134" b="1" i="0" lang="zh-CN" dirty="0">
                 <a:solidFill>
                   <a:srgbClr val="0F4F58"/>
                 </a:solidFill>
@@ -5792,21 +8563,547 @@
                 <a:ea typeface="Noto Sans CJK SC"/>
                 <a:cs typeface="Noto Sans CJK SC"/>
               </a:rPr>
-              <a:t>高温溶液长晶</a:t>
+              <a:t>单晶结构与液相选择性</a:t>
             </a:r>
           </a:p>
         </p:txBody>
       </p:sp>
       <p:sp>
         <p:nvSpPr>
-          <p:cNvPr id="48" name="l2_k0" descr="Editable text; source id l2_k0"/>
+          <p:cNvPr id="108" name="c5" descr="Editable shape; source id c5"/>
+          <p:cNvSpPr/>
+          <p:nvPr/>
+        </p:nvSpPr>
+        <p:spPr>
+          <a:xfrm>
+            <a:off x="10191749" y="888999"/>
+            <a:ext cx="1635124" cy="2936874"/>
+          </a:xfrm>
+          <a:prstGeom prst="roundRect">
+            <a:avLst>
+              <a:gd name="adj" fmla="val 4368"/>
+            </a:avLst>
+          </a:prstGeom>
+          <a:solidFill>
+            <a:srgbClr val="FFFFFF"/>
+          </a:solidFill>
+          <a:ln w="11112">
+            <a:solidFill>
+              <a:srgbClr val="5B7592"/>
+            </a:solidFill>
+          </a:ln>
+          <a:effectLst/>
+        </p:spPr>
+        <p:style>
+          <a:lnRef idx="1">
+            <a:schemeClr val="accent1"/>
+          </a:lnRef>
+          <a:fillRef idx="3">
+            <a:schemeClr val="accent1"/>
+          </a:fillRef>
+          <a:effectRef idx="0">
+            <a:schemeClr val="accent1"/>
+          </a:effectRef>
+          <a:fontRef idx="minor">
+            <a:schemeClr val="lt1"/>
+          </a:fontRef>
+        </p:style>
+        <p:txBody>
+          <a:bodyPr rtlCol="0" anchor="ctr"/>
+          <a:lstStyle/>
+          <a:p>
+            <a:pPr algn="ctr"/>
+          </a:p>
+        </p:txBody>
+      </p:sp>
+      <p:sp>
+        <p:nvSpPr>
+          <p:cNvPr id="109" name="c5_a" descr="Editable shape; source id c5_a"/>
+          <p:cNvSpPr/>
+          <p:nvPr/>
+        </p:nvSpPr>
+        <p:spPr>
+          <a:xfrm>
+            <a:off x="10191749" y="888999"/>
+            <a:ext cx="1635124" cy="47624"/>
+          </a:xfrm>
+          <a:prstGeom prst="roundRect">
+            <a:avLst>
+              <a:gd name="adj" fmla="val 50000"/>
+            </a:avLst>
+          </a:prstGeom>
+          <a:solidFill>
+            <a:srgbClr val="5B7592"/>
+          </a:solidFill>
+          <a:ln>
+            <a:noFill/>
+          </a:ln>
+          <a:effectLst/>
+        </p:spPr>
+        <p:style>
+          <a:lnRef idx="1">
+            <a:schemeClr val="accent1"/>
+          </a:lnRef>
+          <a:fillRef idx="3">
+            <a:schemeClr val="accent1"/>
+          </a:fillRef>
+          <a:effectRef idx="0">
+            <a:schemeClr val="accent1"/>
+          </a:effectRef>
+          <a:fontRef idx="minor">
+            <a:schemeClr val="lt1"/>
+          </a:fontRef>
+        </p:style>
+        <p:txBody>
+          <a:bodyPr rtlCol="0" anchor="ctr"/>
+          <a:lstStyle/>
+          <a:p>
+            <a:pPr algn="ctr"/>
+          </a:p>
+        </p:txBody>
+      </p:sp>
+      <p:cxnSp>
+        <p:nvCxnSpPr>
+          <p:cNvPr id="110" name="c5_g_a_0" descr="Editable line; source id c5_g_a_0"/>
+          <p:cNvCxnSpPr/>
+          <p:nvPr/>
+        </p:nvCxnSpPr>
+        <p:spPr>
+          <a:xfrm>
+            <a:off x="10882312" y="1309687"/>
+            <a:ext cx="47625" cy="0"/>
+          </a:xfrm>
+          <a:prstGeom prst="line">
+            <a:avLst/>
+          </a:prstGeom>
+          <a:ln w="7937">
+            <a:solidFill>
+              <a:srgbClr val="1F2937"/>
+            </a:solidFill>
+          </a:ln>
+          <a:effectLst/>
+        </p:spPr>
+        <p:style>
+          <a:lnRef idx="2">
+            <a:schemeClr val="accent1"/>
+          </a:lnRef>
+          <a:fillRef idx="0">
+            <a:schemeClr val="accent1"/>
+          </a:fillRef>
+          <a:effectRef idx="0">
+            <a:schemeClr val="accent1"/>
+          </a:effectRef>
+          <a:fontRef idx="minor">
+            <a:schemeClr val="tx1"/>
+          </a:fontRef>
+        </p:style>
+      </p:cxnSp>
+      <p:cxnSp>
+        <p:nvCxnSpPr>
+          <p:cNvPr id="111" name="c5_g_a_1" descr="Editable line; source id c5_g_a_1"/>
+          <p:cNvCxnSpPr/>
+          <p:nvPr/>
+        </p:nvCxnSpPr>
+        <p:spPr>
+          <a:xfrm flipV="1">
+            <a:off x="10929937" y="1158874"/>
+            <a:ext cx="23812" cy="150813"/>
+          </a:xfrm>
+          <a:prstGeom prst="line">
+            <a:avLst/>
+          </a:prstGeom>
+          <a:ln w="7937">
+            <a:solidFill>
+              <a:srgbClr val="1F2937"/>
+            </a:solidFill>
+          </a:ln>
+          <a:effectLst/>
+        </p:spPr>
+        <p:style>
+          <a:lnRef idx="2">
+            <a:schemeClr val="accent1"/>
+          </a:lnRef>
+          <a:fillRef idx="0">
+            <a:schemeClr val="accent1"/>
+          </a:fillRef>
+          <a:effectRef idx="0">
+            <a:schemeClr val="accent1"/>
+          </a:effectRef>
+          <a:fontRef idx="minor">
+            <a:schemeClr val="tx1"/>
+          </a:fontRef>
+        </p:style>
+      </p:cxnSp>
+      <p:cxnSp>
+        <p:nvCxnSpPr>
+          <p:cNvPr id="112" name="c5_g_a_2" descr="Editable line; source id c5_g_a_2"/>
+          <p:cNvCxnSpPr/>
+          <p:nvPr/>
+        </p:nvCxnSpPr>
+        <p:spPr>
+          <a:xfrm>
+            <a:off x="10953749" y="1158874"/>
+            <a:ext cx="15875" cy="150813"/>
+          </a:xfrm>
+          <a:prstGeom prst="line">
+            <a:avLst/>
+          </a:prstGeom>
+          <a:ln w="7937">
+            <a:solidFill>
+              <a:srgbClr val="1F2937"/>
+            </a:solidFill>
+          </a:ln>
+          <a:effectLst/>
+        </p:spPr>
+        <p:style>
+          <a:lnRef idx="2">
+            <a:schemeClr val="accent1"/>
+          </a:lnRef>
+          <a:fillRef idx="0">
+            <a:schemeClr val="accent1"/>
+          </a:fillRef>
+          <a:effectRef idx="0">
+            <a:schemeClr val="accent1"/>
+          </a:effectRef>
+          <a:fontRef idx="minor">
+            <a:schemeClr val="tx1"/>
+          </a:fontRef>
+        </p:style>
+      </p:cxnSp>
+      <p:cxnSp>
+        <p:nvCxnSpPr>
+          <p:cNvPr id="113" name="c5_g_a_3" descr="Editable line; source id c5_g_a_3"/>
+          <p:cNvCxnSpPr/>
+          <p:nvPr/>
+        </p:nvCxnSpPr>
+        <p:spPr>
+          <a:xfrm>
+            <a:off x="10969624" y="1309687"/>
+            <a:ext cx="39688" cy="0"/>
+          </a:xfrm>
+          <a:prstGeom prst="line">
+            <a:avLst/>
+          </a:prstGeom>
+          <a:ln w="7937">
+            <a:solidFill>
+              <a:srgbClr val="1F2937"/>
+            </a:solidFill>
+          </a:ln>
+          <a:effectLst/>
+        </p:spPr>
+        <p:style>
+          <a:lnRef idx="2">
+            <a:schemeClr val="accent1"/>
+          </a:lnRef>
+          <a:fillRef idx="0">
+            <a:schemeClr val="accent1"/>
+          </a:fillRef>
+          <a:effectRef idx="0">
+            <a:schemeClr val="accent1"/>
+          </a:effectRef>
+          <a:fontRef idx="minor">
+            <a:schemeClr val="tx1"/>
+          </a:fontRef>
+        </p:style>
+      </p:cxnSp>
+      <p:cxnSp>
+        <p:nvCxnSpPr>
+          <p:cNvPr id="114" name="c5_g_a_4" descr="Editable line; source id c5_g_a_4"/>
+          <p:cNvCxnSpPr/>
+          <p:nvPr/>
+        </p:nvCxnSpPr>
+        <p:spPr>
+          <a:xfrm flipV="1">
+            <a:off x="11009312" y="1206499"/>
+            <a:ext cx="15875" cy="103188"/>
+          </a:xfrm>
+          <a:prstGeom prst="line">
+            <a:avLst/>
+          </a:prstGeom>
+          <a:ln w="7937">
+            <a:solidFill>
+              <a:srgbClr val="1F2937"/>
+            </a:solidFill>
+          </a:ln>
+          <a:effectLst/>
+        </p:spPr>
+        <p:style>
+          <a:lnRef idx="2">
+            <a:schemeClr val="accent1"/>
+          </a:lnRef>
+          <a:fillRef idx="0">
+            <a:schemeClr val="accent1"/>
+          </a:fillRef>
+          <a:effectRef idx="0">
+            <a:schemeClr val="accent1"/>
+          </a:effectRef>
+          <a:fontRef idx="minor">
+            <a:schemeClr val="tx1"/>
+          </a:fontRef>
+        </p:style>
+      </p:cxnSp>
+      <p:cxnSp>
+        <p:nvCxnSpPr>
+          <p:cNvPr id="115" name="c5_g_a_5" descr="Editable line; source id c5_g_a_5"/>
+          <p:cNvCxnSpPr/>
+          <p:nvPr/>
+        </p:nvCxnSpPr>
+        <p:spPr>
+          <a:xfrm>
+            <a:off x="11025187" y="1206499"/>
+            <a:ext cx="23812" cy="103188"/>
+          </a:xfrm>
+          <a:prstGeom prst="line">
+            <a:avLst/>
+          </a:prstGeom>
+          <a:ln w="7937">
+            <a:solidFill>
+              <a:srgbClr val="1F2937"/>
+            </a:solidFill>
+          </a:ln>
+          <a:effectLst/>
+        </p:spPr>
+        <p:style>
+          <a:lnRef idx="2">
+            <a:schemeClr val="accent1"/>
+          </a:lnRef>
+          <a:fillRef idx="0">
+            <a:schemeClr val="accent1"/>
+          </a:fillRef>
+          <a:effectRef idx="0">
+            <a:schemeClr val="accent1"/>
+          </a:effectRef>
+          <a:fontRef idx="minor">
+            <a:schemeClr val="tx1"/>
+          </a:fontRef>
+        </p:style>
+      </p:cxnSp>
+      <p:cxnSp>
+        <p:nvCxnSpPr>
+          <p:cNvPr id="116" name="c5_g_a_6" descr="Editable line; source id c5_g_a_6"/>
+          <p:cNvCxnSpPr/>
+          <p:nvPr/>
+        </p:nvCxnSpPr>
+        <p:spPr>
+          <a:xfrm>
+            <a:off x="11048999" y="1309687"/>
+            <a:ext cx="39688" cy="0"/>
+          </a:xfrm>
+          <a:prstGeom prst="line">
+            <a:avLst/>
+          </a:prstGeom>
+          <a:ln w="7937">
+            <a:solidFill>
+              <a:srgbClr val="1F2937"/>
+            </a:solidFill>
+          </a:ln>
+          <a:effectLst/>
+        </p:spPr>
+        <p:style>
+          <a:lnRef idx="2">
+            <a:schemeClr val="accent1"/>
+          </a:lnRef>
+          <a:fillRef idx="0">
+            <a:schemeClr val="accent1"/>
+          </a:fillRef>
+          <a:effectRef idx="0">
+            <a:schemeClr val="accent1"/>
+          </a:effectRef>
+          <a:fontRef idx="minor">
+            <a:schemeClr val="tx1"/>
+          </a:fontRef>
+        </p:style>
+      </p:cxnSp>
+      <p:cxnSp>
+        <p:nvCxnSpPr>
+          <p:cNvPr id="117" name="c5_g_a_7" descr="Editable line; source id c5_g_a_7"/>
+          <p:cNvCxnSpPr/>
+          <p:nvPr/>
+        </p:nvCxnSpPr>
+        <p:spPr>
+          <a:xfrm flipV="1">
+            <a:off x="11088687" y="1246187"/>
+            <a:ext cx="7937" cy="63500"/>
+          </a:xfrm>
+          <a:prstGeom prst="line">
+            <a:avLst/>
+          </a:prstGeom>
+          <a:ln w="7937">
+            <a:solidFill>
+              <a:srgbClr val="1F2937"/>
+            </a:solidFill>
+          </a:ln>
+          <a:effectLst/>
+        </p:spPr>
+        <p:style>
+          <a:lnRef idx="2">
+            <a:schemeClr val="accent1"/>
+          </a:lnRef>
+          <a:fillRef idx="0">
+            <a:schemeClr val="accent1"/>
+          </a:fillRef>
+          <a:effectRef idx="0">
+            <a:schemeClr val="accent1"/>
+          </a:effectRef>
+          <a:fontRef idx="minor">
+            <a:schemeClr val="tx1"/>
+          </a:fontRef>
+        </p:style>
+      </p:cxnSp>
+      <p:cxnSp>
+        <p:nvCxnSpPr>
+          <p:cNvPr id="118" name="c5_g_a_8" descr="Editable line; source id c5_g_a_8"/>
+          <p:cNvCxnSpPr/>
+          <p:nvPr/>
+        </p:nvCxnSpPr>
+        <p:spPr>
+          <a:xfrm>
+            <a:off x="11096624" y="1246187"/>
+            <a:ext cx="15875" cy="63500"/>
+          </a:xfrm>
+          <a:prstGeom prst="line">
+            <a:avLst/>
+          </a:prstGeom>
+          <a:ln w="7937">
+            <a:solidFill>
+              <a:srgbClr val="1F2937"/>
+            </a:solidFill>
+          </a:ln>
+          <a:effectLst/>
+        </p:spPr>
+        <p:style>
+          <a:lnRef idx="2">
+            <a:schemeClr val="accent1"/>
+          </a:lnRef>
+          <a:fillRef idx="0">
+            <a:schemeClr val="accent1"/>
+          </a:fillRef>
+          <a:effectRef idx="0">
+            <a:schemeClr val="accent1"/>
+          </a:effectRef>
+          <a:fontRef idx="minor">
+            <a:schemeClr val="tx1"/>
+          </a:fontRef>
+        </p:style>
+      </p:cxnSp>
+      <p:cxnSp>
+        <p:nvCxnSpPr>
+          <p:cNvPr id="119" name="c5_g_a_9" descr="Editable line; source id c5_g_a_9"/>
+          <p:cNvCxnSpPr/>
+          <p:nvPr/>
+        </p:nvCxnSpPr>
+        <p:spPr>
+          <a:xfrm>
+            <a:off x="11112499" y="1309687"/>
+            <a:ext cx="31750" cy="0"/>
+          </a:xfrm>
+          <a:prstGeom prst="line">
+            <a:avLst/>
+          </a:prstGeom>
+          <a:ln w="7937">
+            <a:solidFill>
+              <a:srgbClr val="1F2937"/>
+            </a:solidFill>
+          </a:ln>
+          <a:effectLst/>
+        </p:spPr>
+        <p:style>
+          <a:lnRef idx="2">
+            <a:schemeClr val="accent1"/>
+          </a:lnRef>
+          <a:fillRef idx="0">
+            <a:schemeClr val="accent1"/>
+          </a:fillRef>
+          <a:effectRef idx="0">
+            <a:schemeClr val="accent1"/>
+          </a:effectRef>
+          <a:fontRef idx="minor">
+            <a:schemeClr val="tx1"/>
+          </a:fontRef>
+        </p:style>
+      </p:cxnSp>
+      <p:cxnSp>
+        <p:nvCxnSpPr>
+          <p:cNvPr id="120" name="c5_g_k_0" descr="Editable line; source id c5_g_k_0"/>
+          <p:cNvCxnSpPr/>
+          <p:nvPr/>
+        </p:nvCxnSpPr>
+        <p:spPr>
+          <a:xfrm>
+            <a:off x="11056937" y="1127124"/>
+            <a:ext cx="23812" cy="31750"/>
+          </a:xfrm>
+          <a:prstGeom prst="line">
+            <a:avLst/>
+          </a:prstGeom>
+          <a:ln w="7937">
+            <a:solidFill>
+              <a:srgbClr val="1F2937"/>
+            </a:solidFill>
+          </a:ln>
+          <a:effectLst/>
+        </p:spPr>
+        <p:style>
+          <a:lnRef idx="2">
+            <a:schemeClr val="accent1"/>
+          </a:lnRef>
+          <a:fillRef idx="0">
+            <a:schemeClr val="accent1"/>
+          </a:fillRef>
+          <a:effectRef idx="0">
+            <a:schemeClr val="accent1"/>
+          </a:effectRef>
+          <a:fontRef idx="minor">
+            <a:schemeClr val="tx1"/>
+          </a:fontRef>
+        </p:style>
+      </p:cxnSp>
+      <p:cxnSp>
+        <p:nvCxnSpPr>
+          <p:cNvPr id="121" name="c5_g_k_1" descr="Editable line; source id c5_g_k_1"/>
+          <p:cNvCxnSpPr/>
+          <p:nvPr/>
+        </p:nvCxnSpPr>
+        <p:spPr>
+          <a:xfrm flipV="1">
+            <a:off x="11080749" y="1079499"/>
+            <a:ext cx="55563" cy="79375"/>
+          </a:xfrm>
+          <a:prstGeom prst="line">
+            <a:avLst/>
+          </a:prstGeom>
+          <a:ln w="7937">
+            <a:solidFill>
+              <a:srgbClr val="1F2937"/>
+            </a:solidFill>
+          </a:ln>
+          <a:effectLst/>
+        </p:spPr>
+        <p:style>
+          <a:lnRef idx="2">
+            <a:schemeClr val="accent1"/>
+          </a:lnRef>
+          <a:fillRef idx="0">
+            <a:schemeClr val="accent1"/>
+          </a:fillRef>
+          <a:effectRef idx="0">
+            <a:schemeClr val="accent1"/>
+          </a:effectRef>
+          <a:fontRef idx="minor">
+            <a:schemeClr val="tx1"/>
+          </a:fontRef>
+        </p:style>
+      </p:cxnSp>
+      <p:sp>
+        <p:nvSpPr>
+          <p:cNvPr id="122" name="c5_t" descr="Editable text; source id c5_t"/>
           <p:cNvSpPr txBox="1"/>
           <p:nvPr/>
         </p:nvSpPr>
         <p:spPr>
           <a:xfrm>
-            <a:off x="6706872" y="2468943"/>
-            <a:ext cx="2131690" cy="197260"/>
+            <a:off x="10302874" y="1444624"/>
+            <a:ext cx="1412874" cy="246062"/>
           </a:xfrm>
           <a:prstGeom prst="rect">
             <a:avLst/>
@@ -5820,9 +9117,9 @@
           </a:bodyPr>
           <a:lstStyle/>
           <a:p>
-            <a:pPr algn="l" fontAlgn="base">
+            <a:pPr algn="ctr" fontAlgn="base">
               <a:lnSpc>
-                <a:spcPts val="1465"/>
+                <a:spcPts val="1906"/>
               </a:lnSpc>
               <a:spcBef>
                 <a:spcPts val="0"/>
@@ -5830,7 +9127,423 @@
               <a:spcAft>
                 <a:spcPts val="0"/>
               </a:spcAft>
-              <a:defRPr sz="1002" b="0" i="0" lang="zh-CN" dirty="0">
+              <a:defRPr sz="1306" b="1" i="0" lang="zh-CN" dirty="0">
+                <a:solidFill>
+                  <a:srgbClr val="2B3E57"/>
+                </a:solidFill>
+                <a:latin typeface="Noto Sans CJK SC"/>
+                <a:ea typeface="Noto Sans CJK SC"/>
+                <a:cs typeface="Noto Sans CJK SC"/>
+              </a:defRPr>
+            </a:pPr>
+            <a:r>
+              <a:rPr sz="1306" b="1" i="0" lang="zh-CN" dirty="0">
+                <a:solidFill>
+                  <a:srgbClr val="2B3E57"/>
+                </a:solidFill>
+                <a:latin typeface="Noto Sans CJK SC"/>
+                <a:ea typeface="Noto Sans CJK SC"/>
+                <a:cs typeface="Noto Sans CJK SC"/>
+              </a:rPr>
+              <a:t>表征手段</a:t>
+            </a:r>
+          </a:p>
+        </p:txBody>
+      </p:sp>
+      <p:sp>
+        <p:nvSpPr>
+          <p:cNvPr id="123" name="c5k_t0" descr="Editable shape; source id c5k_t0"/>
+          <p:cNvSpPr/>
+          <p:nvPr/>
+        </p:nvSpPr>
+        <p:spPr>
+          <a:xfrm>
+            <a:off x="10302874" y="1770062"/>
+            <a:ext cx="1412874" cy="412749"/>
+          </a:xfrm>
+          <a:prstGeom prst="roundRect">
+            <a:avLst>
+              <a:gd name="adj" fmla="val 11538"/>
+            </a:avLst>
+          </a:prstGeom>
+          <a:solidFill>
+            <a:srgbClr val="F7F9FB"/>
+          </a:solidFill>
+          <a:ln w="9524">
+            <a:solidFill>
+              <a:srgbClr val="CBD3DA"/>
+            </a:solidFill>
+          </a:ln>
+          <a:effectLst/>
+        </p:spPr>
+        <p:style>
+          <a:lnRef idx="1">
+            <a:schemeClr val="accent1"/>
+          </a:lnRef>
+          <a:fillRef idx="3">
+            <a:schemeClr val="accent1"/>
+          </a:fillRef>
+          <a:effectRef idx="0">
+            <a:schemeClr val="accent1"/>
+          </a:effectRef>
+          <a:fontRef idx="minor">
+            <a:schemeClr val="lt1"/>
+          </a:fontRef>
+        </p:style>
+        <p:txBody>
+          <a:bodyPr rtlCol="0" anchor="ctr"/>
+          <a:lstStyle/>
+          <a:p>
+            <a:pPr algn="ctr"/>
+          </a:p>
+        </p:txBody>
+      </p:sp>
+      <p:sp>
+        <p:nvSpPr>
+          <p:cNvPr id="124" name="c5k_t0_t" descr="Editable text; source id c5k_t0_t"/>
+          <p:cNvSpPr txBox="1"/>
+          <p:nvPr/>
+        </p:nvSpPr>
+        <p:spPr>
+          <a:xfrm>
+            <a:off x="10358437" y="1801812"/>
+            <a:ext cx="1301749" cy="349249"/>
+          </a:xfrm>
+          <a:prstGeom prst="rect">
+            <a:avLst/>
+          </a:prstGeom>
+          <a:noFill/>
+          <a:effectLst/>
+        </p:spPr>
+        <p:txBody>
+          <a:bodyPr wrap="none" anchor="ctr" tIns="0" rIns="0" bIns="0" lIns="0" anchorCtr="0" vertOverflow="overflow">
+            <a:noAutofit/>
+          </a:bodyPr>
+          <a:lstStyle/>
+          <a:p>
+            <a:pPr algn="ctr" fontAlgn="base">
+              <a:lnSpc>
+                <a:spcPts val="1203"/>
+              </a:lnSpc>
+              <a:spcBef>
+                <a:spcPts val="0"/>
+              </a:spcBef>
+              <a:spcAft>
+                <a:spcPts val="0"/>
+              </a:spcAft>
+              <a:defRPr sz="1014" b="0" i="0" lang="zh-CN" dirty="0">
+                <a:solidFill>
+                  <a:srgbClr val="3F4854"/>
+                </a:solidFill>
+                <a:latin typeface="DejaVu Sans"/>
+                <a:ea typeface="DejaVu Sans"/>
+                <a:cs typeface="DejaVu Sans"/>
+              </a:defRPr>
+            </a:pPr>
+            <a:r>
+              <a:rPr sz="1014" b="0" i="0" lang="zh-CN" dirty="0">
+                <a:solidFill>
+                  <a:srgbClr val="3F4854"/>
+                </a:solidFill>
+                <a:latin typeface="DejaVu Sans"/>
+                <a:ea typeface="DejaVu Sans"/>
+                <a:cs typeface="DejaVu Sans"/>
+              </a:rPr>
+              <a:t>PXRD / Rietveld</a:t>
+            </a:r>
+          </a:p>
+        </p:txBody>
+      </p:sp>
+      <p:sp>
+        <p:nvSpPr>
+          <p:cNvPr id="125" name="c5k_t1" descr="Editable shape; source id c5k_t1"/>
+          <p:cNvSpPr/>
+          <p:nvPr/>
+        </p:nvSpPr>
+        <p:spPr>
+          <a:xfrm>
+            <a:off x="10302874" y="2278062"/>
+            <a:ext cx="1412874" cy="412749"/>
+          </a:xfrm>
+          <a:prstGeom prst="roundRect">
+            <a:avLst>
+              <a:gd name="adj" fmla="val 11538"/>
+            </a:avLst>
+          </a:prstGeom>
+          <a:solidFill>
+            <a:srgbClr val="F7F9FB"/>
+          </a:solidFill>
+          <a:ln w="9524">
+            <a:solidFill>
+              <a:srgbClr val="CBD3DA"/>
+            </a:solidFill>
+          </a:ln>
+          <a:effectLst/>
+        </p:spPr>
+        <p:style>
+          <a:lnRef idx="1">
+            <a:schemeClr val="accent1"/>
+          </a:lnRef>
+          <a:fillRef idx="3">
+            <a:schemeClr val="accent1"/>
+          </a:fillRef>
+          <a:effectRef idx="0">
+            <a:schemeClr val="accent1"/>
+          </a:effectRef>
+          <a:fontRef idx="minor">
+            <a:schemeClr val="lt1"/>
+          </a:fontRef>
+        </p:style>
+        <p:txBody>
+          <a:bodyPr rtlCol="0" anchor="ctr"/>
+          <a:lstStyle/>
+          <a:p>
+            <a:pPr algn="ctr"/>
+          </a:p>
+        </p:txBody>
+      </p:sp>
+      <p:sp>
+        <p:nvSpPr>
+          <p:cNvPr id="126" name="c5k_t1_t" descr="Editable text; source id c5k_t1_t"/>
+          <p:cNvSpPr txBox="1"/>
+          <p:nvPr/>
+        </p:nvSpPr>
+        <p:spPr>
+          <a:xfrm>
+            <a:off x="10358437" y="2309812"/>
+            <a:ext cx="1301749" cy="349249"/>
+          </a:xfrm>
+          <a:prstGeom prst="rect">
+            <a:avLst/>
+          </a:prstGeom>
+          <a:noFill/>
+          <a:effectLst/>
+        </p:spPr>
+        <p:txBody>
+          <a:bodyPr wrap="none" anchor="ctr" tIns="0" rIns="0" bIns="0" lIns="0" anchorCtr="0" vertOverflow="overflow">
+            <a:noAutofit/>
+          </a:bodyPr>
+          <a:lstStyle/>
+          <a:p>
+            <a:pPr algn="ctr" fontAlgn="base">
+              <a:lnSpc>
+                <a:spcPts val="1203"/>
+              </a:lnSpc>
+              <a:spcBef>
+                <a:spcPts val="0"/>
+              </a:spcBef>
+              <a:spcAft>
+                <a:spcPts val="0"/>
+              </a:spcAft>
+              <a:defRPr sz="1014" b="0" i="0" lang="zh-CN" dirty="0">
+                <a:solidFill>
+                  <a:srgbClr val="3F4854"/>
+                </a:solidFill>
+                <a:latin typeface="DejaVu Sans"/>
+                <a:ea typeface="DejaVu Sans"/>
+                <a:cs typeface="DejaVu Sans"/>
+              </a:defRPr>
+            </a:pPr>
+            <a:r>
+              <a:rPr sz="1014" b="0" i="0" lang="zh-CN" dirty="0">
+                <a:solidFill>
+                  <a:srgbClr val="3F4854"/>
+                </a:solidFill>
+                <a:latin typeface="DejaVu Sans"/>
+                <a:ea typeface="DejaVu Sans"/>
+                <a:cs typeface="DejaVu Sans"/>
+              </a:rPr>
+              <a:t>SCXRD</a:t>
+            </a:r>
+          </a:p>
+        </p:txBody>
+      </p:sp>
+      <p:sp>
+        <p:nvSpPr>
+          <p:cNvPr id="127" name="c5k_t2" descr="Editable shape; source id c5k_t2"/>
+          <p:cNvSpPr/>
+          <p:nvPr/>
+        </p:nvSpPr>
+        <p:spPr>
+          <a:xfrm>
+            <a:off x="10302874" y="2778124"/>
+            <a:ext cx="1412874" cy="412749"/>
+          </a:xfrm>
+          <a:prstGeom prst="roundRect">
+            <a:avLst>
+              <a:gd name="adj" fmla="val 11538"/>
+            </a:avLst>
+          </a:prstGeom>
+          <a:solidFill>
+            <a:srgbClr val="F7F9FB"/>
+          </a:solidFill>
+          <a:ln w="9524">
+            <a:solidFill>
+              <a:srgbClr val="CBD3DA"/>
+            </a:solidFill>
+          </a:ln>
+          <a:effectLst/>
+        </p:spPr>
+        <p:style>
+          <a:lnRef idx="1">
+            <a:schemeClr val="accent1"/>
+          </a:lnRef>
+          <a:fillRef idx="3">
+            <a:schemeClr val="accent1"/>
+          </a:fillRef>
+          <a:effectRef idx="0">
+            <a:schemeClr val="accent1"/>
+          </a:effectRef>
+          <a:fontRef idx="minor">
+            <a:schemeClr val="lt1"/>
+          </a:fontRef>
+        </p:style>
+        <p:txBody>
+          <a:bodyPr rtlCol="0" anchor="ctr"/>
+          <a:lstStyle/>
+          <a:p>
+            <a:pPr algn="ctr"/>
+          </a:p>
+        </p:txBody>
+      </p:sp>
+      <p:sp>
+        <p:nvSpPr>
+          <p:cNvPr id="128" name="c5k_t2_t" descr="Editable text; source id c5k_t2_t"/>
+          <p:cNvSpPr txBox="1"/>
+          <p:nvPr/>
+        </p:nvSpPr>
+        <p:spPr>
+          <a:xfrm>
+            <a:off x="10358437" y="2809874"/>
+            <a:ext cx="1301749" cy="349249"/>
+          </a:xfrm>
+          <a:prstGeom prst="rect">
+            <a:avLst/>
+          </a:prstGeom>
+          <a:noFill/>
+          <a:effectLst/>
+        </p:spPr>
+        <p:txBody>
+          <a:bodyPr wrap="none" anchor="ctr" tIns="0" rIns="0" bIns="0" lIns="0" anchorCtr="0" vertOverflow="overflow">
+            <a:noAutofit/>
+          </a:bodyPr>
+          <a:lstStyle/>
+          <a:p>
+            <a:pPr algn="ctr" fontAlgn="base">
+              <a:lnSpc>
+                <a:spcPts val="1203"/>
+              </a:lnSpc>
+              <a:spcBef>
+                <a:spcPts val="0"/>
+              </a:spcBef>
+              <a:spcAft>
+                <a:spcPts val="0"/>
+              </a:spcAft>
+              <a:defRPr sz="1014" b="0" i="0" lang="zh-CN" dirty="0">
+                <a:solidFill>
+                  <a:srgbClr val="3F4854"/>
+                </a:solidFill>
+                <a:latin typeface="DejaVu Sans"/>
+                <a:ea typeface="DejaVu Sans"/>
+                <a:cs typeface="DejaVu Sans"/>
+              </a:defRPr>
+            </a:pPr>
+            <a:r>
+              <a:rPr sz="1014" b="0" i="0" lang="zh-CN" dirty="0">
+                <a:solidFill>
+                  <a:srgbClr val="3F4854"/>
+                </a:solidFill>
+                <a:latin typeface="DejaVu Sans"/>
+                <a:ea typeface="DejaVu Sans"/>
+                <a:cs typeface="DejaVu Sans"/>
+              </a:rPr>
+              <a:t>EDS / EPMA / ICP</a:t>
+            </a:r>
+          </a:p>
+        </p:txBody>
+      </p:sp>
+      <p:sp>
+        <p:nvSpPr>
+          <p:cNvPr id="129" name="c5k_t3" descr="Editable shape; source id c5k_t3"/>
+          <p:cNvSpPr/>
+          <p:nvPr/>
+        </p:nvSpPr>
+        <p:spPr>
+          <a:xfrm>
+            <a:off x="10302874" y="3286124"/>
+            <a:ext cx="1412874" cy="412749"/>
+          </a:xfrm>
+          <a:prstGeom prst="roundRect">
+            <a:avLst>
+              <a:gd name="adj" fmla="val 11538"/>
+            </a:avLst>
+          </a:prstGeom>
+          <a:solidFill>
+            <a:srgbClr val="F7F9FB"/>
+          </a:solidFill>
+          <a:ln w="9524">
+            <a:solidFill>
+              <a:srgbClr val="CBD3DA"/>
+            </a:solidFill>
+          </a:ln>
+          <a:effectLst/>
+        </p:spPr>
+        <p:style>
+          <a:lnRef idx="1">
+            <a:schemeClr val="accent1"/>
+          </a:lnRef>
+          <a:fillRef idx="3">
+            <a:schemeClr val="accent1"/>
+          </a:fillRef>
+          <a:effectRef idx="0">
+            <a:schemeClr val="accent1"/>
+          </a:effectRef>
+          <a:fontRef idx="minor">
+            <a:schemeClr val="lt1"/>
+          </a:fontRef>
+        </p:style>
+        <p:txBody>
+          <a:bodyPr rtlCol="0" anchor="ctr"/>
+          <a:lstStyle/>
+          <a:p>
+            <a:pPr algn="ctr"/>
+          </a:p>
+        </p:txBody>
+      </p:sp>
+      <p:sp>
+        <p:nvSpPr>
+          <p:cNvPr id="130" name="c5k_t3_t" descr="Editable text; source id c5k_t3_t"/>
+          <p:cNvSpPr txBox="1"/>
+          <p:nvPr/>
+        </p:nvSpPr>
+        <p:spPr>
+          <a:xfrm>
+            <a:off x="10358437" y="3317874"/>
+            <a:ext cx="1301749" cy="349249"/>
+          </a:xfrm>
+          <a:prstGeom prst="rect">
+            <a:avLst/>
+          </a:prstGeom>
+          <a:noFill/>
+          <a:effectLst/>
+        </p:spPr>
+        <p:txBody>
+          <a:bodyPr wrap="none" anchor="ctr" tIns="0" rIns="0" bIns="0" lIns="0" anchorCtr="0" vertOverflow="overflow">
+            <a:noAutofit/>
+          </a:bodyPr>
+          <a:lstStyle/>
+          <a:p>
+            <a:pPr algn="ctr" fontAlgn="base">
+              <a:lnSpc>
+                <a:spcPts val="1484"/>
+              </a:lnSpc>
+              <a:spcBef>
+                <a:spcPts val="0"/>
+              </a:spcBef>
+              <a:spcAft>
+                <a:spcPts val="0"/>
+              </a:spcAft>
+              <a:defRPr sz="1014" b="0" i="0" lang="zh-CN" dirty="0">
                 <a:solidFill>
                   <a:srgbClr val="3F4854"/>
                 </a:solidFill>
@@ -5840,7 +9553,7 @@
               </a:defRPr>
             </a:pPr>
             <a:r>
-              <a:rPr sz="1002" b="0" i="0" lang="zh-CN" dirty="0">
+              <a:rPr sz="1014" b="0" i="0" lang="zh-CN" dirty="0">
                 <a:solidFill>
                   <a:srgbClr val="3F4854"/>
                 </a:solidFill>
@@ -5848,72 +9561,176 @@
                 <a:ea typeface="Noto Sans CJK SC"/>
                 <a:cs typeface="Noto Sans CJK SC"/>
               </a:rPr>
-              <a:t>助熔</a:t>
+              <a:t>高温相与冷却产物</a:t>
             </a:r>
-            <a:r>
-              <a:rPr sz="1002" b="0" i="0" lang="zh-CN" dirty="0">
-                <a:solidFill>
-                  <a:srgbClr val="3F4854"/>
-                </a:solidFill>
-                <a:latin typeface="DejaVu Sans"/>
-                <a:ea typeface="DejaVu Sans"/>
-                <a:cs typeface="DejaVu Sans"/>
-              </a:rPr>
-              <a:t> → </a:t>
-            </a:r>
-            <a:r>
-              <a:rPr sz="1002" b="0" i="0" lang="zh-CN" dirty="0">
-                <a:solidFill>
-                  <a:srgbClr val="3F4854"/>
-                </a:solidFill>
-                <a:latin typeface="Noto Sans CJK SC"/>
-                <a:ea typeface="Noto Sans CJK SC"/>
-                <a:cs typeface="Noto Sans CJK SC"/>
-              </a:rPr>
-              <a:t>保温</a:t>
-            </a:r>
-            <a:r>
-              <a:rPr sz="1002" b="0" i="0" lang="zh-CN" dirty="0">
-                <a:solidFill>
-                  <a:srgbClr val="3F4854"/>
-                </a:solidFill>
-                <a:latin typeface="DejaVu Sans"/>
-                <a:ea typeface="DejaVu Sans"/>
-                <a:cs typeface="DejaVu Sans"/>
-              </a:rPr>
-              <a:t> → </a:t>
-            </a:r>
-            <a:r>
-              <a:rPr sz="1002" b="0" i="0" lang="zh-CN" dirty="0">
-                <a:solidFill>
-                  <a:srgbClr val="3F4854"/>
-                </a:solidFill>
-                <a:latin typeface="Noto Sans CJK SC"/>
-                <a:ea typeface="Noto Sans CJK SC"/>
-                <a:cs typeface="Noto Sans CJK SC"/>
-              </a:rPr>
-              <a:t>慢冷</a:t>
-            </a:r>
+          </a:p>
+        </p:txBody>
+      </p:sp>
+      <p:sp>
+        <p:nvSpPr>
+          <p:cNvPr id="131" name="e1_0" descr="Editable line; source id e1_0"/>
+          <p:cNvSpPr/>
+          <p:nvPr/>
+        </p:nvSpPr>
+        <p:spPr>
+          <a:xfrm>
+            <a:off x="2349500" y="2317750"/>
+            <a:ext cx="238125" cy="79375"/>
+          </a:xfrm>
+          <a:custGeom>
+            <a:avLst/>
+            <a:gdLst/>
+            <a:ahLst/>
+            <a:cxnLst/>
+            <a:rect l="l" t="t" r="r" b="b"/>
+            <a:pathLst>
+              <a:path w="30000" h="10000">
+                <a:moveTo>
+                  <a:pt x="0" y="4100"/>
+                </a:moveTo>
+                <a:lnTo>
+                  <a:pt x="18000" y="4100"/>
+                </a:lnTo>
+                <a:lnTo>
+                  <a:pt x="18000" y="0"/>
+                </a:lnTo>
+                <a:lnTo>
+                  <a:pt x="30000" y="5000"/>
+                </a:lnTo>
+                <a:lnTo>
+                  <a:pt x="18000" y="10000"/>
+                </a:lnTo>
+                <a:lnTo>
+                  <a:pt x="18000" y="5900"/>
+                </a:lnTo>
+                <a:lnTo>
+                  <a:pt x="0" y="5900"/>
+                </a:lnTo>
+                <a:close/>
+              </a:path>
+            </a:pathLst>
+          </a:custGeom>
+          <a:solidFill>
+            <a:srgbClr val="4B5563"/>
+          </a:solidFill>
+          <a:ln>
+            <a:noFill/>
+          </a:ln>
+          <a:effectLst/>
+        </p:spPr>
+        <p:style>
+          <a:lnRef idx="1">
+            <a:schemeClr val="accent1"/>
+          </a:lnRef>
+          <a:fillRef idx="3">
+            <a:schemeClr val="accent1"/>
+          </a:fillRef>
+          <a:effectRef idx="0">
+            <a:schemeClr val="accent1"/>
+          </a:effectRef>
+          <a:fontRef idx="minor">
+            <a:schemeClr val="lt1"/>
+          </a:fontRef>
+        </p:style>
+        <p:txBody>
+          <a:bodyPr rtlCol="0" anchor="ctr"/>
+          <a:lstStyle/>
+          <a:p>
+            <a:pPr algn="ctr"/>
+          </a:p>
+        </p:txBody>
+      </p:sp>
+      <p:sp>
+        <p:nvSpPr>
+          <p:cNvPr id="132" name="e2_0" descr="Editable line; source id e2_0"/>
+          <p:cNvSpPr/>
+          <p:nvPr/>
+        </p:nvSpPr>
+        <p:spPr>
+          <a:xfrm>
+            <a:off x="4556125" y="2317750"/>
+            <a:ext cx="238125" cy="79375"/>
+          </a:xfrm>
+          <a:custGeom>
+            <a:avLst/>
+            <a:gdLst/>
+            <a:ahLst/>
+            <a:cxnLst/>
+            <a:rect l="l" t="t" r="r" b="b"/>
+            <a:pathLst>
+              <a:path w="30000" h="10000">
+                <a:moveTo>
+                  <a:pt x="0" y="4100"/>
+                </a:moveTo>
+                <a:lnTo>
+                  <a:pt x="18000" y="4100"/>
+                </a:lnTo>
+                <a:lnTo>
+                  <a:pt x="18000" y="0"/>
+                </a:lnTo>
+                <a:lnTo>
+                  <a:pt x="30000" y="5000"/>
+                </a:lnTo>
+                <a:lnTo>
+                  <a:pt x="18000" y="10000"/>
+                </a:lnTo>
+                <a:lnTo>
+                  <a:pt x="18000" y="5900"/>
+                </a:lnTo>
+                <a:lnTo>
+                  <a:pt x="0" y="5900"/>
+                </a:lnTo>
+                <a:close/>
+              </a:path>
+            </a:pathLst>
+          </a:custGeom>
+          <a:solidFill>
+            <a:srgbClr val="4B5563"/>
+          </a:solidFill>
+          <a:ln>
+            <a:noFill/>
+          </a:ln>
+          <a:effectLst/>
+        </p:spPr>
+        <p:style>
+          <a:lnRef idx="1">
+            <a:schemeClr val="accent1"/>
+          </a:lnRef>
+          <a:fillRef idx="3">
+            <a:schemeClr val="accent1"/>
+          </a:fillRef>
+          <a:effectRef idx="0">
+            <a:schemeClr val="accent1"/>
+          </a:effectRef>
+          <a:fontRef idx="minor">
+            <a:schemeClr val="lt1"/>
+          </a:fontRef>
+        </p:style>
+        <p:txBody>
+          <a:bodyPr rtlCol="0" anchor="ctr"/>
+          <a:lstStyle/>
+          <a:p>
+            <a:pPr algn="ctr"/>
           </a:p>
         </p:txBody>
       </p:sp>
       <p:cxnSp>
         <p:nvCxnSpPr>
-          <p:cNvPr id="49" name="l2_r1" descr="Editable line; source id l2_r1"/>
+          <p:cNvPr id="133" name="fk0_0" descr="Editable line; source id fk0_0"/>
           <p:cNvCxnSpPr/>
           <p:nvPr/>
         </p:nvCxnSpPr>
         <p:spPr>
           <a:xfrm>
-            <a:off x="6706872" y="2729837"/>
-            <a:ext cx="2131691" cy="0"/>
+            <a:off x="6778624" y="2357437"/>
+            <a:ext cx="190500" cy="0"/>
           </a:xfrm>
           <a:prstGeom prst="line">
             <a:avLst/>
           </a:prstGeom>
-          <a:ln w="6363">
+          <a:ln w="14287">
             <a:solidFill>
-              <a:srgbClr val="DCE2E8"/>
+              <a:srgbClr val="4B5563"/>
             </a:solidFill>
           </a:ln>
           <a:effectLst/>
@@ -5933,16 +9750,548 @@
           </a:fontRef>
         </p:style>
       </p:cxnSp>
-      <p:sp>
-        <p:nvSpPr>
-          <p:cNvPr id="50" name="l2_k1" descr="Editable text; source id l2_k1"/>
+      <p:cxnSp>
+        <p:nvCxnSpPr>
+          <p:cNvPr id="134" name="fkv_0" descr="Editable line; source id fkv_0"/>
+          <p:cNvCxnSpPr/>
+          <p:nvPr/>
+        </p:nvCxnSpPr>
+        <p:spPr>
+          <a:xfrm>
+            <a:off x="6969124" y="1587499"/>
+            <a:ext cx="0" cy="1539875"/>
+          </a:xfrm>
+          <a:prstGeom prst="line">
+            <a:avLst/>
+          </a:prstGeom>
+          <a:ln w="14287">
+            <a:solidFill>
+              <a:srgbClr val="4B5563"/>
+            </a:solidFill>
+          </a:ln>
+          <a:effectLst/>
+        </p:spPr>
+        <p:style>
+          <a:lnRef idx="2">
+            <a:schemeClr val="accent1"/>
+          </a:lnRef>
+          <a:fillRef idx="0">
+            <a:schemeClr val="accent1"/>
+          </a:fillRef>
+          <a:effectRef idx="0">
+            <a:schemeClr val="accent1"/>
+          </a:effectRef>
+          <a:fontRef idx="minor">
+            <a:schemeClr val="tx1"/>
+          </a:fontRef>
+        </p:style>
+      </p:cxnSp>
+      <p:sp>
+        <p:nvSpPr>
+          <p:cNvPr id="135" name="fk1_0" descr="Editable line; source id fk1_0"/>
+          <p:cNvSpPr/>
+          <p:nvPr/>
+        </p:nvSpPr>
+        <p:spPr>
+          <a:xfrm>
+            <a:off x="6969125" y="1547812"/>
+            <a:ext cx="142875" cy="79375"/>
+          </a:xfrm>
+          <a:custGeom>
+            <a:avLst/>
+            <a:gdLst/>
+            <a:ahLst/>
+            <a:cxnLst/>
+            <a:rect l="l" t="t" r="r" b="b"/>
+            <a:pathLst>
+              <a:path w="18000" h="10000">
+                <a:moveTo>
+                  <a:pt x="0" y="4100"/>
+                </a:moveTo>
+                <a:lnTo>
+                  <a:pt x="6000" y="4100"/>
+                </a:lnTo>
+                <a:lnTo>
+                  <a:pt x="6000" y="0"/>
+                </a:lnTo>
+                <a:lnTo>
+                  <a:pt x="18000" y="5000"/>
+                </a:lnTo>
+                <a:lnTo>
+                  <a:pt x="6000" y="10000"/>
+                </a:lnTo>
+                <a:lnTo>
+                  <a:pt x="6000" y="5900"/>
+                </a:lnTo>
+                <a:lnTo>
+                  <a:pt x="0" y="5900"/>
+                </a:lnTo>
+                <a:close/>
+              </a:path>
+            </a:pathLst>
+          </a:custGeom>
+          <a:solidFill>
+            <a:srgbClr val="4B5563"/>
+          </a:solidFill>
+          <a:ln>
+            <a:noFill/>
+          </a:ln>
+          <a:effectLst/>
+        </p:spPr>
+        <p:style>
+          <a:lnRef idx="1">
+            <a:schemeClr val="accent1"/>
+          </a:lnRef>
+          <a:fillRef idx="3">
+            <a:schemeClr val="accent1"/>
+          </a:fillRef>
+          <a:effectRef idx="0">
+            <a:schemeClr val="accent1"/>
+          </a:effectRef>
+          <a:fontRef idx="minor">
+            <a:schemeClr val="lt1"/>
+          </a:fontRef>
+        </p:style>
+        <p:txBody>
+          <a:bodyPr rtlCol="0" anchor="ctr"/>
+          <a:lstStyle/>
+          <a:p>
+            <a:pPr algn="ctr"/>
+          </a:p>
+        </p:txBody>
+      </p:sp>
+      <p:sp>
+        <p:nvSpPr>
+          <p:cNvPr id="136" name="fk2_0" descr="Editable line; source id fk2_0"/>
+          <p:cNvSpPr/>
+          <p:nvPr/>
+        </p:nvSpPr>
+        <p:spPr>
+          <a:xfrm>
+            <a:off x="6969125" y="3087687"/>
+            <a:ext cx="142875" cy="79375"/>
+          </a:xfrm>
+          <a:custGeom>
+            <a:avLst/>
+            <a:gdLst/>
+            <a:ahLst/>
+            <a:cxnLst/>
+            <a:rect l="l" t="t" r="r" b="b"/>
+            <a:pathLst>
+              <a:path w="18000" h="10000">
+                <a:moveTo>
+                  <a:pt x="0" y="4100"/>
+                </a:moveTo>
+                <a:lnTo>
+                  <a:pt x="6000" y="4100"/>
+                </a:lnTo>
+                <a:lnTo>
+                  <a:pt x="6000" y="0"/>
+                </a:lnTo>
+                <a:lnTo>
+                  <a:pt x="18000" y="5000"/>
+                </a:lnTo>
+                <a:lnTo>
+                  <a:pt x="6000" y="10000"/>
+                </a:lnTo>
+                <a:lnTo>
+                  <a:pt x="6000" y="5900"/>
+                </a:lnTo>
+                <a:lnTo>
+                  <a:pt x="0" y="5900"/>
+                </a:lnTo>
+                <a:close/>
+              </a:path>
+            </a:pathLst>
+          </a:custGeom>
+          <a:solidFill>
+            <a:srgbClr val="4B5563"/>
+          </a:solidFill>
+          <a:ln>
+            <a:noFill/>
+          </a:ln>
+          <a:effectLst/>
+        </p:spPr>
+        <p:style>
+          <a:lnRef idx="1">
+            <a:schemeClr val="accent1"/>
+          </a:lnRef>
+          <a:fillRef idx="3">
+            <a:schemeClr val="accent1"/>
+          </a:fillRef>
+          <a:effectRef idx="0">
+            <a:schemeClr val="accent1"/>
+          </a:effectRef>
+          <a:fontRef idx="minor">
+            <a:schemeClr val="lt1"/>
+          </a:fontRef>
+        </p:style>
+        <p:txBody>
+          <a:bodyPr rtlCol="0" anchor="ctr"/>
+          <a:lstStyle/>
+          <a:p>
+            <a:pPr algn="ctr"/>
+          </a:p>
+        </p:txBody>
+      </p:sp>
+      <p:cxnSp>
+        <p:nvCxnSpPr>
+          <p:cNvPr id="137" name="mg1_0" descr="Editable line; source id mg1_0"/>
+          <p:cNvCxnSpPr/>
+          <p:nvPr/>
+        </p:nvCxnSpPr>
+        <p:spPr>
+          <a:xfrm>
+            <a:off x="9794874" y="1587499"/>
+            <a:ext cx="142875" cy="0"/>
+          </a:xfrm>
+          <a:prstGeom prst="line">
+            <a:avLst/>
+          </a:prstGeom>
+          <a:ln w="14287">
+            <a:solidFill>
+              <a:srgbClr val="4B5563"/>
+            </a:solidFill>
+          </a:ln>
+          <a:effectLst/>
+        </p:spPr>
+        <p:style>
+          <a:lnRef idx="2">
+            <a:schemeClr val="accent1"/>
+          </a:lnRef>
+          <a:fillRef idx="0">
+            <a:schemeClr val="accent1"/>
+          </a:fillRef>
+          <a:effectRef idx="0">
+            <a:schemeClr val="accent1"/>
+          </a:effectRef>
+          <a:fontRef idx="minor">
+            <a:schemeClr val="tx1"/>
+          </a:fontRef>
+        </p:style>
+      </p:cxnSp>
+      <p:cxnSp>
+        <p:nvCxnSpPr>
+          <p:cNvPr id="138" name="mg2_0" descr="Editable line; source id mg2_0"/>
+          <p:cNvCxnSpPr/>
+          <p:nvPr/>
+        </p:nvCxnSpPr>
+        <p:spPr>
+          <a:xfrm>
+            <a:off x="9794874" y="3127374"/>
+            <a:ext cx="142875" cy="0"/>
+          </a:xfrm>
+          <a:prstGeom prst="line">
+            <a:avLst/>
+          </a:prstGeom>
+          <a:ln w="14287">
+            <a:solidFill>
+              <a:srgbClr val="4B5563"/>
+            </a:solidFill>
+          </a:ln>
+          <a:effectLst/>
+        </p:spPr>
+        <p:style>
+          <a:lnRef idx="2">
+            <a:schemeClr val="accent1"/>
+          </a:lnRef>
+          <a:fillRef idx="0">
+            <a:schemeClr val="accent1"/>
+          </a:fillRef>
+          <a:effectRef idx="0">
+            <a:schemeClr val="accent1"/>
+          </a:effectRef>
+          <a:fontRef idx="minor">
+            <a:schemeClr val="tx1"/>
+          </a:fontRef>
+        </p:style>
+      </p:cxnSp>
+      <p:cxnSp>
+        <p:nvCxnSpPr>
+          <p:cNvPr id="139" name="mgv_0" descr="Editable line; source id mgv_0"/>
+          <p:cNvCxnSpPr/>
+          <p:nvPr/>
+        </p:nvCxnSpPr>
+        <p:spPr>
+          <a:xfrm>
+            <a:off x="9937749" y="1587499"/>
+            <a:ext cx="0" cy="1539875"/>
+          </a:xfrm>
+          <a:prstGeom prst="line">
+            <a:avLst/>
+          </a:prstGeom>
+          <a:ln w="14287">
+            <a:solidFill>
+              <a:srgbClr val="4B5563"/>
+            </a:solidFill>
+          </a:ln>
+          <a:effectLst/>
+        </p:spPr>
+        <p:style>
+          <a:lnRef idx="2">
+            <a:schemeClr val="accent1"/>
+          </a:lnRef>
+          <a:fillRef idx="0">
+            <a:schemeClr val="accent1"/>
+          </a:fillRef>
+          <a:effectRef idx="0">
+            <a:schemeClr val="accent1"/>
+          </a:effectRef>
+          <a:fontRef idx="minor">
+            <a:schemeClr val="tx1"/>
+          </a:fontRef>
+        </p:style>
+      </p:cxnSp>
+      <p:sp>
+        <p:nvSpPr>
+          <p:cNvPr id="140" name="mg3_0" descr="Editable line; source id mg3_0"/>
+          <p:cNvSpPr/>
+          <p:nvPr/>
+        </p:nvSpPr>
+        <p:spPr>
+          <a:xfrm>
+            <a:off x="9937750" y="2317750"/>
+            <a:ext cx="222250" cy="79375"/>
+          </a:xfrm>
+          <a:custGeom>
+            <a:avLst/>
+            <a:gdLst/>
+            <a:ahLst/>
+            <a:cxnLst/>
+            <a:rect l="l" t="t" r="r" b="b"/>
+            <a:pathLst>
+              <a:path w="28000" h="10000">
+                <a:moveTo>
+                  <a:pt x="0" y="4100"/>
+                </a:moveTo>
+                <a:lnTo>
+                  <a:pt x="16000" y="4100"/>
+                </a:lnTo>
+                <a:lnTo>
+                  <a:pt x="16000" y="0"/>
+                </a:lnTo>
+                <a:lnTo>
+                  <a:pt x="28000" y="5000"/>
+                </a:lnTo>
+                <a:lnTo>
+                  <a:pt x="16000" y="10000"/>
+                </a:lnTo>
+                <a:lnTo>
+                  <a:pt x="16000" y="5900"/>
+                </a:lnTo>
+                <a:lnTo>
+                  <a:pt x="0" y="5900"/>
+                </a:lnTo>
+                <a:close/>
+              </a:path>
+            </a:pathLst>
+          </a:custGeom>
+          <a:solidFill>
+            <a:srgbClr val="4B5563"/>
+          </a:solidFill>
+          <a:ln>
+            <a:noFill/>
+          </a:ln>
+          <a:effectLst/>
+        </p:spPr>
+        <p:style>
+          <a:lnRef idx="1">
+            <a:schemeClr val="accent1"/>
+          </a:lnRef>
+          <a:fillRef idx="3">
+            <a:schemeClr val="accent1"/>
+          </a:fillRef>
+          <a:effectRef idx="0">
+            <a:schemeClr val="accent1"/>
+          </a:effectRef>
+          <a:fontRef idx="minor">
+            <a:schemeClr val="lt1"/>
+          </a:fontRef>
+        </p:style>
+        <p:txBody>
+          <a:bodyPr rtlCol="0" anchor="ctr"/>
+          <a:lstStyle/>
+          <a:p>
+            <a:pPr algn="ctr"/>
+          </a:p>
+        </p:txBody>
+      </p:sp>
+      <p:cxnSp>
+        <p:nvCxnSpPr>
+          <p:cNvPr id="141" name="fb_0" descr="Editable line; source id fb_0"/>
+          <p:cNvCxnSpPr/>
+          <p:nvPr/>
+        </p:nvCxnSpPr>
+        <p:spPr>
+          <a:xfrm>
+            <a:off x="11009312" y="3857624"/>
+            <a:ext cx="0" cy="508000"/>
+          </a:xfrm>
+          <a:prstGeom prst="line">
+            <a:avLst/>
+          </a:prstGeom>
+          <a:ln w="14287">
+            <a:solidFill>
+              <a:srgbClr val="4B5563"/>
+            </a:solidFill>
+            <a:custDash>
+              <a:ds d="611111" sp="388889"/>
+            </a:custDash>
+          </a:ln>
+          <a:effectLst/>
+        </p:spPr>
+        <p:style>
+          <a:lnRef idx="2">
+            <a:schemeClr val="accent1"/>
+          </a:lnRef>
+          <a:fillRef idx="0">
+            <a:schemeClr val="accent1"/>
+          </a:fillRef>
+          <a:effectRef idx="0">
+            <a:schemeClr val="accent1"/>
+          </a:effectRef>
+          <a:fontRef idx="minor">
+            <a:schemeClr val="tx1"/>
+          </a:fontRef>
+        </p:style>
+      </p:cxnSp>
+      <p:cxnSp>
+        <p:nvCxnSpPr>
+          <p:cNvPr id="142" name="fb_1" descr="Editable line; source id fb_1"/>
+          <p:cNvCxnSpPr/>
+          <p:nvPr/>
+        </p:nvCxnSpPr>
+        <p:spPr>
+          <a:xfrm flipH="1">
+            <a:off x="3579812" y="4365624"/>
+            <a:ext cx="7429500" cy="0"/>
+          </a:xfrm>
+          <a:prstGeom prst="line">
+            <a:avLst/>
+          </a:prstGeom>
+          <a:ln w="14287">
+            <a:solidFill>
+              <a:srgbClr val="4B5563"/>
+            </a:solidFill>
+            <a:custDash>
+              <a:ds d="611111" sp="388889"/>
+            </a:custDash>
+          </a:ln>
+          <a:effectLst/>
+        </p:spPr>
+        <p:style>
+          <a:lnRef idx="2">
+            <a:schemeClr val="accent1"/>
+          </a:lnRef>
+          <a:fillRef idx="0">
+            <a:schemeClr val="accent1"/>
+          </a:fillRef>
+          <a:effectRef idx="0">
+            <a:schemeClr val="accent1"/>
+          </a:effectRef>
+          <a:fontRef idx="minor">
+            <a:schemeClr val="tx1"/>
+          </a:fontRef>
+        </p:style>
+      </p:cxnSp>
+      <p:cxnSp>
+        <p:nvCxnSpPr>
+          <p:cNvPr id="143" name="fb_2" descr="Editable line; source id fb_2"/>
+          <p:cNvCxnSpPr/>
+          <p:nvPr/>
+        </p:nvCxnSpPr>
+        <p:spPr>
+          <a:xfrm flipV="1">
+            <a:off x="3579812" y="3857624"/>
+            <a:ext cx="0" cy="508000"/>
+          </a:xfrm>
+          <a:prstGeom prst="line">
+            <a:avLst/>
+          </a:prstGeom>
+          <a:ln w="14287">
+            <a:solidFill>
+              <a:srgbClr val="4B5563"/>
+            </a:solidFill>
+            <a:custDash>
+              <a:ds d="611111" sp="388889"/>
+            </a:custDash>
+            <a:tailEnd type="triangle"/>
+          </a:ln>
+          <a:effectLst/>
+        </p:spPr>
+        <p:style>
+          <a:lnRef idx="2">
+            <a:schemeClr val="accent1"/>
+          </a:lnRef>
+          <a:fillRef idx="0">
+            <a:schemeClr val="accent1"/>
+          </a:fillRef>
+          <a:effectRef idx="0">
+            <a:schemeClr val="accent1"/>
+          </a:effectRef>
+          <a:fontRef idx="minor">
+            <a:schemeClr val="tx1"/>
+          </a:fontRef>
+        </p:style>
+      </p:cxnSp>
+      <p:sp>
+        <p:nvSpPr>
+          <p:cNvPr id="144" name="fb_p" descr="Editable shape; source id fb_p"/>
+          <p:cNvSpPr/>
+          <p:nvPr/>
+        </p:nvSpPr>
+        <p:spPr>
+          <a:xfrm>
+            <a:off x="6651624" y="4206874"/>
+            <a:ext cx="1285874" cy="309562"/>
+          </a:xfrm>
+          <a:prstGeom prst="roundRect">
+            <a:avLst>
+              <a:gd name="adj" fmla="val 50000"/>
+            </a:avLst>
+          </a:prstGeom>
+          <a:solidFill>
+            <a:srgbClr val="FFFFFF"/>
+          </a:solidFill>
+          <a:ln w="8731">
+            <a:solidFill>
+              <a:srgbClr val="CBD3DA"/>
+            </a:solidFill>
+          </a:ln>
+          <a:effectLst/>
+        </p:spPr>
+        <p:style>
+          <a:lnRef idx="1">
+            <a:schemeClr val="accent1"/>
+          </a:lnRef>
+          <a:fillRef idx="3">
+            <a:schemeClr val="accent1"/>
+          </a:fillRef>
+          <a:effectRef idx="0">
+            <a:schemeClr val="accent1"/>
+          </a:effectRef>
+          <a:fontRef idx="minor">
+            <a:schemeClr val="lt1"/>
+          </a:fontRef>
+        </p:style>
+        <p:txBody>
+          <a:bodyPr rtlCol="0" anchor="ctr"/>
+          <a:lstStyle/>
+          <a:p>
+            <a:pPr algn="ctr"/>
+          </a:p>
+        </p:txBody>
+      </p:sp>
+      <p:sp>
+        <p:nvSpPr>
+          <p:cNvPr id="145" name="fb_p_t" descr="Editable text; source id fb_p_t"/>
           <p:cNvSpPr txBox="1"/>
           <p:nvPr/>
         </p:nvSpPr>
         <p:spPr>
           <a:xfrm>
-            <a:off x="6706872" y="2755290"/>
-            <a:ext cx="2131690" cy="197260"/>
+            <a:off x="6730999" y="4238624"/>
+            <a:ext cx="1127124" cy="246062"/>
           </a:xfrm>
           <a:prstGeom prst="rect">
             <a:avLst/>
@@ -5956,9 +10305,9 @@
           </a:bodyPr>
           <a:lstStyle/>
           <a:p>
-            <a:pPr algn="l" fontAlgn="base">
+            <a:pPr algn="ctr" fontAlgn="base">
               <a:lnSpc>
-                <a:spcPts val="1465"/>
+                <a:spcPts val="1640"/>
               </a:lnSpc>
               <a:spcBef>
                 <a:spcPts val="0"/>
@@ -5966,7 +10315,7 @@
               <a:spcAft>
                 <a:spcPts val="0"/>
               </a:spcAft>
-              <a:defRPr sz="1002" b="0" i="0" lang="zh-CN" dirty="0">
+              <a:defRPr sz="1124" b="0" i="0" lang="zh-CN" dirty="0">
                 <a:solidFill>
                   <a:srgbClr val="3F4854"/>
                 </a:solidFill>
@@ -5976,7 +10325,7 @@
               </a:defRPr>
             </a:pPr>
             <a:r>
-              <a:rPr sz="1002" b="0" i="0" lang="zh-CN" dirty="0">
+              <a:rPr sz="1124" b="0" i="0" lang="zh-CN" dirty="0">
                 <a:solidFill>
                   <a:srgbClr val="3F4854"/>
                 </a:solidFill>
@@ -5984,33 +10333,33 @@
                 <a:ea typeface="Noto Sans CJK SC"/>
                 <a:cs typeface="Noto Sans CJK SC"/>
               </a:rPr>
-              <a:t>单晶结构与液相选择性</a:t>
+              <a:t>更新组成与工艺</a:t>
             </a:r>
           </a:p>
         </p:txBody>
       </p:sp>
       <p:sp>
         <p:nvSpPr>
-          <p:cNvPr id="51" name="c5" descr="Editable shape; source id c5"/>
+          <p:cNvPr id="146" name="q1" descr="Editable shape; source id q1"/>
           <p:cNvSpPr/>
           <p:nvPr/>
         </p:nvSpPr>
         <p:spPr>
           <a:xfrm>
-            <a:off x="9602154" y="827223"/>
-            <a:ext cx="2258956" cy="2335315"/>
+            <a:off x="476249" y="5270499"/>
+            <a:ext cx="3524249" cy="825499"/>
           </a:xfrm>
           <a:prstGeom prst="roundRect">
             <a:avLst>
-              <a:gd name="adj" fmla="val 2816"/>
+              <a:gd name="adj" fmla="val 8653"/>
             </a:avLst>
           </a:prstGeom>
           <a:solidFill>
             <a:srgbClr val="FFFFFF"/>
           </a:solidFill>
-          <a:ln w="9544">
+          <a:ln w="11112">
             <a:solidFill>
-              <a:srgbClr val="5B7592"/>
+              <a:srgbClr val="C48A24"/>
             </a:solidFill>
           </a:ln>
           <a:effectLst/>
@@ -6039,85 +10388,14 @@
       </p:sp>
       <p:sp>
         <p:nvSpPr>
-          <p:cNvPr id="52" name="c5_s" descr="Editable shape; source id c5_s"/>
-          <p:cNvSpPr/>
-          <p:nvPr/>
-        </p:nvSpPr>
-        <p:spPr>
-          <a:xfrm>
-            <a:off x="9602154" y="827223"/>
-            <a:ext cx="2258956" cy="50906"/>
-          </a:xfrm>
-          <a:prstGeom prst="roundRect">
-            <a:avLst>
-              <a:gd name="adj" fmla="val 50000"/>
-            </a:avLst>
-          </a:prstGeom>
-          <a:solidFill>
-            <a:srgbClr val="5B7592"/>
-          </a:solidFill>
-          <a:ln>
-            <a:noFill/>
-          </a:ln>
-          <a:effectLst/>
-        </p:spPr>
-        <p:style>
-          <a:lnRef idx="1">
-            <a:schemeClr val="accent1"/>
-          </a:lnRef>
-          <a:fillRef idx="3">
-            <a:schemeClr val="accent1"/>
-          </a:fillRef>
-          <a:effectRef idx="0">
-            <a:schemeClr val="accent1"/>
-          </a:effectRef>
-          <a:fontRef idx="minor">
-            <a:schemeClr val="lt1"/>
-          </a:fontRef>
-        </p:style>
-        <p:txBody>
-          <a:bodyPr rtlCol="0" anchor="ctr"/>
-          <a:lstStyle/>
-          <a:p>
-            <a:pPr algn="ctr"/>
-          </a:p>
-        </p:txBody>
-      </p:sp>
-      <p:pic>
-        <p:nvPicPr>
-          <p:cNvPr id="53" name="c5_i" descr="exact crop of the generated raster (line motif)"/>
-          <p:cNvPicPr>
-            <a:picLocks noChangeAspect="1"/>
-          </p:cNvPicPr>
-          <p:nvPr/>
-        </p:nvPicPr>
-        <p:blipFill>
-          <a:blip r:embed="rId7"/>
-          <a:stretch>
-            <a:fillRect/>
-          </a:stretch>
-        </p:blipFill>
-        <p:spPr>
-          <a:xfrm>
-            <a:off x="9703966" y="1004546"/>
-            <a:ext cx="279983" cy="205321"/>
-          </a:xfrm>
-          <a:prstGeom prst="rect">
-            <a:avLst/>
-          </a:prstGeom>
-          <a:effectLst/>
-        </p:spPr>
-      </p:pic>
-      <p:sp>
-        <p:nvSpPr>
-          <p:cNvPr id="54" name="c5_t" descr="Editable text; source id c5_t"/>
+          <p:cNvPr id="147" name="q1_t" descr="Editable text; source id q1_t"/>
           <p:cNvSpPr txBox="1"/>
           <p:nvPr/>
         </p:nvSpPr>
         <p:spPr>
           <a:xfrm>
-            <a:off x="10060308" y="979941"/>
-            <a:ext cx="1698989" cy="248167"/>
+            <a:off x="666749" y="5556249"/>
+            <a:ext cx="3143249" cy="246062"/>
           </a:xfrm>
           <a:prstGeom prst="rect">
             <a:avLst/>
@@ -6131,9 +10409,9 @@
           </a:bodyPr>
           <a:lstStyle/>
           <a:p>
-            <a:pPr algn="l" fontAlgn="base">
+            <a:pPr algn="ctr" fontAlgn="base">
               <a:lnSpc>
-                <a:spcPts val="1728"/>
+                <a:spcPts val="1906"/>
               </a:lnSpc>
               <a:spcBef>
                 <a:spcPts val="0"/>
@@ -6141,443 +10419,7 @@
               <a:spcAft>
                 <a:spcPts val="0"/>
               </a:spcAft>
-              <a:defRPr sz="1187" b="1" i="0" lang="zh-CN" dirty="0">
-                <a:solidFill>
-                  <a:srgbClr val="2B3E57"/>
-                </a:solidFill>
-                <a:latin typeface="Noto Sans CJK SC"/>
-                <a:ea typeface="Noto Sans CJK SC"/>
-                <a:cs typeface="Noto Sans CJK SC"/>
-              </a:defRPr>
-            </a:pPr>
-            <a:r>
-              <a:rPr sz="1187" b="1" i="0" lang="zh-CN" dirty="0">
-                <a:solidFill>
-                  <a:srgbClr val="2B3E57"/>
-                </a:solidFill>
-                <a:latin typeface="Noto Sans CJK SC"/>
-                <a:ea typeface="Noto Sans CJK SC"/>
-                <a:cs typeface="Noto Sans CJK SC"/>
-              </a:rPr>
-              <a:t>结果反馈</a:t>
-            </a:r>
-          </a:p>
-        </p:txBody>
-      </p:sp>
-      <p:sp>
-        <p:nvSpPr>
-          <p:cNvPr id="55" name="c5_k0" descr="Editable text; source id c5_k0"/>
-          <p:cNvSpPr txBox="1"/>
-          <p:nvPr/>
-        </p:nvSpPr>
-        <p:spPr>
-          <a:xfrm>
-            <a:off x="9703966" y="1279014"/>
-            <a:ext cx="2055331" cy="197260"/>
-          </a:xfrm>
-          <a:prstGeom prst="rect">
-            <a:avLst/>
-          </a:prstGeom>
-          <a:noFill/>
-          <a:effectLst/>
-        </p:spPr>
-        <p:txBody>
-          <a:bodyPr wrap="none" anchor="ctr" tIns="0" rIns="0" bIns="0" lIns="0" anchorCtr="0" vertOverflow="overflow">
-            <a:noAutofit/>
-          </a:bodyPr>
-          <a:lstStyle/>
-          <a:p>
-            <a:pPr algn="l" fontAlgn="base">
-              <a:lnSpc>
-                <a:spcPts val="1177"/>
-              </a:lnSpc>
-              <a:spcBef>
-                <a:spcPts val="0"/>
-              </a:spcBef>
-              <a:spcAft>
-                <a:spcPts val="0"/>
-              </a:spcAft>
-              <a:defRPr sz="1002" b="0" i="0" lang="zh-CN" dirty="0">
-                <a:solidFill>
-                  <a:srgbClr val="3F4854"/>
-                </a:solidFill>
-                <a:latin typeface="DejaVu Sans"/>
-                <a:ea typeface="DejaVu Sans"/>
-                <a:cs typeface="DejaVu Sans"/>
-              </a:defRPr>
-            </a:pPr>
-            <a:r>
-              <a:rPr sz="1002" b="0" i="0" lang="zh-CN" dirty="0">
-                <a:solidFill>
-                  <a:srgbClr val="3F4854"/>
-                </a:solidFill>
-                <a:latin typeface="DejaVu Sans"/>
-                <a:ea typeface="DejaVu Sans"/>
-                <a:cs typeface="DejaVu Sans"/>
-              </a:rPr>
-              <a:t>PXRD / Rietveld</a:t>
-            </a:r>
-          </a:p>
-        </p:txBody>
-      </p:sp>
-      <p:cxnSp>
-        <p:nvCxnSpPr>
-          <p:cNvPr id="56" name="c5_r1" descr="Editable line; source id c5_r1"/>
-          <p:cNvCxnSpPr/>
-          <p:nvPr/>
-        </p:nvCxnSpPr>
-        <p:spPr>
-          <a:xfrm>
-            <a:off x="9703966" y="1578087"/>
-            <a:ext cx="2055332" cy="0"/>
-          </a:xfrm>
-          <a:prstGeom prst="line">
-            <a:avLst/>
-          </a:prstGeom>
-          <a:ln w="6363">
-            <a:solidFill>
-              <a:srgbClr val="DCE2E8"/>
-            </a:solidFill>
-          </a:ln>
-          <a:effectLst/>
-        </p:spPr>
-        <p:style>
-          <a:lnRef idx="2">
-            <a:schemeClr val="accent1"/>
-          </a:lnRef>
-          <a:fillRef idx="0">
-            <a:schemeClr val="accent1"/>
-          </a:fillRef>
-          <a:effectRef idx="0">
-            <a:schemeClr val="accent1"/>
-          </a:effectRef>
-          <a:fontRef idx="minor">
-            <a:schemeClr val="tx1"/>
-          </a:fontRef>
-        </p:style>
-      </p:cxnSp>
-      <p:sp>
-        <p:nvSpPr>
-          <p:cNvPr id="57" name="c5_k1" descr="Editable text; source id c5_k1"/>
-          <p:cNvSpPr txBox="1"/>
-          <p:nvPr/>
-        </p:nvSpPr>
-        <p:spPr>
-          <a:xfrm>
-            <a:off x="9703966" y="1603540"/>
-            <a:ext cx="2055331" cy="197260"/>
-          </a:xfrm>
-          <a:prstGeom prst="rect">
-            <a:avLst/>
-          </a:prstGeom>
-          <a:noFill/>
-          <a:effectLst/>
-        </p:spPr>
-        <p:txBody>
-          <a:bodyPr wrap="none" anchor="ctr" tIns="0" rIns="0" bIns="0" lIns="0" anchorCtr="0" vertOverflow="overflow">
-            <a:noAutofit/>
-          </a:bodyPr>
-          <a:lstStyle/>
-          <a:p>
-            <a:pPr algn="l" fontAlgn="base">
-              <a:lnSpc>
-                <a:spcPts val="1177"/>
-              </a:lnSpc>
-              <a:spcBef>
-                <a:spcPts val="0"/>
-              </a:spcBef>
-              <a:spcAft>
-                <a:spcPts val="0"/>
-              </a:spcAft>
-              <a:defRPr sz="1002" b="0" i="0" lang="zh-CN" dirty="0">
-                <a:solidFill>
-                  <a:srgbClr val="3F4854"/>
-                </a:solidFill>
-                <a:latin typeface="DejaVu Sans"/>
-                <a:ea typeface="DejaVu Sans"/>
-                <a:cs typeface="DejaVu Sans"/>
-              </a:defRPr>
-            </a:pPr>
-            <a:r>
-              <a:rPr sz="1002" b="0" i="0" lang="zh-CN" dirty="0">
-                <a:solidFill>
-                  <a:srgbClr val="3F4854"/>
-                </a:solidFill>
-                <a:latin typeface="DejaVu Sans"/>
-                <a:ea typeface="DejaVu Sans"/>
-                <a:cs typeface="DejaVu Sans"/>
-              </a:rPr>
-              <a:t>SCXRD</a:t>
-            </a:r>
-          </a:p>
-        </p:txBody>
-      </p:sp>
-      <p:cxnSp>
-        <p:nvCxnSpPr>
-          <p:cNvPr id="58" name="c5_r2" descr="Editable line; source id c5_r2"/>
-          <p:cNvCxnSpPr/>
-          <p:nvPr/>
-        </p:nvCxnSpPr>
-        <p:spPr>
-          <a:xfrm>
-            <a:off x="9703966" y="1902613"/>
-            <a:ext cx="2055332" cy="0"/>
-          </a:xfrm>
-          <a:prstGeom prst="line">
-            <a:avLst/>
-          </a:prstGeom>
-          <a:ln w="6363">
-            <a:solidFill>
-              <a:srgbClr val="DCE2E8"/>
-            </a:solidFill>
-          </a:ln>
-          <a:effectLst/>
-        </p:spPr>
-        <p:style>
-          <a:lnRef idx="2">
-            <a:schemeClr val="accent1"/>
-          </a:lnRef>
-          <a:fillRef idx="0">
-            <a:schemeClr val="accent1"/>
-          </a:fillRef>
-          <a:effectRef idx="0">
-            <a:schemeClr val="accent1"/>
-          </a:effectRef>
-          <a:fontRef idx="minor">
-            <a:schemeClr val="tx1"/>
-          </a:fontRef>
-        </p:style>
-      </p:cxnSp>
-      <p:sp>
-        <p:nvSpPr>
-          <p:cNvPr id="59" name="c5_k2" descr="Editable text; source id c5_k2"/>
-          <p:cNvSpPr txBox="1"/>
-          <p:nvPr/>
-        </p:nvSpPr>
-        <p:spPr>
-          <a:xfrm>
-            <a:off x="9703966" y="1928066"/>
-            <a:ext cx="2055331" cy="197260"/>
-          </a:xfrm>
-          <a:prstGeom prst="rect">
-            <a:avLst/>
-          </a:prstGeom>
-          <a:noFill/>
-          <a:effectLst/>
-        </p:spPr>
-        <p:txBody>
-          <a:bodyPr wrap="none" anchor="ctr" tIns="0" rIns="0" bIns="0" lIns="0" anchorCtr="0" vertOverflow="overflow">
-            <a:noAutofit/>
-          </a:bodyPr>
-          <a:lstStyle/>
-          <a:p>
-            <a:pPr algn="l" fontAlgn="base">
-              <a:lnSpc>
-                <a:spcPts val="1177"/>
-              </a:lnSpc>
-              <a:spcBef>
-                <a:spcPts val="0"/>
-              </a:spcBef>
-              <a:spcAft>
-                <a:spcPts val="0"/>
-              </a:spcAft>
-              <a:defRPr sz="1002" b="0" i="0" lang="zh-CN" dirty="0">
-                <a:solidFill>
-                  <a:srgbClr val="3F4854"/>
-                </a:solidFill>
-                <a:latin typeface="DejaVu Sans"/>
-                <a:ea typeface="DejaVu Sans"/>
-                <a:cs typeface="DejaVu Sans"/>
-              </a:defRPr>
-            </a:pPr>
-            <a:r>
-              <a:rPr sz="1002" b="0" i="0" lang="zh-CN" dirty="0">
-                <a:solidFill>
-                  <a:srgbClr val="3F4854"/>
-                </a:solidFill>
-                <a:latin typeface="DejaVu Sans"/>
-                <a:ea typeface="DejaVu Sans"/>
-                <a:cs typeface="DejaVu Sans"/>
-              </a:rPr>
-              <a:t>EDS / EPMA / ICP</a:t>
-            </a:r>
-          </a:p>
-        </p:txBody>
-      </p:sp>
-      <p:cxnSp>
-        <p:nvCxnSpPr>
-          <p:cNvPr id="60" name="c5_r3" descr="Editable line; source id c5_r3"/>
-          <p:cNvCxnSpPr/>
-          <p:nvPr/>
-        </p:nvCxnSpPr>
-        <p:spPr>
-          <a:xfrm>
-            <a:off x="9703966" y="2227139"/>
-            <a:ext cx="2055332" cy="0"/>
-          </a:xfrm>
-          <a:prstGeom prst="line">
-            <a:avLst/>
-          </a:prstGeom>
-          <a:ln w="6363">
-            <a:solidFill>
-              <a:srgbClr val="DCE2E8"/>
-            </a:solidFill>
-          </a:ln>
-          <a:effectLst/>
-        </p:spPr>
-        <p:style>
-          <a:lnRef idx="2">
-            <a:schemeClr val="accent1"/>
-          </a:lnRef>
-          <a:fillRef idx="0">
-            <a:schemeClr val="accent1"/>
-          </a:fillRef>
-          <a:effectRef idx="0">
-            <a:schemeClr val="accent1"/>
-          </a:effectRef>
-          <a:fontRef idx="minor">
-            <a:schemeClr val="tx1"/>
-          </a:fontRef>
-        </p:style>
-      </p:cxnSp>
-      <p:sp>
-        <p:nvSpPr>
-          <p:cNvPr id="61" name="c5_k3" descr="Editable text; source id c5_k3"/>
-          <p:cNvSpPr txBox="1"/>
-          <p:nvPr/>
-        </p:nvSpPr>
-        <p:spPr>
-          <a:xfrm>
-            <a:off x="9703966" y="2252592"/>
-            <a:ext cx="2055331" cy="197260"/>
-          </a:xfrm>
-          <a:prstGeom prst="rect">
-            <a:avLst/>
-          </a:prstGeom>
-          <a:noFill/>
-          <a:effectLst/>
-        </p:spPr>
-        <p:txBody>
-          <a:bodyPr wrap="none" anchor="ctr" tIns="0" rIns="0" bIns="0" lIns="0" anchorCtr="0" vertOverflow="overflow">
-            <a:noAutofit/>
-          </a:bodyPr>
-          <a:lstStyle/>
-          <a:p>
-            <a:pPr algn="l" fontAlgn="base">
-              <a:lnSpc>
-                <a:spcPts val="1465"/>
-              </a:lnSpc>
-              <a:spcBef>
-                <a:spcPts val="0"/>
-              </a:spcBef>
-              <a:spcAft>
-                <a:spcPts val="0"/>
-              </a:spcAft>
-              <a:defRPr sz="1002" b="0" i="0" lang="zh-CN" dirty="0">
-                <a:solidFill>
-                  <a:srgbClr val="3F4854"/>
-                </a:solidFill>
-                <a:latin typeface="Noto Sans CJK SC"/>
-                <a:ea typeface="Noto Sans CJK SC"/>
-                <a:cs typeface="Noto Sans CJK SC"/>
-              </a:defRPr>
-            </a:pPr>
-            <a:r>
-              <a:rPr sz="1002" b="0" i="0" lang="zh-CN" dirty="0">
-                <a:solidFill>
-                  <a:srgbClr val="3F4854"/>
-                </a:solidFill>
-                <a:latin typeface="Noto Sans CJK SC"/>
-                <a:ea typeface="Noto Sans CJK SC"/>
-                <a:cs typeface="Noto Sans CJK SC"/>
-              </a:rPr>
-              <a:t>高温相与冷却产物</a:t>
-            </a:r>
-          </a:p>
-        </p:txBody>
-      </p:sp>
-      <p:sp>
-        <p:nvSpPr>
-          <p:cNvPr id="62" name="q1" descr="Editable shape; source id q1"/>
-          <p:cNvSpPr/>
-          <p:nvPr/>
-        </p:nvSpPr>
-        <p:spPr>
-          <a:xfrm>
-            <a:off x="668141" y="4276108"/>
-            <a:ext cx="3429795" cy="610872"/>
-          </a:xfrm>
-          <a:prstGeom prst="roundRect">
-            <a:avLst>
-              <a:gd name="adj" fmla="val 10416"/>
-            </a:avLst>
-          </a:prstGeom>
-          <a:solidFill>
-            <a:srgbClr val="FFFFFF"/>
-          </a:solidFill>
-          <a:ln w="9544">
-            <a:solidFill>
-              <a:srgbClr val="C48A24"/>
-            </a:solidFill>
-          </a:ln>
-          <a:effectLst/>
-        </p:spPr>
-        <p:style>
-          <a:lnRef idx="1">
-            <a:schemeClr val="accent1"/>
-          </a:lnRef>
-          <a:fillRef idx="3">
-            <a:schemeClr val="accent1"/>
-          </a:fillRef>
-          <a:effectRef idx="0">
-            <a:schemeClr val="accent1"/>
-          </a:effectRef>
-          <a:fontRef idx="minor">
-            <a:schemeClr val="lt1"/>
-          </a:fontRef>
-        </p:style>
-        <p:txBody>
-          <a:bodyPr rtlCol="0" anchor="ctr"/>
-          <a:lstStyle/>
-          <a:p>
-            <a:pPr algn="ctr"/>
-          </a:p>
-        </p:txBody>
-      </p:sp>
-      <p:sp>
-        <p:nvSpPr>
-          <p:cNvPr id="63" name="q1_t" descr="Editable text; source id q1_t"/>
-          <p:cNvSpPr txBox="1"/>
-          <p:nvPr/>
-        </p:nvSpPr>
-        <p:spPr>
-          <a:xfrm>
-            <a:off x="820860" y="4428826"/>
-            <a:ext cx="3124359" cy="229077"/>
-          </a:xfrm>
-          <a:prstGeom prst="rect">
-            <a:avLst/>
-          </a:prstGeom>
-          <a:noFill/>
-          <a:effectLst/>
-        </p:spPr>
-        <p:txBody>
-          <a:bodyPr wrap="none" anchor="ctr" tIns="0" rIns="0" bIns="0" lIns="0" anchorCtr="0" vertOverflow="overflow">
-            <a:noAutofit/>
-          </a:bodyPr>
-          <a:lstStyle/>
-          <a:p>
-            <a:pPr algn="ctr" fontAlgn="base">
-              <a:lnSpc>
-                <a:spcPts val="1603"/>
-              </a:lnSpc>
-              <a:spcBef>
-                <a:spcPts val="0"/>
-              </a:spcBef>
-              <a:spcAft>
-                <a:spcPts val="0"/>
-              </a:spcAft>
-              <a:defRPr sz="1095" b="1" i="0" lang="zh-CN" dirty="0">
+              <a:defRPr sz="1306" b="1" i="0" lang="zh-CN" dirty="0">
                 <a:solidFill>
                   <a:srgbClr val="7A5410"/>
                 </a:solidFill>
@@ -6587,7 +10429,7 @@
               </a:defRPr>
             </a:pPr>
             <a:r>
-              <a:rPr sz="1095" b="1" i="0" lang="zh-CN" dirty="0">
+              <a:rPr sz="1306" b="1" i="0" lang="zh-CN" dirty="0">
                 <a:solidFill>
                   <a:srgbClr val="7A5410"/>
                 </a:solidFill>
@@ -6598,7 +10440,7 @@
               <a:t>Zn </a:t>
             </a:r>
             <a:r>
-              <a:rPr sz="1095" b="1" i="0" lang="zh-CN" dirty="0">
+              <a:rPr sz="1306" b="1" i="0" lang="zh-CN" dirty="0">
                 <a:solidFill>
                   <a:srgbClr val="7A5410"/>
                 </a:solidFill>
@@ -6613,24 +10455,24 @@
       </p:sp>
       <p:sp>
         <p:nvSpPr>
-          <p:cNvPr id="64" name="q2" descr="Editable shape; source id q2"/>
+          <p:cNvPr id="148" name="q2" descr="Editable shape; source id q2"/>
           <p:cNvSpPr/>
           <p:nvPr/>
         </p:nvSpPr>
         <p:spPr>
           <a:xfrm>
-            <a:off x="4473369" y="4276108"/>
-            <a:ext cx="3429795" cy="610872"/>
+            <a:off x="4333874" y="5270499"/>
+            <a:ext cx="3524249" cy="825499"/>
           </a:xfrm>
           <a:prstGeom prst="roundRect">
             <a:avLst>
-              <a:gd name="adj" fmla="val 10416"/>
+              <a:gd name="adj" fmla="val 8653"/>
             </a:avLst>
           </a:prstGeom>
           <a:solidFill>
             <a:srgbClr val="FFFFFF"/>
           </a:solidFill>
-          <a:ln w="9544">
+          <a:ln w="11112">
             <a:solidFill>
               <a:srgbClr val="C48A24"/>
             </a:solidFill>
@@ -6661,14 +10503,14 @@
       </p:sp>
       <p:sp>
         <p:nvSpPr>
-          <p:cNvPr id="65" name="q2_t" descr="Editable text; source id q2_t"/>
+          <p:cNvPr id="149" name="q2_t" descr="Editable text; source id q2_t"/>
           <p:cNvSpPr txBox="1"/>
           <p:nvPr/>
         </p:nvSpPr>
         <p:spPr>
           <a:xfrm>
-            <a:off x="4626087" y="4428826"/>
-            <a:ext cx="3124359" cy="229077"/>
+            <a:off x="4524374" y="5556249"/>
+            <a:ext cx="3143249" cy="246062"/>
           </a:xfrm>
           <a:prstGeom prst="rect">
             <a:avLst/>
@@ -6684,7 +10526,7 @@
           <a:p>
             <a:pPr algn="ctr" fontAlgn="base">
               <a:lnSpc>
-                <a:spcPts val="1603"/>
+                <a:spcPts val="1906"/>
               </a:lnSpc>
               <a:spcBef>
                 <a:spcPts val="0"/>
@@ -6692,7 +10534,7 @@
               <a:spcAft>
                 <a:spcPts val="0"/>
               </a:spcAft>
-              <a:defRPr sz="1095" b="1" i="0" lang="zh-CN" dirty="0">
+              <a:defRPr sz="1306" b="1" i="0" lang="zh-CN" dirty="0">
                 <a:solidFill>
                   <a:srgbClr val="7A5410"/>
                 </a:solidFill>
@@ -6702,7 +10544,7 @@
               </a:defRPr>
             </a:pPr>
             <a:r>
-              <a:rPr sz="1095" b="1" i="0" lang="zh-CN" dirty="0">
+              <a:rPr sz="1306" b="1" i="0" lang="zh-CN" dirty="0">
                 <a:solidFill>
                   <a:srgbClr val="7A5410"/>
                 </a:solidFill>
@@ -6717,24 +10559,24 @@
       </p:sp>
       <p:sp>
         <p:nvSpPr>
-          <p:cNvPr id="66" name="q3" descr="Editable shape; source id q3"/>
+          <p:cNvPr id="150" name="q3" descr="Editable shape; source id q3"/>
           <p:cNvSpPr/>
           <p:nvPr/>
         </p:nvSpPr>
         <p:spPr>
           <a:xfrm>
-            <a:off x="8221327" y="4276108"/>
-            <a:ext cx="3537970" cy="610872"/>
+            <a:off x="8191499" y="5270499"/>
+            <a:ext cx="3524249" cy="825499"/>
           </a:xfrm>
           <a:prstGeom prst="roundRect">
             <a:avLst>
-              <a:gd name="adj" fmla="val 10416"/>
+              <a:gd name="adj" fmla="val 8653"/>
             </a:avLst>
           </a:prstGeom>
           <a:solidFill>
             <a:srgbClr val="FFFFFF"/>
           </a:solidFill>
-          <a:ln w="9544">
+          <a:ln w="11112">
             <a:solidFill>
               <a:srgbClr val="C48A24"/>
             </a:solidFill>
@@ -6765,14 +10607,14 @@
       </p:sp>
       <p:sp>
         <p:nvSpPr>
-          <p:cNvPr id="67" name="q3_t" descr="Editable text; source id q3_t"/>
+          <p:cNvPr id="151" name="q3_t" descr="Editable text; source id q3_t"/>
           <p:cNvSpPr txBox="1"/>
           <p:nvPr/>
         </p:nvSpPr>
         <p:spPr>
           <a:xfrm>
-            <a:off x="8374045" y="4428826"/>
-            <a:ext cx="3232534" cy="229077"/>
+            <a:off x="8381999" y="5556249"/>
+            <a:ext cx="3143249" cy="246062"/>
           </a:xfrm>
           <a:prstGeom prst="rect">
             <a:avLst/>
@@ -6788,7 +10630,7 @@
           <a:p>
             <a:pPr algn="ctr" fontAlgn="base">
               <a:lnSpc>
-                <a:spcPts val="1603"/>
+                <a:spcPts val="1906"/>
               </a:lnSpc>
               <a:spcBef>
                 <a:spcPts val="0"/>
@@ -6796,7 +10638,7 @@
               <a:spcAft>
                 <a:spcPts val="0"/>
               </a:spcAft>
-              <a:defRPr sz="1095" b="1" i="0" lang="zh-CN" dirty="0">
+              <a:defRPr sz="1306" b="1" i="0" lang="zh-CN" dirty="0">
                 <a:solidFill>
                   <a:srgbClr val="7A5410"/>
                 </a:solidFill>
@@ -6806,7 +10648,7 @@
               </a:defRPr>
             </a:pPr>
             <a:r>
-              <a:rPr sz="1095" b="1" i="0" lang="zh-CN" dirty="0">
+              <a:rPr sz="1306" b="1" i="0" lang="zh-CN" dirty="0">
                 <a:solidFill>
                   <a:srgbClr val="7A5410"/>
                 </a:solidFill>
@@ -6819,817 +10661,6 @@
           </a:p>
         </p:txBody>
       </p:sp>
-      <p:sp>
-        <p:nvSpPr>
-          <p:cNvPr id="68" name="e1_0" descr="Editable line; source id e1_0"/>
-          <p:cNvSpPr/>
-          <p:nvPr/>
-        </p:nvSpPr>
-        <p:spPr>
-          <a:xfrm>
-            <a:off x="2042605" y="1816710"/>
-            <a:ext cx="190898" cy="69996"/>
-          </a:xfrm>
-          <a:custGeom>
-            <a:avLst/>
-            <a:gdLst/>
-            <a:ahLst/>
-            <a:cxnLst/>
-            <a:rect l="l" t="t" r="r" b="b"/>
-            <a:pathLst>
-              <a:path w="30000" h="11000">
-                <a:moveTo>
-                  <a:pt x="0" y="4500"/>
-                </a:moveTo>
-                <a:lnTo>
-                  <a:pt x="17000" y="4500"/>
-                </a:lnTo>
-                <a:lnTo>
-                  <a:pt x="17000" y="0"/>
-                </a:lnTo>
-                <a:lnTo>
-                  <a:pt x="30000" y="5500"/>
-                </a:lnTo>
-                <a:lnTo>
-                  <a:pt x="17000" y="11000"/>
-                </a:lnTo>
-                <a:lnTo>
-                  <a:pt x="17000" y="6500"/>
-                </a:lnTo>
-                <a:lnTo>
-                  <a:pt x="0" y="6500"/>
-                </a:lnTo>
-                <a:close/>
-              </a:path>
-            </a:pathLst>
-          </a:custGeom>
-          <a:solidFill>
-            <a:srgbClr val="4B5563"/>
-          </a:solidFill>
-          <a:ln>
-            <a:noFill/>
-          </a:ln>
-          <a:effectLst/>
-        </p:spPr>
-        <p:style>
-          <a:lnRef idx="1">
-            <a:schemeClr val="accent1"/>
-          </a:lnRef>
-          <a:fillRef idx="3">
-            <a:schemeClr val="accent1"/>
-          </a:fillRef>
-          <a:effectRef idx="0">
-            <a:schemeClr val="accent1"/>
-          </a:effectRef>
-          <a:fontRef idx="minor">
-            <a:schemeClr val="lt1"/>
-          </a:fontRef>
-        </p:style>
-        <p:txBody>
-          <a:bodyPr rtlCol="0" anchor="ctr"/>
-          <a:lstStyle/>
-          <a:p>
-            <a:pPr algn="ctr"/>
-          </a:p>
-        </p:txBody>
-      </p:sp>
-      <p:sp>
-        <p:nvSpPr>
-          <p:cNvPr id="69" name="e2_0" descr="Editable line; source id e2_0"/>
-          <p:cNvSpPr/>
-          <p:nvPr/>
-        </p:nvSpPr>
-        <p:spPr>
-          <a:xfrm>
-            <a:off x="4015215" y="1816710"/>
-            <a:ext cx="152718" cy="69996"/>
-          </a:xfrm>
-          <a:custGeom>
-            <a:avLst/>
-            <a:gdLst/>
-            <a:ahLst/>
-            <a:cxnLst/>
-            <a:rect l="l" t="t" r="r" b="b"/>
-            <a:pathLst>
-              <a:path w="24000" h="11000">
-                <a:moveTo>
-                  <a:pt x="0" y="4500"/>
-                </a:moveTo>
-                <a:lnTo>
-                  <a:pt x="11000" y="4500"/>
-                </a:lnTo>
-                <a:lnTo>
-                  <a:pt x="11000" y="0"/>
-                </a:lnTo>
-                <a:lnTo>
-                  <a:pt x="24000" y="5500"/>
-                </a:lnTo>
-                <a:lnTo>
-                  <a:pt x="11000" y="11000"/>
-                </a:lnTo>
-                <a:lnTo>
-                  <a:pt x="11000" y="6500"/>
-                </a:lnTo>
-                <a:lnTo>
-                  <a:pt x="0" y="6500"/>
-                </a:lnTo>
-                <a:close/>
-              </a:path>
-            </a:pathLst>
-          </a:custGeom>
-          <a:solidFill>
-            <a:srgbClr val="4B5563"/>
-          </a:solidFill>
-          <a:ln>
-            <a:noFill/>
-          </a:ln>
-          <a:effectLst/>
-        </p:spPr>
-        <p:style>
-          <a:lnRef idx="1">
-            <a:schemeClr val="accent1"/>
-          </a:lnRef>
-          <a:fillRef idx="3">
-            <a:schemeClr val="accent1"/>
-          </a:fillRef>
-          <a:effectRef idx="0">
-            <a:schemeClr val="accent1"/>
-          </a:effectRef>
-          <a:fontRef idx="minor">
-            <a:schemeClr val="lt1"/>
-          </a:fontRef>
-        </p:style>
-        <p:txBody>
-          <a:bodyPr rtlCol="0" anchor="ctr"/>
-          <a:lstStyle/>
-          <a:p>
-            <a:pPr algn="ctr"/>
-          </a:p>
-        </p:txBody>
-      </p:sp>
-      <p:cxnSp>
-        <p:nvCxnSpPr>
-          <p:cNvPr id="70" name="fk0_0" descr="Editable line; source id fk0_0"/>
-          <p:cNvCxnSpPr/>
-          <p:nvPr/>
-        </p:nvCxnSpPr>
-        <p:spPr>
-          <a:xfrm>
-            <a:off x="5949644" y="1851707"/>
-            <a:ext cx="318163" cy="0"/>
-          </a:xfrm>
-          <a:prstGeom prst="line">
-            <a:avLst/>
-          </a:prstGeom>
-          <a:ln w="12726">
-            <a:solidFill>
-              <a:srgbClr val="4B5563"/>
-            </a:solidFill>
-          </a:ln>
-          <a:effectLst/>
-        </p:spPr>
-        <p:style>
-          <a:lnRef idx="2">
-            <a:schemeClr val="accent1"/>
-          </a:lnRef>
-          <a:fillRef idx="0">
-            <a:schemeClr val="accent1"/>
-          </a:fillRef>
-          <a:effectRef idx="0">
-            <a:schemeClr val="accent1"/>
-          </a:effectRef>
-          <a:fontRef idx="minor">
-            <a:schemeClr val="tx1"/>
-          </a:fontRef>
-        </p:style>
-      </p:cxnSp>
-      <p:cxnSp>
-        <p:nvCxnSpPr>
-          <p:cNvPr id="71" name="fkv_0" descr="Editable line; source id fkv_0"/>
-          <p:cNvCxnSpPr/>
-          <p:nvPr/>
-        </p:nvCxnSpPr>
-        <p:spPr>
-          <a:xfrm>
-            <a:off x="6267807" y="1285377"/>
-            <a:ext cx="0" cy="1406280"/>
-          </a:xfrm>
-          <a:prstGeom prst="line">
-            <a:avLst/>
-          </a:prstGeom>
-          <a:ln w="12726">
-            <a:solidFill>
-              <a:srgbClr val="4B5563"/>
-            </a:solidFill>
-          </a:ln>
-          <a:effectLst/>
-        </p:spPr>
-        <p:style>
-          <a:lnRef idx="2">
-            <a:schemeClr val="accent1"/>
-          </a:lnRef>
-          <a:fillRef idx="0">
-            <a:schemeClr val="accent1"/>
-          </a:fillRef>
-          <a:effectRef idx="0">
-            <a:schemeClr val="accent1"/>
-          </a:effectRef>
-          <a:fontRef idx="minor">
-            <a:schemeClr val="tx1"/>
-          </a:fontRef>
-        </p:style>
-      </p:cxnSp>
-      <p:sp>
-        <p:nvSpPr>
-          <p:cNvPr id="72" name="fk1_0" descr="Editable line; source id fk1_0"/>
-          <p:cNvSpPr/>
-          <p:nvPr/>
-        </p:nvSpPr>
-        <p:spPr>
-          <a:xfrm>
-            <a:off x="6267808" y="1250380"/>
-            <a:ext cx="324526" cy="69996"/>
-          </a:xfrm>
-          <a:custGeom>
-            <a:avLst/>
-            <a:gdLst/>
-            <a:ahLst/>
-            <a:cxnLst/>
-            <a:rect l="l" t="t" r="r" b="b"/>
-            <a:pathLst>
-              <a:path w="51000" h="11000">
-                <a:moveTo>
-                  <a:pt x="0" y="4500"/>
-                </a:moveTo>
-                <a:lnTo>
-                  <a:pt x="38000" y="4500"/>
-                </a:lnTo>
-                <a:lnTo>
-                  <a:pt x="38000" y="0"/>
-                </a:lnTo>
-                <a:lnTo>
-                  <a:pt x="51000" y="5500"/>
-                </a:lnTo>
-                <a:lnTo>
-                  <a:pt x="38000" y="11000"/>
-                </a:lnTo>
-                <a:lnTo>
-                  <a:pt x="38000" y="6500"/>
-                </a:lnTo>
-                <a:lnTo>
-                  <a:pt x="0" y="6500"/>
-                </a:lnTo>
-                <a:close/>
-              </a:path>
-            </a:pathLst>
-          </a:custGeom>
-          <a:solidFill>
-            <a:srgbClr val="4B5563"/>
-          </a:solidFill>
-          <a:ln>
-            <a:noFill/>
-          </a:ln>
-          <a:effectLst/>
-        </p:spPr>
-        <p:style>
-          <a:lnRef idx="1">
-            <a:schemeClr val="accent1"/>
-          </a:lnRef>
-          <a:fillRef idx="3">
-            <a:schemeClr val="accent1"/>
-          </a:fillRef>
-          <a:effectRef idx="0">
-            <a:schemeClr val="accent1"/>
-          </a:effectRef>
-          <a:fontRef idx="minor">
-            <a:schemeClr val="lt1"/>
-          </a:fontRef>
-        </p:style>
-        <p:txBody>
-          <a:bodyPr rtlCol="0" anchor="ctr"/>
-          <a:lstStyle/>
-          <a:p>
-            <a:pPr algn="ctr"/>
-          </a:p>
-        </p:txBody>
-      </p:sp>
-      <p:sp>
-        <p:nvSpPr>
-          <p:cNvPr id="73" name="fk2_0" descr="Editable line; source id fk2_0"/>
-          <p:cNvSpPr/>
-          <p:nvPr/>
-        </p:nvSpPr>
-        <p:spPr>
-          <a:xfrm>
-            <a:off x="6267808" y="2656660"/>
-            <a:ext cx="324526" cy="69996"/>
-          </a:xfrm>
-          <a:custGeom>
-            <a:avLst/>
-            <a:gdLst/>
-            <a:ahLst/>
-            <a:cxnLst/>
-            <a:rect l="l" t="t" r="r" b="b"/>
-            <a:pathLst>
-              <a:path w="51000" h="11000">
-                <a:moveTo>
-                  <a:pt x="0" y="4500"/>
-                </a:moveTo>
-                <a:lnTo>
-                  <a:pt x="38000" y="4500"/>
-                </a:lnTo>
-                <a:lnTo>
-                  <a:pt x="38000" y="0"/>
-                </a:lnTo>
-                <a:lnTo>
-                  <a:pt x="51000" y="5500"/>
-                </a:lnTo>
-                <a:lnTo>
-                  <a:pt x="38000" y="11000"/>
-                </a:lnTo>
-                <a:lnTo>
-                  <a:pt x="38000" y="6500"/>
-                </a:lnTo>
-                <a:lnTo>
-                  <a:pt x="0" y="6500"/>
-                </a:lnTo>
-                <a:close/>
-              </a:path>
-            </a:pathLst>
-          </a:custGeom>
-          <a:solidFill>
-            <a:srgbClr val="4B5563"/>
-          </a:solidFill>
-          <a:ln>
-            <a:noFill/>
-          </a:ln>
-          <a:effectLst/>
-        </p:spPr>
-        <p:style>
-          <a:lnRef idx="1">
-            <a:schemeClr val="accent1"/>
-          </a:lnRef>
-          <a:fillRef idx="3">
-            <a:schemeClr val="accent1"/>
-          </a:fillRef>
-          <a:effectRef idx="0">
-            <a:schemeClr val="accent1"/>
-          </a:effectRef>
-          <a:fontRef idx="minor">
-            <a:schemeClr val="lt1"/>
-          </a:fontRef>
-        </p:style>
-        <p:txBody>
-          <a:bodyPr rtlCol="0" anchor="ctr"/>
-          <a:lstStyle/>
-          <a:p>
-            <a:pPr algn="ctr"/>
-          </a:p>
-        </p:txBody>
-      </p:sp>
-      <p:cxnSp>
-        <p:nvCxnSpPr>
-          <p:cNvPr id="74" name="mg1_0" descr="Editable line; source id mg1_0"/>
-          <p:cNvCxnSpPr/>
-          <p:nvPr/>
-        </p:nvCxnSpPr>
-        <p:spPr>
-          <a:xfrm>
-            <a:off x="8940375" y="1285377"/>
-            <a:ext cx="318163" cy="0"/>
-          </a:xfrm>
-          <a:prstGeom prst="line">
-            <a:avLst/>
-          </a:prstGeom>
-          <a:ln w="12726">
-            <a:solidFill>
-              <a:srgbClr val="4B5563"/>
-            </a:solidFill>
-          </a:ln>
-          <a:effectLst/>
-        </p:spPr>
-        <p:style>
-          <a:lnRef idx="2">
-            <a:schemeClr val="accent1"/>
-          </a:lnRef>
-          <a:fillRef idx="0">
-            <a:schemeClr val="accent1"/>
-          </a:fillRef>
-          <a:effectRef idx="0">
-            <a:schemeClr val="accent1"/>
-          </a:effectRef>
-          <a:fontRef idx="minor">
-            <a:schemeClr val="tx1"/>
-          </a:fontRef>
-        </p:style>
-      </p:cxnSp>
-      <p:cxnSp>
-        <p:nvCxnSpPr>
-          <p:cNvPr id="75" name="mg2_0" descr="Editable line; source id mg2_0"/>
-          <p:cNvCxnSpPr/>
-          <p:nvPr/>
-        </p:nvCxnSpPr>
-        <p:spPr>
-          <a:xfrm>
-            <a:off x="8940375" y="2691657"/>
-            <a:ext cx="318163" cy="0"/>
-          </a:xfrm>
-          <a:prstGeom prst="line">
-            <a:avLst/>
-          </a:prstGeom>
-          <a:ln w="12726">
-            <a:solidFill>
-              <a:srgbClr val="4B5563"/>
-            </a:solidFill>
-          </a:ln>
-          <a:effectLst/>
-        </p:spPr>
-        <p:style>
-          <a:lnRef idx="2">
-            <a:schemeClr val="accent1"/>
-          </a:lnRef>
-          <a:fillRef idx="0">
-            <a:schemeClr val="accent1"/>
-          </a:fillRef>
-          <a:effectRef idx="0">
-            <a:schemeClr val="accent1"/>
-          </a:effectRef>
-          <a:fontRef idx="minor">
-            <a:schemeClr val="tx1"/>
-          </a:fontRef>
-        </p:style>
-      </p:cxnSp>
-      <p:cxnSp>
-        <p:nvCxnSpPr>
-          <p:cNvPr id="76" name="mgv_0" descr="Editable line; source id mgv_0"/>
-          <p:cNvCxnSpPr/>
-          <p:nvPr/>
-        </p:nvCxnSpPr>
-        <p:spPr>
-          <a:xfrm>
-            <a:off x="9258538" y="1285377"/>
-            <a:ext cx="0" cy="1406280"/>
-          </a:xfrm>
-          <a:prstGeom prst="line">
-            <a:avLst/>
-          </a:prstGeom>
-          <a:ln w="12726">
-            <a:solidFill>
-              <a:srgbClr val="4B5563"/>
-            </a:solidFill>
-          </a:ln>
-          <a:effectLst/>
-        </p:spPr>
-        <p:style>
-          <a:lnRef idx="2">
-            <a:schemeClr val="accent1"/>
-          </a:lnRef>
-          <a:fillRef idx="0">
-            <a:schemeClr val="accent1"/>
-          </a:fillRef>
-          <a:effectRef idx="0">
-            <a:schemeClr val="accent1"/>
-          </a:effectRef>
-          <a:fontRef idx="minor">
-            <a:schemeClr val="tx1"/>
-          </a:fontRef>
-        </p:style>
-      </p:cxnSp>
-      <p:sp>
-        <p:nvSpPr>
-          <p:cNvPr id="77" name="mg3_0" descr="Editable line; source id mg3_0"/>
-          <p:cNvSpPr/>
-          <p:nvPr/>
-        </p:nvSpPr>
-        <p:spPr>
-          <a:xfrm>
-            <a:off x="9258538" y="1956701"/>
-            <a:ext cx="330889" cy="69996"/>
-          </a:xfrm>
-          <a:custGeom>
-            <a:avLst/>
-            <a:gdLst/>
-            <a:ahLst/>
-            <a:cxnLst/>
-            <a:rect l="l" t="t" r="r" b="b"/>
-            <a:pathLst>
-              <a:path w="52000" h="11000">
-                <a:moveTo>
-                  <a:pt x="0" y="4500"/>
-                </a:moveTo>
-                <a:lnTo>
-                  <a:pt x="39000" y="4500"/>
-                </a:lnTo>
-                <a:lnTo>
-                  <a:pt x="39000" y="0"/>
-                </a:lnTo>
-                <a:lnTo>
-                  <a:pt x="52000" y="5500"/>
-                </a:lnTo>
-                <a:lnTo>
-                  <a:pt x="39000" y="11000"/>
-                </a:lnTo>
-                <a:lnTo>
-                  <a:pt x="39000" y="6500"/>
-                </a:lnTo>
-                <a:lnTo>
-                  <a:pt x="0" y="6500"/>
-                </a:lnTo>
-                <a:close/>
-              </a:path>
-            </a:pathLst>
-          </a:custGeom>
-          <a:solidFill>
-            <a:srgbClr val="4B5563"/>
-          </a:solidFill>
-          <a:ln>
-            <a:noFill/>
-          </a:ln>
-          <a:effectLst/>
-        </p:spPr>
-        <p:style>
-          <a:lnRef idx="1">
-            <a:schemeClr val="accent1"/>
-          </a:lnRef>
-          <a:fillRef idx="3">
-            <a:schemeClr val="accent1"/>
-          </a:fillRef>
-          <a:effectRef idx="0">
-            <a:schemeClr val="accent1"/>
-          </a:effectRef>
-          <a:fontRef idx="minor">
-            <a:schemeClr val="lt1"/>
-          </a:fontRef>
-        </p:style>
-        <p:txBody>
-          <a:bodyPr rtlCol="0" anchor="ctr"/>
-          <a:lstStyle/>
-          <a:p>
-            <a:pPr algn="ctr"/>
-          </a:p>
-        </p:txBody>
-      </p:sp>
-      <p:sp>
-        <p:nvSpPr>
-          <p:cNvPr id="78" name="fb_p" descr="Editable shape; source id fb_p"/>
-          <p:cNvSpPr/>
-          <p:nvPr/>
-        </p:nvSpPr>
-        <p:spPr>
-          <a:xfrm>
-            <a:off x="5968734" y="3582513"/>
-            <a:ext cx="1145386" cy="279983"/>
-          </a:xfrm>
-          <a:prstGeom prst="roundRect">
-            <a:avLst>
-              <a:gd name="adj" fmla="val 50000"/>
-            </a:avLst>
-          </a:prstGeom>
-          <a:solidFill>
-            <a:srgbClr val="FFFFFF"/>
-          </a:solidFill>
-          <a:ln w="7635">
-            <a:solidFill>
-              <a:srgbClr val="C6CCD1"/>
-            </a:solidFill>
-          </a:ln>
-          <a:effectLst/>
-        </p:spPr>
-        <p:style>
-          <a:lnRef idx="1">
-            <a:schemeClr val="accent1"/>
-          </a:lnRef>
-          <a:fillRef idx="3">
-            <a:schemeClr val="accent1"/>
-          </a:fillRef>
-          <a:effectRef idx="0">
-            <a:schemeClr val="accent1"/>
-          </a:effectRef>
-          <a:fontRef idx="minor">
-            <a:schemeClr val="lt1"/>
-          </a:fontRef>
-        </p:style>
-        <p:txBody>
-          <a:bodyPr rtlCol="0" anchor="ctr"/>
-          <a:lstStyle/>
-          <a:p>
-            <a:pPr algn="ctr"/>
-          </a:p>
-        </p:txBody>
-      </p:sp>
-      <p:sp>
-        <p:nvSpPr>
-          <p:cNvPr id="79" name="fb_p_t" descr="Editable text; source id fb_p_t"/>
-          <p:cNvSpPr txBox="1"/>
-          <p:nvPr/>
-        </p:nvSpPr>
-        <p:spPr>
-          <a:xfrm>
-            <a:off x="6045093" y="3614329"/>
-            <a:ext cx="992668" cy="216350"/>
-          </a:xfrm>
-          <a:prstGeom prst="rect">
-            <a:avLst/>
-          </a:prstGeom>
-          <a:noFill/>
-          <a:effectLst/>
-        </p:spPr>
-        <p:txBody>
-          <a:bodyPr wrap="none" anchor="ctr" tIns="0" rIns="0" bIns="0" lIns="0" anchorCtr="0" vertOverflow="overflow">
-            <a:noAutofit/>
-          </a:bodyPr>
-          <a:lstStyle/>
-          <a:p>
-            <a:pPr algn="ctr" fontAlgn="base">
-              <a:lnSpc>
-                <a:spcPts val="1465"/>
-              </a:lnSpc>
-              <a:spcBef>
-                <a:spcPts val="0"/>
-              </a:spcBef>
-              <a:spcAft>
-                <a:spcPts val="0"/>
-              </a:spcAft>
-              <a:defRPr sz="1002" b="0" i="0" lang="zh-CN" dirty="0">
-                <a:solidFill>
-                  <a:srgbClr val="3F4854"/>
-                </a:solidFill>
-                <a:latin typeface="Noto Sans CJK SC"/>
-                <a:ea typeface="Noto Sans CJK SC"/>
-                <a:cs typeface="Noto Sans CJK SC"/>
-              </a:defRPr>
-            </a:pPr>
-            <a:r>
-              <a:rPr sz="1002" b="0" i="0" lang="zh-CN" dirty="0">
-                <a:solidFill>
-                  <a:srgbClr val="3F4854"/>
-                </a:solidFill>
-                <a:latin typeface="Noto Sans CJK SC"/>
-                <a:ea typeface="Noto Sans CJK SC"/>
-                <a:cs typeface="Noto Sans CJK SC"/>
-              </a:rPr>
-              <a:t>更新组成与工艺</a:t>
-            </a:r>
-          </a:p>
-        </p:txBody>
-      </p:sp>
-      <p:cxnSp>
-        <p:nvCxnSpPr>
-          <p:cNvPr id="80" name="fb_0" descr="Editable line; source id fb_0"/>
-          <p:cNvCxnSpPr/>
-          <p:nvPr/>
-        </p:nvCxnSpPr>
-        <p:spPr>
-          <a:xfrm>
-            <a:off x="10728450" y="3162538"/>
-            <a:ext cx="0" cy="559967"/>
-          </a:xfrm>
-          <a:prstGeom prst="line">
-            <a:avLst/>
-          </a:prstGeom>
-          <a:ln w="12726">
-            <a:solidFill>
-              <a:srgbClr val="4B5563"/>
-            </a:solidFill>
-            <a:custDash>
-              <a:ds d="600000" sp="400000"/>
-            </a:custDash>
-          </a:ln>
-          <a:effectLst/>
-        </p:spPr>
-        <p:style>
-          <a:lnRef idx="2">
-            <a:schemeClr val="accent1"/>
-          </a:lnRef>
-          <a:fillRef idx="0">
-            <a:schemeClr val="accent1"/>
-          </a:fillRef>
-          <a:effectRef idx="0">
-            <a:schemeClr val="accent1"/>
-          </a:effectRef>
-          <a:fontRef idx="minor">
-            <a:schemeClr val="tx1"/>
-          </a:fontRef>
-        </p:style>
-      </p:cxnSp>
-      <p:cxnSp>
-        <p:nvCxnSpPr>
-          <p:cNvPr id="81" name="fb_1" descr="Editable line; source id fb_1"/>
-          <p:cNvCxnSpPr/>
-          <p:nvPr/>
-        </p:nvCxnSpPr>
-        <p:spPr>
-          <a:xfrm flipH="1">
-            <a:off x="3130722" y="3722505"/>
-            <a:ext cx="2812559" cy="0"/>
-          </a:xfrm>
-          <a:prstGeom prst="line">
-            <a:avLst/>
-          </a:prstGeom>
-          <a:ln w="12726">
-            <a:solidFill>
-              <a:srgbClr val="4B5563"/>
-            </a:solidFill>
-            <a:custDash>
-              <a:ds d="600000" sp="400000"/>
-            </a:custDash>
-          </a:ln>
-          <a:effectLst/>
-        </p:spPr>
-        <p:style>
-          <a:lnRef idx="2">
-            <a:schemeClr val="accent1"/>
-          </a:lnRef>
-          <a:fillRef idx="0">
-            <a:schemeClr val="accent1"/>
-          </a:fillRef>
-          <a:effectRef idx="0">
-            <a:schemeClr val="accent1"/>
-          </a:effectRef>
-          <a:fontRef idx="minor">
-            <a:schemeClr val="tx1"/>
-          </a:fontRef>
-        </p:style>
-      </p:cxnSp>
-      <p:cxnSp>
-        <p:nvCxnSpPr>
-          <p:cNvPr id="82" name="fb_2" descr="Editable line; source id fb_2"/>
-          <p:cNvCxnSpPr/>
-          <p:nvPr/>
-        </p:nvCxnSpPr>
-        <p:spPr>
-          <a:xfrm flipH="1">
-            <a:off x="7139573" y="3722505"/>
-            <a:ext cx="3588877" cy="0"/>
-          </a:xfrm>
-          <a:prstGeom prst="line">
-            <a:avLst/>
-          </a:prstGeom>
-          <a:ln w="12726">
-            <a:solidFill>
-              <a:srgbClr val="4B5563"/>
-            </a:solidFill>
-            <a:custDash>
-              <a:ds d="600000" sp="400000"/>
-            </a:custDash>
-          </a:ln>
-          <a:effectLst/>
-        </p:spPr>
-        <p:style>
-          <a:lnRef idx="2">
-            <a:schemeClr val="accent1"/>
-          </a:lnRef>
-          <a:fillRef idx="0">
-            <a:schemeClr val="accent1"/>
-          </a:fillRef>
-          <a:effectRef idx="0">
-            <a:schemeClr val="accent1"/>
-          </a:effectRef>
-          <a:fontRef idx="minor">
-            <a:schemeClr val="tx1"/>
-          </a:fontRef>
-        </p:style>
-      </p:cxnSp>
-      <p:cxnSp>
-        <p:nvCxnSpPr>
-          <p:cNvPr id="83" name="fb_3" descr="Editable line; source id fb_3"/>
-          <p:cNvCxnSpPr/>
-          <p:nvPr/>
-        </p:nvCxnSpPr>
-        <p:spPr>
-          <a:xfrm flipV="1">
-            <a:off x="3130722" y="2882555"/>
-            <a:ext cx="0" cy="839950"/>
-          </a:xfrm>
-          <a:prstGeom prst="line">
-            <a:avLst/>
-          </a:prstGeom>
-          <a:ln w="12726">
-            <a:solidFill>
-              <a:srgbClr val="4B5563"/>
-            </a:solidFill>
-            <a:custDash>
-              <a:ds d="600000" sp="400000"/>
-            </a:custDash>
-            <a:tailEnd type="triangle"/>
-          </a:ln>
-          <a:effectLst/>
-        </p:spPr>
-        <p:style>
-          <a:lnRef idx="2">
-            <a:schemeClr val="accent1"/>
-          </a:lnRef>
-          <a:fillRef idx="0">
-            <a:schemeClr val="accent1"/>
-          </a:fillRef>
-          <a:effectRef idx="0">
-            <a:schemeClr val="accent1"/>
-          </a:effectRef>
-          <a:fontRef idx="minor">
-            <a:schemeClr val="tx1"/>
-          </a:fontRef>
-        </p:style>
-      </p:cxnSp>
     </p:spTree>
   </p:cSld>
   <p:clrMapOvr>

--- a/media/figstudio/fig03_roadmap/fig03_research_roadmap_editable.pptx
+++ b/media/figstudio/fig03_roadmap/fig03_research_roadmap_editable.pptx
@@ -502,7 +502,7 @@
           <a:lstStyle/>
           <a:p>
             <a:r>
-              <a:t>图 3 本文的研究路线（super_teaser 第四轮 R05 → super_img2ppt 重建；分叉只由前驱体驱动、反馈回结构假设）</a:t>
+              <a:t>图 3 本文的研究路线（第五轮 F02 嵌套容器 → super_img2ppt 重建；分叉同时进入两条通道）</a:t>
             </a:r>
           </a:p>
         </p:txBody>
@@ -3524,12 +3524,12 @@
         </p:nvSpPr>
         <p:spPr>
           <a:xfrm>
-            <a:off x="285749" y="476249"/>
-            <a:ext cx="6588124" cy="3492499"/>
+            <a:off x="206374" y="206374"/>
+            <a:ext cx="11779249" cy="2873374"/>
           </a:xfrm>
           <a:prstGeom prst="roundRect">
             <a:avLst>
-              <a:gd name="adj" fmla="val 3181"/>
+              <a:gd name="adj" fmla="val 3867"/>
             </a:avLst>
           </a:prstGeom>
           <a:solidFill>
@@ -3572,8 +3572,8 @@
         </p:nvSpPr>
         <p:spPr>
           <a:xfrm>
-            <a:off x="428624" y="555624"/>
-            <a:ext cx="904874" cy="293687"/>
+            <a:off x="349249" y="285749"/>
+            <a:ext cx="1063624" cy="357187"/>
           </a:xfrm>
           <a:prstGeom prst="rect">
             <a:avLst/>
@@ -3589,7 +3589,7 @@
           <a:p>
             <a:pPr algn="l" fontAlgn="base">
               <a:lnSpc>
-                <a:spcPts val="1921"/>
+                <a:spcPts val="2359"/>
               </a:lnSpc>
               <a:spcBef>
                 <a:spcPts val="0"/>
@@ -3597,7 +3597,7 @@
               <a:spcAft>
                 <a:spcPts val="0"/>
               </a:spcAft>
-              <a:defRPr sz="1312" b="1" i="0" lang="zh-CN" dirty="0">
+              <a:defRPr sz="1624" b="1" i="0" lang="zh-CN" dirty="0">
                 <a:solidFill>
                   <a:srgbClr val="2B3E57"/>
                 </a:solidFill>
@@ -3607,7 +3607,7 @@
               </a:defRPr>
             </a:pPr>
             <a:r>
-              <a:rPr sz="1312" b="1" i="0" lang="zh-CN" dirty="0">
+              <a:rPr sz="1624" b="1" i="0" lang="zh-CN" dirty="0">
                 <a:solidFill>
                   <a:srgbClr val="2B3E57"/>
                 </a:solidFill>
@@ -3628,12 +3628,12 @@
         </p:nvSpPr>
         <p:spPr>
           <a:xfrm>
-            <a:off x="7064374" y="476249"/>
-            <a:ext cx="2778124" cy="3492499"/>
+            <a:off x="206374" y="3317874"/>
+            <a:ext cx="11779249" cy="1841499"/>
           </a:xfrm>
           <a:prstGeom prst="roundRect">
             <a:avLst>
-              <a:gd name="adj" fmla="val 4000"/>
+              <a:gd name="adj" fmla="val 6034"/>
             </a:avLst>
           </a:prstGeom>
           <a:solidFill>
@@ -3676,8 +3676,8 @@
         </p:nvSpPr>
         <p:spPr>
           <a:xfrm>
-            <a:off x="7207249" y="555624"/>
-            <a:ext cx="904874" cy="293687"/>
+            <a:off x="349249" y="3397249"/>
+            <a:ext cx="1063624" cy="357187"/>
           </a:xfrm>
           <a:prstGeom prst="rect">
             <a:avLst/>
@@ -3693,7 +3693,7 @@
           <a:p>
             <a:pPr algn="l" fontAlgn="base">
               <a:lnSpc>
-                <a:spcPts val="1921"/>
+                <a:spcPts val="2359"/>
               </a:lnSpc>
               <a:spcBef>
                 <a:spcPts val="0"/>
@@ -3701,7 +3701,7 @@
               <a:spcAft>
                 <a:spcPts val="0"/>
               </a:spcAft>
-              <a:defRPr sz="1312" b="1" i="0" lang="zh-CN" dirty="0">
+              <a:defRPr sz="1624" b="1" i="0" lang="zh-CN" dirty="0">
                 <a:solidFill>
                   <a:srgbClr val="0F4F58"/>
                 </a:solidFill>
@@ -3711,7 +3711,7 @@
               </a:defRPr>
             </a:pPr>
             <a:r>
-              <a:rPr sz="1312" b="1" i="0" lang="zh-CN" dirty="0">
+              <a:rPr sz="1624" b="1" i="0" lang="zh-CN" dirty="0">
                 <a:solidFill>
                   <a:srgbClr val="0F4F58"/>
                 </a:solidFill>
@@ -3732,12 +3732,12 @@
         </p:nvSpPr>
         <p:spPr>
           <a:xfrm>
-            <a:off x="10032999" y="476249"/>
-            <a:ext cx="1952624" cy="3492499"/>
+            <a:off x="206374" y="5397499"/>
+            <a:ext cx="11779249" cy="1396999"/>
           </a:xfrm>
           <a:prstGeom prst="roundRect">
             <a:avLst>
-              <a:gd name="adj" fmla="val 5691"/>
+              <a:gd name="adj" fmla="val 7954"/>
             </a:avLst>
           </a:prstGeom>
           <a:solidFill>
@@ -3780,8 +3780,8 @@
         </p:nvSpPr>
         <p:spPr>
           <a:xfrm>
-            <a:off x="10175874" y="555624"/>
-            <a:ext cx="904874" cy="293687"/>
+            <a:off x="349249" y="5476874"/>
+            <a:ext cx="1063624" cy="357187"/>
           </a:xfrm>
           <a:prstGeom prst="rect">
             <a:avLst/>
@@ -3797,7 +3797,7 @@
           <a:p>
             <a:pPr algn="l" fontAlgn="base">
               <a:lnSpc>
-                <a:spcPts val="1921"/>
+                <a:spcPts val="2359"/>
               </a:lnSpc>
               <a:spcBef>
                 <a:spcPts val="0"/>
@@ -3805,7 +3805,7 @@
               <a:spcAft>
                 <a:spcPts val="0"/>
               </a:spcAft>
-              <a:defRPr sz="1312" b="1" i="0" lang="zh-CN" dirty="0">
+              <a:defRPr sz="1624" b="1" i="0" lang="zh-CN" dirty="0">
                 <a:solidFill>
                   <a:srgbClr val="2B3E57"/>
                 </a:solidFill>
@@ -3815,7 +3815,7 @@
               </a:defRPr>
             </a:pPr>
             <a:r>
-              <a:rPr sz="1312" b="1" i="0" lang="zh-CN" dirty="0">
+              <a:rPr sz="1624" b="1" i="0" lang="zh-CN" dirty="0">
                 <a:solidFill>
                   <a:srgbClr val="2B3E57"/>
                 </a:solidFill>
@@ -3836,12 +3836,12 @@
         </p:nvSpPr>
         <p:spPr>
           <a:xfrm>
-            <a:off x="206374" y="4762499"/>
-            <a:ext cx="11779249" cy="1587499"/>
+            <a:off x="206374" y="6984999"/>
+            <a:ext cx="11779249" cy="1079499"/>
           </a:xfrm>
           <a:prstGeom prst="roundRect">
             <a:avLst>
-              <a:gd name="adj" fmla="val 7000"/>
+              <a:gd name="adj" fmla="val 10294"/>
             </a:avLst>
           </a:prstGeom>
           <a:solidFill>
@@ -3884,8 +3884,8 @@
         </p:nvSpPr>
         <p:spPr>
           <a:xfrm>
-            <a:off x="349249" y="4841874"/>
-            <a:ext cx="904874" cy="293687"/>
+            <a:off x="349249" y="7064374"/>
+            <a:ext cx="1063624" cy="357187"/>
           </a:xfrm>
           <a:prstGeom prst="rect">
             <a:avLst/>
@@ -3901,7 +3901,7 @@
           <a:p>
             <a:pPr algn="l" fontAlgn="base">
               <a:lnSpc>
-                <a:spcPts val="1921"/>
+                <a:spcPts val="2359"/>
               </a:lnSpc>
               <a:spcBef>
                 <a:spcPts val="0"/>
@@ -3909,7 +3909,7 @@
               <a:spcAft>
                 <a:spcPts val="0"/>
               </a:spcAft>
-              <a:defRPr sz="1312" b="1" i="0" lang="zh-CN" dirty="0">
+              <a:defRPr sz="1624" b="1" i="0" lang="zh-CN" dirty="0">
                 <a:solidFill>
                   <a:srgbClr val="7A5410"/>
                 </a:solidFill>
@@ -3919,7 +3919,7 @@
               </a:defRPr>
             </a:pPr>
             <a:r>
-              <a:rPr sz="1312" b="1" i="0" lang="zh-CN" dirty="0">
+              <a:rPr sz="1624" b="1" i="0" lang="zh-CN" dirty="0">
                 <a:solidFill>
                   <a:srgbClr val="7A5410"/>
                 </a:solidFill>
@@ -3934,14 +3934,2152 @@
       </p:sp>
       <p:sp>
         <p:nvSpPr>
-          <p:cNvPr id="10" name="cav" descr="Editable shape; source id cav"/>
+          <p:cNvPr id="10" name="c1" descr="Editable shape; source id c1"/>
           <p:cNvSpPr/>
           <p:nvPr/>
         </p:nvSpPr>
         <p:spPr>
           <a:xfrm>
-            <a:off x="4929187" y="539749"/>
-            <a:ext cx="1254124" cy="293687"/>
+            <a:off x="476249" y="730249"/>
+            <a:ext cx="3571874" cy="2079624"/>
+          </a:xfrm>
+          <a:prstGeom prst="roundRect">
+            <a:avLst>
+              <a:gd name="adj" fmla="val 3435"/>
+            </a:avLst>
+          </a:prstGeom>
+          <a:solidFill>
+            <a:srgbClr val="FFFFFF"/>
+          </a:solidFill>
+          <a:ln w="11112">
+            <a:solidFill>
+              <a:srgbClr val="5B7592"/>
+            </a:solidFill>
+          </a:ln>
+          <a:effectLst/>
+        </p:spPr>
+        <p:style>
+          <a:lnRef idx="1">
+            <a:schemeClr val="accent1"/>
+          </a:lnRef>
+          <a:fillRef idx="3">
+            <a:schemeClr val="accent1"/>
+          </a:fillRef>
+          <a:effectRef idx="0">
+            <a:schemeClr val="accent1"/>
+          </a:effectRef>
+          <a:fontRef idx="minor">
+            <a:schemeClr val="lt1"/>
+          </a:fontRef>
+        </p:style>
+        <p:txBody>
+          <a:bodyPr rtlCol="0" anchor="ctr"/>
+          <a:lstStyle/>
+          <a:p>
+            <a:pPr algn="ctr"/>
+          </a:p>
+        </p:txBody>
+      </p:sp>
+      <p:sp>
+        <p:nvSpPr>
+          <p:cNvPr id="11" name="c1_b" descr="Editable shape; source id c1_b"/>
+          <p:cNvSpPr/>
+          <p:nvPr/>
+        </p:nvSpPr>
+        <p:spPr>
+          <a:xfrm>
+            <a:off x="476249" y="730249"/>
+            <a:ext cx="63499" cy="2079624"/>
+          </a:xfrm>
+          <a:prstGeom prst="roundRect">
+            <a:avLst>
+              <a:gd name="adj" fmla="val 37500"/>
+            </a:avLst>
+          </a:prstGeom>
+          <a:solidFill>
+            <a:srgbClr val="5B7592"/>
+          </a:solidFill>
+          <a:ln>
+            <a:noFill/>
+          </a:ln>
+          <a:effectLst/>
+        </p:spPr>
+        <p:style>
+          <a:lnRef idx="1">
+            <a:schemeClr val="accent1"/>
+          </a:lnRef>
+          <a:fillRef idx="3">
+            <a:schemeClr val="accent1"/>
+          </a:fillRef>
+          <a:effectRef idx="0">
+            <a:schemeClr val="accent1"/>
+          </a:effectRef>
+          <a:fontRef idx="minor">
+            <a:schemeClr val="lt1"/>
+          </a:fontRef>
+        </p:style>
+        <p:txBody>
+          <a:bodyPr rtlCol="0" anchor="ctr"/>
+          <a:lstStyle/>
+          <a:p>
+            <a:pPr algn="ctr"/>
+          </a:p>
+        </p:txBody>
+      </p:sp>
+      <p:sp>
+        <p:nvSpPr>
+          <p:cNvPr id="12" name="c1_g_s2" descr="Editable shape; source id c1_g_s2"/>
+          <p:cNvSpPr/>
+          <p:nvPr/>
+        </p:nvSpPr>
+        <p:spPr>
+          <a:xfrm>
+            <a:off x="785812" y="968374"/>
+            <a:ext cx="158749" cy="238124"/>
+          </a:xfrm>
+          <a:prstGeom prst="rect">
+            <a:avLst/>
+          </a:prstGeom>
+          <a:noFill/>
+          <a:ln w="7937">
+            <a:solidFill>
+              <a:srgbClr val="1F2937"/>
+            </a:solidFill>
+          </a:ln>
+          <a:effectLst/>
+        </p:spPr>
+        <p:style>
+          <a:lnRef idx="1">
+            <a:schemeClr val="accent1"/>
+          </a:lnRef>
+          <a:fillRef idx="3">
+            <a:schemeClr val="accent1"/>
+          </a:fillRef>
+          <a:effectRef idx="0">
+            <a:schemeClr val="accent1"/>
+          </a:effectRef>
+          <a:fontRef idx="minor">
+            <a:schemeClr val="lt1"/>
+          </a:fontRef>
+        </p:style>
+        <p:txBody>
+          <a:bodyPr rtlCol="0" anchor="ctr"/>
+          <a:lstStyle/>
+          <a:p>
+            <a:pPr algn="ctr"/>
+          </a:p>
+        </p:txBody>
+      </p:sp>
+      <p:sp>
+        <p:nvSpPr>
+          <p:cNvPr id="13" name="c1_g_s1" descr="Editable shape; source id c1_g_s1"/>
+          <p:cNvSpPr/>
+          <p:nvPr/>
+        </p:nvSpPr>
+        <p:spPr>
+          <a:xfrm>
+            <a:off x="754062" y="936624"/>
+            <a:ext cx="158749" cy="238124"/>
+          </a:xfrm>
+          <a:prstGeom prst="rect">
+            <a:avLst/>
+          </a:prstGeom>
+          <a:noFill/>
+          <a:ln w="7937">
+            <a:solidFill>
+              <a:srgbClr val="1F2937"/>
+            </a:solidFill>
+          </a:ln>
+          <a:effectLst/>
+        </p:spPr>
+        <p:style>
+          <a:lnRef idx="1">
+            <a:schemeClr val="accent1"/>
+          </a:lnRef>
+          <a:fillRef idx="3">
+            <a:schemeClr val="accent1"/>
+          </a:fillRef>
+          <a:effectRef idx="0">
+            <a:schemeClr val="accent1"/>
+          </a:effectRef>
+          <a:fontRef idx="minor">
+            <a:schemeClr val="lt1"/>
+          </a:fontRef>
+        </p:style>
+        <p:txBody>
+          <a:bodyPr rtlCol="0" anchor="ctr"/>
+          <a:lstStyle/>
+          <a:p>
+            <a:pPr algn="ctr"/>
+          </a:p>
+        </p:txBody>
+      </p:sp>
+      <p:sp>
+        <p:nvSpPr>
+          <p:cNvPr id="14" name="c1_g_s0" descr="Editable shape; source id c1_g_s0"/>
+          <p:cNvSpPr/>
+          <p:nvPr/>
+        </p:nvSpPr>
+        <p:spPr>
+          <a:xfrm>
+            <a:off x="730249" y="904874"/>
+            <a:ext cx="158749" cy="238124"/>
+          </a:xfrm>
+          <a:prstGeom prst="rect">
+            <a:avLst/>
+          </a:prstGeom>
+          <a:noFill/>
+          <a:ln w="7937">
+            <a:solidFill>
+              <a:srgbClr val="1F2937"/>
+            </a:solidFill>
+          </a:ln>
+          <a:effectLst/>
+        </p:spPr>
+        <p:style>
+          <a:lnRef idx="1">
+            <a:schemeClr val="accent1"/>
+          </a:lnRef>
+          <a:fillRef idx="3">
+            <a:schemeClr val="accent1"/>
+          </a:fillRef>
+          <a:effectRef idx="0">
+            <a:schemeClr val="accent1"/>
+          </a:effectRef>
+          <a:fontRef idx="minor">
+            <a:schemeClr val="lt1"/>
+          </a:fontRef>
+        </p:style>
+        <p:txBody>
+          <a:bodyPr rtlCol="0" anchor="ctr"/>
+          <a:lstStyle/>
+          <a:p>
+            <a:pPr algn="ctr"/>
+          </a:p>
+        </p:txBody>
+      </p:sp>
+      <p:cxnSp>
+        <p:nvCxnSpPr>
+          <p:cNvPr id="15" name="c1_g_l1" descr="Editable line; source id c1_g_l1"/>
+          <p:cNvCxnSpPr/>
+          <p:nvPr/>
+        </p:nvCxnSpPr>
+        <p:spPr>
+          <a:xfrm>
+            <a:off x="769937" y="992187"/>
+            <a:ext cx="103187" cy="0"/>
+          </a:xfrm>
+          <a:prstGeom prst="line">
+            <a:avLst/>
+          </a:prstGeom>
+          <a:ln w="7937">
+            <a:solidFill>
+              <a:srgbClr val="1F2937"/>
+            </a:solidFill>
+          </a:ln>
+          <a:effectLst/>
+        </p:spPr>
+        <p:style>
+          <a:lnRef idx="2">
+            <a:schemeClr val="accent1"/>
+          </a:lnRef>
+          <a:fillRef idx="0">
+            <a:schemeClr val="accent1"/>
+          </a:fillRef>
+          <a:effectRef idx="0">
+            <a:schemeClr val="accent1"/>
+          </a:effectRef>
+          <a:fontRef idx="minor">
+            <a:schemeClr val="tx1"/>
+          </a:fontRef>
+        </p:style>
+      </p:cxnSp>
+      <p:cxnSp>
+        <p:nvCxnSpPr>
+          <p:cNvPr id="16" name="c1_g_l2" descr="Editable line; source id c1_g_l2"/>
+          <p:cNvCxnSpPr/>
+          <p:nvPr/>
+        </p:nvCxnSpPr>
+        <p:spPr>
+          <a:xfrm>
+            <a:off x="769937" y="1039812"/>
+            <a:ext cx="103187" cy="0"/>
+          </a:xfrm>
+          <a:prstGeom prst="line">
+            <a:avLst/>
+          </a:prstGeom>
+          <a:ln w="7937">
+            <a:solidFill>
+              <a:srgbClr val="1F2937"/>
+            </a:solidFill>
+          </a:ln>
+          <a:effectLst/>
+        </p:spPr>
+        <p:style>
+          <a:lnRef idx="2">
+            <a:schemeClr val="accent1"/>
+          </a:lnRef>
+          <a:fillRef idx="0">
+            <a:schemeClr val="accent1"/>
+          </a:fillRef>
+          <a:effectRef idx="0">
+            <a:schemeClr val="accent1"/>
+          </a:effectRef>
+          <a:fontRef idx="minor">
+            <a:schemeClr val="tx1"/>
+          </a:fontRef>
+        </p:style>
+      </p:cxnSp>
+      <p:cxnSp>
+        <p:nvCxnSpPr>
+          <p:cNvPr id="17" name="c1_g_l3" descr="Editable line; source id c1_g_l3"/>
+          <p:cNvCxnSpPr/>
+          <p:nvPr/>
+        </p:nvCxnSpPr>
+        <p:spPr>
+          <a:xfrm>
+            <a:off x="769937" y="1087437"/>
+            <a:ext cx="71437" cy="0"/>
+          </a:xfrm>
+          <a:prstGeom prst="line">
+            <a:avLst/>
+          </a:prstGeom>
+          <a:ln w="7937">
+            <a:solidFill>
+              <a:srgbClr val="1F2937"/>
+            </a:solidFill>
+          </a:ln>
+          <a:effectLst/>
+        </p:spPr>
+        <p:style>
+          <a:lnRef idx="2">
+            <a:schemeClr val="accent1"/>
+          </a:lnRef>
+          <a:fillRef idx="0">
+            <a:schemeClr val="accent1"/>
+          </a:fillRef>
+          <a:effectRef idx="0">
+            <a:schemeClr val="accent1"/>
+          </a:effectRef>
+          <a:fontRef idx="minor">
+            <a:schemeClr val="tx1"/>
+          </a:fontRef>
+        </p:style>
+      </p:cxnSp>
+      <p:sp>
+        <p:nvSpPr>
+          <p:cNvPr id="18" name="c1_t" descr="Editable text; source id c1_t"/>
+          <p:cNvSpPr txBox="1"/>
+          <p:nvPr/>
+        </p:nvSpPr>
+        <p:spPr>
+          <a:xfrm>
+            <a:off x="1095374" y="857249"/>
+            <a:ext cx="2825749" cy="341312"/>
+          </a:xfrm>
+          <a:prstGeom prst="rect">
+            <a:avLst/>
+          </a:prstGeom>
+          <a:noFill/>
+          <a:effectLst/>
+        </p:spPr>
+        <p:txBody>
+          <a:bodyPr wrap="none" anchor="ctr" tIns="0" rIns="0" bIns="0" lIns="0" anchorCtr="0" vertOverflow="overflow">
+            <a:noAutofit/>
+          </a:bodyPr>
+          <a:lstStyle/>
+          <a:p>
+            <a:pPr algn="l" fontAlgn="base">
+              <a:lnSpc>
+                <a:spcPts val="2265"/>
+              </a:lnSpc>
+              <a:spcBef>
+                <a:spcPts val="0"/>
+              </a:spcBef>
+              <a:spcAft>
+                <a:spcPts val="0"/>
+              </a:spcAft>
+              <a:defRPr sz="1562" b="1" i="0" lang="zh-CN" dirty="0">
+                <a:solidFill>
+                  <a:srgbClr val="2B3E57"/>
+                </a:solidFill>
+                <a:latin typeface="Noto Sans CJK SC"/>
+                <a:ea typeface="Noto Sans CJK SC"/>
+                <a:cs typeface="Noto Sans CJK SC"/>
+              </a:defRPr>
+            </a:pPr>
+            <a:r>
+              <a:rPr sz="1562" b="1" i="0" lang="zh-CN" dirty="0">
+                <a:solidFill>
+                  <a:srgbClr val="2B3E57"/>
+                </a:solidFill>
+                <a:latin typeface="Noto Sans CJK SC"/>
+                <a:ea typeface="Noto Sans CJK SC"/>
+                <a:cs typeface="Noto Sans CJK SC"/>
+              </a:rPr>
+              <a:t>文献依据</a:t>
+            </a:r>
+          </a:p>
+        </p:txBody>
+      </p:sp>
+      <p:sp>
+        <p:nvSpPr>
+          <p:cNvPr id="19" name="c1_i0" descr="Editable shape; source id c1_i0"/>
+          <p:cNvSpPr/>
+          <p:nvPr/>
+        </p:nvSpPr>
+        <p:spPr>
+          <a:xfrm>
+            <a:off x="666749" y="1269999"/>
+            <a:ext cx="3254374" cy="420687"/>
+          </a:xfrm>
+          <a:prstGeom prst="roundRect">
+            <a:avLst>
+              <a:gd name="adj" fmla="val 11320"/>
+            </a:avLst>
+          </a:prstGeom>
+          <a:solidFill>
+            <a:srgbClr val="F7F9FB"/>
+          </a:solidFill>
+          <a:ln w="9524">
+            <a:solidFill>
+              <a:srgbClr val="CBD3DA"/>
+            </a:solidFill>
+          </a:ln>
+          <a:effectLst/>
+        </p:spPr>
+        <p:style>
+          <a:lnRef idx="1">
+            <a:schemeClr val="accent1"/>
+          </a:lnRef>
+          <a:fillRef idx="3">
+            <a:schemeClr val="accent1"/>
+          </a:fillRef>
+          <a:effectRef idx="0">
+            <a:schemeClr val="accent1"/>
+          </a:effectRef>
+          <a:fontRef idx="minor">
+            <a:schemeClr val="lt1"/>
+          </a:fontRef>
+        </p:style>
+        <p:txBody>
+          <a:bodyPr rtlCol="0" anchor="ctr"/>
+          <a:lstStyle/>
+          <a:p>
+            <a:pPr algn="ctr"/>
+          </a:p>
+        </p:txBody>
+      </p:sp>
+      <p:sp>
+        <p:nvSpPr>
+          <p:cNvPr id="20" name="c1_i0_t" descr="Editable text; source id c1_i0_t"/>
+          <p:cNvSpPr txBox="1"/>
+          <p:nvPr/>
+        </p:nvSpPr>
+        <p:spPr>
+          <a:xfrm>
+            <a:off x="722312" y="1301749"/>
+            <a:ext cx="3143249" cy="357187"/>
+          </a:xfrm>
+          <a:prstGeom prst="rect">
+            <a:avLst/>
+          </a:prstGeom>
+          <a:noFill/>
+          <a:effectLst/>
+        </p:spPr>
+        <p:txBody>
+          <a:bodyPr wrap="none" anchor="ctr" tIns="0" rIns="0" bIns="0" lIns="0" anchorCtr="0" vertOverflow="overflow">
+            <a:noAutofit/>
+          </a:bodyPr>
+          <a:lstStyle/>
+          <a:p>
+            <a:pPr algn="ctr" fontAlgn="base">
+              <a:lnSpc>
+                <a:spcPts val="1734"/>
+              </a:lnSpc>
+              <a:spcBef>
+                <a:spcPts val="0"/>
+              </a:spcBef>
+              <a:spcAft>
+                <a:spcPts val="0"/>
+              </a:spcAft>
+              <a:defRPr sz="1187" b="0" i="0" lang="zh-CN" dirty="0">
+                <a:solidFill>
+                  <a:srgbClr val="3F4854"/>
+                </a:solidFill>
+                <a:latin typeface="DejaVu Sans"/>
+                <a:ea typeface="DejaVu Sans"/>
+                <a:cs typeface="DejaVu Sans"/>
+              </a:defRPr>
+            </a:pPr>
+            <a:r>
+              <a:rPr sz="1187" b="0" i="0" lang="zh-CN" dirty="0">
+                <a:solidFill>
+                  <a:srgbClr val="3F4854"/>
+                </a:solidFill>
+                <a:latin typeface="DejaVu Sans"/>
+                <a:ea typeface="DejaVu Sans"/>
+                <a:cs typeface="DejaVu Sans"/>
+              </a:rPr>
+              <a:t>Ba–Y–Si–O </a:t>
+            </a:r>
+            <a:r>
+              <a:rPr sz="1187" b="0" i="0" lang="zh-CN" dirty="0">
+                <a:solidFill>
+                  <a:srgbClr val="3F4854"/>
+                </a:solidFill>
+                <a:latin typeface="Noto Sans CJK SC"/>
+                <a:ea typeface="Noto Sans CJK SC"/>
+                <a:cs typeface="Noto Sans CJK SC"/>
+              </a:rPr>
+              <a:t>谱系</a:t>
+            </a:r>
+          </a:p>
+        </p:txBody>
+      </p:sp>
+      <p:sp>
+        <p:nvSpPr>
+          <p:cNvPr id="21" name="c1_i1" descr="Editable shape; source id c1_i1"/>
+          <p:cNvSpPr/>
+          <p:nvPr/>
+        </p:nvSpPr>
+        <p:spPr>
+          <a:xfrm>
+            <a:off x="666749" y="1762124"/>
+            <a:ext cx="3254374" cy="420687"/>
+          </a:xfrm>
+          <a:prstGeom prst="roundRect">
+            <a:avLst>
+              <a:gd name="adj" fmla="val 11320"/>
+            </a:avLst>
+          </a:prstGeom>
+          <a:solidFill>
+            <a:srgbClr val="F7F9FB"/>
+          </a:solidFill>
+          <a:ln w="9524">
+            <a:solidFill>
+              <a:srgbClr val="CBD3DA"/>
+            </a:solidFill>
+          </a:ln>
+          <a:effectLst/>
+        </p:spPr>
+        <p:style>
+          <a:lnRef idx="1">
+            <a:schemeClr val="accent1"/>
+          </a:lnRef>
+          <a:fillRef idx="3">
+            <a:schemeClr val="accent1"/>
+          </a:fillRef>
+          <a:effectRef idx="0">
+            <a:schemeClr val="accent1"/>
+          </a:effectRef>
+          <a:fontRef idx="minor">
+            <a:schemeClr val="lt1"/>
+          </a:fontRef>
+        </p:style>
+        <p:txBody>
+          <a:bodyPr rtlCol="0" anchor="ctr"/>
+          <a:lstStyle/>
+          <a:p>
+            <a:pPr algn="ctr"/>
+          </a:p>
+        </p:txBody>
+      </p:sp>
+      <p:sp>
+        <p:nvSpPr>
+          <p:cNvPr id="22" name="c1_i1_t" descr="Editable text; source id c1_i1_t"/>
+          <p:cNvSpPr txBox="1"/>
+          <p:nvPr/>
+        </p:nvSpPr>
+        <p:spPr>
+          <a:xfrm>
+            <a:off x="722312" y="1793874"/>
+            <a:ext cx="3143249" cy="357187"/>
+          </a:xfrm>
+          <a:prstGeom prst="rect">
+            <a:avLst/>
+          </a:prstGeom>
+          <a:noFill/>
+          <a:effectLst/>
+        </p:spPr>
+        <p:txBody>
+          <a:bodyPr wrap="none" anchor="ctr" tIns="0" rIns="0" bIns="0" lIns="0" anchorCtr="0" vertOverflow="overflow">
+            <a:noAutofit/>
+          </a:bodyPr>
+          <a:lstStyle/>
+          <a:p>
+            <a:pPr algn="ctr" fontAlgn="base">
+              <a:lnSpc>
+                <a:spcPts val="1734"/>
+              </a:lnSpc>
+              <a:spcBef>
+                <a:spcPts val="0"/>
+              </a:spcBef>
+              <a:spcAft>
+                <a:spcPts val="0"/>
+              </a:spcAft>
+              <a:defRPr sz="1187" b="0" i="0" lang="zh-CN" dirty="0">
+                <a:solidFill>
+                  <a:srgbClr val="3F4854"/>
+                </a:solidFill>
+                <a:latin typeface="DejaVu Sans"/>
+                <a:ea typeface="DejaVu Sans"/>
+                <a:cs typeface="DejaVu Sans"/>
+              </a:defRPr>
+            </a:pPr>
+            <a:r>
+              <a:rPr sz="1187" b="0" i="0" lang="zh-CN" dirty="0">
+                <a:solidFill>
+                  <a:srgbClr val="3F4854"/>
+                </a:solidFill>
+                <a:latin typeface="DejaVu Sans"/>
+                <a:ea typeface="DejaVu Sans"/>
+                <a:cs typeface="DejaVu Sans"/>
+              </a:rPr>
+              <a:t>Ba–Zn–Si–O </a:t>
+            </a:r>
+            <a:r>
+              <a:rPr sz="1187" b="0" i="0" lang="zh-CN" dirty="0">
+                <a:solidFill>
+                  <a:srgbClr val="3F4854"/>
+                </a:solidFill>
+                <a:latin typeface="Noto Sans CJK SC"/>
+                <a:ea typeface="Noto Sans CJK SC"/>
+                <a:cs typeface="Noto Sans CJK SC"/>
+              </a:rPr>
+              <a:t>结构近邻</a:t>
+            </a:r>
+          </a:p>
+        </p:txBody>
+      </p:sp>
+      <p:sp>
+        <p:nvSpPr>
+          <p:cNvPr id="23" name="c1_i2" descr="Editable shape; source id c1_i2"/>
+          <p:cNvSpPr/>
+          <p:nvPr/>
+        </p:nvSpPr>
+        <p:spPr>
+          <a:xfrm>
+            <a:off x="666749" y="2262187"/>
+            <a:ext cx="3254374" cy="420687"/>
+          </a:xfrm>
+          <a:prstGeom prst="roundRect">
+            <a:avLst>
+              <a:gd name="adj" fmla="val 11320"/>
+            </a:avLst>
+          </a:prstGeom>
+          <a:solidFill>
+            <a:srgbClr val="F7F9FB"/>
+          </a:solidFill>
+          <a:ln w="9524">
+            <a:solidFill>
+              <a:srgbClr val="CBD3DA"/>
+            </a:solidFill>
+          </a:ln>
+          <a:effectLst/>
+        </p:spPr>
+        <p:style>
+          <a:lnRef idx="1">
+            <a:schemeClr val="accent1"/>
+          </a:lnRef>
+          <a:fillRef idx="3">
+            <a:schemeClr val="accent1"/>
+          </a:fillRef>
+          <a:effectRef idx="0">
+            <a:schemeClr val="accent1"/>
+          </a:effectRef>
+          <a:fontRef idx="minor">
+            <a:schemeClr val="lt1"/>
+          </a:fontRef>
+        </p:style>
+        <p:txBody>
+          <a:bodyPr rtlCol="0" anchor="ctr"/>
+          <a:lstStyle/>
+          <a:p>
+            <a:pPr algn="ctr"/>
+          </a:p>
+        </p:txBody>
+      </p:sp>
+      <p:sp>
+        <p:nvSpPr>
+          <p:cNvPr id="24" name="c1_i2_t" descr="Editable text; source id c1_i2_t"/>
+          <p:cNvSpPr txBox="1"/>
+          <p:nvPr/>
+        </p:nvSpPr>
+        <p:spPr>
+          <a:xfrm>
+            <a:off x="722312" y="2293937"/>
+            <a:ext cx="3143249" cy="357187"/>
+          </a:xfrm>
+          <a:prstGeom prst="rect">
+            <a:avLst/>
+          </a:prstGeom>
+          <a:noFill/>
+          <a:effectLst/>
+        </p:spPr>
+        <p:txBody>
+          <a:bodyPr wrap="none" anchor="ctr" tIns="0" rIns="0" bIns="0" lIns="0" anchorCtr="0" vertOverflow="overflow">
+            <a:noAutofit/>
+          </a:bodyPr>
+          <a:lstStyle/>
+          <a:p>
+            <a:pPr algn="ctr" fontAlgn="base">
+              <a:lnSpc>
+                <a:spcPts val="1734"/>
+              </a:lnSpc>
+              <a:spcBef>
+                <a:spcPts val="0"/>
+              </a:spcBef>
+              <a:spcAft>
+                <a:spcPts val="0"/>
+              </a:spcAft>
+              <a:defRPr sz="1187" b="0" i="0" lang="zh-CN" dirty="0">
+                <a:solidFill>
+                  <a:srgbClr val="3F4854"/>
+                </a:solidFill>
+                <a:latin typeface="DejaVu Sans"/>
+                <a:ea typeface="DejaVu Sans"/>
+                <a:cs typeface="DejaVu Sans"/>
+              </a:defRPr>
+            </a:pPr>
+            <a:r>
+              <a:rPr sz="1187" b="0" i="0" lang="zh-CN" dirty="0">
+                <a:solidFill>
+                  <a:srgbClr val="3F4854"/>
+                </a:solidFill>
+                <a:latin typeface="DejaVu Sans"/>
+                <a:ea typeface="DejaVu Sans"/>
+                <a:cs typeface="DejaVu Sans"/>
+              </a:rPr>
+              <a:t>Y–Si–O </a:t>
+            </a:r>
+            <a:r>
+              <a:rPr sz="1187" b="0" i="0" lang="zh-CN" dirty="0">
+                <a:solidFill>
+                  <a:srgbClr val="3F4854"/>
+                </a:solidFill>
+                <a:latin typeface="Noto Sans CJK SC"/>
+                <a:ea typeface="Noto Sans CJK SC"/>
+                <a:cs typeface="Noto Sans CJK SC"/>
+              </a:rPr>
+              <a:t>工艺参照</a:t>
+            </a:r>
+          </a:p>
+        </p:txBody>
+      </p:sp>
+      <p:sp>
+        <p:nvSpPr>
+          <p:cNvPr id="25" name="c2" descr="Editable shape; source id c2"/>
+          <p:cNvSpPr/>
+          <p:nvPr/>
+        </p:nvSpPr>
+        <p:spPr>
+          <a:xfrm>
+            <a:off x="4444999" y="730249"/>
+            <a:ext cx="3571874" cy="2079624"/>
+          </a:xfrm>
+          <a:prstGeom prst="roundRect">
+            <a:avLst>
+              <a:gd name="adj" fmla="val 3435"/>
+            </a:avLst>
+          </a:prstGeom>
+          <a:solidFill>
+            <a:srgbClr val="FFFFFF"/>
+          </a:solidFill>
+          <a:ln w="11112">
+            <a:solidFill>
+              <a:srgbClr val="5B7592"/>
+            </a:solidFill>
+          </a:ln>
+          <a:effectLst/>
+        </p:spPr>
+        <p:style>
+          <a:lnRef idx="1">
+            <a:schemeClr val="accent1"/>
+          </a:lnRef>
+          <a:fillRef idx="3">
+            <a:schemeClr val="accent1"/>
+          </a:fillRef>
+          <a:effectRef idx="0">
+            <a:schemeClr val="accent1"/>
+          </a:effectRef>
+          <a:fontRef idx="minor">
+            <a:schemeClr val="lt1"/>
+          </a:fontRef>
+        </p:style>
+        <p:txBody>
+          <a:bodyPr rtlCol="0" anchor="ctr"/>
+          <a:lstStyle/>
+          <a:p>
+            <a:pPr algn="ctr"/>
+          </a:p>
+        </p:txBody>
+      </p:sp>
+      <p:sp>
+        <p:nvSpPr>
+          <p:cNvPr id="26" name="c2_b" descr="Editable shape; source id c2_b"/>
+          <p:cNvSpPr/>
+          <p:nvPr/>
+        </p:nvSpPr>
+        <p:spPr>
+          <a:xfrm>
+            <a:off x="4444999" y="730249"/>
+            <a:ext cx="63499" cy="2079624"/>
+          </a:xfrm>
+          <a:prstGeom prst="roundRect">
+            <a:avLst>
+              <a:gd name="adj" fmla="val 37500"/>
+            </a:avLst>
+          </a:prstGeom>
+          <a:solidFill>
+            <a:srgbClr val="5B7592"/>
+          </a:solidFill>
+          <a:ln>
+            <a:noFill/>
+          </a:ln>
+          <a:effectLst/>
+        </p:spPr>
+        <p:style>
+          <a:lnRef idx="1">
+            <a:schemeClr val="accent1"/>
+          </a:lnRef>
+          <a:fillRef idx="3">
+            <a:schemeClr val="accent1"/>
+          </a:fillRef>
+          <a:effectRef idx="0">
+            <a:schemeClr val="accent1"/>
+          </a:effectRef>
+          <a:fontRef idx="minor">
+            <a:schemeClr val="lt1"/>
+          </a:fontRef>
+        </p:style>
+        <p:txBody>
+          <a:bodyPr rtlCol="0" anchor="ctr"/>
+          <a:lstStyle/>
+          <a:p>
+            <a:pPr algn="ctr"/>
+          </a:p>
+        </p:txBody>
+      </p:sp>
+      <p:cxnSp>
+        <p:nvCxnSpPr>
+          <p:cNvPr id="27" name="c2_g_o_0" descr="Editable line; source id c2_g_o_0"/>
+          <p:cNvCxnSpPr/>
+          <p:nvPr/>
+        </p:nvCxnSpPr>
+        <p:spPr>
+          <a:xfrm>
+            <a:off x="4802187" y="888999"/>
+            <a:ext cx="134937" cy="87313"/>
+          </a:xfrm>
+          <a:prstGeom prst="line">
+            <a:avLst/>
+          </a:prstGeom>
+          <a:ln w="7937">
+            <a:solidFill>
+              <a:srgbClr val="1F2937"/>
+            </a:solidFill>
+          </a:ln>
+          <a:effectLst/>
+        </p:spPr>
+        <p:style>
+          <a:lnRef idx="2">
+            <a:schemeClr val="accent1"/>
+          </a:lnRef>
+          <a:fillRef idx="0">
+            <a:schemeClr val="accent1"/>
+          </a:fillRef>
+          <a:effectRef idx="0">
+            <a:schemeClr val="accent1"/>
+          </a:effectRef>
+          <a:fontRef idx="minor">
+            <a:schemeClr val="tx1"/>
+          </a:fontRef>
+        </p:style>
+      </p:cxnSp>
+      <p:cxnSp>
+        <p:nvCxnSpPr>
+          <p:cNvPr id="28" name="c2_g_o_1" descr="Editable line; source id c2_g_o_1"/>
+          <p:cNvCxnSpPr/>
+          <p:nvPr/>
+        </p:nvCxnSpPr>
+        <p:spPr>
+          <a:xfrm flipH="1">
+            <a:off x="4873624" y="976312"/>
+            <a:ext cx="63500" cy="174625"/>
+          </a:xfrm>
+          <a:prstGeom prst="line">
+            <a:avLst/>
+          </a:prstGeom>
+          <a:ln w="7937">
+            <a:solidFill>
+              <a:srgbClr val="1F2937"/>
+            </a:solidFill>
+          </a:ln>
+          <a:effectLst/>
+        </p:spPr>
+        <p:style>
+          <a:lnRef idx="2">
+            <a:schemeClr val="accent1"/>
+          </a:lnRef>
+          <a:fillRef idx="0">
+            <a:schemeClr val="accent1"/>
+          </a:fillRef>
+          <a:effectRef idx="0">
+            <a:schemeClr val="accent1"/>
+          </a:effectRef>
+          <a:fontRef idx="minor">
+            <a:schemeClr val="tx1"/>
+          </a:fontRef>
+        </p:style>
+      </p:cxnSp>
+      <p:cxnSp>
+        <p:nvCxnSpPr>
+          <p:cNvPr id="29" name="c2_g_o_2" descr="Editable line; source id c2_g_o_2"/>
+          <p:cNvCxnSpPr/>
+          <p:nvPr/>
+        </p:nvCxnSpPr>
+        <p:spPr>
+          <a:xfrm flipH="1">
+            <a:off x="4730749" y="1150937"/>
+            <a:ext cx="142875" cy="0"/>
+          </a:xfrm>
+          <a:prstGeom prst="line">
+            <a:avLst/>
+          </a:prstGeom>
+          <a:ln w="7937">
+            <a:solidFill>
+              <a:srgbClr val="1F2937"/>
+            </a:solidFill>
+          </a:ln>
+          <a:effectLst/>
+        </p:spPr>
+        <p:style>
+          <a:lnRef idx="2">
+            <a:schemeClr val="accent1"/>
+          </a:lnRef>
+          <a:fillRef idx="0">
+            <a:schemeClr val="accent1"/>
+          </a:fillRef>
+          <a:effectRef idx="0">
+            <a:schemeClr val="accent1"/>
+          </a:effectRef>
+          <a:fontRef idx="minor">
+            <a:schemeClr val="tx1"/>
+          </a:fontRef>
+        </p:style>
+      </p:cxnSp>
+      <p:cxnSp>
+        <p:nvCxnSpPr>
+          <p:cNvPr id="30" name="c2_g_o_3" descr="Editable line; source id c2_g_o_3"/>
+          <p:cNvCxnSpPr/>
+          <p:nvPr/>
+        </p:nvCxnSpPr>
+        <p:spPr>
+          <a:xfrm flipH="1" flipV="1">
+            <a:off x="4667249" y="976312"/>
+            <a:ext cx="63500" cy="174625"/>
+          </a:xfrm>
+          <a:prstGeom prst="line">
+            <a:avLst/>
+          </a:prstGeom>
+          <a:ln w="7937">
+            <a:solidFill>
+              <a:srgbClr val="1F2937"/>
+            </a:solidFill>
+          </a:ln>
+          <a:effectLst/>
+        </p:spPr>
+        <p:style>
+          <a:lnRef idx="2">
+            <a:schemeClr val="accent1"/>
+          </a:lnRef>
+          <a:fillRef idx="0">
+            <a:schemeClr val="accent1"/>
+          </a:fillRef>
+          <a:effectRef idx="0">
+            <a:schemeClr val="accent1"/>
+          </a:effectRef>
+          <a:fontRef idx="minor">
+            <a:schemeClr val="tx1"/>
+          </a:fontRef>
+        </p:style>
+      </p:cxnSp>
+      <p:cxnSp>
+        <p:nvCxnSpPr>
+          <p:cNvPr id="31" name="c2_g_o_4" descr="Editable line; source id c2_g_o_4"/>
+          <p:cNvCxnSpPr/>
+          <p:nvPr/>
+        </p:nvCxnSpPr>
+        <p:spPr>
+          <a:xfrm flipV="1">
+            <a:off x="4667249" y="888999"/>
+            <a:ext cx="134938" cy="87313"/>
+          </a:xfrm>
+          <a:prstGeom prst="line">
+            <a:avLst/>
+          </a:prstGeom>
+          <a:ln w="7937">
+            <a:solidFill>
+              <a:srgbClr val="1F2937"/>
+            </a:solidFill>
+          </a:ln>
+          <a:effectLst/>
+        </p:spPr>
+        <p:style>
+          <a:lnRef idx="2">
+            <a:schemeClr val="accent1"/>
+          </a:lnRef>
+          <a:fillRef idx="0">
+            <a:schemeClr val="accent1"/>
+          </a:fillRef>
+          <a:effectRef idx="0">
+            <a:schemeClr val="accent1"/>
+          </a:effectRef>
+          <a:fontRef idx="minor">
+            <a:schemeClr val="tx1"/>
+          </a:fontRef>
+        </p:style>
+      </p:cxnSp>
+      <p:cxnSp>
+        <p:nvCxnSpPr>
+          <p:cNvPr id="32" name="c2_g_a" descr="Editable line; source id c2_g_a"/>
+          <p:cNvCxnSpPr/>
+          <p:nvPr/>
+        </p:nvCxnSpPr>
+        <p:spPr>
+          <a:xfrm>
+            <a:off x="4802187" y="888999"/>
+            <a:ext cx="0" cy="261938"/>
+          </a:xfrm>
+          <a:prstGeom prst="line">
+            <a:avLst/>
+          </a:prstGeom>
+          <a:ln w="7937">
+            <a:solidFill>
+              <a:srgbClr val="1F2937"/>
+            </a:solidFill>
+          </a:ln>
+          <a:effectLst/>
+        </p:spPr>
+        <p:style>
+          <a:lnRef idx="2">
+            <a:schemeClr val="accent1"/>
+          </a:lnRef>
+          <a:fillRef idx="0">
+            <a:schemeClr val="accent1"/>
+          </a:fillRef>
+          <a:effectRef idx="0">
+            <a:schemeClr val="accent1"/>
+          </a:effectRef>
+          <a:fontRef idx="minor">
+            <a:schemeClr val="tx1"/>
+          </a:fontRef>
+        </p:style>
+      </p:cxnSp>
+      <p:cxnSp>
+        <p:nvCxnSpPr>
+          <p:cNvPr id="33" name="c2_g_b" descr="Editable line; source id c2_g_b"/>
+          <p:cNvCxnSpPr/>
+          <p:nvPr/>
+        </p:nvCxnSpPr>
+        <p:spPr>
+          <a:xfrm>
+            <a:off x="4667249" y="976312"/>
+            <a:ext cx="269875" cy="0"/>
+          </a:xfrm>
+          <a:prstGeom prst="line">
+            <a:avLst/>
+          </a:prstGeom>
+          <a:ln w="7937">
+            <a:solidFill>
+              <a:srgbClr val="1F2937"/>
+            </a:solidFill>
+          </a:ln>
+          <a:effectLst/>
+        </p:spPr>
+        <p:style>
+          <a:lnRef idx="2">
+            <a:schemeClr val="accent1"/>
+          </a:lnRef>
+          <a:fillRef idx="0">
+            <a:schemeClr val="accent1"/>
+          </a:fillRef>
+          <a:effectRef idx="0">
+            <a:schemeClr val="accent1"/>
+          </a:effectRef>
+          <a:fontRef idx="minor">
+            <a:schemeClr val="tx1"/>
+          </a:fontRef>
+        </p:style>
+      </p:cxnSp>
+      <p:sp>
+        <p:nvSpPr>
+          <p:cNvPr id="34" name="c2_t" descr="Editable text; source id c2_t"/>
+          <p:cNvSpPr txBox="1"/>
+          <p:nvPr/>
+        </p:nvSpPr>
+        <p:spPr>
+          <a:xfrm>
+            <a:off x="5064124" y="857249"/>
+            <a:ext cx="2825749" cy="341312"/>
+          </a:xfrm>
+          <a:prstGeom prst="rect">
+            <a:avLst/>
+          </a:prstGeom>
+          <a:noFill/>
+          <a:effectLst/>
+        </p:spPr>
+        <p:txBody>
+          <a:bodyPr wrap="none" anchor="ctr" tIns="0" rIns="0" bIns="0" lIns="0" anchorCtr="0" vertOverflow="overflow">
+            <a:noAutofit/>
+          </a:bodyPr>
+          <a:lstStyle/>
+          <a:p>
+            <a:pPr algn="l" fontAlgn="base">
+              <a:lnSpc>
+                <a:spcPts val="2265"/>
+              </a:lnSpc>
+              <a:spcBef>
+                <a:spcPts val="0"/>
+              </a:spcBef>
+              <a:spcAft>
+                <a:spcPts val="0"/>
+              </a:spcAft>
+              <a:defRPr sz="1562" b="1" i="0" lang="zh-CN" dirty="0">
+                <a:solidFill>
+                  <a:srgbClr val="2B3E57"/>
+                </a:solidFill>
+                <a:latin typeface="Noto Sans CJK SC"/>
+                <a:ea typeface="Noto Sans CJK SC"/>
+                <a:cs typeface="Noto Sans CJK SC"/>
+              </a:defRPr>
+            </a:pPr>
+            <a:r>
+              <a:rPr sz="1562" b="1" i="0" lang="zh-CN" dirty="0">
+                <a:solidFill>
+                  <a:srgbClr val="2B3E57"/>
+                </a:solidFill>
+                <a:latin typeface="Noto Sans CJK SC"/>
+                <a:ea typeface="Noto Sans CJK SC"/>
+                <a:cs typeface="Noto Sans CJK SC"/>
+              </a:rPr>
+              <a:t>结构假设</a:t>
+            </a:r>
+          </a:p>
+        </p:txBody>
+      </p:sp>
+      <p:sp>
+        <p:nvSpPr>
+          <p:cNvPr id="35" name="c2_i0" descr="Editable shape; source id c2_i0"/>
+          <p:cNvSpPr/>
+          <p:nvPr/>
+        </p:nvSpPr>
+        <p:spPr>
+          <a:xfrm>
+            <a:off x="4635499" y="1269999"/>
+            <a:ext cx="3254374" cy="420687"/>
+          </a:xfrm>
+          <a:prstGeom prst="roundRect">
+            <a:avLst>
+              <a:gd name="adj" fmla="val 11320"/>
+            </a:avLst>
+          </a:prstGeom>
+          <a:solidFill>
+            <a:srgbClr val="F7F9FB"/>
+          </a:solidFill>
+          <a:ln w="9524">
+            <a:solidFill>
+              <a:srgbClr val="CBD3DA"/>
+            </a:solidFill>
+          </a:ln>
+          <a:effectLst/>
+        </p:spPr>
+        <p:style>
+          <a:lnRef idx="1">
+            <a:schemeClr val="accent1"/>
+          </a:lnRef>
+          <a:fillRef idx="3">
+            <a:schemeClr val="accent1"/>
+          </a:fillRef>
+          <a:effectRef idx="0">
+            <a:schemeClr val="accent1"/>
+          </a:effectRef>
+          <a:fontRef idx="minor">
+            <a:schemeClr val="lt1"/>
+          </a:fontRef>
+        </p:style>
+        <p:txBody>
+          <a:bodyPr rtlCol="0" anchor="ctr"/>
+          <a:lstStyle/>
+          <a:p>
+            <a:pPr algn="ctr"/>
+          </a:p>
+        </p:txBody>
+      </p:sp>
+      <p:sp>
+        <p:nvSpPr>
+          <p:cNvPr id="36" name="c2_i0_t" descr="Editable text; source id c2_i0_t"/>
+          <p:cNvSpPr txBox="1"/>
+          <p:nvPr/>
+        </p:nvSpPr>
+        <p:spPr>
+          <a:xfrm>
+            <a:off x="4691062" y="1301749"/>
+            <a:ext cx="3143249" cy="357187"/>
+          </a:xfrm>
+          <a:prstGeom prst="rect">
+            <a:avLst/>
+          </a:prstGeom>
+          <a:noFill/>
+          <a:effectLst/>
+        </p:spPr>
+        <p:txBody>
+          <a:bodyPr wrap="none" anchor="ctr" tIns="0" rIns="0" bIns="0" lIns="0" anchorCtr="0" vertOverflow="overflow">
+            <a:noAutofit/>
+          </a:bodyPr>
+          <a:lstStyle/>
+          <a:p>
+            <a:pPr algn="ctr" fontAlgn="base">
+              <a:lnSpc>
+                <a:spcPts val="1734"/>
+              </a:lnSpc>
+              <a:spcBef>
+                <a:spcPts val="0"/>
+              </a:spcBef>
+              <a:spcAft>
+                <a:spcPts val="0"/>
+              </a:spcAft>
+              <a:defRPr sz="1187" b="0" i="0" lang="zh-CN" dirty="0">
+                <a:solidFill>
+                  <a:srgbClr val="3F4854"/>
+                </a:solidFill>
+                <a:latin typeface="Noto Sans CJK SC"/>
+                <a:ea typeface="Noto Sans CJK SC"/>
+                <a:cs typeface="Noto Sans CJK SC"/>
+              </a:defRPr>
+            </a:pPr>
+            <a:r>
+              <a:rPr sz="1187" b="0" i="0" lang="zh-CN" dirty="0">
+                <a:solidFill>
+                  <a:srgbClr val="3F4854"/>
+                </a:solidFill>
+                <a:latin typeface="Noto Sans CJK SC"/>
+                <a:ea typeface="Noto Sans CJK SC"/>
+                <a:cs typeface="Noto Sans CJK SC"/>
+              </a:rPr>
+              <a:t>局部组成网格</a:t>
+            </a:r>
+          </a:p>
+        </p:txBody>
+      </p:sp>
+      <p:sp>
+        <p:nvSpPr>
+          <p:cNvPr id="37" name="c2_i1" descr="Editable shape; source id c2_i1"/>
+          <p:cNvSpPr/>
+          <p:nvPr/>
+        </p:nvSpPr>
+        <p:spPr>
+          <a:xfrm>
+            <a:off x="4635499" y="1762124"/>
+            <a:ext cx="3254374" cy="420687"/>
+          </a:xfrm>
+          <a:prstGeom prst="roundRect">
+            <a:avLst>
+              <a:gd name="adj" fmla="val 11320"/>
+            </a:avLst>
+          </a:prstGeom>
+          <a:solidFill>
+            <a:srgbClr val="F7F9FB"/>
+          </a:solidFill>
+          <a:ln w="9524">
+            <a:solidFill>
+              <a:srgbClr val="CBD3DA"/>
+            </a:solidFill>
+          </a:ln>
+          <a:effectLst/>
+        </p:spPr>
+        <p:style>
+          <a:lnRef idx="1">
+            <a:schemeClr val="accent1"/>
+          </a:lnRef>
+          <a:fillRef idx="3">
+            <a:schemeClr val="accent1"/>
+          </a:fillRef>
+          <a:effectRef idx="0">
+            <a:schemeClr val="accent1"/>
+          </a:effectRef>
+          <a:fontRef idx="minor">
+            <a:schemeClr val="lt1"/>
+          </a:fontRef>
+        </p:style>
+        <p:txBody>
+          <a:bodyPr rtlCol="0" anchor="ctr"/>
+          <a:lstStyle/>
+          <a:p>
+            <a:pPr algn="ctr"/>
+          </a:p>
+        </p:txBody>
+      </p:sp>
+      <p:sp>
+        <p:nvSpPr>
+          <p:cNvPr id="38" name="c2_i1_t" descr="Editable text; source id c2_i1_t"/>
+          <p:cNvSpPr txBox="1"/>
+          <p:nvPr/>
+        </p:nvSpPr>
+        <p:spPr>
+          <a:xfrm>
+            <a:off x="4691062" y="1793874"/>
+            <a:ext cx="3143249" cy="357187"/>
+          </a:xfrm>
+          <a:prstGeom prst="rect">
+            <a:avLst/>
+          </a:prstGeom>
+          <a:noFill/>
+          <a:effectLst/>
+        </p:spPr>
+        <p:txBody>
+          <a:bodyPr wrap="none" anchor="ctr" tIns="0" rIns="0" bIns="0" lIns="0" anchorCtr="0" vertOverflow="overflow">
+            <a:noAutofit/>
+          </a:bodyPr>
+          <a:lstStyle/>
+          <a:p>
+            <a:pPr algn="ctr" fontAlgn="base">
+              <a:lnSpc>
+                <a:spcPts val="1734"/>
+              </a:lnSpc>
+              <a:spcBef>
+                <a:spcPts val="0"/>
+              </a:spcBef>
+              <a:spcAft>
+                <a:spcPts val="0"/>
+              </a:spcAft>
+              <a:defRPr sz="1187" b="0" i="0" lang="zh-CN" dirty="0">
+                <a:solidFill>
+                  <a:srgbClr val="3F4854"/>
+                </a:solidFill>
+                <a:latin typeface="DejaVu Sans"/>
+                <a:ea typeface="DejaVu Sans"/>
+                <a:cs typeface="DejaVu Sans"/>
+              </a:defRPr>
+            </a:pPr>
+            <a:r>
+              <a:rPr sz="1187" b="0" i="0" lang="zh-CN" dirty="0">
+                <a:solidFill>
+                  <a:srgbClr val="3F4854"/>
+                </a:solidFill>
+                <a:latin typeface="DejaVu Sans"/>
+                <a:ea typeface="DejaVu Sans"/>
+                <a:cs typeface="DejaVu Sans"/>
+              </a:rPr>
+              <a:t>Zn–Y–</a:t>
+            </a:r>
+            <a:r>
+              <a:rPr sz="1187" b="0" i="0" lang="zh-CN" dirty="0">
+                <a:solidFill>
+                  <a:srgbClr val="3F4854"/>
+                </a:solidFill>
+                <a:latin typeface="Noto Sans CJK SC"/>
+                <a:ea typeface="Noto Sans CJK SC"/>
+                <a:cs typeface="Noto Sans CJK SC"/>
+              </a:rPr>
+              <a:t>氧计量耦合</a:t>
+            </a:r>
+          </a:p>
+        </p:txBody>
+      </p:sp>
+      <p:sp>
+        <p:nvSpPr>
+          <p:cNvPr id="39" name="c2_i2" descr="Editable shape; source id c2_i2"/>
+          <p:cNvSpPr/>
+          <p:nvPr/>
+        </p:nvSpPr>
+        <p:spPr>
+          <a:xfrm>
+            <a:off x="4635499" y="2262187"/>
+            <a:ext cx="3254374" cy="420687"/>
+          </a:xfrm>
+          <a:prstGeom prst="roundRect">
+            <a:avLst>
+              <a:gd name="adj" fmla="val 11320"/>
+            </a:avLst>
+          </a:prstGeom>
+          <a:solidFill>
+            <a:srgbClr val="F7F9FB"/>
+          </a:solidFill>
+          <a:ln w="9524">
+            <a:solidFill>
+              <a:srgbClr val="CBD3DA"/>
+            </a:solidFill>
+          </a:ln>
+          <a:effectLst/>
+        </p:spPr>
+        <p:style>
+          <a:lnRef idx="1">
+            <a:schemeClr val="accent1"/>
+          </a:lnRef>
+          <a:fillRef idx="3">
+            <a:schemeClr val="accent1"/>
+          </a:fillRef>
+          <a:effectRef idx="0">
+            <a:schemeClr val="accent1"/>
+          </a:effectRef>
+          <a:fontRef idx="minor">
+            <a:schemeClr val="lt1"/>
+          </a:fontRef>
+        </p:style>
+        <p:txBody>
+          <a:bodyPr rtlCol="0" anchor="ctr"/>
+          <a:lstStyle/>
+          <a:p>
+            <a:pPr algn="ctr"/>
+          </a:p>
+        </p:txBody>
+      </p:sp>
+      <p:sp>
+        <p:nvSpPr>
+          <p:cNvPr id="40" name="c2_i2_t" descr="Editable text; source id c2_i2_t"/>
+          <p:cNvSpPr txBox="1"/>
+          <p:nvPr/>
+        </p:nvSpPr>
+        <p:spPr>
+          <a:xfrm>
+            <a:off x="4691062" y="2293937"/>
+            <a:ext cx="3143249" cy="357187"/>
+          </a:xfrm>
+          <a:prstGeom prst="rect">
+            <a:avLst/>
+          </a:prstGeom>
+          <a:noFill/>
+          <a:effectLst/>
+        </p:spPr>
+        <p:txBody>
+          <a:bodyPr wrap="none" anchor="ctr" tIns="0" rIns="0" bIns="0" lIns="0" anchorCtr="0" vertOverflow="overflow">
+            <a:noAutofit/>
+          </a:bodyPr>
+          <a:lstStyle/>
+          <a:p>
+            <a:pPr algn="ctr" fontAlgn="base">
+              <a:lnSpc>
+                <a:spcPts val="1734"/>
+              </a:lnSpc>
+              <a:spcBef>
+                <a:spcPts val="0"/>
+              </a:spcBef>
+              <a:spcAft>
+                <a:spcPts val="0"/>
+              </a:spcAft>
+              <a:defRPr sz="1187" b="0" i="0" lang="zh-CN" dirty="0">
+                <a:solidFill>
+                  <a:srgbClr val="3F4854"/>
+                </a:solidFill>
+                <a:latin typeface="Noto Sans CJK SC"/>
+                <a:ea typeface="Noto Sans CJK SC"/>
+                <a:cs typeface="Noto Sans CJK SC"/>
+              </a:defRPr>
+            </a:pPr>
+            <a:r>
+              <a:rPr sz="1187" b="0" i="0" lang="zh-CN" dirty="0">
+                <a:solidFill>
+                  <a:srgbClr val="3F4854"/>
+                </a:solidFill>
+                <a:latin typeface="Noto Sans CJK SC"/>
+                <a:ea typeface="Noto Sans CJK SC"/>
+                <a:cs typeface="Noto Sans CJK SC"/>
+              </a:rPr>
+              <a:t>竞争相与玻璃区</a:t>
+            </a:r>
+          </a:p>
+        </p:txBody>
+      </p:sp>
+      <p:sp>
+        <p:nvSpPr>
+          <p:cNvPr id="41" name="c3" descr="Editable shape; source id c3"/>
+          <p:cNvSpPr/>
+          <p:nvPr/>
+        </p:nvSpPr>
+        <p:spPr>
+          <a:xfrm>
+            <a:off x="8413749" y="730249"/>
+            <a:ext cx="3571874" cy="2079624"/>
+          </a:xfrm>
+          <a:prstGeom prst="roundRect">
+            <a:avLst>
+              <a:gd name="adj" fmla="val 3435"/>
+            </a:avLst>
+          </a:prstGeom>
+          <a:solidFill>
+            <a:srgbClr val="FFFFFF"/>
+          </a:solidFill>
+          <a:ln w="11112">
+            <a:solidFill>
+              <a:srgbClr val="5B7592"/>
+            </a:solidFill>
+          </a:ln>
+          <a:effectLst/>
+        </p:spPr>
+        <p:style>
+          <a:lnRef idx="1">
+            <a:schemeClr val="accent1"/>
+          </a:lnRef>
+          <a:fillRef idx="3">
+            <a:schemeClr val="accent1"/>
+          </a:fillRef>
+          <a:effectRef idx="0">
+            <a:schemeClr val="accent1"/>
+          </a:effectRef>
+          <a:fontRef idx="minor">
+            <a:schemeClr val="lt1"/>
+          </a:fontRef>
+        </p:style>
+        <p:txBody>
+          <a:bodyPr rtlCol="0" anchor="ctr"/>
+          <a:lstStyle/>
+          <a:p>
+            <a:pPr algn="ctr"/>
+          </a:p>
+        </p:txBody>
+      </p:sp>
+      <p:sp>
+        <p:nvSpPr>
+          <p:cNvPr id="42" name="c3_b" descr="Editable shape; source id c3_b"/>
+          <p:cNvSpPr/>
+          <p:nvPr/>
+        </p:nvSpPr>
+        <p:spPr>
+          <a:xfrm>
+            <a:off x="8413749" y="730249"/>
+            <a:ext cx="63499" cy="2079624"/>
+          </a:xfrm>
+          <a:prstGeom prst="roundRect">
+            <a:avLst>
+              <a:gd name="adj" fmla="val 37500"/>
+            </a:avLst>
+          </a:prstGeom>
+          <a:solidFill>
+            <a:srgbClr val="5B7592"/>
+          </a:solidFill>
+          <a:ln>
+            <a:noFill/>
+          </a:ln>
+          <a:effectLst/>
+        </p:spPr>
+        <p:style>
+          <a:lnRef idx="1">
+            <a:schemeClr val="accent1"/>
+          </a:lnRef>
+          <a:fillRef idx="3">
+            <a:schemeClr val="accent1"/>
+          </a:fillRef>
+          <a:effectRef idx="0">
+            <a:schemeClr val="accent1"/>
+          </a:effectRef>
+          <a:fontRef idx="minor">
+            <a:schemeClr val="lt1"/>
+          </a:fontRef>
+        </p:style>
+        <p:txBody>
+          <a:bodyPr rtlCol="0" anchor="ctr"/>
+          <a:lstStyle/>
+          <a:p>
+            <a:pPr algn="ctr"/>
+          </a:p>
+        </p:txBody>
+      </p:sp>
+      <p:cxnSp>
+        <p:nvCxnSpPr>
+          <p:cNvPr id="43" name="c3_g_f_0" descr="Editable line; source id c3_g_f_0"/>
+          <p:cNvCxnSpPr/>
+          <p:nvPr/>
+        </p:nvCxnSpPr>
+        <p:spPr>
+          <a:xfrm>
+            <a:off x="8643937" y="920749"/>
+            <a:ext cx="254000" cy="0"/>
+          </a:xfrm>
+          <a:prstGeom prst="line">
+            <a:avLst/>
+          </a:prstGeom>
+          <a:ln w="7937">
+            <a:solidFill>
+              <a:srgbClr val="1F2937"/>
+            </a:solidFill>
+          </a:ln>
+          <a:effectLst/>
+        </p:spPr>
+        <p:style>
+          <a:lnRef idx="2">
+            <a:schemeClr val="accent1"/>
+          </a:lnRef>
+          <a:fillRef idx="0">
+            <a:schemeClr val="accent1"/>
+          </a:fillRef>
+          <a:effectRef idx="0">
+            <a:schemeClr val="accent1"/>
+          </a:effectRef>
+          <a:fontRef idx="minor">
+            <a:schemeClr val="tx1"/>
+          </a:fontRef>
+        </p:style>
+      </p:cxnSp>
+      <p:cxnSp>
+        <p:nvCxnSpPr>
+          <p:cNvPr id="44" name="c3_g_f_1" descr="Editable line; source id c3_g_f_1"/>
+          <p:cNvCxnSpPr/>
+          <p:nvPr/>
+        </p:nvCxnSpPr>
+        <p:spPr>
+          <a:xfrm flipH="1">
+            <a:off x="8794749" y="920749"/>
+            <a:ext cx="103188" cy="134938"/>
+          </a:xfrm>
+          <a:prstGeom prst="line">
+            <a:avLst/>
+          </a:prstGeom>
+          <a:ln w="7937">
+            <a:solidFill>
+              <a:srgbClr val="1F2937"/>
+            </a:solidFill>
+          </a:ln>
+          <a:effectLst/>
+        </p:spPr>
+        <p:style>
+          <a:lnRef idx="2">
+            <a:schemeClr val="accent1"/>
+          </a:lnRef>
+          <a:fillRef idx="0">
+            <a:schemeClr val="accent1"/>
+          </a:fillRef>
+          <a:effectRef idx="0">
+            <a:schemeClr val="accent1"/>
+          </a:effectRef>
+          <a:fontRef idx="minor">
+            <a:schemeClr val="tx1"/>
+          </a:fontRef>
+        </p:style>
+      </p:cxnSp>
+      <p:cxnSp>
+        <p:nvCxnSpPr>
+          <p:cNvPr id="45" name="c3_g_f_2" descr="Editable line; source id c3_g_f_2"/>
+          <p:cNvCxnSpPr/>
+          <p:nvPr/>
+        </p:nvCxnSpPr>
+        <p:spPr>
+          <a:xfrm>
+            <a:off x="8794749" y="1055687"/>
+            <a:ext cx="0" cy="95250"/>
+          </a:xfrm>
+          <a:prstGeom prst="line">
+            <a:avLst/>
+          </a:prstGeom>
+          <a:ln w="7937">
+            <a:solidFill>
+              <a:srgbClr val="1F2937"/>
+            </a:solidFill>
+          </a:ln>
+          <a:effectLst/>
+        </p:spPr>
+        <p:style>
+          <a:lnRef idx="2">
+            <a:schemeClr val="accent1"/>
+          </a:lnRef>
+          <a:fillRef idx="0">
+            <a:schemeClr val="accent1"/>
+          </a:fillRef>
+          <a:effectRef idx="0">
+            <a:schemeClr val="accent1"/>
+          </a:effectRef>
+          <a:fontRef idx="minor">
+            <a:schemeClr val="tx1"/>
+          </a:fontRef>
+        </p:style>
+      </p:cxnSp>
+      <p:cxnSp>
+        <p:nvCxnSpPr>
+          <p:cNvPr id="46" name="c3_g_f_3" descr="Editable line; source id c3_g_f_3"/>
+          <p:cNvCxnSpPr/>
+          <p:nvPr/>
+        </p:nvCxnSpPr>
+        <p:spPr>
+          <a:xfrm flipH="1">
+            <a:off x="8747124" y="1150937"/>
+            <a:ext cx="47625" cy="0"/>
+          </a:xfrm>
+          <a:prstGeom prst="line">
+            <a:avLst/>
+          </a:prstGeom>
+          <a:ln w="7937">
+            <a:solidFill>
+              <a:srgbClr val="1F2937"/>
+            </a:solidFill>
+          </a:ln>
+          <a:effectLst/>
+        </p:spPr>
+        <p:style>
+          <a:lnRef idx="2">
+            <a:schemeClr val="accent1"/>
+          </a:lnRef>
+          <a:fillRef idx="0">
+            <a:schemeClr val="accent1"/>
+          </a:fillRef>
+          <a:effectRef idx="0">
+            <a:schemeClr val="accent1"/>
+          </a:effectRef>
+          <a:fontRef idx="minor">
+            <a:schemeClr val="tx1"/>
+          </a:fontRef>
+        </p:style>
+      </p:cxnSp>
+      <p:cxnSp>
+        <p:nvCxnSpPr>
+          <p:cNvPr id="47" name="c3_g_f_4" descr="Editable line; source id c3_g_f_4"/>
+          <p:cNvCxnSpPr/>
+          <p:nvPr/>
+        </p:nvCxnSpPr>
+        <p:spPr>
+          <a:xfrm flipV="1">
+            <a:off x="8747124" y="1055687"/>
+            <a:ext cx="0" cy="95250"/>
+          </a:xfrm>
+          <a:prstGeom prst="line">
+            <a:avLst/>
+          </a:prstGeom>
+          <a:ln w="7937">
+            <a:solidFill>
+              <a:srgbClr val="1F2937"/>
+            </a:solidFill>
+          </a:ln>
+          <a:effectLst/>
+        </p:spPr>
+        <p:style>
+          <a:lnRef idx="2">
+            <a:schemeClr val="accent1"/>
+          </a:lnRef>
+          <a:fillRef idx="0">
+            <a:schemeClr val="accent1"/>
+          </a:fillRef>
+          <a:effectRef idx="0">
+            <a:schemeClr val="accent1"/>
+          </a:effectRef>
+          <a:fontRef idx="minor">
+            <a:schemeClr val="tx1"/>
+          </a:fontRef>
+        </p:style>
+      </p:cxnSp>
+      <p:cxnSp>
+        <p:nvCxnSpPr>
+          <p:cNvPr id="48" name="c3_g_f_5" descr="Editable line; source id c3_g_f_5"/>
+          <p:cNvCxnSpPr/>
+          <p:nvPr/>
+        </p:nvCxnSpPr>
+        <p:spPr>
+          <a:xfrm flipH="1" flipV="1">
+            <a:off x="8643937" y="920749"/>
+            <a:ext cx="103187" cy="134938"/>
+          </a:xfrm>
+          <a:prstGeom prst="line">
+            <a:avLst/>
+          </a:prstGeom>
+          <a:ln w="7937">
+            <a:solidFill>
+              <a:srgbClr val="1F2937"/>
+            </a:solidFill>
+          </a:ln>
+          <a:effectLst/>
+        </p:spPr>
+        <p:style>
+          <a:lnRef idx="2">
+            <a:schemeClr val="accent1"/>
+          </a:lnRef>
+          <a:fillRef idx="0">
+            <a:schemeClr val="accent1"/>
+          </a:fillRef>
+          <a:effectRef idx="0">
+            <a:schemeClr val="accent1"/>
+          </a:effectRef>
+          <a:fontRef idx="minor">
+            <a:schemeClr val="tx1"/>
+          </a:fontRef>
+        </p:style>
+      </p:cxnSp>
+      <p:sp>
+        <p:nvSpPr>
+          <p:cNvPr id="49" name="c3_t" descr="Editable text; source id c3_t"/>
+          <p:cNvSpPr txBox="1"/>
+          <p:nvPr/>
+        </p:nvSpPr>
+        <p:spPr>
+          <a:xfrm>
+            <a:off x="9032874" y="857249"/>
+            <a:ext cx="2825749" cy="341312"/>
+          </a:xfrm>
+          <a:prstGeom prst="rect">
+            <a:avLst/>
+          </a:prstGeom>
+          <a:noFill/>
+          <a:effectLst/>
+        </p:spPr>
+        <p:txBody>
+          <a:bodyPr wrap="none" anchor="ctr" tIns="0" rIns="0" bIns="0" lIns="0" anchorCtr="0" vertOverflow="overflow">
+            <a:noAutofit/>
+          </a:bodyPr>
+          <a:lstStyle/>
+          <a:p>
+            <a:pPr algn="l" fontAlgn="base">
+              <a:lnSpc>
+                <a:spcPts val="2265"/>
+              </a:lnSpc>
+              <a:spcBef>
+                <a:spcPts val="0"/>
+              </a:spcBef>
+              <a:spcAft>
+                <a:spcPts val="0"/>
+              </a:spcAft>
+              <a:defRPr sz="1562" b="1" i="0" lang="zh-CN" dirty="0">
+                <a:solidFill>
+                  <a:srgbClr val="2B3E57"/>
+                </a:solidFill>
+                <a:latin typeface="Noto Sans CJK SC"/>
+                <a:ea typeface="Noto Sans CJK SC"/>
+                <a:cs typeface="Noto Sans CJK SC"/>
+              </a:defRPr>
+            </a:pPr>
+            <a:r>
+              <a:rPr sz="1562" b="1" i="0" lang="zh-CN" dirty="0">
+                <a:solidFill>
+                  <a:srgbClr val="2B3E57"/>
+                </a:solidFill>
+                <a:latin typeface="Noto Sans CJK SC"/>
+                <a:ea typeface="Noto Sans CJK SC"/>
+                <a:cs typeface="Noto Sans CJK SC"/>
+              </a:rPr>
+              <a:t>前驱体筛选</a:t>
+            </a:r>
+          </a:p>
+        </p:txBody>
+      </p:sp>
+      <p:sp>
+        <p:nvSpPr>
+          <p:cNvPr id="50" name="c3_i0" descr="Editable shape; source id c3_i0"/>
+          <p:cNvSpPr/>
+          <p:nvPr/>
+        </p:nvSpPr>
+        <p:spPr>
+          <a:xfrm>
+            <a:off x="8604249" y="1269999"/>
+            <a:ext cx="3254374" cy="420687"/>
+          </a:xfrm>
+          <a:prstGeom prst="roundRect">
+            <a:avLst>
+              <a:gd name="adj" fmla="val 11320"/>
+            </a:avLst>
+          </a:prstGeom>
+          <a:solidFill>
+            <a:srgbClr val="F7F9FB"/>
+          </a:solidFill>
+          <a:ln w="9524">
+            <a:solidFill>
+              <a:srgbClr val="CBD3DA"/>
+            </a:solidFill>
+          </a:ln>
+          <a:effectLst/>
+        </p:spPr>
+        <p:style>
+          <a:lnRef idx="1">
+            <a:schemeClr val="accent1"/>
+          </a:lnRef>
+          <a:fillRef idx="3">
+            <a:schemeClr val="accent1"/>
+          </a:fillRef>
+          <a:effectRef idx="0">
+            <a:schemeClr val="accent1"/>
+          </a:effectRef>
+          <a:fontRef idx="minor">
+            <a:schemeClr val="lt1"/>
+          </a:fontRef>
+        </p:style>
+        <p:txBody>
+          <a:bodyPr rtlCol="0" anchor="ctr"/>
+          <a:lstStyle/>
+          <a:p>
+            <a:pPr algn="ctr"/>
+          </a:p>
+        </p:txBody>
+      </p:sp>
+      <p:sp>
+        <p:nvSpPr>
+          <p:cNvPr id="51" name="c3_i0_t" descr="Editable text; source id c3_i0_t"/>
+          <p:cNvSpPr txBox="1"/>
+          <p:nvPr/>
+        </p:nvSpPr>
+        <p:spPr>
+          <a:xfrm>
+            <a:off x="8659812" y="1301749"/>
+            <a:ext cx="3143249" cy="357187"/>
+          </a:xfrm>
+          <a:prstGeom prst="rect">
+            <a:avLst/>
+          </a:prstGeom>
+          <a:noFill/>
+          <a:effectLst/>
+        </p:spPr>
+        <p:txBody>
+          <a:bodyPr wrap="none" anchor="ctr" tIns="0" rIns="0" bIns="0" lIns="0" anchorCtr="0" vertOverflow="overflow">
+            <a:noAutofit/>
+          </a:bodyPr>
+          <a:lstStyle/>
+          <a:p>
+            <a:pPr algn="ctr" fontAlgn="base">
+              <a:lnSpc>
+                <a:spcPts val="1390"/>
+              </a:lnSpc>
+              <a:spcBef>
+                <a:spcPts val="0"/>
+              </a:spcBef>
+              <a:spcAft>
+                <a:spcPts val="0"/>
+              </a:spcAft>
+              <a:defRPr sz="1187" b="0" i="0" lang="zh-CN" dirty="0">
+                <a:solidFill>
+                  <a:srgbClr val="3F4854"/>
+                </a:solidFill>
+                <a:latin typeface="DejaVu Sans"/>
+                <a:ea typeface="DejaVu Sans"/>
+                <a:cs typeface="DejaVu Sans"/>
+              </a:defRPr>
+            </a:pPr>
+            <a:r>
+              <a:rPr sz="1187" b="0" i="0" lang="zh-CN" dirty="0">
+                <a:solidFill>
+                  <a:srgbClr val="3F4854"/>
+                </a:solidFill>
+                <a:latin typeface="DejaVu Sans"/>
+                <a:ea typeface="DejaVu Sans"/>
+                <a:cs typeface="DejaVu Sans"/>
+              </a:rPr>
+              <a:t>BaCO3 + Y2O3 + SiO2</a:t>
+            </a:r>
+          </a:p>
+        </p:txBody>
+      </p:sp>
+      <p:sp>
+        <p:nvSpPr>
+          <p:cNvPr id="52" name="c3_i1" descr="Editable shape; source id c3_i1"/>
+          <p:cNvSpPr/>
+          <p:nvPr/>
+        </p:nvSpPr>
+        <p:spPr>
+          <a:xfrm>
+            <a:off x="8604249" y="1762124"/>
+            <a:ext cx="3254374" cy="420687"/>
+          </a:xfrm>
+          <a:prstGeom prst="roundRect">
+            <a:avLst>
+              <a:gd name="adj" fmla="val 11320"/>
+            </a:avLst>
+          </a:prstGeom>
+          <a:solidFill>
+            <a:srgbClr val="F7F9FB"/>
+          </a:solidFill>
+          <a:ln w="9524">
+            <a:solidFill>
+              <a:srgbClr val="CBD3DA"/>
+            </a:solidFill>
+          </a:ln>
+          <a:effectLst/>
+        </p:spPr>
+        <p:style>
+          <a:lnRef idx="1">
+            <a:schemeClr val="accent1"/>
+          </a:lnRef>
+          <a:fillRef idx="3">
+            <a:schemeClr val="accent1"/>
+          </a:fillRef>
+          <a:effectRef idx="0">
+            <a:schemeClr val="accent1"/>
+          </a:effectRef>
+          <a:fontRef idx="minor">
+            <a:schemeClr val="lt1"/>
+          </a:fontRef>
+        </p:style>
+        <p:txBody>
+          <a:bodyPr rtlCol="0" anchor="ctr"/>
+          <a:lstStyle/>
+          <a:p>
+            <a:pPr algn="ctr"/>
+          </a:p>
+        </p:txBody>
+      </p:sp>
+      <p:sp>
+        <p:nvSpPr>
+          <p:cNvPr id="53" name="c3_i1_t" descr="Editable text; source id c3_i1_t"/>
+          <p:cNvSpPr txBox="1"/>
+          <p:nvPr/>
+        </p:nvSpPr>
+        <p:spPr>
+          <a:xfrm>
+            <a:off x="8659812" y="1793874"/>
+            <a:ext cx="3143249" cy="357187"/>
+          </a:xfrm>
+          <a:prstGeom prst="rect">
+            <a:avLst/>
+          </a:prstGeom>
+          <a:noFill/>
+          <a:effectLst/>
+        </p:spPr>
+        <p:txBody>
+          <a:bodyPr wrap="none" anchor="ctr" tIns="0" rIns="0" bIns="0" lIns="0" anchorCtr="0" vertOverflow="overflow">
+            <a:noAutofit/>
+          </a:bodyPr>
+          <a:lstStyle/>
+          <a:p>
+            <a:pPr algn="ctr" fontAlgn="base">
+              <a:lnSpc>
+                <a:spcPts val="1390"/>
+              </a:lnSpc>
+              <a:spcBef>
+                <a:spcPts val="0"/>
+              </a:spcBef>
+              <a:spcAft>
+                <a:spcPts val="0"/>
+              </a:spcAft>
+              <a:defRPr sz="1187" b="0" i="0" lang="zh-CN" dirty="0">
+                <a:solidFill>
+                  <a:srgbClr val="3F4854"/>
+                </a:solidFill>
+                <a:latin typeface="DejaVu Sans"/>
+                <a:ea typeface="DejaVu Sans"/>
+                <a:cs typeface="DejaVu Sans"/>
+              </a:defRPr>
+            </a:pPr>
+            <a:r>
+              <a:rPr sz="1187" b="0" i="0" lang="zh-CN" dirty="0">
+                <a:solidFill>
+                  <a:srgbClr val="3F4854"/>
+                </a:solidFill>
+                <a:latin typeface="DejaVu Sans"/>
+                <a:ea typeface="DejaVu Sans"/>
+                <a:cs typeface="DejaVu Sans"/>
+              </a:rPr>
+              <a:t>ZnO / MgO / Co3O4</a:t>
+            </a:r>
+          </a:p>
+        </p:txBody>
+      </p:sp>
+      <p:sp>
+        <p:nvSpPr>
+          <p:cNvPr id="54" name="c3_i2" descr="Editable shape; source id c3_i2"/>
+          <p:cNvSpPr/>
+          <p:nvPr/>
+        </p:nvSpPr>
+        <p:spPr>
+          <a:xfrm>
+            <a:off x="8604249" y="2262187"/>
+            <a:ext cx="3254374" cy="420687"/>
+          </a:xfrm>
+          <a:prstGeom prst="roundRect">
+            <a:avLst>
+              <a:gd name="adj" fmla="val 11320"/>
+            </a:avLst>
+          </a:prstGeom>
+          <a:solidFill>
+            <a:srgbClr val="F7F9FB"/>
+          </a:solidFill>
+          <a:ln w="9524">
+            <a:solidFill>
+              <a:srgbClr val="CBD3DA"/>
+            </a:solidFill>
+          </a:ln>
+          <a:effectLst/>
+        </p:spPr>
+        <p:style>
+          <a:lnRef idx="1">
+            <a:schemeClr val="accent1"/>
+          </a:lnRef>
+          <a:fillRef idx="3">
+            <a:schemeClr val="accent1"/>
+          </a:fillRef>
+          <a:effectRef idx="0">
+            <a:schemeClr val="accent1"/>
+          </a:effectRef>
+          <a:fontRef idx="minor">
+            <a:schemeClr val="lt1"/>
+          </a:fontRef>
+        </p:style>
+        <p:txBody>
+          <a:bodyPr rtlCol="0" anchor="ctr"/>
+          <a:lstStyle/>
+          <a:p>
+            <a:pPr algn="ctr"/>
+          </a:p>
+        </p:txBody>
+      </p:sp>
+      <p:sp>
+        <p:nvSpPr>
+          <p:cNvPr id="55" name="c3_i2_t" descr="Editable text; source id c3_i2_t"/>
+          <p:cNvSpPr txBox="1"/>
+          <p:nvPr/>
+        </p:nvSpPr>
+        <p:spPr>
+          <a:xfrm>
+            <a:off x="8659812" y="2293937"/>
+            <a:ext cx="3143249" cy="357187"/>
+          </a:xfrm>
+          <a:prstGeom prst="rect">
+            <a:avLst/>
+          </a:prstGeom>
+          <a:noFill/>
+          <a:effectLst/>
+        </p:spPr>
+        <p:txBody>
+          <a:bodyPr wrap="none" anchor="ctr" tIns="0" rIns="0" bIns="0" lIns="0" anchorCtr="0" vertOverflow="overflow">
+            <a:noAutofit/>
+          </a:bodyPr>
+          <a:lstStyle/>
+          <a:p>
+            <a:pPr algn="ctr" fontAlgn="base">
+              <a:lnSpc>
+                <a:spcPts val="1734"/>
+              </a:lnSpc>
+              <a:spcBef>
+                <a:spcPts val="0"/>
+              </a:spcBef>
+              <a:spcAft>
+                <a:spcPts val="0"/>
+              </a:spcAft>
+              <a:defRPr sz="1187" b="0" i="0" lang="zh-CN" dirty="0">
+                <a:solidFill>
+                  <a:srgbClr val="3F4854"/>
+                </a:solidFill>
+                <a:latin typeface="Noto Sans CJK SC"/>
+                <a:ea typeface="Noto Sans CJK SC"/>
+                <a:cs typeface="Noto Sans CJK SC"/>
+              </a:defRPr>
+            </a:pPr>
+            <a:r>
+              <a:rPr sz="1187" b="0" i="0" lang="zh-CN" dirty="0">
+                <a:solidFill>
+                  <a:srgbClr val="3F4854"/>
+                </a:solidFill>
+                <a:latin typeface="Noto Sans CJK SC"/>
+                <a:ea typeface="Noto Sans CJK SC"/>
+                <a:cs typeface="Noto Sans CJK SC"/>
+              </a:rPr>
+              <a:t>模型排序的候选</a:t>
+            </a:r>
+          </a:p>
+        </p:txBody>
+      </p:sp>
+      <p:sp>
+        <p:nvSpPr>
+          <p:cNvPr id="56" name="cav" descr="Editable shape; source id cav"/>
+          <p:cNvSpPr/>
+          <p:nvPr/>
+        </p:nvSpPr>
+        <p:spPr>
+          <a:xfrm>
+            <a:off x="9588499" y="2793999"/>
+            <a:ext cx="1309687" cy="309562"/>
           </a:xfrm>
           <a:prstGeom prst="roundRect">
             <a:avLst>
@@ -3982,14 +6120,14 @@
       </p:sp>
       <p:sp>
         <p:nvSpPr>
-          <p:cNvPr id="11" name="cav_t" descr="Editable text; source id cav_t"/>
+          <p:cNvPr id="57" name="cav_t" descr="Editable text; source id cav_t"/>
           <p:cNvSpPr txBox="1"/>
           <p:nvPr/>
         </p:nvSpPr>
         <p:spPr>
           <a:xfrm>
-            <a:off x="5008562" y="571499"/>
-            <a:ext cx="1095374" cy="230187"/>
+            <a:off x="9667874" y="2825749"/>
+            <a:ext cx="1150937" cy="246062"/>
           </a:xfrm>
           <a:prstGeom prst="rect">
             <a:avLst/>
@@ -4005,7 +6143,7 @@
           <a:p>
             <a:pPr algn="ctr" fontAlgn="base">
               <a:lnSpc>
-                <a:spcPts val="1546"/>
+                <a:spcPts val="1640"/>
               </a:lnSpc>
               <a:spcBef>
                 <a:spcPts val="0"/>
@@ -4013,7 +6151,7 @@
               <a:spcAft>
                 <a:spcPts val="0"/>
               </a:spcAft>
-              <a:defRPr sz="1062" b="0" i="0" lang="zh-CN" dirty="0">
+              <a:defRPr sz="1124" b="0" i="0" lang="zh-CN" dirty="0">
                 <a:solidFill>
                   <a:srgbClr val="7A5410"/>
                 </a:solidFill>
@@ -4023,7 +6161,7 @@
               </a:defRPr>
             </a:pPr>
             <a:r>
-              <a:rPr sz="1062" b="0" i="0" lang="zh-CN" dirty="0">
+              <a:rPr sz="1124" b="0" i="0" lang="zh-CN" dirty="0">
                 <a:solidFill>
                   <a:srgbClr val="7A5410"/>
                 </a:solidFill>
@@ -4034,7 +6172,7 @@
               <a:t>模型排序</a:t>
             </a:r>
             <a:r>
-              <a:rPr sz="1062" b="0" i="0" lang="zh-CN" dirty="0">
+              <a:rPr sz="1124" b="0" i="0" lang="zh-CN" dirty="0">
                 <a:solidFill>
                   <a:srgbClr val="7A5410"/>
                 </a:solidFill>
@@ -4045,7 +6183,7 @@
               <a:t> ≠ </a:t>
             </a:r>
             <a:r>
-              <a:rPr sz="1062" b="0" i="0" lang="zh-CN" dirty="0">
+              <a:rPr sz="1124" b="0" i="0" lang="zh-CN" dirty="0">
                 <a:solidFill>
                   <a:srgbClr val="7A5410"/>
                 </a:solidFill>
@@ -4060,18 +6198,18 @@
       </p:sp>
       <p:sp>
         <p:nvSpPr>
-          <p:cNvPr id="12" name="c1" descr="Editable shape; source id c1"/>
+          <p:cNvPr id="58" name="l1" descr="Editable shape; source id l1"/>
           <p:cNvSpPr/>
           <p:nvPr/>
         </p:nvSpPr>
         <p:spPr>
           <a:xfrm>
-            <a:off x="412749" y="888999"/>
-            <a:ext cx="1920874" cy="2936874"/>
+            <a:off x="476249" y="3809999"/>
+            <a:ext cx="4921249" cy="1127124"/>
           </a:xfrm>
           <a:prstGeom prst="roundRect">
             <a:avLst>
-              <a:gd name="adj" fmla="val 3719"/>
+              <a:gd name="adj" fmla="val 6338"/>
             </a:avLst>
           </a:prstGeom>
           <a:solidFill>
@@ -4079,7 +6217,7 @@
           </a:solidFill>
           <a:ln w="11112">
             <a:solidFill>
-              <a:srgbClr val="5B7592"/>
+              <a:srgbClr val="1F7F8C"/>
             </a:solidFill>
           </a:ln>
           <a:effectLst/>
@@ -4108,22 +6246,22 @@
       </p:sp>
       <p:sp>
         <p:nvSpPr>
-          <p:cNvPr id="13" name="c1_a" descr="Editable shape; source id c1_a"/>
+          <p:cNvPr id="59" name="l1_b" descr="Editable shape; source id l1_b"/>
           <p:cNvSpPr/>
           <p:nvPr/>
         </p:nvSpPr>
         <p:spPr>
           <a:xfrm>
-            <a:off x="412749" y="888999"/>
-            <a:ext cx="1920874" cy="47624"/>
+            <a:off x="476249" y="3809999"/>
+            <a:ext cx="63499" cy="1127124"/>
           </a:xfrm>
           <a:prstGeom prst="roundRect">
             <a:avLst>
-              <a:gd name="adj" fmla="val 50000"/>
+              <a:gd name="adj" fmla="val 37500"/>
             </a:avLst>
           </a:prstGeom>
           <a:solidFill>
-            <a:srgbClr val="5B7592"/>
+            <a:srgbClr val="1F7F8C"/>
           </a:solidFill>
           <a:ln>
             <a:noFill/>
@@ -4154,14 +6292,14 @@
       </p:sp>
       <p:sp>
         <p:nvSpPr>
-          <p:cNvPr id="14" name="c1_g_s2" descr="Editable shape; source id c1_g_s2"/>
+          <p:cNvPr id="60" name="l1_g_b" descr="Editable shape; source id l1_g_b"/>
           <p:cNvSpPr/>
           <p:nvPr/>
         </p:nvSpPr>
         <p:spPr>
           <a:xfrm>
-            <a:off x="1325562" y="1150937"/>
-            <a:ext cx="150812" cy="230187"/>
+            <a:off x="690562" y="4016374"/>
+            <a:ext cx="238124" cy="190499"/>
           </a:xfrm>
           <a:prstGeom prst="rect">
             <a:avLst/>
@@ -4196,104 +6334,16 @@
           </a:p>
         </p:txBody>
       </p:sp>
-      <p:sp>
-        <p:nvSpPr>
-          <p:cNvPr id="15" name="c1_g_s1" descr="Editable shape; source id c1_g_s1"/>
-          <p:cNvSpPr/>
-          <p:nvPr/>
-        </p:nvSpPr>
-        <p:spPr>
-          <a:xfrm>
-            <a:off x="1301749" y="1119187"/>
-            <a:ext cx="150812" cy="230187"/>
-          </a:xfrm>
-          <a:prstGeom prst="rect">
-            <a:avLst/>
-          </a:prstGeom>
-          <a:noFill/>
-          <a:ln w="7937">
-            <a:solidFill>
-              <a:srgbClr val="1F2937"/>
-            </a:solidFill>
-          </a:ln>
-          <a:effectLst/>
-        </p:spPr>
-        <p:style>
-          <a:lnRef idx="1">
-            <a:schemeClr val="accent1"/>
-          </a:lnRef>
-          <a:fillRef idx="3">
-            <a:schemeClr val="accent1"/>
-          </a:fillRef>
-          <a:effectRef idx="0">
-            <a:schemeClr val="accent1"/>
-          </a:effectRef>
-          <a:fontRef idx="minor">
-            <a:schemeClr val="lt1"/>
-          </a:fontRef>
-        </p:style>
-        <p:txBody>
-          <a:bodyPr rtlCol="0" anchor="ctr"/>
-          <a:lstStyle/>
-          <a:p>
-            <a:pPr algn="ctr"/>
-          </a:p>
-        </p:txBody>
-      </p:sp>
-      <p:sp>
-        <p:nvSpPr>
-          <p:cNvPr id="16" name="c1_g_s0" descr="Editable shape; source id c1_g_s0"/>
-          <p:cNvSpPr/>
-          <p:nvPr/>
-        </p:nvSpPr>
-        <p:spPr>
-          <a:xfrm>
-            <a:off x="1269999" y="1095374"/>
-            <a:ext cx="150812" cy="230187"/>
-          </a:xfrm>
-          <a:prstGeom prst="rect">
-            <a:avLst/>
-          </a:prstGeom>
-          <a:noFill/>
-          <a:ln w="7937">
-            <a:solidFill>
-              <a:srgbClr val="1F2937"/>
-            </a:solidFill>
-          </a:ln>
-          <a:effectLst/>
-        </p:spPr>
-        <p:style>
-          <a:lnRef idx="1">
-            <a:schemeClr val="accent1"/>
-          </a:lnRef>
-          <a:fillRef idx="3">
-            <a:schemeClr val="accent1"/>
-          </a:fillRef>
-          <a:effectRef idx="0">
-            <a:schemeClr val="accent1"/>
-          </a:effectRef>
-          <a:fontRef idx="minor">
-            <a:schemeClr val="lt1"/>
-          </a:fontRef>
-        </p:style>
-        <p:txBody>
-          <a:bodyPr rtlCol="0" anchor="ctr"/>
-          <a:lstStyle/>
-          <a:p>
-            <a:pPr algn="ctr"/>
-          </a:p>
-        </p:txBody>
-      </p:sp>
       <p:cxnSp>
         <p:nvCxnSpPr>
-          <p:cNvPr id="17" name="c1_g_l1" descr="Editable line; source id c1_g_l1"/>
+          <p:cNvPr id="61" name="l1_g_d" descr="Editable line; source id l1_g_d"/>
           <p:cNvCxnSpPr/>
           <p:nvPr/>
         </p:nvCxnSpPr>
         <p:spPr>
           <a:xfrm>
-            <a:off x="1309687" y="1174749"/>
-            <a:ext cx="103187" cy="0"/>
+            <a:off x="761999" y="4016374"/>
+            <a:ext cx="0" cy="190500"/>
           </a:xfrm>
           <a:prstGeom prst="line">
             <a:avLst/>
@@ -4322,14 +6372,14 @@
       </p:cxnSp>
       <p:cxnSp>
         <p:nvCxnSpPr>
-          <p:cNvPr id="18" name="c1_g_l2" descr="Editable line; source id c1_g_l2"/>
+          <p:cNvPr id="62" name="l1_g_h0_0" descr="Editable line; source id l1_g_h0_0"/>
           <p:cNvCxnSpPr/>
           <p:nvPr/>
         </p:nvCxnSpPr>
         <p:spPr>
-          <a:xfrm>
-            <a:off x="1309687" y="1222374"/>
-            <a:ext cx="103187" cy="0"/>
+          <a:xfrm flipH="1">
+            <a:off x="793749" y="4079874"/>
+            <a:ext cx="23813" cy="31750"/>
           </a:xfrm>
           <a:prstGeom prst="line">
             <a:avLst/>
@@ -4358,14 +6408,14 @@
       </p:cxnSp>
       <p:cxnSp>
         <p:nvCxnSpPr>
-          <p:cNvPr id="19" name="c1_g_l3" descr="Editable line; source id c1_g_l3"/>
+          <p:cNvPr id="63" name="l1_g_h0_1" descr="Editable line; source id l1_g_h0_1"/>
           <p:cNvCxnSpPr/>
           <p:nvPr/>
         </p:nvCxnSpPr>
         <p:spPr>
           <a:xfrm>
-            <a:off x="1309687" y="1262062"/>
-            <a:ext cx="71437" cy="0"/>
+            <a:off x="793749" y="4111624"/>
+            <a:ext cx="23813" cy="31750"/>
           </a:xfrm>
           <a:prstGeom prst="line">
             <a:avLst/>
@@ -4392,16 +6442,160 @@
           </a:fontRef>
         </p:style>
       </p:cxnSp>
-      <p:sp>
-        <p:nvSpPr>
-          <p:cNvPr id="20" name="c1_t" descr="Editable text; source id c1_t"/>
+      <p:cxnSp>
+        <p:nvCxnSpPr>
+          <p:cNvPr id="64" name="l1_g_h1_0" descr="Editable line; source id l1_g_h1_0"/>
+          <p:cNvCxnSpPr/>
+          <p:nvPr/>
+        </p:nvCxnSpPr>
+        <p:spPr>
+          <a:xfrm flipH="1">
+            <a:off x="833437" y="4079874"/>
+            <a:ext cx="23812" cy="31750"/>
+          </a:xfrm>
+          <a:prstGeom prst="line">
+            <a:avLst/>
+          </a:prstGeom>
+          <a:ln w="7937">
+            <a:solidFill>
+              <a:srgbClr val="1F2937"/>
+            </a:solidFill>
+          </a:ln>
+          <a:effectLst/>
+        </p:spPr>
+        <p:style>
+          <a:lnRef idx="2">
+            <a:schemeClr val="accent1"/>
+          </a:lnRef>
+          <a:fillRef idx="0">
+            <a:schemeClr val="accent1"/>
+          </a:fillRef>
+          <a:effectRef idx="0">
+            <a:schemeClr val="accent1"/>
+          </a:effectRef>
+          <a:fontRef idx="minor">
+            <a:schemeClr val="tx1"/>
+          </a:fontRef>
+        </p:style>
+      </p:cxnSp>
+      <p:cxnSp>
+        <p:nvCxnSpPr>
+          <p:cNvPr id="65" name="l1_g_h1_1" descr="Editable line; source id l1_g_h1_1"/>
+          <p:cNvCxnSpPr/>
+          <p:nvPr/>
+        </p:nvCxnSpPr>
+        <p:spPr>
+          <a:xfrm>
+            <a:off x="833437" y="4111624"/>
+            <a:ext cx="23812" cy="31750"/>
+          </a:xfrm>
+          <a:prstGeom prst="line">
+            <a:avLst/>
+          </a:prstGeom>
+          <a:ln w="7937">
+            <a:solidFill>
+              <a:srgbClr val="1F2937"/>
+            </a:solidFill>
+          </a:ln>
+          <a:effectLst/>
+        </p:spPr>
+        <p:style>
+          <a:lnRef idx="2">
+            <a:schemeClr val="accent1"/>
+          </a:lnRef>
+          <a:fillRef idx="0">
+            <a:schemeClr val="accent1"/>
+          </a:fillRef>
+          <a:effectRef idx="0">
+            <a:schemeClr val="accent1"/>
+          </a:effectRef>
+          <a:fontRef idx="minor">
+            <a:schemeClr val="tx1"/>
+          </a:fontRef>
+        </p:style>
+      </p:cxnSp>
+      <p:cxnSp>
+        <p:nvCxnSpPr>
+          <p:cNvPr id="66" name="l1_g_h2_0" descr="Editable line; source id l1_g_h2_0"/>
+          <p:cNvCxnSpPr/>
+          <p:nvPr/>
+        </p:nvCxnSpPr>
+        <p:spPr>
+          <a:xfrm flipH="1">
+            <a:off x="873124" y="4079874"/>
+            <a:ext cx="15875" cy="31750"/>
+          </a:xfrm>
+          <a:prstGeom prst="line">
+            <a:avLst/>
+          </a:prstGeom>
+          <a:ln w="7937">
+            <a:solidFill>
+              <a:srgbClr val="1F2937"/>
+            </a:solidFill>
+          </a:ln>
+          <a:effectLst/>
+        </p:spPr>
+        <p:style>
+          <a:lnRef idx="2">
+            <a:schemeClr val="accent1"/>
+          </a:lnRef>
+          <a:fillRef idx="0">
+            <a:schemeClr val="accent1"/>
+          </a:fillRef>
+          <a:effectRef idx="0">
+            <a:schemeClr val="accent1"/>
+          </a:effectRef>
+          <a:fontRef idx="minor">
+            <a:schemeClr val="tx1"/>
+          </a:fontRef>
+        </p:style>
+      </p:cxnSp>
+      <p:cxnSp>
+        <p:nvCxnSpPr>
+          <p:cNvPr id="67" name="l1_g_h2_1" descr="Editable line; source id l1_g_h2_1"/>
+          <p:cNvCxnSpPr/>
+          <p:nvPr/>
+        </p:nvCxnSpPr>
+        <p:spPr>
+          <a:xfrm>
+            <a:off x="873124" y="4111624"/>
+            <a:ext cx="15875" cy="31750"/>
+          </a:xfrm>
+          <a:prstGeom prst="line">
+            <a:avLst/>
+          </a:prstGeom>
+          <a:ln w="7937">
+            <a:solidFill>
+              <a:srgbClr val="1F2937"/>
+            </a:solidFill>
+          </a:ln>
+          <a:effectLst/>
+        </p:spPr>
+        <p:style>
+          <a:lnRef idx="2">
+            <a:schemeClr val="accent1"/>
+          </a:lnRef>
+          <a:fillRef idx="0">
+            <a:schemeClr val="accent1"/>
+          </a:fillRef>
+          <a:effectRef idx="0">
+            <a:schemeClr val="accent1"/>
+          </a:effectRef>
+          <a:fontRef idx="minor">
+            <a:schemeClr val="tx1"/>
+          </a:fontRef>
+        </p:style>
+      </p:cxnSp>
+      <p:sp>
+        <p:nvSpPr>
+          <p:cNvPr id="68" name="l1_t" descr="Editable text; source id l1_t"/>
           <p:cNvSpPr txBox="1"/>
           <p:nvPr/>
         </p:nvSpPr>
         <p:spPr>
           <a:xfrm>
-            <a:off x="539749" y="1444624"/>
-            <a:ext cx="1666874" cy="261937"/>
+            <a:off x="1079499" y="3921124"/>
+            <a:ext cx="2063749" cy="349249"/>
           </a:xfrm>
           <a:prstGeom prst="rect">
             <a:avLst/>
@@ -4415,9 +6609,9 @@
           </a:bodyPr>
           <a:lstStyle/>
           <a:p>
-            <a:pPr algn="ctr" fontAlgn="base">
+            <a:pPr algn="l" fontAlgn="base">
               <a:lnSpc>
-                <a:spcPts val="1999"/>
+                <a:spcPts val="2265"/>
               </a:lnSpc>
               <a:spcBef>
                 <a:spcPts val="0"/>
@@ -4425,9 +6619,9 @@
               <a:spcAft>
                 <a:spcPts val="0"/>
               </a:spcAft>
-              <a:defRPr sz="1366" b="1" i="0" lang="zh-CN" dirty="0">
+              <a:defRPr sz="1562" b="1" i="0" lang="zh-CN" dirty="0">
                 <a:solidFill>
-                  <a:srgbClr val="2B3E57"/>
+                  <a:srgbClr val="0F4F58"/>
                 </a:solidFill>
                 <a:latin typeface="Noto Sans CJK SC"/>
                 <a:ea typeface="Noto Sans CJK SC"/>
@@ -4435,33 +6629,33 @@
               </a:defRPr>
             </a:pPr>
             <a:r>
-              <a:rPr sz="1366" b="1" i="0" lang="zh-CN" dirty="0">
+              <a:rPr sz="1562" b="1" i="0" lang="zh-CN" dirty="0">
                 <a:solidFill>
-                  <a:srgbClr val="2B3E57"/>
+                  <a:srgbClr val="0F4F58"/>
                 </a:solidFill>
                 <a:latin typeface="Noto Sans CJK SC"/>
                 <a:ea typeface="Noto Sans CJK SC"/>
                 <a:cs typeface="Noto Sans CJK SC"/>
               </a:rPr>
-              <a:t>文献依据</a:t>
+              <a:t>固相成相</a:t>
             </a:r>
           </a:p>
         </p:txBody>
       </p:sp>
       <p:sp>
         <p:nvSpPr>
-          <p:cNvPr id="21" name="c1k_t0" descr="Editable shape; source id c1k_t0"/>
+          <p:cNvPr id="69" name="l1r_t0" descr="Editable shape; source id l1r_t0"/>
           <p:cNvSpPr/>
           <p:nvPr/>
         </p:nvSpPr>
         <p:spPr>
           <a:xfrm>
-            <a:off x="539749" y="1785937"/>
-            <a:ext cx="1666874" cy="571499"/>
+            <a:off x="650874" y="4381499"/>
+            <a:ext cx="769937" cy="396874"/>
           </a:xfrm>
           <a:prstGeom prst="roundRect">
             <a:avLst>
-              <a:gd name="adj" fmla="val 8333"/>
+              <a:gd name="adj" fmla="val 12000"/>
             </a:avLst>
           </a:prstGeom>
           <a:solidFill>
@@ -4498,14 +6692,14 @@
       </p:sp>
       <p:sp>
         <p:nvSpPr>
-          <p:cNvPr id="22" name="c1k_t0_t" descr="Editable text; source id c1k_t0_t"/>
+          <p:cNvPr id="70" name="l1r_t0_t" descr="Editable text; source id l1r_t0_t"/>
           <p:cNvSpPr txBox="1"/>
           <p:nvPr/>
         </p:nvSpPr>
         <p:spPr>
           <a:xfrm>
-            <a:off x="595312" y="1817687"/>
-            <a:ext cx="1555749" cy="507999"/>
+            <a:off x="706437" y="4413249"/>
+            <a:ext cx="658812" cy="333374"/>
           </a:xfrm>
           <a:prstGeom prst="rect">
             <a:avLst/>
@@ -4521,7 +6715,7 @@
           <a:p>
             <a:pPr algn="ctr" fontAlgn="base">
               <a:lnSpc>
-                <a:spcPts val="1562"/>
+                <a:spcPts val="1734"/>
               </a:lnSpc>
               <a:spcBef>
                 <a:spcPts val="0"/>
@@ -4529,1114 +6723,7 @@
               <a:spcAft>
                 <a:spcPts val="0"/>
               </a:spcAft>
-              <a:defRPr sz="1074" b="0" i="0" lang="zh-CN" dirty="0">
-                <a:solidFill>
-                  <a:srgbClr val="3F4854"/>
-                </a:solidFill>
-                <a:latin typeface="DejaVu Sans"/>
-                <a:ea typeface="DejaVu Sans"/>
-                <a:cs typeface="DejaVu Sans"/>
-              </a:defRPr>
-            </a:pPr>
-            <a:r>
-              <a:rPr sz="1074" b="0" i="0" lang="zh-CN" dirty="0">
-                <a:solidFill>
-                  <a:srgbClr val="3F4854"/>
-                </a:solidFill>
-                <a:latin typeface="DejaVu Sans"/>
-                <a:ea typeface="DejaVu Sans"/>
-                <a:cs typeface="DejaVu Sans"/>
-              </a:rPr>
-              <a:t>Ba–Y–Si–O </a:t>
-            </a:r>
-            <a:r>
-              <a:rPr sz="1074" b="0" i="0" lang="zh-CN" dirty="0">
-                <a:solidFill>
-                  <a:srgbClr val="3F4854"/>
-                </a:solidFill>
-                <a:latin typeface="Noto Sans CJK SC"/>
-                <a:ea typeface="Noto Sans CJK SC"/>
-                <a:cs typeface="Noto Sans CJK SC"/>
-              </a:rPr>
-              <a:t>谱系</a:t>
-            </a:r>
-          </a:p>
-        </p:txBody>
-      </p:sp>
-      <p:sp>
-        <p:nvSpPr>
-          <p:cNvPr id="23" name="c1k_t1" descr="Editable shape; source id c1k_t1"/>
-          <p:cNvSpPr/>
-          <p:nvPr/>
-        </p:nvSpPr>
-        <p:spPr>
-          <a:xfrm>
-            <a:off x="539749" y="2452687"/>
-            <a:ext cx="1666874" cy="571499"/>
-          </a:xfrm>
-          <a:prstGeom prst="roundRect">
-            <a:avLst>
-              <a:gd name="adj" fmla="val 8333"/>
-            </a:avLst>
-          </a:prstGeom>
-          <a:solidFill>
-            <a:srgbClr val="F7F9FB"/>
-          </a:solidFill>
-          <a:ln w="9524">
-            <a:solidFill>
-              <a:srgbClr val="CBD3DA"/>
-            </a:solidFill>
-          </a:ln>
-          <a:effectLst/>
-        </p:spPr>
-        <p:style>
-          <a:lnRef idx="1">
-            <a:schemeClr val="accent1"/>
-          </a:lnRef>
-          <a:fillRef idx="3">
-            <a:schemeClr val="accent1"/>
-          </a:fillRef>
-          <a:effectRef idx="0">
-            <a:schemeClr val="accent1"/>
-          </a:effectRef>
-          <a:fontRef idx="minor">
-            <a:schemeClr val="lt1"/>
-          </a:fontRef>
-        </p:style>
-        <p:txBody>
-          <a:bodyPr rtlCol="0" anchor="ctr"/>
-          <a:lstStyle/>
-          <a:p>
-            <a:pPr algn="ctr"/>
-          </a:p>
-        </p:txBody>
-      </p:sp>
-      <p:sp>
-        <p:nvSpPr>
-          <p:cNvPr id="24" name="c1k_t1_t" descr="Editable text; source id c1k_t1_t"/>
-          <p:cNvSpPr txBox="1"/>
-          <p:nvPr/>
-        </p:nvSpPr>
-        <p:spPr>
-          <a:xfrm>
-            <a:off x="595312" y="2484437"/>
-            <a:ext cx="1555749" cy="507999"/>
-          </a:xfrm>
-          <a:prstGeom prst="rect">
-            <a:avLst/>
-          </a:prstGeom>
-          <a:noFill/>
-          <a:effectLst/>
-        </p:spPr>
-        <p:txBody>
-          <a:bodyPr wrap="none" anchor="ctr" tIns="0" rIns="0" bIns="0" lIns="0" anchorCtr="0" vertOverflow="overflow">
-            <a:noAutofit/>
-          </a:bodyPr>
-          <a:lstStyle/>
-          <a:p>
-            <a:pPr algn="ctr" fontAlgn="base">
-              <a:lnSpc>
-                <a:spcPts val="1562"/>
-              </a:lnSpc>
-              <a:spcBef>
-                <a:spcPts val="0"/>
-              </a:spcBef>
-              <a:spcAft>
-                <a:spcPts val="0"/>
-              </a:spcAft>
-              <a:defRPr sz="1074" b="0" i="0" lang="zh-CN" dirty="0">
-                <a:solidFill>
-                  <a:srgbClr val="3F4854"/>
-                </a:solidFill>
-                <a:latin typeface="DejaVu Sans"/>
-                <a:ea typeface="DejaVu Sans"/>
-                <a:cs typeface="DejaVu Sans"/>
-              </a:defRPr>
-            </a:pPr>
-            <a:r>
-              <a:rPr sz="1074" b="0" i="0" lang="zh-CN" dirty="0">
-                <a:solidFill>
-                  <a:srgbClr val="3F4854"/>
-                </a:solidFill>
-                <a:latin typeface="DejaVu Sans"/>
-                <a:ea typeface="DejaVu Sans"/>
-                <a:cs typeface="DejaVu Sans"/>
-              </a:rPr>
-              <a:t>Ba–Zn–Si–O </a:t>
-            </a:r>
-            <a:r>
-              <a:rPr sz="1074" b="0" i="0" lang="zh-CN" dirty="0">
-                <a:solidFill>
-                  <a:srgbClr val="3F4854"/>
-                </a:solidFill>
-                <a:latin typeface="Noto Sans CJK SC"/>
-                <a:ea typeface="Noto Sans CJK SC"/>
-                <a:cs typeface="Noto Sans CJK SC"/>
-              </a:rPr>
-              <a:t>结构近邻</a:t>
-            </a:r>
-          </a:p>
-        </p:txBody>
-      </p:sp>
-      <p:sp>
-        <p:nvSpPr>
-          <p:cNvPr id="25" name="c1k_t2" descr="Editable shape; source id c1k_t2"/>
-          <p:cNvSpPr/>
-          <p:nvPr/>
-        </p:nvSpPr>
-        <p:spPr>
-          <a:xfrm>
-            <a:off x="539749" y="3127374"/>
-            <a:ext cx="1666874" cy="571499"/>
-          </a:xfrm>
-          <a:prstGeom prst="roundRect">
-            <a:avLst>
-              <a:gd name="adj" fmla="val 8333"/>
-            </a:avLst>
-          </a:prstGeom>
-          <a:solidFill>
-            <a:srgbClr val="F7F9FB"/>
-          </a:solidFill>
-          <a:ln w="9524">
-            <a:solidFill>
-              <a:srgbClr val="CBD3DA"/>
-            </a:solidFill>
-          </a:ln>
-          <a:effectLst/>
-        </p:spPr>
-        <p:style>
-          <a:lnRef idx="1">
-            <a:schemeClr val="accent1"/>
-          </a:lnRef>
-          <a:fillRef idx="3">
-            <a:schemeClr val="accent1"/>
-          </a:fillRef>
-          <a:effectRef idx="0">
-            <a:schemeClr val="accent1"/>
-          </a:effectRef>
-          <a:fontRef idx="minor">
-            <a:schemeClr val="lt1"/>
-          </a:fontRef>
-        </p:style>
-        <p:txBody>
-          <a:bodyPr rtlCol="0" anchor="ctr"/>
-          <a:lstStyle/>
-          <a:p>
-            <a:pPr algn="ctr"/>
-          </a:p>
-        </p:txBody>
-      </p:sp>
-      <p:sp>
-        <p:nvSpPr>
-          <p:cNvPr id="26" name="c1k_t2_t" descr="Editable text; source id c1k_t2_t"/>
-          <p:cNvSpPr txBox="1"/>
-          <p:nvPr/>
-        </p:nvSpPr>
-        <p:spPr>
-          <a:xfrm>
-            <a:off x="595312" y="3159124"/>
-            <a:ext cx="1555749" cy="507999"/>
-          </a:xfrm>
-          <a:prstGeom prst="rect">
-            <a:avLst/>
-          </a:prstGeom>
-          <a:noFill/>
-          <a:effectLst/>
-        </p:spPr>
-        <p:txBody>
-          <a:bodyPr wrap="none" anchor="ctr" tIns="0" rIns="0" bIns="0" lIns="0" anchorCtr="0" vertOverflow="overflow">
-            <a:noAutofit/>
-          </a:bodyPr>
-          <a:lstStyle/>
-          <a:p>
-            <a:pPr algn="ctr" fontAlgn="base">
-              <a:lnSpc>
-                <a:spcPts val="1562"/>
-              </a:lnSpc>
-              <a:spcBef>
-                <a:spcPts val="0"/>
-              </a:spcBef>
-              <a:spcAft>
-                <a:spcPts val="0"/>
-              </a:spcAft>
-              <a:defRPr sz="1074" b="0" i="0" lang="zh-CN" dirty="0">
-                <a:solidFill>
-                  <a:srgbClr val="3F4854"/>
-                </a:solidFill>
-                <a:latin typeface="DejaVu Sans"/>
-                <a:ea typeface="DejaVu Sans"/>
-                <a:cs typeface="DejaVu Sans"/>
-              </a:defRPr>
-            </a:pPr>
-            <a:r>
-              <a:rPr sz="1074" b="0" i="0" lang="zh-CN" dirty="0">
-                <a:solidFill>
-                  <a:srgbClr val="3F4854"/>
-                </a:solidFill>
-                <a:latin typeface="DejaVu Sans"/>
-                <a:ea typeface="DejaVu Sans"/>
-                <a:cs typeface="DejaVu Sans"/>
-              </a:rPr>
-              <a:t>Y–Si–O </a:t>
-            </a:r>
-            <a:r>
-              <a:rPr sz="1074" b="0" i="0" lang="zh-CN" dirty="0">
-                <a:solidFill>
-                  <a:srgbClr val="3F4854"/>
-                </a:solidFill>
-                <a:latin typeface="Noto Sans CJK SC"/>
-                <a:ea typeface="Noto Sans CJK SC"/>
-                <a:cs typeface="Noto Sans CJK SC"/>
-              </a:rPr>
-              <a:t>工艺参照</a:t>
-            </a:r>
-          </a:p>
-        </p:txBody>
-      </p:sp>
-      <p:sp>
-        <p:nvSpPr>
-          <p:cNvPr id="27" name="c2" descr="Editable shape; source id c2"/>
-          <p:cNvSpPr/>
-          <p:nvPr/>
-        </p:nvSpPr>
-        <p:spPr>
-          <a:xfrm>
-            <a:off x="2619374" y="888999"/>
-            <a:ext cx="1920874" cy="2936874"/>
-          </a:xfrm>
-          <a:prstGeom prst="roundRect">
-            <a:avLst>
-              <a:gd name="adj" fmla="val 3719"/>
-            </a:avLst>
-          </a:prstGeom>
-          <a:solidFill>
-            <a:srgbClr val="FFFFFF"/>
-          </a:solidFill>
-          <a:ln w="11112">
-            <a:solidFill>
-              <a:srgbClr val="5B7592"/>
-            </a:solidFill>
-          </a:ln>
-          <a:effectLst/>
-        </p:spPr>
-        <p:style>
-          <a:lnRef idx="1">
-            <a:schemeClr val="accent1"/>
-          </a:lnRef>
-          <a:fillRef idx="3">
-            <a:schemeClr val="accent1"/>
-          </a:fillRef>
-          <a:effectRef idx="0">
-            <a:schemeClr val="accent1"/>
-          </a:effectRef>
-          <a:fontRef idx="minor">
-            <a:schemeClr val="lt1"/>
-          </a:fontRef>
-        </p:style>
-        <p:txBody>
-          <a:bodyPr rtlCol="0" anchor="ctr"/>
-          <a:lstStyle/>
-          <a:p>
-            <a:pPr algn="ctr"/>
-          </a:p>
-        </p:txBody>
-      </p:sp>
-      <p:sp>
-        <p:nvSpPr>
-          <p:cNvPr id="28" name="c2_a" descr="Editable shape; source id c2_a"/>
-          <p:cNvSpPr/>
-          <p:nvPr/>
-        </p:nvSpPr>
-        <p:spPr>
-          <a:xfrm>
-            <a:off x="2619374" y="888999"/>
-            <a:ext cx="1920874" cy="47624"/>
-          </a:xfrm>
-          <a:prstGeom prst="roundRect">
-            <a:avLst>
-              <a:gd name="adj" fmla="val 50000"/>
-            </a:avLst>
-          </a:prstGeom>
-          <a:solidFill>
-            <a:srgbClr val="5B7592"/>
-          </a:solidFill>
-          <a:ln>
-            <a:noFill/>
-          </a:ln>
-          <a:effectLst/>
-        </p:spPr>
-        <p:style>
-          <a:lnRef idx="1">
-            <a:schemeClr val="accent1"/>
-          </a:lnRef>
-          <a:fillRef idx="3">
-            <a:schemeClr val="accent1"/>
-          </a:fillRef>
-          <a:effectRef idx="0">
-            <a:schemeClr val="accent1"/>
-          </a:effectRef>
-          <a:fontRef idx="minor">
-            <a:schemeClr val="lt1"/>
-          </a:fontRef>
-        </p:style>
-        <p:txBody>
-          <a:bodyPr rtlCol="0" anchor="ctr"/>
-          <a:lstStyle/>
-          <a:p>
-            <a:pPr algn="ctr"/>
-          </a:p>
-        </p:txBody>
-      </p:sp>
-      <p:cxnSp>
-        <p:nvCxnSpPr>
-          <p:cNvPr id="29" name="c2_g_h0" descr="Editable line; source id c2_g_h0"/>
-          <p:cNvCxnSpPr/>
-          <p:nvPr/>
-        </p:nvCxnSpPr>
-        <p:spPr>
-          <a:xfrm>
-            <a:off x="3476624" y="1103312"/>
-            <a:ext cx="206375" cy="0"/>
-          </a:xfrm>
-          <a:prstGeom prst="line">
-            <a:avLst/>
-          </a:prstGeom>
-          <a:ln w="7937">
-            <a:solidFill>
-              <a:srgbClr val="1F2937"/>
-            </a:solidFill>
-          </a:ln>
-          <a:effectLst/>
-        </p:spPr>
-        <p:style>
-          <a:lnRef idx="2">
-            <a:schemeClr val="accent1"/>
-          </a:lnRef>
-          <a:fillRef idx="0">
-            <a:schemeClr val="accent1"/>
-          </a:fillRef>
-          <a:effectRef idx="0">
-            <a:schemeClr val="accent1"/>
-          </a:effectRef>
-          <a:fontRef idx="minor">
-            <a:schemeClr val="tx1"/>
-          </a:fontRef>
-        </p:style>
-      </p:cxnSp>
-      <p:cxnSp>
-        <p:nvCxnSpPr>
-          <p:cNvPr id="30" name="c2_g_v0" descr="Editable line; source id c2_g_v0"/>
-          <p:cNvCxnSpPr/>
-          <p:nvPr/>
-        </p:nvCxnSpPr>
-        <p:spPr>
-          <a:xfrm>
-            <a:off x="3476624" y="1103312"/>
-            <a:ext cx="0" cy="206375"/>
-          </a:xfrm>
-          <a:prstGeom prst="line">
-            <a:avLst/>
-          </a:prstGeom>
-          <a:ln w="7937">
-            <a:solidFill>
-              <a:srgbClr val="1F2937"/>
-            </a:solidFill>
-          </a:ln>
-          <a:effectLst/>
-        </p:spPr>
-        <p:style>
-          <a:lnRef idx="2">
-            <a:schemeClr val="accent1"/>
-          </a:lnRef>
-          <a:fillRef idx="0">
-            <a:schemeClr val="accent1"/>
-          </a:fillRef>
-          <a:effectRef idx="0">
-            <a:schemeClr val="accent1"/>
-          </a:effectRef>
-          <a:fontRef idx="minor">
-            <a:schemeClr val="tx1"/>
-          </a:fontRef>
-        </p:style>
-      </p:cxnSp>
-      <p:cxnSp>
-        <p:nvCxnSpPr>
-          <p:cNvPr id="31" name="c2_g_h1" descr="Editable line; source id c2_g_h1"/>
-          <p:cNvCxnSpPr/>
-          <p:nvPr/>
-        </p:nvCxnSpPr>
-        <p:spPr>
-          <a:xfrm>
-            <a:off x="3476624" y="1206499"/>
-            <a:ext cx="206375" cy="0"/>
-          </a:xfrm>
-          <a:prstGeom prst="line">
-            <a:avLst/>
-          </a:prstGeom>
-          <a:ln w="7937">
-            <a:solidFill>
-              <a:srgbClr val="1F2937"/>
-            </a:solidFill>
-          </a:ln>
-          <a:effectLst/>
-        </p:spPr>
-        <p:style>
-          <a:lnRef idx="2">
-            <a:schemeClr val="accent1"/>
-          </a:lnRef>
-          <a:fillRef idx="0">
-            <a:schemeClr val="accent1"/>
-          </a:fillRef>
-          <a:effectRef idx="0">
-            <a:schemeClr val="accent1"/>
-          </a:effectRef>
-          <a:fontRef idx="minor">
-            <a:schemeClr val="tx1"/>
-          </a:fontRef>
-        </p:style>
-      </p:cxnSp>
-      <p:cxnSp>
-        <p:nvCxnSpPr>
-          <p:cNvPr id="32" name="c2_g_v1" descr="Editable line; source id c2_g_v1"/>
-          <p:cNvCxnSpPr/>
-          <p:nvPr/>
-        </p:nvCxnSpPr>
-        <p:spPr>
-          <a:xfrm>
-            <a:off x="3579812" y="1103312"/>
-            <a:ext cx="0" cy="206375"/>
-          </a:xfrm>
-          <a:prstGeom prst="line">
-            <a:avLst/>
-          </a:prstGeom>
-          <a:ln w="7937">
-            <a:solidFill>
-              <a:srgbClr val="1F2937"/>
-            </a:solidFill>
-          </a:ln>
-          <a:effectLst/>
-        </p:spPr>
-        <p:style>
-          <a:lnRef idx="2">
-            <a:schemeClr val="accent1"/>
-          </a:lnRef>
-          <a:fillRef idx="0">
-            <a:schemeClr val="accent1"/>
-          </a:fillRef>
-          <a:effectRef idx="0">
-            <a:schemeClr val="accent1"/>
-          </a:effectRef>
-          <a:fontRef idx="minor">
-            <a:schemeClr val="tx1"/>
-          </a:fontRef>
-        </p:style>
-      </p:cxnSp>
-      <p:cxnSp>
-        <p:nvCxnSpPr>
-          <p:cNvPr id="33" name="c2_g_h2" descr="Editable line; source id c2_g_h2"/>
-          <p:cNvCxnSpPr/>
-          <p:nvPr/>
-        </p:nvCxnSpPr>
-        <p:spPr>
-          <a:xfrm>
-            <a:off x="3476624" y="1309687"/>
-            <a:ext cx="206375" cy="0"/>
-          </a:xfrm>
-          <a:prstGeom prst="line">
-            <a:avLst/>
-          </a:prstGeom>
-          <a:ln w="7937">
-            <a:solidFill>
-              <a:srgbClr val="1F2937"/>
-            </a:solidFill>
-          </a:ln>
-          <a:effectLst/>
-        </p:spPr>
-        <p:style>
-          <a:lnRef idx="2">
-            <a:schemeClr val="accent1"/>
-          </a:lnRef>
-          <a:fillRef idx="0">
-            <a:schemeClr val="accent1"/>
-          </a:fillRef>
-          <a:effectRef idx="0">
-            <a:schemeClr val="accent1"/>
-          </a:effectRef>
-          <a:fontRef idx="minor">
-            <a:schemeClr val="tx1"/>
-          </a:fontRef>
-        </p:style>
-      </p:cxnSp>
-      <p:cxnSp>
-        <p:nvCxnSpPr>
-          <p:cNvPr id="34" name="c2_g_v2" descr="Editable line; source id c2_g_v2"/>
-          <p:cNvCxnSpPr/>
-          <p:nvPr/>
-        </p:nvCxnSpPr>
-        <p:spPr>
-          <a:xfrm>
-            <a:off x="3682999" y="1103312"/>
-            <a:ext cx="0" cy="206375"/>
-          </a:xfrm>
-          <a:prstGeom prst="line">
-            <a:avLst/>
-          </a:prstGeom>
-          <a:ln w="7937">
-            <a:solidFill>
-              <a:srgbClr val="1F2937"/>
-            </a:solidFill>
-          </a:ln>
-          <a:effectLst/>
-        </p:spPr>
-        <p:style>
-          <a:lnRef idx="2">
-            <a:schemeClr val="accent1"/>
-          </a:lnRef>
-          <a:fillRef idx="0">
-            <a:schemeClr val="accent1"/>
-          </a:fillRef>
-          <a:effectRef idx="0">
-            <a:schemeClr val="accent1"/>
-          </a:effectRef>
-          <a:fontRef idx="minor">
-            <a:schemeClr val="tx1"/>
-          </a:fontRef>
-        </p:style>
-      </p:cxnSp>
-      <p:sp>
-        <p:nvSpPr>
-          <p:cNvPr id="35" name="c2_g_d00" descr="Editable shape; source id c2_g_d00"/>
-          <p:cNvSpPr/>
-          <p:nvPr/>
-        </p:nvSpPr>
-        <p:spPr>
-          <a:xfrm>
-            <a:off x="3452812" y="1079499"/>
-            <a:ext cx="47624" cy="47624"/>
-          </a:xfrm>
-          <a:prstGeom prst="ellipse">
-            <a:avLst/>
-          </a:prstGeom>
-          <a:solidFill>
-            <a:srgbClr val="FFFFFF"/>
-          </a:solidFill>
-          <a:ln>
-            <a:noFill/>
-          </a:ln>
-          <a:effectLst/>
-        </p:spPr>
-        <p:style>
-          <a:lnRef idx="1">
-            <a:schemeClr val="accent1"/>
-          </a:lnRef>
-          <a:fillRef idx="3">
-            <a:schemeClr val="accent1"/>
-          </a:fillRef>
-          <a:effectRef idx="0">
-            <a:schemeClr val="accent1"/>
-          </a:effectRef>
-          <a:fontRef idx="minor">
-            <a:schemeClr val="lt1"/>
-          </a:fontRef>
-        </p:style>
-        <p:txBody>
-          <a:bodyPr rtlCol="0" anchor="ctr"/>
-          <a:lstStyle/>
-          <a:p>
-            <a:pPr algn="ctr"/>
-          </a:p>
-        </p:txBody>
-      </p:sp>
-      <p:sp>
-        <p:nvSpPr>
-          <p:cNvPr id="36" name="c2_g_d01" descr="Editable shape; source id c2_g_d01"/>
-          <p:cNvSpPr/>
-          <p:nvPr/>
-        </p:nvSpPr>
-        <p:spPr>
-          <a:xfrm>
-            <a:off x="3452812" y="1182687"/>
-            <a:ext cx="47624" cy="47624"/>
-          </a:xfrm>
-          <a:prstGeom prst="ellipse">
-            <a:avLst/>
-          </a:prstGeom>
-          <a:solidFill>
-            <a:srgbClr val="FFFFFF"/>
-          </a:solidFill>
-          <a:ln>
-            <a:noFill/>
-          </a:ln>
-          <a:effectLst/>
-        </p:spPr>
-        <p:style>
-          <a:lnRef idx="1">
-            <a:schemeClr val="accent1"/>
-          </a:lnRef>
-          <a:fillRef idx="3">
-            <a:schemeClr val="accent1"/>
-          </a:fillRef>
-          <a:effectRef idx="0">
-            <a:schemeClr val="accent1"/>
-          </a:effectRef>
-          <a:fontRef idx="minor">
-            <a:schemeClr val="lt1"/>
-          </a:fontRef>
-        </p:style>
-        <p:txBody>
-          <a:bodyPr rtlCol="0" anchor="ctr"/>
-          <a:lstStyle/>
-          <a:p>
-            <a:pPr algn="ctr"/>
-          </a:p>
-        </p:txBody>
-      </p:sp>
-      <p:sp>
-        <p:nvSpPr>
-          <p:cNvPr id="37" name="c2_g_d02" descr="Editable shape; source id c2_g_d02"/>
-          <p:cNvSpPr/>
-          <p:nvPr/>
-        </p:nvSpPr>
-        <p:spPr>
-          <a:xfrm>
-            <a:off x="3452812" y="1285874"/>
-            <a:ext cx="47624" cy="47624"/>
-          </a:xfrm>
-          <a:prstGeom prst="ellipse">
-            <a:avLst/>
-          </a:prstGeom>
-          <a:solidFill>
-            <a:srgbClr val="FFFFFF"/>
-          </a:solidFill>
-          <a:ln>
-            <a:noFill/>
-          </a:ln>
-          <a:effectLst/>
-        </p:spPr>
-        <p:style>
-          <a:lnRef idx="1">
-            <a:schemeClr val="accent1"/>
-          </a:lnRef>
-          <a:fillRef idx="3">
-            <a:schemeClr val="accent1"/>
-          </a:fillRef>
-          <a:effectRef idx="0">
-            <a:schemeClr val="accent1"/>
-          </a:effectRef>
-          <a:fontRef idx="minor">
-            <a:schemeClr val="lt1"/>
-          </a:fontRef>
-        </p:style>
-        <p:txBody>
-          <a:bodyPr rtlCol="0" anchor="ctr"/>
-          <a:lstStyle/>
-          <a:p>
-            <a:pPr algn="ctr"/>
-          </a:p>
-        </p:txBody>
-      </p:sp>
-      <p:sp>
-        <p:nvSpPr>
-          <p:cNvPr id="38" name="c2_g_d10" descr="Editable shape; source id c2_g_d10"/>
-          <p:cNvSpPr/>
-          <p:nvPr/>
-        </p:nvSpPr>
-        <p:spPr>
-          <a:xfrm>
-            <a:off x="3555999" y="1079499"/>
-            <a:ext cx="47624" cy="47624"/>
-          </a:xfrm>
-          <a:prstGeom prst="ellipse">
-            <a:avLst/>
-          </a:prstGeom>
-          <a:solidFill>
-            <a:srgbClr val="FFFFFF"/>
-          </a:solidFill>
-          <a:ln>
-            <a:noFill/>
-          </a:ln>
-          <a:effectLst/>
-        </p:spPr>
-        <p:style>
-          <a:lnRef idx="1">
-            <a:schemeClr val="accent1"/>
-          </a:lnRef>
-          <a:fillRef idx="3">
-            <a:schemeClr val="accent1"/>
-          </a:fillRef>
-          <a:effectRef idx="0">
-            <a:schemeClr val="accent1"/>
-          </a:effectRef>
-          <a:fontRef idx="minor">
-            <a:schemeClr val="lt1"/>
-          </a:fontRef>
-        </p:style>
-        <p:txBody>
-          <a:bodyPr rtlCol="0" anchor="ctr"/>
-          <a:lstStyle/>
-          <a:p>
-            <a:pPr algn="ctr"/>
-          </a:p>
-        </p:txBody>
-      </p:sp>
-      <p:sp>
-        <p:nvSpPr>
-          <p:cNvPr id="39" name="c2_g_d11" descr="Editable shape; source id c2_g_d11"/>
-          <p:cNvSpPr/>
-          <p:nvPr/>
-        </p:nvSpPr>
-        <p:spPr>
-          <a:xfrm>
-            <a:off x="3555999" y="1182687"/>
-            <a:ext cx="47624" cy="47624"/>
-          </a:xfrm>
-          <a:prstGeom prst="ellipse">
-            <a:avLst/>
-          </a:prstGeom>
-          <a:solidFill>
-            <a:srgbClr val="1F2937"/>
-          </a:solidFill>
-          <a:ln>
-            <a:noFill/>
-          </a:ln>
-          <a:effectLst/>
-        </p:spPr>
-        <p:style>
-          <a:lnRef idx="1">
-            <a:schemeClr val="accent1"/>
-          </a:lnRef>
-          <a:fillRef idx="3">
-            <a:schemeClr val="accent1"/>
-          </a:fillRef>
-          <a:effectRef idx="0">
-            <a:schemeClr val="accent1"/>
-          </a:effectRef>
-          <a:fontRef idx="minor">
-            <a:schemeClr val="lt1"/>
-          </a:fontRef>
-        </p:style>
-        <p:txBody>
-          <a:bodyPr rtlCol="0" anchor="ctr"/>
-          <a:lstStyle/>
-          <a:p>
-            <a:pPr algn="ctr"/>
-          </a:p>
-        </p:txBody>
-      </p:sp>
-      <p:sp>
-        <p:nvSpPr>
-          <p:cNvPr id="40" name="c2_g_d12" descr="Editable shape; source id c2_g_d12"/>
-          <p:cNvSpPr/>
-          <p:nvPr/>
-        </p:nvSpPr>
-        <p:spPr>
-          <a:xfrm>
-            <a:off x="3555999" y="1285874"/>
-            <a:ext cx="47624" cy="47624"/>
-          </a:xfrm>
-          <a:prstGeom prst="ellipse">
-            <a:avLst/>
-          </a:prstGeom>
-          <a:solidFill>
-            <a:srgbClr val="FFFFFF"/>
-          </a:solidFill>
-          <a:ln>
-            <a:noFill/>
-          </a:ln>
-          <a:effectLst/>
-        </p:spPr>
-        <p:style>
-          <a:lnRef idx="1">
-            <a:schemeClr val="accent1"/>
-          </a:lnRef>
-          <a:fillRef idx="3">
-            <a:schemeClr val="accent1"/>
-          </a:fillRef>
-          <a:effectRef idx="0">
-            <a:schemeClr val="accent1"/>
-          </a:effectRef>
-          <a:fontRef idx="minor">
-            <a:schemeClr val="lt1"/>
-          </a:fontRef>
-        </p:style>
-        <p:txBody>
-          <a:bodyPr rtlCol="0" anchor="ctr"/>
-          <a:lstStyle/>
-          <a:p>
-            <a:pPr algn="ctr"/>
-          </a:p>
-        </p:txBody>
-      </p:sp>
-      <p:sp>
-        <p:nvSpPr>
-          <p:cNvPr id="41" name="c2_g_d20" descr="Editable shape; source id c2_g_d20"/>
-          <p:cNvSpPr/>
-          <p:nvPr/>
-        </p:nvSpPr>
-        <p:spPr>
-          <a:xfrm>
-            <a:off x="3659187" y="1079499"/>
-            <a:ext cx="47624" cy="47624"/>
-          </a:xfrm>
-          <a:prstGeom prst="ellipse">
-            <a:avLst/>
-          </a:prstGeom>
-          <a:solidFill>
-            <a:srgbClr val="FFFFFF"/>
-          </a:solidFill>
-          <a:ln>
-            <a:noFill/>
-          </a:ln>
-          <a:effectLst/>
-        </p:spPr>
-        <p:style>
-          <a:lnRef idx="1">
-            <a:schemeClr val="accent1"/>
-          </a:lnRef>
-          <a:fillRef idx="3">
-            <a:schemeClr val="accent1"/>
-          </a:fillRef>
-          <a:effectRef idx="0">
-            <a:schemeClr val="accent1"/>
-          </a:effectRef>
-          <a:fontRef idx="minor">
-            <a:schemeClr val="lt1"/>
-          </a:fontRef>
-        </p:style>
-        <p:txBody>
-          <a:bodyPr rtlCol="0" anchor="ctr"/>
-          <a:lstStyle/>
-          <a:p>
-            <a:pPr algn="ctr"/>
-          </a:p>
-        </p:txBody>
-      </p:sp>
-      <p:sp>
-        <p:nvSpPr>
-          <p:cNvPr id="42" name="c2_g_d21" descr="Editable shape; source id c2_g_d21"/>
-          <p:cNvSpPr/>
-          <p:nvPr/>
-        </p:nvSpPr>
-        <p:spPr>
-          <a:xfrm>
-            <a:off x="3659187" y="1182687"/>
-            <a:ext cx="47624" cy="47624"/>
-          </a:xfrm>
-          <a:prstGeom prst="ellipse">
-            <a:avLst/>
-          </a:prstGeom>
-          <a:solidFill>
-            <a:srgbClr val="FFFFFF"/>
-          </a:solidFill>
-          <a:ln>
-            <a:noFill/>
-          </a:ln>
-          <a:effectLst/>
-        </p:spPr>
-        <p:style>
-          <a:lnRef idx="1">
-            <a:schemeClr val="accent1"/>
-          </a:lnRef>
-          <a:fillRef idx="3">
-            <a:schemeClr val="accent1"/>
-          </a:fillRef>
-          <a:effectRef idx="0">
-            <a:schemeClr val="accent1"/>
-          </a:effectRef>
-          <a:fontRef idx="minor">
-            <a:schemeClr val="lt1"/>
-          </a:fontRef>
-        </p:style>
-        <p:txBody>
-          <a:bodyPr rtlCol="0" anchor="ctr"/>
-          <a:lstStyle/>
-          <a:p>
-            <a:pPr algn="ctr"/>
-          </a:p>
-        </p:txBody>
-      </p:sp>
-      <p:sp>
-        <p:nvSpPr>
-          <p:cNvPr id="43" name="c2_g_d22" descr="Editable shape; source id c2_g_d22"/>
-          <p:cNvSpPr/>
-          <p:nvPr/>
-        </p:nvSpPr>
-        <p:spPr>
-          <a:xfrm>
-            <a:off x="3659187" y="1285874"/>
-            <a:ext cx="47624" cy="47624"/>
-          </a:xfrm>
-          <a:prstGeom prst="ellipse">
-            <a:avLst/>
-          </a:prstGeom>
-          <a:solidFill>
-            <a:srgbClr val="FFFFFF"/>
-          </a:solidFill>
-          <a:ln>
-            <a:noFill/>
-          </a:ln>
-          <a:effectLst/>
-        </p:spPr>
-        <p:style>
-          <a:lnRef idx="1">
-            <a:schemeClr val="accent1"/>
-          </a:lnRef>
-          <a:fillRef idx="3">
-            <a:schemeClr val="accent1"/>
-          </a:fillRef>
-          <a:effectRef idx="0">
-            <a:schemeClr val="accent1"/>
-          </a:effectRef>
-          <a:fontRef idx="minor">
-            <a:schemeClr val="lt1"/>
-          </a:fontRef>
-        </p:style>
-        <p:txBody>
-          <a:bodyPr rtlCol="0" anchor="ctr"/>
-          <a:lstStyle/>
-          <a:p>
-            <a:pPr algn="ctr"/>
-          </a:p>
-        </p:txBody>
-      </p:sp>
-      <p:sp>
-        <p:nvSpPr>
-          <p:cNvPr id="44" name="c2_t" descr="Editable text; source id c2_t"/>
-          <p:cNvSpPr txBox="1"/>
-          <p:nvPr/>
-        </p:nvSpPr>
-        <p:spPr>
-          <a:xfrm>
-            <a:off x="2746374" y="1444624"/>
-            <a:ext cx="1666874" cy="261937"/>
-          </a:xfrm>
-          <a:prstGeom prst="rect">
-            <a:avLst/>
-          </a:prstGeom>
-          <a:noFill/>
-          <a:effectLst/>
-        </p:spPr>
-        <p:txBody>
-          <a:bodyPr wrap="none" anchor="ctr" tIns="0" rIns="0" bIns="0" lIns="0" anchorCtr="0" vertOverflow="overflow">
-            <a:noAutofit/>
-          </a:bodyPr>
-          <a:lstStyle/>
-          <a:p>
-            <a:pPr algn="ctr" fontAlgn="base">
-              <a:lnSpc>
-                <a:spcPts val="1999"/>
-              </a:lnSpc>
-              <a:spcBef>
-                <a:spcPts val="0"/>
-              </a:spcBef>
-              <a:spcAft>
-                <a:spcPts val="0"/>
-              </a:spcAft>
-              <a:defRPr sz="1366" b="1" i="0" lang="zh-CN" dirty="0">
-                <a:solidFill>
-                  <a:srgbClr val="2B3E57"/>
-                </a:solidFill>
-                <a:latin typeface="Noto Sans CJK SC"/>
-                <a:ea typeface="Noto Sans CJK SC"/>
-                <a:cs typeface="Noto Sans CJK SC"/>
-              </a:defRPr>
-            </a:pPr>
-            <a:r>
-              <a:rPr sz="1366" b="1" i="0" lang="zh-CN" dirty="0">
-                <a:solidFill>
-                  <a:srgbClr val="2B3E57"/>
-                </a:solidFill>
-                <a:latin typeface="Noto Sans CJK SC"/>
-                <a:ea typeface="Noto Sans CJK SC"/>
-                <a:cs typeface="Noto Sans CJK SC"/>
-              </a:rPr>
-              <a:t>结构假设</a:t>
-            </a:r>
-          </a:p>
-        </p:txBody>
-      </p:sp>
-      <p:sp>
-        <p:nvSpPr>
-          <p:cNvPr id="45" name="c2k_t0" descr="Editable shape; source id c2k_t0"/>
-          <p:cNvSpPr/>
-          <p:nvPr/>
-        </p:nvSpPr>
-        <p:spPr>
-          <a:xfrm>
-            <a:off x="2746374" y="1785937"/>
-            <a:ext cx="1666874" cy="571499"/>
-          </a:xfrm>
-          <a:prstGeom prst="roundRect">
-            <a:avLst>
-              <a:gd name="adj" fmla="val 8333"/>
-            </a:avLst>
-          </a:prstGeom>
-          <a:solidFill>
-            <a:srgbClr val="F7F9FB"/>
-          </a:solidFill>
-          <a:ln w="9524">
-            <a:solidFill>
-              <a:srgbClr val="CBD3DA"/>
-            </a:solidFill>
-          </a:ln>
-          <a:effectLst/>
-        </p:spPr>
-        <p:style>
-          <a:lnRef idx="1">
-            <a:schemeClr val="accent1"/>
-          </a:lnRef>
-          <a:fillRef idx="3">
-            <a:schemeClr val="accent1"/>
-          </a:fillRef>
-          <a:effectRef idx="0">
-            <a:schemeClr val="accent1"/>
-          </a:effectRef>
-          <a:fontRef idx="minor">
-            <a:schemeClr val="lt1"/>
-          </a:fontRef>
-        </p:style>
-        <p:txBody>
-          <a:bodyPr rtlCol="0" anchor="ctr"/>
-          <a:lstStyle/>
-          <a:p>
-            <a:pPr algn="ctr"/>
-          </a:p>
-        </p:txBody>
-      </p:sp>
-      <p:sp>
-        <p:nvSpPr>
-          <p:cNvPr id="46" name="c2k_t0_t" descr="Editable text; source id c2k_t0_t"/>
-          <p:cNvSpPr txBox="1"/>
-          <p:nvPr/>
-        </p:nvSpPr>
-        <p:spPr>
-          <a:xfrm>
-            <a:off x="2801937" y="1817687"/>
-            <a:ext cx="1555749" cy="507999"/>
-          </a:xfrm>
-          <a:prstGeom prst="rect">
-            <a:avLst/>
-          </a:prstGeom>
-          <a:noFill/>
-          <a:effectLst/>
-        </p:spPr>
-        <p:txBody>
-          <a:bodyPr wrap="none" anchor="ctr" tIns="0" rIns="0" bIns="0" lIns="0" anchorCtr="0" vertOverflow="overflow">
-            <a:noAutofit/>
-          </a:bodyPr>
-          <a:lstStyle/>
-          <a:p>
-            <a:pPr algn="ctr" fontAlgn="base">
-              <a:lnSpc>
-                <a:spcPts val="1562"/>
-              </a:lnSpc>
-              <a:spcBef>
-                <a:spcPts val="0"/>
-              </a:spcBef>
-              <a:spcAft>
-                <a:spcPts val="0"/>
-              </a:spcAft>
-              <a:defRPr sz="1074" b="0" i="0" lang="zh-CN" dirty="0">
+              <a:defRPr sz="1187" b="0" i="0" lang="zh-CN" dirty="0">
                 <a:solidFill>
                   <a:srgbClr val="3F4854"/>
                 </a:solidFill>
@@ -5646,7 +6733,7 @@
               </a:defRPr>
             </a:pPr>
             <a:r>
-              <a:rPr sz="1074" b="0" i="0" lang="zh-CN" dirty="0">
+              <a:rPr sz="1187" b="0" i="0" lang="zh-CN" dirty="0">
                 <a:solidFill>
                   <a:srgbClr val="3F4854"/>
                 </a:solidFill>
@@ -5654,25 +6741,25 @@
                 <a:ea typeface="Noto Sans CJK SC"/>
                 <a:cs typeface="Noto Sans CJK SC"/>
               </a:rPr>
-              <a:t>局部组成网格</a:t>
+              <a:t>分段煅烧</a:t>
             </a:r>
           </a:p>
         </p:txBody>
       </p:sp>
       <p:sp>
         <p:nvSpPr>
-          <p:cNvPr id="47" name="c2k_t1" descr="Editable shape; source id c2k_t1"/>
+          <p:cNvPr id="71" name="l1r_t1" descr="Editable shape; source id l1r_t1"/>
           <p:cNvSpPr/>
           <p:nvPr/>
         </p:nvSpPr>
         <p:spPr>
           <a:xfrm>
-            <a:off x="2746374" y="2452687"/>
-            <a:ext cx="1666874" cy="571499"/>
+            <a:off x="1579562" y="4381499"/>
+            <a:ext cx="769937" cy="396874"/>
           </a:xfrm>
           <a:prstGeom prst="roundRect">
             <a:avLst>
-              <a:gd name="adj" fmla="val 8333"/>
+              <a:gd name="adj" fmla="val 12000"/>
             </a:avLst>
           </a:prstGeom>
           <a:solidFill>
@@ -5709,14 +6796,14 @@
       </p:sp>
       <p:sp>
         <p:nvSpPr>
-          <p:cNvPr id="48" name="c2k_t1_t" descr="Editable text; source id c2k_t1_t"/>
+          <p:cNvPr id="72" name="l1r_t1_t" descr="Editable text; source id l1r_t1_t"/>
           <p:cNvSpPr txBox="1"/>
           <p:nvPr/>
         </p:nvSpPr>
         <p:spPr>
           <a:xfrm>
-            <a:off x="2801937" y="2484437"/>
-            <a:ext cx="1555749" cy="507999"/>
+            <a:off x="1635124" y="4413249"/>
+            <a:ext cx="658812" cy="333374"/>
           </a:xfrm>
           <a:prstGeom prst="rect">
             <a:avLst/>
@@ -5732,7 +6819,7 @@
           <a:p>
             <a:pPr algn="ctr" fontAlgn="base">
               <a:lnSpc>
-                <a:spcPts val="1562"/>
+                <a:spcPts val="1734"/>
               </a:lnSpc>
               <a:spcBef>
                 <a:spcPts val="0"/>
@@ -5740,122 +6827,7 @@
               <a:spcAft>
                 <a:spcPts val="0"/>
               </a:spcAft>
-              <a:defRPr sz="1074" b="0" i="0" lang="zh-CN" dirty="0">
-                <a:solidFill>
-                  <a:srgbClr val="3F4854"/>
-                </a:solidFill>
-                <a:latin typeface="DejaVu Sans"/>
-                <a:ea typeface="DejaVu Sans"/>
-                <a:cs typeface="DejaVu Sans"/>
-              </a:defRPr>
-            </a:pPr>
-            <a:r>
-              <a:rPr sz="1074" b="0" i="0" lang="zh-CN" dirty="0">
-                <a:solidFill>
-                  <a:srgbClr val="3F4854"/>
-                </a:solidFill>
-                <a:latin typeface="DejaVu Sans"/>
-                <a:ea typeface="DejaVu Sans"/>
-                <a:cs typeface="DejaVu Sans"/>
-              </a:rPr>
-              <a:t>Zn–Y–</a:t>
-            </a:r>
-            <a:r>
-              <a:rPr sz="1074" b="0" i="0" lang="zh-CN" dirty="0">
-                <a:solidFill>
-                  <a:srgbClr val="3F4854"/>
-                </a:solidFill>
-                <a:latin typeface="Noto Sans CJK SC"/>
-                <a:ea typeface="Noto Sans CJK SC"/>
-                <a:cs typeface="Noto Sans CJK SC"/>
-              </a:rPr>
-              <a:t>氧计量耦合</a:t>
-            </a:r>
-          </a:p>
-        </p:txBody>
-      </p:sp>
-      <p:sp>
-        <p:nvSpPr>
-          <p:cNvPr id="49" name="c2k_t2" descr="Editable shape; source id c2k_t2"/>
-          <p:cNvSpPr/>
-          <p:nvPr/>
-        </p:nvSpPr>
-        <p:spPr>
-          <a:xfrm>
-            <a:off x="2746374" y="3127374"/>
-            <a:ext cx="1666874" cy="571499"/>
-          </a:xfrm>
-          <a:prstGeom prst="roundRect">
-            <a:avLst>
-              <a:gd name="adj" fmla="val 8333"/>
-            </a:avLst>
-          </a:prstGeom>
-          <a:solidFill>
-            <a:srgbClr val="F7F9FB"/>
-          </a:solidFill>
-          <a:ln w="9524">
-            <a:solidFill>
-              <a:srgbClr val="CBD3DA"/>
-            </a:solidFill>
-          </a:ln>
-          <a:effectLst/>
-        </p:spPr>
-        <p:style>
-          <a:lnRef idx="1">
-            <a:schemeClr val="accent1"/>
-          </a:lnRef>
-          <a:fillRef idx="3">
-            <a:schemeClr val="accent1"/>
-          </a:fillRef>
-          <a:effectRef idx="0">
-            <a:schemeClr val="accent1"/>
-          </a:effectRef>
-          <a:fontRef idx="minor">
-            <a:schemeClr val="lt1"/>
-          </a:fontRef>
-        </p:style>
-        <p:txBody>
-          <a:bodyPr rtlCol="0" anchor="ctr"/>
-          <a:lstStyle/>
-          <a:p>
-            <a:pPr algn="ctr"/>
-          </a:p>
-        </p:txBody>
-      </p:sp>
-      <p:sp>
-        <p:nvSpPr>
-          <p:cNvPr id="50" name="c2k_t2_t" descr="Editable text; source id c2k_t2_t"/>
-          <p:cNvSpPr txBox="1"/>
-          <p:nvPr/>
-        </p:nvSpPr>
-        <p:spPr>
-          <a:xfrm>
-            <a:off x="2801937" y="3159124"/>
-            <a:ext cx="1555749" cy="507999"/>
-          </a:xfrm>
-          <a:prstGeom prst="rect">
-            <a:avLst/>
-          </a:prstGeom>
-          <a:noFill/>
-          <a:effectLst/>
-        </p:spPr>
-        <p:txBody>
-          <a:bodyPr wrap="none" anchor="ctr" tIns="0" rIns="0" bIns="0" lIns="0" anchorCtr="0" vertOverflow="overflow">
-            <a:noAutofit/>
-          </a:bodyPr>
-          <a:lstStyle/>
-          <a:p>
-            <a:pPr algn="ctr" fontAlgn="base">
-              <a:lnSpc>
-                <a:spcPts val="1562"/>
-              </a:lnSpc>
-              <a:spcBef>
-                <a:spcPts val="0"/>
-              </a:spcBef>
-              <a:spcAft>
-                <a:spcPts val="0"/>
-              </a:spcAft>
-              <a:defRPr sz="1074" b="0" i="0" lang="zh-CN" dirty="0">
+              <a:defRPr sz="1187" b="0" i="0" lang="zh-CN" dirty="0">
                 <a:solidFill>
                   <a:srgbClr val="3F4854"/>
                 </a:solidFill>
@@ -5865,1339 +6837,7 @@
               </a:defRPr>
             </a:pPr>
             <a:r>
-              <a:rPr sz="1074" b="0" i="0" lang="zh-CN" dirty="0">
-                <a:solidFill>
-                  <a:srgbClr val="3F4854"/>
-                </a:solidFill>
-                <a:latin typeface="Noto Sans CJK SC"/>
-                <a:ea typeface="Noto Sans CJK SC"/>
-                <a:cs typeface="Noto Sans CJK SC"/>
-              </a:rPr>
-              <a:t>竞争相与玻璃区</a:t>
-            </a:r>
-          </a:p>
-        </p:txBody>
-      </p:sp>
-      <p:sp>
-        <p:nvSpPr>
-          <p:cNvPr id="51" name="c3" descr="Editable shape; source id c3"/>
-          <p:cNvSpPr/>
-          <p:nvPr/>
-        </p:nvSpPr>
-        <p:spPr>
-          <a:xfrm>
-            <a:off x="4825999" y="888999"/>
-            <a:ext cx="1920874" cy="2936874"/>
-          </a:xfrm>
-          <a:prstGeom prst="roundRect">
-            <a:avLst>
-              <a:gd name="adj" fmla="val 3719"/>
-            </a:avLst>
-          </a:prstGeom>
-          <a:solidFill>
-            <a:srgbClr val="FFFFFF"/>
-          </a:solidFill>
-          <a:ln w="11112">
-            <a:solidFill>
-              <a:srgbClr val="5B7592"/>
-            </a:solidFill>
-          </a:ln>
-          <a:effectLst/>
-        </p:spPr>
-        <p:style>
-          <a:lnRef idx="1">
-            <a:schemeClr val="accent1"/>
-          </a:lnRef>
-          <a:fillRef idx="3">
-            <a:schemeClr val="accent1"/>
-          </a:fillRef>
-          <a:effectRef idx="0">
-            <a:schemeClr val="accent1"/>
-          </a:effectRef>
-          <a:fontRef idx="minor">
-            <a:schemeClr val="lt1"/>
-          </a:fontRef>
-        </p:style>
-        <p:txBody>
-          <a:bodyPr rtlCol="0" anchor="ctr"/>
-          <a:lstStyle/>
-          <a:p>
-            <a:pPr algn="ctr"/>
-          </a:p>
-        </p:txBody>
-      </p:sp>
-      <p:sp>
-        <p:nvSpPr>
-          <p:cNvPr id="52" name="c3_a" descr="Editable shape; source id c3_a"/>
-          <p:cNvSpPr/>
-          <p:nvPr/>
-        </p:nvSpPr>
-        <p:spPr>
-          <a:xfrm>
-            <a:off x="4825999" y="888999"/>
-            <a:ext cx="1920874" cy="47624"/>
-          </a:xfrm>
-          <a:prstGeom prst="roundRect">
-            <a:avLst>
-              <a:gd name="adj" fmla="val 50000"/>
-            </a:avLst>
-          </a:prstGeom>
-          <a:solidFill>
-            <a:srgbClr val="5B7592"/>
-          </a:solidFill>
-          <a:ln>
-            <a:noFill/>
-          </a:ln>
-          <a:effectLst/>
-        </p:spPr>
-        <p:style>
-          <a:lnRef idx="1">
-            <a:schemeClr val="accent1"/>
-          </a:lnRef>
-          <a:fillRef idx="3">
-            <a:schemeClr val="accent1"/>
-          </a:fillRef>
-          <a:effectRef idx="0">
-            <a:schemeClr val="accent1"/>
-          </a:effectRef>
-          <a:fontRef idx="minor">
-            <a:schemeClr val="lt1"/>
-          </a:fontRef>
-        </p:style>
-        <p:txBody>
-          <a:bodyPr rtlCol="0" anchor="ctr"/>
-          <a:lstStyle/>
-          <a:p>
-            <a:pPr algn="ctr"/>
-          </a:p>
-        </p:txBody>
-      </p:sp>
-      <p:cxnSp>
-        <p:nvCxnSpPr>
-          <p:cNvPr id="53" name="c3_g_f_0" descr="Editable line; source id c3_g_f_0"/>
-          <p:cNvCxnSpPr/>
-          <p:nvPr/>
-        </p:nvCxnSpPr>
-        <p:spPr>
-          <a:xfrm>
-            <a:off x="5667374" y="1103312"/>
-            <a:ext cx="238125" cy="0"/>
-          </a:xfrm>
-          <a:prstGeom prst="line">
-            <a:avLst/>
-          </a:prstGeom>
-          <a:ln w="7937">
-            <a:solidFill>
-              <a:srgbClr val="1F2937"/>
-            </a:solidFill>
-          </a:ln>
-          <a:effectLst/>
-        </p:spPr>
-        <p:style>
-          <a:lnRef idx="2">
-            <a:schemeClr val="accent1"/>
-          </a:lnRef>
-          <a:fillRef idx="0">
-            <a:schemeClr val="accent1"/>
-          </a:fillRef>
-          <a:effectRef idx="0">
-            <a:schemeClr val="accent1"/>
-          </a:effectRef>
-          <a:fontRef idx="minor">
-            <a:schemeClr val="tx1"/>
-          </a:fontRef>
-        </p:style>
-      </p:cxnSp>
-      <p:cxnSp>
-        <p:nvCxnSpPr>
-          <p:cNvPr id="54" name="c3_g_f_1" descr="Editable line; source id c3_g_f_1"/>
-          <p:cNvCxnSpPr/>
-          <p:nvPr/>
-        </p:nvCxnSpPr>
-        <p:spPr>
-          <a:xfrm flipH="1">
-            <a:off x="5810249" y="1103312"/>
-            <a:ext cx="95250" cy="127000"/>
-          </a:xfrm>
-          <a:prstGeom prst="line">
-            <a:avLst/>
-          </a:prstGeom>
-          <a:ln w="7937">
-            <a:solidFill>
-              <a:srgbClr val="1F2937"/>
-            </a:solidFill>
-          </a:ln>
-          <a:effectLst/>
-        </p:spPr>
-        <p:style>
-          <a:lnRef idx="2">
-            <a:schemeClr val="accent1"/>
-          </a:lnRef>
-          <a:fillRef idx="0">
-            <a:schemeClr val="accent1"/>
-          </a:fillRef>
-          <a:effectRef idx="0">
-            <a:schemeClr val="accent1"/>
-          </a:effectRef>
-          <a:fontRef idx="minor">
-            <a:schemeClr val="tx1"/>
-          </a:fontRef>
-        </p:style>
-      </p:cxnSp>
-      <p:cxnSp>
-        <p:nvCxnSpPr>
-          <p:cNvPr id="55" name="c3_g_f_2" descr="Editable line; source id c3_g_f_2"/>
-          <p:cNvCxnSpPr/>
-          <p:nvPr/>
-        </p:nvCxnSpPr>
-        <p:spPr>
-          <a:xfrm>
-            <a:off x="5810249" y="1230312"/>
-            <a:ext cx="0" cy="95250"/>
-          </a:xfrm>
-          <a:prstGeom prst="line">
-            <a:avLst/>
-          </a:prstGeom>
-          <a:ln w="7937">
-            <a:solidFill>
-              <a:srgbClr val="1F2937"/>
-            </a:solidFill>
-          </a:ln>
-          <a:effectLst/>
-        </p:spPr>
-        <p:style>
-          <a:lnRef idx="2">
-            <a:schemeClr val="accent1"/>
-          </a:lnRef>
-          <a:fillRef idx="0">
-            <a:schemeClr val="accent1"/>
-          </a:fillRef>
-          <a:effectRef idx="0">
-            <a:schemeClr val="accent1"/>
-          </a:effectRef>
-          <a:fontRef idx="minor">
-            <a:schemeClr val="tx1"/>
-          </a:fontRef>
-        </p:style>
-      </p:cxnSp>
-      <p:cxnSp>
-        <p:nvCxnSpPr>
-          <p:cNvPr id="56" name="c3_g_f_3" descr="Editable line; source id c3_g_f_3"/>
-          <p:cNvCxnSpPr/>
-          <p:nvPr/>
-        </p:nvCxnSpPr>
-        <p:spPr>
-          <a:xfrm flipH="1">
-            <a:off x="5762624" y="1325562"/>
-            <a:ext cx="47625" cy="0"/>
-          </a:xfrm>
-          <a:prstGeom prst="line">
-            <a:avLst/>
-          </a:prstGeom>
-          <a:ln w="7937">
-            <a:solidFill>
-              <a:srgbClr val="1F2937"/>
-            </a:solidFill>
-          </a:ln>
-          <a:effectLst/>
-        </p:spPr>
-        <p:style>
-          <a:lnRef idx="2">
-            <a:schemeClr val="accent1"/>
-          </a:lnRef>
-          <a:fillRef idx="0">
-            <a:schemeClr val="accent1"/>
-          </a:fillRef>
-          <a:effectRef idx="0">
-            <a:schemeClr val="accent1"/>
-          </a:effectRef>
-          <a:fontRef idx="minor">
-            <a:schemeClr val="tx1"/>
-          </a:fontRef>
-        </p:style>
-      </p:cxnSp>
-      <p:cxnSp>
-        <p:nvCxnSpPr>
-          <p:cNvPr id="57" name="c3_g_f_4" descr="Editable line; source id c3_g_f_4"/>
-          <p:cNvCxnSpPr/>
-          <p:nvPr/>
-        </p:nvCxnSpPr>
-        <p:spPr>
-          <a:xfrm flipV="1">
-            <a:off x="5762624" y="1230312"/>
-            <a:ext cx="0" cy="95250"/>
-          </a:xfrm>
-          <a:prstGeom prst="line">
-            <a:avLst/>
-          </a:prstGeom>
-          <a:ln w="7937">
-            <a:solidFill>
-              <a:srgbClr val="1F2937"/>
-            </a:solidFill>
-          </a:ln>
-          <a:effectLst/>
-        </p:spPr>
-        <p:style>
-          <a:lnRef idx="2">
-            <a:schemeClr val="accent1"/>
-          </a:lnRef>
-          <a:fillRef idx="0">
-            <a:schemeClr val="accent1"/>
-          </a:fillRef>
-          <a:effectRef idx="0">
-            <a:schemeClr val="accent1"/>
-          </a:effectRef>
-          <a:fontRef idx="minor">
-            <a:schemeClr val="tx1"/>
-          </a:fontRef>
-        </p:style>
-      </p:cxnSp>
-      <p:cxnSp>
-        <p:nvCxnSpPr>
-          <p:cNvPr id="58" name="c3_g_f_5" descr="Editable line; source id c3_g_f_5"/>
-          <p:cNvCxnSpPr/>
-          <p:nvPr/>
-        </p:nvCxnSpPr>
-        <p:spPr>
-          <a:xfrm flipH="1" flipV="1">
-            <a:off x="5667374" y="1103312"/>
-            <a:ext cx="95250" cy="127000"/>
-          </a:xfrm>
-          <a:prstGeom prst="line">
-            <a:avLst/>
-          </a:prstGeom>
-          <a:ln w="7937">
-            <a:solidFill>
-              <a:srgbClr val="1F2937"/>
-            </a:solidFill>
-          </a:ln>
-          <a:effectLst/>
-        </p:spPr>
-        <p:style>
-          <a:lnRef idx="2">
-            <a:schemeClr val="accent1"/>
-          </a:lnRef>
-          <a:fillRef idx="0">
-            <a:schemeClr val="accent1"/>
-          </a:fillRef>
-          <a:effectRef idx="0">
-            <a:schemeClr val="accent1"/>
-          </a:effectRef>
-          <a:fontRef idx="minor">
-            <a:schemeClr val="tx1"/>
-          </a:fontRef>
-        </p:style>
-      </p:cxnSp>
-      <p:sp>
-        <p:nvSpPr>
-          <p:cNvPr id="59" name="c3_t" descr="Editable text; source id c3_t"/>
-          <p:cNvSpPr txBox="1"/>
-          <p:nvPr/>
-        </p:nvSpPr>
-        <p:spPr>
-          <a:xfrm>
-            <a:off x="4952999" y="1444624"/>
-            <a:ext cx="1666874" cy="261937"/>
-          </a:xfrm>
-          <a:prstGeom prst="rect">
-            <a:avLst/>
-          </a:prstGeom>
-          <a:noFill/>
-          <a:effectLst/>
-        </p:spPr>
-        <p:txBody>
-          <a:bodyPr wrap="none" anchor="ctr" tIns="0" rIns="0" bIns="0" lIns="0" anchorCtr="0" vertOverflow="overflow">
-            <a:noAutofit/>
-          </a:bodyPr>
-          <a:lstStyle/>
-          <a:p>
-            <a:pPr algn="ctr" fontAlgn="base">
-              <a:lnSpc>
-                <a:spcPts val="1999"/>
-              </a:lnSpc>
-              <a:spcBef>
-                <a:spcPts val="0"/>
-              </a:spcBef>
-              <a:spcAft>
-                <a:spcPts val="0"/>
-              </a:spcAft>
-              <a:defRPr sz="1366" b="1" i="0" lang="zh-CN" dirty="0">
-                <a:solidFill>
-                  <a:srgbClr val="2B3E57"/>
-                </a:solidFill>
-                <a:latin typeface="Noto Sans CJK SC"/>
-                <a:ea typeface="Noto Sans CJK SC"/>
-                <a:cs typeface="Noto Sans CJK SC"/>
-              </a:defRPr>
-            </a:pPr>
-            <a:r>
-              <a:rPr sz="1366" b="1" i="0" lang="zh-CN" dirty="0">
-                <a:solidFill>
-                  <a:srgbClr val="2B3E57"/>
-                </a:solidFill>
-                <a:latin typeface="Noto Sans CJK SC"/>
-                <a:ea typeface="Noto Sans CJK SC"/>
-                <a:cs typeface="Noto Sans CJK SC"/>
-              </a:rPr>
-              <a:t>前驱体筛选</a:t>
-            </a:r>
-          </a:p>
-        </p:txBody>
-      </p:sp>
-      <p:sp>
-        <p:nvSpPr>
-          <p:cNvPr id="60" name="c3k_t0" descr="Editable shape; source id c3k_t0"/>
-          <p:cNvSpPr/>
-          <p:nvPr/>
-        </p:nvSpPr>
-        <p:spPr>
-          <a:xfrm>
-            <a:off x="4952999" y="1785937"/>
-            <a:ext cx="1666874" cy="571499"/>
-          </a:xfrm>
-          <a:prstGeom prst="roundRect">
-            <a:avLst>
-              <a:gd name="adj" fmla="val 8333"/>
-            </a:avLst>
-          </a:prstGeom>
-          <a:solidFill>
-            <a:srgbClr val="F7F9FB"/>
-          </a:solidFill>
-          <a:ln w="9524">
-            <a:solidFill>
-              <a:srgbClr val="CBD3DA"/>
-            </a:solidFill>
-          </a:ln>
-          <a:effectLst/>
-        </p:spPr>
-        <p:style>
-          <a:lnRef idx="1">
-            <a:schemeClr val="accent1"/>
-          </a:lnRef>
-          <a:fillRef idx="3">
-            <a:schemeClr val="accent1"/>
-          </a:fillRef>
-          <a:effectRef idx="0">
-            <a:schemeClr val="accent1"/>
-          </a:effectRef>
-          <a:fontRef idx="minor">
-            <a:schemeClr val="lt1"/>
-          </a:fontRef>
-        </p:style>
-        <p:txBody>
-          <a:bodyPr rtlCol="0" anchor="ctr"/>
-          <a:lstStyle/>
-          <a:p>
-            <a:pPr algn="ctr"/>
-          </a:p>
-        </p:txBody>
-      </p:sp>
-      <p:sp>
-        <p:nvSpPr>
-          <p:cNvPr id="61" name="c3k_t0_t" descr="Editable text; source id c3k_t0_t"/>
-          <p:cNvSpPr txBox="1"/>
-          <p:nvPr/>
-        </p:nvSpPr>
-        <p:spPr>
-          <a:xfrm>
-            <a:off x="5008562" y="1817687"/>
-            <a:ext cx="1555749" cy="507999"/>
-          </a:xfrm>
-          <a:prstGeom prst="rect">
-            <a:avLst/>
-          </a:prstGeom>
-          <a:noFill/>
-          <a:effectLst/>
-        </p:spPr>
-        <p:txBody>
-          <a:bodyPr wrap="none" anchor="ctr" tIns="0" rIns="0" bIns="0" lIns="0" anchorCtr="0" vertOverflow="overflow">
-            <a:noAutofit/>
-          </a:bodyPr>
-          <a:lstStyle/>
-          <a:p>
-            <a:pPr algn="ctr" fontAlgn="base">
-              <a:lnSpc>
-                <a:spcPts val="1265"/>
-              </a:lnSpc>
-              <a:spcBef>
-                <a:spcPts val="0"/>
-              </a:spcBef>
-              <a:spcAft>
-                <a:spcPts val="0"/>
-              </a:spcAft>
-              <a:defRPr sz="1074" b="0" i="0" lang="zh-CN" dirty="0">
-                <a:solidFill>
-                  <a:srgbClr val="3F4854"/>
-                </a:solidFill>
-                <a:latin typeface="DejaVu Sans"/>
-                <a:ea typeface="DejaVu Sans"/>
-                <a:cs typeface="DejaVu Sans"/>
-              </a:defRPr>
-            </a:pPr>
-            <a:r>
-              <a:rPr sz="1074" b="0" i="0" lang="zh-CN" dirty="0">
-                <a:solidFill>
-                  <a:srgbClr val="3F4854"/>
-                </a:solidFill>
-                <a:latin typeface="DejaVu Sans"/>
-                <a:ea typeface="DejaVu Sans"/>
-                <a:cs typeface="DejaVu Sans"/>
-              </a:rPr>
-              <a:t>BaCO3 + Y2O3 + SiO2</a:t>
-            </a:r>
-          </a:p>
-        </p:txBody>
-      </p:sp>
-      <p:sp>
-        <p:nvSpPr>
-          <p:cNvPr id="62" name="c3k_t1" descr="Editable shape; source id c3k_t1"/>
-          <p:cNvSpPr/>
-          <p:nvPr/>
-        </p:nvSpPr>
-        <p:spPr>
-          <a:xfrm>
-            <a:off x="4952999" y="2452687"/>
-            <a:ext cx="1666874" cy="571499"/>
-          </a:xfrm>
-          <a:prstGeom prst="roundRect">
-            <a:avLst>
-              <a:gd name="adj" fmla="val 8333"/>
-            </a:avLst>
-          </a:prstGeom>
-          <a:solidFill>
-            <a:srgbClr val="F7F9FB"/>
-          </a:solidFill>
-          <a:ln w="9524">
-            <a:solidFill>
-              <a:srgbClr val="CBD3DA"/>
-            </a:solidFill>
-          </a:ln>
-          <a:effectLst/>
-        </p:spPr>
-        <p:style>
-          <a:lnRef idx="1">
-            <a:schemeClr val="accent1"/>
-          </a:lnRef>
-          <a:fillRef idx="3">
-            <a:schemeClr val="accent1"/>
-          </a:fillRef>
-          <a:effectRef idx="0">
-            <a:schemeClr val="accent1"/>
-          </a:effectRef>
-          <a:fontRef idx="minor">
-            <a:schemeClr val="lt1"/>
-          </a:fontRef>
-        </p:style>
-        <p:txBody>
-          <a:bodyPr rtlCol="0" anchor="ctr"/>
-          <a:lstStyle/>
-          <a:p>
-            <a:pPr algn="ctr"/>
-          </a:p>
-        </p:txBody>
-      </p:sp>
-      <p:sp>
-        <p:nvSpPr>
-          <p:cNvPr id="63" name="c3k_t1_t" descr="Editable text; source id c3k_t1_t"/>
-          <p:cNvSpPr txBox="1"/>
-          <p:nvPr/>
-        </p:nvSpPr>
-        <p:spPr>
-          <a:xfrm>
-            <a:off x="5008562" y="2484437"/>
-            <a:ext cx="1555749" cy="507999"/>
-          </a:xfrm>
-          <a:prstGeom prst="rect">
-            <a:avLst/>
-          </a:prstGeom>
-          <a:noFill/>
-          <a:effectLst/>
-        </p:spPr>
-        <p:txBody>
-          <a:bodyPr wrap="none" anchor="ctr" tIns="0" rIns="0" bIns="0" lIns="0" anchorCtr="0" vertOverflow="overflow">
-            <a:noAutofit/>
-          </a:bodyPr>
-          <a:lstStyle/>
-          <a:p>
-            <a:pPr algn="ctr" fontAlgn="base">
-              <a:lnSpc>
-                <a:spcPts val="1265"/>
-              </a:lnSpc>
-              <a:spcBef>
-                <a:spcPts val="0"/>
-              </a:spcBef>
-              <a:spcAft>
-                <a:spcPts val="0"/>
-              </a:spcAft>
-              <a:defRPr sz="1074" b="0" i="0" lang="zh-CN" dirty="0">
-                <a:solidFill>
-                  <a:srgbClr val="3F4854"/>
-                </a:solidFill>
-                <a:latin typeface="DejaVu Sans"/>
-                <a:ea typeface="DejaVu Sans"/>
-                <a:cs typeface="DejaVu Sans"/>
-              </a:defRPr>
-            </a:pPr>
-            <a:r>
-              <a:rPr sz="1074" b="0" i="0" lang="zh-CN" dirty="0">
-                <a:solidFill>
-                  <a:srgbClr val="3F4854"/>
-                </a:solidFill>
-                <a:latin typeface="DejaVu Sans"/>
-                <a:ea typeface="DejaVu Sans"/>
-                <a:cs typeface="DejaVu Sans"/>
-              </a:rPr>
-              <a:t>ZnO / MgO / Co3O4</a:t>
-            </a:r>
-          </a:p>
-        </p:txBody>
-      </p:sp>
-      <p:sp>
-        <p:nvSpPr>
-          <p:cNvPr id="64" name="c3k_t2" descr="Editable shape; source id c3k_t2"/>
-          <p:cNvSpPr/>
-          <p:nvPr/>
-        </p:nvSpPr>
-        <p:spPr>
-          <a:xfrm>
-            <a:off x="4952999" y="3127374"/>
-            <a:ext cx="1666874" cy="571499"/>
-          </a:xfrm>
-          <a:prstGeom prst="roundRect">
-            <a:avLst>
-              <a:gd name="adj" fmla="val 8333"/>
-            </a:avLst>
-          </a:prstGeom>
-          <a:solidFill>
-            <a:srgbClr val="F7F9FB"/>
-          </a:solidFill>
-          <a:ln w="9524">
-            <a:solidFill>
-              <a:srgbClr val="CBD3DA"/>
-            </a:solidFill>
-          </a:ln>
-          <a:effectLst/>
-        </p:spPr>
-        <p:style>
-          <a:lnRef idx="1">
-            <a:schemeClr val="accent1"/>
-          </a:lnRef>
-          <a:fillRef idx="3">
-            <a:schemeClr val="accent1"/>
-          </a:fillRef>
-          <a:effectRef idx="0">
-            <a:schemeClr val="accent1"/>
-          </a:effectRef>
-          <a:fontRef idx="minor">
-            <a:schemeClr val="lt1"/>
-          </a:fontRef>
-        </p:style>
-        <p:txBody>
-          <a:bodyPr rtlCol="0" anchor="ctr"/>
-          <a:lstStyle/>
-          <a:p>
-            <a:pPr algn="ctr"/>
-          </a:p>
-        </p:txBody>
-      </p:sp>
-      <p:sp>
-        <p:nvSpPr>
-          <p:cNvPr id="65" name="c3k_t2_t" descr="Editable text; source id c3k_t2_t"/>
-          <p:cNvSpPr txBox="1"/>
-          <p:nvPr/>
-        </p:nvSpPr>
-        <p:spPr>
-          <a:xfrm>
-            <a:off x="5008562" y="3159124"/>
-            <a:ext cx="1555749" cy="507999"/>
-          </a:xfrm>
-          <a:prstGeom prst="rect">
-            <a:avLst/>
-          </a:prstGeom>
-          <a:noFill/>
-          <a:effectLst/>
-        </p:spPr>
-        <p:txBody>
-          <a:bodyPr wrap="none" anchor="ctr" tIns="0" rIns="0" bIns="0" lIns="0" anchorCtr="0" vertOverflow="overflow">
-            <a:noAutofit/>
-          </a:bodyPr>
-          <a:lstStyle/>
-          <a:p>
-            <a:pPr algn="ctr" fontAlgn="base">
-              <a:lnSpc>
-                <a:spcPts val="1562"/>
-              </a:lnSpc>
-              <a:spcBef>
-                <a:spcPts val="0"/>
-              </a:spcBef>
-              <a:spcAft>
-                <a:spcPts val="0"/>
-              </a:spcAft>
-              <a:defRPr sz="1074" b="0" i="0" lang="zh-CN" dirty="0">
-                <a:solidFill>
-                  <a:srgbClr val="3F4854"/>
-                </a:solidFill>
-                <a:latin typeface="Noto Sans CJK SC"/>
-                <a:ea typeface="Noto Sans CJK SC"/>
-                <a:cs typeface="Noto Sans CJK SC"/>
-              </a:defRPr>
-            </a:pPr>
-            <a:r>
-              <a:rPr sz="1074" b="0" i="0" lang="zh-CN" dirty="0">
-                <a:solidFill>
-                  <a:srgbClr val="3F4854"/>
-                </a:solidFill>
-                <a:latin typeface="Noto Sans CJK SC"/>
-                <a:ea typeface="Noto Sans CJK SC"/>
-                <a:cs typeface="Noto Sans CJK SC"/>
-              </a:rPr>
-              <a:t>模型排序的候选</a:t>
-            </a:r>
-          </a:p>
-        </p:txBody>
-      </p:sp>
-      <p:sp>
-        <p:nvSpPr>
-          <p:cNvPr id="66" name="l1" descr="Editable shape; source id l1"/>
-          <p:cNvSpPr/>
-          <p:nvPr/>
-        </p:nvSpPr>
-        <p:spPr>
-          <a:xfrm>
-            <a:off x="7143749" y="888999"/>
-            <a:ext cx="2619374" cy="1396999"/>
-          </a:xfrm>
-          <a:prstGeom prst="roundRect">
-            <a:avLst>
-              <a:gd name="adj" fmla="val 5113"/>
-            </a:avLst>
-          </a:prstGeom>
-          <a:solidFill>
-            <a:srgbClr val="FFFFFF"/>
-          </a:solidFill>
-          <a:ln w="11112">
-            <a:solidFill>
-              <a:srgbClr val="1F7F8C"/>
-            </a:solidFill>
-          </a:ln>
-          <a:effectLst/>
-        </p:spPr>
-        <p:style>
-          <a:lnRef idx="1">
-            <a:schemeClr val="accent1"/>
-          </a:lnRef>
-          <a:fillRef idx="3">
-            <a:schemeClr val="accent1"/>
-          </a:fillRef>
-          <a:effectRef idx="0">
-            <a:schemeClr val="accent1"/>
-          </a:effectRef>
-          <a:fontRef idx="minor">
-            <a:schemeClr val="lt1"/>
-          </a:fontRef>
-        </p:style>
-        <p:txBody>
-          <a:bodyPr rtlCol="0" anchor="ctr"/>
-          <a:lstStyle/>
-          <a:p>
-            <a:pPr algn="ctr"/>
-          </a:p>
-        </p:txBody>
-      </p:sp>
-      <p:sp>
-        <p:nvSpPr>
-          <p:cNvPr id="67" name="l1_a" descr="Editable shape; source id l1_a"/>
-          <p:cNvSpPr/>
-          <p:nvPr/>
-        </p:nvSpPr>
-        <p:spPr>
-          <a:xfrm>
-            <a:off x="7143749" y="888999"/>
-            <a:ext cx="2619374" cy="47624"/>
-          </a:xfrm>
-          <a:prstGeom prst="roundRect">
-            <a:avLst>
-              <a:gd name="adj" fmla="val 50000"/>
-            </a:avLst>
-          </a:prstGeom>
-          <a:solidFill>
-            <a:srgbClr val="1F7F8C"/>
-          </a:solidFill>
-          <a:ln>
-            <a:noFill/>
-          </a:ln>
-          <a:effectLst/>
-        </p:spPr>
-        <p:style>
-          <a:lnRef idx="1">
-            <a:schemeClr val="accent1"/>
-          </a:lnRef>
-          <a:fillRef idx="3">
-            <a:schemeClr val="accent1"/>
-          </a:fillRef>
-          <a:effectRef idx="0">
-            <a:schemeClr val="accent1"/>
-          </a:effectRef>
-          <a:fontRef idx="minor">
-            <a:schemeClr val="lt1"/>
-          </a:fontRef>
-        </p:style>
-        <p:txBody>
-          <a:bodyPr rtlCol="0" anchor="ctr"/>
-          <a:lstStyle/>
-          <a:p>
-            <a:pPr algn="ctr"/>
-          </a:p>
-        </p:txBody>
-      </p:sp>
-      <p:sp>
-        <p:nvSpPr>
-          <p:cNvPr id="68" name="l1_g_b" descr="Editable shape; source id l1_g_b"/>
-          <p:cNvSpPr/>
-          <p:nvPr/>
-        </p:nvSpPr>
-        <p:spPr>
-          <a:xfrm>
-            <a:off x="7286624" y="1111249"/>
-            <a:ext cx="206374" cy="158749"/>
-          </a:xfrm>
-          <a:prstGeom prst="rect">
-            <a:avLst/>
-          </a:prstGeom>
-          <a:noFill/>
-          <a:ln w="7937">
-            <a:solidFill>
-              <a:srgbClr val="1F2937"/>
-            </a:solidFill>
-          </a:ln>
-          <a:effectLst/>
-        </p:spPr>
-        <p:style>
-          <a:lnRef idx="1">
-            <a:schemeClr val="accent1"/>
-          </a:lnRef>
-          <a:fillRef idx="3">
-            <a:schemeClr val="accent1"/>
-          </a:fillRef>
-          <a:effectRef idx="0">
-            <a:schemeClr val="accent1"/>
-          </a:effectRef>
-          <a:fontRef idx="minor">
-            <a:schemeClr val="lt1"/>
-          </a:fontRef>
-        </p:style>
-        <p:txBody>
-          <a:bodyPr rtlCol="0" anchor="ctr"/>
-          <a:lstStyle/>
-          <a:p>
-            <a:pPr algn="ctr"/>
-          </a:p>
-        </p:txBody>
-      </p:sp>
-      <p:cxnSp>
-        <p:nvCxnSpPr>
-          <p:cNvPr id="69" name="l1_g_d" descr="Editable line; source id l1_g_d"/>
-          <p:cNvCxnSpPr/>
-          <p:nvPr/>
-        </p:nvCxnSpPr>
-        <p:spPr>
-          <a:xfrm>
-            <a:off x="7350124" y="1111249"/>
-            <a:ext cx="0" cy="166688"/>
-          </a:xfrm>
-          <a:prstGeom prst="line">
-            <a:avLst/>
-          </a:prstGeom>
-          <a:ln w="7937">
-            <a:solidFill>
-              <a:srgbClr val="1F2937"/>
-            </a:solidFill>
-          </a:ln>
-          <a:effectLst/>
-        </p:spPr>
-        <p:style>
-          <a:lnRef idx="2">
-            <a:schemeClr val="accent1"/>
-          </a:lnRef>
-          <a:fillRef idx="0">
-            <a:schemeClr val="accent1"/>
-          </a:fillRef>
-          <a:effectRef idx="0">
-            <a:schemeClr val="accent1"/>
-          </a:effectRef>
-          <a:fontRef idx="minor">
-            <a:schemeClr val="tx1"/>
-          </a:fontRef>
-        </p:style>
-      </p:cxnSp>
-      <p:cxnSp>
-        <p:nvCxnSpPr>
-          <p:cNvPr id="70" name="l1_g_h0_0" descr="Editable line; source id l1_g_h0_0"/>
-          <p:cNvCxnSpPr/>
-          <p:nvPr/>
-        </p:nvCxnSpPr>
-        <p:spPr>
-          <a:xfrm flipH="1">
-            <a:off x="7381874" y="1166812"/>
-            <a:ext cx="15875" cy="23812"/>
-          </a:xfrm>
-          <a:prstGeom prst="line">
-            <a:avLst/>
-          </a:prstGeom>
-          <a:ln w="7937">
-            <a:solidFill>
-              <a:srgbClr val="1F2937"/>
-            </a:solidFill>
-          </a:ln>
-          <a:effectLst/>
-        </p:spPr>
-        <p:style>
-          <a:lnRef idx="2">
-            <a:schemeClr val="accent1"/>
-          </a:lnRef>
-          <a:fillRef idx="0">
-            <a:schemeClr val="accent1"/>
-          </a:fillRef>
-          <a:effectRef idx="0">
-            <a:schemeClr val="accent1"/>
-          </a:effectRef>
-          <a:fontRef idx="minor">
-            <a:schemeClr val="tx1"/>
-          </a:fontRef>
-        </p:style>
-      </p:cxnSp>
-      <p:cxnSp>
-        <p:nvCxnSpPr>
-          <p:cNvPr id="71" name="l1_g_h0_1" descr="Editable line; source id l1_g_h0_1"/>
-          <p:cNvCxnSpPr/>
-          <p:nvPr/>
-        </p:nvCxnSpPr>
-        <p:spPr>
-          <a:xfrm>
-            <a:off x="7381874" y="1190624"/>
-            <a:ext cx="15875" cy="31750"/>
-          </a:xfrm>
-          <a:prstGeom prst="line">
-            <a:avLst/>
-          </a:prstGeom>
-          <a:ln w="7937">
-            <a:solidFill>
-              <a:srgbClr val="1F2937"/>
-            </a:solidFill>
-          </a:ln>
-          <a:effectLst/>
-        </p:spPr>
-        <p:style>
-          <a:lnRef idx="2">
-            <a:schemeClr val="accent1"/>
-          </a:lnRef>
-          <a:fillRef idx="0">
-            <a:schemeClr val="accent1"/>
-          </a:fillRef>
-          <a:effectRef idx="0">
-            <a:schemeClr val="accent1"/>
-          </a:effectRef>
-          <a:fontRef idx="minor">
-            <a:schemeClr val="tx1"/>
-          </a:fontRef>
-        </p:style>
-      </p:cxnSp>
-      <p:cxnSp>
-        <p:nvCxnSpPr>
-          <p:cNvPr id="72" name="l1_g_h1_0" descr="Editable line; source id l1_g_h1_0"/>
-          <p:cNvCxnSpPr/>
-          <p:nvPr/>
-        </p:nvCxnSpPr>
-        <p:spPr>
-          <a:xfrm flipH="1">
-            <a:off x="7413624" y="1166812"/>
-            <a:ext cx="15875" cy="23812"/>
-          </a:xfrm>
-          <a:prstGeom prst="line">
-            <a:avLst/>
-          </a:prstGeom>
-          <a:ln w="7937">
-            <a:solidFill>
-              <a:srgbClr val="1F2937"/>
-            </a:solidFill>
-          </a:ln>
-          <a:effectLst/>
-        </p:spPr>
-        <p:style>
-          <a:lnRef idx="2">
-            <a:schemeClr val="accent1"/>
-          </a:lnRef>
-          <a:fillRef idx="0">
-            <a:schemeClr val="accent1"/>
-          </a:fillRef>
-          <a:effectRef idx="0">
-            <a:schemeClr val="accent1"/>
-          </a:effectRef>
-          <a:fontRef idx="minor">
-            <a:schemeClr val="tx1"/>
-          </a:fontRef>
-        </p:style>
-      </p:cxnSp>
-      <p:cxnSp>
-        <p:nvCxnSpPr>
-          <p:cNvPr id="73" name="l1_g_h1_1" descr="Editable line; source id l1_g_h1_1"/>
-          <p:cNvCxnSpPr/>
-          <p:nvPr/>
-        </p:nvCxnSpPr>
-        <p:spPr>
-          <a:xfrm>
-            <a:off x="7413624" y="1190624"/>
-            <a:ext cx="15875" cy="31750"/>
-          </a:xfrm>
-          <a:prstGeom prst="line">
-            <a:avLst/>
-          </a:prstGeom>
-          <a:ln w="7937">
-            <a:solidFill>
-              <a:srgbClr val="1F2937"/>
-            </a:solidFill>
-          </a:ln>
-          <a:effectLst/>
-        </p:spPr>
-        <p:style>
-          <a:lnRef idx="2">
-            <a:schemeClr val="accent1"/>
-          </a:lnRef>
-          <a:fillRef idx="0">
-            <a:schemeClr val="accent1"/>
-          </a:fillRef>
-          <a:effectRef idx="0">
-            <a:schemeClr val="accent1"/>
-          </a:effectRef>
-          <a:fontRef idx="minor">
-            <a:schemeClr val="tx1"/>
-          </a:fontRef>
-        </p:style>
-      </p:cxnSp>
-      <p:cxnSp>
-        <p:nvCxnSpPr>
-          <p:cNvPr id="74" name="l1_g_h2_0" descr="Editable line; source id l1_g_h2_0"/>
-          <p:cNvCxnSpPr/>
-          <p:nvPr/>
-        </p:nvCxnSpPr>
-        <p:spPr>
-          <a:xfrm flipH="1">
-            <a:off x="7445374" y="1166812"/>
-            <a:ext cx="15875" cy="23812"/>
-          </a:xfrm>
-          <a:prstGeom prst="line">
-            <a:avLst/>
-          </a:prstGeom>
-          <a:ln w="7937">
-            <a:solidFill>
-              <a:srgbClr val="1F2937"/>
-            </a:solidFill>
-          </a:ln>
-          <a:effectLst/>
-        </p:spPr>
-        <p:style>
-          <a:lnRef idx="2">
-            <a:schemeClr val="accent1"/>
-          </a:lnRef>
-          <a:fillRef idx="0">
-            <a:schemeClr val="accent1"/>
-          </a:fillRef>
-          <a:effectRef idx="0">
-            <a:schemeClr val="accent1"/>
-          </a:effectRef>
-          <a:fontRef idx="minor">
-            <a:schemeClr val="tx1"/>
-          </a:fontRef>
-        </p:style>
-      </p:cxnSp>
-      <p:cxnSp>
-        <p:nvCxnSpPr>
-          <p:cNvPr id="75" name="l1_g_h2_1" descr="Editable line; source id l1_g_h2_1"/>
-          <p:cNvCxnSpPr/>
-          <p:nvPr/>
-        </p:nvCxnSpPr>
-        <p:spPr>
-          <a:xfrm>
-            <a:off x="7445374" y="1190624"/>
-            <a:ext cx="15875" cy="31750"/>
-          </a:xfrm>
-          <a:prstGeom prst="line">
-            <a:avLst/>
-          </a:prstGeom>
-          <a:ln w="7937">
-            <a:solidFill>
-              <a:srgbClr val="1F2937"/>
-            </a:solidFill>
-          </a:ln>
-          <a:effectLst/>
-        </p:spPr>
-        <p:style>
-          <a:lnRef idx="2">
-            <a:schemeClr val="accent1"/>
-          </a:lnRef>
-          <a:fillRef idx="0">
-            <a:schemeClr val="accent1"/>
-          </a:fillRef>
-          <a:effectRef idx="0">
-            <a:schemeClr val="accent1"/>
-          </a:effectRef>
-          <a:fontRef idx="minor">
-            <a:schemeClr val="tx1"/>
-          </a:fontRef>
-        </p:style>
-      </p:cxnSp>
-      <p:sp>
-        <p:nvSpPr>
-          <p:cNvPr id="76" name="l1_t" descr="Editable text; source id l1_t"/>
-          <p:cNvSpPr txBox="1"/>
-          <p:nvPr/>
-        </p:nvSpPr>
-        <p:spPr>
-          <a:xfrm>
-            <a:off x="7604124" y="1047749"/>
-            <a:ext cx="2047874" cy="269874"/>
-          </a:xfrm>
-          <a:prstGeom prst="rect">
-            <a:avLst/>
-          </a:prstGeom>
-          <a:noFill/>
-          <a:effectLst/>
-        </p:spPr>
-        <p:txBody>
-          <a:bodyPr wrap="none" anchor="ctr" tIns="0" rIns="0" bIns="0" lIns="0" anchorCtr="0" vertOverflow="overflow">
-            <a:noAutofit/>
-          </a:bodyPr>
-          <a:lstStyle/>
-          <a:p>
-            <a:pPr algn="l" fontAlgn="base">
-              <a:lnSpc>
-                <a:spcPts val="2078"/>
-              </a:lnSpc>
-              <a:spcBef>
-                <a:spcPts val="0"/>
-              </a:spcBef>
-              <a:spcAft>
-                <a:spcPts val="0"/>
-              </a:spcAft>
-              <a:defRPr sz="1425" b="1" i="0" lang="zh-CN" dirty="0">
-                <a:solidFill>
-                  <a:srgbClr val="0F4F58"/>
-                </a:solidFill>
-                <a:latin typeface="Noto Sans CJK SC"/>
-                <a:ea typeface="Noto Sans CJK SC"/>
-                <a:cs typeface="Noto Sans CJK SC"/>
-              </a:defRPr>
-            </a:pPr>
-            <a:r>
-              <a:rPr sz="1425" b="1" i="0" lang="zh-CN" dirty="0">
-                <a:solidFill>
-                  <a:srgbClr val="0F4F58"/>
-                </a:solidFill>
-                <a:latin typeface="Noto Sans CJK SC"/>
-                <a:ea typeface="Noto Sans CJK SC"/>
-                <a:cs typeface="Noto Sans CJK SC"/>
-              </a:rPr>
-              <a:t>固相成相</a:t>
-            </a:r>
-          </a:p>
-        </p:txBody>
-      </p:sp>
-      <p:sp>
-        <p:nvSpPr>
-          <p:cNvPr id="77" name="l1c_t0" descr="Editable shape; source id l1c_t0"/>
-          <p:cNvSpPr/>
-          <p:nvPr/>
-        </p:nvSpPr>
-        <p:spPr>
-          <a:xfrm>
-            <a:off x="7238999" y="1460499"/>
-            <a:ext cx="722312" cy="365124"/>
-          </a:xfrm>
-          <a:prstGeom prst="roundRect">
-            <a:avLst>
-              <a:gd name="adj" fmla="val 13043"/>
-            </a:avLst>
-          </a:prstGeom>
-          <a:solidFill>
-            <a:srgbClr val="F7F9FB"/>
-          </a:solidFill>
-          <a:ln w="9524">
-            <a:solidFill>
-              <a:srgbClr val="CBD3DA"/>
-            </a:solidFill>
-          </a:ln>
-          <a:effectLst/>
-        </p:spPr>
-        <p:style>
-          <a:lnRef idx="1">
-            <a:schemeClr val="accent1"/>
-          </a:lnRef>
-          <a:fillRef idx="3">
-            <a:schemeClr val="accent1"/>
-          </a:fillRef>
-          <a:effectRef idx="0">
-            <a:schemeClr val="accent1"/>
-          </a:effectRef>
-          <a:fontRef idx="minor">
-            <a:schemeClr val="lt1"/>
-          </a:fontRef>
-        </p:style>
-        <p:txBody>
-          <a:bodyPr rtlCol="0" anchor="ctr"/>
-          <a:lstStyle/>
-          <a:p>
-            <a:pPr algn="ctr"/>
-          </a:p>
-        </p:txBody>
-      </p:sp>
-      <p:sp>
-        <p:nvSpPr>
-          <p:cNvPr id="78" name="l1c_t0_t" descr="Editable text; source id l1c_t0_t"/>
-          <p:cNvSpPr txBox="1"/>
-          <p:nvPr/>
-        </p:nvSpPr>
-        <p:spPr>
-          <a:xfrm>
-            <a:off x="7294562" y="1492249"/>
-            <a:ext cx="611187" cy="301624"/>
-          </a:xfrm>
-          <a:prstGeom prst="rect">
-            <a:avLst/>
-          </a:prstGeom>
-          <a:noFill/>
-          <a:effectLst/>
-        </p:spPr>
-        <p:txBody>
-          <a:bodyPr wrap="none" anchor="ctr" tIns="0" rIns="0" bIns="0" lIns="0" anchorCtr="0" vertOverflow="overflow">
-            <a:noAutofit/>
-          </a:bodyPr>
-          <a:lstStyle/>
-          <a:p>
-            <a:pPr algn="ctr" fontAlgn="base">
-              <a:lnSpc>
-                <a:spcPts val="1562"/>
-              </a:lnSpc>
-              <a:spcBef>
-                <a:spcPts val="0"/>
-              </a:spcBef>
-              <a:spcAft>
-                <a:spcPts val="0"/>
-              </a:spcAft>
-              <a:defRPr sz="1074" b="0" i="0" lang="zh-CN" dirty="0">
-                <a:solidFill>
-                  <a:srgbClr val="3F4854"/>
-                </a:solidFill>
-                <a:latin typeface="Noto Sans CJK SC"/>
-                <a:ea typeface="Noto Sans CJK SC"/>
-                <a:cs typeface="Noto Sans CJK SC"/>
-              </a:defRPr>
-            </a:pPr>
-            <a:r>
-              <a:rPr sz="1074" b="0" i="0" lang="zh-CN" dirty="0">
-                <a:solidFill>
-                  <a:srgbClr val="3F4854"/>
-                </a:solidFill>
-                <a:latin typeface="Noto Sans CJK SC"/>
-                <a:ea typeface="Noto Sans CJK SC"/>
-                <a:cs typeface="Noto Sans CJK SC"/>
-              </a:rPr>
-              <a:t>分段煅烧</a:t>
-            </a:r>
-          </a:p>
-        </p:txBody>
-      </p:sp>
-      <p:sp>
-        <p:nvSpPr>
-          <p:cNvPr id="79" name="l1c_t1" descr="Editable shape; source id l1c_t1"/>
-          <p:cNvSpPr/>
-          <p:nvPr/>
-        </p:nvSpPr>
-        <p:spPr>
-          <a:xfrm>
-            <a:off x="8088312" y="1460499"/>
-            <a:ext cx="722312" cy="365124"/>
-          </a:xfrm>
-          <a:prstGeom prst="roundRect">
-            <a:avLst>
-              <a:gd name="adj" fmla="val 13043"/>
-            </a:avLst>
-          </a:prstGeom>
-          <a:solidFill>
-            <a:srgbClr val="F7F9FB"/>
-          </a:solidFill>
-          <a:ln w="9524">
-            <a:solidFill>
-              <a:srgbClr val="CBD3DA"/>
-            </a:solidFill>
-          </a:ln>
-          <a:effectLst/>
-        </p:spPr>
-        <p:style>
-          <a:lnRef idx="1">
-            <a:schemeClr val="accent1"/>
-          </a:lnRef>
-          <a:fillRef idx="3">
-            <a:schemeClr val="accent1"/>
-          </a:fillRef>
-          <a:effectRef idx="0">
-            <a:schemeClr val="accent1"/>
-          </a:effectRef>
-          <a:fontRef idx="minor">
-            <a:schemeClr val="lt1"/>
-          </a:fontRef>
-        </p:style>
-        <p:txBody>
-          <a:bodyPr rtlCol="0" anchor="ctr"/>
-          <a:lstStyle/>
-          <a:p>
-            <a:pPr algn="ctr"/>
-          </a:p>
-        </p:txBody>
-      </p:sp>
-      <p:sp>
-        <p:nvSpPr>
-          <p:cNvPr id="80" name="l1c_t1_t" descr="Editable text; source id l1c_t1_t"/>
-          <p:cNvSpPr txBox="1"/>
-          <p:nvPr/>
-        </p:nvSpPr>
-        <p:spPr>
-          <a:xfrm>
-            <a:off x="8143874" y="1492249"/>
-            <a:ext cx="611187" cy="301624"/>
-          </a:xfrm>
-          <a:prstGeom prst="rect">
-            <a:avLst/>
-          </a:prstGeom>
-          <a:noFill/>
-          <a:effectLst/>
-        </p:spPr>
-        <p:txBody>
-          <a:bodyPr wrap="none" anchor="ctr" tIns="0" rIns="0" bIns="0" lIns="0" anchorCtr="0" vertOverflow="overflow">
-            <a:noAutofit/>
-          </a:bodyPr>
-          <a:lstStyle/>
-          <a:p>
-            <a:pPr algn="ctr" fontAlgn="base">
-              <a:lnSpc>
-                <a:spcPts val="1562"/>
-              </a:lnSpc>
-              <a:spcBef>
-                <a:spcPts val="0"/>
-              </a:spcBef>
-              <a:spcAft>
-                <a:spcPts val="0"/>
-              </a:spcAft>
-              <a:defRPr sz="1074" b="0" i="0" lang="zh-CN" dirty="0">
-                <a:solidFill>
-                  <a:srgbClr val="3F4854"/>
-                </a:solidFill>
-                <a:latin typeface="Noto Sans CJK SC"/>
-                <a:ea typeface="Noto Sans CJK SC"/>
-                <a:cs typeface="Noto Sans CJK SC"/>
-              </a:defRPr>
-            </a:pPr>
-            <a:r>
-              <a:rPr sz="1074" b="0" i="0" lang="zh-CN" dirty="0">
+              <a:rPr sz="1187" b="0" i="0" lang="zh-CN" dirty="0">
                 <a:solidFill>
                   <a:srgbClr val="3F4854"/>
                 </a:solidFill>
@@ -7212,13 +6852,13 @@
       </p:sp>
       <p:sp>
         <p:nvSpPr>
-          <p:cNvPr id="81" name="l1c_a1" descr="Editable line; source id l1c_a1"/>
+          <p:cNvPr id="73" name="l1r_a1" descr="Editable line; source id l1r_a1"/>
           <p:cNvSpPr/>
           <p:nvPr/>
         </p:nvSpPr>
         <p:spPr>
           <a:xfrm>
-            <a:off x="7985125" y="1623417"/>
+            <a:off x="1460500" y="4560292"/>
             <a:ext cx="79375" cy="39291"/>
           </a:xfrm>
           <a:custGeom>
@@ -7286,18 +6926,18 @@
       </p:sp>
       <p:sp>
         <p:nvSpPr>
-          <p:cNvPr id="82" name="l1c_t2" descr="Editable shape; source id l1c_t2"/>
+          <p:cNvPr id="74" name="l1r_t2" descr="Editable shape; source id l1r_t2"/>
           <p:cNvSpPr/>
           <p:nvPr/>
         </p:nvSpPr>
         <p:spPr>
           <a:xfrm>
-            <a:off x="8945562" y="1460499"/>
-            <a:ext cx="722312" cy="365124"/>
+            <a:off x="2500312" y="4381499"/>
+            <a:ext cx="769937" cy="396874"/>
           </a:xfrm>
           <a:prstGeom prst="roundRect">
             <a:avLst>
-              <a:gd name="adj" fmla="val 13043"/>
+              <a:gd name="adj" fmla="val 12000"/>
             </a:avLst>
           </a:prstGeom>
           <a:solidFill>
@@ -7334,14 +6974,14 @@
       </p:sp>
       <p:sp>
         <p:nvSpPr>
-          <p:cNvPr id="83" name="l1c_t2_t" descr="Editable text; source id l1c_t2_t"/>
+          <p:cNvPr id="75" name="l1r_t2_t" descr="Editable text; source id l1r_t2_t"/>
           <p:cNvSpPr txBox="1"/>
           <p:nvPr/>
         </p:nvSpPr>
         <p:spPr>
           <a:xfrm>
-            <a:off x="9001124" y="1492249"/>
-            <a:ext cx="611187" cy="301624"/>
+            <a:off x="2555874" y="4413249"/>
+            <a:ext cx="658812" cy="333374"/>
           </a:xfrm>
           <a:prstGeom prst="rect">
             <a:avLst/>
@@ -7357,7 +6997,7 @@
           <a:p>
             <a:pPr algn="ctr" fontAlgn="base">
               <a:lnSpc>
-                <a:spcPts val="1562"/>
+                <a:spcPts val="1734"/>
               </a:lnSpc>
               <a:spcBef>
                 <a:spcPts val="0"/>
@@ -7365,7 +7005,7 @@
               <a:spcAft>
                 <a:spcPts val="0"/>
               </a:spcAft>
-              <a:defRPr sz="1074" b="0" i="0" lang="zh-CN" dirty="0">
+              <a:defRPr sz="1187" b="0" i="0" lang="zh-CN" dirty="0">
                 <a:solidFill>
                   <a:srgbClr val="3F4854"/>
                 </a:solidFill>
@@ -7375,7 +7015,7 @@
               </a:defRPr>
             </a:pPr>
             <a:r>
-              <a:rPr sz="1074" b="0" i="0" lang="zh-CN" dirty="0">
+              <a:rPr sz="1187" b="0" i="0" lang="zh-CN" dirty="0">
                 <a:solidFill>
                   <a:srgbClr val="3F4854"/>
                 </a:solidFill>
@@ -7390,13 +7030,13 @@
       </p:sp>
       <p:sp>
         <p:nvSpPr>
-          <p:cNvPr id="84" name="l1c_a2" descr="Editable line; source id l1c_a2"/>
+          <p:cNvPr id="76" name="l1r_a2" descr="Editable line; source id l1r_a2"/>
           <p:cNvSpPr/>
           <p:nvPr/>
         </p:nvSpPr>
         <p:spPr>
           <a:xfrm>
-            <a:off x="8842375" y="1623417"/>
+            <a:off x="2381250" y="4560292"/>
             <a:ext cx="79375" cy="39291"/>
           </a:xfrm>
           <a:custGeom>
@@ -7464,18 +7104,18 @@
       </p:sp>
       <p:sp>
         <p:nvSpPr>
-          <p:cNvPr id="85" name="l1_o" descr="Editable shape; source id l1_o"/>
+          <p:cNvPr id="77" name="l1_o" descr="Editable shape; source id l1_o"/>
           <p:cNvSpPr/>
           <p:nvPr/>
         </p:nvSpPr>
         <p:spPr>
           <a:xfrm>
-            <a:off x="7238999" y="1889124"/>
-            <a:ext cx="2428874" cy="333374"/>
+            <a:off x="3365499" y="4381499"/>
+            <a:ext cx="1857374" cy="396874"/>
           </a:xfrm>
           <a:prstGeom prst="roundRect">
             <a:avLst>
-              <a:gd name="adj" fmla="val 14285"/>
+              <a:gd name="adj" fmla="val 12000"/>
             </a:avLst>
           </a:prstGeom>
           <a:solidFill>
@@ -7512,14 +7152,14 @@
       </p:sp>
       <p:sp>
         <p:nvSpPr>
-          <p:cNvPr id="86" name="l1_o_t" descr="Editable text; source id l1_o_t"/>
+          <p:cNvPr id="78" name="l1_o_t" descr="Editable text; source id l1_o_t"/>
           <p:cNvSpPr txBox="1"/>
           <p:nvPr/>
         </p:nvSpPr>
         <p:spPr>
           <a:xfrm>
-            <a:off x="7294562" y="1920874"/>
-            <a:ext cx="2317749" cy="269874"/>
+            <a:off x="3421062" y="4413249"/>
+            <a:ext cx="1746249" cy="333374"/>
           </a:xfrm>
           <a:prstGeom prst="rect">
             <a:avLst/>
@@ -7535,7 +7175,7 @@
           <a:p>
             <a:pPr algn="ctr" fontAlgn="base">
               <a:lnSpc>
-                <a:spcPts val="1656"/>
+                <a:spcPts val="1734"/>
               </a:lnSpc>
               <a:spcBef>
                 <a:spcPts val="0"/>
@@ -7543,7 +7183,7 @@
               <a:spcAft>
                 <a:spcPts val="0"/>
               </a:spcAft>
-              <a:defRPr sz="1134" b="1" i="0" lang="zh-CN" dirty="0">
+              <a:defRPr sz="1187" b="1" i="0" lang="zh-CN" dirty="0">
                 <a:solidFill>
                   <a:srgbClr val="0F4F58"/>
                 </a:solidFill>
@@ -7553,7 +7193,7 @@
               </a:defRPr>
             </a:pPr>
             <a:r>
-              <a:rPr sz="1134" b="1" i="0" lang="zh-CN" dirty="0">
+              <a:rPr sz="1187" b="1" i="0" lang="zh-CN" dirty="0">
                 <a:solidFill>
                   <a:srgbClr val="0F4F58"/>
                 </a:solidFill>
@@ -7568,18 +7208,18 @@
       </p:sp>
       <p:sp>
         <p:nvSpPr>
-          <p:cNvPr id="87" name="l2" descr="Editable shape; source id l2"/>
+          <p:cNvPr id="79" name="l2" descr="Editable shape; source id l2"/>
           <p:cNvSpPr/>
           <p:nvPr/>
         </p:nvSpPr>
         <p:spPr>
           <a:xfrm>
-            <a:off x="7143749" y="2428874"/>
-            <a:ext cx="2619374" cy="1396999"/>
+            <a:off x="6508749" y="3809999"/>
+            <a:ext cx="4921249" cy="1127124"/>
           </a:xfrm>
           <a:prstGeom prst="roundRect">
             <a:avLst>
-              <a:gd name="adj" fmla="val 5113"/>
+              <a:gd name="adj" fmla="val 6338"/>
             </a:avLst>
           </a:prstGeom>
           <a:solidFill>
@@ -7616,18 +7256,18 @@
       </p:sp>
       <p:sp>
         <p:nvSpPr>
-          <p:cNvPr id="88" name="l2_a" descr="Editable shape; source id l2_a"/>
+          <p:cNvPr id="80" name="l2_b" descr="Editable shape; source id l2_b"/>
           <p:cNvSpPr/>
           <p:nvPr/>
         </p:nvSpPr>
         <p:spPr>
           <a:xfrm>
-            <a:off x="7143749" y="2428874"/>
-            <a:ext cx="2619374" cy="47624"/>
+            <a:off x="6508749" y="3809999"/>
+            <a:ext cx="63499" cy="1127124"/>
           </a:xfrm>
           <a:prstGeom prst="roundRect">
             <a:avLst>
-              <a:gd name="adj" fmla="val 50000"/>
+              <a:gd name="adj" fmla="val 37500"/>
             </a:avLst>
           </a:prstGeom>
           <a:solidFill>
@@ -7662,14 +7302,14 @@
       </p:sp>
       <p:cxnSp>
         <p:nvCxnSpPr>
-          <p:cNvPr id="89" name="l2_g_b_0" descr="Editable line; source id l2_g_b_0"/>
+          <p:cNvPr id="81" name="l2_g_n_0" descr="Editable line; source id l2_g_n_0"/>
           <p:cNvCxnSpPr/>
           <p:nvPr/>
         </p:nvCxnSpPr>
         <p:spPr>
           <a:xfrm>
-            <a:off x="7310437" y="2666999"/>
-            <a:ext cx="31750" cy="150813"/>
+            <a:off x="6810374" y="3968749"/>
+            <a:ext cx="0" cy="87313"/>
           </a:xfrm>
           <a:prstGeom prst="line">
             <a:avLst/>
@@ -7698,14 +7338,14 @@
       </p:cxnSp>
       <p:cxnSp>
         <p:nvCxnSpPr>
-          <p:cNvPr id="90" name="l2_g_b_1" descr="Editable line; source id l2_g_b_1"/>
+          <p:cNvPr id="82" name="l2_g_n_1" descr="Editable line; source id l2_g_n_1"/>
           <p:cNvCxnSpPr/>
           <p:nvPr/>
         </p:nvCxnSpPr>
         <p:spPr>
-          <a:xfrm>
-            <a:off x="7342187" y="2817812"/>
-            <a:ext cx="95250" cy="0"/>
+          <a:xfrm flipH="1">
+            <a:off x="6730999" y="4056062"/>
+            <a:ext cx="79375" cy="158750"/>
           </a:xfrm>
           <a:prstGeom prst="line">
             <a:avLst/>
@@ -7734,14 +7374,14 @@
       </p:cxnSp>
       <p:cxnSp>
         <p:nvCxnSpPr>
-          <p:cNvPr id="91" name="l2_g_b_2" descr="Editable line; source id l2_g_b_2"/>
+          <p:cNvPr id="83" name="l2_g_n_2" descr="Editable line; source id l2_g_n_2"/>
           <p:cNvCxnSpPr/>
           <p:nvPr/>
         </p:nvCxnSpPr>
         <p:spPr>
-          <a:xfrm flipV="1">
-            <a:off x="7437437" y="2666999"/>
-            <a:ext cx="31750" cy="150813"/>
+          <a:xfrm>
+            <a:off x="6730999" y="4214812"/>
+            <a:ext cx="222250" cy="0"/>
           </a:xfrm>
           <a:prstGeom prst="line">
             <a:avLst/>
@@ -7770,14 +7410,14 @@
       </p:cxnSp>
       <p:cxnSp>
         <p:nvCxnSpPr>
-          <p:cNvPr id="92" name="l2_g_r" descr="Editable line; source id l2_g_r"/>
+          <p:cNvPr id="84" name="l2_g_n_3" descr="Editable line; source id l2_g_n_3"/>
           <p:cNvCxnSpPr/>
           <p:nvPr/>
         </p:nvCxnSpPr>
         <p:spPr>
-          <a:xfrm>
-            <a:off x="7294562" y="2666999"/>
-            <a:ext cx="190500" cy="0"/>
+          <a:xfrm flipH="1" flipV="1">
+            <a:off x="6873874" y="4056062"/>
+            <a:ext cx="79375" cy="158750"/>
           </a:xfrm>
           <a:prstGeom prst="line">
             <a:avLst/>
@@ -7806,14 +7446,14 @@
       </p:cxnSp>
       <p:cxnSp>
         <p:nvCxnSpPr>
-          <p:cNvPr id="93" name="l2_g_c_0" descr="Editable line; source id l2_g_c_0"/>
+          <p:cNvPr id="85" name="l2_g_n_4" descr="Editable line; source id l2_g_n_4"/>
           <p:cNvCxnSpPr/>
           <p:nvPr/>
         </p:nvCxnSpPr>
         <p:spPr>
-          <a:xfrm>
-            <a:off x="7389812" y="2611437"/>
-            <a:ext cx="31750" cy="31750"/>
+          <a:xfrm flipV="1">
+            <a:off x="6873874" y="3968749"/>
+            <a:ext cx="0" cy="87313"/>
           </a:xfrm>
           <a:prstGeom prst="line">
             <a:avLst/>
@@ -7842,14 +7482,14 @@
       </p:cxnSp>
       <p:cxnSp>
         <p:nvCxnSpPr>
-          <p:cNvPr id="94" name="l2_g_c_1" descr="Editable line; source id l2_g_c_1"/>
+          <p:cNvPr id="86" name="l2_g_m" descr="Editable line; source id l2_g_m"/>
           <p:cNvCxnSpPr/>
           <p:nvPr/>
         </p:nvCxnSpPr>
         <p:spPr>
-          <a:xfrm flipH="1">
-            <a:off x="7389812" y="2643187"/>
-            <a:ext cx="31750" cy="23812"/>
+          <a:xfrm>
+            <a:off x="6794499" y="3968749"/>
+            <a:ext cx="95250" cy="0"/>
           </a:xfrm>
           <a:prstGeom prst="line">
             <a:avLst/>
@@ -7876,20 +7516,21 @@
           </a:fontRef>
         </p:style>
       </p:cxnSp>
-      <p:cxnSp>
-        <p:nvCxnSpPr>
-          <p:cNvPr id="95" name="l2_g_c_2" descr="Editable line; source id l2_g_c_2"/>
-          <p:cNvCxnSpPr/>
-          <p:nvPr/>
-        </p:nvCxnSpPr>
-        <p:spPr>
-          <a:xfrm flipH="1" flipV="1">
-            <a:off x="7358062" y="2643187"/>
-            <a:ext cx="31750" cy="23812"/>
-          </a:xfrm>
-          <a:prstGeom prst="line">
+      <p:sp>
+        <p:nvSpPr>
+          <p:cNvPr id="87" name="l2_g_d1" descr="Editable shape; source id l2_g_d1"/>
+          <p:cNvSpPr/>
+          <p:nvPr/>
+        </p:nvSpPr>
+        <p:spPr>
+          <a:xfrm>
+            <a:off x="6802437" y="4143374"/>
+            <a:ext cx="23812" cy="23812"/>
+          </a:xfrm>
+          <a:prstGeom prst="ellipse">
             <a:avLst/>
           </a:prstGeom>
+          <a:noFill/>
           <a:ln w="7937">
             <a:solidFill>
               <a:srgbClr val="1F2937"/>
@@ -7898,34 +7539,42 @@
           <a:effectLst/>
         </p:spPr>
         <p:style>
-          <a:lnRef idx="2">
+          <a:lnRef idx="1">
             <a:schemeClr val="accent1"/>
           </a:lnRef>
-          <a:fillRef idx="0">
+          <a:fillRef idx="3">
             <a:schemeClr val="accent1"/>
           </a:fillRef>
           <a:effectRef idx="0">
             <a:schemeClr val="accent1"/>
           </a:effectRef>
           <a:fontRef idx="minor">
-            <a:schemeClr val="tx1"/>
+            <a:schemeClr val="lt1"/>
           </a:fontRef>
         </p:style>
-      </p:cxnSp>
-      <p:cxnSp>
-        <p:nvCxnSpPr>
-          <p:cNvPr id="96" name="l2_g_c_3" descr="Editable line; source id l2_g_c_3"/>
-          <p:cNvCxnSpPr/>
-          <p:nvPr/>
-        </p:nvCxnSpPr>
-        <p:spPr>
-          <a:xfrm flipV="1">
-            <a:off x="7358062" y="2611437"/>
-            <a:ext cx="31750" cy="31750"/>
-          </a:xfrm>
-          <a:prstGeom prst="line">
+        <p:txBody>
+          <a:bodyPr rtlCol="0" anchor="ctr"/>
+          <a:lstStyle/>
+          <a:p>
+            <a:pPr algn="ctr"/>
+          </a:p>
+        </p:txBody>
+      </p:sp>
+      <p:sp>
+        <p:nvSpPr>
+          <p:cNvPr id="88" name="l2_g_d2" descr="Editable shape; source id l2_g_d2"/>
+          <p:cNvSpPr/>
+          <p:nvPr/>
+        </p:nvSpPr>
+        <p:spPr>
+          <a:xfrm>
+            <a:off x="6857999" y="4167187"/>
+            <a:ext cx="15874" cy="15874"/>
+          </a:xfrm>
+          <a:prstGeom prst="ellipse">
             <a:avLst/>
           </a:prstGeom>
+          <a:noFill/>
           <a:ln w="7937">
             <a:solidFill>
               <a:srgbClr val="1F2937"/>
@@ -7934,30 +7583,37 @@
           <a:effectLst/>
         </p:spPr>
         <p:style>
-          <a:lnRef idx="2">
+          <a:lnRef idx="1">
             <a:schemeClr val="accent1"/>
           </a:lnRef>
-          <a:fillRef idx="0">
+          <a:fillRef idx="3">
             <a:schemeClr val="accent1"/>
           </a:fillRef>
           <a:effectRef idx="0">
             <a:schemeClr val="accent1"/>
           </a:effectRef>
           <a:fontRef idx="minor">
-            <a:schemeClr val="tx1"/>
+            <a:schemeClr val="lt1"/>
           </a:fontRef>
         </p:style>
-      </p:cxnSp>
-      <p:sp>
-        <p:nvSpPr>
-          <p:cNvPr id="97" name="l2_t" descr="Editable text; source id l2_t"/>
+        <p:txBody>
+          <a:bodyPr rtlCol="0" anchor="ctr"/>
+          <a:lstStyle/>
+          <a:p>
+            <a:pPr algn="ctr"/>
+          </a:p>
+        </p:txBody>
+      </p:sp>
+      <p:sp>
+        <p:nvSpPr>
+          <p:cNvPr id="89" name="l2_t" descr="Editable text; source id l2_t"/>
           <p:cNvSpPr txBox="1"/>
           <p:nvPr/>
         </p:nvSpPr>
         <p:spPr>
           <a:xfrm>
-            <a:off x="7604124" y="2587624"/>
-            <a:ext cx="2047874" cy="269874"/>
+            <a:off x="7111999" y="3921124"/>
+            <a:ext cx="2063749" cy="349249"/>
           </a:xfrm>
           <a:prstGeom prst="rect">
             <a:avLst/>
@@ -7973,7 +7629,7 @@
           <a:p>
             <a:pPr algn="l" fontAlgn="base">
               <a:lnSpc>
-                <a:spcPts val="2078"/>
+                <a:spcPts val="2265"/>
               </a:lnSpc>
               <a:spcBef>
                 <a:spcPts val="0"/>
@@ -7981,7 +7637,7 @@
               <a:spcAft>
                 <a:spcPts val="0"/>
               </a:spcAft>
-              <a:defRPr sz="1425" b="1" i="0" lang="zh-CN" dirty="0">
+              <a:defRPr sz="1562" b="1" i="0" lang="zh-CN" dirty="0">
                 <a:solidFill>
                   <a:srgbClr val="0F4F58"/>
                 </a:solidFill>
@@ -7991,7 +7647,7 @@
               </a:defRPr>
             </a:pPr>
             <a:r>
-              <a:rPr sz="1425" b="1" i="0" lang="zh-CN" dirty="0">
+              <a:rPr sz="1562" b="1" i="0" lang="zh-CN" dirty="0">
                 <a:solidFill>
                   <a:srgbClr val="0F4F58"/>
                 </a:solidFill>
@@ -8006,18 +7662,18 @@
       </p:sp>
       <p:sp>
         <p:nvSpPr>
-          <p:cNvPr id="98" name="l2c_t0" descr="Editable shape; source id l2c_t0"/>
+          <p:cNvPr id="90" name="l2r_t0" descr="Editable shape; source id l2r_t0"/>
           <p:cNvSpPr/>
           <p:nvPr/>
         </p:nvSpPr>
         <p:spPr>
           <a:xfrm>
-            <a:off x="7238999" y="3000374"/>
-            <a:ext cx="722312" cy="365124"/>
+            <a:off x="6683374" y="4381499"/>
+            <a:ext cx="769937" cy="396874"/>
           </a:xfrm>
           <a:prstGeom prst="roundRect">
             <a:avLst>
-              <a:gd name="adj" fmla="val 13043"/>
+              <a:gd name="adj" fmla="val 12000"/>
             </a:avLst>
           </a:prstGeom>
           <a:solidFill>
@@ -8054,14 +7710,14 @@
       </p:sp>
       <p:sp>
         <p:nvSpPr>
-          <p:cNvPr id="99" name="l2c_t0_t" descr="Editable text; source id l2c_t0_t"/>
+          <p:cNvPr id="91" name="l2r_t0_t" descr="Editable text; source id l2r_t0_t"/>
           <p:cNvSpPr txBox="1"/>
           <p:nvPr/>
         </p:nvSpPr>
         <p:spPr>
           <a:xfrm>
-            <a:off x="7294562" y="3032124"/>
-            <a:ext cx="611187" cy="301624"/>
+            <a:off x="6738937" y="4413249"/>
+            <a:ext cx="658812" cy="333374"/>
           </a:xfrm>
           <a:prstGeom prst="rect">
             <a:avLst/>
@@ -8077,7 +7733,7 @@
           <a:p>
             <a:pPr algn="ctr" fontAlgn="base">
               <a:lnSpc>
-                <a:spcPts val="1562"/>
+                <a:spcPts val="1734"/>
               </a:lnSpc>
               <a:spcBef>
                 <a:spcPts val="0"/>
@@ -8085,7 +7741,7 @@
               <a:spcAft>
                 <a:spcPts val="0"/>
               </a:spcAft>
-              <a:defRPr sz="1074" b="0" i="0" lang="zh-CN" dirty="0">
+              <a:defRPr sz="1187" b="0" i="0" lang="zh-CN" dirty="0">
                 <a:solidFill>
                   <a:srgbClr val="3F4854"/>
                 </a:solidFill>
@@ -8095,7 +7751,7 @@
               </a:defRPr>
             </a:pPr>
             <a:r>
-              <a:rPr sz="1074" b="0" i="0" lang="zh-CN" dirty="0">
+              <a:rPr sz="1187" b="0" i="0" lang="zh-CN" dirty="0">
                 <a:solidFill>
                   <a:srgbClr val="3F4854"/>
                 </a:solidFill>
@@ -8110,18 +7766,18 @@
       </p:sp>
       <p:sp>
         <p:nvSpPr>
-          <p:cNvPr id="100" name="l2c_t1" descr="Editable shape; source id l2c_t1"/>
+          <p:cNvPr id="92" name="l2r_t1" descr="Editable shape; source id l2r_t1"/>
           <p:cNvSpPr/>
           <p:nvPr/>
         </p:nvSpPr>
         <p:spPr>
           <a:xfrm>
-            <a:off x="8088312" y="3000374"/>
-            <a:ext cx="722312" cy="365124"/>
+            <a:off x="7612062" y="4381499"/>
+            <a:ext cx="769937" cy="396874"/>
           </a:xfrm>
           <a:prstGeom prst="roundRect">
             <a:avLst>
-              <a:gd name="adj" fmla="val 13043"/>
+              <a:gd name="adj" fmla="val 12000"/>
             </a:avLst>
           </a:prstGeom>
           <a:solidFill>
@@ -8158,14 +7814,14 @@
       </p:sp>
       <p:sp>
         <p:nvSpPr>
-          <p:cNvPr id="101" name="l2c_t1_t" descr="Editable text; source id l2c_t1_t"/>
+          <p:cNvPr id="93" name="l2r_t1_t" descr="Editable text; source id l2r_t1_t"/>
           <p:cNvSpPr txBox="1"/>
           <p:nvPr/>
         </p:nvSpPr>
         <p:spPr>
           <a:xfrm>
-            <a:off x="8143874" y="3032124"/>
-            <a:ext cx="611187" cy="301624"/>
+            <a:off x="7667624" y="4413249"/>
+            <a:ext cx="658812" cy="333374"/>
           </a:xfrm>
           <a:prstGeom prst="rect">
             <a:avLst/>
@@ -8181,7 +7837,7 @@
           <a:p>
             <a:pPr algn="ctr" fontAlgn="base">
               <a:lnSpc>
-                <a:spcPts val="1562"/>
+                <a:spcPts val="1734"/>
               </a:lnSpc>
               <a:spcBef>
                 <a:spcPts val="0"/>
@@ -8189,7 +7845,7 @@
               <a:spcAft>
                 <a:spcPts val="0"/>
               </a:spcAft>
-              <a:defRPr sz="1074" b="0" i="0" lang="zh-CN" dirty="0">
+              <a:defRPr sz="1187" b="0" i="0" lang="zh-CN" dirty="0">
                 <a:solidFill>
                   <a:srgbClr val="3F4854"/>
                 </a:solidFill>
@@ -8199,7 +7855,7 @@
               </a:defRPr>
             </a:pPr>
             <a:r>
-              <a:rPr sz="1074" b="0" i="0" lang="zh-CN" dirty="0">
+              <a:rPr sz="1187" b="0" i="0" lang="zh-CN" dirty="0">
                 <a:solidFill>
                   <a:srgbClr val="3F4854"/>
                 </a:solidFill>
@@ -8214,13 +7870,13 @@
       </p:sp>
       <p:sp>
         <p:nvSpPr>
-          <p:cNvPr id="102" name="l2c_a1" descr="Editable line; source id l2c_a1"/>
+          <p:cNvPr id="94" name="l2r_a1" descr="Editable line; source id l2r_a1"/>
           <p:cNvSpPr/>
           <p:nvPr/>
         </p:nvSpPr>
         <p:spPr>
           <a:xfrm>
-            <a:off x="7985125" y="3163292"/>
+            <a:off x="7493000" y="4560292"/>
             <a:ext cx="79375" cy="39291"/>
           </a:xfrm>
           <a:custGeom>
@@ -8288,18 +7944,18 @@
       </p:sp>
       <p:sp>
         <p:nvSpPr>
-          <p:cNvPr id="103" name="l2c_t2" descr="Editable shape; source id l2c_t2"/>
+          <p:cNvPr id="95" name="l2r_t2" descr="Editable shape; source id l2r_t2"/>
           <p:cNvSpPr/>
           <p:nvPr/>
         </p:nvSpPr>
         <p:spPr>
           <a:xfrm>
-            <a:off x="8945562" y="3000374"/>
-            <a:ext cx="722312" cy="365124"/>
+            <a:off x="8532812" y="4381499"/>
+            <a:ext cx="769937" cy="396874"/>
           </a:xfrm>
           <a:prstGeom prst="roundRect">
             <a:avLst>
-              <a:gd name="adj" fmla="val 13043"/>
+              <a:gd name="adj" fmla="val 12000"/>
             </a:avLst>
           </a:prstGeom>
           <a:solidFill>
@@ -8336,14 +7992,14 @@
       </p:sp>
       <p:sp>
         <p:nvSpPr>
-          <p:cNvPr id="104" name="l2c_t2_t" descr="Editable text; source id l2c_t2_t"/>
+          <p:cNvPr id="96" name="l2r_t2_t" descr="Editable text; source id l2r_t2_t"/>
           <p:cNvSpPr txBox="1"/>
           <p:nvPr/>
         </p:nvSpPr>
         <p:spPr>
           <a:xfrm>
-            <a:off x="9001124" y="3032124"/>
-            <a:ext cx="611187" cy="301624"/>
+            <a:off x="8588374" y="4413249"/>
+            <a:ext cx="658812" cy="333374"/>
           </a:xfrm>
           <a:prstGeom prst="rect">
             <a:avLst/>
@@ -8359,7 +8015,7 @@
           <a:p>
             <a:pPr algn="ctr" fontAlgn="base">
               <a:lnSpc>
-                <a:spcPts val="1562"/>
+                <a:spcPts val="1734"/>
               </a:lnSpc>
               <a:spcBef>
                 <a:spcPts val="0"/>
@@ -8367,7 +8023,7 @@
               <a:spcAft>
                 <a:spcPts val="0"/>
               </a:spcAft>
-              <a:defRPr sz="1074" b="0" i="0" lang="zh-CN" dirty="0">
+              <a:defRPr sz="1187" b="0" i="0" lang="zh-CN" dirty="0">
                 <a:solidFill>
                   <a:srgbClr val="3F4854"/>
                 </a:solidFill>
@@ -8377,7 +8033,7 @@
               </a:defRPr>
             </a:pPr>
             <a:r>
-              <a:rPr sz="1074" b="0" i="0" lang="zh-CN" dirty="0">
+              <a:rPr sz="1187" b="0" i="0" lang="zh-CN" dirty="0">
                 <a:solidFill>
                   <a:srgbClr val="3F4854"/>
                 </a:solidFill>
@@ -8392,13 +8048,13 @@
       </p:sp>
       <p:sp>
         <p:nvSpPr>
-          <p:cNvPr id="105" name="l2c_a2" descr="Editable line; source id l2c_a2"/>
+          <p:cNvPr id="97" name="l2r_a2" descr="Editable line; source id l2r_a2"/>
           <p:cNvSpPr/>
           <p:nvPr/>
         </p:nvSpPr>
         <p:spPr>
           <a:xfrm>
-            <a:off x="8842375" y="3163292"/>
+            <a:off x="8413750" y="4560292"/>
             <a:ext cx="79375" cy="39291"/>
           </a:xfrm>
           <a:custGeom>
@@ -8466,18 +8122,18 @@
       </p:sp>
       <p:sp>
         <p:nvSpPr>
-          <p:cNvPr id="106" name="l2_o" descr="Editable shape; source id l2_o"/>
+          <p:cNvPr id="98" name="l2_o" descr="Editable shape; source id l2_o"/>
           <p:cNvSpPr/>
           <p:nvPr/>
         </p:nvSpPr>
         <p:spPr>
           <a:xfrm>
-            <a:off x="7238999" y="3428999"/>
-            <a:ext cx="2428874" cy="333374"/>
+            <a:off x="9397999" y="4381499"/>
+            <a:ext cx="1857374" cy="396874"/>
           </a:xfrm>
           <a:prstGeom prst="roundRect">
             <a:avLst>
-              <a:gd name="adj" fmla="val 14285"/>
+              <a:gd name="adj" fmla="val 12000"/>
             </a:avLst>
           </a:prstGeom>
           <a:solidFill>
@@ -8514,14 +8170,14 @@
       </p:sp>
       <p:sp>
         <p:nvSpPr>
-          <p:cNvPr id="107" name="l2_o_t" descr="Editable text; source id l2_o_t"/>
+          <p:cNvPr id="99" name="l2_o_t" descr="Editable text; source id l2_o_t"/>
           <p:cNvSpPr txBox="1"/>
           <p:nvPr/>
         </p:nvSpPr>
         <p:spPr>
           <a:xfrm>
-            <a:off x="7294562" y="3460749"/>
-            <a:ext cx="2317749" cy="269874"/>
+            <a:off x="9453562" y="4413249"/>
+            <a:ext cx="1746249" cy="333374"/>
           </a:xfrm>
           <a:prstGeom prst="rect">
             <a:avLst/>
@@ -8537,7 +8193,7 @@
           <a:p>
             <a:pPr algn="ctr" fontAlgn="base">
               <a:lnSpc>
-                <a:spcPts val="1656"/>
+                <a:spcPts val="1734"/>
               </a:lnSpc>
               <a:spcBef>
                 <a:spcPts val="0"/>
@@ -8545,7 +8201,7 @@
               <a:spcAft>
                 <a:spcPts val="0"/>
               </a:spcAft>
-              <a:defRPr sz="1134" b="1" i="0" lang="zh-CN" dirty="0">
+              <a:defRPr sz="1187" b="1" i="0" lang="zh-CN" dirty="0">
                 <a:solidFill>
                   <a:srgbClr val="0F4F58"/>
                 </a:solidFill>
@@ -8555,7 +8211,7 @@
               </a:defRPr>
             </a:pPr>
             <a:r>
-              <a:rPr sz="1134" b="1" i="0" lang="zh-CN" dirty="0">
+              <a:rPr sz="1187" b="1" i="0" lang="zh-CN" dirty="0">
                 <a:solidFill>
                   <a:srgbClr val="0F4F58"/>
                 </a:solidFill>
@@ -8570,18 +8226,18 @@
       </p:sp>
       <p:sp>
         <p:nvSpPr>
-          <p:cNvPr id="108" name="c5" descr="Editable shape; source id c5"/>
+          <p:cNvPr id="100" name="c5" descr="Editable shape; source id c5"/>
           <p:cNvSpPr/>
           <p:nvPr/>
         </p:nvSpPr>
         <p:spPr>
           <a:xfrm>
-            <a:off x="10191749" y="888999"/>
-            <a:ext cx="1635124" cy="2936874"/>
+            <a:off x="3016249" y="5603874"/>
+            <a:ext cx="6191249" cy="1031874"/>
           </a:xfrm>
           <a:prstGeom prst="roundRect">
             <a:avLst>
-              <a:gd name="adj" fmla="val 4368"/>
+              <a:gd name="adj" fmla="val 6923"/>
             </a:avLst>
           </a:prstGeom>
           <a:solidFill>
@@ -8618,18 +8274,18 @@
       </p:sp>
       <p:sp>
         <p:nvSpPr>
-          <p:cNvPr id="109" name="c5_a" descr="Editable shape; source id c5_a"/>
+          <p:cNvPr id="101" name="c5_b" descr="Editable shape; source id c5_b"/>
           <p:cNvSpPr/>
           <p:nvPr/>
         </p:nvSpPr>
         <p:spPr>
           <a:xfrm>
-            <a:off x="10191749" y="888999"/>
-            <a:ext cx="1635124" cy="47624"/>
+            <a:off x="3016249" y="5603874"/>
+            <a:ext cx="63499" cy="1031874"/>
           </a:xfrm>
           <a:prstGeom prst="roundRect">
             <a:avLst>
-              <a:gd name="adj" fmla="val 50000"/>
+              <a:gd name="adj" fmla="val 37500"/>
             </a:avLst>
           </a:prstGeom>
           <a:solidFill>
@@ -8664,13 +8320,13 @@
       </p:sp>
       <p:cxnSp>
         <p:nvCxnSpPr>
-          <p:cNvPr id="110" name="c5_g_a_0" descr="Editable line; source id c5_g_a_0"/>
+          <p:cNvPr id="102" name="c5_g_a_0" descr="Editable line; source id c5_g_a_0"/>
           <p:cNvCxnSpPr/>
           <p:nvPr/>
         </p:nvCxnSpPr>
         <p:spPr>
           <a:xfrm>
-            <a:off x="10882312" y="1309687"/>
+            <a:off x="3238499" y="5992812"/>
             <a:ext cx="47625" cy="0"/>
           </a:xfrm>
           <a:prstGeom prst="line">
@@ -8700,14 +8356,14 @@
       </p:cxnSp>
       <p:cxnSp>
         <p:nvCxnSpPr>
-          <p:cNvPr id="111" name="c5_g_a_1" descr="Editable line; source id c5_g_a_1"/>
+          <p:cNvPr id="103" name="c5_g_a_1" descr="Editable line; source id c5_g_a_1"/>
           <p:cNvCxnSpPr/>
           <p:nvPr/>
         </p:nvCxnSpPr>
         <p:spPr>
           <a:xfrm flipV="1">
-            <a:off x="10929937" y="1158874"/>
-            <a:ext cx="23812" cy="150813"/>
+            <a:off x="3286124" y="5841999"/>
+            <a:ext cx="23813" cy="150813"/>
           </a:xfrm>
           <a:prstGeom prst="line">
             <a:avLst/>
@@ -8736,13 +8392,13 @@
       </p:cxnSp>
       <p:cxnSp>
         <p:nvCxnSpPr>
-          <p:cNvPr id="112" name="c5_g_a_2" descr="Editable line; source id c5_g_a_2"/>
+          <p:cNvPr id="104" name="c5_g_a_2" descr="Editable line; source id c5_g_a_2"/>
           <p:cNvCxnSpPr/>
           <p:nvPr/>
         </p:nvCxnSpPr>
         <p:spPr>
           <a:xfrm>
-            <a:off x="10953749" y="1158874"/>
+            <a:off x="3309937" y="5841999"/>
             <a:ext cx="15875" cy="150813"/>
           </a:xfrm>
           <a:prstGeom prst="line">
@@ -8772,14 +8428,14 @@
       </p:cxnSp>
       <p:cxnSp>
         <p:nvCxnSpPr>
-          <p:cNvPr id="113" name="c5_g_a_3" descr="Editable line; source id c5_g_a_3"/>
+          <p:cNvPr id="105" name="c5_g_a_3" descr="Editable line; source id c5_g_a_3"/>
           <p:cNvCxnSpPr/>
           <p:nvPr/>
         </p:nvCxnSpPr>
         <p:spPr>
           <a:xfrm>
-            <a:off x="10969624" y="1309687"/>
-            <a:ext cx="39688" cy="0"/>
+            <a:off x="3325812" y="5992812"/>
+            <a:ext cx="39687" cy="0"/>
           </a:xfrm>
           <a:prstGeom prst="line">
             <a:avLst/>
@@ -8808,13 +8464,13 @@
       </p:cxnSp>
       <p:cxnSp>
         <p:nvCxnSpPr>
-          <p:cNvPr id="114" name="c5_g_a_4" descr="Editable line; source id c5_g_a_4"/>
+          <p:cNvPr id="106" name="c5_g_a_4" descr="Editable line; source id c5_g_a_4"/>
           <p:cNvCxnSpPr/>
           <p:nvPr/>
         </p:nvCxnSpPr>
         <p:spPr>
           <a:xfrm flipV="1">
-            <a:off x="11009312" y="1206499"/>
+            <a:off x="3365499" y="5889624"/>
             <a:ext cx="15875" cy="103188"/>
           </a:xfrm>
           <a:prstGeom prst="line">
@@ -8844,14 +8500,14 @@
       </p:cxnSp>
       <p:cxnSp>
         <p:nvCxnSpPr>
-          <p:cNvPr id="115" name="c5_g_a_5" descr="Editable line; source id c5_g_a_5"/>
+          <p:cNvPr id="107" name="c5_g_a_5" descr="Editable line; source id c5_g_a_5"/>
           <p:cNvCxnSpPr/>
           <p:nvPr/>
         </p:nvCxnSpPr>
         <p:spPr>
           <a:xfrm>
-            <a:off x="11025187" y="1206499"/>
-            <a:ext cx="23812" cy="103188"/>
+            <a:off x="3381374" y="5889624"/>
+            <a:ext cx="23813" cy="103188"/>
           </a:xfrm>
           <a:prstGeom prst="line">
             <a:avLst/>
@@ -8880,14 +8536,14 @@
       </p:cxnSp>
       <p:cxnSp>
         <p:nvCxnSpPr>
-          <p:cNvPr id="116" name="c5_g_a_6" descr="Editable line; source id c5_g_a_6"/>
+          <p:cNvPr id="108" name="c5_g_a_6" descr="Editable line; source id c5_g_a_6"/>
           <p:cNvCxnSpPr/>
           <p:nvPr/>
         </p:nvCxnSpPr>
         <p:spPr>
           <a:xfrm>
-            <a:off x="11048999" y="1309687"/>
-            <a:ext cx="39688" cy="0"/>
+            <a:off x="3405187" y="5992812"/>
+            <a:ext cx="39687" cy="0"/>
           </a:xfrm>
           <a:prstGeom prst="line">
             <a:avLst/>
@@ -8916,14 +8572,14 @@
       </p:cxnSp>
       <p:cxnSp>
         <p:nvCxnSpPr>
-          <p:cNvPr id="117" name="c5_g_a_7" descr="Editable line; source id c5_g_a_7"/>
+          <p:cNvPr id="109" name="c5_g_a_7" descr="Editable line; source id c5_g_a_7"/>
           <p:cNvCxnSpPr/>
           <p:nvPr/>
         </p:nvCxnSpPr>
         <p:spPr>
           <a:xfrm flipV="1">
-            <a:off x="11088687" y="1246187"/>
-            <a:ext cx="7937" cy="63500"/>
+            <a:off x="3444874" y="5929312"/>
+            <a:ext cx="7938" cy="63500"/>
           </a:xfrm>
           <a:prstGeom prst="line">
             <a:avLst/>
@@ -8952,13 +8608,13 @@
       </p:cxnSp>
       <p:cxnSp>
         <p:nvCxnSpPr>
-          <p:cNvPr id="118" name="c5_g_a_8" descr="Editable line; source id c5_g_a_8"/>
+          <p:cNvPr id="110" name="c5_g_a_8" descr="Editable line; source id c5_g_a_8"/>
           <p:cNvCxnSpPr/>
           <p:nvPr/>
         </p:nvCxnSpPr>
         <p:spPr>
           <a:xfrm>
-            <a:off x="11096624" y="1246187"/>
+            <a:off x="3452812" y="5929312"/>
             <a:ext cx="15875" cy="63500"/>
           </a:xfrm>
           <a:prstGeom prst="line">
@@ -8988,13 +8644,13 @@
       </p:cxnSp>
       <p:cxnSp>
         <p:nvCxnSpPr>
-          <p:cNvPr id="119" name="c5_g_a_9" descr="Editable line; source id c5_g_a_9"/>
+          <p:cNvPr id="111" name="c5_g_a_9" descr="Editable line; source id c5_g_a_9"/>
           <p:cNvCxnSpPr/>
           <p:nvPr/>
         </p:nvCxnSpPr>
         <p:spPr>
           <a:xfrm>
-            <a:off x="11112499" y="1309687"/>
+            <a:off x="3468687" y="5992812"/>
             <a:ext cx="31750" cy="0"/>
           </a:xfrm>
           <a:prstGeom prst="line">
@@ -9024,14 +8680,14 @@
       </p:cxnSp>
       <p:cxnSp>
         <p:nvCxnSpPr>
-          <p:cNvPr id="120" name="c5_g_k_0" descr="Editable line; source id c5_g_k_0"/>
+          <p:cNvPr id="112" name="c5_g_k_0" descr="Editable line; source id c5_g_k_0"/>
           <p:cNvCxnSpPr/>
           <p:nvPr/>
         </p:nvCxnSpPr>
         <p:spPr>
           <a:xfrm>
-            <a:off x="11056937" y="1127124"/>
-            <a:ext cx="23812" cy="31750"/>
+            <a:off x="3413124" y="5810249"/>
+            <a:ext cx="23813" cy="31750"/>
           </a:xfrm>
           <a:prstGeom prst="line">
             <a:avLst/>
@@ -9060,14 +8716,14 @@
       </p:cxnSp>
       <p:cxnSp>
         <p:nvCxnSpPr>
-          <p:cNvPr id="121" name="c5_g_k_1" descr="Editable line; source id c5_g_k_1"/>
+          <p:cNvPr id="113" name="c5_g_k_1" descr="Editable line; source id c5_g_k_1"/>
           <p:cNvCxnSpPr/>
           <p:nvPr/>
         </p:nvCxnSpPr>
         <p:spPr>
           <a:xfrm flipV="1">
-            <a:off x="11080749" y="1079499"/>
-            <a:ext cx="55563" cy="79375"/>
+            <a:off x="3436937" y="5762624"/>
+            <a:ext cx="55562" cy="79375"/>
           </a:xfrm>
           <a:prstGeom prst="line">
             <a:avLst/>
@@ -9096,14 +8752,14 @@
       </p:cxnSp>
       <p:sp>
         <p:nvSpPr>
-          <p:cNvPr id="122" name="c5_t" descr="Editable text; source id c5_t"/>
+          <p:cNvPr id="114" name="c5_t" descr="Editable text; source id c5_t"/>
           <p:cNvSpPr txBox="1"/>
           <p:nvPr/>
         </p:nvSpPr>
         <p:spPr>
           <a:xfrm>
-            <a:off x="10302874" y="1444624"/>
-            <a:ext cx="1412874" cy="246062"/>
+            <a:off x="3619499" y="5714999"/>
+            <a:ext cx="1904999" cy="349249"/>
           </a:xfrm>
           <a:prstGeom prst="rect">
             <a:avLst/>
@@ -9117,9 +8773,9 @@
           </a:bodyPr>
           <a:lstStyle/>
           <a:p>
-            <a:pPr algn="ctr" fontAlgn="base">
+            <a:pPr algn="l" fontAlgn="base">
               <a:lnSpc>
-                <a:spcPts val="1906"/>
+                <a:spcPts val="2265"/>
               </a:lnSpc>
               <a:spcBef>
                 <a:spcPts val="0"/>
@@ -9127,7 +8783,7 @@
               <a:spcAft>
                 <a:spcPts val="0"/>
               </a:spcAft>
-              <a:defRPr sz="1306" b="1" i="0" lang="zh-CN" dirty="0">
+              <a:defRPr sz="1562" b="1" i="0" lang="zh-CN" dirty="0">
                 <a:solidFill>
                   <a:srgbClr val="2B3E57"/>
                 </a:solidFill>
@@ -9137,7 +8793,7 @@
               </a:defRPr>
             </a:pPr>
             <a:r>
-              <a:rPr sz="1306" b="1" i="0" lang="zh-CN" dirty="0">
+              <a:rPr sz="1562" b="1" i="0" lang="zh-CN" dirty="0">
                 <a:solidFill>
                   <a:srgbClr val="2B3E57"/>
                 </a:solidFill>
@@ -9152,18 +8808,18 @@
       </p:sp>
       <p:sp>
         <p:nvSpPr>
-          <p:cNvPr id="123" name="c5k_t0" descr="Editable shape; source id c5k_t0"/>
+          <p:cNvPr id="115" name="c5r_t0" descr="Editable shape; source id c5r_t0"/>
           <p:cNvSpPr/>
           <p:nvPr/>
         </p:nvSpPr>
         <p:spPr>
           <a:xfrm>
-            <a:off x="10302874" y="1770062"/>
-            <a:ext cx="1412874" cy="412749"/>
+            <a:off x="3206749" y="6159499"/>
+            <a:ext cx="1389062" cy="349249"/>
           </a:xfrm>
           <a:prstGeom prst="roundRect">
             <a:avLst>
-              <a:gd name="adj" fmla="val 11538"/>
+              <a:gd name="adj" fmla="val 13636"/>
             </a:avLst>
           </a:prstGeom>
           <a:solidFill>
@@ -9200,14 +8856,14 @@
       </p:sp>
       <p:sp>
         <p:nvSpPr>
-          <p:cNvPr id="124" name="c5k_t0_t" descr="Editable text; source id c5k_t0_t"/>
+          <p:cNvPr id="116" name="c5r_t0_t" descr="Editable text; source id c5r_t0_t"/>
           <p:cNvSpPr txBox="1"/>
           <p:nvPr/>
         </p:nvSpPr>
         <p:spPr>
           <a:xfrm>
-            <a:off x="10358437" y="1801812"/>
-            <a:ext cx="1301749" cy="349249"/>
+            <a:off x="3262312" y="6191249"/>
+            <a:ext cx="1277937" cy="285749"/>
           </a:xfrm>
           <a:prstGeom prst="rect">
             <a:avLst/>
@@ -9223,7 +8879,7 @@
           <a:p>
             <a:pPr algn="ctr" fontAlgn="base">
               <a:lnSpc>
-                <a:spcPts val="1203"/>
+                <a:spcPts val="1312"/>
               </a:lnSpc>
               <a:spcBef>
                 <a:spcPts val="0"/>
@@ -9231,7 +8887,7 @@
               <a:spcAft>
                 <a:spcPts val="0"/>
               </a:spcAft>
-              <a:defRPr sz="1014" b="0" i="0" lang="zh-CN" dirty="0">
+              <a:defRPr sz="1124" b="0" i="0" lang="zh-CN" dirty="0">
                 <a:solidFill>
                   <a:srgbClr val="3F4854"/>
                 </a:solidFill>
@@ -9241,7 +8897,7 @@
               </a:defRPr>
             </a:pPr>
             <a:r>
-              <a:rPr sz="1014" b="0" i="0" lang="zh-CN" dirty="0">
+              <a:rPr sz="1124" b="0" i="0" lang="zh-CN" dirty="0">
                 <a:solidFill>
                   <a:srgbClr val="3F4854"/>
                 </a:solidFill>
@@ -9256,18 +8912,18 @@
       </p:sp>
       <p:sp>
         <p:nvSpPr>
-          <p:cNvPr id="125" name="c5k_t1" descr="Editable shape; source id c5k_t1"/>
+          <p:cNvPr id="117" name="c5r_t1" descr="Editable shape; source id c5r_t1"/>
           <p:cNvSpPr/>
           <p:nvPr/>
         </p:nvSpPr>
         <p:spPr>
           <a:xfrm>
-            <a:off x="10302874" y="2278062"/>
-            <a:ext cx="1412874" cy="412749"/>
+            <a:off x="4691062" y="6159499"/>
+            <a:ext cx="1389062" cy="349249"/>
           </a:xfrm>
           <a:prstGeom prst="roundRect">
             <a:avLst>
-              <a:gd name="adj" fmla="val 11538"/>
+              <a:gd name="adj" fmla="val 13636"/>
             </a:avLst>
           </a:prstGeom>
           <a:solidFill>
@@ -9304,14 +8960,14 @@
       </p:sp>
       <p:sp>
         <p:nvSpPr>
-          <p:cNvPr id="126" name="c5k_t1_t" descr="Editable text; source id c5k_t1_t"/>
+          <p:cNvPr id="118" name="c5r_t1_t" descr="Editable text; source id c5r_t1_t"/>
           <p:cNvSpPr txBox="1"/>
           <p:nvPr/>
         </p:nvSpPr>
         <p:spPr>
           <a:xfrm>
-            <a:off x="10358437" y="2309812"/>
-            <a:ext cx="1301749" cy="349249"/>
+            <a:off x="4746624" y="6191249"/>
+            <a:ext cx="1277937" cy="285749"/>
           </a:xfrm>
           <a:prstGeom prst="rect">
             <a:avLst/>
@@ -9327,7 +8983,7 @@
           <a:p>
             <a:pPr algn="ctr" fontAlgn="base">
               <a:lnSpc>
-                <a:spcPts val="1203"/>
+                <a:spcPts val="1312"/>
               </a:lnSpc>
               <a:spcBef>
                 <a:spcPts val="0"/>
@@ -9335,7 +8991,7 @@
               <a:spcAft>
                 <a:spcPts val="0"/>
               </a:spcAft>
-              <a:defRPr sz="1014" b="0" i="0" lang="zh-CN" dirty="0">
+              <a:defRPr sz="1124" b="0" i="0" lang="zh-CN" dirty="0">
                 <a:solidFill>
                   <a:srgbClr val="3F4854"/>
                 </a:solidFill>
@@ -9345,7 +9001,7 @@
               </a:defRPr>
             </a:pPr>
             <a:r>
-              <a:rPr sz="1014" b="0" i="0" lang="zh-CN" dirty="0">
+              <a:rPr sz="1124" b="0" i="0" lang="zh-CN" dirty="0">
                 <a:solidFill>
                   <a:srgbClr val="3F4854"/>
                 </a:solidFill>
@@ -9360,18 +9016,18 @@
       </p:sp>
       <p:sp>
         <p:nvSpPr>
-          <p:cNvPr id="127" name="c5k_t2" descr="Editable shape; source id c5k_t2"/>
+          <p:cNvPr id="119" name="c5r_t2" descr="Editable shape; source id c5r_t2"/>
           <p:cNvSpPr/>
           <p:nvPr/>
         </p:nvSpPr>
         <p:spPr>
           <a:xfrm>
-            <a:off x="10302874" y="2778124"/>
-            <a:ext cx="1412874" cy="412749"/>
+            <a:off x="6175374" y="6159499"/>
+            <a:ext cx="1389062" cy="349249"/>
           </a:xfrm>
           <a:prstGeom prst="roundRect">
             <a:avLst>
-              <a:gd name="adj" fmla="val 11538"/>
+              <a:gd name="adj" fmla="val 13636"/>
             </a:avLst>
           </a:prstGeom>
           <a:solidFill>
@@ -9408,14 +9064,14 @@
       </p:sp>
       <p:sp>
         <p:nvSpPr>
-          <p:cNvPr id="128" name="c5k_t2_t" descr="Editable text; source id c5k_t2_t"/>
+          <p:cNvPr id="120" name="c5r_t2_t" descr="Editable text; source id c5r_t2_t"/>
           <p:cNvSpPr txBox="1"/>
           <p:nvPr/>
         </p:nvSpPr>
         <p:spPr>
           <a:xfrm>
-            <a:off x="10358437" y="2809874"/>
-            <a:ext cx="1301749" cy="349249"/>
+            <a:off x="6230937" y="6191249"/>
+            <a:ext cx="1277937" cy="285749"/>
           </a:xfrm>
           <a:prstGeom prst="rect">
             <a:avLst/>
@@ -9431,7 +9087,7 @@
           <a:p>
             <a:pPr algn="ctr" fontAlgn="base">
               <a:lnSpc>
-                <a:spcPts val="1203"/>
+                <a:spcPts val="1312"/>
               </a:lnSpc>
               <a:spcBef>
                 <a:spcPts val="0"/>
@@ -9439,7 +9095,7 @@
               <a:spcAft>
                 <a:spcPts val="0"/>
               </a:spcAft>
-              <a:defRPr sz="1014" b="0" i="0" lang="zh-CN" dirty="0">
+              <a:defRPr sz="1124" b="0" i="0" lang="zh-CN" dirty="0">
                 <a:solidFill>
                   <a:srgbClr val="3F4854"/>
                 </a:solidFill>
@@ -9449,7 +9105,7 @@
               </a:defRPr>
             </a:pPr>
             <a:r>
-              <a:rPr sz="1014" b="0" i="0" lang="zh-CN" dirty="0">
+              <a:rPr sz="1124" b="0" i="0" lang="zh-CN" dirty="0">
                 <a:solidFill>
                   <a:srgbClr val="3F4854"/>
                 </a:solidFill>
@@ -9464,18 +9120,18 @@
       </p:sp>
       <p:sp>
         <p:nvSpPr>
-          <p:cNvPr id="129" name="c5k_t3" descr="Editable shape; source id c5k_t3"/>
+          <p:cNvPr id="121" name="c5r_t3" descr="Editable shape; source id c5r_t3"/>
           <p:cNvSpPr/>
           <p:nvPr/>
         </p:nvSpPr>
         <p:spPr>
           <a:xfrm>
-            <a:off x="10302874" y="3286124"/>
-            <a:ext cx="1412874" cy="412749"/>
+            <a:off x="7659687" y="6159499"/>
+            <a:ext cx="1389062" cy="349249"/>
           </a:xfrm>
           <a:prstGeom prst="roundRect">
             <a:avLst>
-              <a:gd name="adj" fmla="val 11538"/>
+              <a:gd name="adj" fmla="val 13636"/>
             </a:avLst>
           </a:prstGeom>
           <a:solidFill>
@@ -9512,786 +9168,14 @@
       </p:sp>
       <p:sp>
         <p:nvSpPr>
-          <p:cNvPr id="130" name="c5k_t3_t" descr="Editable text; source id c5k_t3_t"/>
+          <p:cNvPr id="122" name="c5r_t3_t" descr="Editable text; source id c5r_t3_t"/>
           <p:cNvSpPr txBox="1"/>
           <p:nvPr/>
         </p:nvSpPr>
         <p:spPr>
           <a:xfrm>
-            <a:off x="10358437" y="3317874"/>
-            <a:ext cx="1301749" cy="349249"/>
-          </a:xfrm>
-          <a:prstGeom prst="rect">
-            <a:avLst/>
-          </a:prstGeom>
-          <a:noFill/>
-          <a:effectLst/>
-        </p:spPr>
-        <p:txBody>
-          <a:bodyPr wrap="none" anchor="ctr" tIns="0" rIns="0" bIns="0" lIns="0" anchorCtr="0" vertOverflow="overflow">
-            <a:noAutofit/>
-          </a:bodyPr>
-          <a:lstStyle/>
-          <a:p>
-            <a:pPr algn="ctr" fontAlgn="base">
-              <a:lnSpc>
-                <a:spcPts val="1484"/>
-              </a:lnSpc>
-              <a:spcBef>
-                <a:spcPts val="0"/>
-              </a:spcBef>
-              <a:spcAft>
-                <a:spcPts val="0"/>
-              </a:spcAft>
-              <a:defRPr sz="1014" b="0" i="0" lang="zh-CN" dirty="0">
-                <a:solidFill>
-                  <a:srgbClr val="3F4854"/>
-                </a:solidFill>
-                <a:latin typeface="Noto Sans CJK SC"/>
-                <a:ea typeface="Noto Sans CJK SC"/>
-                <a:cs typeface="Noto Sans CJK SC"/>
-              </a:defRPr>
-            </a:pPr>
-            <a:r>
-              <a:rPr sz="1014" b="0" i="0" lang="zh-CN" dirty="0">
-                <a:solidFill>
-                  <a:srgbClr val="3F4854"/>
-                </a:solidFill>
-                <a:latin typeface="Noto Sans CJK SC"/>
-                <a:ea typeface="Noto Sans CJK SC"/>
-                <a:cs typeface="Noto Sans CJK SC"/>
-              </a:rPr>
-              <a:t>高温相与冷却产物</a:t>
-            </a:r>
-          </a:p>
-        </p:txBody>
-      </p:sp>
-      <p:sp>
-        <p:nvSpPr>
-          <p:cNvPr id="131" name="e1_0" descr="Editable line; source id e1_0"/>
-          <p:cNvSpPr/>
-          <p:nvPr/>
-        </p:nvSpPr>
-        <p:spPr>
-          <a:xfrm>
-            <a:off x="2349500" y="2317750"/>
-            <a:ext cx="238125" cy="79375"/>
-          </a:xfrm>
-          <a:custGeom>
-            <a:avLst/>
-            <a:gdLst/>
-            <a:ahLst/>
-            <a:cxnLst/>
-            <a:rect l="l" t="t" r="r" b="b"/>
-            <a:pathLst>
-              <a:path w="30000" h="10000">
-                <a:moveTo>
-                  <a:pt x="0" y="4100"/>
-                </a:moveTo>
-                <a:lnTo>
-                  <a:pt x="18000" y="4100"/>
-                </a:lnTo>
-                <a:lnTo>
-                  <a:pt x="18000" y="0"/>
-                </a:lnTo>
-                <a:lnTo>
-                  <a:pt x="30000" y="5000"/>
-                </a:lnTo>
-                <a:lnTo>
-                  <a:pt x="18000" y="10000"/>
-                </a:lnTo>
-                <a:lnTo>
-                  <a:pt x="18000" y="5900"/>
-                </a:lnTo>
-                <a:lnTo>
-                  <a:pt x="0" y="5900"/>
-                </a:lnTo>
-                <a:close/>
-              </a:path>
-            </a:pathLst>
-          </a:custGeom>
-          <a:solidFill>
-            <a:srgbClr val="4B5563"/>
-          </a:solidFill>
-          <a:ln>
-            <a:noFill/>
-          </a:ln>
-          <a:effectLst/>
-        </p:spPr>
-        <p:style>
-          <a:lnRef idx="1">
-            <a:schemeClr val="accent1"/>
-          </a:lnRef>
-          <a:fillRef idx="3">
-            <a:schemeClr val="accent1"/>
-          </a:fillRef>
-          <a:effectRef idx="0">
-            <a:schemeClr val="accent1"/>
-          </a:effectRef>
-          <a:fontRef idx="minor">
-            <a:schemeClr val="lt1"/>
-          </a:fontRef>
-        </p:style>
-        <p:txBody>
-          <a:bodyPr rtlCol="0" anchor="ctr"/>
-          <a:lstStyle/>
-          <a:p>
-            <a:pPr algn="ctr"/>
-          </a:p>
-        </p:txBody>
-      </p:sp>
-      <p:sp>
-        <p:nvSpPr>
-          <p:cNvPr id="132" name="e2_0" descr="Editable line; source id e2_0"/>
-          <p:cNvSpPr/>
-          <p:nvPr/>
-        </p:nvSpPr>
-        <p:spPr>
-          <a:xfrm>
-            <a:off x="4556125" y="2317750"/>
-            <a:ext cx="238125" cy="79375"/>
-          </a:xfrm>
-          <a:custGeom>
-            <a:avLst/>
-            <a:gdLst/>
-            <a:ahLst/>
-            <a:cxnLst/>
-            <a:rect l="l" t="t" r="r" b="b"/>
-            <a:pathLst>
-              <a:path w="30000" h="10000">
-                <a:moveTo>
-                  <a:pt x="0" y="4100"/>
-                </a:moveTo>
-                <a:lnTo>
-                  <a:pt x="18000" y="4100"/>
-                </a:lnTo>
-                <a:lnTo>
-                  <a:pt x="18000" y="0"/>
-                </a:lnTo>
-                <a:lnTo>
-                  <a:pt x="30000" y="5000"/>
-                </a:lnTo>
-                <a:lnTo>
-                  <a:pt x="18000" y="10000"/>
-                </a:lnTo>
-                <a:lnTo>
-                  <a:pt x="18000" y="5900"/>
-                </a:lnTo>
-                <a:lnTo>
-                  <a:pt x="0" y="5900"/>
-                </a:lnTo>
-                <a:close/>
-              </a:path>
-            </a:pathLst>
-          </a:custGeom>
-          <a:solidFill>
-            <a:srgbClr val="4B5563"/>
-          </a:solidFill>
-          <a:ln>
-            <a:noFill/>
-          </a:ln>
-          <a:effectLst/>
-        </p:spPr>
-        <p:style>
-          <a:lnRef idx="1">
-            <a:schemeClr val="accent1"/>
-          </a:lnRef>
-          <a:fillRef idx="3">
-            <a:schemeClr val="accent1"/>
-          </a:fillRef>
-          <a:effectRef idx="0">
-            <a:schemeClr val="accent1"/>
-          </a:effectRef>
-          <a:fontRef idx="minor">
-            <a:schemeClr val="lt1"/>
-          </a:fontRef>
-        </p:style>
-        <p:txBody>
-          <a:bodyPr rtlCol="0" anchor="ctr"/>
-          <a:lstStyle/>
-          <a:p>
-            <a:pPr algn="ctr"/>
-          </a:p>
-        </p:txBody>
-      </p:sp>
-      <p:cxnSp>
-        <p:nvCxnSpPr>
-          <p:cNvPr id="133" name="fk0_0" descr="Editable line; source id fk0_0"/>
-          <p:cNvCxnSpPr/>
-          <p:nvPr/>
-        </p:nvCxnSpPr>
-        <p:spPr>
-          <a:xfrm>
-            <a:off x="6778624" y="2357437"/>
-            <a:ext cx="190500" cy="0"/>
-          </a:xfrm>
-          <a:prstGeom prst="line">
-            <a:avLst/>
-          </a:prstGeom>
-          <a:ln w="14287">
-            <a:solidFill>
-              <a:srgbClr val="4B5563"/>
-            </a:solidFill>
-          </a:ln>
-          <a:effectLst/>
-        </p:spPr>
-        <p:style>
-          <a:lnRef idx="2">
-            <a:schemeClr val="accent1"/>
-          </a:lnRef>
-          <a:fillRef idx="0">
-            <a:schemeClr val="accent1"/>
-          </a:fillRef>
-          <a:effectRef idx="0">
-            <a:schemeClr val="accent1"/>
-          </a:effectRef>
-          <a:fontRef idx="minor">
-            <a:schemeClr val="tx1"/>
-          </a:fontRef>
-        </p:style>
-      </p:cxnSp>
-      <p:cxnSp>
-        <p:nvCxnSpPr>
-          <p:cNvPr id="134" name="fkv_0" descr="Editable line; source id fkv_0"/>
-          <p:cNvCxnSpPr/>
-          <p:nvPr/>
-        </p:nvCxnSpPr>
-        <p:spPr>
-          <a:xfrm>
-            <a:off x="6969124" y="1587499"/>
-            <a:ext cx="0" cy="1539875"/>
-          </a:xfrm>
-          <a:prstGeom prst="line">
-            <a:avLst/>
-          </a:prstGeom>
-          <a:ln w="14287">
-            <a:solidFill>
-              <a:srgbClr val="4B5563"/>
-            </a:solidFill>
-          </a:ln>
-          <a:effectLst/>
-        </p:spPr>
-        <p:style>
-          <a:lnRef idx="2">
-            <a:schemeClr val="accent1"/>
-          </a:lnRef>
-          <a:fillRef idx="0">
-            <a:schemeClr val="accent1"/>
-          </a:fillRef>
-          <a:effectRef idx="0">
-            <a:schemeClr val="accent1"/>
-          </a:effectRef>
-          <a:fontRef idx="minor">
-            <a:schemeClr val="tx1"/>
-          </a:fontRef>
-        </p:style>
-      </p:cxnSp>
-      <p:sp>
-        <p:nvSpPr>
-          <p:cNvPr id="135" name="fk1_0" descr="Editable line; source id fk1_0"/>
-          <p:cNvSpPr/>
-          <p:nvPr/>
-        </p:nvSpPr>
-        <p:spPr>
-          <a:xfrm>
-            <a:off x="6969125" y="1547812"/>
-            <a:ext cx="142875" cy="79375"/>
-          </a:xfrm>
-          <a:custGeom>
-            <a:avLst/>
-            <a:gdLst/>
-            <a:ahLst/>
-            <a:cxnLst/>
-            <a:rect l="l" t="t" r="r" b="b"/>
-            <a:pathLst>
-              <a:path w="18000" h="10000">
-                <a:moveTo>
-                  <a:pt x="0" y="4100"/>
-                </a:moveTo>
-                <a:lnTo>
-                  <a:pt x="6000" y="4100"/>
-                </a:lnTo>
-                <a:lnTo>
-                  <a:pt x="6000" y="0"/>
-                </a:lnTo>
-                <a:lnTo>
-                  <a:pt x="18000" y="5000"/>
-                </a:lnTo>
-                <a:lnTo>
-                  <a:pt x="6000" y="10000"/>
-                </a:lnTo>
-                <a:lnTo>
-                  <a:pt x="6000" y="5900"/>
-                </a:lnTo>
-                <a:lnTo>
-                  <a:pt x="0" y="5900"/>
-                </a:lnTo>
-                <a:close/>
-              </a:path>
-            </a:pathLst>
-          </a:custGeom>
-          <a:solidFill>
-            <a:srgbClr val="4B5563"/>
-          </a:solidFill>
-          <a:ln>
-            <a:noFill/>
-          </a:ln>
-          <a:effectLst/>
-        </p:spPr>
-        <p:style>
-          <a:lnRef idx="1">
-            <a:schemeClr val="accent1"/>
-          </a:lnRef>
-          <a:fillRef idx="3">
-            <a:schemeClr val="accent1"/>
-          </a:fillRef>
-          <a:effectRef idx="0">
-            <a:schemeClr val="accent1"/>
-          </a:effectRef>
-          <a:fontRef idx="minor">
-            <a:schemeClr val="lt1"/>
-          </a:fontRef>
-        </p:style>
-        <p:txBody>
-          <a:bodyPr rtlCol="0" anchor="ctr"/>
-          <a:lstStyle/>
-          <a:p>
-            <a:pPr algn="ctr"/>
-          </a:p>
-        </p:txBody>
-      </p:sp>
-      <p:sp>
-        <p:nvSpPr>
-          <p:cNvPr id="136" name="fk2_0" descr="Editable line; source id fk2_0"/>
-          <p:cNvSpPr/>
-          <p:nvPr/>
-        </p:nvSpPr>
-        <p:spPr>
-          <a:xfrm>
-            <a:off x="6969125" y="3087687"/>
-            <a:ext cx="142875" cy="79375"/>
-          </a:xfrm>
-          <a:custGeom>
-            <a:avLst/>
-            <a:gdLst/>
-            <a:ahLst/>
-            <a:cxnLst/>
-            <a:rect l="l" t="t" r="r" b="b"/>
-            <a:pathLst>
-              <a:path w="18000" h="10000">
-                <a:moveTo>
-                  <a:pt x="0" y="4100"/>
-                </a:moveTo>
-                <a:lnTo>
-                  <a:pt x="6000" y="4100"/>
-                </a:lnTo>
-                <a:lnTo>
-                  <a:pt x="6000" y="0"/>
-                </a:lnTo>
-                <a:lnTo>
-                  <a:pt x="18000" y="5000"/>
-                </a:lnTo>
-                <a:lnTo>
-                  <a:pt x="6000" y="10000"/>
-                </a:lnTo>
-                <a:lnTo>
-                  <a:pt x="6000" y="5900"/>
-                </a:lnTo>
-                <a:lnTo>
-                  <a:pt x="0" y="5900"/>
-                </a:lnTo>
-                <a:close/>
-              </a:path>
-            </a:pathLst>
-          </a:custGeom>
-          <a:solidFill>
-            <a:srgbClr val="4B5563"/>
-          </a:solidFill>
-          <a:ln>
-            <a:noFill/>
-          </a:ln>
-          <a:effectLst/>
-        </p:spPr>
-        <p:style>
-          <a:lnRef idx="1">
-            <a:schemeClr val="accent1"/>
-          </a:lnRef>
-          <a:fillRef idx="3">
-            <a:schemeClr val="accent1"/>
-          </a:fillRef>
-          <a:effectRef idx="0">
-            <a:schemeClr val="accent1"/>
-          </a:effectRef>
-          <a:fontRef idx="minor">
-            <a:schemeClr val="lt1"/>
-          </a:fontRef>
-        </p:style>
-        <p:txBody>
-          <a:bodyPr rtlCol="0" anchor="ctr"/>
-          <a:lstStyle/>
-          <a:p>
-            <a:pPr algn="ctr"/>
-          </a:p>
-        </p:txBody>
-      </p:sp>
-      <p:cxnSp>
-        <p:nvCxnSpPr>
-          <p:cNvPr id="137" name="mg1_0" descr="Editable line; source id mg1_0"/>
-          <p:cNvCxnSpPr/>
-          <p:nvPr/>
-        </p:nvCxnSpPr>
-        <p:spPr>
-          <a:xfrm>
-            <a:off x="9794874" y="1587499"/>
-            <a:ext cx="142875" cy="0"/>
-          </a:xfrm>
-          <a:prstGeom prst="line">
-            <a:avLst/>
-          </a:prstGeom>
-          <a:ln w="14287">
-            <a:solidFill>
-              <a:srgbClr val="4B5563"/>
-            </a:solidFill>
-          </a:ln>
-          <a:effectLst/>
-        </p:spPr>
-        <p:style>
-          <a:lnRef idx="2">
-            <a:schemeClr val="accent1"/>
-          </a:lnRef>
-          <a:fillRef idx="0">
-            <a:schemeClr val="accent1"/>
-          </a:fillRef>
-          <a:effectRef idx="0">
-            <a:schemeClr val="accent1"/>
-          </a:effectRef>
-          <a:fontRef idx="minor">
-            <a:schemeClr val="tx1"/>
-          </a:fontRef>
-        </p:style>
-      </p:cxnSp>
-      <p:cxnSp>
-        <p:nvCxnSpPr>
-          <p:cNvPr id="138" name="mg2_0" descr="Editable line; source id mg2_0"/>
-          <p:cNvCxnSpPr/>
-          <p:nvPr/>
-        </p:nvCxnSpPr>
-        <p:spPr>
-          <a:xfrm>
-            <a:off x="9794874" y="3127374"/>
-            <a:ext cx="142875" cy="0"/>
-          </a:xfrm>
-          <a:prstGeom prst="line">
-            <a:avLst/>
-          </a:prstGeom>
-          <a:ln w="14287">
-            <a:solidFill>
-              <a:srgbClr val="4B5563"/>
-            </a:solidFill>
-          </a:ln>
-          <a:effectLst/>
-        </p:spPr>
-        <p:style>
-          <a:lnRef idx="2">
-            <a:schemeClr val="accent1"/>
-          </a:lnRef>
-          <a:fillRef idx="0">
-            <a:schemeClr val="accent1"/>
-          </a:fillRef>
-          <a:effectRef idx="0">
-            <a:schemeClr val="accent1"/>
-          </a:effectRef>
-          <a:fontRef idx="minor">
-            <a:schemeClr val="tx1"/>
-          </a:fontRef>
-        </p:style>
-      </p:cxnSp>
-      <p:cxnSp>
-        <p:nvCxnSpPr>
-          <p:cNvPr id="139" name="mgv_0" descr="Editable line; source id mgv_0"/>
-          <p:cNvCxnSpPr/>
-          <p:nvPr/>
-        </p:nvCxnSpPr>
-        <p:spPr>
-          <a:xfrm>
-            <a:off x="9937749" y="1587499"/>
-            <a:ext cx="0" cy="1539875"/>
-          </a:xfrm>
-          <a:prstGeom prst="line">
-            <a:avLst/>
-          </a:prstGeom>
-          <a:ln w="14287">
-            <a:solidFill>
-              <a:srgbClr val="4B5563"/>
-            </a:solidFill>
-          </a:ln>
-          <a:effectLst/>
-        </p:spPr>
-        <p:style>
-          <a:lnRef idx="2">
-            <a:schemeClr val="accent1"/>
-          </a:lnRef>
-          <a:fillRef idx="0">
-            <a:schemeClr val="accent1"/>
-          </a:fillRef>
-          <a:effectRef idx="0">
-            <a:schemeClr val="accent1"/>
-          </a:effectRef>
-          <a:fontRef idx="minor">
-            <a:schemeClr val="tx1"/>
-          </a:fontRef>
-        </p:style>
-      </p:cxnSp>
-      <p:sp>
-        <p:nvSpPr>
-          <p:cNvPr id="140" name="mg3_0" descr="Editable line; source id mg3_0"/>
-          <p:cNvSpPr/>
-          <p:nvPr/>
-        </p:nvSpPr>
-        <p:spPr>
-          <a:xfrm>
-            <a:off x="9937750" y="2317750"/>
-            <a:ext cx="222250" cy="79375"/>
-          </a:xfrm>
-          <a:custGeom>
-            <a:avLst/>
-            <a:gdLst/>
-            <a:ahLst/>
-            <a:cxnLst/>
-            <a:rect l="l" t="t" r="r" b="b"/>
-            <a:pathLst>
-              <a:path w="28000" h="10000">
-                <a:moveTo>
-                  <a:pt x="0" y="4100"/>
-                </a:moveTo>
-                <a:lnTo>
-                  <a:pt x="16000" y="4100"/>
-                </a:lnTo>
-                <a:lnTo>
-                  <a:pt x="16000" y="0"/>
-                </a:lnTo>
-                <a:lnTo>
-                  <a:pt x="28000" y="5000"/>
-                </a:lnTo>
-                <a:lnTo>
-                  <a:pt x="16000" y="10000"/>
-                </a:lnTo>
-                <a:lnTo>
-                  <a:pt x="16000" y="5900"/>
-                </a:lnTo>
-                <a:lnTo>
-                  <a:pt x="0" y="5900"/>
-                </a:lnTo>
-                <a:close/>
-              </a:path>
-            </a:pathLst>
-          </a:custGeom>
-          <a:solidFill>
-            <a:srgbClr val="4B5563"/>
-          </a:solidFill>
-          <a:ln>
-            <a:noFill/>
-          </a:ln>
-          <a:effectLst/>
-        </p:spPr>
-        <p:style>
-          <a:lnRef idx="1">
-            <a:schemeClr val="accent1"/>
-          </a:lnRef>
-          <a:fillRef idx="3">
-            <a:schemeClr val="accent1"/>
-          </a:fillRef>
-          <a:effectRef idx="0">
-            <a:schemeClr val="accent1"/>
-          </a:effectRef>
-          <a:fontRef idx="minor">
-            <a:schemeClr val="lt1"/>
-          </a:fontRef>
-        </p:style>
-        <p:txBody>
-          <a:bodyPr rtlCol="0" anchor="ctr"/>
-          <a:lstStyle/>
-          <a:p>
-            <a:pPr algn="ctr"/>
-          </a:p>
-        </p:txBody>
-      </p:sp>
-      <p:cxnSp>
-        <p:nvCxnSpPr>
-          <p:cNvPr id="141" name="fb_0" descr="Editable line; source id fb_0"/>
-          <p:cNvCxnSpPr/>
-          <p:nvPr/>
-        </p:nvCxnSpPr>
-        <p:spPr>
-          <a:xfrm>
-            <a:off x="11009312" y="3857624"/>
-            <a:ext cx="0" cy="508000"/>
-          </a:xfrm>
-          <a:prstGeom prst="line">
-            <a:avLst/>
-          </a:prstGeom>
-          <a:ln w="14287">
-            <a:solidFill>
-              <a:srgbClr val="4B5563"/>
-            </a:solidFill>
-            <a:custDash>
-              <a:ds d="611111" sp="388889"/>
-            </a:custDash>
-          </a:ln>
-          <a:effectLst/>
-        </p:spPr>
-        <p:style>
-          <a:lnRef idx="2">
-            <a:schemeClr val="accent1"/>
-          </a:lnRef>
-          <a:fillRef idx="0">
-            <a:schemeClr val="accent1"/>
-          </a:fillRef>
-          <a:effectRef idx="0">
-            <a:schemeClr val="accent1"/>
-          </a:effectRef>
-          <a:fontRef idx="minor">
-            <a:schemeClr val="tx1"/>
-          </a:fontRef>
-        </p:style>
-      </p:cxnSp>
-      <p:cxnSp>
-        <p:nvCxnSpPr>
-          <p:cNvPr id="142" name="fb_1" descr="Editable line; source id fb_1"/>
-          <p:cNvCxnSpPr/>
-          <p:nvPr/>
-        </p:nvCxnSpPr>
-        <p:spPr>
-          <a:xfrm flipH="1">
-            <a:off x="3579812" y="4365624"/>
-            <a:ext cx="7429500" cy="0"/>
-          </a:xfrm>
-          <a:prstGeom prst="line">
-            <a:avLst/>
-          </a:prstGeom>
-          <a:ln w="14287">
-            <a:solidFill>
-              <a:srgbClr val="4B5563"/>
-            </a:solidFill>
-            <a:custDash>
-              <a:ds d="611111" sp="388889"/>
-            </a:custDash>
-          </a:ln>
-          <a:effectLst/>
-        </p:spPr>
-        <p:style>
-          <a:lnRef idx="2">
-            <a:schemeClr val="accent1"/>
-          </a:lnRef>
-          <a:fillRef idx="0">
-            <a:schemeClr val="accent1"/>
-          </a:fillRef>
-          <a:effectRef idx="0">
-            <a:schemeClr val="accent1"/>
-          </a:effectRef>
-          <a:fontRef idx="minor">
-            <a:schemeClr val="tx1"/>
-          </a:fontRef>
-        </p:style>
-      </p:cxnSp>
-      <p:cxnSp>
-        <p:nvCxnSpPr>
-          <p:cNvPr id="143" name="fb_2" descr="Editable line; source id fb_2"/>
-          <p:cNvCxnSpPr/>
-          <p:nvPr/>
-        </p:nvCxnSpPr>
-        <p:spPr>
-          <a:xfrm flipV="1">
-            <a:off x="3579812" y="3857624"/>
-            <a:ext cx="0" cy="508000"/>
-          </a:xfrm>
-          <a:prstGeom prst="line">
-            <a:avLst/>
-          </a:prstGeom>
-          <a:ln w="14287">
-            <a:solidFill>
-              <a:srgbClr val="4B5563"/>
-            </a:solidFill>
-            <a:custDash>
-              <a:ds d="611111" sp="388889"/>
-            </a:custDash>
-            <a:tailEnd type="triangle"/>
-          </a:ln>
-          <a:effectLst/>
-        </p:spPr>
-        <p:style>
-          <a:lnRef idx="2">
-            <a:schemeClr val="accent1"/>
-          </a:lnRef>
-          <a:fillRef idx="0">
-            <a:schemeClr val="accent1"/>
-          </a:fillRef>
-          <a:effectRef idx="0">
-            <a:schemeClr val="accent1"/>
-          </a:effectRef>
-          <a:fontRef idx="minor">
-            <a:schemeClr val="tx1"/>
-          </a:fontRef>
-        </p:style>
-      </p:cxnSp>
-      <p:sp>
-        <p:nvSpPr>
-          <p:cNvPr id="144" name="fb_p" descr="Editable shape; source id fb_p"/>
-          <p:cNvSpPr/>
-          <p:nvPr/>
-        </p:nvSpPr>
-        <p:spPr>
-          <a:xfrm>
-            <a:off x="6651624" y="4206874"/>
-            <a:ext cx="1285874" cy="309562"/>
-          </a:xfrm>
-          <a:prstGeom prst="roundRect">
-            <a:avLst>
-              <a:gd name="adj" fmla="val 50000"/>
-            </a:avLst>
-          </a:prstGeom>
-          <a:solidFill>
-            <a:srgbClr val="FFFFFF"/>
-          </a:solidFill>
-          <a:ln w="8731">
-            <a:solidFill>
-              <a:srgbClr val="CBD3DA"/>
-            </a:solidFill>
-          </a:ln>
-          <a:effectLst/>
-        </p:spPr>
-        <p:style>
-          <a:lnRef idx="1">
-            <a:schemeClr val="accent1"/>
-          </a:lnRef>
-          <a:fillRef idx="3">
-            <a:schemeClr val="accent1"/>
-          </a:fillRef>
-          <a:effectRef idx="0">
-            <a:schemeClr val="accent1"/>
-          </a:effectRef>
-          <a:fontRef idx="minor">
-            <a:schemeClr val="lt1"/>
-          </a:fontRef>
-        </p:style>
-        <p:txBody>
-          <a:bodyPr rtlCol="0" anchor="ctr"/>
-          <a:lstStyle/>
-          <a:p>
-            <a:pPr algn="ctr"/>
-          </a:p>
-        </p:txBody>
-      </p:sp>
-      <p:sp>
-        <p:nvSpPr>
-          <p:cNvPr id="145" name="fb_p_t" descr="Editable text; source id fb_p_t"/>
-          <p:cNvSpPr txBox="1"/>
-          <p:nvPr/>
-        </p:nvSpPr>
-        <p:spPr>
-          <a:xfrm>
-            <a:off x="6730999" y="4238624"/>
-            <a:ext cx="1127124" cy="246062"/>
+            <a:off x="7715249" y="6191249"/>
+            <a:ext cx="1277937" cy="285749"/>
           </a:xfrm>
           <a:prstGeom prst="rect">
             <a:avLst/>
@@ -10333,25 +9217,25 @@
                 <a:ea typeface="Noto Sans CJK SC"/>
                 <a:cs typeface="Noto Sans CJK SC"/>
               </a:rPr>
-              <a:t>更新组成与工艺</a:t>
+              <a:t>高温相与冷却产物</a:t>
             </a:r>
           </a:p>
         </p:txBody>
       </p:sp>
       <p:sp>
         <p:nvSpPr>
-          <p:cNvPr id="146" name="q1" descr="Editable shape; source id q1"/>
+          <p:cNvPr id="123" name="q1" descr="Editable shape; source id q1"/>
           <p:cNvSpPr/>
           <p:nvPr/>
         </p:nvSpPr>
         <p:spPr>
           <a:xfrm>
-            <a:off x="476249" y="5270499"/>
-            <a:ext cx="3524249" cy="825499"/>
+            <a:off x="476249" y="7429499"/>
+            <a:ext cx="3571874" cy="523874"/>
           </a:xfrm>
           <a:prstGeom prst="roundRect">
             <a:avLst>
-              <a:gd name="adj" fmla="val 8653"/>
+              <a:gd name="adj" fmla="val 13636"/>
             </a:avLst>
           </a:prstGeom>
           <a:solidFill>
@@ -10388,14 +9272,60 @@
       </p:sp>
       <p:sp>
         <p:nvSpPr>
-          <p:cNvPr id="147" name="q1_t" descr="Editable text; source id q1_t"/>
+          <p:cNvPr id="124" name="q1_b" descr="Editable shape; source id q1_b"/>
+          <p:cNvSpPr/>
+          <p:nvPr/>
+        </p:nvSpPr>
+        <p:spPr>
+          <a:xfrm>
+            <a:off x="476249" y="7429499"/>
+            <a:ext cx="63499" cy="523874"/>
+          </a:xfrm>
+          <a:prstGeom prst="roundRect">
+            <a:avLst>
+              <a:gd name="adj" fmla="val 37500"/>
+            </a:avLst>
+          </a:prstGeom>
+          <a:solidFill>
+            <a:srgbClr val="C48A24"/>
+          </a:solidFill>
+          <a:ln>
+            <a:noFill/>
+          </a:ln>
+          <a:effectLst/>
+        </p:spPr>
+        <p:style>
+          <a:lnRef idx="1">
+            <a:schemeClr val="accent1"/>
+          </a:lnRef>
+          <a:fillRef idx="3">
+            <a:schemeClr val="accent1"/>
+          </a:fillRef>
+          <a:effectRef idx="0">
+            <a:schemeClr val="accent1"/>
+          </a:effectRef>
+          <a:fontRef idx="minor">
+            <a:schemeClr val="lt1"/>
+          </a:fontRef>
+        </p:style>
+        <p:txBody>
+          <a:bodyPr rtlCol="0" anchor="ctr"/>
+          <a:lstStyle/>
+          <a:p>
+            <a:pPr algn="ctr"/>
+          </a:p>
+        </p:txBody>
+      </p:sp>
+      <p:sp>
+        <p:nvSpPr>
+          <p:cNvPr id="125" name="q1_t" descr="Editable text; source id q1_t"/>
           <p:cNvSpPr txBox="1"/>
           <p:nvPr/>
         </p:nvSpPr>
         <p:spPr>
           <a:xfrm>
-            <a:off x="666749" y="5556249"/>
-            <a:ext cx="3143249" cy="246062"/>
+            <a:off x="682624" y="7516812"/>
+            <a:ext cx="3174999" cy="349249"/>
           </a:xfrm>
           <a:prstGeom prst="rect">
             <a:avLst/>
@@ -10411,7 +9341,7 @@
           <a:p>
             <a:pPr algn="ctr" fontAlgn="base">
               <a:lnSpc>
-                <a:spcPts val="1906"/>
+                <a:spcPts val="1921"/>
               </a:lnSpc>
               <a:spcBef>
                 <a:spcPts val="0"/>
@@ -10419,7 +9349,7 @@
               <a:spcAft>
                 <a:spcPts val="0"/>
               </a:spcAft>
-              <a:defRPr sz="1306" b="1" i="0" lang="zh-CN" dirty="0">
+              <a:defRPr sz="1312" b="0" i="0" lang="zh-CN" dirty="0">
                 <a:solidFill>
                   <a:srgbClr val="7A5410"/>
                 </a:solidFill>
@@ -10429,7 +9359,7 @@
               </a:defRPr>
             </a:pPr>
             <a:r>
-              <a:rPr sz="1306" b="1" i="0" lang="zh-CN" dirty="0">
+              <a:rPr sz="1312" b="0" i="0" lang="zh-CN" dirty="0">
                 <a:solidFill>
                   <a:srgbClr val="7A5410"/>
                 </a:solidFill>
@@ -10440,7 +9370,7 @@
               <a:t>Zn </a:t>
             </a:r>
             <a:r>
-              <a:rPr sz="1306" b="1" i="0" lang="zh-CN" dirty="0">
+              <a:rPr sz="1312" b="0" i="0" lang="zh-CN" dirty="0">
                 <a:solidFill>
                   <a:srgbClr val="7A5410"/>
                 </a:solidFill>
@@ -10455,18 +9385,18 @@
       </p:sp>
       <p:sp>
         <p:nvSpPr>
-          <p:cNvPr id="148" name="q2" descr="Editable shape; source id q2"/>
+          <p:cNvPr id="126" name="q2" descr="Editable shape; source id q2"/>
           <p:cNvSpPr/>
           <p:nvPr/>
         </p:nvSpPr>
         <p:spPr>
           <a:xfrm>
-            <a:off x="4333874" y="5270499"/>
-            <a:ext cx="3524249" cy="825499"/>
+            <a:off x="4444999" y="7429499"/>
+            <a:ext cx="3571874" cy="523874"/>
           </a:xfrm>
           <a:prstGeom prst="roundRect">
             <a:avLst>
-              <a:gd name="adj" fmla="val 8653"/>
+              <a:gd name="adj" fmla="val 13636"/>
             </a:avLst>
           </a:prstGeom>
           <a:solidFill>
@@ -10503,14 +9433,60 @@
       </p:sp>
       <p:sp>
         <p:nvSpPr>
-          <p:cNvPr id="149" name="q2_t" descr="Editable text; source id q2_t"/>
+          <p:cNvPr id="127" name="q2_b" descr="Editable shape; source id q2_b"/>
+          <p:cNvSpPr/>
+          <p:nvPr/>
+        </p:nvSpPr>
+        <p:spPr>
+          <a:xfrm>
+            <a:off x="4444999" y="7429499"/>
+            <a:ext cx="63499" cy="523874"/>
+          </a:xfrm>
+          <a:prstGeom prst="roundRect">
+            <a:avLst>
+              <a:gd name="adj" fmla="val 37500"/>
+            </a:avLst>
+          </a:prstGeom>
+          <a:solidFill>
+            <a:srgbClr val="C48A24"/>
+          </a:solidFill>
+          <a:ln>
+            <a:noFill/>
+          </a:ln>
+          <a:effectLst/>
+        </p:spPr>
+        <p:style>
+          <a:lnRef idx="1">
+            <a:schemeClr val="accent1"/>
+          </a:lnRef>
+          <a:fillRef idx="3">
+            <a:schemeClr val="accent1"/>
+          </a:fillRef>
+          <a:effectRef idx="0">
+            <a:schemeClr val="accent1"/>
+          </a:effectRef>
+          <a:fontRef idx="minor">
+            <a:schemeClr val="lt1"/>
+          </a:fontRef>
+        </p:style>
+        <p:txBody>
+          <a:bodyPr rtlCol="0" anchor="ctr"/>
+          <a:lstStyle/>
+          <a:p>
+            <a:pPr algn="ctr"/>
+          </a:p>
+        </p:txBody>
+      </p:sp>
+      <p:sp>
+        <p:nvSpPr>
+          <p:cNvPr id="128" name="q2_t" descr="Editable text; source id q2_t"/>
           <p:cNvSpPr txBox="1"/>
           <p:nvPr/>
         </p:nvSpPr>
         <p:spPr>
           <a:xfrm>
-            <a:off x="4524374" y="5556249"/>
-            <a:ext cx="3143249" cy="246062"/>
+            <a:off x="4651374" y="7516812"/>
+            <a:ext cx="3174999" cy="349249"/>
           </a:xfrm>
           <a:prstGeom prst="rect">
             <a:avLst/>
@@ -10526,7 +9502,7 @@
           <a:p>
             <a:pPr algn="ctr" fontAlgn="base">
               <a:lnSpc>
-                <a:spcPts val="1906"/>
+                <a:spcPts val="1921"/>
               </a:lnSpc>
               <a:spcBef>
                 <a:spcPts val="0"/>
@@ -10534,7 +9510,7 @@
               <a:spcAft>
                 <a:spcPts val="0"/>
               </a:spcAft>
-              <a:defRPr sz="1306" b="1" i="0" lang="zh-CN" dirty="0">
+              <a:defRPr sz="1312" b="0" i="0" lang="zh-CN" dirty="0">
                 <a:solidFill>
                   <a:srgbClr val="7A5410"/>
                 </a:solidFill>
@@ -10544,7 +9520,7 @@
               </a:defRPr>
             </a:pPr>
             <a:r>
-              <a:rPr sz="1306" b="1" i="0" lang="zh-CN" dirty="0">
+              <a:rPr sz="1312" b="0" i="0" lang="zh-CN" dirty="0">
                 <a:solidFill>
                   <a:srgbClr val="7A5410"/>
                 </a:solidFill>
@@ -10559,18 +9535,18 @@
       </p:sp>
       <p:sp>
         <p:nvSpPr>
-          <p:cNvPr id="150" name="q3" descr="Editable shape; source id q3"/>
+          <p:cNvPr id="129" name="q3" descr="Editable shape; source id q3"/>
           <p:cNvSpPr/>
           <p:nvPr/>
         </p:nvSpPr>
         <p:spPr>
           <a:xfrm>
-            <a:off x="8191499" y="5270499"/>
-            <a:ext cx="3524249" cy="825499"/>
+            <a:off x="8413749" y="7429499"/>
+            <a:ext cx="3571874" cy="523874"/>
           </a:xfrm>
           <a:prstGeom prst="roundRect">
             <a:avLst>
-              <a:gd name="adj" fmla="val 8653"/>
+              <a:gd name="adj" fmla="val 13636"/>
             </a:avLst>
           </a:prstGeom>
           <a:solidFill>
@@ -10607,14 +9583,60 @@
       </p:sp>
       <p:sp>
         <p:nvSpPr>
-          <p:cNvPr id="151" name="q3_t" descr="Editable text; source id q3_t"/>
+          <p:cNvPr id="130" name="q3_b" descr="Editable shape; source id q3_b"/>
+          <p:cNvSpPr/>
+          <p:nvPr/>
+        </p:nvSpPr>
+        <p:spPr>
+          <a:xfrm>
+            <a:off x="8413749" y="7429499"/>
+            <a:ext cx="63499" cy="523874"/>
+          </a:xfrm>
+          <a:prstGeom prst="roundRect">
+            <a:avLst>
+              <a:gd name="adj" fmla="val 37500"/>
+            </a:avLst>
+          </a:prstGeom>
+          <a:solidFill>
+            <a:srgbClr val="C48A24"/>
+          </a:solidFill>
+          <a:ln>
+            <a:noFill/>
+          </a:ln>
+          <a:effectLst/>
+        </p:spPr>
+        <p:style>
+          <a:lnRef idx="1">
+            <a:schemeClr val="accent1"/>
+          </a:lnRef>
+          <a:fillRef idx="3">
+            <a:schemeClr val="accent1"/>
+          </a:fillRef>
+          <a:effectRef idx="0">
+            <a:schemeClr val="accent1"/>
+          </a:effectRef>
+          <a:fontRef idx="minor">
+            <a:schemeClr val="lt1"/>
+          </a:fontRef>
+        </p:style>
+        <p:txBody>
+          <a:bodyPr rtlCol="0" anchor="ctr"/>
+          <a:lstStyle/>
+          <a:p>
+            <a:pPr algn="ctr"/>
+          </a:p>
+        </p:txBody>
+      </p:sp>
+      <p:sp>
+        <p:nvSpPr>
+          <p:cNvPr id="131" name="q3_t" descr="Editable text; source id q3_t"/>
           <p:cNvSpPr txBox="1"/>
           <p:nvPr/>
         </p:nvSpPr>
         <p:spPr>
           <a:xfrm>
-            <a:off x="8381999" y="5556249"/>
-            <a:ext cx="3143249" cy="246062"/>
+            <a:off x="8620124" y="7516812"/>
+            <a:ext cx="3174999" cy="349249"/>
           </a:xfrm>
           <a:prstGeom prst="rect">
             <a:avLst/>
@@ -10630,7 +9652,7 @@
           <a:p>
             <a:pPr algn="ctr" fontAlgn="base">
               <a:lnSpc>
-                <a:spcPts val="1906"/>
+                <a:spcPts val="1921"/>
               </a:lnSpc>
               <a:spcBef>
                 <a:spcPts val="0"/>
@@ -10638,7 +9660,7 @@
               <a:spcAft>
                 <a:spcPts val="0"/>
               </a:spcAft>
-              <a:defRPr sz="1306" b="1" i="0" lang="zh-CN" dirty="0">
+              <a:defRPr sz="1312" b="0" i="0" lang="zh-CN" dirty="0">
                 <a:solidFill>
                   <a:srgbClr val="7A5410"/>
                 </a:solidFill>
@@ -10648,7 +9670,7 @@
               </a:defRPr>
             </a:pPr>
             <a:r>
-              <a:rPr sz="1306" b="1" i="0" lang="zh-CN" dirty="0">
+              <a:rPr sz="1312" b="0" i="0" lang="zh-CN" dirty="0">
                 <a:solidFill>
                   <a:srgbClr val="7A5410"/>
                 </a:solidFill>
@@ -10657,6 +9679,817 @@
                 <a:cs typeface="Noto Sans CJK SC"/>
               </a:rPr>
               <a:t>实际组成与结构信号如何对应？</a:t>
+            </a:r>
+          </a:p>
+        </p:txBody>
+      </p:sp>
+      <p:sp>
+        <p:nvSpPr>
+          <p:cNvPr id="132" name="e1_0" descr="Editable line; source id e1_0"/>
+          <p:cNvSpPr/>
+          <p:nvPr/>
+        </p:nvSpPr>
+        <p:spPr>
+          <a:xfrm>
+            <a:off x="4079875" y="1730375"/>
+            <a:ext cx="333375" cy="79375"/>
+          </a:xfrm>
+          <a:custGeom>
+            <a:avLst/>
+            <a:gdLst/>
+            <a:ahLst/>
+            <a:cxnLst/>
+            <a:rect l="l" t="t" r="r" b="b"/>
+            <a:pathLst>
+              <a:path w="42000" h="10000">
+                <a:moveTo>
+                  <a:pt x="0" y="4100"/>
+                </a:moveTo>
+                <a:lnTo>
+                  <a:pt x="30000" y="4100"/>
+                </a:lnTo>
+                <a:lnTo>
+                  <a:pt x="30000" y="0"/>
+                </a:lnTo>
+                <a:lnTo>
+                  <a:pt x="42000" y="5000"/>
+                </a:lnTo>
+                <a:lnTo>
+                  <a:pt x="30000" y="10000"/>
+                </a:lnTo>
+                <a:lnTo>
+                  <a:pt x="30000" y="5900"/>
+                </a:lnTo>
+                <a:lnTo>
+                  <a:pt x="0" y="5900"/>
+                </a:lnTo>
+                <a:close/>
+              </a:path>
+            </a:pathLst>
+          </a:custGeom>
+          <a:solidFill>
+            <a:srgbClr val="4B5563"/>
+          </a:solidFill>
+          <a:ln>
+            <a:noFill/>
+          </a:ln>
+          <a:effectLst/>
+        </p:spPr>
+        <p:style>
+          <a:lnRef idx="1">
+            <a:schemeClr val="accent1"/>
+          </a:lnRef>
+          <a:fillRef idx="3">
+            <a:schemeClr val="accent1"/>
+          </a:fillRef>
+          <a:effectRef idx="0">
+            <a:schemeClr val="accent1"/>
+          </a:effectRef>
+          <a:fontRef idx="minor">
+            <a:schemeClr val="lt1"/>
+          </a:fontRef>
+        </p:style>
+        <p:txBody>
+          <a:bodyPr rtlCol="0" anchor="ctr"/>
+          <a:lstStyle/>
+          <a:p>
+            <a:pPr algn="ctr"/>
+          </a:p>
+        </p:txBody>
+      </p:sp>
+      <p:sp>
+        <p:nvSpPr>
+          <p:cNvPr id="133" name="e2_0" descr="Editable line; source id e2_0"/>
+          <p:cNvSpPr/>
+          <p:nvPr/>
+        </p:nvSpPr>
+        <p:spPr>
+          <a:xfrm>
+            <a:off x="8048625" y="1730375"/>
+            <a:ext cx="333375" cy="79375"/>
+          </a:xfrm>
+          <a:custGeom>
+            <a:avLst/>
+            <a:gdLst/>
+            <a:ahLst/>
+            <a:cxnLst/>
+            <a:rect l="l" t="t" r="r" b="b"/>
+            <a:pathLst>
+              <a:path w="42000" h="10000">
+                <a:moveTo>
+                  <a:pt x="0" y="4100"/>
+                </a:moveTo>
+                <a:lnTo>
+                  <a:pt x="30000" y="4100"/>
+                </a:lnTo>
+                <a:lnTo>
+                  <a:pt x="30000" y="0"/>
+                </a:lnTo>
+                <a:lnTo>
+                  <a:pt x="42000" y="5000"/>
+                </a:lnTo>
+                <a:lnTo>
+                  <a:pt x="30000" y="10000"/>
+                </a:lnTo>
+                <a:lnTo>
+                  <a:pt x="30000" y="5900"/>
+                </a:lnTo>
+                <a:lnTo>
+                  <a:pt x="0" y="5900"/>
+                </a:lnTo>
+                <a:close/>
+              </a:path>
+            </a:pathLst>
+          </a:custGeom>
+          <a:solidFill>
+            <a:srgbClr val="4B5563"/>
+          </a:solidFill>
+          <a:ln>
+            <a:noFill/>
+          </a:ln>
+          <a:effectLst/>
+        </p:spPr>
+        <p:style>
+          <a:lnRef idx="1">
+            <a:schemeClr val="accent1"/>
+          </a:lnRef>
+          <a:fillRef idx="3">
+            <a:schemeClr val="accent1"/>
+          </a:fillRef>
+          <a:effectRef idx="0">
+            <a:schemeClr val="accent1"/>
+          </a:effectRef>
+          <a:fontRef idx="minor">
+            <a:schemeClr val="lt1"/>
+          </a:fontRef>
+        </p:style>
+        <p:txBody>
+          <a:bodyPr rtlCol="0" anchor="ctr"/>
+          <a:lstStyle/>
+          <a:p>
+            <a:pPr algn="ctr"/>
+          </a:p>
+        </p:txBody>
+      </p:sp>
+      <p:cxnSp>
+        <p:nvCxnSpPr>
+          <p:cNvPr id="134" name="fk0_0" descr="Editable line; source id fk0_0"/>
+          <p:cNvCxnSpPr/>
+          <p:nvPr/>
+        </p:nvCxnSpPr>
+        <p:spPr>
+          <a:xfrm>
+            <a:off x="10199687" y="2841624"/>
+            <a:ext cx="0" cy="682625"/>
+          </a:xfrm>
+          <a:prstGeom prst="line">
+            <a:avLst/>
+          </a:prstGeom>
+          <a:ln w="14287">
+            <a:solidFill>
+              <a:srgbClr val="4B5563"/>
+            </a:solidFill>
+          </a:ln>
+          <a:effectLst/>
+        </p:spPr>
+        <p:style>
+          <a:lnRef idx="2">
+            <a:schemeClr val="accent1"/>
+          </a:lnRef>
+          <a:fillRef idx="0">
+            <a:schemeClr val="accent1"/>
+          </a:fillRef>
+          <a:effectRef idx="0">
+            <a:schemeClr val="accent1"/>
+          </a:effectRef>
+          <a:fontRef idx="minor">
+            <a:schemeClr val="tx1"/>
+          </a:fontRef>
+        </p:style>
+      </p:cxnSp>
+      <p:cxnSp>
+        <p:nvCxnSpPr>
+          <p:cNvPr id="135" name="fkh_0" descr="Editable line; source id fkh_0"/>
+          <p:cNvCxnSpPr/>
+          <p:nvPr/>
+        </p:nvCxnSpPr>
+        <p:spPr>
+          <a:xfrm>
+            <a:off x="2936874" y="3524249"/>
+            <a:ext cx="7262813" cy="0"/>
+          </a:xfrm>
+          <a:prstGeom prst="line">
+            <a:avLst/>
+          </a:prstGeom>
+          <a:ln w="14287">
+            <a:solidFill>
+              <a:srgbClr val="4B5563"/>
+            </a:solidFill>
+          </a:ln>
+          <a:effectLst/>
+        </p:spPr>
+        <p:style>
+          <a:lnRef idx="2">
+            <a:schemeClr val="accent1"/>
+          </a:lnRef>
+          <a:fillRef idx="0">
+            <a:schemeClr val="accent1"/>
+          </a:fillRef>
+          <a:effectRef idx="0">
+            <a:schemeClr val="accent1"/>
+          </a:effectRef>
+          <a:fontRef idx="minor">
+            <a:schemeClr val="tx1"/>
+          </a:fontRef>
+        </p:style>
+      </p:cxnSp>
+      <p:sp>
+        <p:nvSpPr>
+          <p:cNvPr id="136" name="fk1_0" descr="Editable line; source id fk1_0"/>
+          <p:cNvSpPr/>
+          <p:nvPr/>
+        </p:nvSpPr>
+        <p:spPr>
+          <a:xfrm>
+            <a:off x="2897187" y="3524250"/>
+            <a:ext cx="79375" cy="254000"/>
+          </a:xfrm>
+          <a:custGeom>
+            <a:avLst/>
+            <a:gdLst/>
+            <a:ahLst/>
+            <a:cxnLst/>
+            <a:rect l="l" t="t" r="r" b="b"/>
+            <a:pathLst>
+              <a:path w="10000" h="32000">
+                <a:moveTo>
+                  <a:pt x="5900" y="0"/>
+                </a:moveTo>
+                <a:lnTo>
+                  <a:pt x="5900" y="20000"/>
+                </a:lnTo>
+                <a:lnTo>
+                  <a:pt x="10000" y="20000"/>
+                </a:lnTo>
+                <a:lnTo>
+                  <a:pt x="5000" y="32000"/>
+                </a:lnTo>
+                <a:lnTo>
+                  <a:pt x="0" y="20000"/>
+                </a:lnTo>
+                <a:lnTo>
+                  <a:pt x="4100" y="20000"/>
+                </a:lnTo>
+                <a:lnTo>
+                  <a:pt x="4100" y="0"/>
+                </a:lnTo>
+                <a:close/>
+              </a:path>
+            </a:pathLst>
+          </a:custGeom>
+          <a:solidFill>
+            <a:srgbClr val="4B5563"/>
+          </a:solidFill>
+          <a:ln>
+            <a:noFill/>
+          </a:ln>
+          <a:effectLst/>
+        </p:spPr>
+        <p:style>
+          <a:lnRef idx="1">
+            <a:schemeClr val="accent1"/>
+          </a:lnRef>
+          <a:fillRef idx="3">
+            <a:schemeClr val="accent1"/>
+          </a:fillRef>
+          <a:effectRef idx="0">
+            <a:schemeClr val="accent1"/>
+          </a:effectRef>
+          <a:fontRef idx="minor">
+            <a:schemeClr val="lt1"/>
+          </a:fontRef>
+        </p:style>
+        <p:txBody>
+          <a:bodyPr rtlCol="0" anchor="ctr"/>
+          <a:lstStyle/>
+          <a:p>
+            <a:pPr algn="ctr"/>
+          </a:p>
+        </p:txBody>
+      </p:sp>
+      <p:sp>
+        <p:nvSpPr>
+          <p:cNvPr id="137" name="fk2_0" descr="Editable line; source id fk2_0"/>
+          <p:cNvSpPr/>
+          <p:nvPr/>
+        </p:nvSpPr>
+        <p:spPr>
+          <a:xfrm>
+            <a:off x="8929687" y="3524250"/>
+            <a:ext cx="79375" cy="254000"/>
+          </a:xfrm>
+          <a:custGeom>
+            <a:avLst/>
+            <a:gdLst/>
+            <a:ahLst/>
+            <a:cxnLst/>
+            <a:rect l="l" t="t" r="r" b="b"/>
+            <a:pathLst>
+              <a:path w="10000" h="32000">
+                <a:moveTo>
+                  <a:pt x="5900" y="0"/>
+                </a:moveTo>
+                <a:lnTo>
+                  <a:pt x="5900" y="20000"/>
+                </a:lnTo>
+                <a:lnTo>
+                  <a:pt x="10000" y="20000"/>
+                </a:lnTo>
+                <a:lnTo>
+                  <a:pt x="5000" y="32000"/>
+                </a:lnTo>
+                <a:lnTo>
+                  <a:pt x="0" y="20000"/>
+                </a:lnTo>
+                <a:lnTo>
+                  <a:pt x="4100" y="20000"/>
+                </a:lnTo>
+                <a:lnTo>
+                  <a:pt x="4100" y="0"/>
+                </a:lnTo>
+                <a:close/>
+              </a:path>
+            </a:pathLst>
+          </a:custGeom>
+          <a:solidFill>
+            <a:srgbClr val="4B5563"/>
+          </a:solidFill>
+          <a:ln>
+            <a:noFill/>
+          </a:ln>
+          <a:effectLst/>
+        </p:spPr>
+        <p:style>
+          <a:lnRef idx="1">
+            <a:schemeClr val="accent1"/>
+          </a:lnRef>
+          <a:fillRef idx="3">
+            <a:schemeClr val="accent1"/>
+          </a:fillRef>
+          <a:effectRef idx="0">
+            <a:schemeClr val="accent1"/>
+          </a:effectRef>
+          <a:fontRef idx="minor">
+            <a:schemeClr val="lt1"/>
+          </a:fontRef>
+        </p:style>
+        <p:txBody>
+          <a:bodyPr rtlCol="0" anchor="ctr"/>
+          <a:lstStyle/>
+          <a:p>
+            <a:pPr algn="ctr"/>
+          </a:p>
+        </p:txBody>
+      </p:sp>
+      <p:cxnSp>
+        <p:nvCxnSpPr>
+          <p:cNvPr id="138" name="mg1_0" descr="Editable line; source id mg1_0"/>
+          <p:cNvCxnSpPr/>
+          <p:nvPr/>
+        </p:nvCxnSpPr>
+        <p:spPr>
+          <a:xfrm>
+            <a:off x="2936874" y="4968874"/>
+            <a:ext cx="0" cy="285750"/>
+          </a:xfrm>
+          <a:prstGeom prst="line">
+            <a:avLst/>
+          </a:prstGeom>
+          <a:ln w="14287">
+            <a:solidFill>
+              <a:srgbClr val="4B5563"/>
+            </a:solidFill>
+          </a:ln>
+          <a:effectLst/>
+        </p:spPr>
+        <p:style>
+          <a:lnRef idx="2">
+            <a:schemeClr val="accent1"/>
+          </a:lnRef>
+          <a:fillRef idx="0">
+            <a:schemeClr val="accent1"/>
+          </a:fillRef>
+          <a:effectRef idx="0">
+            <a:schemeClr val="accent1"/>
+          </a:effectRef>
+          <a:fontRef idx="minor">
+            <a:schemeClr val="tx1"/>
+          </a:fontRef>
+        </p:style>
+      </p:cxnSp>
+      <p:cxnSp>
+        <p:nvCxnSpPr>
+          <p:cNvPr id="139" name="mg2_0" descr="Editable line; source id mg2_0"/>
+          <p:cNvCxnSpPr/>
+          <p:nvPr/>
+        </p:nvCxnSpPr>
+        <p:spPr>
+          <a:xfrm>
+            <a:off x="8969374" y="4968874"/>
+            <a:ext cx="0" cy="285750"/>
+          </a:xfrm>
+          <a:prstGeom prst="line">
+            <a:avLst/>
+          </a:prstGeom>
+          <a:ln w="14287">
+            <a:solidFill>
+              <a:srgbClr val="4B5563"/>
+            </a:solidFill>
+          </a:ln>
+          <a:effectLst/>
+        </p:spPr>
+        <p:style>
+          <a:lnRef idx="2">
+            <a:schemeClr val="accent1"/>
+          </a:lnRef>
+          <a:fillRef idx="0">
+            <a:schemeClr val="accent1"/>
+          </a:fillRef>
+          <a:effectRef idx="0">
+            <a:schemeClr val="accent1"/>
+          </a:effectRef>
+          <a:fontRef idx="minor">
+            <a:schemeClr val="tx1"/>
+          </a:fontRef>
+        </p:style>
+      </p:cxnSp>
+      <p:cxnSp>
+        <p:nvCxnSpPr>
+          <p:cNvPr id="140" name="mgh_0" descr="Editable line; source id mgh_0"/>
+          <p:cNvCxnSpPr/>
+          <p:nvPr/>
+        </p:nvCxnSpPr>
+        <p:spPr>
+          <a:xfrm>
+            <a:off x="2936874" y="5254624"/>
+            <a:ext cx="6032500" cy="0"/>
+          </a:xfrm>
+          <a:prstGeom prst="line">
+            <a:avLst/>
+          </a:prstGeom>
+          <a:ln w="14287">
+            <a:solidFill>
+              <a:srgbClr val="4B5563"/>
+            </a:solidFill>
+          </a:ln>
+          <a:effectLst/>
+        </p:spPr>
+        <p:style>
+          <a:lnRef idx="2">
+            <a:schemeClr val="accent1"/>
+          </a:lnRef>
+          <a:fillRef idx="0">
+            <a:schemeClr val="accent1"/>
+          </a:fillRef>
+          <a:effectRef idx="0">
+            <a:schemeClr val="accent1"/>
+          </a:effectRef>
+          <a:fontRef idx="minor">
+            <a:schemeClr val="tx1"/>
+          </a:fontRef>
+        </p:style>
+      </p:cxnSp>
+      <p:sp>
+        <p:nvSpPr>
+          <p:cNvPr id="141" name="mg3_0" descr="Editable line; source id mg3_0"/>
+          <p:cNvSpPr/>
+          <p:nvPr/>
+        </p:nvSpPr>
+        <p:spPr>
+          <a:xfrm>
+            <a:off x="6072187" y="5254625"/>
+            <a:ext cx="79375" cy="317500"/>
+          </a:xfrm>
+          <a:custGeom>
+            <a:avLst/>
+            <a:gdLst/>
+            <a:ahLst/>
+            <a:cxnLst/>
+            <a:rect l="l" t="t" r="r" b="b"/>
+            <a:pathLst>
+              <a:path w="10000" h="40000">
+                <a:moveTo>
+                  <a:pt x="5900" y="0"/>
+                </a:moveTo>
+                <a:lnTo>
+                  <a:pt x="5900" y="28000"/>
+                </a:lnTo>
+                <a:lnTo>
+                  <a:pt x="10000" y="28000"/>
+                </a:lnTo>
+                <a:lnTo>
+                  <a:pt x="5000" y="40000"/>
+                </a:lnTo>
+                <a:lnTo>
+                  <a:pt x="0" y="28000"/>
+                </a:lnTo>
+                <a:lnTo>
+                  <a:pt x="4100" y="28000"/>
+                </a:lnTo>
+                <a:lnTo>
+                  <a:pt x="4100" y="0"/>
+                </a:lnTo>
+                <a:close/>
+              </a:path>
+            </a:pathLst>
+          </a:custGeom>
+          <a:solidFill>
+            <a:srgbClr val="4B5563"/>
+          </a:solidFill>
+          <a:ln>
+            <a:noFill/>
+          </a:ln>
+          <a:effectLst/>
+        </p:spPr>
+        <p:style>
+          <a:lnRef idx="1">
+            <a:schemeClr val="accent1"/>
+          </a:lnRef>
+          <a:fillRef idx="3">
+            <a:schemeClr val="accent1"/>
+          </a:fillRef>
+          <a:effectRef idx="0">
+            <a:schemeClr val="accent1"/>
+          </a:effectRef>
+          <a:fontRef idx="minor">
+            <a:schemeClr val="lt1"/>
+          </a:fontRef>
+        </p:style>
+        <p:txBody>
+          <a:bodyPr rtlCol="0" anchor="ctr"/>
+          <a:lstStyle/>
+          <a:p>
+            <a:pPr algn="ctr"/>
+          </a:p>
+        </p:txBody>
+      </p:sp>
+      <p:cxnSp>
+        <p:nvCxnSpPr>
+          <p:cNvPr id="142" name="fb_0" descr="Editable line; source id fb_0"/>
+          <p:cNvCxnSpPr/>
+          <p:nvPr/>
+        </p:nvCxnSpPr>
+        <p:spPr>
+          <a:xfrm>
+            <a:off x="9239249" y="6119812"/>
+            <a:ext cx="2468563" cy="0"/>
+          </a:xfrm>
+          <a:prstGeom prst="line">
+            <a:avLst/>
+          </a:prstGeom>
+          <a:ln w="14287">
+            <a:solidFill>
+              <a:srgbClr val="4B5563"/>
+            </a:solidFill>
+            <a:custDash>
+              <a:ds d="611111" sp="388889"/>
+            </a:custDash>
+          </a:ln>
+          <a:effectLst/>
+        </p:spPr>
+        <p:style>
+          <a:lnRef idx="2">
+            <a:schemeClr val="accent1"/>
+          </a:lnRef>
+          <a:fillRef idx="0">
+            <a:schemeClr val="accent1"/>
+          </a:fillRef>
+          <a:effectRef idx="0">
+            <a:schemeClr val="accent1"/>
+          </a:effectRef>
+          <a:fontRef idx="minor">
+            <a:schemeClr val="tx1"/>
+          </a:fontRef>
+        </p:style>
+      </p:cxnSp>
+      <p:cxnSp>
+        <p:nvCxnSpPr>
+          <p:cNvPr id="143" name="fb_1" descr="Editable line; source id fb_1"/>
+          <p:cNvCxnSpPr/>
+          <p:nvPr/>
+        </p:nvCxnSpPr>
+        <p:spPr>
+          <a:xfrm flipV="1">
+            <a:off x="11707812" y="3198812"/>
+            <a:ext cx="0" cy="2921000"/>
+          </a:xfrm>
+          <a:prstGeom prst="line">
+            <a:avLst/>
+          </a:prstGeom>
+          <a:ln w="14287">
+            <a:solidFill>
+              <a:srgbClr val="4B5563"/>
+            </a:solidFill>
+            <a:custDash>
+              <a:ds d="611111" sp="388889"/>
+            </a:custDash>
+          </a:ln>
+          <a:effectLst/>
+        </p:spPr>
+        <p:style>
+          <a:lnRef idx="2">
+            <a:schemeClr val="accent1"/>
+          </a:lnRef>
+          <a:fillRef idx="0">
+            <a:schemeClr val="accent1"/>
+          </a:fillRef>
+          <a:effectRef idx="0">
+            <a:schemeClr val="accent1"/>
+          </a:effectRef>
+          <a:fontRef idx="minor">
+            <a:schemeClr val="tx1"/>
+          </a:fontRef>
+        </p:style>
+      </p:cxnSp>
+      <p:cxnSp>
+        <p:nvCxnSpPr>
+          <p:cNvPr id="144" name="fb_2" descr="Editable line; source id fb_2"/>
+          <p:cNvCxnSpPr/>
+          <p:nvPr/>
+        </p:nvCxnSpPr>
+        <p:spPr>
+          <a:xfrm flipH="1">
+            <a:off x="6230937" y="3198812"/>
+            <a:ext cx="5476875" cy="0"/>
+          </a:xfrm>
+          <a:prstGeom prst="line">
+            <a:avLst/>
+          </a:prstGeom>
+          <a:ln w="14287">
+            <a:solidFill>
+              <a:srgbClr val="4B5563"/>
+            </a:solidFill>
+            <a:custDash>
+              <a:ds d="611111" sp="388889"/>
+            </a:custDash>
+          </a:ln>
+          <a:effectLst/>
+        </p:spPr>
+        <p:style>
+          <a:lnRef idx="2">
+            <a:schemeClr val="accent1"/>
+          </a:lnRef>
+          <a:fillRef idx="0">
+            <a:schemeClr val="accent1"/>
+          </a:fillRef>
+          <a:effectRef idx="0">
+            <a:schemeClr val="accent1"/>
+          </a:effectRef>
+          <a:fontRef idx="minor">
+            <a:schemeClr val="tx1"/>
+          </a:fontRef>
+        </p:style>
+      </p:cxnSp>
+      <p:cxnSp>
+        <p:nvCxnSpPr>
+          <p:cNvPr id="145" name="fb_3" descr="Editable line; source id fb_3"/>
+          <p:cNvCxnSpPr/>
+          <p:nvPr/>
+        </p:nvCxnSpPr>
+        <p:spPr>
+          <a:xfrm flipV="1">
+            <a:off x="6230937" y="2841624"/>
+            <a:ext cx="0" cy="357188"/>
+          </a:xfrm>
+          <a:prstGeom prst="line">
+            <a:avLst/>
+          </a:prstGeom>
+          <a:ln w="14287">
+            <a:solidFill>
+              <a:srgbClr val="4B5563"/>
+            </a:solidFill>
+            <a:custDash>
+              <a:ds d="611111" sp="388889"/>
+            </a:custDash>
+            <a:tailEnd type="triangle"/>
+          </a:ln>
+          <a:effectLst/>
+        </p:spPr>
+        <p:style>
+          <a:lnRef idx="2">
+            <a:schemeClr val="accent1"/>
+          </a:lnRef>
+          <a:fillRef idx="0">
+            <a:schemeClr val="accent1"/>
+          </a:fillRef>
+          <a:effectRef idx="0">
+            <a:schemeClr val="accent1"/>
+          </a:effectRef>
+          <a:fontRef idx="minor">
+            <a:schemeClr val="tx1"/>
+          </a:fontRef>
+        </p:style>
+      </p:cxnSp>
+      <p:sp>
+        <p:nvSpPr>
+          <p:cNvPr id="146" name="fb_p" descr="Editable shape; source id fb_p"/>
+          <p:cNvSpPr/>
+          <p:nvPr/>
+        </p:nvSpPr>
+        <p:spPr>
+          <a:xfrm>
+            <a:off x="8080374" y="3040062"/>
+            <a:ext cx="1341437" cy="317499"/>
+          </a:xfrm>
+          <a:prstGeom prst="roundRect">
+            <a:avLst>
+              <a:gd name="adj" fmla="val 50000"/>
+            </a:avLst>
+          </a:prstGeom>
+          <a:solidFill>
+            <a:srgbClr val="FFFFFF"/>
+          </a:solidFill>
+          <a:ln w="8731">
+            <a:solidFill>
+              <a:srgbClr val="CBD3DA"/>
+            </a:solidFill>
+          </a:ln>
+          <a:effectLst/>
+        </p:spPr>
+        <p:style>
+          <a:lnRef idx="1">
+            <a:schemeClr val="accent1"/>
+          </a:lnRef>
+          <a:fillRef idx="3">
+            <a:schemeClr val="accent1"/>
+          </a:fillRef>
+          <a:effectRef idx="0">
+            <a:schemeClr val="accent1"/>
+          </a:effectRef>
+          <a:fontRef idx="minor">
+            <a:schemeClr val="lt1"/>
+          </a:fontRef>
+        </p:style>
+        <p:txBody>
+          <a:bodyPr rtlCol="0" anchor="ctr"/>
+          <a:lstStyle/>
+          <a:p>
+            <a:pPr algn="ctr"/>
+          </a:p>
+        </p:txBody>
+      </p:sp>
+      <p:sp>
+        <p:nvSpPr>
+          <p:cNvPr id="147" name="fb_p_t" descr="Editable text; source id fb_p_t"/>
+          <p:cNvSpPr txBox="1"/>
+          <p:nvPr/>
+        </p:nvSpPr>
+        <p:spPr>
+          <a:xfrm>
+            <a:off x="8159749" y="3071812"/>
+            <a:ext cx="1182687" cy="253999"/>
+          </a:xfrm>
+          <a:prstGeom prst="rect">
+            <a:avLst/>
+          </a:prstGeom>
+          <a:noFill/>
+          <a:effectLst/>
+        </p:spPr>
+        <p:txBody>
+          <a:bodyPr wrap="none" anchor="ctr" tIns="0" rIns="0" bIns="0" lIns="0" anchorCtr="0" vertOverflow="overflow">
+            <a:noAutofit/>
+          </a:bodyPr>
+          <a:lstStyle/>
+          <a:p>
+            <a:pPr algn="ctr" fontAlgn="base">
+              <a:lnSpc>
+                <a:spcPts val="1734"/>
+              </a:lnSpc>
+              <a:spcBef>
+                <a:spcPts val="0"/>
+              </a:spcBef>
+              <a:spcAft>
+                <a:spcPts val="0"/>
+              </a:spcAft>
+              <a:defRPr sz="1187" b="0" i="0" lang="zh-CN" dirty="0">
+                <a:solidFill>
+                  <a:srgbClr val="3F4854"/>
+                </a:solidFill>
+                <a:latin typeface="Noto Sans CJK SC"/>
+                <a:ea typeface="Noto Sans CJK SC"/>
+                <a:cs typeface="Noto Sans CJK SC"/>
+              </a:defRPr>
+            </a:pPr>
+            <a:r>
+              <a:rPr sz="1187" b="0" i="0" lang="zh-CN" dirty="0">
+                <a:solidFill>
+                  <a:srgbClr val="3F4854"/>
+                </a:solidFill>
+                <a:latin typeface="Noto Sans CJK SC"/>
+                <a:ea typeface="Noto Sans CJK SC"/>
+                <a:cs typeface="Noto Sans CJK SC"/>
+              </a:rPr>
+              <a:t>更新组成与工艺</a:t>
             </a:r>
           </a:p>
         </p:txBody>

--- a/media/figstudio/fig03_roadmap/fig03_research_roadmap_editable.pptx
+++ b/media/figstudio/fig03_roadmap/fig03_research_roadmap_editable.pptx
@@ -9324,8 +9324,8 @@
         </p:nvSpPr>
         <p:spPr>
           <a:xfrm>
-            <a:off x="682624" y="7516812"/>
-            <a:ext cx="3174999" cy="349249"/>
+            <a:off x="634999" y="7461249"/>
+            <a:ext cx="3254374" cy="460374"/>
           </a:xfrm>
           <a:prstGeom prst="rect">
             <a:avLst/>
@@ -9485,8 +9485,8 @@
         </p:nvSpPr>
         <p:spPr>
           <a:xfrm>
-            <a:off x="4651374" y="7516812"/>
-            <a:ext cx="3174999" cy="349249"/>
+            <a:off x="4603749" y="7461249"/>
+            <a:ext cx="3254374" cy="460374"/>
           </a:xfrm>
           <a:prstGeom prst="rect">
             <a:avLst/>
@@ -9635,8 +9635,8 @@
         </p:nvSpPr>
         <p:spPr>
           <a:xfrm>
-            <a:off x="8620124" y="7516812"/>
-            <a:ext cx="3174999" cy="349249"/>
+            <a:off x="8572499" y="7461249"/>
+            <a:ext cx="3254374" cy="460374"/>
           </a:xfrm>
           <a:prstGeom prst="rect">
             <a:avLst/>
@@ -10398,7 +10398,7 @@
         </p:nvSpPr>
         <p:spPr>
           <a:xfrm>
-            <a:off x="8080374" y="3040062"/>
+            <a:off x="6318249" y="3040062"/>
             <a:ext cx="1341437" cy="317499"/>
           </a:xfrm>
           <a:prstGeom prst="roundRect">
@@ -10446,7 +10446,7 @@
         </p:nvSpPr>
         <p:spPr>
           <a:xfrm>
-            <a:off x="8159749" y="3071812"/>
+            <a:off x="6397624" y="3071812"/>
             <a:ext cx="1182687" cy="253999"/>
           </a:xfrm>
           <a:prstGeom prst="rect">

--- a/media/figstudio/fig03_roadmap/fig03_research_roadmap_editable.pptx
+++ b/media/figstudio/fig03_roadmap/fig03_research_roadmap_editable.pptx
@@ -3535,7 +3535,7 @@
           <a:solidFill>
             <a:srgbClr val="EEF2F7"/>
           </a:solidFill>
-          <a:ln w="9524">
+          <a:ln w="12699">
             <a:solidFill>
               <a:srgbClr val="5B7592"/>
             </a:solidFill>
@@ -3639,7 +3639,7 @@
           <a:solidFill>
             <a:srgbClr val="E6F2F3"/>
           </a:solidFill>
-          <a:ln w="9524">
+          <a:ln w="12699">
             <a:solidFill>
               <a:srgbClr val="1F7F8C"/>
             </a:solidFill>
@@ -3743,7 +3743,7 @@
           <a:solidFill>
             <a:srgbClr val="EEF2F7"/>
           </a:solidFill>
-          <a:ln w="9524">
+          <a:ln w="12699">
             <a:solidFill>
               <a:srgbClr val="5B7592"/>
             </a:solidFill>
@@ -3847,7 +3847,7 @@
           <a:solidFill>
             <a:srgbClr val="FFF6E3"/>
           </a:solidFill>
-          <a:ln w="9524">
+          <a:ln w="12699">
             <a:solidFill>
               <a:srgbClr val="C48A24"/>
             </a:solidFill>
@@ -3951,7 +3951,7 @@
           <a:solidFill>
             <a:srgbClr val="FFFFFF"/>
           </a:solidFill>
-          <a:ln w="11112">
+          <a:ln w="15081">
             <a:solidFill>
               <a:srgbClr val="5B7592"/>
             </a:solidFill>
@@ -4041,9 +4041,9 @@
             <a:avLst/>
           </a:prstGeom>
           <a:noFill/>
-          <a:ln w="7937">
+          <a:ln w="18216">
             <a:solidFill>
-              <a:srgbClr val="1F2937"/>
+              <a:srgbClr val="111A24"/>
             </a:solidFill>
           </a:ln>
           <a:effectLst/>
@@ -4085,9 +4085,9 @@
             <a:avLst/>
           </a:prstGeom>
           <a:noFill/>
-          <a:ln w="7937">
+          <a:ln w="18216">
             <a:solidFill>
-              <a:srgbClr val="1F2937"/>
+              <a:srgbClr val="111A24"/>
             </a:solidFill>
           </a:ln>
           <a:effectLst/>
@@ -4129,9 +4129,9 @@
             <a:avLst/>
           </a:prstGeom>
           <a:noFill/>
-          <a:ln w="7937">
+          <a:ln w="18216">
             <a:solidFill>
-              <a:srgbClr val="1F2937"/>
+              <a:srgbClr val="111A24"/>
             </a:solidFill>
           </a:ln>
           <a:effectLst/>
@@ -4172,9 +4172,9 @@
           <a:prstGeom prst="line">
             <a:avLst/>
           </a:prstGeom>
-          <a:ln w="7937">
+          <a:ln w="18216">
             <a:solidFill>
-              <a:srgbClr val="1F2937"/>
+              <a:srgbClr val="111A24"/>
             </a:solidFill>
           </a:ln>
           <a:effectLst/>
@@ -4208,9 +4208,9 @@
           <a:prstGeom prst="line">
             <a:avLst/>
           </a:prstGeom>
-          <a:ln w="7937">
+          <a:ln w="18216">
             <a:solidFill>
-              <a:srgbClr val="1F2937"/>
+              <a:srgbClr val="111A24"/>
             </a:solidFill>
           </a:ln>
           <a:effectLst/>
@@ -4244,9 +4244,9 @@
           <a:prstGeom prst="line">
             <a:avLst/>
           </a:prstGeom>
-          <a:ln w="7937">
+          <a:ln w="18216">
             <a:solidFill>
-              <a:srgbClr val="1F2937"/>
+              <a:srgbClr val="111A24"/>
             </a:solidFill>
           </a:ln>
           <a:effectLst/>
@@ -4339,11 +4339,11 @@
             </a:avLst>
           </a:prstGeom>
           <a:solidFill>
-            <a:srgbClr val="F7F9FB"/>
+            <a:srgbClr val="F4F7FA"/>
           </a:solidFill>
-          <a:ln w="9524">
+          <a:ln w="12699">
             <a:solidFill>
-              <a:srgbClr val="CBD3DA"/>
+              <a:srgbClr val="AEBBC7"/>
             </a:solidFill>
           </a:ln>
           <a:effectLst/>
@@ -4395,7 +4395,7 @@
           <a:p>
             <a:pPr algn="ctr" fontAlgn="base">
               <a:lnSpc>
-                <a:spcPts val="1734"/>
+                <a:spcPts val="1640"/>
               </a:lnSpc>
               <a:spcBef>
                 <a:spcPts val="0"/>
@@ -4403,9 +4403,9 @@
               <a:spcAft>
                 <a:spcPts val="0"/>
               </a:spcAft>
-              <a:defRPr sz="1187" b="0" i="0" lang="zh-CN" dirty="0">
+              <a:defRPr sz="1128" b="1" i="0" lang="zh-CN" dirty="0">
                 <a:solidFill>
-                  <a:srgbClr val="3F4854"/>
+                  <a:srgbClr val="27303A"/>
                 </a:solidFill>
                 <a:latin typeface="DejaVu Sans"/>
                 <a:ea typeface="DejaVu Sans"/>
@@ -4413,9 +4413,9 @@
               </a:defRPr>
             </a:pPr>
             <a:r>
-              <a:rPr sz="1187" b="0" i="0" lang="zh-CN" dirty="0">
+              <a:rPr sz="1128" b="1" i="0" lang="zh-CN" dirty="0">
                 <a:solidFill>
-                  <a:srgbClr val="3F4854"/>
+                  <a:srgbClr val="27303A"/>
                 </a:solidFill>
                 <a:latin typeface="DejaVu Sans"/>
                 <a:ea typeface="DejaVu Sans"/>
@@ -4424,9 +4424,9 @@
               <a:t>Ba–Y–Si–O </a:t>
             </a:r>
             <a:r>
-              <a:rPr sz="1187" b="0" i="0" lang="zh-CN" dirty="0">
+              <a:rPr sz="1128" b="1" i="0" lang="zh-CN" dirty="0">
                 <a:solidFill>
-                  <a:srgbClr val="3F4854"/>
+                  <a:srgbClr val="27303A"/>
                 </a:solidFill>
                 <a:latin typeface="Noto Sans CJK SC"/>
                 <a:ea typeface="Noto Sans CJK SC"/>
@@ -4454,11 +4454,11 @@
             </a:avLst>
           </a:prstGeom>
           <a:solidFill>
-            <a:srgbClr val="F7F9FB"/>
+            <a:srgbClr val="F4F7FA"/>
           </a:solidFill>
-          <a:ln w="9524">
+          <a:ln w="12699">
             <a:solidFill>
-              <a:srgbClr val="CBD3DA"/>
+              <a:srgbClr val="AEBBC7"/>
             </a:solidFill>
           </a:ln>
           <a:effectLst/>
@@ -4510,7 +4510,7 @@
           <a:p>
             <a:pPr algn="ctr" fontAlgn="base">
               <a:lnSpc>
-                <a:spcPts val="1734"/>
+                <a:spcPts val="1640"/>
               </a:lnSpc>
               <a:spcBef>
                 <a:spcPts val="0"/>
@@ -4518,9 +4518,9 @@
               <a:spcAft>
                 <a:spcPts val="0"/>
               </a:spcAft>
-              <a:defRPr sz="1187" b="0" i="0" lang="zh-CN" dirty="0">
+              <a:defRPr sz="1128" b="1" i="0" lang="zh-CN" dirty="0">
                 <a:solidFill>
-                  <a:srgbClr val="3F4854"/>
+                  <a:srgbClr val="27303A"/>
                 </a:solidFill>
                 <a:latin typeface="DejaVu Sans"/>
                 <a:ea typeface="DejaVu Sans"/>
@@ -4528,9 +4528,9 @@
               </a:defRPr>
             </a:pPr>
             <a:r>
-              <a:rPr sz="1187" b="0" i="0" lang="zh-CN" dirty="0">
+              <a:rPr sz="1128" b="1" i="0" lang="zh-CN" dirty="0">
                 <a:solidFill>
-                  <a:srgbClr val="3F4854"/>
+                  <a:srgbClr val="27303A"/>
                 </a:solidFill>
                 <a:latin typeface="DejaVu Sans"/>
                 <a:ea typeface="DejaVu Sans"/>
@@ -4539,9 +4539,9 @@
               <a:t>Ba–Zn–Si–O </a:t>
             </a:r>
             <a:r>
-              <a:rPr sz="1187" b="0" i="0" lang="zh-CN" dirty="0">
+              <a:rPr sz="1128" b="1" i="0" lang="zh-CN" dirty="0">
                 <a:solidFill>
-                  <a:srgbClr val="3F4854"/>
+                  <a:srgbClr val="27303A"/>
                 </a:solidFill>
                 <a:latin typeface="Noto Sans CJK SC"/>
                 <a:ea typeface="Noto Sans CJK SC"/>
@@ -4569,11 +4569,11 @@
             </a:avLst>
           </a:prstGeom>
           <a:solidFill>
-            <a:srgbClr val="F7F9FB"/>
+            <a:srgbClr val="F4F7FA"/>
           </a:solidFill>
-          <a:ln w="9524">
+          <a:ln w="12699">
             <a:solidFill>
-              <a:srgbClr val="CBD3DA"/>
+              <a:srgbClr val="AEBBC7"/>
             </a:solidFill>
           </a:ln>
           <a:effectLst/>
@@ -4625,7 +4625,7 @@
           <a:p>
             <a:pPr algn="ctr" fontAlgn="base">
               <a:lnSpc>
-                <a:spcPts val="1734"/>
+                <a:spcPts val="1640"/>
               </a:lnSpc>
               <a:spcBef>
                 <a:spcPts val="0"/>
@@ -4633,9 +4633,9 @@
               <a:spcAft>
                 <a:spcPts val="0"/>
               </a:spcAft>
-              <a:defRPr sz="1187" b="0" i="0" lang="zh-CN" dirty="0">
+              <a:defRPr sz="1128" b="1" i="0" lang="zh-CN" dirty="0">
                 <a:solidFill>
-                  <a:srgbClr val="3F4854"/>
+                  <a:srgbClr val="27303A"/>
                 </a:solidFill>
                 <a:latin typeface="DejaVu Sans"/>
                 <a:ea typeface="DejaVu Sans"/>
@@ -4643,9 +4643,9 @@
               </a:defRPr>
             </a:pPr>
             <a:r>
-              <a:rPr sz="1187" b="0" i="0" lang="zh-CN" dirty="0">
+              <a:rPr sz="1128" b="1" i="0" lang="zh-CN" dirty="0">
                 <a:solidFill>
-                  <a:srgbClr val="3F4854"/>
+                  <a:srgbClr val="27303A"/>
                 </a:solidFill>
                 <a:latin typeface="DejaVu Sans"/>
                 <a:ea typeface="DejaVu Sans"/>
@@ -4654,9 +4654,9 @@
               <a:t>Y–Si–O </a:t>
             </a:r>
             <a:r>
-              <a:rPr sz="1187" b="0" i="0" lang="zh-CN" dirty="0">
+              <a:rPr sz="1128" b="1" i="0" lang="zh-CN" dirty="0">
                 <a:solidFill>
-                  <a:srgbClr val="3F4854"/>
+                  <a:srgbClr val="27303A"/>
                 </a:solidFill>
                 <a:latin typeface="Noto Sans CJK SC"/>
                 <a:ea typeface="Noto Sans CJK SC"/>
@@ -4686,7 +4686,7 @@
           <a:solidFill>
             <a:srgbClr val="FFFFFF"/>
           </a:solidFill>
-          <a:ln w="11112">
+          <a:ln w="15081">
             <a:solidFill>
               <a:srgbClr val="5B7592"/>
             </a:solidFill>
@@ -4775,9 +4775,9 @@
           <a:prstGeom prst="line">
             <a:avLst/>
           </a:prstGeom>
-          <a:ln w="7937">
+          <a:ln w="18216">
             <a:solidFill>
-              <a:srgbClr val="1F2937"/>
+              <a:srgbClr val="111A24"/>
             </a:solidFill>
           </a:ln>
           <a:effectLst/>
@@ -4811,9 +4811,9 @@
           <a:prstGeom prst="line">
             <a:avLst/>
           </a:prstGeom>
-          <a:ln w="7937">
+          <a:ln w="18216">
             <a:solidFill>
-              <a:srgbClr val="1F2937"/>
+              <a:srgbClr val="111A24"/>
             </a:solidFill>
           </a:ln>
           <a:effectLst/>
@@ -4847,9 +4847,9 @@
           <a:prstGeom prst="line">
             <a:avLst/>
           </a:prstGeom>
-          <a:ln w="7937">
+          <a:ln w="18216">
             <a:solidFill>
-              <a:srgbClr val="1F2937"/>
+              <a:srgbClr val="111A24"/>
             </a:solidFill>
           </a:ln>
           <a:effectLst/>
@@ -4883,9 +4883,9 @@
           <a:prstGeom prst="line">
             <a:avLst/>
           </a:prstGeom>
-          <a:ln w="7937">
+          <a:ln w="18216">
             <a:solidFill>
-              <a:srgbClr val="1F2937"/>
+              <a:srgbClr val="111A24"/>
             </a:solidFill>
           </a:ln>
           <a:effectLst/>
@@ -4919,9 +4919,9 @@
           <a:prstGeom prst="line">
             <a:avLst/>
           </a:prstGeom>
-          <a:ln w="7937">
+          <a:ln w="18216">
             <a:solidFill>
-              <a:srgbClr val="1F2937"/>
+              <a:srgbClr val="111A24"/>
             </a:solidFill>
           </a:ln>
           <a:effectLst/>
@@ -4955,9 +4955,9 @@
           <a:prstGeom prst="line">
             <a:avLst/>
           </a:prstGeom>
-          <a:ln w="7937">
+          <a:ln w="18216">
             <a:solidFill>
-              <a:srgbClr val="1F2937"/>
+              <a:srgbClr val="111A24"/>
             </a:solidFill>
           </a:ln>
           <a:effectLst/>
@@ -4991,9 +4991,9 @@
           <a:prstGeom prst="line">
             <a:avLst/>
           </a:prstGeom>
-          <a:ln w="7937">
+          <a:ln w="18216">
             <a:solidFill>
-              <a:srgbClr val="1F2937"/>
+              <a:srgbClr val="111A24"/>
             </a:solidFill>
           </a:ln>
           <a:effectLst/>
@@ -5086,11 +5086,11 @@
             </a:avLst>
           </a:prstGeom>
           <a:solidFill>
-            <a:srgbClr val="F7F9FB"/>
+            <a:srgbClr val="F4F7FA"/>
           </a:solidFill>
-          <a:ln w="9524">
+          <a:ln w="12699">
             <a:solidFill>
-              <a:srgbClr val="CBD3DA"/>
+              <a:srgbClr val="AEBBC7"/>
             </a:solidFill>
           </a:ln>
           <a:effectLst/>
@@ -5142,7 +5142,7 @@
           <a:p>
             <a:pPr algn="ctr" fontAlgn="base">
               <a:lnSpc>
-                <a:spcPts val="1734"/>
+                <a:spcPts val="1640"/>
               </a:lnSpc>
               <a:spcBef>
                 <a:spcPts val="0"/>
@@ -5150,9 +5150,9 @@
               <a:spcAft>
                 <a:spcPts val="0"/>
               </a:spcAft>
-              <a:defRPr sz="1187" b="0" i="0" lang="zh-CN" dirty="0">
+              <a:defRPr sz="1128" b="1" i="0" lang="zh-CN" dirty="0">
                 <a:solidFill>
-                  <a:srgbClr val="3F4854"/>
+                  <a:srgbClr val="27303A"/>
                 </a:solidFill>
                 <a:latin typeface="Noto Sans CJK SC"/>
                 <a:ea typeface="Noto Sans CJK SC"/>
@@ -5160,9 +5160,9 @@
               </a:defRPr>
             </a:pPr>
             <a:r>
-              <a:rPr sz="1187" b="0" i="0" lang="zh-CN" dirty="0">
+              <a:rPr sz="1128" b="1" i="0" lang="zh-CN" dirty="0">
                 <a:solidFill>
-                  <a:srgbClr val="3F4854"/>
+                  <a:srgbClr val="27303A"/>
                 </a:solidFill>
                 <a:latin typeface="Noto Sans CJK SC"/>
                 <a:ea typeface="Noto Sans CJK SC"/>
@@ -5190,11 +5190,11 @@
             </a:avLst>
           </a:prstGeom>
           <a:solidFill>
-            <a:srgbClr val="F7F9FB"/>
+            <a:srgbClr val="F4F7FA"/>
           </a:solidFill>
-          <a:ln w="9524">
+          <a:ln w="12699">
             <a:solidFill>
-              <a:srgbClr val="CBD3DA"/>
+              <a:srgbClr val="AEBBC7"/>
             </a:solidFill>
           </a:ln>
           <a:effectLst/>
@@ -5246,7 +5246,7 @@
           <a:p>
             <a:pPr algn="ctr" fontAlgn="base">
               <a:lnSpc>
-                <a:spcPts val="1734"/>
+                <a:spcPts val="1640"/>
               </a:lnSpc>
               <a:spcBef>
                 <a:spcPts val="0"/>
@@ -5254,9 +5254,9 @@
               <a:spcAft>
                 <a:spcPts val="0"/>
               </a:spcAft>
-              <a:defRPr sz="1187" b="0" i="0" lang="zh-CN" dirty="0">
+              <a:defRPr sz="1128" b="1" i="0" lang="zh-CN" dirty="0">
                 <a:solidFill>
-                  <a:srgbClr val="3F4854"/>
+                  <a:srgbClr val="27303A"/>
                 </a:solidFill>
                 <a:latin typeface="DejaVu Sans"/>
                 <a:ea typeface="DejaVu Sans"/>
@@ -5264,9 +5264,9 @@
               </a:defRPr>
             </a:pPr>
             <a:r>
-              <a:rPr sz="1187" b="0" i="0" lang="zh-CN" dirty="0">
+              <a:rPr sz="1128" b="1" i="0" lang="zh-CN" dirty="0">
                 <a:solidFill>
-                  <a:srgbClr val="3F4854"/>
+                  <a:srgbClr val="27303A"/>
                 </a:solidFill>
                 <a:latin typeface="DejaVu Sans"/>
                 <a:ea typeface="DejaVu Sans"/>
@@ -5275,9 +5275,9 @@
               <a:t>Zn–Y–</a:t>
             </a:r>
             <a:r>
-              <a:rPr sz="1187" b="0" i="0" lang="zh-CN" dirty="0">
+              <a:rPr sz="1128" b="1" i="0" lang="zh-CN" dirty="0">
                 <a:solidFill>
-                  <a:srgbClr val="3F4854"/>
+                  <a:srgbClr val="27303A"/>
                 </a:solidFill>
                 <a:latin typeface="Noto Sans CJK SC"/>
                 <a:ea typeface="Noto Sans CJK SC"/>
@@ -5305,11 +5305,11 @@
             </a:avLst>
           </a:prstGeom>
           <a:solidFill>
-            <a:srgbClr val="F7F9FB"/>
+            <a:srgbClr val="F4F7FA"/>
           </a:solidFill>
-          <a:ln w="9524">
+          <a:ln w="12699">
             <a:solidFill>
-              <a:srgbClr val="CBD3DA"/>
+              <a:srgbClr val="AEBBC7"/>
             </a:solidFill>
           </a:ln>
           <a:effectLst/>
@@ -5361,7 +5361,7 @@
           <a:p>
             <a:pPr algn="ctr" fontAlgn="base">
               <a:lnSpc>
-                <a:spcPts val="1734"/>
+                <a:spcPts val="1640"/>
               </a:lnSpc>
               <a:spcBef>
                 <a:spcPts val="0"/>
@@ -5369,9 +5369,9 @@
               <a:spcAft>
                 <a:spcPts val="0"/>
               </a:spcAft>
-              <a:defRPr sz="1187" b="0" i="0" lang="zh-CN" dirty="0">
+              <a:defRPr sz="1128" b="1" i="0" lang="zh-CN" dirty="0">
                 <a:solidFill>
-                  <a:srgbClr val="3F4854"/>
+                  <a:srgbClr val="27303A"/>
                 </a:solidFill>
                 <a:latin typeface="Noto Sans CJK SC"/>
                 <a:ea typeface="Noto Sans CJK SC"/>
@@ -5379,9 +5379,9 @@
               </a:defRPr>
             </a:pPr>
             <a:r>
-              <a:rPr sz="1187" b="0" i="0" lang="zh-CN" dirty="0">
+              <a:rPr sz="1128" b="1" i="0" lang="zh-CN" dirty="0">
                 <a:solidFill>
-                  <a:srgbClr val="3F4854"/>
+                  <a:srgbClr val="27303A"/>
                 </a:solidFill>
                 <a:latin typeface="Noto Sans CJK SC"/>
                 <a:ea typeface="Noto Sans CJK SC"/>
@@ -5411,7 +5411,7 @@
           <a:solidFill>
             <a:srgbClr val="FFFFFF"/>
           </a:solidFill>
-          <a:ln w="11112">
+          <a:ln w="15081">
             <a:solidFill>
               <a:srgbClr val="5B7592"/>
             </a:solidFill>
@@ -5500,9 +5500,9 @@
           <a:prstGeom prst="line">
             <a:avLst/>
           </a:prstGeom>
-          <a:ln w="7937">
+          <a:ln w="18216">
             <a:solidFill>
-              <a:srgbClr val="1F2937"/>
+              <a:srgbClr val="111A24"/>
             </a:solidFill>
           </a:ln>
           <a:effectLst/>
@@ -5536,9 +5536,9 @@
           <a:prstGeom prst="line">
             <a:avLst/>
           </a:prstGeom>
-          <a:ln w="7937">
+          <a:ln w="18216">
             <a:solidFill>
-              <a:srgbClr val="1F2937"/>
+              <a:srgbClr val="111A24"/>
             </a:solidFill>
           </a:ln>
           <a:effectLst/>
@@ -5572,9 +5572,9 @@
           <a:prstGeom prst="line">
             <a:avLst/>
           </a:prstGeom>
-          <a:ln w="7937">
+          <a:ln w="18216">
             <a:solidFill>
-              <a:srgbClr val="1F2937"/>
+              <a:srgbClr val="111A24"/>
             </a:solidFill>
           </a:ln>
           <a:effectLst/>
@@ -5608,9 +5608,9 @@
           <a:prstGeom prst="line">
             <a:avLst/>
           </a:prstGeom>
-          <a:ln w="7937">
+          <a:ln w="18216">
             <a:solidFill>
-              <a:srgbClr val="1F2937"/>
+              <a:srgbClr val="111A24"/>
             </a:solidFill>
           </a:ln>
           <a:effectLst/>
@@ -5644,9 +5644,9 @@
           <a:prstGeom prst="line">
             <a:avLst/>
           </a:prstGeom>
-          <a:ln w="7937">
+          <a:ln w="18216">
             <a:solidFill>
-              <a:srgbClr val="1F2937"/>
+              <a:srgbClr val="111A24"/>
             </a:solidFill>
           </a:ln>
           <a:effectLst/>
@@ -5680,9 +5680,9 @@
           <a:prstGeom prst="line">
             <a:avLst/>
           </a:prstGeom>
-          <a:ln w="7937">
+          <a:ln w="18216">
             <a:solidFill>
-              <a:srgbClr val="1F2937"/>
+              <a:srgbClr val="111A24"/>
             </a:solidFill>
           </a:ln>
           <a:effectLst/>
@@ -5775,11 +5775,11 @@
             </a:avLst>
           </a:prstGeom>
           <a:solidFill>
-            <a:srgbClr val="F7F9FB"/>
+            <a:srgbClr val="F4F7FA"/>
           </a:solidFill>
-          <a:ln w="9524">
+          <a:ln w="12699">
             <a:solidFill>
-              <a:srgbClr val="CBD3DA"/>
+              <a:srgbClr val="AEBBC7"/>
             </a:solidFill>
           </a:ln>
           <a:effectLst/>
@@ -5831,7 +5831,7 @@
           <a:p>
             <a:pPr algn="ctr" fontAlgn="base">
               <a:lnSpc>
-                <a:spcPts val="1390"/>
+                <a:spcPts val="1343"/>
               </a:lnSpc>
               <a:spcBef>
                 <a:spcPts val="0"/>
@@ -5839,9 +5839,9 @@
               <a:spcAft>
                 <a:spcPts val="0"/>
               </a:spcAft>
-              <a:defRPr sz="1187" b="0" i="0" lang="zh-CN" dirty="0">
+              <a:defRPr sz="1128" b="1" i="0" lang="zh-CN" dirty="0">
                 <a:solidFill>
-                  <a:srgbClr val="3F4854"/>
+                  <a:srgbClr val="27303A"/>
                 </a:solidFill>
                 <a:latin typeface="DejaVu Sans"/>
                 <a:ea typeface="DejaVu Sans"/>
@@ -5849,9 +5849,9 @@
               </a:defRPr>
             </a:pPr>
             <a:r>
-              <a:rPr sz="1187" b="0" i="0" lang="zh-CN" dirty="0">
+              <a:rPr sz="1128" b="1" i="0" lang="zh-CN" dirty="0">
                 <a:solidFill>
-                  <a:srgbClr val="3F4854"/>
+                  <a:srgbClr val="27303A"/>
                 </a:solidFill>
                 <a:latin typeface="DejaVu Sans"/>
                 <a:ea typeface="DejaVu Sans"/>
@@ -5879,11 +5879,11 @@
             </a:avLst>
           </a:prstGeom>
           <a:solidFill>
-            <a:srgbClr val="F7F9FB"/>
+            <a:srgbClr val="F4F7FA"/>
           </a:solidFill>
-          <a:ln w="9524">
+          <a:ln w="12699">
             <a:solidFill>
-              <a:srgbClr val="CBD3DA"/>
+              <a:srgbClr val="AEBBC7"/>
             </a:solidFill>
           </a:ln>
           <a:effectLst/>
@@ -5935,7 +5935,7 @@
           <a:p>
             <a:pPr algn="ctr" fontAlgn="base">
               <a:lnSpc>
-                <a:spcPts val="1390"/>
+                <a:spcPts val="1343"/>
               </a:lnSpc>
               <a:spcBef>
                 <a:spcPts val="0"/>
@@ -5943,9 +5943,9 @@
               <a:spcAft>
                 <a:spcPts val="0"/>
               </a:spcAft>
-              <a:defRPr sz="1187" b="0" i="0" lang="zh-CN" dirty="0">
+              <a:defRPr sz="1128" b="1" i="0" lang="zh-CN" dirty="0">
                 <a:solidFill>
-                  <a:srgbClr val="3F4854"/>
+                  <a:srgbClr val="27303A"/>
                 </a:solidFill>
                 <a:latin typeface="DejaVu Sans"/>
                 <a:ea typeface="DejaVu Sans"/>
@@ -5953,9 +5953,9 @@
               </a:defRPr>
             </a:pPr>
             <a:r>
-              <a:rPr sz="1187" b="0" i="0" lang="zh-CN" dirty="0">
+              <a:rPr sz="1128" b="1" i="0" lang="zh-CN" dirty="0">
                 <a:solidFill>
-                  <a:srgbClr val="3F4854"/>
+                  <a:srgbClr val="27303A"/>
                 </a:solidFill>
                 <a:latin typeface="DejaVu Sans"/>
                 <a:ea typeface="DejaVu Sans"/>
@@ -5983,11 +5983,11 @@
             </a:avLst>
           </a:prstGeom>
           <a:solidFill>
-            <a:srgbClr val="F7F9FB"/>
+            <a:srgbClr val="F4F7FA"/>
           </a:solidFill>
-          <a:ln w="9524">
+          <a:ln w="12699">
             <a:solidFill>
-              <a:srgbClr val="CBD3DA"/>
+              <a:srgbClr val="AEBBC7"/>
             </a:solidFill>
           </a:ln>
           <a:effectLst/>
@@ -6024,110 +6024,6 @@
           <a:xfrm>
             <a:off x="8659812" y="2293937"/>
             <a:ext cx="3143249" cy="357187"/>
-          </a:xfrm>
-          <a:prstGeom prst="rect">
-            <a:avLst/>
-          </a:prstGeom>
-          <a:noFill/>
-          <a:effectLst/>
-        </p:spPr>
-        <p:txBody>
-          <a:bodyPr wrap="none" anchor="ctr" tIns="0" rIns="0" bIns="0" lIns="0" anchorCtr="0" vertOverflow="overflow">
-            <a:noAutofit/>
-          </a:bodyPr>
-          <a:lstStyle/>
-          <a:p>
-            <a:pPr algn="ctr" fontAlgn="base">
-              <a:lnSpc>
-                <a:spcPts val="1734"/>
-              </a:lnSpc>
-              <a:spcBef>
-                <a:spcPts val="0"/>
-              </a:spcBef>
-              <a:spcAft>
-                <a:spcPts val="0"/>
-              </a:spcAft>
-              <a:defRPr sz="1187" b="0" i="0" lang="zh-CN" dirty="0">
-                <a:solidFill>
-                  <a:srgbClr val="3F4854"/>
-                </a:solidFill>
-                <a:latin typeface="Noto Sans CJK SC"/>
-                <a:ea typeface="Noto Sans CJK SC"/>
-                <a:cs typeface="Noto Sans CJK SC"/>
-              </a:defRPr>
-            </a:pPr>
-            <a:r>
-              <a:rPr sz="1187" b="0" i="0" lang="zh-CN" dirty="0">
-                <a:solidFill>
-                  <a:srgbClr val="3F4854"/>
-                </a:solidFill>
-                <a:latin typeface="Noto Sans CJK SC"/>
-                <a:ea typeface="Noto Sans CJK SC"/>
-                <a:cs typeface="Noto Sans CJK SC"/>
-              </a:rPr>
-              <a:t>模型排序的候选</a:t>
-            </a:r>
-          </a:p>
-        </p:txBody>
-      </p:sp>
-      <p:sp>
-        <p:nvSpPr>
-          <p:cNvPr id="56" name="cav" descr="Editable shape; source id cav"/>
-          <p:cNvSpPr/>
-          <p:nvPr/>
-        </p:nvSpPr>
-        <p:spPr>
-          <a:xfrm>
-            <a:off x="9588499" y="2793999"/>
-            <a:ext cx="1309687" cy="309562"/>
-          </a:xfrm>
-          <a:prstGeom prst="roundRect">
-            <a:avLst>
-              <a:gd name="adj" fmla="val 50000"/>
-            </a:avLst>
-          </a:prstGeom>
-          <a:solidFill>
-            <a:srgbClr val="FFF6E3"/>
-          </a:solidFill>
-          <a:ln w="8731">
-            <a:solidFill>
-              <a:srgbClr val="C48A24"/>
-            </a:solidFill>
-          </a:ln>
-          <a:effectLst/>
-        </p:spPr>
-        <p:style>
-          <a:lnRef idx="1">
-            <a:schemeClr val="accent1"/>
-          </a:lnRef>
-          <a:fillRef idx="3">
-            <a:schemeClr val="accent1"/>
-          </a:fillRef>
-          <a:effectRef idx="0">
-            <a:schemeClr val="accent1"/>
-          </a:effectRef>
-          <a:fontRef idx="minor">
-            <a:schemeClr val="lt1"/>
-          </a:fontRef>
-        </p:style>
-        <p:txBody>
-          <a:bodyPr rtlCol="0" anchor="ctr"/>
-          <a:lstStyle/>
-          <a:p>
-            <a:pPr algn="ctr"/>
-          </a:p>
-        </p:txBody>
-      </p:sp>
-      <p:sp>
-        <p:nvSpPr>
-          <p:cNvPr id="57" name="cav_t" descr="Editable text; source id cav_t"/>
-          <p:cNvSpPr txBox="1"/>
-          <p:nvPr/>
-        </p:nvSpPr>
-        <p:spPr>
-          <a:xfrm>
-            <a:off x="9667874" y="2825749"/>
-            <a:ext cx="1150937" cy="246062"/>
           </a:xfrm>
           <a:prstGeom prst="rect">
             <a:avLst/>
@@ -6151,7 +6047,111 @@
               <a:spcAft>
                 <a:spcPts val="0"/>
               </a:spcAft>
-              <a:defRPr sz="1124" b="0" i="0" lang="zh-CN" dirty="0">
+              <a:defRPr sz="1128" b="1" i="0" lang="zh-CN" dirty="0">
+                <a:solidFill>
+                  <a:srgbClr val="27303A"/>
+                </a:solidFill>
+                <a:latin typeface="Noto Sans CJK SC"/>
+                <a:ea typeface="Noto Sans CJK SC"/>
+                <a:cs typeface="Noto Sans CJK SC"/>
+              </a:defRPr>
+            </a:pPr>
+            <a:r>
+              <a:rPr sz="1128" b="1" i="0" lang="zh-CN" dirty="0">
+                <a:solidFill>
+                  <a:srgbClr val="27303A"/>
+                </a:solidFill>
+                <a:latin typeface="Noto Sans CJK SC"/>
+                <a:ea typeface="Noto Sans CJK SC"/>
+                <a:cs typeface="Noto Sans CJK SC"/>
+              </a:rPr>
+              <a:t>模型排序的候选</a:t>
+            </a:r>
+          </a:p>
+        </p:txBody>
+      </p:sp>
+      <p:sp>
+        <p:nvSpPr>
+          <p:cNvPr id="56" name="cav" descr="Editable shape; source id cav"/>
+          <p:cNvSpPr/>
+          <p:nvPr/>
+        </p:nvSpPr>
+        <p:spPr>
+          <a:xfrm>
+            <a:off x="9588499" y="2793999"/>
+            <a:ext cx="1309687" cy="309562"/>
+          </a:xfrm>
+          <a:prstGeom prst="roundRect">
+            <a:avLst>
+              <a:gd name="adj" fmla="val 50000"/>
+            </a:avLst>
+          </a:prstGeom>
+          <a:solidFill>
+            <a:srgbClr val="FFF6E3"/>
+          </a:solidFill>
+          <a:ln w="12699">
+            <a:solidFill>
+              <a:srgbClr val="C48A24"/>
+            </a:solidFill>
+          </a:ln>
+          <a:effectLst/>
+        </p:spPr>
+        <p:style>
+          <a:lnRef idx="1">
+            <a:schemeClr val="accent1"/>
+          </a:lnRef>
+          <a:fillRef idx="3">
+            <a:schemeClr val="accent1"/>
+          </a:fillRef>
+          <a:effectRef idx="0">
+            <a:schemeClr val="accent1"/>
+          </a:effectRef>
+          <a:fontRef idx="minor">
+            <a:schemeClr val="lt1"/>
+          </a:fontRef>
+        </p:style>
+        <p:txBody>
+          <a:bodyPr rtlCol="0" anchor="ctr"/>
+          <a:lstStyle/>
+          <a:p>
+            <a:pPr algn="ctr"/>
+          </a:p>
+        </p:txBody>
+      </p:sp>
+      <p:sp>
+        <p:nvSpPr>
+          <p:cNvPr id="57" name="cav_t" descr="Editable text; source id cav_t"/>
+          <p:cNvSpPr txBox="1"/>
+          <p:nvPr/>
+        </p:nvSpPr>
+        <p:spPr>
+          <a:xfrm>
+            <a:off x="9667874" y="2825749"/>
+            <a:ext cx="1150937" cy="246062"/>
+          </a:xfrm>
+          <a:prstGeom prst="rect">
+            <a:avLst/>
+          </a:prstGeom>
+          <a:noFill/>
+          <a:effectLst/>
+        </p:spPr>
+        <p:txBody>
+          <a:bodyPr wrap="none" anchor="ctr" tIns="0" rIns="0" bIns="0" lIns="0" anchorCtr="0" vertOverflow="overflow">
+            <a:noAutofit/>
+          </a:bodyPr>
+          <a:lstStyle/>
+          <a:p>
+            <a:pPr algn="ctr" fontAlgn="base">
+              <a:lnSpc>
+                <a:spcPts val="1640"/>
+              </a:lnSpc>
+              <a:spcBef>
+                <a:spcPts val="0"/>
+              </a:spcBef>
+              <a:spcAft>
+                <a:spcPts val="0"/>
+              </a:spcAft>
+              <a:defRPr sz="1124" b="1" i="0" lang="zh-CN" dirty="0">
                 <a:solidFill>
                   <a:srgbClr val="7A5410"/>
                 </a:solidFill>
@@ -6161,7 +6161,7 @@
               </a:defRPr>
             </a:pPr>
             <a:r>
-              <a:rPr sz="1124" b="0" i="0" lang="zh-CN" dirty="0">
+              <a:rPr sz="1124" b="1" i="0" lang="zh-CN" dirty="0">
                 <a:solidFill>
                   <a:srgbClr val="7A5410"/>
                 </a:solidFill>
@@ -6172,7 +6172,7 @@
               <a:t>模型排序</a:t>
             </a:r>
             <a:r>
-              <a:rPr sz="1124" b="0" i="0" lang="zh-CN" dirty="0">
+              <a:rPr sz="1124" b="1" i="0" lang="zh-CN" dirty="0">
                 <a:solidFill>
                   <a:srgbClr val="7A5410"/>
                 </a:solidFill>
@@ -6183,7 +6183,7 @@
               <a:t> ≠ </a:t>
             </a:r>
             <a:r>
-              <a:rPr sz="1124" b="0" i="0" lang="zh-CN" dirty="0">
+              <a:rPr sz="1124" b="1" i="0" lang="zh-CN" dirty="0">
                 <a:solidFill>
                   <a:srgbClr val="7A5410"/>
                 </a:solidFill>
@@ -6215,7 +6215,7 @@
           <a:solidFill>
             <a:srgbClr val="FFFFFF"/>
           </a:solidFill>
-          <a:ln w="11112">
+          <a:ln w="15081">
             <a:solidFill>
               <a:srgbClr val="1F7F8C"/>
             </a:solidFill>
@@ -6305,9 +6305,9 @@
             <a:avLst/>
           </a:prstGeom>
           <a:noFill/>
-          <a:ln w="7937">
+          <a:ln w="18216">
             <a:solidFill>
-              <a:srgbClr val="1F2937"/>
+              <a:srgbClr val="111A24"/>
             </a:solidFill>
           </a:ln>
           <a:effectLst/>
@@ -6348,9 +6348,9 @@
           <a:prstGeom prst="line">
             <a:avLst/>
           </a:prstGeom>
-          <a:ln w="7937">
+          <a:ln w="18216">
             <a:solidFill>
-              <a:srgbClr val="1F2937"/>
+              <a:srgbClr val="111A24"/>
             </a:solidFill>
           </a:ln>
           <a:effectLst/>
@@ -6384,9 +6384,9 @@
           <a:prstGeom prst="line">
             <a:avLst/>
           </a:prstGeom>
-          <a:ln w="7937">
+          <a:ln w="18216">
             <a:solidFill>
-              <a:srgbClr val="1F2937"/>
+              <a:srgbClr val="111A24"/>
             </a:solidFill>
           </a:ln>
           <a:effectLst/>
@@ -6420,9 +6420,9 @@
           <a:prstGeom prst="line">
             <a:avLst/>
           </a:prstGeom>
-          <a:ln w="7937">
+          <a:ln w="18216">
             <a:solidFill>
-              <a:srgbClr val="1F2937"/>
+              <a:srgbClr val="111A24"/>
             </a:solidFill>
           </a:ln>
           <a:effectLst/>
@@ -6456,9 +6456,9 @@
           <a:prstGeom prst="line">
             <a:avLst/>
           </a:prstGeom>
-          <a:ln w="7937">
+          <a:ln w="18216">
             <a:solidFill>
-              <a:srgbClr val="1F2937"/>
+              <a:srgbClr val="111A24"/>
             </a:solidFill>
           </a:ln>
           <a:effectLst/>
@@ -6492,9 +6492,9 @@
           <a:prstGeom prst="line">
             <a:avLst/>
           </a:prstGeom>
-          <a:ln w="7937">
+          <a:ln w="18216">
             <a:solidFill>
-              <a:srgbClr val="1F2937"/>
+              <a:srgbClr val="111A24"/>
             </a:solidFill>
           </a:ln>
           <a:effectLst/>
@@ -6528,9 +6528,9 @@
           <a:prstGeom prst="line">
             <a:avLst/>
           </a:prstGeom>
-          <a:ln w="7937">
+          <a:ln w="18216">
             <a:solidFill>
-              <a:srgbClr val="1F2937"/>
+              <a:srgbClr val="111A24"/>
             </a:solidFill>
           </a:ln>
           <a:effectLst/>
@@ -6564,9 +6564,9 @@
           <a:prstGeom prst="line">
             <a:avLst/>
           </a:prstGeom>
-          <a:ln w="7937">
+          <a:ln w="18216">
             <a:solidFill>
-              <a:srgbClr val="1F2937"/>
+              <a:srgbClr val="111A24"/>
             </a:solidFill>
           </a:ln>
           <a:effectLst/>
@@ -6659,11 +6659,11 @@
             </a:avLst>
           </a:prstGeom>
           <a:solidFill>
-            <a:srgbClr val="F7F9FB"/>
+            <a:srgbClr val="F4F7FA"/>
           </a:solidFill>
-          <a:ln w="9524">
+          <a:ln w="12699">
             <a:solidFill>
-              <a:srgbClr val="CBD3DA"/>
+              <a:srgbClr val="AEBBC7"/>
             </a:solidFill>
           </a:ln>
           <a:effectLst/>
@@ -6715,7 +6715,7 @@
           <a:p>
             <a:pPr algn="ctr" fontAlgn="base">
               <a:lnSpc>
-                <a:spcPts val="1734"/>
+                <a:spcPts val="1640"/>
               </a:lnSpc>
               <a:spcBef>
                 <a:spcPts val="0"/>
@@ -6723,9 +6723,9 @@
               <a:spcAft>
                 <a:spcPts val="0"/>
               </a:spcAft>
-              <a:defRPr sz="1187" b="0" i="0" lang="zh-CN" dirty="0">
+              <a:defRPr sz="1128" b="1" i="0" lang="zh-CN" dirty="0">
                 <a:solidFill>
-                  <a:srgbClr val="3F4854"/>
+                  <a:srgbClr val="27303A"/>
                 </a:solidFill>
                 <a:latin typeface="Noto Sans CJK SC"/>
                 <a:ea typeface="Noto Sans CJK SC"/>
@@ -6733,9 +6733,9 @@
               </a:defRPr>
             </a:pPr>
             <a:r>
-              <a:rPr sz="1187" b="0" i="0" lang="zh-CN" dirty="0">
+              <a:rPr sz="1128" b="1" i="0" lang="zh-CN" dirty="0">
                 <a:solidFill>
-                  <a:srgbClr val="3F4854"/>
+                  <a:srgbClr val="27303A"/>
                 </a:solidFill>
                 <a:latin typeface="Noto Sans CJK SC"/>
                 <a:ea typeface="Noto Sans CJK SC"/>
@@ -6763,11 +6763,11 @@
             </a:avLst>
           </a:prstGeom>
           <a:solidFill>
-            <a:srgbClr val="F7F9FB"/>
+            <a:srgbClr val="F4F7FA"/>
           </a:solidFill>
-          <a:ln w="9524">
+          <a:ln w="12699">
             <a:solidFill>
-              <a:srgbClr val="CBD3DA"/>
+              <a:srgbClr val="AEBBC7"/>
             </a:solidFill>
           </a:ln>
           <a:effectLst/>
@@ -6819,7 +6819,7 @@
           <a:p>
             <a:pPr algn="ctr" fontAlgn="base">
               <a:lnSpc>
-                <a:spcPts val="1734"/>
+                <a:spcPts val="1640"/>
               </a:lnSpc>
               <a:spcBef>
                 <a:spcPts val="0"/>
@@ -6827,9 +6827,9 @@
               <a:spcAft>
                 <a:spcPts val="0"/>
               </a:spcAft>
-              <a:defRPr sz="1187" b="0" i="0" lang="zh-CN" dirty="0">
+              <a:defRPr sz="1128" b="1" i="0" lang="zh-CN" dirty="0">
                 <a:solidFill>
-                  <a:srgbClr val="3F4854"/>
+                  <a:srgbClr val="27303A"/>
                 </a:solidFill>
                 <a:latin typeface="Noto Sans CJK SC"/>
                 <a:ea typeface="Noto Sans CJK SC"/>
@@ -6837,9 +6837,9 @@
               </a:defRPr>
             </a:pPr>
             <a:r>
-              <a:rPr sz="1187" b="0" i="0" lang="zh-CN" dirty="0">
+              <a:rPr sz="1128" b="1" i="0" lang="zh-CN" dirty="0">
                 <a:solidFill>
-                  <a:srgbClr val="3F4854"/>
+                  <a:srgbClr val="27303A"/>
                 </a:solidFill>
                 <a:latin typeface="Noto Sans CJK SC"/>
                 <a:ea typeface="Noto Sans CJK SC"/>
@@ -6870,10 +6870,10 @@
             <a:pathLst>
               <a:path w="10000" h="4950">
                 <a:moveTo>
-                  <a:pt x="0" y="1675"/>
+                  <a:pt x="0" y="1375"/>
                 </a:moveTo>
                 <a:lnTo>
-                  <a:pt x="4500" y="1675"/>
+                  <a:pt x="4500" y="1375"/>
                 </a:lnTo>
                 <a:lnTo>
                   <a:pt x="4500" y="0"/>
@@ -6885,17 +6885,17 @@
                   <a:pt x="4500" y="4950"/>
                 </a:lnTo>
                 <a:lnTo>
-                  <a:pt x="4500" y="3275"/>
+                  <a:pt x="4500" y="3575"/>
                 </a:lnTo>
                 <a:lnTo>
-                  <a:pt x="0" y="3275"/>
+                  <a:pt x="0" y="3575"/>
                 </a:lnTo>
                 <a:close/>
               </a:path>
             </a:pathLst>
           </a:custGeom>
           <a:solidFill>
-            <a:srgbClr val="4B5563"/>
+            <a:srgbClr val="3C4753"/>
           </a:solidFill>
           <a:ln>
             <a:noFill/>
@@ -6941,11 +6941,11 @@
             </a:avLst>
           </a:prstGeom>
           <a:solidFill>
-            <a:srgbClr val="F7F9FB"/>
+            <a:srgbClr val="F4F7FA"/>
           </a:solidFill>
-          <a:ln w="9524">
+          <a:ln w="12699">
             <a:solidFill>
-              <a:srgbClr val="CBD3DA"/>
+              <a:srgbClr val="AEBBC7"/>
             </a:solidFill>
           </a:ln>
           <a:effectLst/>
@@ -6997,7 +6997,7 @@
           <a:p>
             <a:pPr algn="ctr" fontAlgn="base">
               <a:lnSpc>
-                <a:spcPts val="1734"/>
+                <a:spcPts val="1640"/>
               </a:lnSpc>
               <a:spcBef>
                 <a:spcPts val="0"/>
@@ -7005,9 +7005,9 @@
               <a:spcAft>
                 <a:spcPts val="0"/>
               </a:spcAft>
-              <a:defRPr sz="1187" b="0" i="0" lang="zh-CN" dirty="0">
+              <a:defRPr sz="1128" b="1" i="0" lang="zh-CN" dirty="0">
                 <a:solidFill>
-                  <a:srgbClr val="3F4854"/>
+                  <a:srgbClr val="27303A"/>
                 </a:solidFill>
                 <a:latin typeface="Noto Sans CJK SC"/>
                 <a:ea typeface="Noto Sans CJK SC"/>
@@ -7015,9 +7015,9 @@
               </a:defRPr>
             </a:pPr>
             <a:r>
-              <a:rPr sz="1187" b="0" i="0" lang="zh-CN" dirty="0">
+              <a:rPr sz="1128" b="1" i="0" lang="zh-CN" dirty="0">
                 <a:solidFill>
-                  <a:srgbClr val="3F4854"/>
+                  <a:srgbClr val="27303A"/>
                 </a:solidFill>
                 <a:latin typeface="Noto Sans CJK SC"/>
                 <a:ea typeface="Noto Sans CJK SC"/>
@@ -7048,10 +7048,10 @@
             <a:pathLst>
               <a:path w="10000" h="4950">
                 <a:moveTo>
-                  <a:pt x="0" y="1675"/>
+                  <a:pt x="0" y="1375"/>
                 </a:moveTo>
                 <a:lnTo>
-                  <a:pt x="4500" y="1675"/>
+                  <a:pt x="4500" y="1375"/>
                 </a:lnTo>
                 <a:lnTo>
                   <a:pt x="4500" y="0"/>
@@ -7063,17 +7063,17 @@
                   <a:pt x="4500" y="4950"/>
                 </a:lnTo>
                 <a:lnTo>
-                  <a:pt x="4500" y="3275"/>
+                  <a:pt x="4500" y="3575"/>
                 </a:lnTo>
                 <a:lnTo>
-                  <a:pt x="0" y="3275"/>
+                  <a:pt x="0" y="3575"/>
                 </a:lnTo>
                 <a:close/>
               </a:path>
             </a:pathLst>
           </a:custGeom>
           <a:solidFill>
-            <a:srgbClr val="4B5563"/>
+            <a:srgbClr val="3C4753"/>
           </a:solidFill>
           <a:ln>
             <a:noFill/>
@@ -7121,7 +7121,7 @@
           <a:solidFill>
             <a:srgbClr val="E6F2F3"/>
           </a:solidFill>
-          <a:ln w="9524">
+          <a:ln w="12699">
             <a:solidFill>
               <a:srgbClr val="1F7F8C"/>
             </a:solidFill>
@@ -7175,7 +7175,7 @@
           <a:p>
             <a:pPr algn="ctr" fontAlgn="base">
               <a:lnSpc>
-                <a:spcPts val="1734"/>
+                <a:spcPts val="1640"/>
               </a:lnSpc>
               <a:spcBef>
                 <a:spcPts val="0"/>
@@ -7183,7 +7183,7 @@
               <a:spcAft>
                 <a:spcPts val="0"/>
               </a:spcAft>
-              <a:defRPr sz="1187" b="1" i="0" lang="zh-CN" dirty="0">
+              <a:defRPr sz="1128" b="1" i="0" lang="zh-CN" dirty="0">
                 <a:solidFill>
                   <a:srgbClr val="0F4F58"/>
                 </a:solidFill>
@@ -7193,7 +7193,7 @@
               </a:defRPr>
             </a:pPr>
             <a:r>
-              <a:rPr sz="1187" b="1" i="0" lang="zh-CN" dirty="0">
+              <a:rPr sz="1128" b="1" i="0" lang="zh-CN" dirty="0">
                 <a:solidFill>
                   <a:srgbClr val="0F4F58"/>
                 </a:solidFill>
@@ -7225,7 +7225,7 @@
           <a:solidFill>
             <a:srgbClr val="FFFFFF"/>
           </a:solidFill>
-          <a:ln w="11112">
+          <a:ln w="15081">
             <a:solidFill>
               <a:srgbClr val="1F7F8C"/>
             </a:solidFill>
@@ -7314,9 +7314,9 @@
           <a:prstGeom prst="line">
             <a:avLst/>
           </a:prstGeom>
-          <a:ln w="7937">
+          <a:ln w="18216">
             <a:solidFill>
-              <a:srgbClr val="1F2937"/>
+              <a:srgbClr val="111A24"/>
             </a:solidFill>
           </a:ln>
           <a:effectLst/>
@@ -7350,9 +7350,9 @@
           <a:prstGeom prst="line">
             <a:avLst/>
           </a:prstGeom>
-          <a:ln w="7937">
+          <a:ln w="18216">
             <a:solidFill>
-              <a:srgbClr val="1F2937"/>
+              <a:srgbClr val="111A24"/>
             </a:solidFill>
           </a:ln>
           <a:effectLst/>
@@ -7386,9 +7386,9 @@
           <a:prstGeom prst="line">
             <a:avLst/>
           </a:prstGeom>
-          <a:ln w="7937">
+          <a:ln w="18216">
             <a:solidFill>
-              <a:srgbClr val="1F2937"/>
+              <a:srgbClr val="111A24"/>
             </a:solidFill>
           </a:ln>
           <a:effectLst/>
@@ -7422,9 +7422,9 @@
           <a:prstGeom prst="line">
             <a:avLst/>
           </a:prstGeom>
-          <a:ln w="7937">
+          <a:ln w="18216">
             <a:solidFill>
-              <a:srgbClr val="1F2937"/>
+              <a:srgbClr val="111A24"/>
             </a:solidFill>
           </a:ln>
           <a:effectLst/>
@@ -7458,9 +7458,9 @@
           <a:prstGeom prst="line">
             <a:avLst/>
           </a:prstGeom>
-          <a:ln w="7937">
+          <a:ln w="18216">
             <a:solidFill>
-              <a:srgbClr val="1F2937"/>
+              <a:srgbClr val="111A24"/>
             </a:solidFill>
           </a:ln>
           <a:effectLst/>
@@ -7494,9 +7494,9 @@
           <a:prstGeom prst="line">
             <a:avLst/>
           </a:prstGeom>
-          <a:ln w="7937">
+          <a:ln w="18216">
             <a:solidFill>
-              <a:srgbClr val="1F2937"/>
+              <a:srgbClr val="111A24"/>
             </a:solidFill>
           </a:ln>
           <a:effectLst/>
@@ -7531,9 +7531,9 @@
             <a:avLst/>
           </a:prstGeom>
           <a:noFill/>
-          <a:ln w="7937">
+          <a:ln w="18216">
             <a:solidFill>
-              <a:srgbClr val="1F2937"/>
+              <a:srgbClr val="111A24"/>
             </a:solidFill>
           </a:ln>
           <a:effectLst/>
@@ -7575,9 +7575,9 @@
             <a:avLst/>
           </a:prstGeom>
           <a:noFill/>
-          <a:ln w="7937">
+          <a:ln w="18216">
             <a:solidFill>
-              <a:srgbClr val="1F2937"/>
+              <a:srgbClr val="111A24"/>
             </a:solidFill>
           </a:ln>
           <a:effectLst/>
@@ -7677,11 +7677,11 @@
             </a:avLst>
           </a:prstGeom>
           <a:solidFill>
-            <a:srgbClr val="F7F9FB"/>
+            <a:srgbClr val="F4F7FA"/>
           </a:solidFill>
-          <a:ln w="9524">
+          <a:ln w="12699">
             <a:solidFill>
-              <a:srgbClr val="CBD3DA"/>
+              <a:srgbClr val="AEBBC7"/>
             </a:solidFill>
           </a:ln>
           <a:effectLst/>
@@ -7733,7 +7733,7 @@
           <a:p>
             <a:pPr algn="ctr" fontAlgn="base">
               <a:lnSpc>
-                <a:spcPts val="1734"/>
+                <a:spcPts val="1640"/>
               </a:lnSpc>
               <a:spcBef>
                 <a:spcPts val="0"/>
@@ -7741,9 +7741,9 @@
               <a:spcAft>
                 <a:spcPts val="0"/>
               </a:spcAft>
-              <a:defRPr sz="1187" b="0" i="0" lang="zh-CN" dirty="0">
+              <a:defRPr sz="1128" b="1" i="0" lang="zh-CN" dirty="0">
                 <a:solidFill>
-                  <a:srgbClr val="3F4854"/>
+                  <a:srgbClr val="27303A"/>
                 </a:solidFill>
                 <a:latin typeface="Noto Sans CJK SC"/>
                 <a:ea typeface="Noto Sans CJK SC"/>
@@ -7751,9 +7751,9 @@
               </a:defRPr>
             </a:pPr>
             <a:r>
-              <a:rPr sz="1187" b="0" i="0" lang="zh-CN" dirty="0">
+              <a:rPr sz="1128" b="1" i="0" lang="zh-CN" dirty="0">
                 <a:solidFill>
-                  <a:srgbClr val="3F4854"/>
+                  <a:srgbClr val="27303A"/>
                 </a:solidFill>
                 <a:latin typeface="Noto Sans CJK SC"/>
                 <a:ea typeface="Noto Sans CJK SC"/>
@@ -7781,11 +7781,11 @@
             </a:avLst>
           </a:prstGeom>
           <a:solidFill>
-            <a:srgbClr val="F7F9FB"/>
+            <a:srgbClr val="F4F7FA"/>
           </a:solidFill>
-          <a:ln w="9524">
+          <a:ln w="12699">
             <a:solidFill>
-              <a:srgbClr val="CBD3DA"/>
+              <a:srgbClr val="AEBBC7"/>
             </a:solidFill>
           </a:ln>
           <a:effectLst/>
@@ -7837,7 +7837,7 @@
           <a:p>
             <a:pPr algn="ctr" fontAlgn="base">
               <a:lnSpc>
-                <a:spcPts val="1734"/>
+                <a:spcPts val="1640"/>
               </a:lnSpc>
               <a:spcBef>
                 <a:spcPts val="0"/>
@@ -7845,9 +7845,9 @@
               <a:spcAft>
                 <a:spcPts val="0"/>
               </a:spcAft>
-              <a:defRPr sz="1187" b="0" i="0" lang="zh-CN" dirty="0">
+              <a:defRPr sz="1128" b="1" i="0" lang="zh-CN" dirty="0">
                 <a:solidFill>
-                  <a:srgbClr val="3F4854"/>
+                  <a:srgbClr val="27303A"/>
                 </a:solidFill>
                 <a:latin typeface="Noto Sans CJK SC"/>
                 <a:ea typeface="Noto Sans CJK SC"/>
@@ -7855,9 +7855,9 @@
               </a:defRPr>
             </a:pPr>
             <a:r>
-              <a:rPr sz="1187" b="0" i="0" lang="zh-CN" dirty="0">
+              <a:rPr sz="1128" b="1" i="0" lang="zh-CN" dirty="0">
                 <a:solidFill>
-                  <a:srgbClr val="3F4854"/>
+                  <a:srgbClr val="27303A"/>
                 </a:solidFill>
                 <a:latin typeface="Noto Sans CJK SC"/>
                 <a:ea typeface="Noto Sans CJK SC"/>
@@ -7888,10 +7888,10 @@
             <a:pathLst>
               <a:path w="10000" h="4950">
                 <a:moveTo>
-                  <a:pt x="0" y="1675"/>
+                  <a:pt x="0" y="1375"/>
                 </a:moveTo>
                 <a:lnTo>
-                  <a:pt x="4500" y="1675"/>
+                  <a:pt x="4500" y="1375"/>
                 </a:lnTo>
                 <a:lnTo>
                   <a:pt x="4500" y="0"/>
@@ -7903,17 +7903,17 @@
                   <a:pt x="4500" y="4950"/>
                 </a:lnTo>
                 <a:lnTo>
-                  <a:pt x="4500" y="3275"/>
+                  <a:pt x="4500" y="3575"/>
                 </a:lnTo>
                 <a:lnTo>
-                  <a:pt x="0" y="3275"/>
+                  <a:pt x="0" y="3575"/>
                 </a:lnTo>
                 <a:close/>
               </a:path>
             </a:pathLst>
           </a:custGeom>
           <a:solidFill>
-            <a:srgbClr val="4B5563"/>
+            <a:srgbClr val="3C4753"/>
           </a:solidFill>
           <a:ln>
             <a:noFill/>
@@ -7959,11 +7959,11 @@
             </a:avLst>
           </a:prstGeom>
           <a:solidFill>
-            <a:srgbClr val="F7F9FB"/>
+            <a:srgbClr val="F4F7FA"/>
           </a:solidFill>
-          <a:ln w="9524">
+          <a:ln w="12699">
             <a:solidFill>
-              <a:srgbClr val="CBD3DA"/>
+              <a:srgbClr val="AEBBC7"/>
             </a:solidFill>
           </a:ln>
           <a:effectLst/>
@@ -8015,7 +8015,7 @@
           <a:p>
             <a:pPr algn="ctr" fontAlgn="base">
               <a:lnSpc>
-                <a:spcPts val="1734"/>
+                <a:spcPts val="1640"/>
               </a:lnSpc>
               <a:spcBef>
                 <a:spcPts val="0"/>
@@ -8023,9 +8023,9 @@
               <a:spcAft>
                 <a:spcPts val="0"/>
               </a:spcAft>
-              <a:defRPr sz="1187" b="0" i="0" lang="zh-CN" dirty="0">
+              <a:defRPr sz="1128" b="1" i="0" lang="zh-CN" dirty="0">
                 <a:solidFill>
-                  <a:srgbClr val="3F4854"/>
+                  <a:srgbClr val="27303A"/>
                 </a:solidFill>
                 <a:latin typeface="Noto Sans CJK SC"/>
                 <a:ea typeface="Noto Sans CJK SC"/>
@@ -8033,9 +8033,9 @@
               </a:defRPr>
             </a:pPr>
             <a:r>
-              <a:rPr sz="1187" b="0" i="0" lang="zh-CN" dirty="0">
+              <a:rPr sz="1128" b="1" i="0" lang="zh-CN" dirty="0">
                 <a:solidFill>
-                  <a:srgbClr val="3F4854"/>
+                  <a:srgbClr val="27303A"/>
                 </a:solidFill>
                 <a:latin typeface="Noto Sans CJK SC"/>
                 <a:ea typeface="Noto Sans CJK SC"/>
@@ -8066,10 +8066,10 @@
             <a:pathLst>
               <a:path w="10000" h="4950">
                 <a:moveTo>
-                  <a:pt x="0" y="1675"/>
+                  <a:pt x="0" y="1375"/>
                 </a:moveTo>
                 <a:lnTo>
-                  <a:pt x="4500" y="1675"/>
+                  <a:pt x="4500" y="1375"/>
                 </a:lnTo>
                 <a:lnTo>
                   <a:pt x="4500" y="0"/>
@@ -8081,17 +8081,17 @@
                   <a:pt x="4500" y="4950"/>
                 </a:lnTo>
                 <a:lnTo>
-                  <a:pt x="4500" y="3275"/>
+                  <a:pt x="4500" y="3575"/>
                 </a:lnTo>
                 <a:lnTo>
-                  <a:pt x="0" y="3275"/>
+                  <a:pt x="0" y="3575"/>
                 </a:lnTo>
                 <a:close/>
               </a:path>
             </a:pathLst>
           </a:custGeom>
           <a:solidFill>
-            <a:srgbClr val="4B5563"/>
+            <a:srgbClr val="3C4753"/>
           </a:solidFill>
           <a:ln>
             <a:noFill/>
@@ -8139,7 +8139,7 @@
           <a:solidFill>
             <a:srgbClr val="E6F2F3"/>
           </a:solidFill>
-          <a:ln w="9524">
+          <a:ln w="12699">
             <a:solidFill>
               <a:srgbClr val="1F7F8C"/>
             </a:solidFill>
@@ -8193,7 +8193,7 @@
           <a:p>
             <a:pPr algn="ctr" fontAlgn="base">
               <a:lnSpc>
-                <a:spcPts val="1734"/>
+                <a:spcPts val="1640"/>
               </a:lnSpc>
               <a:spcBef>
                 <a:spcPts val="0"/>
@@ -8201,7 +8201,7 @@
               <a:spcAft>
                 <a:spcPts val="0"/>
               </a:spcAft>
-              <a:defRPr sz="1187" b="1" i="0" lang="zh-CN" dirty="0">
+              <a:defRPr sz="1128" b="1" i="0" lang="zh-CN" dirty="0">
                 <a:solidFill>
                   <a:srgbClr val="0F4F58"/>
                 </a:solidFill>
@@ -8211,7 +8211,7 @@
               </a:defRPr>
             </a:pPr>
             <a:r>
-              <a:rPr sz="1187" b="1" i="0" lang="zh-CN" dirty="0">
+              <a:rPr sz="1128" b="1" i="0" lang="zh-CN" dirty="0">
                 <a:solidFill>
                   <a:srgbClr val="0F4F58"/>
                 </a:solidFill>
@@ -8243,7 +8243,7 @@
           <a:solidFill>
             <a:srgbClr val="FFFFFF"/>
           </a:solidFill>
-          <a:ln w="11112">
+          <a:ln w="15081">
             <a:solidFill>
               <a:srgbClr val="5B7592"/>
             </a:solidFill>
@@ -8332,9 +8332,9 @@
           <a:prstGeom prst="line">
             <a:avLst/>
           </a:prstGeom>
-          <a:ln w="7937">
+          <a:ln w="18216">
             <a:solidFill>
-              <a:srgbClr val="1F2937"/>
+              <a:srgbClr val="111A24"/>
             </a:solidFill>
           </a:ln>
           <a:effectLst/>
@@ -8368,9 +8368,9 @@
           <a:prstGeom prst="line">
             <a:avLst/>
           </a:prstGeom>
-          <a:ln w="7937">
+          <a:ln w="18216">
             <a:solidFill>
-              <a:srgbClr val="1F2937"/>
+              <a:srgbClr val="111A24"/>
             </a:solidFill>
           </a:ln>
           <a:effectLst/>
@@ -8404,9 +8404,9 @@
           <a:prstGeom prst="line">
             <a:avLst/>
           </a:prstGeom>
-          <a:ln w="7937">
+          <a:ln w="18216">
             <a:solidFill>
-              <a:srgbClr val="1F2937"/>
+              <a:srgbClr val="111A24"/>
             </a:solidFill>
           </a:ln>
           <a:effectLst/>
@@ -8440,9 +8440,9 @@
           <a:prstGeom prst="line">
             <a:avLst/>
           </a:prstGeom>
-          <a:ln w="7937">
+          <a:ln w="18216">
             <a:solidFill>
-              <a:srgbClr val="1F2937"/>
+              <a:srgbClr val="111A24"/>
             </a:solidFill>
           </a:ln>
           <a:effectLst/>
@@ -8476,9 +8476,9 @@
           <a:prstGeom prst="line">
             <a:avLst/>
           </a:prstGeom>
-          <a:ln w="7937">
+          <a:ln w="18216">
             <a:solidFill>
-              <a:srgbClr val="1F2937"/>
+              <a:srgbClr val="111A24"/>
             </a:solidFill>
           </a:ln>
           <a:effectLst/>
@@ -8512,9 +8512,9 @@
           <a:prstGeom prst="line">
             <a:avLst/>
           </a:prstGeom>
-          <a:ln w="7937">
+          <a:ln w="18216">
             <a:solidFill>
-              <a:srgbClr val="1F2937"/>
+              <a:srgbClr val="111A24"/>
             </a:solidFill>
           </a:ln>
           <a:effectLst/>
@@ -8548,9 +8548,9 @@
           <a:prstGeom prst="line">
             <a:avLst/>
           </a:prstGeom>
-          <a:ln w="7937">
+          <a:ln w="18216">
             <a:solidFill>
-              <a:srgbClr val="1F2937"/>
+              <a:srgbClr val="111A24"/>
             </a:solidFill>
           </a:ln>
           <a:effectLst/>
@@ -8584,9 +8584,9 @@
           <a:prstGeom prst="line">
             <a:avLst/>
           </a:prstGeom>
-          <a:ln w="7937">
+          <a:ln w="18216">
             <a:solidFill>
-              <a:srgbClr val="1F2937"/>
+              <a:srgbClr val="111A24"/>
             </a:solidFill>
           </a:ln>
           <a:effectLst/>
@@ -8620,9 +8620,9 @@
           <a:prstGeom prst="line">
             <a:avLst/>
           </a:prstGeom>
-          <a:ln w="7937">
+          <a:ln w="18216">
             <a:solidFill>
-              <a:srgbClr val="1F2937"/>
+              <a:srgbClr val="111A24"/>
             </a:solidFill>
           </a:ln>
           <a:effectLst/>
@@ -8656,9 +8656,9 @@
           <a:prstGeom prst="line">
             <a:avLst/>
           </a:prstGeom>
-          <a:ln w="7937">
+          <a:ln w="18216">
             <a:solidFill>
-              <a:srgbClr val="1F2937"/>
+              <a:srgbClr val="111A24"/>
             </a:solidFill>
           </a:ln>
           <a:effectLst/>
@@ -8692,9 +8692,9 @@
           <a:prstGeom prst="line">
             <a:avLst/>
           </a:prstGeom>
-          <a:ln w="7937">
+          <a:ln w="18216">
             <a:solidFill>
-              <a:srgbClr val="1F2937"/>
+              <a:srgbClr val="111A24"/>
             </a:solidFill>
           </a:ln>
           <a:effectLst/>
@@ -8728,9 +8728,9 @@
           <a:prstGeom prst="line">
             <a:avLst/>
           </a:prstGeom>
-          <a:ln w="7937">
+          <a:ln w="18216">
             <a:solidFill>
-              <a:srgbClr val="1F2937"/>
+              <a:srgbClr val="111A24"/>
             </a:solidFill>
           </a:ln>
           <a:effectLst/>
@@ -8823,11 +8823,11 @@
             </a:avLst>
           </a:prstGeom>
           <a:solidFill>
-            <a:srgbClr val="F7F9FB"/>
+            <a:srgbClr val="F4F7FA"/>
           </a:solidFill>
-          <a:ln w="9524">
+          <a:ln w="12699">
             <a:solidFill>
-              <a:srgbClr val="CBD3DA"/>
+              <a:srgbClr val="AEBBC7"/>
             </a:solidFill>
           </a:ln>
           <a:effectLst/>
@@ -8879,7 +8879,7 @@
           <a:p>
             <a:pPr algn="ctr" fontAlgn="base">
               <a:lnSpc>
-                <a:spcPts val="1312"/>
+                <a:spcPts val="1265"/>
               </a:lnSpc>
               <a:spcBef>
                 <a:spcPts val="0"/>
@@ -8887,9 +8887,9 @@
               <a:spcAft>
                 <a:spcPts val="0"/>
               </a:spcAft>
-              <a:defRPr sz="1124" b="0" i="0" lang="zh-CN" dirty="0">
+              <a:defRPr sz="1069" b="1" i="0" lang="zh-CN" dirty="0">
                 <a:solidFill>
-                  <a:srgbClr val="3F4854"/>
+                  <a:srgbClr val="27303A"/>
                 </a:solidFill>
                 <a:latin typeface="DejaVu Sans"/>
                 <a:ea typeface="DejaVu Sans"/>
@@ -8897,9 +8897,9 @@
               </a:defRPr>
             </a:pPr>
             <a:r>
-              <a:rPr sz="1124" b="0" i="0" lang="zh-CN" dirty="0">
+              <a:rPr sz="1069" b="1" i="0" lang="zh-CN" dirty="0">
                 <a:solidFill>
-                  <a:srgbClr val="3F4854"/>
+                  <a:srgbClr val="27303A"/>
                 </a:solidFill>
                 <a:latin typeface="DejaVu Sans"/>
                 <a:ea typeface="DejaVu Sans"/>
@@ -8927,11 +8927,11 @@
             </a:avLst>
           </a:prstGeom>
           <a:solidFill>
-            <a:srgbClr val="F7F9FB"/>
+            <a:srgbClr val="F4F7FA"/>
           </a:solidFill>
-          <a:ln w="9524">
+          <a:ln w="12699">
             <a:solidFill>
-              <a:srgbClr val="CBD3DA"/>
+              <a:srgbClr val="AEBBC7"/>
             </a:solidFill>
           </a:ln>
           <a:effectLst/>
@@ -8983,7 +8983,7 @@
           <a:p>
             <a:pPr algn="ctr" fontAlgn="base">
               <a:lnSpc>
-                <a:spcPts val="1312"/>
+                <a:spcPts val="1265"/>
               </a:lnSpc>
               <a:spcBef>
                 <a:spcPts val="0"/>
@@ -8991,9 +8991,9 @@
               <a:spcAft>
                 <a:spcPts val="0"/>
               </a:spcAft>
-              <a:defRPr sz="1124" b="0" i="0" lang="zh-CN" dirty="0">
+              <a:defRPr sz="1069" b="1" i="0" lang="zh-CN" dirty="0">
                 <a:solidFill>
-                  <a:srgbClr val="3F4854"/>
+                  <a:srgbClr val="27303A"/>
                 </a:solidFill>
                 <a:latin typeface="DejaVu Sans"/>
                 <a:ea typeface="DejaVu Sans"/>
@@ -9001,9 +9001,9 @@
               </a:defRPr>
             </a:pPr>
             <a:r>
-              <a:rPr sz="1124" b="0" i="0" lang="zh-CN" dirty="0">
+              <a:rPr sz="1069" b="1" i="0" lang="zh-CN" dirty="0">
                 <a:solidFill>
-                  <a:srgbClr val="3F4854"/>
+                  <a:srgbClr val="27303A"/>
                 </a:solidFill>
                 <a:latin typeface="DejaVu Sans"/>
                 <a:ea typeface="DejaVu Sans"/>
@@ -9031,11 +9031,11 @@
             </a:avLst>
           </a:prstGeom>
           <a:solidFill>
-            <a:srgbClr val="F7F9FB"/>
+            <a:srgbClr val="F4F7FA"/>
           </a:solidFill>
-          <a:ln w="9524">
+          <a:ln w="12699">
             <a:solidFill>
-              <a:srgbClr val="CBD3DA"/>
+              <a:srgbClr val="AEBBC7"/>
             </a:solidFill>
           </a:ln>
           <a:effectLst/>
@@ -9087,7 +9087,7 @@
           <a:p>
             <a:pPr algn="ctr" fontAlgn="base">
               <a:lnSpc>
-                <a:spcPts val="1312"/>
+                <a:spcPts val="1265"/>
               </a:lnSpc>
               <a:spcBef>
                 <a:spcPts val="0"/>
@@ -9095,9 +9095,9 @@
               <a:spcAft>
                 <a:spcPts val="0"/>
               </a:spcAft>
-              <a:defRPr sz="1124" b="0" i="0" lang="zh-CN" dirty="0">
+              <a:defRPr sz="1069" b="1" i="0" lang="zh-CN" dirty="0">
                 <a:solidFill>
-                  <a:srgbClr val="3F4854"/>
+                  <a:srgbClr val="27303A"/>
                 </a:solidFill>
                 <a:latin typeface="DejaVu Sans"/>
                 <a:ea typeface="DejaVu Sans"/>
@@ -9105,9 +9105,9 @@
               </a:defRPr>
             </a:pPr>
             <a:r>
-              <a:rPr sz="1124" b="0" i="0" lang="zh-CN" dirty="0">
+              <a:rPr sz="1069" b="1" i="0" lang="zh-CN" dirty="0">
                 <a:solidFill>
-                  <a:srgbClr val="3F4854"/>
+                  <a:srgbClr val="27303A"/>
                 </a:solidFill>
                 <a:latin typeface="DejaVu Sans"/>
                 <a:ea typeface="DejaVu Sans"/>
@@ -9135,11 +9135,11 @@
             </a:avLst>
           </a:prstGeom>
           <a:solidFill>
-            <a:srgbClr val="F7F9FB"/>
+            <a:srgbClr val="F4F7FA"/>
           </a:solidFill>
-          <a:ln w="9524">
+          <a:ln w="12699">
             <a:solidFill>
-              <a:srgbClr val="CBD3DA"/>
+              <a:srgbClr val="AEBBC7"/>
             </a:solidFill>
           </a:ln>
           <a:effectLst/>
@@ -9191,7 +9191,7 @@
           <a:p>
             <a:pPr algn="ctr" fontAlgn="base">
               <a:lnSpc>
-                <a:spcPts val="1640"/>
+                <a:spcPts val="1562"/>
               </a:lnSpc>
               <a:spcBef>
                 <a:spcPts val="0"/>
@@ -9199,9 +9199,9 @@
               <a:spcAft>
                 <a:spcPts val="0"/>
               </a:spcAft>
-              <a:defRPr sz="1124" b="0" i="0" lang="zh-CN" dirty="0">
+              <a:defRPr sz="1069" b="1" i="0" lang="zh-CN" dirty="0">
                 <a:solidFill>
-                  <a:srgbClr val="3F4854"/>
+                  <a:srgbClr val="27303A"/>
                 </a:solidFill>
                 <a:latin typeface="Noto Sans CJK SC"/>
                 <a:ea typeface="Noto Sans CJK SC"/>
@@ -9209,9 +9209,9 @@
               </a:defRPr>
             </a:pPr>
             <a:r>
-              <a:rPr sz="1124" b="0" i="0" lang="zh-CN" dirty="0">
+              <a:rPr sz="1069" b="1" i="0" lang="zh-CN" dirty="0">
                 <a:solidFill>
-                  <a:srgbClr val="3F4854"/>
+                  <a:srgbClr val="27303A"/>
                 </a:solidFill>
                 <a:latin typeface="Noto Sans CJK SC"/>
                 <a:ea typeface="Noto Sans CJK SC"/>
@@ -9241,7 +9241,7 @@
           <a:solidFill>
             <a:srgbClr val="FFFFFF"/>
           </a:solidFill>
-          <a:ln w="11112">
+          <a:ln w="15081">
             <a:solidFill>
               <a:srgbClr val="C48A24"/>
             </a:solidFill>
@@ -9349,7 +9349,7 @@
               <a:spcAft>
                 <a:spcPts val="0"/>
               </a:spcAft>
-              <a:defRPr sz="1312" b="0" i="0" lang="zh-CN" dirty="0">
+              <a:defRPr sz="1312" b="1" i="0" lang="zh-CN" dirty="0">
                 <a:solidFill>
                   <a:srgbClr val="7A5410"/>
                 </a:solidFill>
@@ -9359,7 +9359,7 @@
               </a:defRPr>
             </a:pPr>
             <a:r>
-              <a:rPr sz="1312" b="0" i="0" lang="zh-CN" dirty="0">
+              <a:rPr sz="1312" b="1" i="0" lang="zh-CN" dirty="0">
                 <a:solidFill>
                   <a:srgbClr val="7A5410"/>
                 </a:solidFill>
@@ -9370,7 +9370,7 @@
               <a:t>Zn </a:t>
             </a:r>
             <a:r>
-              <a:rPr sz="1312" b="0" i="0" lang="zh-CN" dirty="0">
+              <a:rPr sz="1312" b="1" i="0" lang="zh-CN" dirty="0">
                 <a:solidFill>
                   <a:srgbClr val="7A5410"/>
                 </a:solidFill>
@@ -9402,7 +9402,7 @@
           <a:solidFill>
             <a:srgbClr val="FFFFFF"/>
           </a:solidFill>
-          <a:ln w="11112">
+          <a:ln w="15081">
             <a:solidFill>
               <a:srgbClr val="C48A24"/>
             </a:solidFill>
@@ -9510,7 +9510,7 @@
               <a:spcAft>
                 <a:spcPts val="0"/>
               </a:spcAft>
-              <a:defRPr sz="1312" b="0" i="0" lang="zh-CN" dirty="0">
+              <a:defRPr sz="1312" b="1" i="0" lang="zh-CN" dirty="0">
                 <a:solidFill>
                   <a:srgbClr val="7A5410"/>
                 </a:solidFill>
@@ -9520,7 +9520,7 @@
               </a:defRPr>
             </a:pPr>
             <a:r>
-              <a:rPr sz="1312" b="0" i="0" lang="zh-CN" dirty="0">
+              <a:rPr sz="1312" b="1" i="0" lang="zh-CN" dirty="0">
                 <a:solidFill>
                   <a:srgbClr val="7A5410"/>
                 </a:solidFill>
@@ -9552,7 +9552,7 @@
           <a:solidFill>
             <a:srgbClr val="FFFFFF"/>
           </a:solidFill>
-          <a:ln w="11112">
+          <a:ln w="15081">
             <a:solidFill>
               <a:srgbClr val="C48A24"/>
             </a:solidFill>
@@ -9660,7 +9660,7 @@
               <a:spcAft>
                 <a:spcPts val="0"/>
               </a:spcAft>
-              <a:defRPr sz="1312" b="0" i="0" lang="zh-CN" dirty="0">
+              <a:defRPr sz="1312" b="1" i="0" lang="zh-CN" dirty="0">
                 <a:solidFill>
                   <a:srgbClr val="7A5410"/>
                 </a:solidFill>
@@ -9670,7 +9670,7 @@
               </a:defRPr>
             </a:pPr>
             <a:r>
-              <a:rPr sz="1312" b="0" i="0" lang="zh-CN" dirty="0">
+              <a:rPr sz="1312" b="1" i="0" lang="zh-CN" dirty="0">
                 <a:solidFill>
                   <a:srgbClr val="7A5410"/>
                 </a:solidFill>
@@ -9691,8 +9691,8 @@
         </p:nvSpPr>
         <p:spPr>
           <a:xfrm>
-            <a:off x="4079875" y="1730375"/>
-            <a:ext cx="333375" cy="79375"/>
+            <a:off x="4079875" y="1722437"/>
+            <a:ext cx="333375" cy="95250"/>
           </a:xfrm>
           <a:custGeom>
             <a:avLst/>
@@ -9701,34 +9701,34 @@
             <a:cxnLst/>
             <a:rect l="l" t="t" r="r" b="b"/>
             <a:pathLst>
-              <a:path w="42000" h="10000">
+              <a:path w="42000" h="12000">
                 <a:moveTo>
-                  <a:pt x="0" y="4100"/>
+                  <a:pt x="0" y="4750"/>
                 </a:moveTo>
                 <a:lnTo>
-                  <a:pt x="30000" y="4100"/>
+                  <a:pt x="27000" y="4750"/>
                 </a:lnTo>
                 <a:lnTo>
-                  <a:pt x="30000" y="0"/>
+                  <a:pt x="27000" y="0"/>
                 </a:lnTo>
                 <a:lnTo>
-                  <a:pt x="42000" y="5000"/>
+                  <a:pt x="42000" y="6000"/>
                 </a:lnTo>
                 <a:lnTo>
-                  <a:pt x="30000" y="10000"/>
+                  <a:pt x="27000" y="12000"/>
                 </a:lnTo>
                 <a:lnTo>
-                  <a:pt x="30000" y="5900"/>
+                  <a:pt x="27000" y="7250"/>
                 </a:lnTo>
                 <a:lnTo>
-                  <a:pt x="0" y="5900"/>
+                  <a:pt x="0" y="7250"/>
                 </a:lnTo>
                 <a:close/>
               </a:path>
             </a:pathLst>
           </a:custGeom>
           <a:solidFill>
-            <a:srgbClr val="4B5563"/>
+            <a:srgbClr val="3C4753"/>
           </a:solidFill>
           <a:ln>
             <a:noFill/>
@@ -9765,8 +9765,8 @@
         </p:nvSpPr>
         <p:spPr>
           <a:xfrm>
-            <a:off x="8048625" y="1730375"/>
-            <a:ext cx="333375" cy="79375"/>
+            <a:off x="8048625" y="1722437"/>
+            <a:ext cx="333375" cy="95250"/>
           </a:xfrm>
           <a:custGeom>
             <a:avLst/>
@@ -9775,34 +9775,34 @@
             <a:cxnLst/>
             <a:rect l="l" t="t" r="r" b="b"/>
             <a:pathLst>
-              <a:path w="42000" h="10000">
+              <a:path w="42000" h="12000">
                 <a:moveTo>
-                  <a:pt x="0" y="4100"/>
+                  <a:pt x="0" y="4750"/>
                 </a:moveTo>
                 <a:lnTo>
-                  <a:pt x="30000" y="4100"/>
+                  <a:pt x="27000" y="4750"/>
                 </a:lnTo>
                 <a:lnTo>
-                  <a:pt x="30000" y="0"/>
+                  <a:pt x="27000" y="0"/>
                 </a:lnTo>
                 <a:lnTo>
-                  <a:pt x="42000" y="5000"/>
+                  <a:pt x="42000" y="6000"/>
                 </a:lnTo>
                 <a:lnTo>
-                  <a:pt x="30000" y="10000"/>
+                  <a:pt x="27000" y="12000"/>
                 </a:lnTo>
                 <a:lnTo>
-                  <a:pt x="30000" y="5900"/>
+                  <a:pt x="27000" y="7250"/>
                 </a:lnTo>
                 <a:lnTo>
-                  <a:pt x="0" y="5900"/>
+                  <a:pt x="0" y="7250"/>
                 </a:lnTo>
                 <a:close/>
               </a:path>
             </a:pathLst>
           </a:custGeom>
           <a:solidFill>
-            <a:srgbClr val="4B5563"/>
+            <a:srgbClr val="3C4753"/>
           </a:solidFill>
           <a:ln>
             <a:noFill/>
@@ -9845,9 +9845,9 @@
           <a:prstGeom prst="line">
             <a:avLst/>
           </a:prstGeom>
-          <a:ln w="14287">
+          <a:ln w="19843">
             <a:solidFill>
-              <a:srgbClr val="4B5563"/>
+              <a:srgbClr val="3C4753"/>
             </a:solidFill>
           </a:ln>
           <a:effectLst/>
@@ -9881,9 +9881,9 @@
           <a:prstGeom prst="line">
             <a:avLst/>
           </a:prstGeom>
-          <a:ln w="14287">
+          <a:ln w="19843">
             <a:solidFill>
-              <a:srgbClr val="4B5563"/>
+              <a:srgbClr val="3C4753"/>
             </a:solidFill>
           </a:ln>
           <a:effectLst/>
@@ -9911,8 +9911,8 @@
         </p:nvSpPr>
         <p:spPr>
           <a:xfrm>
-            <a:off x="2897187" y="3524250"/>
-            <a:ext cx="79375" cy="254000"/>
+            <a:off x="2889250" y="3524250"/>
+            <a:ext cx="95250" cy="254000"/>
           </a:xfrm>
           <a:custGeom>
             <a:avLst/>
@@ -9921,34 +9921,34 @@
             <a:cxnLst/>
             <a:rect l="l" t="t" r="r" b="b"/>
             <a:pathLst>
-              <a:path w="10000" h="32000">
+              <a:path w="12000" h="32000">
                 <a:moveTo>
-                  <a:pt x="5900" y="0"/>
+                  <a:pt x="7250" y="0"/>
                 </a:moveTo>
                 <a:lnTo>
-                  <a:pt x="5900" y="20000"/>
+                  <a:pt x="7250" y="17000"/>
                 </a:lnTo>
                 <a:lnTo>
-                  <a:pt x="10000" y="20000"/>
+                  <a:pt x="12000" y="17000"/>
                 </a:lnTo>
                 <a:lnTo>
-                  <a:pt x="5000" y="32000"/>
+                  <a:pt x="6000" y="32000"/>
                 </a:lnTo>
                 <a:lnTo>
-                  <a:pt x="0" y="20000"/>
+                  <a:pt x="0" y="17000"/>
                 </a:lnTo>
                 <a:lnTo>
-                  <a:pt x="4100" y="20000"/>
+                  <a:pt x="4750" y="17000"/>
                 </a:lnTo>
                 <a:lnTo>
-                  <a:pt x="4100" y="0"/>
+                  <a:pt x="4750" y="0"/>
                 </a:lnTo>
                 <a:close/>
               </a:path>
             </a:pathLst>
           </a:custGeom>
           <a:solidFill>
-            <a:srgbClr val="4B5563"/>
+            <a:srgbClr val="3C4753"/>
           </a:solidFill>
           <a:ln>
             <a:noFill/>
@@ -9985,8 +9985,8 @@
         </p:nvSpPr>
         <p:spPr>
           <a:xfrm>
-            <a:off x="8929687" y="3524250"/>
-            <a:ext cx="79375" cy="254000"/>
+            <a:off x="8921750" y="3524250"/>
+            <a:ext cx="95250" cy="254000"/>
           </a:xfrm>
           <a:custGeom>
             <a:avLst/>
@@ -9995,34 +9995,34 @@
             <a:cxnLst/>
             <a:rect l="l" t="t" r="r" b="b"/>
             <a:pathLst>
-              <a:path w="10000" h="32000">
+              <a:path w="12000" h="32000">
                 <a:moveTo>
-                  <a:pt x="5900" y="0"/>
+                  <a:pt x="7250" y="0"/>
                 </a:moveTo>
                 <a:lnTo>
-                  <a:pt x="5900" y="20000"/>
+                  <a:pt x="7250" y="17000"/>
                 </a:lnTo>
                 <a:lnTo>
-                  <a:pt x="10000" y="20000"/>
+                  <a:pt x="12000" y="17000"/>
                 </a:lnTo>
                 <a:lnTo>
-                  <a:pt x="5000" y="32000"/>
+                  <a:pt x="6000" y="32000"/>
                 </a:lnTo>
                 <a:lnTo>
-                  <a:pt x="0" y="20000"/>
+                  <a:pt x="0" y="17000"/>
                 </a:lnTo>
                 <a:lnTo>
-                  <a:pt x="4100" y="20000"/>
+                  <a:pt x="4750" y="17000"/>
                 </a:lnTo>
                 <a:lnTo>
-                  <a:pt x="4100" y="0"/>
+                  <a:pt x="4750" y="0"/>
                 </a:lnTo>
                 <a:close/>
               </a:path>
             </a:pathLst>
           </a:custGeom>
           <a:solidFill>
-            <a:srgbClr val="4B5563"/>
+            <a:srgbClr val="3C4753"/>
           </a:solidFill>
           <a:ln>
             <a:noFill/>
@@ -10065,9 +10065,9 @@
           <a:prstGeom prst="line">
             <a:avLst/>
           </a:prstGeom>
-          <a:ln w="14287">
+          <a:ln w="19843">
             <a:solidFill>
-              <a:srgbClr val="4B5563"/>
+              <a:srgbClr val="3C4753"/>
             </a:solidFill>
           </a:ln>
           <a:effectLst/>
@@ -10101,9 +10101,9 @@
           <a:prstGeom prst="line">
             <a:avLst/>
           </a:prstGeom>
-          <a:ln w="14287">
+          <a:ln w="19843">
             <a:solidFill>
-              <a:srgbClr val="4B5563"/>
+              <a:srgbClr val="3C4753"/>
             </a:solidFill>
           </a:ln>
           <a:effectLst/>
@@ -10137,9 +10137,9 @@
           <a:prstGeom prst="line">
             <a:avLst/>
           </a:prstGeom>
-          <a:ln w="14287">
+          <a:ln w="19843">
             <a:solidFill>
-              <a:srgbClr val="4B5563"/>
+              <a:srgbClr val="3C4753"/>
             </a:solidFill>
           </a:ln>
           <a:effectLst/>
@@ -10167,8 +10167,8 @@
         </p:nvSpPr>
         <p:spPr>
           <a:xfrm>
-            <a:off x="6072187" y="5254625"/>
-            <a:ext cx="79375" cy="317500"/>
+            <a:off x="6064250" y="5254625"/>
+            <a:ext cx="95250" cy="317500"/>
           </a:xfrm>
           <a:custGeom>
             <a:avLst/>
@@ -10177,34 +10177,34 @@
             <a:cxnLst/>
             <a:rect l="l" t="t" r="r" b="b"/>
             <a:pathLst>
-              <a:path w="10000" h="40000">
+              <a:path w="12000" h="40000">
                 <a:moveTo>
-                  <a:pt x="5900" y="0"/>
+                  <a:pt x="7250" y="0"/>
                 </a:moveTo>
                 <a:lnTo>
-                  <a:pt x="5900" y="28000"/>
+                  <a:pt x="7250" y="25000"/>
                 </a:lnTo>
                 <a:lnTo>
-                  <a:pt x="10000" y="28000"/>
+                  <a:pt x="12000" y="25000"/>
                 </a:lnTo>
                 <a:lnTo>
-                  <a:pt x="5000" y="40000"/>
+                  <a:pt x="6000" y="40000"/>
                 </a:lnTo>
                 <a:lnTo>
-                  <a:pt x="0" y="28000"/>
+                  <a:pt x="0" y="25000"/>
                 </a:lnTo>
                 <a:lnTo>
-                  <a:pt x="4100" y="28000"/>
+                  <a:pt x="4750" y="25000"/>
                 </a:lnTo>
                 <a:lnTo>
-                  <a:pt x="4100" y="0"/>
+                  <a:pt x="4750" y="0"/>
                 </a:lnTo>
                 <a:close/>
               </a:path>
             </a:pathLst>
           </a:custGeom>
           <a:solidFill>
-            <a:srgbClr val="4B5563"/>
+            <a:srgbClr val="3C4753"/>
           </a:solidFill>
           <a:ln>
             <a:noFill/>
@@ -10247,12 +10247,12 @@
           <a:prstGeom prst="line">
             <a:avLst/>
           </a:prstGeom>
-          <a:ln w="14287">
+          <a:ln w="19843">
             <a:solidFill>
-              <a:srgbClr val="4B5563"/>
+              <a:srgbClr val="3C4753"/>
             </a:solidFill>
             <a:custDash>
-              <a:ds d="611111" sp="388889"/>
+              <a:ds d="440000" sp="280000"/>
             </a:custDash>
           </a:ln>
           <a:effectLst/>
@@ -10286,12 +10286,12 @@
           <a:prstGeom prst="line">
             <a:avLst/>
           </a:prstGeom>
-          <a:ln w="14287">
+          <a:ln w="19843">
             <a:solidFill>
-              <a:srgbClr val="4B5563"/>
+              <a:srgbClr val="3C4753"/>
             </a:solidFill>
             <a:custDash>
-              <a:ds d="611111" sp="388889"/>
+              <a:ds d="440000" sp="280000"/>
             </a:custDash>
           </a:ln>
           <a:effectLst/>
@@ -10325,12 +10325,12 @@
           <a:prstGeom prst="line">
             <a:avLst/>
           </a:prstGeom>
-          <a:ln w="14287">
+          <a:ln w="19843">
             <a:solidFill>
-              <a:srgbClr val="4B5563"/>
+              <a:srgbClr val="3C4753"/>
             </a:solidFill>
             <a:custDash>
-              <a:ds d="611111" sp="388889"/>
+              <a:ds d="440000" sp="280000"/>
             </a:custDash>
           </a:ln>
           <a:effectLst/>
@@ -10364,12 +10364,12 @@
           <a:prstGeom prst="line">
             <a:avLst/>
           </a:prstGeom>
-          <a:ln w="14287">
+          <a:ln w="19843">
             <a:solidFill>
-              <a:srgbClr val="4B5563"/>
+              <a:srgbClr val="3C4753"/>
             </a:solidFill>
             <a:custDash>
-              <a:ds d="611111" sp="388889"/>
+              <a:ds d="440000" sp="280000"/>
             </a:custDash>
             <a:tailEnd type="triangle"/>
           </a:ln>
@@ -10409,7 +10409,7 @@
           <a:solidFill>
             <a:srgbClr val="FFFFFF"/>
           </a:solidFill>
-          <a:ln w="8731">
+          <a:ln w="12699">
             <a:solidFill>
               <a:srgbClr val="CBD3DA"/>
             </a:solidFill>
@@ -10471,9 +10471,9 @@
               <a:spcAft>
                 <a:spcPts val="0"/>
               </a:spcAft>
-              <a:defRPr sz="1187" b="0" i="0" lang="zh-CN" dirty="0">
+              <a:defRPr sz="1187" b="1" i="0" lang="zh-CN" dirty="0">
                 <a:solidFill>
-                  <a:srgbClr val="3F4854"/>
+                  <a:srgbClr val="27303A"/>
                 </a:solidFill>
                 <a:latin typeface="Noto Sans CJK SC"/>
                 <a:ea typeface="Noto Sans CJK SC"/>
@@ -10481,9 +10481,9 @@
               </a:defRPr>
             </a:pPr>
             <a:r>
-              <a:rPr sz="1187" b="0" i="0" lang="zh-CN" dirty="0">
+              <a:rPr sz="1187" b="1" i="0" lang="zh-CN" dirty="0">
                 <a:solidFill>
-                  <a:srgbClr val="3F4854"/>
+                  <a:srgbClr val="27303A"/>
                 </a:solidFill>
                 <a:latin typeface="Noto Sans CJK SC"/>
                 <a:ea typeface="Noto Sans CJK SC"/>

--- a/media/figstudio/fig03_roadmap/fig03_research_roadmap_editable.pptx
+++ b/media/figstudio/fig03_roadmap/fig03_research_roadmap_editable.pptx
@@ -4432,7 +4432,7 @@
                 <a:ea typeface="Noto Sans CJK SC"/>
                 <a:cs typeface="Noto Sans CJK SC"/>
               </a:rPr>
-              <a:t>谱系</a:t>
+              <a:t>系列</a:t>
             </a:r>
           </a:p>
         </p:txBody>
@@ -4547,7 +4547,7 @@
                 <a:ea typeface="Noto Sans CJK SC"/>
                 <a:cs typeface="Noto Sans CJK SC"/>
               </a:rPr>
-              <a:t>结构近邻</a:t>
+              <a:t>结构相关化合物</a:t>
             </a:r>
           </a:p>
         </p:txBody>
@@ -6637,7 +6637,7 @@
                 <a:ea typeface="Noto Sans CJK SC"/>
                 <a:cs typeface="Noto Sans CJK SC"/>
               </a:rPr>
-              <a:t>固相成相</a:t>
+              <a:t>固相反应</a:t>
             </a:r>
           </a:p>
         </p:txBody>
@@ -7201,7 +7201,7 @@
                 <a:ea typeface="Noto Sans CJK SC"/>
                 <a:cs typeface="Noto Sans CJK SC"/>
               </a:rPr>
-              <a:t>批量相区与相纯度</a:t>
+              <a:t>块体相区与相纯度</a:t>
             </a:r>
           </a:p>
         </p:txBody>
@@ -7655,7 +7655,7 @@
                 <a:ea typeface="Noto Sans CJK SC"/>
                 <a:cs typeface="Noto Sans CJK SC"/>
               </a:rPr>
-              <a:t>高温溶液长晶</a:t>
+              <a:t>高温溶液法晶体生长</a:t>
             </a:r>
           </a:p>
         </p:txBody>
@@ -8041,7 +8041,7 @@
                 <a:ea typeface="Noto Sans CJK SC"/>
                 <a:cs typeface="Noto Sans CJK SC"/>
               </a:rPr>
-              <a:t>慢冷</a:t>
+              <a:t>缓冷</a:t>
             </a:r>
           </a:p>
         </p:txBody>
